--- a/docs/ピッチ/Overlai_本選ピッチ.pptx
+++ b/docs/ピッチ/Overlai_本選ピッチ.pptx
@@ -4300,8 +4300,8 @@
         </p:nvSpPr>
         <p:spPr>
           <a:xfrm>
-            <a:off x="822960" y="914400"/>
-            <a:ext cx="5486400" cy="457200"/>
+            <a:off x="822960" y="822960"/>
+            <a:ext cx="7315200" cy="457200"/>
           </a:xfrm>
           <a:prstGeom prst="rect">
             <a:avLst/>
@@ -4341,8 +4341,8 @@
         </p:nvSpPr>
         <p:spPr>
           <a:xfrm>
-            <a:off x="822960" y="1371600"/>
-            <a:ext cx="10058400" cy="457200"/>
+            <a:off x="822960" y="1280160"/>
+            <a:ext cx="10515600" cy="457200"/>
           </a:xfrm>
           <a:prstGeom prst="rect">
             <a:avLst/>
@@ -4382,8 +4382,8 @@
         </p:nvSpPr>
         <p:spPr>
           <a:xfrm>
-            <a:off x="822960" y="2240280"/>
-            <a:ext cx="10515600" cy="548640"/>
+            <a:off x="822960" y="1920240"/>
+            <a:ext cx="10515600" cy="1097280"/>
           </a:xfrm>
           <a:prstGeom prst="rect">
             <a:avLst/>
@@ -4402,7 +4402,7 @@
               </a:lnSpc>
             </a:pPr>
             <a:r>
-              <a:rPr sz="2400" b="1">
+              <a:rPr sz="2800" b="1">
                 <a:solidFill>
                   <a:srgbClr val="475569"/>
                 </a:solidFill>
@@ -4410,32 +4410,9 @@
                 <a:ea typeface="Noto Sans JP"/>
                 <a:cs typeface="Noto Sans JP"/>
               </a:rPr>
-              <a:t>ある日、ドラッグストアで――</a:t>
-            </a:r>
-          </a:p>
-        </p:txBody>
-      </p:sp>
-      <p:sp>
-        <p:nvSpPr>
-          <p:cNvPr id="5" name="TextBox 4"/>
-          <p:cNvSpPr txBox="1"/>
-          <p:nvPr/>
-        </p:nvSpPr>
-        <p:spPr>
-          <a:xfrm>
-            <a:off x="822960" y="2880360"/>
-            <a:ext cx="10515600" cy="2011680"/>
-          </a:xfrm>
-          <a:prstGeom prst="rect">
-            <a:avLst/>
-          </a:prstGeom>
-          <a:noFill/>
-        </p:spPr>
-        <p:txBody>
-          <a:bodyPr wrap="square" lIns="0" rIns="0" tIns="0" bIns="0" anchor="t">
-            <a:spAutoFit/>
-          </a:bodyPr>
-          <a:lstStyle/>
+              <a:t>ある日、ドラッグストアで</a:t>
+            </a:r>
+          </a:p>
           <a:p>
             <a:pPr algn="l">
               <a:lnSpc>
@@ -4443,47 +4420,29 @@
               </a:lnSpc>
             </a:pPr>
             <a:r>
-              <a:rPr sz="5400" b="1">
-                <a:solidFill>
-                  <a:srgbClr val="1B2A4A"/>
+              <a:rPr sz="2800" b="1">
+                <a:solidFill>
+                  <a:srgbClr val="475569"/>
                 </a:solidFill>
                 <a:latin typeface="Noto Sans JP"/>
                 <a:ea typeface="Noto Sans JP"/>
                 <a:cs typeface="Noto Sans JP"/>
               </a:rPr>
-              <a:t>化粧水を手に取って、</a:t>
-            </a:r>
-          </a:p>
-          <a:p>
-            <a:pPr algn="l">
-              <a:lnSpc>
-                <a:spcPct val="100000"/>
-              </a:lnSpc>
-            </a:pPr>
-            <a:r>
-              <a:rPr sz="5400" b="1">
-                <a:solidFill>
-                  <a:srgbClr val="1B2A4A"/>
-                </a:solidFill>
-                <a:latin typeface="Noto Sans JP"/>
-                <a:ea typeface="Noto Sans JP"/>
-                <a:cs typeface="Noto Sans JP"/>
-              </a:rPr>
-              <a:t>手が止まった。</a:t>
-            </a:r>
-          </a:p>
-        </p:txBody>
-      </p:sp>
-      <p:sp>
-        <p:nvSpPr>
-          <p:cNvPr id="6" name="Rounded Rectangle 5"/>
+              <a:t>化粧水を手に取って、手が止まった。</a:t>
+            </a:r>
+          </a:p>
+        </p:txBody>
+      </p:sp>
+      <p:sp>
+        <p:nvSpPr>
+          <p:cNvPr id="5" name="Rounded Rectangle 4"/>
           <p:cNvSpPr/>
           <p:nvPr/>
         </p:nvSpPr>
         <p:spPr>
           <a:xfrm>
-            <a:off x="822960" y="5257800"/>
-            <a:ext cx="4267200" cy="658368"/>
+            <a:off x="822960" y="3337560"/>
+            <a:ext cx="8168640" cy="1005840"/>
           </a:xfrm>
           <a:prstGeom prst="roundRect">
             <a:avLst>
@@ -4520,9 +4479,9 @@
           <a:p>
             <a:pPr algn="ctr"/>
             <a:r>
-              <a:rPr sz="2000" b="1">
-                <a:solidFill>
-                  <a:srgbClr val="2563EB"/>
+              <a:rPr sz="4000" b="1">
+                <a:solidFill>
+                  <a:srgbClr val="1B2A4A"/>
                 </a:solidFill>
                 <a:latin typeface="Noto Sans JP"/>
                 <a:ea typeface="Noto Sans JP"/>
@@ -4535,14 +4494,14 @@
       </p:sp>
       <p:sp>
         <p:nvSpPr>
-          <p:cNvPr id="7" name="Rounded Rectangle 6"/>
+          <p:cNvPr id="6" name="Rounded Rectangle 5"/>
           <p:cNvSpPr/>
           <p:nvPr/>
         </p:nvSpPr>
         <p:spPr>
           <a:xfrm>
-            <a:off x="5364480" y="5257800"/>
-            <a:ext cx="3749040" cy="658368"/>
+            <a:off x="822960" y="4617720"/>
+            <a:ext cx="7132320" cy="1005840"/>
           </a:xfrm>
           <a:prstGeom prst="roundRect">
             <a:avLst>
@@ -4579,9 +4538,9 @@
           <a:p>
             <a:pPr algn="ctr"/>
             <a:r>
-              <a:rPr sz="2000" b="1">
-                <a:solidFill>
-                  <a:srgbClr val="2563EB"/>
+              <a:rPr sz="4000" b="1">
+                <a:solidFill>
+                  <a:srgbClr val="1B2A4A"/>
                 </a:solidFill>
                 <a:latin typeface="Noto Sans JP"/>
                 <a:ea typeface="Noto Sans JP"/>
@@ -4626,8 +4585,8 @@
         </p:nvSpPr>
         <p:spPr>
           <a:xfrm>
-            <a:off x="822960" y="914400"/>
-            <a:ext cx="5486400" cy="457200"/>
+            <a:off x="822960" y="822960"/>
+            <a:ext cx="7315200" cy="457200"/>
           </a:xfrm>
           <a:prstGeom prst="rect">
             <a:avLst/>
@@ -4667,8 +4626,8 @@
         </p:nvSpPr>
         <p:spPr>
           <a:xfrm>
-            <a:off x="822960" y="1371600"/>
-            <a:ext cx="10058400" cy="457200"/>
+            <a:off x="822960" y="1280160"/>
+            <a:ext cx="10515600" cy="457200"/>
           </a:xfrm>
           <a:prstGeom prst="rect">
             <a:avLst/>
@@ -4708,8 +4667,8 @@
         </p:nvSpPr>
         <p:spPr>
           <a:xfrm>
-            <a:off x="822960" y="2240280"/>
-            <a:ext cx="10515600" cy="548640"/>
+            <a:off x="822960" y="1920240"/>
+            <a:ext cx="10515600" cy="1097280"/>
           </a:xfrm>
           <a:prstGeom prst="rect">
             <a:avLst/>
@@ -4728,7 +4687,7 @@
               </a:lnSpc>
             </a:pPr>
             <a:r>
-              <a:rPr sz="2400" b="1">
+              <a:rPr sz="2800" b="1">
                 <a:solidFill>
                   <a:srgbClr val="475569"/>
                 </a:solidFill>
@@ -4736,32 +4695,9 @@
                 <a:ea typeface="Noto Sans JP"/>
                 <a:cs typeface="Noto Sans JP"/>
               </a:rPr>
-              <a:t>風邪薬を買って、家に帰ると――</a:t>
-            </a:r>
-          </a:p>
-        </p:txBody>
-      </p:sp>
-      <p:sp>
-        <p:nvSpPr>
-          <p:cNvPr id="5" name="TextBox 4"/>
-          <p:cNvSpPr txBox="1"/>
-          <p:nvPr/>
-        </p:nvSpPr>
-        <p:spPr>
-          <a:xfrm>
-            <a:off x="822960" y="2880360"/>
-            <a:ext cx="10515600" cy="2011680"/>
-          </a:xfrm>
-          <a:prstGeom prst="rect">
-            <a:avLst/>
-          </a:prstGeom>
-          <a:noFill/>
-        </p:spPr>
-        <p:txBody>
-          <a:bodyPr wrap="square" lIns="0" rIns="0" tIns="0" bIns="0" anchor="t">
-            <a:spAutoFit/>
-          </a:bodyPr>
-          <a:lstStyle/>
+              <a:t>風邪薬を買って家に帰ると、</a:t>
+            </a:r>
+          </a:p>
           <a:p>
             <a:pPr algn="l">
               <a:lnSpc>
@@ -4769,47 +4705,29 @@
               </a:lnSpc>
             </a:pPr>
             <a:r>
-              <a:rPr sz="5400" b="1">
-                <a:solidFill>
-                  <a:srgbClr val="1B2A4A"/>
+              <a:rPr sz="2800" b="1">
+                <a:solidFill>
+                  <a:srgbClr val="475569"/>
                 </a:solidFill>
                 <a:latin typeface="Noto Sans JP"/>
                 <a:ea typeface="Noto Sans JP"/>
                 <a:cs typeface="Noto Sans JP"/>
               </a:rPr>
-              <a:t>似たような薬が、</a:t>
-            </a:r>
-          </a:p>
-          <a:p>
-            <a:pPr algn="l">
-              <a:lnSpc>
-                <a:spcPct val="100000"/>
-              </a:lnSpc>
-            </a:pPr>
-            <a:r>
-              <a:rPr sz="5400" b="1">
-                <a:solidFill>
-                  <a:srgbClr val="1B2A4A"/>
-                </a:solidFill>
-                <a:latin typeface="Noto Sans JP"/>
-                <a:ea typeface="Noto Sans JP"/>
-                <a:cs typeface="Noto Sans JP"/>
-              </a:rPr>
-              <a:t>もう家にあった。</a:t>
-            </a:r>
-          </a:p>
-        </p:txBody>
-      </p:sp>
-      <p:sp>
-        <p:nvSpPr>
-          <p:cNvPr id="6" name="Rounded Rectangle 5"/>
+              <a:t>似たような薬がもう家にあった。</a:t>
+            </a:r>
+          </a:p>
+        </p:txBody>
+      </p:sp>
+      <p:sp>
+        <p:nvSpPr>
+          <p:cNvPr id="5" name="Rounded Rectangle 4"/>
           <p:cNvSpPr/>
           <p:nvPr/>
         </p:nvSpPr>
         <p:spPr>
           <a:xfrm>
-            <a:off x="822960" y="5257800"/>
-            <a:ext cx="4526280" cy="658368"/>
+            <a:off x="822960" y="3337560"/>
+            <a:ext cx="8686800" cy="1005840"/>
           </a:xfrm>
           <a:prstGeom prst="roundRect">
             <a:avLst>
@@ -4846,9 +4764,9 @@
           <a:p>
             <a:pPr algn="ctr"/>
             <a:r>
-              <a:rPr sz="2000" b="1">
-                <a:solidFill>
-                  <a:srgbClr val="C2410C"/>
+              <a:rPr sz="4000" b="1">
+                <a:solidFill>
+                  <a:srgbClr val="1B2A4A"/>
                 </a:solidFill>
                 <a:latin typeface="Noto Sans JP"/>
                 <a:ea typeface="Noto Sans JP"/>
@@ -4861,14 +4779,14 @@
       </p:sp>
       <p:sp>
         <p:nvSpPr>
-          <p:cNvPr id="7" name="Rounded Rectangle 6"/>
+          <p:cNvPr id="6" name="Rounded Rectangle 5"/>
           <p:cNvSpPr/>
           <p:nvPr/>
         </p:nvSpPr>
         <p:spPr>
           <a:xfrm>
-            <a:off x="5623560" y="5257800"/>
-            <a:ext cx="4267200" cy="658368"/>
+            <a:off x="822960" y="4617720"/>
+            <a:ext cx="8168640" cy="1005840"/>
           </a:xfrm>
           <a:prstGeom prst="roundRect">
             <a:avLst>
@@ -4905,9 +4823,9 @@
           <a:p>
             <a:pPr algn="ctr"/>
             <a:r>
-              <a:rPr sz="2000" b="1">
-                <a:solidFill>
-                  <a:srgbClr val="C2410C"/>
+              <a:rPr sz="4000" b="1">
+                <a:solidFill>
+                  <a:srgbClr val="1B2A4A"/>
                 </a:solidFill>
                 <a:latin typeface="Noto Sans JP"/>
                 <a:ea typeface="Noto Sans JP"/>

--- a/docs/ピッチ/Overlai_本選ピッチ.pptx
+++ b/docs/ピッチ/Overlai_本選ピッチ.pptx
@@ -4300,7 +4300,7 @@
         </p:nvSpPr>
         <p:spPr>
           <a:xfrm>
-            <a:off x="822960" y="822960"/>
+            <a:off x="822960" y="731520"/>
             <a:ext cx="7315200" cy="457200"/>
           </a:xfrm>
           <a:prstGeom prst="rect">
@@ -4341,7 +4341,7 @@
         </p:nvSpPr>
         <p:spPr>
           <a:xfrm>
-            <a:off x="822960" y="1280160"/>
+            <a:off x="822960" y="1188720"/>
             <a:ext cx="10515600" cy="457200"/>
           </a:xfrm>
           <a:prstGeom prst="rect">
@@ -4382,8 +4382,8 @@
         </p:nvSpPr>
         <p:spPr>
           <a:xfrm>
-            <a:off x="822960" y="1920240"/>
-            <a:ext cx="10515600" cy="1097280"/>
+            <a:off x="822960" y="1691640"/>
+            <a:ext cx="10972800" cy="548640"/>
           </a:xfrm>
           <a:prstGeom prst="rect">
             <a:avLst/>
@@ -4402,7 +4402,7 @@
               </a:lnSpc>
             </a:pPr>
             <a:r>
-              <a:rPr sz="2800" b="1">
+              <a:rPr sz="2600" b="1">
                 <a:solidFill>
                   <a:srgbClr val="475569"/>
                 </a:solidFill>
@@ -4410,76 +4410,88 @@
                 <a:ea typeface="Noto Sans JP"/>
                 <a:cs typeface="Noto Sans JP"/>
               </a:rPr>
-              <a:t>ある日、ドラッグストアで</a:t>
-            </a:r>
-          </a:p>
-          <a:p>
-            <a:pPr algn="l">
+              <a:t>ある日、ドラッグストアで化粧水を手に取って、手が止まった。</a:t>
+            </a:r>
+          </a:p>
+        </p:txBody>
+      </p:sp>
+      <p:pic>
+        <p:nvPicPr>
+          <p:cNvPr id="5" name="Picture 4" descr="cloud-blue.png"/>
+          <p:cNvPicPr>
+            <a:picLocks noChangeAspect="1"/>
+          </p:cNvPicPr>
+          <p:nvPr/>
+        </p:nvPicPr>
+        <p:blipFill>
+          <a:blip r:embed="rId2"/>
+          <a:stretch>
+            <a:fillRect/>
+          </a:stretch>
+        </p:blipFill>
+        <p:spPr>
+          <a:xfrm>
+            <a:off x="548640" y="2377440"/>
+            <a:ext cx="7589520" cy="4032854"/>
+          </a:xfrm>
+          <a:prstGeom prst="rect">
+            <a:avLst/>
+          </a:prstGeom>
+        </p:spPr>
+      </p:pic>
+      <p:pic>
+        <p:nvPicPr>
+          <p:cNvPr id="6" name="Picture 5" descr="people-1.png"/>
+          <p:cNvPicPr>
+            <a:picLocks noChangeAspect="1"/>
+          </p:cNvPicPr>
+          <p:nvPr/>
+        </p:nvPicPr>
+        <p:blipFill>
+          <a:blip r:embed="rId3"/>
+          <a:stretch>
+            <a:fillRect/>
+          </a:stretch>
+        </p:blipFill>
+        <p:spPr>
+          <a:xfrm>
+            <a:off x="8116146" y="4343400"/>
+            <a:ext cx="3725333" cy="2514600"/>
+          </a:xfrm>
+          <a:prstGeom prst="rect">
+            <a:avLst/>
+          </a:prstGeom>
+        </p:spPr>
+      </p:pic>
+      <p:sp>
+        <p:nvSpPr>
+          <p:cNvPr id="7" name="TextBox 6"/>
+          <p:cNvSpPr txBox="1"/>
+          <p:nvPr/>
+        </p:nvSpPr>
+        <p:spPr>
+          <a:xfrm>
+            <a:off x="1006022" y="3662627"/>
+            <a:ext cx="6583680" cy="658368"/>
+          </a:xfrm>
+          <a:prstGeom prst="rect">
+            <a:avLst/>
+          </a:prstGeom>
+          <a:noFill/>
+        </p:spPr>
+        <p:txBody>
+          <a:bodyPr wrap="square" lIns="0" rIns="0" tIns="0" bIns="0" anchor="t">
+            <a:spAutoFit/>
+          </a:bodyPr>
+          <a:lstStyle/>
+          <a:p>
+            <a:pPr algn="ctr">
               <a:lnSpc>
                 <a:spcPct val="100000"/>
               </a:lnSpc>
             </a:pPr>
             <a:r>
-              <a:rPr sz="2800" b="1">
-                <a:solidFill>
-                  <a:srgbClr val="475569"/>
-                </a:solidFill>
-                <a:latin typeface="Noto Sans JP"/>
-                <a:ea typeface="Noto Sans JP"/>
-                <a:cs typeface="Noto Sans JP"/>
-              </a:rPr>
-              <a:t>化粧水を手に取って、手が止まった。</a:t>
-            </a:r>
-          </a:p>
-        </p:txBody>
-      </p:sp>
-      <p:sp>
-        <p:nvSpPr>
-          <p:cNvPr id="5" name="Rounded Rectangle 4"/>
-          <p:cNvSpPr/>
-          <p:nvPr/>
-        </p:nvSpPr>
-        <p:spPr>
-          <a:xfrm>
-            <a:off x="822960" y="3337560"/>
-            <a:ext cx="8168640" cy="1005840"/>
-          </a:xfrm>
-          <a:prstGeom prst="roundRect">
-            <a:avLst>
-              <a:gd name="adj" fmla="val 50000"/>
-            </a:avLst>
-          </a:prstGeom>
-          <a:solidFill>
-            <a:srgbClr val="EFF6FF"/>
-          </a:solidFill>
-          <a:ln w="12700">
-            <a:solidFill>
-              <a:srgbClr val="BFDBFE"/>
-            </a:solidFill>
-          </a:ln>
-          <a:effectLst/>
-        </p:spPr>
-        <p:style>
-          <a:lnRef idx="1">
-            <a:schemeClr val="accent1"/>
-          </a:lnRef>
-          <a:fillRef idx="3">
-            <a:schemeClr val="accent1"/>
-          </a:fillRef>
-          <a:effectRef idx="2">
-            <a:schemeClr val="accent1"/>
-          </a:effectRef>
-          <a:fontRef idx="minor">
-            <a:schemeClr val="lt1"/>
-          </a:fontRef>
-        </p:style>
-        <p:txBody>
-          <a:bodyPr rtlCol="0" anchor="ctr" lIns="0" rIns="0" tIns="0" bIns="0" wrap="none"/>
-          <a:lstStyle/>
-          <a:p>
-            <a:pPr algn="ctr"/>
-            <a:r>
-              <a:rPr sz="4000" b="1">
+              <a:rPr sz="3200" b="1">
                 <a:solidFill>
                   <a:srgbClr val="1B2A4A"/>
                 </a:solidFill>
@@ -4494,51 +4506,33 @@
       </p:sp>
       <p:sp>
         <p:nvSpPr>
-          <p:cNvPr id="6" name="Rounded Rectangle 5"/>
-          <p:cNvSpPr/>
+          <p:cNvPr id="8" name="TextBox 7"/>
+          <p:cNvSpPr txBox="1"/>
           <p:nvPr/>
         </p:nvSpPr>
         <p:spPr>
           <a:xfrm>
-            <a:off x="822960" y="4617720"/>
-            <a:ext cx="7132320" cy="1005840"/>
-          </a:xfrm>
-          <a:prstGeom prst="roundRect">
-            <a:avLst>
-              <a:gd name="adj" fmla="val 50000"/>
-            </a:avLst>
-          </a:prstGeom>
-          <a:solidFill>
-            <a:srgbClr val="EFF6FF"/>
-          </a:solidFill>
-          <a:ln w="12700">
-            <a:solidFill>
-              <a:srgbClr val="BFDBFE"/>
-            </a:solidFill>
-          </a:ln>
-          <a:effectLst/>
-        </p:spPr>
-        <p:style>
-          <a:lnRef idx="1">
-            <a:schemeClr val="accent1"/>
-          </a:lnRef>
-          <a:fillRef idx="3">
-            <a:schemeClr val="accent1"/>
-          </a:fillRef>
-          <a:effectRef idx="2">
-            <a:schemeClr val="accent1"/>
-          </a:effectRef>
-          <a:fontRef idx="minor">
-            <a:schemeClr val="lt1"/>
-          </a:fontRef>
-        </p:style>
-        <p:txBody>
-          <a:bodyPr rtlCol="0" anchor="ctr" lIns="0" rIns="0" tIns="0" bIns="0" wrap="none"/>
-          <a:lstStyle/>
-          <a:p>
-            <a:pPr algn="ctr"/>
-            <a:r>
-              <a:rPr sz="4000" b="1">
+            <a:off x="1006022" y="4449011"/>
+            <a:ext cx="6583680" cy="658368"/>
+          </a:xfrm>
+          <a:prstGeom prst="rect">
+            <a:avLst/>
+          </a:prstGeom>
+          <a:noFill/>
+        </p:spPr>
+        <p:txBody>
+          <a:bodyPr wrap="square" lIns="0" rIns="0" tIns="0" bIns="0" anchor="t">
+            <a:spAutoFit/>
+          </a:bodyPr>
+          <a:lstStyle/>
+          <a:p>
+            <a:pPr algn="ctr">
+              <a:lnSpc>
+                <a:spcPct val="100000"/>
+              </a:lnSpc>
+            </a:pPr>
+            <a:r>
+              <a:rPr sz="3200" b="1">
                 <a:solidFill>
                   <a:srgbClr val="1B2A4A"/>
                 </a:solidFill>
@@ -4585,7 +4579,7 @@
         </p:nvSpPr>
         <p:spPr>
           <a:xfrm>
-            <a:off x="822960" y="822960"/>
+            <a:off x="822960" y="731520"/>
             <a:ext cx="7315200" cy="457200"/>
           </a:xfrm>
           <a:prstGeom prst="rect">
@@ -4626,7 +4620,7 @@
         </p:nvSpPr>
         <p:spPr>
           <a:xfrm>
-            <a:off x="822960" y="1280160"/>
+            <a:off x="822960" y="1188720"/>
             <a:ext cx="10515600" cy="457200"/>
           </a:xfrm>
           <a:prstGeom prst="rect">
@@ -4667,8 +4661,8 @@
         </p:nvSpPr>
         <p:spPr>
           <a:xfrm>
-            <a:off x="822960" y="1920240"/>
-            <a:ext cx="10515600" cy="1097280"/>
+            <a:off x="822960" y="1691640"/>
+            <a:ext cx="10972800" cy="548640"/>
           </a:xfrm>
           <a:prstGeom prst="rect">
             <a:avLst/>
@@ -4687,7 +4681,7 @@
               </a:lnSpc>
             </a:pPr>
             <a:r>
-              <a:rPr sz="2800" b="1">
+              <a:rPr sz="2600" b="1">
                 <a:solidFill>
                   <a:srgbClr val="475569"/>
                 </a:solidFill>
@@ -4695,76 +4689,88 @@
                 <a:ea typeface="Noto Sans JP"/>
                 <a:cs typeface="Noto Sans JP"/>
               </a:rPr>
-              <a:t>風邪薬を買って家に帰ると、</a:t>
-            </a:r>
-          </a:p>
-          <a:p>
-            <a:pPr algn="l">
+              <a:t>風邪薬を買って家に帰ると、似たような薬がもう家にあった。</a:t>
+            </a:r>
+          </a:p>
+        </p:txBody>
+      </p:sp>
+      <p:pic>
+        <p:nvPicPr>
+          <p:cNvPr id="5" name="Picture 4" descr="cloud-amber.png"/>
+          <p:cNvPicPr>
+            <a:picLocks noChangeAspect="1"/>
+          </p:cNvPicPr>
+          <p:nvPr/>
+        </p:nvPicPr>
+        <p:blipFill>
+          <a:blip r:embed="rId2"/>
+          <a:stretch>
+            <a:fillRect/>
+          </a:stretch>
+        </p:blipFill>
+        <p:spPr>
+          <a:xfrm>
+            <a:off x="548640" y="2377440"/>
+            <a:ext cx="7589520" cy="4032854"/>
+          </a:xfrm>
+          <a:prstGeom prst="rect">
+            <a:avLst/>
+          </a:prstGeom>
+        </p:spPr>
+      </p:pic>
+      <p:pic>
+        <p:nvPicPr>
+          <p:cNvPr id="6" name="Picture 5" descr="people-2.png"/>
+          <p:cNvPicPr>
+            <a:picLocks noChangeAspect="1"/>
+          </p:cNvPicPr>
+          <p:nvPr/>
+        </p:nvPicPr>
+        <p:blipFill>
+          <a:blip r:embed="rId3"/>
+          <a:stretch>
+            <a:fillRect/>
+          </a:stretch>
+        </p:blipFill>
+        <p:spPr>
+          <a:xfrm>
+            <a:off x="10095230" y="4343400"/>
+            <a:ext cx="1746250" cy="2514600"/>
+          </a:xfrm>
+          <a:prstGeom prst="rect">
+            <a:avLst/>
+          </a:prstGeom>
+        </p:spPr>
+      </p:pic>
+      <p:sp>
+        <p:nvSpPr>
+          <p:cNvPr id="7" name="TextBox 6"/>
+          <p:cNvSpPr txBox="1"/>
+          <p:nvPr/>
+        </p:nvSpPr>
+        <p:spPr>
+          <a:xfrm>
+            <a:off x="1006022" y="3662627"/>
+            <a:ext cx="6583680" cy="658368"/>
+          </a:xfrm>
+          <a:prstGeom prst="rect">
+            <a:avLst/>
+          </a:prstGeom>
+          <a:noFill/>
+        </p:spPr>
+        <p:txBody>
+          <a:bodyPr wrap="square" lIns="0" rIns="0" tIns="0" bIns="0" anchor="t">
+            <a:spAutoFit/>
+          </a:bodyPr>
+          <a:lstStyle/>
+          <a:p>
+            <a:pPr algn="ctr">
               <a:lnSpc>
                 <a:spcPct val="100000"/>
               </a:lnSpc>
             </a:pPr>
             <a:r>
-              <a:rPr sz="2800" b="1">
-                <a:solidFill>
-                  <a:srgbClr val="475569"/>
-                </a:solidFill>
-                <a:latin typeface="Noto Sans JP"/>
-                <a:ea typeface="Noto Sans JP"/>
-                <a:cs typeface="Noto Sans JP"/>
-              </a:rPr>
-              <a:t>似たような薬がもう家にあった。</a:t>
-            </a:r>
-          </a:p>
-        </p:txBody>
-      </p:sp>
-      <p:sp>
-        <p:nvSpPr>
-          <p:cNvPr id="5" name="Rounded Rectangle 4"/>
-          <p:cNvSpPr/>
-          <p:nvPr/>
-        </p:nvSpPr>
-        <p:spPr>
-          <a:xfrm>
-            <a:off x="822960" y="3337560"/>
-            <a:ext cx="8686800" cy="1005840"/>
-          </a:xfrm>
-          <a:prstGeom prst="roundRect">
-            <a:avLst>
-              <a:gd name="adj" fmla="val 50000"/>
-            </a:avLst>
-          </a:prstGeom>
-          <a:solidFill>
-            <a:srgbClr val="FFF7ED"/>
-          </a:solidFill>
-          <a:ln w="12700">
-            <a:solidFill>
-              <a:srgbClr val="FED7AA"/>
-            </a:solidFill>
-          </a:ln>
-          <a:effectLst/>
-        </p:spPr>
-        <p:style>
-          <a:lnRef idx="1">
-            <a:schemeClr val="accent1"/>
-          </a:lnRef>
-          <a:fillRef idx="3">
-            <a:schemeClr val="accent1"/>
-          </a:fillRef>
-          <a:effectRef idx="2">
-            <a:schemeClr val="accent1"/>
-          </a:effectRef>
-          <a:fontRef idx="minor">
-            <a:schemeClr val="lt1"/>
-          </a:fontRef>
-        </p:style>
-        <p:txBody>
-          <a:bodyPr rtlCol="0" anchor="ctr" lIns="0" rIns="0" tIns="0" bIns="0" wrap="none"/>
-          <a:lstStyle/>
-          <a:p>
-            <a:pPr algn="ctr"/>
-            <a:r>
-              <a:rPr sz="4000" b="1">
+              <a:rPr sz="3200" b="1">
                 <a:solidFill>
                   <a:srgbClr val="1B2A4A"/>
                 </a:solidFill>
@@ -4779,51 +4785,33 @@
       </p:sp>
       <p:sp>
         <p:nvSpPr>
-          <p:cNvPr id="6" name="Rounded Rectangle 5"/>
-          <p:cNvSpPr/>
+          <p:cNvPr id="8" name="TextBox 7"/>
+          <p:cNvSpPr txBox="1"/>
           <p:nvPr/>
         </p:nvSpPr>
         <p:spPr>
           <a:xfrm>
-            <a:off x="822960" y="4617720"/>
-            <a:ext cx="8168640" cy="1005840"/>
-          </a:xfrm>
-          <a:prstGeom prst="roundRect">
-            <a:avLst>
-              <a:gd name="adj" fmla="val 50000"/>
-            </a:avLst>
-          </a:prstGeom>
-          <a:solidFill>
-            <a:srgbClr val="FFF7ED"/>
-          </a:solidFill>
-          <a:ln w="12700">
-            <a:solidFill>
-              <a:srgbClr val="FED7AA"/>
-            </a:solidFill>
-          </a:ln>
-          <a:effectLst/>
-        </p:spPr>
-        <p:style>
-          <a:lnRef idx="1">
-            <a:schemeClr val="accent1"/>
-          </a:lnRef>
-          <a:fillRef idx="3">
-            <a:schemeClr val="accent1"/>
-          </a:fillRef>
-          <a:effectRef idx="2">
-            <a:schemeClr val="accent1"/>
-          </a:effectRef>
-          <a:fontRef idx="minor">
-            <a:schemeClr val="lt1"/>
-          </a:fontRef>
-        </p:style>
-        <p:txBody>
-          <a:bodyPr rtlCol="0" anchor="ctr" lIns="0" rIns="0" tIns="0" bIns="0" wrap="none"/>
-          <a:lstStyle/>
-          <a:p>
-            <a:pPr algn="ctr"/>
-            <a:r>
-              <a:rPr sz="4000" b="1">
+            <a:off x="1006022" y="4449011"/>
+            <a:ext cx="6583680" cy="658368"/>
+          </a:xfrm>
+          <a:prstGeom prst="rect">
+            <a:avLst/>
+          </a:prstGeom>
+          <a:noFill/>
+        </p:spPr>
+        <p:txBody>
+          <a:bodyPr wrap="square" lIns="0" rIns="0" tIns="0" bIns="0" anchor="t">
+            <a:spAutoFit/>
+          </a:bodyPr>
+          <a:lstStyle/>
+          <a:p>
+            <a:pPr algn="ctr">
+              <a:lnSpc>
+                <a:spcPct val="100000"/>
+              </a:lnSpc>
+            </a:pPr>
+            <a:r>
+              <a:rPr sz="3200" b="1">
                 <a:solidFill>
                   <a:srgbClr val="1B2A4A"/>
                 </a:solidFill>

--- a/docs/ピッチ/Overlai_本選ピッチ.pptx
+++ b/docs/ピッチ/Overlai_本選ピッチ.pptx
@@ -13,6 +13,7 @@
     <p:sldId id="261" r:id="rId13"/>
     <p:sldId id="262" r:id="rId14"/>
     <p:sldId id="263" r:id="rId15"/>
+    <p:sldId id="264" r:id="rId16"/>
   </p:sldIdLst>
   <p:sldSz cx="12191695" cy="6858000" type="screen4x3"/>
   <p:notesSz cx="6858000" cy="9144000"/>
@@ -579,7 +580,7 @@
           <a:lstStyle/>
           <a:p>
             <a:r>
-              <a:t>ステロイドの塗り薬を使う濱田と杉本は、ある日、化粧水を手に取って、手が止まりました。薬を塗った肌に使っていいのか。どっちが先か。</a:t>
+              <a:t>ステロイドの塗り薬を使う濱田と杉本は、ある日、化粧水を手に取って、手が止まりました。使っていいのか。どっちが先か。</a:t>
             </a:r>
           </a:p>
         </p:txBody>
@@ -649,7 +650,7 @@
           <a:lstStyle/>
           <a:p>
             <a:r>
-              <a:t>井上は、風邪薬を買って帰ると、似た薬がもう家にありました。名前が違うと、同じ薬だと気づけないんです。</a:t>
+              <a:t>井上は、風邪薬を買って帰ると、似た薬がもう家にありました。</a:t>
             </a:r>
           </a:p>
         </p:txBody>
@@ -719,7 +720,7 @@
           <a:lstStyle/>
           <a:p>
             <a:r>
-              <a:t>どの迷いも、答えは家にあるもの次第。なのに、店頭で確かめる方法がなかったんです。</a:t>
+              <a:t>どの迷いも、家にある薬と見比べれば答えが出ます。でも、店の棚の前では、それができません。</a:t>
             </a:r>
           </a:p>
         </p:txBody>
@@ -789,7 +790,7 @@
           <a:lstStyle/>
           <a:p>
             <a:r>
-              <a:t>だから作りました。家の薬と化粧品を登録しておけば、店頭で撮るだけで、生成AIが重ねて判定します。</a:t>
+              <a:t>そこで作ったOverlaiは、店頭で撮るだけで、生成AIが家にあるものと重ねて判定します。</a:t>
             </a:r>
           </a:p>
         </p:txBody>
@@ -859,7 +860,7 @@
           <a:lstStyle/>
           <a:p>
             <a:r>
-              <a:t>合わない組み合わせには理由つきで注意を出し、塗る順番まで組み立てます。</a:t>
+              <a:t>使っていいかがその場で分かり、塗る順番まで教えてくれます。</a:t>
             </a:r>
           </a:p>
         </p:txBody>
@@ -999,7 +1000,77 @@
           <a:lstStyle/>
           <a:p>
             <a:r>
-              <a:t>Overlai。買う前に、家の棚を重ねて見る。</a:t>
+              <a:t>買い重ねる前に。塗り重ねる前に。飲み合わせる前に。</a:t>
+            </a:r>
+          </a:p>
+        </p:txBody>
+      </p:sp>
+      <p:sp>
+        <p:nvSpPr>
+          <p:cNvPr id="4" name="Slide Number Placeholder 3"/>
+          <p:cNvSpPr>
+            <a:spLocks noGrp="1"/>
+          </p:cNvSpPr>
+          <p:nvPr>
+            <p:ph type="sldNum" idx="5" sz="quarter"/>
+          </p:nvPr>
+        </p:nvSpPr>
+        <p:spPr/>
+      </p:sp>
+    </p:spTree>
+  </p:cSld>
+  <p:clrMapOvr>
+    <a:masterClrMapping/>
+  </p:clrMapOvr>
+</p:notes>
+</file>
+
+<file path=ppt/notesSlides/notesSlide9.xml><?xml version="1.0" encoding="utf-8"?>
+<p:notes xmlns:a="http://schemas.openxmlformats.org/drawingml/2006/main" xmlns:p="http://schemas.openxmlformats.org/presentationml/2006/main" xmlns:r="http://schemas.openxmlformats.org/officeDocument/2006/relationships">
+  <p:cSld>
+    <p:spTree>
+      <p:nvGrpSpPr>
+        <p:cNvPr id="1" name=""/>
+        <p:cNvGrpSpPr/>
+        <p:nvPr/>
+      </p:nvGrpSpPr>
+      <p:grpSpPr>
+        <a:xfrm>
+          <a:off x="0" y="0"/>
+          <a:ext cx="0" cy="0"/>
+          <a:chOff x="0" y="0"/>
+          <a:chExt cx="0" cy="0"/>
+        </a:xfrm>
+      </p:grpSpPr>
+      <p:sp>
+        <p:nvSpPr>
+          <p:cNvPr id="2" name="Slide Image Placeholder 1"/>
+          <p:cNvSpPr>
+            <a:spLocks noGrp="1"/>
+          </p:cNvSpPr>
+          <p:nvPr>
+            <p:ph type="sldImg" idx="2"/>
+          </p:nvPr>
+        </p:nvSpPr>
+        <p:spPr/>
+      </p:sp>
+      <p:sp>
+        <p:nvSpPr>
+          <p:cNvPr id="3" name="Notes Placeholder 2"/>
+          <p:cNvSpPr>
+            <a:spLocks noGrp="1"/>
+          </p:cNvSpPr>
+          <p:nvPr>
+            <p:ph type="body" idx="3" sz="quarter"/>
+          </p:nvPr>
+        </p:nvSpPr>
+        <p:spPr/>
+        <p:txBody>
+          <a:bodyPr/>
+          <a:lstStyle/>
+          <a:p>
+            <a:r>
+              <a:t>Overlai。重ねる前に、重ねて見る。</a:t>
             </a:r>
           </a:p>
         </p:txBody>
@@ -4179,7 +4250,7 @@
                 <a:ea typeface="Noto Sans JP"/>
                 <a:cs typeface="Noto Sans JP"/>
               </a:rPr>
-              <a:t>買う前に、家の棚を重ねて見る。</a:t>
+              <a:t>重ねる前に、重ねて見る。</a:t>
             </a:r>
           </a:p>
         </p:txBody>
@@ -4648,7 +4719,7 @@
                 <a:ea typeface="Noto Sans JP"/>
                 <a:cs typeface="Noto Sans JP"/>
               </a:rPr>
-              <a:t>井上</a:t>
+              <a:t>井上｜店頭に立つと、家にある薬を思い出せない</a:t>
             </a:r>
           </a:p>
         </p:txBody>
@@ -4886,7 +4957,7 @@
                 <a:ea typeface="Noto Sans JP"/>
                 <a:cs typeface="Noto Sans JP"/>
               </a:rPr>
-              <a:t>使っていい？　どっちが先？　もう家にある？</a:t>
+              <a:t>「使っていい？」「どっちが先？」「もう家にある？」</a:t>
             </a:r>
           </a:p>
         </p:txBody>
@@ -4927,7 +4998,7 @@
                 <a:ea typeface="Noto Sans JP"/>
                 <a:cs typeface="Noto Sans JP"/>
               </a:rPr>
-              <a:t>どの迷いも、答えは「家にあるもの」次第。</a:t>
+              <a:t>どの迷いも、家にある薬と見比べれば答えが出る。</a:t>
             </a:r>
           </a:p>
         </p:txBody>
@@ -5004,7 +5075,7 @@
               </a:lnSpc>
             </a:pPr>
             <a:r>
-              <a:rPr sz="4800" b="1">
+              <a:rPr sz="5000" b="1">
                 <a:solidFill>
                   <a:srgbClr val="FFFFFF"/>
                 </a:solidFill>
@@ -5012,7 +5083,7 @@
                 <a:ea typeface="Noto Sans JP"/>
                 <a:cs typeface="Noto Sans JP"/>
               </a:rPr>
-              <a:t>なのに、店頭で家にあるものと</a:t>
+              <a:t>でも、店の棚の前では、</a:t>
             </a:r>
           </a:p>
           <a:p>
@@ -5022,7 +5093,7 @@
               </a:lnSpc>
             </a:pPr>
             <a:r>
-              <a:rPr sz="4800" b="1">
+              <a:rPr sz="5000" b="1">
                 <a:solidFill>
                   <a:srgbClr val="FFFFFF"/>
                 </a:solidFill>
@@ -5030,7 +5101,7 @@
                 <a:ea typeface="Noto Sans JP"/>
                 <a:cs typeface="Noto Sans JP"/>
               </a:rPr>
-              <a:t>重ねて確かめる方法がなかった。</a:t>
+              <a:t>家の薬と見比べられない。</a:t>
             </a:r>
           </a:p>
         </p:txBody>
@@ -5061,50 +5132,9 @@
         <p:nvPr/>
       </p:nvGrpSpPr>
       <p:grpSpPr/>
-      <p:sp>
-        <p:nvSpPr>
-          <p:cNvPr id="2" name="TextBox 1"/>
-          <p:cNvSpPr txBox="1"/>
-          <p:nvPr/>
-        </p:nvSpPr>
-        <p:spPr>
-          <a:xfrm>
-            <a:off x="822960" y="731520"/>
-            <a:ext cx="5486400" cy="457200"/>
-          </a:xfrm>
-          <a:prstGeom prst="rect">
-            <a:avLst/>
-          </a:prstGeom>
-          <a:noFill/>
-        </p:spPr>
-        <p:txBody>
-          <a:bodyPr wrap="square" lIns="0" rIns="0" tIns="0" bIns="0" anchor="t">
-            <a:spAutoFit/>
-          </a:bodyPr>
-          <a:lstStyle/>
-          <a:p>
-            <a:pPr algn="l">
-              <a:lnSpc>
-                <a:spcPct val="100000"/>
-              </a:lnSpc>
-            </a:pPr>
-            <a:r>
-              <a:rPr sz="2000" b="1">
-                <a:solidFill>
-                  <a:srgbClr val="2563EB"/>
-                </a:solidFill>
-                <a:latin typeface="Noto Sans JP"/>
-                <a:ea typeface="Noto Sans JP"/>
-                <a:cs typeface="Noto Sans JP"/>
-              </a:rPr>
-              <a:t>だから、作りました</a:t>
-            </a:r>
-          </a:p>
-        </p:txBody>
-      </p:sp>
       <p:pic>
         <p:nvPicPr>
-          <p:cNvPr id="3" name="Picture 2" descr="logo.png"/>
+          <p:cNvPr id="2" name="Picture 1" descr="logo.png"/>
           <p:cNvPicPr>
             <a:picLocks noChangeAspect="1"/>
           </p:cNvPicPr>
@@ -5118,8 +5148,8 @@
         </p:blipFill>
         <p:spPr>
           <a:xfrm>
-            <a:off x="822960" y="1188720"/>
-            <a:ext cx="838200" cy="838200"/>
+            <a:off x="822960" y="640080"/>
+            <a:ext cx="1257300" cy="1257300"/>
           </a:xfrm>
           <a:prstGeom prst="rect">
             <a:avLst/>
@@ -5128,14 +5158,14 @@
       </p:pic>
       <p:sp>
         <p:nvSpPr>
-          <p:cNvPr id="4" name="TextBox 3"/>
+          <p:cNvPr id="3" name="TextBox 2"/>
           <p:cNvSpPr txBox="1"/>
           <p:nvPr/>
         </p:nvSpPr>
         <p:spPr>
           <a:xfrm>
-            <a:off x="1677924" y="1202690"/>
-            <a:ext cx="2514600" cy="855980"/>
+            <a:off x="2105406" y="661035"/>
+            <a:ext cx="3771900" cy="1261110"/>
           </a:xfrm>
           <a:prstGeom prst="rect">
             <a:avLst/>
@@ -5154,7 +5184,7 @@
               </a:lnSpc>
             </a:pPr>
             <a:r>
-              <a:rPr sz="4400" b="0">
+              <a:rPr sz="6600" b="0">
                 <a:solidFill>
                   <a:srgbClr val="1B2A4A"/>
                 </a:solidFill>
@@ -5169,14 +5199,14 @@
       </p:sp>
       <p:sp>
         <p:nvSpPr>
-          <p:cNvPr id="5" name="TextBox 4"/>
+          <p:cNvPr id="4" name="TextBox 3"/>
           <p:cNvSpPr txBox="1"/>
           <p:nvPr/>
         </p:nvSpPr>
         <p:spPr>
           <a:xfrm>
-            <a:off x="3840480" y="1463040"/>
-            <a:ext cx="4114800" cy="365760"/>
+            <a:off x="5257800" y="1325880"/>
+            <a:ext cx="2926080" cy="365760"/>
           </a:xfrm>
           <a:prstGeom prst="rect">
             <a:avLst/>
@@ -5210,14 +5240,14 @@
       </p:sp>
       <p:sp>
         <p:nvSpPr>
-          <p:cNvPr id="6" name="TextBox 5"/>
+          <p:cNvPr id="5" name="TextBox 4"/>
           <p:cNvSpPr txBox="1"/>
           <p:nvPr/>
         </p:nvSpPr>
         <p:spPr>
           <a:xfrm>
-            <a:off x="822960" y="2331720"/>
-            <a:ext cx="6949440" cy="1280160"/>
+            <a:off x="822960" y="2286000"/>
+            <a:ext cx="7498079" cy="1280160"/>
           </a:xfrm>
           <a:prstGeom prst="rect">
             <a:avLst/>
@@ -5269,13 +5299,13 @@
       </p:sp>
       <p:sp>
         <p:nvSpPr>
-          <p:cNvPr id="7" name="Rounded Rectangle 6"/>
+          <p:cNvPr id="6" name="Rounded Rectangle 5"/>
           <p:cNvSpPr/>
           <p:nvPr/>
         </p:nvSpPr>
         <p:spPr>
           <a:xfrm>
-            <a:off x="822960" y="3831336"/>
+            <a:off x="822960" y="3739896"/>
             <a:ext cx="475488" cy="475488"/>
           </a:xfrm>
           <a:prstGeom prst="roundRect">
@@ -5326,13 +5356,13 @@
       </p:sp>
       <p:sp>
         <p:nvSpPr>
-          <p:cNvPr id="8" name="TextBox 7"/>
+          <p:cNvPr id="7" name="TextBox 6"/>
           <p:cNvSpPr txBox="1"/>
           <p:nvPr/>
         </p:nvSpPr>
         <p:spPr>
           <a:xfrm>
-            <a:off x="1508760" y="3794760"/>
+            <a:off x="1508760" y="3703320"/>
             <a:ext cx="6035040" cy="457200"/>
           </a:xfrm>
           <a:prstGeom prst="rect">
@@ -5360,21 +5390,21 @@
                 <a:ea typeface="Noto Sans JP"/>
                 <a:cs typeface="Noto Sans JP"/>
               </a:rPr>
-              <a:t>家の薬と化粧品を登録する</a:t>
-            </a:r>
-          </a:p>
-        </p:txBody>
-      </p:sp>
-      <p:sp>
-        <p:nvSpPr>
-          <p:cNvPr id="9" name="TextBox 8"/>
+              <a:t>家にあるものを登録する</a:t>
+            </a:r>
+          </a:p>
+        </p:txBody>
+      </p:sp>
+      <p:sp>
+        <p:nvSpPr>
+          <p:cNvPr id="8" name="TextBox 7"/>
           <p:cNvSpPr txBox="1"/>
           <p:nvPr/>
         </p:nvSpPr>
         <p:spPr>
           <a:xfrm>
-            <a:off x="1508760" y="4251960"/>
-            <a:ext cx="6217920" cy="365760"/>
+            <a:off x="1508760" y="4160520"/>
+            <a:ext cx="6583680" cy="365760"/>
           </a:xfrm>
           <a:prstGeom prst="rect">
             <a:avLst/>
@@ -5401,20 +5431,20 @@
                 <a:ea typeface="Noto Sans JP"/>
                 <a:cs typeface="Noto Sans JP"/>
               </a:rPr>
-              <a:t>処方薬・市販薬・スキンケアをひとつの在庫に（残量・期限も管理）</a:t>
-            </a:r>
-          </a:p>
-        </p:txBody>
-      </p:sp>
-      <p:sp>
-        <p:nvSpPr>
-          <p:cNvPr id="10" name="Rounded Rectangle 9"/>
+              <a:t>薬も化粧品も、撮れば成分まで入る。これが判定の基準になる。</a:t>
+            </a:r>
+          </a:p>
+        </p:txBody>
+      </p:sp>
+      <p:sp>
+        <p:nvSpPr>
+          <p:cNvPr id="9" name="Rounded Rectangle 8"/>
           <p:cNvSpPr/>
           <p:nvPr/>
         </p:nvSpPr>
         <p:spPr>
           <a:xfrm>
-            <a:off x="822960" y="4700016"/>
+            <a:off x="822960" y="4562856"/>
             <a:ext cx="475488" cy="475488"/>
           </a:xfrm>
           <a:prstGeom prst="roundRect">
@@ -5465,13 +5495,13 @@
       </p:sp>
       <p:sp>
         <p:nvSpPr>
-          <p:cNvPr id="11" name="TextBox 10"/>
+          <p:cNvPr id="10" name="TextBox 9"/>
           <p:cNvSpPr txBox="1"/>
           <p:nvPr/>
         </p:nvSpPr>
         <p:spPr>
           <a:xfrm>
-            <a:off x="1508760" y="4663440"/>
+            <a:off x="1508760" y="4526280"/>
             <a:ext cx="6035040" cy="457200"/>
           </a:xfrm>
           <a:prstGeom prst="rect">
@@ -5499,21 +5529,21 @@
                 <a:ea typeface="Noto Sans JP"/>
                 <a:cs typeface="Noto Sans JP"/>
               </a:rPr>
-              <a:t>店頭で、商品の成分表示を撮る</a:t>
-            </a:r>
-          </a:p>
-        </p:txBody>
-      </p:sp>
-      <p:sp>
-        <p:nvSpPr>
-          <p:cNvPr id="12" name="TextBox 11"/>
+              <a:t>店頭で、成分表示を撮る</a:t>
+            </a:r>
+          </a:p>
+        </p:txBody>
+      </p:sp>
+      <p:sp>
+        <p:nvSpPr>
+          <p:cNvPr id="11" name="TextBox 10"/>
           <p:cNvSpPr txBox="1"/>
           <p:nvPr/>
         </p:nvSpPr>
         <p:spPr>
           <a:xfrm>
-            <a:off x="1508760" y="5120640"/>
-            <a:ext cx="6217920" cy="365760"/>
+            <a:off x="1508760" y="4983480"/>
+            <a:ext cx="6583680" cy="365760"/>
           </a:xfrm>
           <a:prstGeom prst="rect">
             <a:avLst/>
@@ -5540,20 +5570,20 @@
                 <a:ea typeface="Noto Sans JP"/>
                 <a:cs typeface="Noto Sans JP"/>
               </a:rPr>
-              <a:t>商品ごとに書式がばらばらな成分表示も、そのまま読み取る</a:t>
-            </a:r>
-          </a:p>
-        </p:txBody>
-      </p:sp>
-      <p:sp>
-        <p:nvSpPr>
-          <p:cNvPr id="13" name="Rounded Rectangle 12"/>
+              <a:t>気になった商品を撮るだけ。書式がばらばらでも読み取る。</a:t>
+            </a:r>
+          </a:p>
+        </p:txBody>
+      </p:sp>
+      <p:sp>
+        <p:nvSpPr>
+          <p:cNvPr id="12" name="Rounded Rectangle 11"/>
           <p:cNvSpPr/>
           <p:nvPr/>
         </p:nvSpPr>
         <p:spPr>
           <a:xfrm>
-            <a:off x="5557520" y="4727448"/>
+            <a:off x="4719320" y="4590288"/>
             <a:ext cx="868680" cy="329184"/>
           </a:xfrm>
           <a:prstGeom prst="roundRect">
@@ -5606,13 +5636,13 @@
       </p:sp>
       <p:sp>
         <p:nvSpPr>
-          <p:cNvPr id="14" name="Rounded Rectangle 13"/>
+          <p:cNvPr id="13" name="Rounded Rectangle 12"/>
           <p:cNvSpPr/>
           <p:nvPr/>
         </p:nvSpPr>
         <p:spPr>
           <a:xfrm>
-            <a:off x="822960" y="5568696"/>
+            <a:off x="822960" y="5385816"/>
             <a:ext cx="475488" cy="475488"/>
           </a:xfrm>
           <a:prstGeom prst="roundRect">
@@ -5663,13 +5693,13 @@
       </p:sp>
       <p:sp>
         <p:nvSpPr>
-          <p:cNvPr id="15" name="TextBox 14"/>
+          <p:cNvPr id="14" name="TextBox 13"/>
           <p:cNvSpPr txBox="1"/>
           <p:nvPr/>
         </p:nvSpPr>
         <p:spPr>
           <a:xfrm>
-            <a:off x="1508760" y="5532120"/>
+            <a:off x="1508760" y="5349240"/>
             <a:ext cx="6035040" cy="457200"/>
           </a:xfrm>
           <a:prstGeom prst="rect">
@@ -5704,14 +5734,14 @@
       </p:sp>
       <p:sp>
         <p:nvSpPr>
-          <p:cNvPr id="16" name="TextBox 15"/>
+          <p:cNvPr id="15" name="TextBox 14"/>
           <p:cNvSpPr txBox="1"/>
           <p:nvPr/>
         </p:nvSpPr>
         <p:spPr>
           <a:xfrm>
-            <a:off x="1508760" y="5989320"/>
-            <a:ext cx="6217920" cy="365760"/>
+            <a:off x="1508760" y="5806440"/>
+            <a:ext cx="6583680" cy="365760"/>
           </a:xfrm>
           <a:prstGeom prst="rect">
             <a:avLst/>
@@ -5738,20 +5768,20 @@
                 <a:ea typeface="Noto Sans JP"/>
                 <a:cs typeface="Noto Sans JP"/>
               </a:rPr>
-              <a:t>青・黄・赤の3色と、成分名つきの理由で示す</a:t>
-            </a:r>
-          </a:p>
-        </p:txBody>
-      </p:sp>
-      <p:sp>
-        <p:nvSpPr>
-          <p:cNvPr id="17" name="Rounded Rectangle 16"/>
+              <a:t>重なっていないか、一緒に使えるかを、3色と理由で示す。</a:t>
+            </a:r>
+          </a:p>
+        </p:txBody>
+      </p:sp>
+      <p:sp>
+        <p:nvSpPr>
+          <p:cNvPr id="16" name="Rounded Rectangle 15"/>
           <p:cNvSpPr/>
           <p:nvPr/>
         </p:nvSpPr>
         <p:spPr>
           <a:xfrm>
-            <a:off x="4998720" y="5596128"/>
+            <a:off x="4998720" y="5413248"/>
             <a:ext cx="868680" cy="329184"/>
           </a:xfrm>
           <a:prstGeom prst="roundRect">
@@ -5804,7 +5834,7 @@
       </p:sp>
       <p:sp>
         <p:nvSpPr>
-          <p:cNvPr id="18" name="Rounded Rectangle 17"/>
+          <p:cNvPr id="17" name="Rounded Rectangle 16"/>
           <p:cNvSpPr/>
           <p:nvPr/>
         </p:nvSpPr>
@@ -5852,7 +5882,7 @@
       </p:sp>
       <p:pic>
         <p:nvPicPr>
-          <p:cNvPr id="19" name="Picture 18" descr="stock-top.jpg"/>
+          <p:cNvPr id="18" name="Picture 17" descr="stock-top.jpg"/>
           <p:cNvPicPr>
             <a:picLocks noChangeAspect="1"/>
           </p:cNvPicPr>
@@ -5876,7 +5906,7 @@
       </p:pic>
       <p:sp>
         <p:nvSpPr>
-          <p:cNvPr id="20" name="TextBox 19"/>
+          <p:cNvPr id="19" name="TextBox 18"/>
           <p:cNvSpPr txBox="1"/>
           <p:nvPr/>
         </p:nvSpPr>
@@ -5949,7 +5979,7 @@
         </p:nvSpPr>
         <p:spPr>
           <a:xfrm>
-            <a:off x="822960" y="914400"/>
+            <a:off x="822960" y="868680"/>
             <a:ext cx="5486400" cy="457200"/>
           </a:xfrm>
           <a:prstGeom prst="rect">
@@ -5990,8 +6020,8 @@
         </p:nvSpPr>
         <p:spPr>
           <a:xfrm>
-            <a:off x="822960" y="1463040"/>
-            <a:ext cx="5303520" cy="1463040"/>
+            <a:off x="822960" y="1371600"/>
+            <a:ext cx="5303520" cy="1188720"/>
           </a:xfrm>
           <a:prstGeom prst="rect">
             <a:avLst/>
@@ -6010,7 +6040,7 @@
               </a:lnSpc>
             </a:pPr>
             <a:r>
-              <a:rPr sz="3400" b="1">
+              <a:rPr sz="3000" b="1">
                 <a:solidFill>
                   <a:srgbClr val="0F172A"/>
                 </a:solidFill>
@@ -6018,7 +6048,7 @@
                 <a:ea typeface="Noto Sans JP"/>
                 <a:cs typeface="Noto Sans JP"/>
               </a:rPr>
-              <a:t>合わない組み合わせは、</a:t>
+              <a:t>「使っていい？」が、</a:t>
             </a:r>
           </a:p>
           <a:p>
@@ -6028,7 +6058,7 @@
               </a:lnSpc>
             </a:pPr>
             <a:r>
-              <a:rPr sz="3400" b="1">
+              <a:rPr sz="3000" b="1">
                 <a:solidFill>
                   <a:srgbClr val="0F172A"/>
                 </a:solidFill>
@@ -6036,7 +6066,7 @@
                 <a:ea typeface="Noto Sans JP"/>
                 <a:cs typeface="Noto Sans JP"/>
               </a:rPr>
-              <a:t>理由つきで知らせる。</a:t>
+              <a:t>その場でわかる。</a:t>
             </a:r>
           </a:p>
         </p:txBody>
@@ -6049,7 +6079,7 @@
         </p:nvSpPr>
         <p:spPr>
           <a:xfrm>
-            <a:off x="822960" y="2926080"/>
+            <a:off x="822960" y="2651760"/>
             <a:ext cx="5303520" cy="1005840"/>
           </a:xfrm>
           <a:prstGeom prst="rect">
@@ -6069,7 +6099,7 @@
               </a:lnSpc>
             </a:pPr>
             <a:r>
-              <a:rPr sz="1600" b="0">
+              <a:rPr sz="1500" b="0">
                 <a:solidFill>
                   <a:srgbClr val="475569"/>
                 </a:solidFill>
@@ -6077,7 +6107,7 @@
                 <a:ea typeface="Noto Sans JP"/>
                 <a:cs typeface="Noto Sans JP"/>
               </a:rPr>
-              <a:t>例）顔に塗っているステロイド軟膏</a:t>
+              <a:t>家の塗り薬と合わない化粧品は、</a:t>
             </a:r>
           </a:p>
           <a:p>
@@ -6087,7 +6117,7 @@
               </a:lnSpc>
             </a:pPr>
             <a:r>
-              <a:rPr sz="1600" b="0">
+              <a:rPr sz="1500" b="0">
                 <a:solidFill>
                   <a:srgbClr val="475569"/>
                 </a:solidFill>
@@ -6095,7 +6125,7 @@
                 <a:ea typeface="Noto Sans JP"/>
                 <a:cs typeface="Noto Sans JP"/>
               </a:rPr>
-              <a:t>　　× エタノールを含む化粧水</a:t>
+              <a:t>理由つきで教えてくれる。</a:t>
             </a:r>
           </a:p>
           <a:p>
@@ -6105,7 +6135,7 @@
               </a:lnSpc>
             </a:pPr>
             <a:r>
-              <a:rPr sz="1600" b="0">
+              <a:rPr sz="1500" b="0">
                 <a:solidFill>
                   <a:srgbClr val="475569"/>
                 </a:solidFill>
@@ -6113,7 +6143,7 @@
                 <a:ea typeface="Noto Sans JP"/>
                 <a:cs typeface="Noto Sans JP"/>
               </a:rPr>
-              <a:t>　　→ 刺激が強くなる可能性</a:t>
+              <a:t>例）エタノール → 薬を塗った肌の刺激になる可能性</a:t>
             </a:r>
           </a:p>
         </p:txBody>
@@ -6126,7 +6156,7 @@
         </p:nvSpPr>
         <p:spPr>
           <a:xfrm>
-            <a:off x="822960" y="4069080"/>
+            <a:off x="822960" y="3886200"/>
             <a:ext cx="548640" cy="45720"/>
           </a:xfrm>
           <a:prstGeom prst="rect">
@@ -6170,8 +6200,8 @@
         </p:nvSpPr>
         <p:spPr>
           <a:xfrm>
-            <a:off x="822960" y="4343400"/>
-            <a:ext cx="5303520" cy="1005840"/>
+            <a:off x="822960" y="4114800"/>
+            <a:ext cx="5303520" cy="1188720"/>
           </a:xfrm>
           <a:prstGeom prst="rect">
             <a:avLst/>
@@ -6190,7 +6220,7 @@
               </a:lnSpc>
             </a:pPr>
             <a:r>
-              <a:rPr sz="2600" b="1">
+              <a:rPr sz="3000" b="1">
                 <a:solidFill>
                   <a:srgbClr val="0F172A"/>
                 </a:solidFill>
@@ -6198,7 +6228,7 @@
                 <a:ea typeface="Noto Sans JP"/>
                 <a:cs typeface="Noto Sans JP"/>
               </a:rPr>
-              <a:t>塗る順番も、</a:t>
+              <a:t>今ある薬と化粧品の</a:t>
             </a:r>
           </a:p>
           <a:p>
@@ -6208,7 +6238,7 @@
               </a:lnSpc>
             </a:pPr>
             <a:r>
-              <a:rPr sz="2600" b="1">
+              <a:rPr sz="3000" b="1">
                 <a:solidFill>
                   <a:srgbClr val="0F172A"/>
                 </a:solidFill>
@@ -6216,7 +6246,7 @@
                 <a:ea typeface="Noto Sans JP"/>
                 <a:cs typeface="Noto Sans JP"/>
               </a:rPr>
-              <a:t>家にあるもので組み立てる。</a:t>
+              <a:t>使い方が、ひと目でわかる。</a:t>
             </a:r>
           </a:p>
         </p:txBody>
@@ -6229,8 +6259,8 @@
         </p:nvSpPr>
         <p:spPr>
           <a:xfrm>
-            <a:off x="822960" y="5440680"/>
-            <a:ext cx="5303520" cy="365760"/>
+            <a:off x="822960" y="5394960"/>
+            <a:ext cx="5303520" cy="731520"/>
           </a:xfrm>
           <a:prstGeom prst="rect">
             <a:avLst/>
@@ -6257,32 +6287,9 @@
                 <a:ea typeface="Noto Sans JP"/>
                 <a:cs typeface="Noto Sans JP"/>
               </a:rPr>
-              <a:t>順番はAIに任せず、剤形からルールで決めています。</a:t>
-            </a:r>
-          </a:p>
-        </p:txBody>
-      </p:sp>
-      <p:sp>
-        <p:nvSpPr>
-          <p:cNvPr id="8" name="TextBox 7"/>
-          <p:cNvSpPr txBox="1"/>
-          <p:nvPr/>
-        </p:nvSpPr>
-        <p:spPr>
-          <a:xfrm>
-            <a:off x="822960" y="5806440"/>
-            <a:ext cx="5303520" cy="365760"/>
-          </a:xfrm>
-          <a:prstGeom prst="rect">
-            <a:avLst/>
-          </a:prstGeom>
-          <a:noFill/>
-        </p:spPr>
-        <p:txBody>
-          <a:bodyPr wrap="square" lIns="0" rIns="0" tIns="0" bIns="0" anchor="t">
-            <a:spAutoFit/>
-          </a:bodyPr>
-          <a:lstStyle/>
+              <a:t>化粧水から処方の軟膏まで、塗る順番を</a:t>
+            </a:r>
+          </a:p>
           <a:p>
             <a:pPr algn="l">
               <a:lnSpc>
@@ -6298,14 +6305,14 @@
                 <a:ea typeface="Noto Sans JP"/>
                 <a:cs typeface="Noto Sans JP"/>
               </a:rPr>
-              <a:t>赤の判定には、必ず薬剤師・皮膚科への相談を添えます。</a:t>
-            </a:r>
-          </a:p>
-        </p:txBody>
-      </p:sp>
-      <p:sp>
-        <p:nvSpPr>
-          <p:cNvPr id="9" name="Rounded Rectangle 8"/>
+              <a:t>家にあるもので並べて見せる。</a:t>
+            </a:r>
+          </a:p>
+        </p:txBody>
+      </p:sp>
+      <p:sp>
+        <p:nvSpPr>
+          <p:cNvPr id="8" name="Rounded Rectangle 7"/>
           <p:cNvSpPr/>
           <p:nvPr/>
         </p:nvSpPr>
@@ -6353,7 +6360,7 @@
       </p:sp>
       <p:pic>
         <p:nvPicPr>
-          <p:cNvPr id="10" name="Picture 9" descr="red-real.png"/>
+          <p:cNvPr id="9" name="Picture 8" descr="red-real.png"/>
           <p:cNvPicPr>
             <a:picLocks noChangeAspect="1"/>
           </p:cNvPicPr>
@@ -6377,7 +6384,7 @@
       </p:pic>
       <p:sp>
         <p:nvSpPr>
-          <p:cNvPr id="11" name="Rounded Rectangle 10"/>
+          <p:cNvPr id="10" name="Rounded Rectangle 9"/>
           <p:cNvSpPr/>
           <p:nvPr/>
         </p:nvSpPr>
@@ -6425,7 +6432,7 @@
       </p:sp>
       <p:pic>
         <p:nvPicPr>
-          <p:cNvPr id="12" name="Picture 11" descr="routine-crop.jpg"/>
+          <p:cNvPr id="11" name="Picture 10" descr="routine-crop.jpg"/>
           <p:cNvPicPr>
             <a:picLocks noChangeAspect="1"/>
           </p:cNvPicPr>
@@ -6449,7 +6456,7 @@
       </p:pic>
       <p:sp>
         <p:nvSpPr>
-          <p:cNvPr id="13" name="TextBox 12"/>
+          <p:cNvPr id="12" name="TextBox 11"/>
           <p:cNvSpPr txBox="1"/>
           <p:nvPr/>
         </p:nvSpPr>
@@ -6522,7 +6529,7 @@
         </p:nvSpPr>
         <p:spPr>
           <a:xfrm>
-            <a:off x="822960" y="914400"/>
+            <a:off x="822960" y="868680"/>
             <a:ext cx="5486400" cy="457200"/>
           </a:xfrm>
           <a:prstGeom prst="rect">
@@ -6563,8 +6570,8 @@
         </p:nvSpPr>
         <p:spPr>
           <a:xfrm>
-            <a:off x="822960" y="1463040"/>
-            <a:ext cx="7132320" cy="1463040"/>
+            <a:off x="822960" y="1371600"/>
+            <a:ext cx="7132320" cy="1188720"/>
           </a:xfrm>
           <a:prstGeom prst="rect">
             <a:avLst/>
@@ -6583,7 +6590,7 @@
               </a:lnSpc>
             </a:pPr>
             <a:r>
-              <a:rPr sz="3400" b="1">
+              <a:rPr sz="3000" b="1">
                 <a:solidFill>
                   <a:srgbClr val="0F172A"/>
                 </a:solidFill>
@@ -6591,7 +6598,7 @@
                 <a:ea typeface="Noto Sans JP"/>
                 <a:cs typeface="Noto Sans JP"/>
               </a:rPr>
-              <a:t>商品名が違っても、</a:t>
+              <a:t>名前が違っても、</a:t>
             </a:r>
           </a:p>
           <a:p>
@@ -6601,7 +6608,7 @@
               </a:lnSpc>
             </a:pPr>
             <a:r>
-              <a:rPr sz="3400" b="1">
+              <a:rPr sz="3000" b="1">
                 <a:solidFill>
                   <a:srgbClr val="0F172A"/>
                 </a:solidFill>
@@ -6609,7 +6616,7 @@
                 <a:ea typeface="Noto Sans JP"/>
                 <a:cs typeface="Noto Sans JP"/>
               </a:rPr>
-              <a:t>成分で重なりに気づく。</a:t>
+              <a:t>中身が同じなら気づける。</a:t>
             </a:r>
           </a:p>
         </p:txBody>
@@ -6622,8 +6629,8 @@
         </p:nvSpPr>
         <p:spPr>
           <a:xfrm>
-            <a:off x="822960" y="2971800"/>
-            <a:ext cx="7132320" cy="822960"/>
+            <a:off x="822960" y="2651760"/>
+            <a:ext cx="7132320" cy="1005840"/>
           </a:xfrm>
           <a:prstGeom prst="rect">
             <a:avLst/>
@@ -6642,7 +6649,7 @@
               </a:lnSpc>
             </a:pPr>
             <a:r>
-              <a:rPr sz="1600" b="0">
+              <a:rPr sz="1500" b="0">
                 <a:solidFill>
                   <a:srgbClr val="475569"/>
                 </a:solidFill>
@@ -6650,7 +6657,7 @@
                 <a:ea typeface="Noto Sans JP"/>
                 <a:cs typeface="Noto Sans JP"/>
               </a:rPr>
-              <a:t>例）店頭の解熱鎮痛薬 × 家の「イブA錠」</a:t>
+              <a:t>店の解熱鎮痛薬と、家の「イブA錠」。商品名は違っても、</a:t>
             </a:r>
           </a:p>
           <a:p>
@@ -6660,7 +6667,7 @@
               </a:lnSpc>
             </a:pPr>
             <a:r>
-              <a:rPr sz="1600" b="0">
+              <a:rPr sz="1500" b="0">
                 <a:solidFill>
                   <a:srgbClr val="475569"/>
                 </a:solidFill>
@@ -6668,7 +6675,7 @@
                 <a:ea typeface="Noto Sans JP"/>
                 <a:cs typeface="Noto Sans JP"/>
               </a:rPr>
-              <a:t>　　→ 同じイブプロフェン</a:t>
+              <a:t>どちらもイブプロフェン。成分で見比べるから気づける。</a:t>
             </a:r>
           </a:p>
         </p:txBody>
@@ -6681,7 +6688,7 @@
         </p:nvSpPr>
         <p:spPr>
           <a:xfrm>
-            <a:off x="822960" y="4069080"/>
+            <a:off x="822960" y="3886200"/>
             <a:ext cx="548640" cy="45720"/>
           </a:xfrm>
           <a:prstGeom prst="rect">
@@ -6725,8 +6732,8 @@
         </p:nvSpPr>
         <p:spPr>
           <a:xfrm>
-            <a:off x="822960" y="4343400"/>
-            <a:ext cx="7132320" cy="1005840"/>
+            <a:off x="822960" y="4114800"/>
+            <a:ext cx="7132320" cy="1188720"/>
           </a:xfrm>
           <a:prstGeom prst="rect">
             <a:avLst/>
@@ -6745,7 +6752,7 @@
               </a:lnSpc>
             </a:pPr>
             <a:r>
-              <a:rPr sz="2600" b="1">
+              <a:rPr sz="3000" b="1">
                 <a:solidFill>
                   <a:srgbClr val="0F172A"/>
                 </a:solidFill>
@@ -6763,7 +6770,7 @@
               </a:lnSpc>
             </a:pPr>
             <a:r>
-              <a:rPr sz="2600" b="1">
+              <a:rPr sz="3000" b="1">
                 <a:solidFill>
                   <a:srgbClr val="0F172A"/>
                 </a:solidFill>
@@ -6771,7 +6778,7 @@
                 <a:ea typeface="Noto Sans JP"/>
                 <a:cs typeface="Noto Sans JP"/>
               </a:rPr>
-              <a:t>買わなくていいと伝える。</a:t>
+              <a:t>買わずに済む。</a:t>
             </a:r>
           </a:p>
         </p:txBody>
@@ -6784,8 +6791,8 @@
         </p:nvSpPr>
         <p:spPr>
           <a:xfrm>
-            <a:off x="822960" y="5440680"/>
-            <a:ext cx="7132320" cy="365760"/>
+            <a:off x="822960" y="5394960"/>
+            <a:ext cx="7132320" cy="731520"/>
           </a:xfrm>
           <a:prstGeom prst="rect">
             <a:avLst/>
@@ -6812,7 +6819,25 @@
                 <a:ea typeface="Noto Sans JP"/>
                 <a:cs typeface="Noto Sans JP"/>
               </a:rPr>
-              <a:t>重なっている家の薬を、その場で並べて見せます。</a:t>
+              <a:t>重なっている家の薬を、その場で並べて見せる。</a:t>
+            </a:r>
+          </a:p>
+          <a:p>
+            <a:pPr algn="l">
+              <a:lnSpc>
+                <a:spcPct val="100000"/>
+              </a:lnSpc>
+            </a:pPr>
+            <a:r>
+              <a:rPr sz="1500" b="0">
+                <a:solidFill>
+                  <a:srgbClr val="475569"/>
+                </a:solidFill>
+                <a:latin typeface="Noto Sans JP"/>
+                <a:ea typeface="Noto Sans JP"/>
+                <a:cs typeface="Noto Sans JP"/>
+              </a:rPr>
+              <a:t>無駄な買い物にも、同じ成分の重ね飲みにも気づける。</a:t>
             </a:r>
           </a:p>
         </p:txBody>
@@ -6939,6 +6964,716 @@
 </file>
 
 <file path=ppt/slides/slide8.xml><?xml version="1.0" encoding="utf-8"?>
+<p:sld xmlns:a="http://schemas.openxmlformats.org/drawingml/2006/main" xmlns:p="http://schemas.openxmlformats.org/presentationml/2006/main" xmlns:r="http://schemas.openxmlformats.org/officeDocument/2006/relationships">
+  <p:cSld>
+    <p:bg>
+      <p:bgPr>
+        <a:solidFill>
+          <a:srgbClr val="FFFFFF"/>
+        </a:solidFill>
+        <a:effectLst/>
+      </p:bgPr>
+    </p:bg>
+    <p:spTree>
+      <p:nvGrpSpPr>
+        <p:cNvPr id="1" name=""/>
+        <p:cNvGrpSpPr/>
+        <p:nvPr/>
+      </p:nvGrpSpPr>
+      <p:grpSpPr/>
+      <p:sp>
+        <p:nvSpPr>
+          <p:cNvPr id="2" name="TextBox 1"/>
+          <p:cNvSpPr txBox="1"/>
+          <p:nvPr/>
+        </p:nvSpPr>
+        <p:spPr>
+          <a:xfrm>
+            <a:off x="0" y="868680"/>
+            <a:ext cx="12191695" cy="457200"/>
+          </a:xfrm>
+          <a:prstGeom prst="rect">
+            <a:avLst/>
+          </a:prstGeom>
+          <a:noFill/>
+        </p:spPr>
+        <p:txBody>
+          <a:bodyPr wrap="square" lIns="0" rIns="0" tIns="0" bIns="0" anchor="t">
+            <a:spAutoFit/>
+          </a:bodyPr>
+          <a:lstStyle/>
+          <a:p>
+            <a:pPr algn="ctr">
+              <a:lnSpc>
+                <a:spcPct val="100000"/>
+              </a:lnSpc>
+            </a:pPr>
+            <a:r>
+              <a:rPr sz="2000" b="1">
+                <a:solidFill>
+                  <a:srgbClr val="2563EB"/>
+                </a:solidFill>
+                <a:latin typeface="Noto Sans JP"/>
+                <a:ea typeface="Noto Sans JP"/>
+                <a:cs typeface="Noto Sans JP"/>
+              </a:rPr>
+              <a:t>Overlai が目指すこと</a:t>
+            </a:r>
+          </a:p>
+        </p:txBody>
+      </p:sp>
+      <p:sp>
+        <p:nvSpPr>
+          <p:cNvPr id="3" name="TextBox 2"/>
+          <p:cNvSpPr txBox="1"/>
+          <p:nvPr/>
+        </p:nvSpPr>
+        <p:spPr>
+          <a:xfrm>
+            <a:off x="0" y="1371600"/>
+            <a:ext cx="12191695" cy="1005840"/>
+          </a:xfrm>
+          <a:prstGeom prst="rect">
+            <a:avLst/>
+          </a:prstGeom>
+          <a:noFill/>
+        </p:spPr>
+        <p:txBody>
+          <a:bodyPr wrap="square" lIns="0" rIns="0" tIns="0" bIns="0" anchor="t">
+            <a:spAutoFit/>
+          </a:bodyPr>
+          <a:lstStyle/>
+          <a:p>
+            <a:pPr algn="ctr">
+              <a:lnSpc>
+                <a:spcPct val="100000"/>
+              </a:lnSpc>
+            </a:pPr>
+            <a:r>
+              <a:rPr sz="5400" b="1">
+                <a:solidFill>
+                  <a:srgbClr val="1B2A4A"/>
+                </a:solidFill>
+                <a:latin typeface="Noto Sans JP"/>
+                <a:ea typeface="Noto Sans JP"/>
+                <a:cs typeface="Noto Sans JP"/>
+              </a:rPr>
+              <a:t>重ねる前に、重ねて見る。</a:t>
+            </a:r>
+          </a:p>
+        </p:txBody>
+      </p:sp>
+      <p:sp>
+        <p:nvSpPr>
+          <p:cNvPr id="4" name="Rounded Rectangle 3"/>
+          <p:cNvSpPr/>
+          <p:nvPr/>
+        </p:nvSpPr>
+        <p:spPr>
+          <a:xfrm>
+            <a:off x="822960" y="2788920"/>
+            <a:ext cx="3401568" cy="2514600"/>
+          </a:xfrm>
+          <a:prstGeom prst="roundRect">
+            <a:avLst>
+              <a:gd name="adj" fmla="val 9090"/>
+            </a:avLst>
+          </a:prstGeom>
+          <a:solidFill>
+            <a:srgbClr val="F5F7FA"/>
+          </a:solidFill>
+          <a:ln>
+            <a:noFill/>
+          </a:ln>
+          <a:effectLst/>
+        </p:spPr>
+        <p:style>
+          <a:lnRef idx="1">
+            <a:schemeClr val="accent1"/>
+          </a:lnRef>
+          <a:fillRef idx="3">
+            <a:schemeClr val="accent1"/>
+          </a:fillRef>
+          <a:effectRef idx="2">
+            <a:schemeClr val="accent1"/>
+          </a:effectRef>
+          <a:fontRef idx="minor">
+            <a:schemeClr val="lt1"/>
+          </a:fontRef>
+        </p:style>
+        <p:txBody>
+          <a:bodyPr rtlCol="0" anchor="ctr" lIns="0" rIns="0" tIns="0" bIns="0"/>
+          <a:lstStyle/>
+          <a:p>
+            <a:pPr algn="ctr"/>
+          </a:p>
+        </p:txBody>
+      </p:sp>
+      <p:sp>
+        <p:nvSpPr>
+          <p:cNvPr id="5" name="TextBox 4"/>
+          <p:cNvSpPr txBox="1"/>
+          <p:nvPr/>
+        </p:nvSpPr>
+        <p:spPr>
+          <a:xfrm>
+            <a:off x="1188720" y="3108960"/>
+            <a:ext cx="2834640" cy="548640"/>
+          </a:xfrm>
+          <a:prstGeom prst="rect">
+            <a:avLst/>
+          </a:prstGeom>
+          <a:noFill/>
+        </p:spPr>
+        <p:txBody>
+          <a:bodyPr wrap="square" lIns="0" rIns="0" tIns="0" bIns="0" anchor="t">
+            <a:spAutoFit/>
+          </a:bodyPr>
+          <a:lstStyle/>
+          <a:p>
+            <a:pPr algn="l">
+              <a:lnSpc>
+                <a:spcPct val="100000"/>
+              </a:lnSpc>
+            </a:pPr>
+            <a:r>
+              <a:rPr sz="2600" b="1">
+                <a:solidFill>
+                  <a:srgbClr val="1B2A4A"/>
+                </a:solidFill>
+                <a:latin typeface="Noto Sans JP"/>
+                <a:ea typeface="Noto Sans JP"/>
+                <a:cs typeface="Noto Sans JP"/>
+              </a:rPr>
+              <a:t>買い重ねる前に</a:t>
+            </a:r>
+          </a:p>
+        </p:txBody>
+      </p:sp>
+      <p:sp>
+        <p:nvSpPr>
+          <p:cNvPr id="6" name="TextBox 5"/>
+          <p:cNvSpPr txBox="1"/>
+          <p:nvPr/>
+        </p:nvSpPr>
+        <p:spPr>
+          <a:xfrm>
+            <a:off x="1188720" y="3794760"/>
+            <a:ext cx="2834640" cy="914400"/>
+          </a:xfrm>
+          <a:prstGeom prst="rect">
+            <a:avLst/>
+          </a:prstGeom>
+          <a:noFill/>
+        </p:spPr>
+        <p:txBody>
+          <a:bodyPr wrap="square" lIns="0" rIns="0" tIns="0" bIns="0" anchor="t">
+            <a:spAutoFit/>
+          </a:bodyPr>
+          <a:lstStyle/>
+          <a:p>
+            <a:pPr algn="l">
+              <a:lnSpc>
+                <a:spcPct val="100000"/>
+              </a:lnSpc>
+            </a:pPr>
+            <a:r>
+              <a:rPr sz="1800" b="0">
+                <a:solidFill>
+                  <a:srgbClr val="475569"/>
+                </a:solidFill>
+                <a:latin typeface="Noto Sans JP"/>
+                <a:ea typeface="Noto Sans JP"/>
+                <a:cs typeface="Noto Sans JP"/>
+              </a:rPr>
+              <a:t>もう家にある？</a:t>
+            </a:r>
+          </a:p>
+          <a:p>
+            <a:pPr algn="l">
+              <a:lnSpc>
+                <a:spcPct val="100000"/>
+              </a:lnSpc>
+            </a:pPr>
+            <a:r>
+              <a:rPr sz="1800" b="0">
+                <a:solidFill>
+                  <a:srgbClr val="475569"/>
+                </a:solidFill>
+                <a:latin typeface="Noto Sans JP"/>
+                <a:ea typeface="Noto Sans JP"/>
+                <a:cs typeface="Noto Sans JP"/>
+              </a:rPr>
+              <a:t>名前違いの同じ薬は？</a:t>
+            </a:r>
+          </a:p>
+        </p:txBody>
+      </p:sp>
+      <p:sp>
+        <p:nvSpPr>
+          <p:cNvPr id="7" name="TextBox 6"/>
+          <p:cNvSpPr txBox="1"/>
+          <p:nvPr/>
+        </p:nvSpPr>
+        <p:spPr>
+          <a:xfrm>
+            <a:off x="1188720" y="4754880"/>
+            <a:ext cx="2834640" cy="365760"/>
+          </a:xfrm>
+          <a:prstGeom prst="rect">
+            <a:avLst/>
+          </a:prstGeom>
+          <a:noFill/>
+        </p:spPr>
+        <p:txBody>
+          <a:bodyPr wrap="square" lIns="0" rIns="0" tIns="0" bIns="0" anchor="t">
+            <a:spAutoFit/>
+          </a:bodyPr>
+          <a:lstStyle/>
+          <a:p>
+            <a:pPr algn="l">
+              <a:lnSpc>
+                <a:spcPct val="100000"/>
+              </a:lnSpc>
+            </a:pPr>
+            <a:r>
+              <a:rPr sz="1400" b="1">
+                <a:solidFill>
+                  <a:srgbClr val="2563EB"/>
+                </a:solidFill>
+                <a:latin typeface="Noto Sans JP"/>
+                <a:ea typeface="Noto Sans JP"/>
+                <a:cs typeface="Noto Sans JP"/>
+              </a:rPr>
+              <a:t>重複</a:t>
+            </a:r>
+          </a:p>
+        </p:txBody>
+      </p:sp>
+      <p:sp>
+        <p:nvSpPr>
+          <p:cNvPr id="8" name="Rounded Rectangle 7"/>
+          <p:cNvSpPr/>
+          <p:nvPr/>
+        </p:nvSpPr>
+        <p:spPr>
+          <a:xfrm>
+            <a:off x="4398264" y="2788920"/>
+            <a:ext cx="3401568" cy="2514600"/>
+          </a:xfrm>
+          <a:prstGeom prst="roundRect">
+            <a:avLst>
+              <a:gd name="adj" fmla="val 9090"/>
+            </a:avLst>
+          </a:prstGeom>
+          <a:solidFill>
+            <a:srgbClr val="F5F7FA"/>
+          </a:solidFill>
+          <a:ln>
+            <a:noFill/>
+          </a:ln>
+          <a:effectLst/>
+        </p:spPr>
+        <p:style>
+          <a:lnRef idx="1">
+            <a:schemeClr val="accent1"/>
+          </a:lnRef>
+          <a:fillRef idx="3">
+            <a:schemeClr val="accent1"/>
+          </a:fillRef>
+          <a:effectRef idx="2">
+            <a:schemeClr val="accent1"/>
+          </a:effectRef>
+          <a:fontRef idx="minor">
+            <a:schemeClr val="lt1"/>
+          </a:fontRef>
+        </p:style>
+        <p:txBody>
+          <a:bodyPr rtlCol="0" anchor="ctr" lIns="0" rIns="0" tIns="0" bIns="0"/>
+          <a:lstStyle/>
+          <a:p>
+            <a:pPr algn="ctr"/>
+          </a:p>
+        </p:txBody>
+      </p:sp>
+      <p:sp>
+        <p:nvSpPr>
+          <p:cNvPr id="9" name="TextBox 8"/>
+          <p:cNvSpPr txBox="1"/>
+          <p:nvPr/>
+        </p:nvSpPr>
+        <p:spPr>
+          <a:xfrm>
+            <a:off x="4764024" y="3108960"/>
+            <a:ext cx="2834640" cy="548640"/>
+          </a:xfrm>
+          <a:prstGeom prst="rect">
+            <a:avLst/>
+          </a:prstGeom>
+          <a:noFill/>
+        </p:spPr>
+        <p:txBody>
+          <a:bodyPr wrap="square" lIns="0" rIns="0" tIns="0" bIns="0" anchor="t">
+            <a:spAutoFit/>
+          </a:bodyPr>
+          <a:lstStyle/>
+          <a:p>
+            <a:pPr algn="l">
+              <a:lnSpc>
+                <a:spcPct val="100000"/>
+              </a:lnSpc>
+            </a:pPr>
+            <a:r>
+              <a:rPr sz="2600" b="1">
+                <a:solidFill>
+                  <a:srgbClr val="1B2A4A"/>
+                </a:solidFill>
+                <a:latin typeface="Noto Sans JP"/>
+                <a:ea typeface="Noto Sans JP"/>
+                <a:cs typeface="Noto Sans JP"/>
+              </a:rPr>
+              <a:t>塗り重ねる前に</a:t>
+            </a:r>
+          </a:p>
+        </p:txBody>
+      </p:sp>
+      <p:sp>
+        <p:nvSpPr>
+          <p:cNvPr id="10" name="TextBox 9"/>
+          <p:cNvSpPr txBox="1"/>
+          <p:nvPr/>
+        </p:nvSpPr>
+        <p:spPr>
+          <a:xfrm>
+            <a:off x="4764024" y="3794760"/>
+            <a:ext cx="2834640" cy="914400"/>
+          </a:xfrm>
+          <a:prstGeom prst="rect">
+            <a:avLst/>
+          </a:prstGeom>
+          <a:noFill/>
+        </p:spPr>
+        <p:txBody>
+          <a:bodyPr wrap="square" lIns="0" rIns="0" tIns="0" bIns="0" anchor="t">
+            <a:spAutoFit/>
+          </a:bodyPr>
+          <a:lstStyle/>
+          <a:p>
+            <a:pPr algn="l">
+              <a:lnSpc>
+                <a:spcPct val="100000"/>
+              </a:lnSpc>
+            </a:pPr>
+            <a:r>
+              <a:rPr sz="1800" b="0">
+                <a:solidFill>
+                  <a:srgbClr val="475569"/>
+                </a:solidFill>
+                <a:latin typeface="Noto Sans JP"/>
+                <a:ea typeface="Noto Sans JP"/>
+                <a:cs typeface="Noto Sans JP"/>
+              </a:rPr>
+              <a:t>一緒に使っていい？</a:t>
+            </a:r>
+          </a:p>
+          <a:p>
+            <a:pPr algn="l">
+              <a:lnSpc>
+                <a:spcPct val="100000"/>
+              </a:lnSpc>
+            </a:pPr>
+            <a:r>
+              <a:rPr sz="1800" b="0">
+                <a:solidFill>
+                  <a:srgbClr val="475569"/>
+                </a:solidFill>
+                <a:latin typeface="Noto Sans JP"/>
+                <a:ea typeface="Noto Sans JP"/>
+                <a:cs typeface="Noto Sans JP"/>
+              </a:rPr>
+              <a:t>どれを先に塗る？</a:t>
+            </a:r>
+          </a:p>
+        </p:txBody>
+      </p:sp>
+      <p:sp>
+        <p:nvSpPr>
+          <p:cNvPr id="11" name="TextBox 10"/>
+          <p:cNvSpPr txBox="1"/>
+          <p:nvPr/>
+        </p:nvSpPr>
+        <p:spPr>
+          <a:xfrm>
+            <a:off x="4764024" y="4754880"/>
+            <a:ext cx="2834640" cy="365760"/>
+          </a:xfrm>
+          <a:prstGeom prst="rect">
+            <a:avLst/>
+          </a:prstGeom>
+          <a:noFill/>
+        </p:spPr>
+        <p:txBody>
+          <a:bodyPr wrap="square" lIns="0" rIns="0" tIns="0" bIns="0" anchor="t">
+            <a:spAutoFit/>
+          </a:bodyPr>
+          <a:lstStyle/>
+          <a:p>
+            <a:pPr algn="l">
+              <a:lnSpc>
+                <a:spcPct val="100000"/>
+              </a:lnSpc>
+            </a:pPr>
+            <a:r>
+              <a:rPr sz="1400" b="1">
+                <a:solidFill>
+                  <a:srgbClr val="2563EB"/>
+                </a:solidFill>
+                <a:latin typeface="Noto Sans JP"/>
+                <a:ea typeface="Noto Sans JP"/>
+                <a:cs typeface="Noto Sans JP"/>
+              </a:rPr>
+              <a:t>組み合わせ・塗る順番</a:t>
+            </a:r>
+          </a:p>
+        </p:txBody>
+      </p:sp>
+      <p:sp>
+        <p:nvSpPr>
+          <p:cNvPr id="12" name="Rounded Rectangle 11"/>
+          <p:cNvSpPr/>
+          <p:nvPr/>
+        </p:nvSpPr>
+        <p:spPr>
+          <a:xfrm>
+            <a:off x="7973568" y="2788920"/>
+            <a:ext cx="3401568" cy="2514600"/>
+          </a:xfrm>
+          <a:prstGeom prst="roundRect">
+            <a:avLst>
+              <a:gd name="adj" fmla="val 9090"/>
+            </a:avLst>
+          </a:prstGeom>
+          <a:solidFill>
+            <a:srgbClr val="F5F7FA"/>
+          </a:solidFill>
+          <a:ln>
+            <a:noFill/>
+          </a:ln>
+          <a:effectLst/>
+        </p:spPr>
+        <p:style>
+          <a:lnRef idx="1">
+            <a:schemeClr val="accent1"/>
+          </a:lnRef>
+          <a:fillRef idx="3">
+            <a:schemeClr val="accent1"/>
+          </a:fillRef>
+          <a:effectRef idx="2">
+            <a:schemeClr val="accent1"/>
+          </a:effectRef>
+          <a:fontRef idx="minor">
+            <a:schemeClr val="lt1"/>
+          </a:fontRef>
+        </p:style>
+        <p:txBody>
+          <a:bodyPr rtlCol="0" anchor="ctr" lIns="0" rIns="0" tIns="0" bIns="0"/>
+          <a:lstStyle/>
+          <a:p>
+            <a:pPr algn="ctr"/>
+          </a:p>
+        </p:txBody>
+      </p:sp>
+      <p:sp>
+        <p:nvSpPr>
+          <p:cNvPr id="13" name="TextBox 12"/>
+          <p:cNvSpPr txBox="1"/>
+          <p:nvPr/>
+        </p:nvSpPr>
+        <p:spPr>
+          <a:xfrm>
+            <a:off x="8339328" y="3108960"/>
+            <a:ext cx="2834640" cy="548640"/>
+          </a:xfrm>
+          <a:prstGeom prst="rect">
+            <a:avLst/>
+          </a:prstGeom>
+          <a:noFill/>
+        </p:spPr>
+        <p:txBody>
+          <a:bodyPr wrap="square" lIns="0" rIns="0" tIns="0" bIns="0" anchor="t">
+            <a:spAutoFit/>
+          </a:bodyPr>
+          <a:lstStyle/>
+          <a:p>
+            <a:pPr algn="l">
+              <a:lnSpc>
+                <a:spcPct val="100000"/>
+              </a:lnSpc>
+            </a:pPr>
+            <a:r>
+              <a:rPr sz="2600" b="1">
+                <a:solidFill>
+                  <a:srgbClr val="1B2A4A"/>
+                </a:solidFill>
+                <a:latin typeface="Noto Sans JP"/>
+                <a:ea typeface="Noto Sans JP"/>
+                <a:cs typeface="Noto Sans JP"/>
+              </a:rPr>
+              <a:t>飲み合わせる前に</a:t>
+            </a:r>
+          </a:p>
+        </p:txBody>
+      </p:sp>
+      <p:sp>
+        <p:nvSpPr>
+          <p:cNvPr id="14" name="TextBox 13"/>
+          <p:cNvSpPr txBox="1"/>
+          <p:nvPr/>
+        </p:nvSpPr>
+        <p:spPr>
+          <a:xfrm>
+            <a:off x="8339328" y="3794760"/>
+            <a:ext cx="2834640" cy="914400"/>
+          </a:xfrm>
+          <a:prstGeom prst="rect">
+            <a:avLst/>
+          </a:prstGeom>
+          <a:noFill/>
+        </p:spPr>
+        <p:txBody>
+          <a:bodyPr wrap="square" lIns="0" rIns="0" tIns="0" bIns="0" anchor="t">
+            <a:spAutoFit/>
+          </a:bodyPr>
+          <a:lstStyle/>
+          <a:p>
+            <a:pPr algn="l">
+              <a:lnSpc>
+                <a:spcPct val="100000"/>
+              </a:lnSpc>
+            </a:pPr>
+            <a:r>
+              <a:rPr sz="1800" b="0">
+                <a:solidFill>
+                  <a:srgbClr val="475569"/>
+                </a:solidFill>
+                <a:latin typeface="Noto Sans JP"/>
+                <a:ea typeface="Noto Sans JP"/>
+                <a:cs typeface="Noto Sans JP"/>
+              </a:rPr>
+              <a:t>今飲んでいる薬と</a:t>
+            </a:r>
+          </a:p>
+          <a:p>
+            <a:pPr algn="l">
+              <a:lnSpc>
+                <a:spcPct val="100000"/>
+              </a:lnSpc>
+            </a:pPr>
+            <a:r>
+              <a:rPr sz="1800" b="0">
+                <a:solidFill>
+                  <a:srgbClr val="475569"/>
+                </a:solidFill>
+                <a:latin typeface="Noto Sans JP"/>
+                <a:ea typeface="Noto Sans JP"/>
+                <a:cs typeface="Noto Sans JP"/>
+              </a:rPr>
+              <a:t>一緒で大丈夫？</a:t>
+            </a:r>
+          </a:p>
+        </p:txBody>
+      </p:sp>
+      <p:sp>
+        <p:nvSpPr>
+          <p:cNvPr id="15" name="TextBox 14"/>
+          <p:cNvSpPr txBox="1"/>
+          <p:nvPr/>
+        </p:nvSpPr>
+        <p:spPr>
+          <a:xfrm>
+            <a:off x="8339328" y="4754880"/>
+            <a:ext cx="2834640" cy="365760"/>
+          </a:xfrm>
+          <a:prstGeom prst="rect">
+            <a:avLst/>
+          </a:prstGeom>
+          <a:noFill/>
+        </p:spPr>
+        <p:txBody>
+          <a:bodyPr wrap="square" lIns="0" rIns="0" tIns="0" bIns="0" anchor="t">
+            <a:spAutoFit/>
+          </a:bodyPr>
+          <a:lstStyle/>
+          <a:p>
+            <a:pPr algn="l">
+              <a:lnSpc>
+                <a:spcPct val="100000"/>
+              </a:lnSpc>
+            </a:pPr>
+            <a:r>
+              <a:rPr sz="1400" b="1">
+                <a:solidFill>
+                  <a:srgbClr val="2563EB"/>
+                </a:solidFill>
+                <a:latin typeface="Noto Sans JP"/>
+                <a:ea typeface="Noto Sans JP"/>
+                <a:cs typeface="Noto Sans JP"/>
+              </a:rPr>
+              <a:t>飲み合わせ</a:t>
+            </a:r>
+          </a:p>
+        </p:txBody>
+      </p:sp>
+      <p:sp>
+        <p:nvSpPr>
+          <p:cNvPr id="16" name="TextBox 15"/>
+          <p:cNvSpPr txBox="1"/>
+          <p:nvPr/>
+        </p:nvSpPr>
+        <p:spPr>
+          <a:xfrm>
+            <a:off x="0" y="5715000"/>
+            <a:ext cx="12191695" cy="457200"/>
+          </a:xfrm>
+          <a:prstGeom prst="rect">
+            <a:avLst/>
+          </a:prstGeom>
+          <a:noFill/>
+        </p:spPr>
+        <p:txBody>
+          <a:bodyPr wrap="square" lIns="0" rIns="0" tIns="0" bIns="0" anchor="t">
+            <a:spAutoFit/>
+          </a:bodyPr>
+          <a:lstStyle/>
+          <a:p>
+            <a:pPr algn="ctr">
+              <a:lnSpc>
+                <a:spcPct val="100000"/>
+              </a:lnSpc>
+            </a:pPr>
+            <a:r>
+              <a:rPr sz="2000" b="1">
+                <a:solidFill>
+                  <a:srgbClr val="475569"/>
+                </a:solidFill>
+                <a:latin typeface="Noto Sans JP"/>
+                <a:ea typeface="Noto Sans JP"/>
+                <a:cs typeface="Noto Sans JP"/>
+              </a:rPr>
+              <a:t>薬も化粧品も、家にあるものを基準に考える。</a:t>
+            </a:r>
+          </a:p>
+        </p:txBody>
+      </p:sp>
+    </p:spTree>
+  </p:cSld>
+  <p:clrMapOvr>
+    <a:masterClrMapping/>
+  </p:clrMapOvr>
+</p:sld>
+</file>
+
+<file path=ppt/slides/slide9.xml><?xml version="1.0" encoding="utf-8"?>
 <p:sld xmlns:a="http://schemas.openxmlformats.org/drawingml/2006/main" xmlns:p="http://schemas.openxmlformats.org/presentationml/2006/main" xmlns:r="http://schemas.openxmlformats.org/officeDocument/2006/relationships">
   <p:cSld>
     <p:bg>
@@ -6992,7 +7727,7 @@
                 <a:ea typeface="Noto Sans JP"/>
                 <a:cs typeface="Noto Sans JP"/>
               </a:rPr>
-              <a:t>組み合わせも、重複も、店頭で。</a:t>
+              <a:t>買うときも、使うときも、家にあるものから。</a:t>
             </a:r>
           </a:p>
         </p:txBody>
@@ -7098,7 +7833,7 @@
                 <a:ea typeface="Noto Sans JP"/>
                 <a:cs typeface="Noto Sans JP"/>
               </a:rPr>
-              <a:t>買う前に、家の棚を重ねて見る。</a:t>
+              <a:t>重ねる前に、重ねて見る。</a:t>
             </a:r>
           </a:p>
         </p:txBody>

--- a/docs/ピッチ/Overlai_本選ピッチ.pptx
+++ b/docs/ピッチ/Overlai_本選ピッチ.pptx
@@ -5768,7 +5768,7 @@
                 <a:ea typeface="Noto Sans JP"/>
                 <a:cs typeface="Noto Sans JP"/>
               </a:rPr>
-              <a:t>重なっていないか、一緒に使えるかを、3色と理由で示す。</a:t>
+              <a:t>重複も、薬との組み合わせも考えて、買うべきかを3色と理由で伝える。</a:t>
             </a:r>
           </a:p>
         </p:txBody>

--- a/docs/ピッチ/Overlai_本選ピッチ.pptx
+++ b/docs/ピッチ/Overlai_本選ピッチ.pptx
@@ -720,7 +720,7 @@
           <a:lstStyle/>
           <a:p>
             <a:r>
-              <a:t>どの迷いも、家にある薬と見比べれば答えが出ます。でも、店の棚の前では、それができません。</a:t>
+              <a:t>どの迷いも、家にある薬と見比べないと答えが出ません。でも、店の棚の前では、それができません。</a:t>
             </a:r>
           </a:p>
         </p:txBody>
@@ -790,7 +790,7 @@
           <a:lstStyle/>
           <a:p>
             <a:r>
-              <a:t>そこで作ったOverlaiは、店頭で撮るだけで、生成AIが家にあるものと重ねて判定します。</a:t>
+              <a:t>そこで作ったのが、Overlaiです。店頭で撮るだけで、生成AIが家にあるものと重ねて判定し、出典つきで理由を示します。</a:t>
             </a:r>
           </a:p>
         </p:txBody>
@@ -860,7 +860,7 @@
           <a:lstStyle/>
           <a:p>
             <a:r>
-              <a:t>使っていいかがその場で分かり、塗る順番まで教えてくれます。</a:t>
+              <a:t>使っていいかの目安がその場で分かり、塗る順番まで案内します。</a:t>
             </a:r>
           </a:p>
         </p:txBody>
@@ -1000,7 +1000,7 @@
           <a:lstStyle/>
           <a:p>
             <a:r>
-              <a:t>買い重ねる前に。塗り重ねる前に。飲み合わせる前に。</a:t>
+              <a:t>買い重ねる前に。塗り重ねる前に。一緒に飲む前に。</a:t>
             </a:r>
           </a:p>
         </p:txBody>
@@ -4760,7 +4760,7 @@
                 <a:ea typeface="Noto Sans JP"/>
                 <a:cs typeface="Noto Sans JP"/>
               </a:rPr>
-              <a:t>風邪薬を買って家に帰ると、似たような薬がもう家にあった。</a:t>
+              <a:t>風邪薬を買って帰ると、似たような薬がもう家にあった。</a:t>
             </a:r>
           </a:p>
         </p:txBody>
@@ -4998,7 +4998,7 @@
                 <a:ea typeface="Noto Sans JP"/>
                 <a:cs typeface="Noto Sans JP"/>
               </a:rPr>
-              <a:t>どの迷いも、家にある薬と見比べれば答えが出る。</a:t>
+              <a:t>どの迷いも、家にある薬と見比べないと答えが出ない。</a:t>
             </a:r>
           </a:p>
         </p:txBody>
@@ -5768,7 +5768,7 @@
                 <a:ea typeface="Noto Sans JP"/>
                 <a:cs typeface="Noto Sans JP"/>
               </a:rPr>
-              <a:t>重複も、薬との組み合わせも考えて、買うべきかを3色と理由で伝える。</a:t>
+              <a:t>重複も組み合わせも考え、買うべきかを3色と出典つきの理由で伝える。</a:t>
             </a:r>
           </a:p>
         </p:txBody>
@@ -5840,21 +5840,19 @@
         </p:nvSpPr>
         <p:spPr>
           <a:xfrm>
-            <a:off x="8650224" y="420624"/>
-            <a:ext cx="2784282" cy="5833872"/>
+            <a:off x="1508760" y="6263640"/>
+            <a:ext cx="182880" cy="182880"/>
           </a:xfrm>
           <a:prstGeom prst="roundRect">
             <a:avLst>
-              <a:gd name="adj" fmla="val 7225"/>
+              <a:gd name="adj" fmla="val 50000"/>
             </a:avLst>
           </a:prstGeom>
           <a:solidFill>
-            <a:srgbClr val="FFFFFF"/>
+            <a:srgbClr val="2563EB"/>
           </a:solidFill>
-          <a:ln w="12700">
-            <a:solidFill>
-              <a:srgbClr val="E2E8F0"/>
-            </a:solidFill>
+          <a:ln>
+            <a:noFill/>
           </a:ln>
           <a:effectLst/>
         </p:spPr>
@@ -5880,9 +5878,272 @@
           </a:p>
         </p:txBody>
       </p:sp>
+      <p:sp>
+        <p:nvSpPr>
+          <p:cNvPr id="18" name="TextBox 17"/>
+          <p:cNvSpPr txBox="1"/>
+          <p:nvPr/>
+        </p:nvSpPr>
+        <p:spPr>
+          <a:xfrm>
+            <a:off x="1764792" y="6172200"/>
+            <a:ext cx="2103120" cy="365760"/>
+          </a:xfrm>
+          <a:prstGeom prst="rect">
+            <a:avLst/>
+          </a:prstGeom>
+          <a:noFill/>
+        </p:spPr>
+        <p:txBody>
+          <a:bodyPr wrap="square" lIns="0" rIns="0" tIns="0" bIns="0" anchor="t">
+            <a:spAutoFit/>
+          </a:bodyPr>
+          <a:lstStyle/>
+          <a:p>
+            <a:pPr algn="l">
+              <a:lnSpc>
+                <a:spcPct val="100000"/>
+              </a:lnSpc>
+            </a:pPr>
+            <a:r>
+              <a:rPr sz="1400" b="1">
+                <a:solidFill>
+                  <a:srgbClr val="475569"/>
+                </a:solidFill>
+                <a:latin typeface="Noto Sans JP"/>
+                <a:ea typeface="Noto Sans JP"/>
+                <a:cs typeface="Noto Sans JP"/>
+              </a:rPr>
+              <a:t>買っても問題なさそう</a:t>
+            </a:r>
+          </a:p>
+        </p:txBody>
+      </p:sp>
+      <p:sp>
+        <p:nvSpPr>
+          <p:cNvPr id="19" name="Rounded Rectangle 18"/>
+          <p:cNvSpPr/>
+          <p:nvPr/>
+        </p:nvSpPr>
+        <p:spPr>
+          <a:xfrm>
+            <a:off x="3862831" y="6263640"/>
+            <a:ext cx="182880" cy="182880"/>
+          </a:xfrm>
+          <a:prstGeom prst="roundRect">
+            <a:avLst>
+              <a:gd name="adj" fmla="val 50000"/>
+            </a:avLst>
+          </a:prstGeom>
+          <a:solidFill>
+            <a:srgbClr val="D97706"/>
+          </a:solidFill>
+          <a:ln>
+            <a:noFill/>
+          </a:ln>
+          <a:effectLst/>
+        </p:spPr>
+        <p:style>
+          <a:lnRef idx="1">
+            <a:schemeClr val="accent1"/>
+          </a:lnRef>
+          <a:fillRef idx="3">
+            <a:schemeClr val="accent1"/>
+          </a:fillRef>
+          <a:effectRef idx="2">
+            <a:schemeClr val="accent1"/>
+          </a:effectRef>
+          <a:fontRef idx="minor">
+            <a:schemeClr val="lt1"/>
+          </a:fontRef>
+        </p:style>
+        <p:txBody>
+          <a:bodyPr rtlCol="0" anchor="ctr" lIns="0" rIns="0" tIns="0" bIns="0"/>
+          <a:lstStyle/>
+          <a:p>
+            <a:pPr algn="ctr"/>
+          </a:p>
+        </p:txBody>
+      </p:sp>
+      <p:sp>
+        <p:nvSpPr>
+          <p:cNvPr id="20" name="TextBox 19"/>
+          <p:cNvSpPr txBox="1"/>
+          <p:nvPr/>
+        </p:nvSpPr>
+        <p:spPr>
+          <a:xfrm>
+            <a:off x="4118864" y="6172200"/>
+            <a:ext cx="2103120" cy="365760"/>
+          </a:xfrm>
+          <a:prstGeom prst="rect">
+            <a:avLst/>
+          </a:prstGeom>
+          <a:noFill/>
+        </p:spPr>
+        <p:txBody>
+          <a:bodyPr wrap="square" lIns="0" rIns="0" tIns="0" bIns="0" anchor="t">
+            <a:spAutoFit/>
+          </a:bodyPr>
+          <a:lstStyle/>
+          <a:p>
+            <a:pPr algn="l">
+              <a:lnSpc>
+                <a:spcPct val="100000"/>
+              </a:lnSpc>
+            </a:pPr>
+            <a:r>
+              <a:rPr sz="1400" b="1">
+                <a:solidFill>
+                  <a:srgbClr val="475569"/>
+                </a:solidFill>
+                <a:latin typeface="Noto Sans JP"/>
+                <a:ea typeface="Noto Sans JP"/>
+                <a:cs typeface="Noto Sans JP"/>
+              </a:rPr>
+              <a:t>買わなくて大丈夫</a:t>
+            </a:r>
+          </a:p>
+        </p:txBody>
+      </p:sp>
+      <p:sp>
+        <p:nvSpPr>
+          <p:cNvPr id="21" name="Rounded Rectangle 20"/>
+          <p:cNvSpPr/>
+          <p:nvPr/>
+        </p:nvSpPr>
+        <p:spPr>
+          <a:xfrm>
+            <a:off x="5861304" y="6263640"/>
+            <a:ext cx="182880" cy="182880"/>
+          </a:xfrm>
+          <a:prstGeom prst="roundRect">
+            <a:avLst>
+              <a:gd name="adj" fmla="val 50000"/>
+            </a:avLst>
+          </a:prstGeom>
+          <a:solidFill>
+            <a:srgbClr val="DC2626"/>
+          </a:solidFill>
+          <a:ln>
+            <a:noFill/>
+          </a:ln>
+          <a:effectLst/>
+        </p:spPr>
+        <p:style>
+          <a:lnRef idx="1">
+            <a:schemeClr val="accent1"/>
+          </a:lnRef>
+          <a:fillRef idx="3">
+            <a:schemeClr val="accent1"/>
+          </a:fillRef>
+          <a:effectRef idx="2">
+            <a:schemeClr val="accent1"/>
+          </a:effectRef>
+          <a:fontRef idx="minor">
+            <a:schemeClr val="lt1"/>
+          </a:fontRef>
+        </p:style>
+        <p:txBody>
+          <a:bodyPr rtlCol="0" anchor="ctr" lIns="0" rIns="0" tIns="0" bIns="0"/>
+          <a:lstStyle/>
+          <a:p>
+            <a:pPr algn="ctr"/>
+          </a:p>
+        </p:txBody>
+      </p:sp>
+      <p:sp>
+        <p:nvSpPr>
+          <p:cNvPr id="22" name="TextBox 21"/>
+          <p:cNvSpPr txBox="1"/>
+          <p:nvPr/>
+        </p:nvSpPr>
+        <p:spPr>
+          <a:xfrm>
+            <a:off x="6117336" y="6172200"/>
+            <a:ext cx="2103120" cy="365760"/>
+          </a:xfrm>
+          <a:prstGeom prst="rect">
+            <a:avLst/>
+          </a:prstGeom>
+          <a:noFill/>
+        </p:spPr>
+        <p:txBody>
+          <a:bodyPr wrap="square" lIns="0" rIns="0" tIns="0" bIns="0" anchor="t">
+            <a:spAutoFit/>
+          </a:bodyPr>
+          <a:lstStyle/>
+          <a:p>
+            <a:pPr algn="l">
+              <a:lnSpc>
+                <a:spcPct val="100000"/>
+              </a:lnSpc>
+            </a:pPr>
+            <a:r>
+              <a:rPr sz="1400" b="1">
+                <a:solidFill>
+                  <a:srgbClr val="475569"/>
+                </a:solidFill>
+                <a:latin typeface="Noto Sans JP"/>
+                <a:ea typeface="Noto Sans JP"/>
+                <a:cs typeface="Noto Sans JP"/>
+              </a:rPr>
+              <a:t>注意が必要</a:t>
+            </a:r>
+          </a:p>
+        </p:txBody>
+      </p:sp>
+      <p:sp>
+        <p:nvSpPr>
+          <p:cNvPr id="23" name="Rounded Rectangle 22"/>
+          <p:cNvSpPr/>
+          <p:nvPr/>
+        </p:nvSpPr>
+        <p:spPr>
+          <a:xfrm>
+            <a:off x="8650224" y="420624"/>
+            <a:ext cx="2963350" cy="5833872"/>
+          </a:xfrm>
+          <a:prstGeom prst="roundRect">
+            <a:avLst>
+              <a:gd name="adj" fmla="val 6788"/>
+            </a:avLst>
+          </a:prstGeom>
+          <a:solidFill>
+            <a:srgbClr val="FFFFFF"/>
+          </a:solidFill>
+          <a:ln w="12700">
+            <a:solidFill>
+              <a:srgbClr val="E2E8F0"/>
+            </a:solidFill>
+          </a:ln>
+          <a:effectLst/>
+        </p:spPr>
+        <p:style>
+          <a:lnRef idx="1">
+            <a:schemeClr val="accent1"/>
+          </a:lnRef>
+          <a:fillRef idx="3">
+            <a:schemeClr val="accent1"/>
+          </a:fillRef>
+          <a:effectRef idx="2">
+            <a:schemeClr val="accent1"/>
+          </a:effectRef>
+          <a:fontRef idx="minor">
+            <a:schemeClr val="lt1"/>
+          </a:fontRef>
+        </p:style>
+        <p:txBody>
+          <a:bodyPr rtlCol="0" anchor="ctr" lIns="0" rIns="0" tIns="0" bIns="0"/>
+          <a:lstStyle/>
+          <a:p>
+            <a:pPr algn="ctr"/>
+          </a:p>
+        </p:txBody>
+      </p:sp>
       <p:pic>
         <p:nvPicPr>
-          <p:cNvPr id="18" name="Picture 17" descr="stock-top.jpg"/>
+          <p:cNvPr id="24" name="Picture 23" descr="stock-mid.jpg"/>
           <p:cNvPicPr>
             <a:picLocks noChangeAspect="1"/>
           </p:cNvPicPr>
@@ -5897,7 +6158,7 @@
         <p:spPr>
           <a:xfrm>
             <a:off x="8732520" y="502920"/>
-            <a:ext cx="2619690" cy="5669280"/>
+            <a:ext cx="2798758" cy="5669280"/>
           </a:xfrm>
           <a:prstGeom prst="rect">
             <a:avLst/>
@@ -5906,14 +6167,14 @@
       </p:pic>
       <p:sp>
         <p:nvSpPr>
-          <p:cNvPr id="19" name="TextBox 18"/>
+          <p:cNvPr id="25" name="TextBox 24"/>
           <p:cNvSpPr txBox="1"/>
           <p:nvPr/>
         </p:nvSpPr>
         <p:spPr>
           <a:xfrm>
-            <a:off x="8650224" y="6336792"/>
-            <a:ext cx="2779776" cy="365760"/>
+            <a:off x="8503920" y="6336792"/>
+            <a:ext cx="3200400" cy="365760"/>
           </a:xfrm>
           <a:prstGeom prst="rect">
             <a:avLst/>
@@ -5940,7 +6201,7 @@
                 <a:ea typeface="Noto Sans JP"/>
                 <a:cs typeface="Noto Sans JP"/>
               </a:rPr>
-              <a:t>在庫画面</a:t>
+              <a:t>家の在庫（マイストック）</a:t>
             </a:r>
           </a:p>
         </p:txBody>
@@ -6048,7 +6309,7 @@
                 <a:ea typeface="Noto Sans JP"/>
                 <a:cs typeface="Noto Sans JP"/>
               </a:rPr>
-              <a:t>「使っていい？」が、</a:t>
+              <a:t>「使っていい？」の目安が、</a:t>
             </a:r>
           </a:p>
           <a:p>
@@ -6107,7 +6368,7 @@
                 <a:ea typeface="Noto Sans JP"/>
                 <a:cs typeface="Noto Sans JP"/>
               </a:rPr>
-              <a:t>家の塗り薬と合わない化粧品は、</a:t>
+              <a:t>薬を塗っている肌に刺激になりうる化粧品は、</a:t>
             </a:r>
           </a:p>
           <a:p>
@@ -6201,7 +6462,7 @@
         <p:spPr>
           <a:xfrm>
             <a:off x="822960" y="4114800"/>
-            <a:ext cx="5303520" cy="1188720"/>
+            <a:ext cx="5486400" cy="1188720"/>
           </a:xfrm>
           <a:prstGeom prst="rect">
             <a:avLst/>
@@ -6246,7 +6507,7 @@
                 <a:ea typeface="Noto Sans JP"/>
                 <a:cs typeface="Noto Sans JP"/>
               </a:rPr>
-              <a:t>使い方が、ひと目でわかる。</a:t>
+              <a:t>塗る順番が、ひと目でわかる。</a:t>
             </a:r>
           </a:p>
         </p:txBody>
@@ -6287,7 +6548,7 @@
                 <a:ea typeface="Noto Sans JP"/>
                 <a:cs typeface="Noto Sans JP"/>
               </a:rPr>
-              <a:t>化粧水から処方の軟膏まで、塗る順番を</a:t>
+              <a:t>化粧水から処方の軟膏まで、家にあるものを</a:t>
             </a:r>
           </a:p>
           <a:p>
@@ -6305,7 +6566,7 @@
                 <a:ea typeface="Noto Sans JP"/>
                 <a:cs typeface="Noto Sans JP"/>
               </a:rPr>
-              <a:t>家にあるもので並べて見せる。</a:t>
+              <a:t>塗る順に並べて見せる。※医師・薬剤師の指示が優先</a:t>
             </a:r>
           </a:p>
         </p:txBody>
@@ -6490,7 +6751,7 @@
                 <a:ea typeface="Noto Sans JP"/>
                 <a:cs typeface="Noto Sans JP"/>
               </a:rPr>
-              <a:t>実際の判定画面（市販の薬用化粧水）・ルーティン画面</a:t>
+              <a:t>実際の判定画面（市販の薬用化粧水）・塗る順番の画面</a:t>
             </a:r>
           </a:p>
         </p:txBody>
@@ -6598,7 +6859,7 @@
                 <a:ea typeface="Noto Sans JP"/>
                 <a:cs typeface="Noto Sans JP"/>
               </a:rPr>
-              <a:t>名前が違っても、</a:t>
+              <a:t>名前が違っても、同じ成分が</a:t>
             </a:r>
           </a:p>
           <a:p>
@@ -6616,7 +6877,7 @@
                 <a:ea typeface="Noto Sans JP"/>
                 <a:cs typeface="Noto Sans JP"/>
               </a:rPr>
-              <a:t>中身が同じなら気づける。</a:t>
+              <a:t>入っていれば気づける。</a:t>
             </a:r>
           </a:p>
         </p:txBody>
@@ -6675,7 +6936,25 @@
                 <a:ea typeface="Noto Sans JP"/>
                 <a:cs typeface="Noto Sans JP"/>
               </a:rPr>
-              <a:t>どちらもイブプロフェン。成分で見比べるから気づける。</a:t>
+              <a:t>どちらにもイブプロフェンが入っている。風邪薬にも同じ成分が</a:t>
+            </a:r>
+          </a:p>
+          <a:p>
+            <a:pPr algn="l">
+              <a:lnSpc>
+                <a:spcPct val="100000"/>
+              </a:lnSpc>
+            </a:pPr>
+            <a:r>
+              <a:rPr sz="1500" b="0">
+                <a:solidFill>
+                  <a:srgbClr val="475569"/>
+                </a:solidFill>
+                <a:latin typeface="Noto Sans JP"/>
+                <a:ea typeface="Noto Sans JP"/>
+                <a:cs typeface="Noto Sans JP"/>
+              </a:rPr>
+              <a:t>入っていることがあるので、成分で見比べる。</a:t>
             </a:r>
           </a:p>
         </p:txBody>
@@ -6837,7 +7116,7 @@
                 <a:ea typeface="Noto Sans JP"/>
                 <a:cs typeface="Noto Sans JP"/>
               </a:rPr>
-              <a:t>無駄な買い物にも、同じ成分の重ね飲みにも気づける。</a:t>
+              <a:t>無駄な買い物も、同じ成分の重ね飲みも防ぎやすくなる。</a:t>
             </a:r>
           </a:p>
         </p:txBody>
@@ -7519,7 +7798,7 @@
                 <a:ea typeface="Noto Sans JP"/>
                 <a:cs typeface="Noto Sans JP"/>
               </a:rPr>
-              <a:t>飲み合わせる前に</a:t>
+              <a:t>一緒に飲む前に</a:t>
             </a:r>
           </a:p>
         </p:txBody>
@@ -7660,7 +7939,7 @@
                 <a:ea typeface="Noto Sans JP"/>
                 <a:cs typeface="Noto Sans JP"/>
               </a:rPr>
-              <a:t>薬も化粧品も、家にあるものを基準に考える。</a:t>
+              <a:t>肌の治療を続ける人も、家族の薬を買う人も、店頭で迷わない毎日へ。</a:t>
             </a:r>
           </a:p>
         </p:txBody>
@@ -7727,7 +8006,7 @@
                 <a:ea typeface="Noto Sans JP"/>
                 <a:cs typeface="Noto Sans JP"/>
               </a:rPr>
-              <a:t>買うときも、使うときも、家にあるものから。</a:t>
+              <a:t>店頭で撮るだけで、家の薬や化粧品と重ねて判定する。</a:t>
             </a:r>
           </a:p>
         </p:txBody>

--- a/docs/ピッチ/Overlai_本選ピッチ.pptx
+++ b/docs/ピッチ/Overlai_本選ピッチ.pptx
@@ -6001,7 +6001,7 @@
                 <a:ea typeface="Noto Sans JP"/>
                 <a:cs typeface="Noto Sans JP"/>
               </a:rPr>
-              <a:t>買わなくて大丈夫</a:t>
+              <a:t>家にあるもので足りそう</a:t>
             </a:r>
           </a:p>
         </p:txBody>
@@ -6014,7 +6014,7 @@
         </p:nvSpPr>
         <p:spPr>
           <a:xfrm>
-            <a:off x="5861304" y="6263640"/>
+            <a:off x="6394703" y="6263640"/>
             <a:ext cx="182880" cy="182880"/>
           </a:xfrm>
           <a:prstGeom prst="roundRect">
@@ -6060,7 +6060,7 @@
         </p:nvSpPr>
         <p:spPr>
           <a:xfrm>
-            <a:off x="6117336" y="6172200"/>
+            <a:off x="6650735" y="6172200"/>
             <a:ext cx="2103120" cy="365760"/>
           </a:xfrm>
           <a:prstGeom prst="rect">

--- a/docs/ピッチ/Overlai_本選ピッチ.pptx
+++ b/docs/ピッチ/Overlai_本選ピッチ.pptx
@@ -4909,7 +4909,7 @@
     <p:bg>
       <p:bgPr>
         <a:solidFill>
-          <a:srgbClr val="1B2A4A"/>
+          <a:srgbClr val="FFFFFF"/>
         </a:solidFill>
         <a:effectLst/>
       </p:bgPr>
@@ -4992,7 +4992,7 @@
             <a:r>
               <a:rPr sz="3000" b="0">
                 <a:solidFill>
-                  <a:srgbClr val="CBD5E1"/>
+                  <a:srgbClr val="475569"/>
                 </a:solidFill>
                 <a:latin typeface="Noto Sans JP"/>
                 <a:ea typeface="Noto Sans JP"/>
@@ -5018,7 +5018,7 @@
             <a:avLst/>
           </a:prstGeom>
           <a:solidFill>
-            <a:srgbClr val="CBD5E1"/>
+            <a:srgbClr val="1B2A4A"/>
           </a:solidFill>
           <a:ln>
             <a:noFill/>
@@ -5077,7 +5077,7 @@
             <a:r>
               <a:rPr sz="5000" b="1">
                 <a:solidFill>
-                  <a:srgbClr val="FFFFFF"/>
+                  <a:srgbClr val="1B2A4A"/>
                 </a:solidFill>
                 <a:latin typeface="Noto Sans JP"/>
                 <a:ea typeface="Noto Sans JP"/>
@@ -5095,7 +5095,7 @@
             <a:r>
               <a:rPr sz="5000" b="1">
                 <a:solidFill>
-                  <a:srgbClr val="FFFFFF"/>
+                  <a:srgbClr val="1B2A4A"/>
                 </a:solidFill>
                 <a:latin typeface="Noto Sans JP"/>
                 <a:ea typeface="Noto Sans JP"/>
@@ -7958,7 +7958,7 @@
     <p:bg>
       <p:bgPr>
         <a:solidFill>
-          <a:srgbClr val="1B2A4A"/>
+          <a:srgbClr val="FFFFFF"/>
         </a:solidFill>
         <a:effectLst/>
       </p:bgPr>
@@ -8000,7 +8000,7 @@
             <a:r>
               <a:rPr sz="2600" b="0">
                 <a:solidFill>
-                  <a:srgbClr val="CBD5E1"/>
+                  <a:srgbClr val="475569"/>
                 </a:solidFill>
                 <a:latin typeface="Noto Sans JP"/>
                 <a:ea typeface="Noto Sans JP"/>
@@ -8013,7 +8013,7 @@
       </p:sp>
       <p:pic>
         <p:nvPicPr>
-          <p:cNvPr id="3" name="Picture 2" descr="logo-white.png"/>
+          <p:cNvPr id="3" name="Picture 2" descr="logo.png"/>
           <p:cNvPicPr>
             <a:picLocks noChangeAspect="1"/>
           </p:cNvPicPr>
@@ -8065,7 +8065,7 @@
             <a:r>
               <a:rPr sz="8000" b="0">
                 <a:solidFill>
-                  <a:srgbClr val="FFFFFF"/>
+                  <a:srgbClr val="1B2A4A"/>
                 </a:solidFill>
                 <a:latin typeface="Noto Sans JP"/>
                 <a:ea typeface="Noto Sans JP"/>
@@ -8106,7 +8106,7 @@
             <a:r>
               <a:rPr sz="3400" b="1">
                 <a:solidFill>
-                  <a:srgbClr val="FFFFFF"/>
+                  <a:srgbClr val="1B2A4A"/>
                 </a:solidFill>
                 <a:latin typeface="Noto Sans JP"/>
                 <a:ea typeface="Noto Sans JP"/>
@@ -8147,7 +8147,7 @@
             <a:r>
               <a:rPr sz="1500" b="0">
                 <a:solidFill>
-                  <a:srgbClr val="CBD5E1"/>
+                  <a:srgbClr val="475569"/>
                 </a:solidFill>
                 <a:latin typeface="Noto Sans JP"/>
                 <a:ea typeface="Noto Sans JP"/>
@@ -8177,8 +8177,10 @@
           <a:solidFill>
             <a:srgbClr val="FFFFFF"/>
           </a:solidFill>
-          <a:ln>
-            <a:noFill/>
+          <a:ln w="12700">
+            <a:solidFill>
+              <a:srgbClr val="E2E8F0"/>
+            </a:solidFill>
           </a:ln>
           <a:effectLst/>
         </p:spPr>
@@ -8258,7 +8260,7 @@
             <a:r>
               <a:rPr sz="1300" b="0">
                 <a:solidFill>
-                  <a:srgbClr val="CBD5E1"/>
+                  <a:srgbClr val="475569"/>
                 </a:solidFill>
                 <a:latin typeface="Noto Sans JP"/>
                 <a:ea typeface="Noto Sans JP"/>

--- a/docs/ピッチ/Overlai_本選ピッチ.pptx
+++ b/docs/ピッチ/Overlai_本選ピッチ.pptx
@@ -6220,7 +6220,7 @@
     <p:bg>
       <p:bgPr>
         <a:solidFill>
-          <a:srgbClr val="F5F7FA"/>
+          <a:srgbClr val="FFFFFF"/>
         </a:solidFill>
         <a:effectLst/>
       </p:bgPr>
@@ -6770,7 +6770,7 @@
     <p:bg>
       <p:bgPr>
         <a:solidFill>
-          <a:srgbClr val="F5F7FA"/>
+          <a:srgbClr val="FFFFFF"/>
         </a:solidFill>
         <a:effectLst/>
       </p:bgPr>

--- a/docs/ピッチ/Overlai_本選ピッチ.pptx
+++ b/docs/ピッチ/Overlai_本選ピッチ.pptx
@@ -12,8 +12,6 @@
     <p:sldId id="260" r:id="rId12"/>
     <p:sldId id="261" r:id="rId13"/>
     <p:sldId id="262" r:id="rId14"/>
-    <p:sldId id="263" r:id="rId15"/>
-    <p:sldId id="264" r:id="rId16"/>
   </p:sldIdLst>
   <p:sldSz cx="12191695" cy="6858000" type="screen4x3"/>
   <p:notesSz cx="6858000" cy="9144000"/>
@@ -580,7 +578,7 @@
           <a:lstStyle/>
           <a:p>
             <a:r>
-              <a:t>ステロイドの塗り薬を使う濱田と杉本は、ある日、化粧水を手に取って、手が止まりました。使っていいのか。どっちが先か。</a:t>
+              <a:t>井上は、風邪薬を買って帰ったら、似た薬がもう家にありました。</a:t>
             </a:r>
           </a:p>
         </p:txBody>
@@ -650,7 +648,7 @@
           <a:lstStyle/>
           <a:p>
             <a:r>
-              <a:t>井上は、風邪薬を買って帰ると、似た薬がもう家にありました。</a:t>
+              <a:t>濱田と杉本は、ステロイドの塗り薬を使っています。化粧水を手に取ったとき、使っていいのか、どっちが先か、迷いました。</a:t>
             </a:r>
           </a:p>
         </p:txBody>
@@ -720,7 +718,7 @@
           <a:lstStyle/>
           <a:p>
             <a:r>
-              <a:t>どの迷いも、家にある薬と見比べないと答えが出ません。でも、店の棚の前では、それができません。</a:t>
+              <a:t>どちらも、家の薬と見比べられれば迷わずに済みます。そこで作ったのがOverlaiです。店で成分表示を撮るだけで、買うべきかの目安がわかります。</a:t>
             </a:r>
           </a:p>
         </p:txBody>
@@ -790,7 +788,7 @@
           <a:lstStyle/>
           <a:p>
             <a:r>
-              <a:t>そこで作ったのが、Overlaiです。店頭で撮るだけで、生成AIが家にあるものと重ねて判定し、出典つきで理由を示します。</a:t>
+              <a:t>名前が違っても同じ働きの薬に気づけて、使っている薬との相性も買う前にわかります。塗る順番まで案内します。</a:t>
             </a:r>
           </a:p>
         </p:txBody>
@@ -860,7 +858,7 @@
           <a:lstStyle/>
           <a:p>
             <a:r>
-              <a:t>使っていいかの目安がその場で分かり、塗る順番まで案内します。</a:t>
+              <a:t>家で一度登録すれば、店では撮るだけです。根拠の薄い推測は出さず、理由には出典を添えます。</a:t>
             </a:r>
           </a:p>
         </p:txBody>
@@ -930,147 +928,7 @@
           <a:lstStyle/>
           <a:p>
             <a:r>
-              <a:t>名前が違っても、成分で重なりに気づけます。</a:t>
-            </a:r>
-          </a:p>
-        </p:txBody>
-      </p:sp>
-      <p:sp>
-        <p:nvSpPr>
-          <p:cNvPr id="4" name="Slide Number Placeholder 3"/>
-          <p:cNvSpPr>
-            <a:spLocks noGrp="1"/>
-          </p:cNvSpPr>
-          <p:nvPr>
-            <p:ph type="sldNum" idx="5" sz="quarter"/>
-          </p:nvPr>
-        </p:nvSpPr>
-        <p:spPr/>
-      </p:sp>
-    </p:spTree>
-  </p:cSld>
-  <p:clrMapOvr>
-    <a:masterClrMapping/>
-  </p:clrMapOvr>
-</p:notes>
-</file>
-
-<file path=ppt/notesSlides/notesSlide8.xml><?xml version="1.0" encoding="utf-8"?>
-<p:notes xmlns:a="http://schemas.openxmlformats.org/drawingml/2006/main" xmlns:p="http://schemas.openxmlformats.org/presentationml/2006/main" xmlns:r="http://schemas.openxmlformats.org/officeDocument/2006/relationships">
-  <p:cSld>
-    <p:spTree>
-      <p:nvGrpSpPr>
-        <p:cNvPr id="1" name=""/>
-        <p:cNvGrpSpPr/>
-        <p:nvPr/>
-      </p:nvGrpSpPr>
-      <p:grpSpPr>
-        <a:xfrm>
-          <a:off x="0" y="0"/>
-          <a:ext cx="0" cy="0"/>
-          <a:chOff x="0" y="0"/>
-          <a:chExt cx="0" cy="0"/>
-        </a:xfrm>
-      </p:grpSpPr>
-      <p:sp>
-        <p:nvSpPr>
-          <p:cNvPr id="2" name="Slide Image Placeholder 1"/>
-          <p:cNvSpPr>
-            <a:spLocks noGrp="1"/>
-          </p:cNvSpPr>
-          <p:nvPr>
-            <p:ph type="sldImg" idx="2"/>
-          </p:nvPr>
-        </p:nvSpPr>
-        <p:spPr/>
-      </p:sp>
-      <p:sp>
-        <p:nvSpPr>
-          <p:cNvPr id="3" name="Notes Placeholder 2"/>
-          <p:cNvSpPr>
-            <a:spLocks noGrp="1"/>
-          </p:cNvSpPr>
-          <p:nvPr>
-            <p:ph type="body" idx="3" sz="quarter"/>
-          </p:nvPr>
-        </p:nvSpPr>
-        <p:spPr/>
-        <p:txBody>
-          <a:bodyPr/>
-          <a:lstStyle/>
-          <a:p>
-            <a:r>
-              <a:t>買い重ねる前に。塗り重ねる前に。一緒に飲む前に。</a:t>
-            </a:r>
-          </a:p>
-        </p:txBody>
-      </p:sp>
-      <p:sp>
-        <p:nvSpPr>
-          <p:cNvPr id="4" name="Slide Number Placeholder 3"/>
-          <p:cNvSpPr>
-            <a:spLocks noGrp="1"/>
-          </p:cNvSpPr>
-          <p:nvPr>
-            <p:ph type="sldNum" idx="5" sz="quarter"/>
-          </p:nvPr>
-        </p:nvSpPr>
-        <p:spPr/>
-      </p:sp>
-    </p:spTree>
-  </p:cSld>
-  <p:clrMapOvr>
-    <a:masterClrMapping/>
-  </p:clrMapOvr>
-</p:notes>
-</file>
-
-<file path=ppt/notesSlides/notesSlide9.xml><?xml version="1.0" encoding="utf-8"?>
-<p:notes xmlns:a="http://schemas.openxmlformats.org/drawingml/2006/main" xmlns:p="http://schemas.openxmlformats.org/presentationml/2006/main" xmlns:r="http://schemas.openxmlformats.org/officeDocument/2006/relationships">
-  <p:cSld>
-    <p:spTree>
-      <p:nvGrpSpPr>
-        <p:cNvPr id="1" name=""/>
-        <p:cNvGrpSpPr/>
-        <p:nvPr/>
-      </p:nvGrpSpPr>
-      <p:grpSpPr>
-        <a:xfrm>
-          <a:off x="0" y="0"/>
-          <a:ext cx="0" cy="0"/>
-          <a:chOff x="0" y="0"/>
-          <a:chExt cx="0" cy="0"/>
-        </a:xfrm>
-      </p:grpSpPr>
-      <p:sp>
-        <p:nvSpPr>
-          <p:cNvPr id="2" name="Slide Image Placeholder 1"/>
-          <p:cNvSpPr>
-            <a:spLocks noGrp="1"/>
-          </p:cNvSpPr>
-          <p:nvPr>
-            <p:ph type="sldImg" idx="2"/>
-          </p:nvPr>
-        </p:nvSpPr>
-        <p:spPr/>
-      </p:sp>
-      <p:sp>
-        <p:nvSpPr>
-          <p:cNvPr id="3" name="Notes Placeholder 2"/>
-          <p:cNvSpPr>
-            <a:spLocks noGrp="1"/>
-          </p:cNvSpPr>
-          <p:nvPr>
-            <p:ph type="body" idx="3" sz="quarter"/>
-          </p:nvPr>
-        </p:nvSpPr>
-        <p:spPr/>
-        <p:txBody>
-          <a:bodyPr/>
-          <a:lstStyle/>
-          <a:p>
-            <a:r>
-              <a:t>Overlai。重ねる前に、重ねて見る。</a:t>
+              <a:t>重ねる前に、重ねて見る。ぜひ、お試しください。</a:t>
             </a:r>
           </a:p>
         </p:txBody>
@@ -4100,7 +3958,7 @@
         </p:blipFill>
         <p:spPr>
           <a:xfrm>
-            <a:off x="7863840" y="1005840"/>
+            <a:off x="7086600" y="960120"/>
             <a:ext cx="4937760" cy="4937760"/>
           </a:xfrm>
           <a:prstGeom prst="rect">
@@ -4116,8 +3974,8 @@
         </p:nvSpPr>
         <p:spPr>
           <a:xfrm>
-            <a:off x="822960" y="1143000"/>
-            <a:ext cx="8229600" cy="457200"/>
+            <a:off x="685800" y="685800"/>
+            <a:ext cx="8229600" cy="294639"/>
           </a:xfrm>
           <a:prstGeom prst="rect">
             <a:avLst/>
@@ -4125,7 +3983,7 @@
           <a:noFill/>
         </p:spPr>
         <p:txBody>
-          <a:bodyPr wrap="square" lIns="0" rIns="0" tIns="0" bIns="0" anchor="t">
+          <a:bodyPr wrap="none" lIns="0" rIns="0" tIns="0" bIns="0" anchor="t">
             <a:spAutoFit/>
           </a:bodyPr>
           <a:lstStyle/>
@@ -4165,8 +4023,8 @@
         </p:blipFill>
         <p:spPr>
           <a:xfrm>
-            <a:off x="822960" y="2148840"/>
-            <a:ext cx="1371600" cy="1371600"/>
+            <a:off x="685800" y="2240280"/>
+            <a:ext cx="1524000" cy="1524000"/>
           </a:xfrm>
           <a:prstGeom prst="rect">
             <a:avLst/>
@@ -4181,8 +4039,8 @@
         </p:nvSpPr>
         <p:spPr>
           <a:xfrm>
-            <a:off x="2221992" y="2171700"/>
-            <a:ext cx="4114800" cy="1371600"/>
+            <a:off x="2240280" y="2265680"/>
+            <a:ext cx="3561080" cy="1473200"/>
           </a:xfrm>
           <a:prstGeom prst="rect">
             <a:avLst/>
@@ -4190,7 +4048,7 @@
           <a:noFill/>
         </p:spPr>
         <p:txBody>
-          <a:bodyPr wrap="square" lIns="0" rIns="0" tIns="0" bIns="0" anchor="t">
+          <a:bodyPr wrap="none" lIns="0" rIns="0" tIns="0" bIns="0" anchor="t">
             <a:spAutoFit/>
           </a:bodyPr>
           <a:lstStyle/>
@@ -4201,7 +4059,7 @@
               </a:lnSpc>
             </a:pPr>
             <a:r>
-              <a:rPr sz="7200" b="0">
+              <a:rPr sz="8000" b="0">
                 <a:solidFill>
                   <a:srgbClr val="1B2A4A"/>
                 </a:solidFill>
@@ -4222,8 +4080,8 @@
         </p:nvSpPr>
         <p:spPr>
           <a:xfrm>
-            <a:off x="822960" y="3840480"/>
-            <a:ext cx="7772400" cy="822960"/>
+            <a:off x="685800" y="3931920"/>
+            <a:ext cx="7315200" cy="405130"/>
           </a:xfrm>
           <a:prstGeom prst="rect">
             <a:avLst/>
@@ -4231,7 +4089,7 @@
           <a:noFill/>
         </p:spPr>
         <p:txBody>
-          <a:bodyPr wrap="square" lIns="0" rIns="0" tIns="0" bIns="0" anchor="t">
+          <a:bodyPr wrap="none" lIns="0" rIns="0" tIns="0" bIns="0" anchor="t">
             <a:spAutoFit/>
           </a:bodyPr>
           <a:lstStyle/>
@@ -4242,15 +4100,15 @@
               </a:lnSpc>
             </a:pPr>
             <a:r>
-              <a:rPr sz="3400" b="1">
-                <a:solidFill>
-                  <a:srgbClr val="1B2A4A"/>
+              <a:rPr sz="2200" b="0">
+                <a:solidFill>
+                  <a:srgbClr val="475569"/>
                 </a:solidFill>
                 <a:latin typeface="Noto Sans JP"/>
                 <a:ea typeface="Noto Sans JP"/>
                 <a:cs typeface="Noto Sans JP"/>
               </a:rPr>
-              <a:t>重ねる前に、重ねて見る。</a:t>
+              <a:t>Overlay（重ねる）＋ AI</a:t>
             </a:r>
           </a:p>
         </p:txBody>
@@ -4263,8 +4121,8 @@
         </p:nvSpPr>
         <p:spPr>
           <a:xfrm>
-            <a:off x="822960" y="5532120"/>
-            <a:ext cx="9144000" cy="365760"/>
+            <a:off x="685800" y="5486400"/>
+            <a:ext cx="7315200" cy="294639"/>
           </a:xfrm>
           <a:prstGeom prst="rect">
             <a:avLst/>
@@ -4272,7 +4130,7 @@
           <a:noFill/>
         </p:spPr>
         <p:txBody>
-          <a:bodyPr wrap="square" lIns="0" rIns="0" tIns="0" bIns="0" anchor="t">
+          <a:bodyPr wrap="none" lIns="0" rIns="0" tIns="0" bIns="0" anchor="t">
             <a:spAutoFit/>
           </a:bodyPr>
           <a:lstStyle/>
@@ -4283,7 +4141,7 @@
               </a:lnSpc>
             </a:pPr>
             <a:r>
-              <a:rPr sz="1500" b="1">
+              <a:rPr sz="1600" b="1">
                 <a:solidFill>
                   <a:srgbClr val="475569"/>
                 </a:solidFill>
@@ -4304,8 +4162,8 @@
         </p:nvSpPr>
         <p:spPr>
           <a:xfrm>
-            <a:off x="822960" y="5897880"/>
-            <a:ext cx="9144000" cy="365760"/>
+            <a:off x="685800" y="5852160"/>
+            <a:ext cx="7315200" cy="294639"/>
           </a:xfrm>
           <a:prstGeom prst="rect">
             <a:avLst/>
@@ -4313,7 +4171,7 @@
           <a:noFill/>
         </p:spPr>
         <p:txBody>
-          <a:bodyPr wrap="square" lIns="0" rIns="0" tIns="0" bIns="0" anchor="t">
+          <a:bodyPr wrap="none" lIns="0" rIns="0" tIns="0" bIns="0" anchor="t">
             <a:spAutoFit/>
           </a:bodyPr>
           <a:lstStyle/>
@@ -4324,7 +4182,7 @@
               </a:lnSpc>
             </a:pPr>
             <a:r>
-              <a:rPr sz="1500" b="0">
+              <a:rPr sz="1600" b="0">
                 <a:solidFill>
                   <a:srgbClr val="475569"/>
                 </a:solidFill>
@@ -4371,8 +4229,8 @@
         </p:nvSpPr>
         <p:spPr>
           <a:xfrm>
-            <a:off x="822960" y="731520"/>
-            <a:ext cx="7315200" cy="457200"/>
+            <a:off x="685800" y="685800"/>
+            <a:ext cx="8229600" cy="368300"/>
           </a:xfrm>
           <a:prstGeom prst="rect">
             <a:avLst/>
@@ -4380,7 +4238,7 @@
           <a:noFill/>
         </p:spPr>
         <p:txBody>
-          <a:bodyPr wrap="square" lIns="0" rIns="0" tIns="0" bIns="0" anchor="t">
+          <a:bodyPr wrap="none" lIns="0" rIns="0" tIns="0" bIns="0" anchor="t">
             <a:spAutoFit/>
           </a:bodyPr>
           <a:lstStyle/>
@@ -4393,13 +4251,13 @@
             <a:r>
               <a:rPr sz="2000" b="1">
                 <a:solidFill>
-                  <a:srgbClr val="2563EB"/>
+                  <a:srgbClr val="1B2A4A"/>
                 </a:solidFill>
                 <a:latin typeface="Noto Sans JP"/>
                 <a:ea typeface="Noto Sans JP"/>
                 <a:cs typeface="Noto Sans JP"/>
               </a:rPr>
-              <a:t>エピソード 1｜組み合わせの迷い</a:t>
+              <a:t>エピソード 1｜重複の迷い</a:t>
             </a:r>
           </a:p>
         </p:txBody>
@@ -4412,8 +4270,8 @@
         </p:nvSpPr>
         <p:spPr>
           <a:xfrm>
-            <a:off x="822960" y="1188720"/>
-            <a:ext cx="10515600" cy="457200"/>
+            <a:off x="685800" y="1143000"/>
+            <a:ext cx="10515600" cy="331470"/>
           </a:xfrm>
           <a:prstGeom prst="rect">
             <a:avLst/>
@@ -4421,7 +4279,7 @@
           <a:noFill/>
         </p:spPr>
         <p:txBody>
-          <a:bodyPr wrap="square" lIns="0" rIns="0" tIns="0" bIns="0" anchor="t">
+          <a:bodyPr wrap="none" lIns="0" rIns="0" tIns="0" bIns="0" anchor="t">
             <a:spAutoFit/>
           </a:bodyPr>
           <a:lstStyle/>
@@ -4440,7 +4298,7 @@
                 <a:ea typeface="Noto Sans JP"/>
                 <a:cs typeface="Noto Sans JP"/>
               </a:rPr>
-              <a:t>濱田・杉本｜肌が弱く、ステロイドの塗り薬を使っている</a:t>
+              <a:t>井上｜店頭に立つと、家にある薬を思い出せない</a:t>
             </a:r>
           </a:p>
         </p:txBody>
@@ -4453,8 +4311,8 @@
         </p:nvSpPr>
         <p:spPr>
           <a:xfrm>
-            <a:off x="822960" y="1691640"/>
-            <a:ext cx="10972800" cy="548640"/>
+            <a:off x="685800" y="1645920"/>
+            <a:ext cx="10789920" cy="478789"/>
           </a:xfrm>
           <a:prstGeom prst="rect">
             <a:avLst/>
@@ -4462,7 +4320,7 @@
           <a:noFill/>
         </p:spPr>
         <p:txBody>
-          <a:bodyPr wrap="square" lIns="0" rIns="0" tIns="0" bIns="0" anchor="t">
+          <a:bodyPr wrap="none" lIns="0" rIns="0" tIns="0" bIns="0" anchor="t">
             <a:spAutoFit/>
           </a:bodyPr>
           <a:lstStyle/>
@@ -4475,20 +4333,20 @@
             <a:r>
               <a:rPr sz="2600" b="1">
                 <a:solidFill>
-                  <a:srgbClr val="475569"/>
+                  <a:srgbClr val="0F172A"/>
                 </a:solidFill>
                 <a:latin typeface="Noto Sans JP"/>
                 <a:ea typeface="Noto Sans JP"/>
                 <a:cs typeface="Noto Sans JP"/>
               </a:rPr>
-              <a:t>ある日、ドラッグストアで化粧水を手に取って、手が止まった。</a:t>
+              <a:t>風邪薬を買って帰ると、似たような薬がもう家にあった。</a:t>
             </a:r>
           </a:p>
         </p:txBody>
       </p:sp>
       <p:pic>
         <p:nvPicPr>
-          <p:cNvPr id="5" name="Picture 4" descr="cloud-blue.png"/>
+          <p:cNvPr id="5" name="Picture 4" descr="cloud.png"/>
           <p:cNvPicPr>
             <a:picLocks noChangeAspect="1"/>
           </p:cNvPicPr>
@@ -4502,8 +4360,8 @@
         </p:blipFill>
         <p:spPr>
           <a:xfrm>
-            <a:off x="548640" y="2377440"/>
-            <a:ext cx="7589520" cy="4032854"/>
+            <a:off x="411480" y="2331720"/>
+            <a:ext cx="7772400" cy="3886200"/>
           </a:xfrm>
           <a:prstGeom prst="rect">
             <a:avLst/>
@@ -4526,8 +4384,8 @@
         </p:blipFill>
         <p:spPr>
           <a:xfrm>
-            <a:off x="8116146" y="4343400"/>
-            <a:ext cx="3725333" cy="2514600"/>
+            <a:off x="9532652" y="4343400"/>
+            <a:ext cx="2247562" cy="2514600"/>
           </a:xfrm>
           <a:prstGeom prst="rect">
             <a:avLst/>
@@ -4542,8 +4400,8 @@
         </p:nvSpPr>
         <p:spPr>
           <a:xfrm>
-            <a:off x="1006022" y="3662627"/>
-            <a:ext cx="6583680" cy="658368"/>
+            <a:off x="875537" y="3522726"/>
+            <a:ext cx="6766560" cy="589279"/>
           </a:xfrm>
           <a:prstGeom prst="rect">
             <a:avLst/>
@@ -4551,7 +4409,7 @@
           <a:noFill/>
         </p:spPr>
         <p:txBody>
-          <a:bodyPr wrap="square" lIns="0" rIns="0" tIns="0" bIns="0" anchor="t">
+          <a:bodyPr wrap="none" lIns="0" rIns="0" tIns="0" bIns="0" anchor="t">
             <a:spAutoFit/>
           </a:bodyPr>
           <a:lstStyle/>
@@ -4570,7 +4428,7 @@
                 <a:ea typeface="Noto Sans JP"/>
                 <a:cs typeface="Noto Sans JP"/>
               </a:rPr>
-              <a:t>薬を塗った肌に、使っていい？</a:t>
+              <a:t>家に、同じような薬あったっけ？</a:t>
             </a:r>
           </a:p>
         </p:txBody>
@@ -4583,8 +4441,8 @@
         </p:nvSpPr>
         <p:spPr>
           <a:xfrm>
-            <a:off x="1006022" y="4449011"/>
-            <a:ext cx="6583680" cy="658368"/>
+            <a:off x="875537" y="4309110"/>
+            <a:ext cx="6766560" cy="589279"/>
           </a:xfrm>
           <a:prstGeom prst="rect">
             <a:avLst/>
@@ -4592,7 +4450,7 @@
           <a:noFill/>
         </p:spPr>
         <p:txBody>
-          <a:bodyPr wrap="square" lIns="0" rIns="0" tIns="0" bIns="0" anchor="t">
+          <a:bodyPr wrap="none" lIns="0" rIns="0" tIns="0" bIns="0" anchor="t">
             <a:spAutoFit/>
           </a:bodyPr>
           <a:lstStyle/>
@@ -4611,7 +4469,7 @@
                 <a:ea typeface="Noto Sans JP"/>
                 <a:cs typeface="Noto Sans JP"/>
               </a:rPr>
-              <a:t>薬と化粧品、どっちが先？</a:t>
+              <a:t>名前は違うけど、中身は同じ？</a:t>
             </a:r>
           </a:p>
         </p:txBody>
@@ -4650,8 +4508,8 @@
         </p:nvSpPr>
         <p:spPr>
           <a:xfrm>
-            <a:off x="822960" y="731520"/>
-            <a:ext cx="7315200" cy="457200"/>
+            <a:off x="685800" y="685800"/>
+            <a:ext cx="8229600" cy="368300"/>
           </a:xfrm>
           <a:prstGeom prst="rect">
             <a:avLst/>
@@ -4659,7 +4517,7 @@
           <a:noFill/>
         </p:spPr>
         <p:txBody>
-          <a:bodyPr wrap="square" lIns="0" rIns="0" tIns="0" bIns="0" anchor="t">
+          <a:bodyPr wrap="none" lIns="0" rIns="0" tIns="0" bIns="0" anchor="t">
             <a:spAutoFit/>
           </a:bodyPr>
           <a:lstStyle/>
@@ -4672,13 +4530,13 @@
             <a:r>
               <a:rPr sz="2000" b="1">
                 <a:solidFill>
-                  <a:srgbClr val="C2410C"/>
+                  <a:srgbClr val="1B2A4A"/>
                 </a:solidFill>
                 <a:latin typeface="Noto Sans JP"/>
                 <a:ea typeface="Noto Sans JP"/>
                 <a:cs typeface="Noto Sans JP"/>
               </a:rPr>
-              <a:t>エピソード 2｜重複の迷い</a:t>
+              <a:t>エピソード 2｜組み合わせの迷い</a:t>
             </a:r>
           </a:p>
         </p:txBody>
@@ -4691,8 +4549,8 @@
         </p:nvSpPr>
         <p:spPr>
           <a:xfrm>
-            <a:off x="822960" y="1188720"/>
-            <a:ext cx="10515600" cy="457200"/>
+            <a:off x="685800" y="1143000"/>
+            <a:ext cx="10515600" cy="331470"/>
           </a:xfrm>
           <a:prstGeom prst="rect">
             <a:avLst/>
@@ -4700,7 +4558,7 @@
           <a:noFill/>
         </p:spPr>
         <p:txBody>
-          <a:bodyPr wrap="square" lIns="0" rIns="0" tIns="0" bIns="0" anchor="t">
+          <a:bodyPr wrap="none" lIns="0" rIns="0" tIns="0" bIns="0" anchor="t">
             <a:spAutoFit/>
           </a:bodyPr>
           <a:lstStyle/>
@@ -4719,7 +4577,7 @@
                 <a:ea typeface="Noto Sans JP"/>
                 <a:cs typeface="Noto Sans JP"/>
               </a:rPr>
-              <a:t>井上｜店頭に立つと、家にある薬を思い出せない</a:t>
+              <a:t>濱田・杉本｜肌が弱く、ステロイドの塗り薬を使っている</a:t>
             </a:r>
           </a:p>
         </p:txBody>
@@ -4732,8 +4590,8 @@
         </p:nvSpPr>
         <p:spPr>
           <a:xfrm>
-            <a:off x="822960" y="1691640"/>
-            <a:ext cx="10972800" cy="548640"/>
+            <a:off x="685800" y="1645920"/>
+            <a:ext cx="10789920" cy="478789"/>
           </a:xfrm>
           <a:prstGeom prst="rect">
             <a:avLst/>
@@ -4741,7 +4599,7 @@
           <a:noFill/>
         </p:spPr>
         <p:txBody>
-          <a:bodyPr wrap="square" lIns="0" rIns="0" tIns="0" bIns="0" anchor="t">
+          <a:bodyPr wrap="none" lIns="0" rIns="0" tIns="0" bIns="0" anchor="t">
             <a:spAutoFit/>
           </a:bodyPr>
           <a:lstStyle/>
@@ -4754,20 +4612,20 @@
             <a:r>
               <a:rPr sz="2600" b="1">
                 <a:solidFill>
-                  <a:srgbClr val="475569"/>
+                  <a:srgbClr val="0F172A"/>
                 </a:solidFill>
                 <a:latin typeface="Noto Sans JP"/>
                 <a:ea typeface="Noto Sans JP"/>
                 <a:cs typeface="Noto Sans JP"/>
               </a:rPr>
-              <a:t>風邪薬を買って帰ると、似たような薬がもう家にあった。</a:t>
+              <a:t>ある日、ドラッグストアで化粧水を手に取って、手が止まった。</a:t>
             </a:r>
           </a:p>
         </p:txBody>
       </p:sp>
       <p:pic>
         <p:nvPicPr>
-          <p:cNvPr id="5" name="Picture 4" descr="cloud-amber.png"/>
+          <p:cNvPr id="5" name="Picture 4" descr="cloud.png"/>
           <p:cNvPicPr>
             <a:picLocks noChangeAspect="1"/>
           </p:cNvPicPr>
@@ -4781,8 +4639,8 @@
         </p:blipFill>
         <p:spPr>
           <a:xfrm>
-            <a:off x="548640" y="2377440"/>
-            <a:ext cx="7589520" cy="4032854"/>
+            <a:off x="411480" y="2331720"/>
+            <a:ext cx="7772400" cy="3886200"/>
           </a:xfrm>
           <a:prstGeom prst="rect">
             <a:avLst/>
@@ -4805,8 +4663,8 @@
         </p:blipFill>
         <p:spPr>
           <a:xfrm>
-            <a:off x="10095230" y="4343400"/>
-            <a:ext cx="1746250" cy="2514600"/>
+            <a:off x="7641139" y="4343400"/>
+            <a:ext cx="4139076" cy="2514600"/>
           </a:xfrm>
           <a:prstGeom prst="rect">
             <a:avLst/>
@@ -4821,8 +4679,8 @@
         </p:nvSpPr>
         <p:spPr>
           <a:xfrm>
-            <a:off x="1006022" y="3662627"/>
-            <a:ext cx="6583680" cy="658368"/>
+            <a:off x="875537" y="3522726"/>
+            <a:ext cx="6766560" cy="589279"/>
           </a:xfrm>
           <a:prstGeom prst="rect">
             <a:avLst/>
@@ -4830,7 +4688,7 @@
           <a:noFill/>
         </p:spPr>
         <p:txBody>
-          <a:bodyPr wrap="square" lIns="0" rIns="0" tIns="0" bIns="0" anchor="t">
+          <a:bodyPr wrap="none" lIns="0" rIns="0" tIns="0" bIns="0" anchor="t">
             <a:spAutoFit/>
           </a:bodyPr>
           <a:lstStyle/>
@@ -4849,7 +4707,7 @@
                 <a:ea typeface="Noto Sans JP"/>
                 <a:cs typeface="Noto Sans JP"/>
               </a:rPr>
-              <a:t>家に、同じような薬あったっけ？</a:t>
+              <a:t>薬を塗った肌に、使っていい？</a:t>
             </a:r>
           </a:p>
         </p:txBody>
@@ -4862,8 +4720,8 @@
         </p:nvSpPr>
         <p:spPr>
           <a:xfrm>
-            <a:off x="1006022" y="4449011"/>
-            <a:ext cx="6583680" cy="658368"/>
+            <a:off x="875537" y="4309110"/>
+            <a:ext cx="6766560" cy="589279"/>
           </a:xfrm>
           <a:prstGeom prst="rect">
             <a:avLst/>
@@ -4871,7 +4729,7 @@
           <a:noFill/>
         </p:spPr>
         <p:txBody>
-          <a:bodyPr wrap="square" lIns="0" rIns="0" tIns="0" bIns="0" anchor="t">
+          <a:bodyPr wrap="none" lIns="0" rIns="0" tIns="0" bIns="0" anchor="t">
             <a:spAutoFit/>
           </a:bodyPr>
           <a:lstStyle/>
@@ -4890,7 +4748,7 @@
                 <a:ea typeface="Noto Sans JP"/>
                 <a:cs typeface="Noto Sans JP"/>
               </a:rPr>
-              <a:t>名前は違うけど、中身は同じ？</a:t>
+              <a:t>薬と化粧品、どっちが先？</a:t>
             </a:r>
           </a:p>
         </p:txBody>
@@ -4921,24 +4779,48 @@
         <p:nvPr/>
       </p:nvGrpSpPr>
       <p:grpSpPr/>
-      <p:sp>
-        <p:nvSpPr>
-          <p:cNvPr id="2" name="TextBox 1"/>
-          <p:cNvSpPr txBox="1"/>
-          <p:nvPr/>
-        </p:nvSpPr>
-        <p:spPr>
-          <a:xfrm>
-            <a:off x="822960" y="1188720"/>
-            <a:ext cx="10515600" cy="548640"/>
+      <p:pic>
+        <p:nvPicPr>
+          <p:cNvPr id="2" name="Picture 1" descr="logo.png"/>
+          <p:cNvPicPr>
+            <a:picLocks noChangeAspect="1"/>
+          </p:cNvPicPr>
+          <p:nvPr/>
+        </p:nvPicPr>
+        <p:blipFill>
+          <a:blip r:embed="rId2"/>
+          <a:stretch>
+            <a:fillRect/>
+          </a:stretch>
+        </p:blipFill>
+        <p:spPr>
+          <a:xfrm>
+            <a:off x="685800" y="960120"/>
+            <a:ext cx="647699" cy="647699"/>
           </a:xfrm>
           <a:prstGeom prst="rect">
             <a:avLst/>
           </a:prstGeom>
+        </p:spPr>
+      </p:pic>
+      <p:sp>
+        <p:nvSpPr>
+          <p:cNvPr id="3" name="TextBox 2"/>
+          <p:cNvSpPr txBox="1"/>
+          <p:nvPr/>
+        </p:nvSpPr>
+        <p:spPr>
+          <a:xfrm>
+            <a:off x="1346454" y="970915"/>
+            <a:ext cx="1611630" cy="626110"/>
+          </a:xfrm>
+          <a:prstGeom prst="rect">
+            <a:avLst/>
+          </a:prstGeom>
           <a:noFill/>
         </p:spPr>
         <p:txBody>
-          <a:bodyPr wrap="square" lIns="0" rIns="0" tIns="0" bIns="0" anchor="t">
+          <a:bodyPr wrap="none" lIns="0" rIns="0" tIns="0" bIns="0" anchor="t">
             <a:spAutoFit/>
           </a:bodyPr>
           <a:lstStyle/>
@@ -4949,29 +4831,29 @@
               </a:lnSpc>
             </a:pPr>
             <a:r>
-              <a:rPr sz="2400" b="0">
-                <a:solidFill>
-                  <a:srgbClr val="94A3B8"/>
+              <a:rPr sz="3400" b="0">
+                <a:solidFill>
+                  <a:srgbClr val="1B2A4A"/>
                 </a:solidFill>
                 <a:latin typeface="Noto Sans JP"/>
                 <a:ea typeface="Noto Sans JP"/>
                 <a:cs typeface="Noto Sans JP"/>
               </a:rPr>
-              <a:t>「使っていい？」「どっちが先？」「もう家にある？」</a:t>
-            </a:r>
-          </a:p>
-        </p:txBody>
-      </p:sp>
-      <p:sp>
-        <p:nvSpPr>
-          <p:cNvPr id="3" name="TextBox 2"/>
+              <a:t>Overlai</a:t>
+            </a:r>
+          </a:p>
+        </p:txBody>
+      </p:sp>
+      <p:sp>
+        <p:nvSpPr>
+          <p:cNvPr id="4" name="TextBox 3"/>
           <p:cNvSpPr txBox="1"/>
           <p:nvPr/>
         </p:nvSpPr>
         <p:spPr>
           <a:xfrm>
-            <a:off x="822960" y="1874519"/>
-            <a:ext cx="10515600" cy="640080"/>
+            <a:off x="3049524" y="1191514"/>
+            <a:ext cx="3657600" cy="294639"/>
           </a:xfrm>
           <a:prstGeom prst="rect">
             <a:avLst/>
@@ -4979,7 +4861,7 @@
           <a:noFill/>
         </p:spPr>
         <p:txBody>
-          <a:bodyPr wrap="square" lIns="0" rIns="0" tIns="0" bIns="0" anchor="t">
+          <a:bodyPr wrap="none" lIns="0" rIns="0" tIns="0" bIns="0" anchor="t">
             <a:spAutoFit/>
           </a:bodyPr>
           <a:lstStyle/>
@@ -4990,7 +4872,7 @@
               </a:lnSpc>
             </a:pPr>
             <a:r>
-              <a:rPr sz="3000" b="0">
+              <a:rPr sz="1600" b="0">
                 <a:solidFill>
                   <a:srgbClr val="475569"/>
                 </a:solidFill>
@@ -4998,24 +4880,237 @@
                 <a:ea typeface="Noto Sans JP"/>
                 <a:cs typeface="Noto Sans JP"/>
               </a:rPr>
-              <a:t>どの迷いも、家にある薬と見比べないと答えが出ない。</a:t>
-            </a:r>
-          </a:p>
-        </p:txBody>
-      </p:sp>
-      <p:sp>
-        <p:nvSpPr>
-          <p:cNvPr id="4" name="Rectangle 3"/>
-          <p:cNvSpPr/>
-          <p:nvPr/>
-        </p:nvSpPr>
-        <p:spPr>
-          <a:xfrm>
-            <a:off x="822960" y="2926080"/>
-            <a:ext cx="822960" cy="54864"/>
+              <a:t>Overlay（重ねる）＋ AI</a:t>
+            </a:r>
+          </a:p>
+        </p:txBody>
+      </p:sp>
+      <p:sp>
+        <p:nvSpPr>
+          <p:cNvPr id="5" name="TextBox 4"/>
+          <p:cNvSpPr txBox="1"/>
+          <p:nvPr/>
+        </p:nvSpPr>
+        <p:spPr>
+          <a:xfrm>
+            <a:off x="685800" y="1828800"/>
+            <a:ext cx="6949440" cy="2519172"/>
           </a:xfrm>
           <a:prstGeom prst="rect">
             <a:avLst/>
+          </a:prstGeom>
+          <a:noFill/>
+        </p:spPr>
+        <p:txBody>
+          <a:bodyPr wrap="none" lIns="0" rIns="0" tIns="0" bIns="0" anchor="t">
+            <a:spAutoFit/>
+          </a:bodyPr>
+          <a:lstStyle/>
+          <a:p>
+            <a:pPr algn="l">
+              <a:lnSpc>
+                <a:spcPct val="95000"/>
+              </a:lnSpc>
+            </a:pPr>
+            <a:r>
+              <a:rPr sz="7200" b="1">
+                <a:solidFill>
+                  <a:srgbClr val="1B2A4A"/>
+                </a:solidFill>
+                <a:latin typeface="Noto Sans JP"/>
+                <a:ea typeface="Noto Sans JP"/>
+                <a:cs typeface="Noto Sans JP"/>
+              </a:rPr>
+              <a:t>重ねる前に、</a:t>
+            </a:r>
+          </a:p>
+          <a:p>
+            <a:pPr algn="l">
+              <a:lnSpc>
+                <a:spcPct val="95000"/>
+              </a:lnSpc>
+            </a:pPr>
+            <a:r>
+              <a:rPr sz="7200" b="1">
+                <a:solidFill>
+                  <a:srgbClr val="1B2A4A"/>
+                </a:solidFill>
+                <a:latin typeface="Noto Sans JP"/>
+                <a:ea typeface="Noto Sans JP"/>
+                <a:cs typeface="Noto Sans JP"/>
+              </a:rPr>
+              <a:t>重ねて見る。</a:t>
+            </a:r>
+          </a:p>
+        </p:txBody>
+      </p:sp>
+      <p:sp>
+        <p:nvSpPr>
+          <p:cNvPr id="6" name="TextBox 5"/>
+          <p:cNvSpPr txBox="1"/>
+          <p:nvPr/>
+        </p:nvSpPr>
+        <p:spPr>
+          <a:xfrm>
+            <a:off x="685800" y="4800600"/>
+            <a:ext cx="10515600" cy="957579"/>
+          </a:xfrm>
+          <a:prstGeom prst="rect">
+            <a:avLst/>
+          </a:prstGeom>
+          <a:noFill/>
+        </p:spPr>
+        <p:txBody>
+          <a:bodyPr wrap="none" lIns="0" rIns="0" tIns="0" bIns="0" anchor="t">
+            <a:spAutoFit/>
+          </a:bodyPr>
+          <a:lstStyle/>
+          <a:p>
+            <a:pPr algn="l">
+              <a:lnSpc>
+                <a:spcPct val="100000"/>
+              </a:lnSpc>
+            </a:pPr>
+            <a:r>
+              <a:rPr sz="2600" b="1">
+                <a:solidFill>
+                  <a:srgbClr val="0F172A"/>
+                </a:solidFill>
+                <a:latin typeface="Noto Sans JP"/>
+                <a:ea typeface="Noto Sans JP"/>
+                <a:cs typeface="Noto Sans JP"/>
+              </a:rPr>
+              <a:t>店で成分表示を撮るだけで、家の薬・化粧品と比べて</a:t>
+            </a:r>
+          </a:p>
+          <a:p>
+            <a:pPr algn="l">
+              <a:lnSpc>
+                <a:spcPct val="100000"/>
+              </a:lnSpc>
+            </a:pPr>
+            <a:r>
+              <a:rPr sz="2600" b="1">
+                <a:solidFill>
+                  <a:srgbClr val="0F172A"/>
+                </a:solidFill>
+                <a:latin typeface="Noto Sans JP"/>
+                <a:ea typeface="Noto Sans JP"/>
+                <a:cs typeface="Noto Sans JP"/>
+              </a:rPr>
+              <a:t>「買うべきか」の目安がわかるアプリ。</a:t>
+            </a:r>
+          </a:p>
+        </p:txBody>
+      </p:sp>
+      <p:sp>
+        <p:nvSpPr>
+          <p:cNvPr id="7" name="Rounded Rectangle 6"/>
+          <p:cNvSpPr/>
+          <p:nvPr/>
+        </p:nvSpPr>
+        <p:spPr>
+          <a:xfrm>
+            <a:off x="7848295" y="960120"/>
+            <a:ext cx="2560320" cy="2560320"/>
+          </a:xfrm>
+          <a:prstGeom prst="roundRect">
+            <a:avLst>
+              <a:gd name="adj" fmla="val 16714"/>
+            </a:avLst>
+          </a:prstGeom>
+          <a:solidFill>
+            <a:srgbClr val="E4E7EC"/>
+          </a:solidFill>
+          <a:ln>
+            <a:noFill/>
+          </a:ln>
+          <a:effectLst/>
+        </p:spPr>
+        <p:style>
+          <a:lnRef idx="1">
+            <a:schemeClr val="accent1"/>
+          </a:lnRef>
+          <a:fillRef idx="3">
+            <a:schemeClr val="accent1"/>
+          </a:fillRef>
+          <a:effectRef idx="2">
+            <a:schemeClr val="accent1"/>
+          </a:effectRef>
+          <a:fontRef idx="minor">
+            <a:schemeClr val="lt1"/>
+          </a:fontRef>
+        </p:style>
+        <p:txBody>
+          <a:bodyPr rtlCol="0" anchor="ctr" lIns="0" rIns="0" tIns="0" bIns="0"/>
+          <a:lstStyle/>
+          <a:p>
+            <a:pPr algn="ctr"/>
+          </a:p>
+        </p:txBody>
+      </p:sp>
+      <p:sp>
+        <p:nvSpPr>
+          <p:cNvPr id="8" name="Rounded Rectangle 7"/>
+          <p:cNvSpPr/>
+          <p:nvPr/>
+        </p:nvSpPr>
+        <p:spPr>
+          <a:xfrm>
+            <a:off x="8945575" y="2057400"/>
+            <a:ext cx="2560320" cy="2560320"/>
+          </a:xfrm>
+          <a:prstGeom prst="roundRect">
+            <a:avLst>
+              <a:gd name="adj" fmla="val 16714"/>
+            </a:avLst>
+          </a:prstGeom>
+          <a:solidFill>
+            <a:srgbClr val="BCC3CE"/>
+          </a:solidFill>
+          <a:ln>
+            <a:noFill/>
+          </a:ln>
+          <a:effectLst/>
+        </p:spPr>
+        <p:style>
+          <a:lnRef idx="1">
+            <a:schemeClr val="accent1"/>
+          </a:lnRef>
+          <a:fillRef idx="3">
+            <a:schemeClr val="accent1"/>
+          </a:fillRef>
+          <a:effectRef idx="2">
+            <a:schemeClr val="accent1"/>
+          </a:effectRef>
+          <a:fontRef idx="minor">
+            <a:schemeClr val="lt1"/>
+          </a:fontRef>
+        </p:style>
+        <p:txBody>
+          <a:bodyPr rtlCol="0" anchor="ctr" lIns="0" rIns="0" tIns="0" bIns="0"/>
+          <a:lstStyle/>
+          <a:p>
+            <a:pPr algn="ctr"/>
+          </a:p>
+        </p:txBody>
+      </p:sp>
+      <p:sp>
+        <p:nvSpPr>
+          <p:cNvPr id="9" name="Round Diagonal Corner Rectangle 8"/>
+          <p:cNvSpPr/>
+          <p:nvPr/>
+        </p:nvSpPr>
+        <p:spPr>
+          <a:xfrm>
+            <a:off x="8945575" y="2057400"/>
+            <a:ext cx="1463040" cy="1463040"/>
+          </a:xfrm>
+          <a:prstGeom prst="round2DiagRect">
+            <a:avLst>
+              <a:gd name="adj1" fmla="val 29250"/>
+              <a:gd name="adj2" fmla="val 0"/>
+            </a:avLst>
           </a:prstGeom>
           <a:solidFill>
             <a:srgbClr val="1B2A4A"/>
@@ -5049,14 +5144,14 @@
       </p:sp>
       <p:sp>
         <p:nvSpPr>
-          <p:cNvPr id="5" name="TextBox 4"/>
+          <p:cNvPr id="10" name="TextBox 9"/>
           <p:cNvSpPr txBox="1"/>
           <p:nvPr/>
         </p:nvSpPr>
         <p:spPr>
           <a:xfrm>
-            <a:off x="822960" y="3291840"/>
-            <a:ext cx="10789920" cy="2194560"/>
+            <a:off x="8945575" y="2467051"/>
+            <a:ext cx="1463040" cy="331470"/>
           </a:xfrm>
           <a:prstGeom prst="rect">
             <a:avLst/>
@@ -5064,7 +5159,48 @@
           <a:noFill/>
         </p:spPr>
         <p:txBody>
-          <a:bodyPr wrap="square" lIns="0" rIns="0" tIns="0" bIns="0" anchor="t">
+          <a:bodyPr wrap="none" lIns="0" rIns="0" tIns="0" bIns="0" anchor="t">
+            <a:spAutoFit/>
+          </a:bodyPr>
+          <a:lstStyle/>
+          <a:p>
+            <a:pPr algn="ctr">
+              <a:lnSpc>
+                <a:spcPct val="100000"/>
+              </a:lnSpc>
+            </a:pPr>
+            <a:r>
+              <a:rPr sz="1800" b="1">
+                <a:solidFill>
+                  <a:srgbClr val="FFFFFF"/>
+                </a:solidFill>
+                <a:latin typeface="Noto Sans JP"/>
+                <a:ea typeface="Noto Sans JP"/>
+                <a:cs typeface="Noto Sans JP"/>
+              </a:rPr>
+              <a:t>重ねて判定</a:t>
+            </a:r>
+          </a:p>
+        </p:txBody>
+      </p:sp>
+      <p:sp>
+        <p:nvSpPr>
+          <p:cNvPr id="11" name="TextBox 10"/>
+          <p:cNvSpPr txBox="1"/>
+          <p:nvPr/>
+        </p:nvSpPr>
+        <p:spPr>
+          <a:xfrm>
+            <a:off x="8093354" y="1205179"/>
+            <a:ext cx="2560320" cy="331470"/>
+          </a:xfrm>
+          <a:prstGeom prst="rect">
+            <a:avLst/>
+          </a:prstGeom>
+          <a:noFill/>
+        </p:spPr>
+        <p:txBody>
+          <a:bodyPr wrap="none" lIns="0" rIns="0" tIns="0" bIns="0" anchor="t">
             <a:spAutoFit/>
           </a:bodyPr>
           <a:lstStyle/>
@@ -5075,7 +5211,7 @@
               </a:lnSpc>
             </a:pPr>
             <a:r>
-              <a:rPr sz="5000" b="1">
+              <a:rPr sz="1800" b="1">
                 <a:solidFill>
                   <a:srgbClr val="1B2A4A"/>
                 </a:solidFill>
@@ -5083,17 +5219,40 @@
                 <a:ea typeface="Noto Sans JP"/>
                 <a:cs typeface="Noto Sans JP"/>
               </a:rPr>
-              <a:t>でも、店の棚の前では、</a:t>
-            </a:r>
-          </a:p>
-          <a:p>
-            <a:pPr algn="l">
+              <a:t>店で撮った商品</a:t>
+            </a:r>
+          </a:p>
+        </p:txBody>
+      </p:sp>
+      <p:sp>
+        <p:nvSpPr>
+          <p:cNvPr id="12" name="TextBox 11"/>
+          <p:cNvSpPr txBox="1"/>
+          <p:nvPr/>
+        </p:nvSpPr>
+        <p:spPr>
+          <a:xfrm>
+            <a:off x="9066276" y="3709720"/>
+            <a:ext cx="2194560" cy="662940"/>
+          </a:xfrm>
+          <a:prstGeom prst="rect">
+            <a:avLst/>
+          </a:prstGeom>
+          <a:noFill/>
+        </p:spPr>
+        <p:txBody>
+          <a:bodyPr wrap="none" lIns="0" rIns="0" tIns="0" bIns="0" anchor="t">
+            <a:spAutoFit/>
+          </a:bodyPr>
+          <a:lstStyle/>
+          <a:p>
+            <a:pPr algn="r">
               <a:lnSpc>
                 <a:spcPct val="100000"/>
               </a:lnSpc>
             </a:pPr>
             <a:r>
-              <a:rPr sz="5000" b="1">
+              <a:rPr sz="1800" b="1">
                 <a:solidFill>
                   <a:srgbClr val="1B2A4A"/>
                 </a:solidFill>
@@ -5101,8 +5260,164 @@
                 <a:ea typeface="Noto Sans JP"/>
                 <a:cs typeface="Noto Sans JP"/>
               </a:rPr>
-              <a:t>家の薬と見比べられない。</a:t>
-            </a:r>
+              <a:t>撮って登録した</a:t>
+            </a:r>
+          </a:p>
+          <a:p>
+            <a:pPr algn="r">
+              <a:lnSpc>
+                <a:spcPct val="100000"/>
+              </a:lnSpc>
+            </a:pPr>
+            <a:r>
+              <a:rPr sz="1800" b="1">
+                <a:solidFill>
+                  <a:srgbClr val="1B2A4A"/>
+                </a:solidFill>
+                <a:latin typeface="Noto Sans JP"/>
+                <a:ea typeface="Noto Sans JP"/>
+                <a:cs typeface="Noto Sans JP"/>
+              </a:rPr>
+              <a:t>家の薬・化粧品</a:t>
+            </a:r>
+          </a:p>
+        </p:txBody>
+      </p:sp>
+      <p:sp>
+        <p:nvSpPr>
+          <p:cNvPr id="13" name="Rounded Rectangle 12"/>
+          <p:cNvSpPr/>
+          <p:nvPr/>
+        </p:nvSpPr>
+        <p:spPr>
+          <a:xfrm>
+            <a:off x="9375343" y="2964484"/>
+            <a:ext cx="146304" cy="146304"/>
+          </a:xfrm>
+          <a:prstGeom prst="roundRect">
+            <a:avLst>
+              <a:gd name="adj" fmla="val 50000"/>
+            </a:avLst>
+          </a:prstGeom>
+          <a:solidFill>
+            <a:srgbClr val="2563EB"/>
+          </a:solidFill>
+          <a:ln>
+            <a:noFill/>
+          </a:ln>
+          <a:effectLst/>
+        </p:spPr>
+        <p:style>
+          <a:lnRef idx="1">
+            <a:schemeClr val="accent1"/>
+          </a:lnRef>
+          <a:fillRef idx="3">
+            <a:schemeClr val="accent1"/>
+          </a:fillRef>
+          <a:effectRef idx="2">
+            <a:schemeClr val="accent1"/>
+          </a:effectRef>
+          <a:fontRef idx="minor">
+            <a:schemeClr val="lt1"/>
+          </a:fontRef>
+        </p:style>
+        <p:txBody>
+          <a:bodyPr rtlCol="0" anchor="ctr" lIns="0" rIns="0" tIns="0" bIns="0"/>
+          <a:lstStyle/>
+          <a:p>
+            <a:pPr algn="ctr"/>
+          </a:p>
+        </p:txBody>
+      </p:sp>
+      <p:sp>
+        <p:nvSpPr>
+          <p:cNvPr id="14" name="Rounded Rectangle 13"/>
+          <p:cNvSpPr/>
+          <p:nvPr/>
+        </p:nvSpPr>
+        <p:spPr>
+          <a:xfrm>
+            <a:off x="9603943" y="2964484"/>
+            <a:ext cx="146304" cy="146304"/>
+          </a:xfrm>
+          <a:prstGeom prst="roundRect">
+            <a:avLst>
+              <a:gd name="adj" fmla="val 50000"/>
+            </a:avLst>
+          </a:prstGeom>
+          <a:solidFill>
+            <a:srgbClr val="D97706"/>
+          </a:solidFill>
+          <a:ln>
+            <a:noFill/>
+          </a:ln>
+          <a:effectLst/>
+        </p:spPr>
+        <p:style>
+          <a:lnRef idx="1">
+            <a:schemeClr val="accent1"/>
+          </a:lnRef>
+          <a:fillRef idx="3">
+            <a:schemeClr val="accent1"/>
+          </a:fillRef>
+          <a:effectRef idx="2">
+            <a:schemeClr val="accent1"/>
+          </a:effectRef>
+          <a:fontRef idx="minor">
+            <a:schemeClr val="lt1"/>
+          </a:fontRef>
+        </p:style>
+        <p:txBody>
+          <a:bodyPr rtlCol="0" anchor="ctr" lIns="0" rIns="0" tIns="0" bIns="0"/>
+          <a:lstStyle/>
+          <a:p>
+            <a:pPr algn="ctr"/>
+          </a:p>
+        </p:txBody>
+      </p:sp>
+      <p:sp>
+        <p:nvSpPr>
+          <p:cNvPr id="15" name="Rounded Rectangle 14"/>
+          <p:cNvSpPr/>
+          <p:nvPr/>
+        </p:nvSpPr>
+        <p:spPr>
+          <a:xfrm>
+            <a:off x="9832543" y="2964484"/>
+            <a:ext cx="146304" cy="146304"/>
+          </a:xfrm>
+          <a:prstGeom prst="roundRect">
+            <a:avLst>
+              <a:gd name="adj" fmla="val 50000"/>
+            </a:avLst>
+          </a:prstGeom>
+          <a:solidFill>
+            <a:srgbClr val="DC2626"/>
+          </a:solidFill>
+          <a:ln>
+            <a:noFill/>
+          </a:ln>
+          <a:effectLst/>
+        </p:spPr>
+        <p:style>
+          <a:lnRef idx="1">
+            <a:schemeClr val="accent1"/>
+          </a:lnRef>
+          <a:fillRef idx="3">
+            <a:schemeClr val="accent1"/>
+          </a:fillRef>
+          <a:effectRef idx="2">
+            <a:schemeClr val="accent1"/>
+          </a:effectRef>
+          <a:fontRef idx="minor">
+            <a:schemeClr val="lt1"/>
+          </a:fontRef>
+        </p:style>
+        <p:txBody>
+          <a:bodyPr rtlCol="0" anchor="ctr" lIns="0" rIns="0" tIns="0" bIns="0"/>
+          <a:lstStyle/>
+          <a:p>
+            <a:pPr algn="ctr"/>
           </a:p>
         </p:txBody>
       </p:sp>
@@ -5132,9 +5447,260 @@
         <p:nvPr/>
       </p:nvGrpSpPr>
       <p:grpSpPr/>
+      <p:sp>
+        <p:nvSpPr>
+          <p:cNvPr id="2" name="TextBox 1"/>
+          <p:cNvSpPr txBox="1"/>
+          <p:nvPr/>
+        </p:nvSpPr>
+        <p:spPr>
+          <a:xfrm>
+            <a:off x="685800" y="457200"/>
+            <a:ext cx="5486400" cy="478789"/>
+          </a:xfrm>
+          <a:prstGeom prst="rect">
+            <a:avLst/>
+          </a:prstGeom>
+          <a:noFill/>
+        </p:spPr>
+        <p:txBody>
+          <a:bodyPr wrap="none" lIns="0" rIns="0" tIns="0" bIns="0" anchor="t">
+            <a:spAutoFit/>
+          </a:bodyPr>
+          <a:lstStyle/>
+          <a:p>
+            <a:pPr algn="l">
+              <a:lnSpc>
+                <a:spcPct val="100000"/>
+              </a:lnSpc>
+            </a:pPr>
+            <a:r>
+              <a:rPr sz="2600" b="1">
+                <a:solidFill>
+                  <a:srgbClr val="1B2A4A"/>
+                </a:solidFill>
+                <a:latin typeface="Noto Sans JP"/>
+                <a:ea typeface="Noto Sans JP"/>
+                <a:cs typeface="Noto Sans JP"/>
+              </a:rPr>
+              <a:t>できること</a:t>
+            </a:r>
+          </a:p>
+        </p:txBody>
+      </p:sp>
+      <p:sp>
+        <p:nvSpPr>
+          <p:cNvPr id="3" name="Rectangle 2"/>
+          <p:cNvSpPr/>
+          <p:nvPr/>
+        </p:nvSpPr>
+        <p:spPr>
+          <a:xfrm>
+            <a:off x="685800" y="987552"/>
+            <a:ext cx="10820095" cy="20116"/>
+          </a:xfrm>
+          <a:prstGeom prst="rect">
+            <a:avLst/>
+          </a:prstGeom>
+          <a:solidFill>
+            <a:srgbClr val="1B2A4A"/>
+          </a:solidFill>
+          <a:ln>
+            <a:noFill/>
+          </a:ln>
+          <a:effectLst/>
+        </p:spPr>
+        <p:style>
+          <a:lnRef idx="1">
+            <a:schemeClr val="accent1"/>
+          </a:lnRef>
+          <a:fillRef idx="3">
+            <a:schemeClr val="accent1"/>
+          </a:fillRef>
+          <a:effectRef idx="2">
+            <a:schemeClr val="accent1"/>
+          </a:effectRef>
+          <a:fontRef idx="minor">
+            <a:schemeClr val="lt1"/>
+          </a:fontRef>
+        </p:style>
+        <p:txBody>
+          <a:bodyPr rtlCol="0" anchor="ctr" lIns="0" rIns="0" tIns="0" bIns="0"/>
+          <a:lstStyle/>
+          <a:p>
+            <a:pPr algn="ctr"/>
+          </a:p>
+        </p:txBody>
+      </p:sp>
+      <p:sp>
+        <p:nvSpPr>
+          <p:cNvPr id="4" name="TextBox 3"/>
+          <p:cNvSpPr txBox="1"/>
+          <p:nvPr/>
+        </p:nvSpPr>
+        <p:spPr>
+          <a:xfrm>
+            <a:off x="685800" y="1188720"/>
+            <a:ext cx="3332378" cy="736600"/>
+          </a:xfrm>
+          <a:prstGeom prst="rect">
+            <a:avLst/>
+          </a:prstGeom>
+          <a:noFill/>
+        </p:spPr>
+        <p:txBody>
+          <a:bodyPr wrap="none" lIns="0" rIns="0" tIns="0" bIns="0" anchor="t">
+            <a:spAutoFit/>
+          </a:bodyPr>
+          <a:lstStyle/>
+          <a:p>
+            <a:pPr algn="l">
+              <a:lnSpc>
+                <a:spcPct val="100000"/>
+              </a:lnSpc>
+            </a:pPr>
+            <a:r>
+              <a:rPr sz="2000" b="1">
+                <a:solidFill>
+                  <a:srgbClr val="0F172A"/>
+                </a:solidFill>
+                <a:latin typeface="Noto Sans JP"/>
+                <a:ea typeface="Noto Sans JP"/>
+                <a:cs typeface="Noto Sans JP"/>
+              </a:rPr>
+              <a:t>名前が違っても、</a:t>
+            </a:r>
+          </a:p>
+          <a:p>
+            <a:pPr algn="l">
+              <a:lnSpc>
+                <a:spcPct val="100000"/>
+              </a:lnSpc>
+            </a:pPr>
+            <a:r>
+              <a:rPr sz="2000" b="1">
+                <a:solidFill>
+                  <a:srgbClr val="0F172A"/>
+                </a:solidFill>
+                <a:latin typeface="Noto Sans JP"/>
+                <a:ea typeface="Noto Sans JP"/>
+                <a:cs typeface="Noto Sans JP"/>
+              </a:rPr>
+              <a:t>同じ働きの薬に気づける</a:t>
+            </a:r>
+          </a:p>
+        </p:txBody>
+      </p:sp>
+      <p:sp>
+        <p:nvSpPr>
+          <p:cNvPr id="5" name="TextBox 4"/>
+          <p:cNvSpPr txBox="1"/>
+          <p:nvPr/>
+        </p:nvSpPr>
+        <p:spPr>
+          <a:xfrm>
+            <a:off x="685800" y="1965960"/>
+            <a:ext cx="3332378" cy="552450"/>
+          </a:xfrm>
+          <a:prstGeom prst="rect">
+            <a:avLst/>
+          </a:prstGeom>
+          <a:noFill/>
+        </p:spPr>
+        <p:txBody>
+          <a:bodyPr wrap="none" lIns="0" rIns="0" tIns="0" bIns="0" anchor="t">
+            <a:spAutoFit/>
+          </a:bodyPr>
+          <a:lstStyle/>
+          <a:p>
+            <a:pPr algn="l">
+              <a:lnSpc>
+                <a:spcPct val="100000"/>
+              </a:lnSpc>
+            </a:pPr>
+            <a:r>
+              <a:rPr sz="1500" b="0">
+                <a:solidFill>
+                  <a:srgbClr val="475569"/>
+                </a:solidFill>
+                <a:latin typeface="Noto Sans JP"/>
+                <a:ea typeface="Noto Sans JP"/>
+                <a:cs typeface="Noto Sans JP"/>
+              </a:rPr>
+              <a:t>風邪薬と頭痛薬のように、別の薬でも</a:t>
+            </a:r>
+          </a:p>
+          <a:p>
+            <a:pPr algn="l">
+              <a:lnSpc>
+                <a:spcPct val="100000"/>
+              </a:lnSpc>
+            </a:pPr>
+            <a:r>
+              <a:rPr sz="1500" b="0">
+                <a:solidFill>
+                  <a:srgbClr val="475569"/>
+                </a:solidFill>
+                <a:latin typeface="Noto Sans JP"/>
+                <a:ea typeface="Noto Sans JP"/>
+                <a:cs typeface="Noto Sans JP"/>
+              </a:rPr>
+              <a:t>成分がかぶっていれば知らせる</a:t>
+            </a:r>
+          </a:p>
+        </p:txBody>
+      </p:sp>
+      <p:sp>
+        <p:nvSpPr>
+          <p:cNvPr id="6" name="Rounded Rectangle 5"/>
+          <p:cNvSpPr/>
+          <p:nvPr/>
+        </p:nvSpPr>
+        <p:spPr>
+          <a:xfrm>
+            <a:off x="685800" y="2697479"/>
+            <a:ext cx="1755886" cy="3392424"/>
+          </a:xfrm>
+          <a:prstGeom prst="roundRect">
+            <a:avLst>
+              <a:gd name="adj" fmla="val 7290"/>
+            </a:avLst>
+          </a:prstGeom>
+          <a:solidFill>
+            <a:srgbClr val="FFFFFF"/>
+          </a:solidFill>
+          <a:ln w="12700">
+            <a:solidFill>
+              <a:srgbClr val="D9DFE7"/>
+            </a:solidFill>
+          </a:ln>
+          <a:effectLst/>
+        </p:spPr>
+        <p:style>
+          <a:lnRef idx="1">
+            <a:schemeClr val="accent1"/>
+          </a:lnRef>
+          <a:fillRef idx="3">
+            <a:schemeClr val="accent1"/>
+          </a:fillRef>
+          <a:effectRef idx="2">
+            <a:schemeClr val="accent1"/>
+          </a:effectRef>
+          <a:fontRef idx="minor">
+            <a:schemeClr val="lt1"/>
+          </a:fontRef>
+        </p:style>
+        <p:txBody>
+          <a:bodyPr rtlCol="0" anchor="ctr" lIns="0" rIns="0" tIns="0" bIns="0"/>
+          <a:lstStyle/>
+          <a:p>
+            <a:pPr algn="ctr"/>
+          </a:p>
+        </p:txBody>
+      </p:sp>
       <p:pic>
         <p:nvPicPr>
-          <p:cNvPr id="2" name="Picture 1" descr="logo.png"/>
+          <p:cNvPr id="7" name="Picture 6" descr="yellow-real.png"/>
           <p:cNvPicPr>
             <a:picLocks noChangeAspect="1"/>
           </p:cNvPicPr>
@@ -5148,8 +5714,8 @@
         </p:blipFill>
         <p:spPr>
           <a:xfrm>
-            <a:off x="822960" y="640080"/>
-            <a:ext cx="1257300" cy="1257300"/>
+            <a:off x="758952" y="2770632"/>
+            <a:ext cx="1609582" cy="3246120"/>
           </a:xfrm>
           <a:prstGeom prst="rect">
             <a:avLst/>
@@ -5158,14 +5724,220 @@
       </p:pic>
       <p:sp>
         <p:nvSpPr>
-          <p:cNvPr id="3" name="TextBox 2"/>
+          <p:cNvPr id="8" name="Rounded Rectangle 7"/>
+          <p:cNvSpPr/>
+          <p:nvPr/>
+        </p:nvSpPr>
+        <p:spPr>
+          <a:xfrm>
+            <a:off x="839431" y="4435891"/>
+            <a:ext cx="466778" cy="139583"/>
+          </a:xfrm>
+          <a:prstGeom prst="roundRect">
+            <a:avLst>
+              <a:gd name="adj" fmla="val 32754"/>
+            </a:avLst>
+          </a:prstGeom>
+          <a:noFill/>
+          <a:ln w="22225">
+            <a:solidFill>
+              <a:srgbClr val="B45309"/>
+            </a:solidFill>
+          </a:ln>
+          <a:effectLst/>
+        </p:spPr>
+        <p:style>
+          <a:lnRef idx="1">
+            <a:schemeClr val="accent1"/>
+          </a:lnRef>
+          <a:fillRef idx="3">
+            <a:schemeClr val="accent1"/>
+          </a:fillRef>
+          <a:effectRef idx="2">
+            <a:schemeClr val="accent1"/>
+          </a:effectRef>
+          <a:fontRef idx="minor">
+            <a:schemeClr val="lt1"/>
+          </a:fontRef>
+        </p:style>
+        <p:txBody>
+          <a:bodyPr rtlCol="0" anchor="ctr" lIns="0" rIns="0" tIns="0" bIns="0"/>
+          <a:lstStyle/>
+          <a:p>
+            <a:pPr algn="ctr"/>
+          </a:p>
+        </p:txBody>
+      </p:sp>
+      <p:sp>
+        <p:nvSpPr>
+          <p:cNvPr id="9" name="Rounded Rectangle 8"/>
+          <p:cNvSpPr/>
+          <p:nvPr/>
+        </p:nvSpPr>
+        <p:spPr>
+          <a:xfrm>
+            <a:off x="821143" y="4152427"/>
+            <a:ext cx="1213104" cy="256032"/>
+          </a:xfrm>
+          <a:prstGeom prst="roundRect">
+            <a:avLst>
+              <a:gd name="adj" fmla="val 14285"/>
+            </a:avLst>
+          </a:prstGeom>
+          <a:solidFill>
+            <a:srgbClr val="B45309"/>
+          </a:solidFill>
+          <a:ln>
+            <a:noFill/>
+          </a:ln>
+          <a:effectLst/>
+        </p:spPr>
+        <p:style>
+          <a:lnRef idx="1">
+            <a:schemeClr val="accent1"/>
+          </a:lnRef>
+          <a:fillRef idx="3">
+            <a:schemeClr val="accent1"/>
+          </a:fillRef>
+          <a:effectRef idx="2">
+            <a:schemeClr val="accent1"/>
+          </a:effectRef>
+          <a:fontRef idx="minor">
+            <a:schemeClr val="lt1"/>
+          </a:fontRef>
+        </p:style>
+        <p:txBody>
+          <a:bodyPr rtlCol="0" anchor="ctr" lIns="0" rIns="0" tIns="0" bIns="0" wrap="none"/>
+          <a:lstStyle/>
+          <a:p>
+            <a:pPr algn="ctr"/>
+            <a:r>
+              <a:rPr sz="1400" b="1">
+                <a:solidFill>
+                  <a:srgbClr val="FFFFFF"/>
+                </a:solidFill>
+                <a:latin typeface="Noto Sans JP"/>
+                <a:ea typeface="Noto Sans JP"/>
+                <a:cs typeface="Noto Sans JP"/>
+              </a:rPr>
+              <a:t>重複する成分</a:t>
+            </a:r>
+          </a:p>
+        </p:txBody>
+      </p:sp>
+      <p:sp>
+        <p:nvSpPr>
+          <p:cNvPr id="10" name="Rounded Rectangle 9"/>
+          <p:cNvSpPr/>
+          <p:nvPr/>
+        </p:nvSpPr>
+        <p:spPr>
+          <a:xfrm>
+            <a:off x="815287" y="4945532"/>
+            <a:ext cx="1496911" cy="396026"/>
+          </a:xfrm>
+          <a:prstGeom prst="roundRect">
+            <a:avLst>
+              <a:gd name="adj" fmla="val 11544"/>
+            </a:avLst>
+          </a:prstGeom>
+          <a:noFill/>
+          <a:ln w="22225">
+            <a:solidFill>
+              <a:srgbClr val="B45309"/>
+            </a:solidFill>
+          </a:ln>
+          <a:effectLst/>
+        </p:spPr>
+        <p:style>
+          <a:lnRef idx="1">
+            <a:schemeClr val="accent1"/>
+          </a:lnRef>
+          <a:fillRef idx="3">
+            <a:schemeClr val="accent1"/>
+          </a:fillRef>
+          <a:effectRef idx="2">
+            <a:schemeClr val="accent1"/>
+          </a:effectRef>
+          <a:fontRef idx="minor">
+            <a:schemeClr val="lt1"/>
+          </a:fontRef>
+        </p:style>
+        <p:txBody>
+          <a:bodyPr rtlCol="0" anchor="ctr" lIns="0" rIns="0" tIns="0" bIns="0"/>
+          <a:lstStyle/>
+          <a:p>
+            <a:pPr algn="ctr"/>
+          </a:p>
+        </p:txBody>
+      </p:sp>
+      <p:sp>
+        <p:nvSpPr>
+          <p:cNvPr id="11" name="Rounded Rectangle 10"/>
+          <p:cNvSpPr/>
+          <p:nvPr/>
+        </p:nvSpPr>
+        <p:spPr>
+          <a:xfrm>
+            <a:off x="796999" y="4662068"/>
+            <a:ext cx="679704" cy="256032"/>
+          </a:xfrm>
+          <a:prstGeom prst="roundRect">
+            <a:avLst>
+              <a:gd name="adj" fmla="val 14285"/>
+            </a:avLst>
+          </a:prstGeom>
+          <a:solidFill>
+            <a:srgbClr val="B45309"/>
+          </a:solidFill>
+          <a:ln>
+            <a:noFill/>
+          </a:ln>
+          <a:effectLst/>
+        </p:spPr>
+        <p:style>
+          <a:lnRef idx="1">
+            <a:schemeClr val="accent1"/>
+          </a:lnRef>
+          <a:fillRef idx="3">
+            <a:schemeClr val="accent1"/>
+          </a:fillRef>
+          <a:effectRef idx="2">
+            <a:schemeClr val="accent1"/>
+          </a:effectRef>
+          <a:fontRef idx="minor">
+            <a:schemeClr val="lt1"/>
+          </a:fontRef>
+        </p:style>
+        <p:txBody>
+          <a:bodyPr rtlCol="0" anchor="ctr" lIns="0" rIns="0" tIns="0" bIns="0" wrap="none"/>
+          <a:lstStyle/>
+          <a:p>
+            <a:pPr algn="ctr"/>
+            <a:r>
+              <a:rPr sz="1400" b="1">
+                <a:solidFill>
+                  <a:srgbClr val="FFFFFF"/>
+                </a:solidFill>
+                <a:latin typeface="Noto Sans JP"/>
+                <a:ea typeface="Noto Sans JP"/>
+                <a:cs typeface="Noto Sans JP"/>
+              </a:rPr>
+              <a:t>家の薬</a:t>
+            </a:r>
+          </a:p>
+        </p:txBody>
+      </p:sp>
+      <p:sp>
+        <p:nvSpPr>
+          <p:cNvPr id="12" name="TextBox 11"/>
           <p:cNvSpPr txBox="1"/>
           <p:nvPr/>
         </p:nvSpPr>
         <p:spPr>
           <a:xfrm>
-            <a:off x="2105406" y="661035"/>
-            <a:ext cx="3771900" cy="1261110"/>
+            <a:off x="4429658" y="1188720"/>
+            <a:ext cx="3332378" cy="736600"/>
           </a:xfrm>
           <a:prstGeom prst="rect">
             <a:avLst/>
@@ -5173,7 +5945,7 @@
           <a:noFill/>
         </p:spPr>
         <p:txBody>
-          <a:bodyPr wrap="square" lIns="0" rIns="0" tIns="0" bIns="0" anchor="t">
+          <a:bodyPr wrap="none" lIns="0" rIns="0" tIns="0" bIns="0" anchor="t">
             <a:spAutoFit/>
           </a:bodyPr>
           <a:lstStyle/>
@@ -5184,40 +5956,17 @@
               </a:lnSpc>
             </a:pPr>
             <a:r>
-              <a:rPr sz="6600" b="0">
-                <a:solidFill>
-                  <a:srgbClr val="1B2A4A"/>
+              <a:rPr sz="2000" b="1">
+                <a:solidFill>
+                  <a:srgbClr val="0F172A"/>
                 </a:solidFill>
                 <a:latin typeface="Noto Sans JP"/>
                 <a:ea typeface="Noto Sans JP"/>
                 <a:cs typeface="Noto Sans JP"/>
               </a:rPr>
-              <a:t>Overlai</a:t>
-            </a:r>
-          </a:p>
-        </p:txBody>
-      </p:sp>
-      <p:sp>
-        <p:nvSpPr>
-          <p:cNvPr id="4" name="TextBox 3"/>
-          <p:cNvSpPr txBox="1"/>
-          <p:nvPr/>
-        </p:nvSpPr>
-        <p:spPr>
-          <a:xfrm>
-            <a:off x="5257800" y="1325880"/>
-            <a:ext cx="2926080" cy="365760"/>
-          </a:xfrm>
-          <a:prstGeom prst="rect">
-            <a:avLst/>
-          </a:prstGeom>
-          <a:noFill/>
-        </p:spPr>
-        <p:txBody>
-          <a:bodyPr wrap="square" lIns="0" rIns="0" tIns="0" bIns="0" anchor="t">
-            <a:spAutoFit/>
-          </a:bodyPr>
-          <a:lstStyle/>
+              <a:t>使っている薬との相性が、</a:t>
+            </a:r>
+          </a:p>
           <a:p>
             <a:pPr algn="l">
               <a:lnSpc>
@@ -5225,29 +5974,29 @@
               </a:lnSpc>
             </a:pPr>
             <a:r>
-              <a:rPr sz="1600" b="0">
-                <a:solidFill>
-                  <a:srgbClr val="475569"/>
+              <a:rPr sz="2000" b="1">
+                <a:solidFill>
+                  <a:srgbClr val="0F172A"/>
                 </a:solidFill>
                 <a:latin typeface="Noto Sans JP"/>
                 <a:ea typeface="Noto Sans JP"/>
                 <a:cs typeface="Noto Sans JP"/>
               </a:rPr>
-              <a:t>Overlay（重ねる）＋ AI</a:t>
-            </a:r>
-          </a:p>
-        </p:txBody>
-      </p:sp>
-      <p:sp>
-        <p:nvSpPr>
-          <p:cNvPr id="5" name="TextBox 4"/>
+              <a:t>買う前にわかる</a:t>
+            </a:r>
+          </a:p>
+        </p:txBody>
+      </p:sp>
+      <p:sp>
+        <p:nvSpPr>
+          <p:cNvPr id="13" name="TextBox 12"/>
           <p:cNvSpPr txBox="1"/>
           <p:nvPr/>
         </p:nvSpPr>
         <p:spPr>
           <a:xfrm>
-            <a:off x="822960" y="2286000"/>
-            <a:ext cx="7498079" cy="1280160"/>
+            <a:off x="4429658" y="1965960"/>
+            <a:ext cx="3332378" cy="552450"/>
           </a:xfrm>
           <a:prstGeom prst="rect">
             <a:avLst/>
@@ -5255,7 +6004,7 @@
           <a:noFill/>
         </p:spPr>
         <p:txBody>
-          <a:bodyPr wrap="square" lIns="0" rIns="0" tIns="0" bIns="0" anchor="t">
+          <a:bodyPr wrap="none" lIns="0" rIns="0" tIns="0" bIns="0" anchor="t">
             <a:spAutoFit/>
           </a:bodyPr>
           <a:lstStyle/>
@@ -5266,15 +6015,15 @@
               </a:lnSpc>
             </a:pPr>
             <a:r>
-              <a:rPr sz="3000" b="1">
-                <a:solidFill>
-                  <a:srgbClr val="0F172A"/>
+              <a:rPr sz="1500" b="0">
+                <a:solidFill>
+                  <a:srgbClr val="475569"/>
                 </a:solidFill>
                 <a:latin typeface="Noto Sans JP"/>
                 <a:ea typeface="Noto Sans JP"/>
                 <a:cs typeface="Noto Sans JP"/>
               </a:rPr>
-              <a:t>店頭で撮るだけで、</a:t>
+              <a:t>飲み薬だけでなく、塗り薬や</a:t>
             </a:r>
           </a:p>
           <a:p>
@@ -5284,33 +6033,547 @@
               </a:lnSpc>
             </a:pPr>
             <a:r>
-              <a:rPr sz="3000" b="1">
-                <a:solidFill>
-                  <a:srgbClr val="0F172A"/>
+              <a:rPr sz="1500" b="0">
+                <a:solidFill>
+                  <a:srgbClr val="475569"/>
                 </a:solidFill>
                 <a:latin typeface="Noto Sans JP"/>
                 <a:ea typeface="Noto Sans JP"/>
                 <a:cs typeface="Noto Sans JP"/>
               </a:rPr>
-              <a:t>家にあるものと重ねて判定する。</a:t>
-            </a:r>
-          </a:p>
-        </p:txBody>
-      </p:sp>
-      <p:sp>
-        <p:nvSpPr>
-          <p:cNvPr id="6" name="Rounded Rectangle 5"/>
+              <a:t>化粧品との組み合わせも確かめられる</a:t>
+            </a:r>
+          </a:p>
+        </p:txBody>
+      </p:sp>
+      <p:sp>
+        <p:nvSpPr>
+          <p:cNvPr id="14" name="Rounded Rectangle 13"/>
           <p:cNvSpPr/>
           <p:nvPr/>
         </p:nvSpPr>
         <p:spPr>
           <a:xfrm>
-            <a:off x="822960" y="3739896"/>
-            <a:ext cx="475488" cy="475488"/>
+            <a:off x="4429658" y="2697479"/>
+            <a:ext cx="1781984" cy="3392424"/>
           </a:xfrm>
           <a:prstGeom prst="roundRect">
             <a:avLst>
-              <a:gd name="adj" fmla="val 50000"/>
+              <a:gd name="adj" fmla="val 7183"/>
+            </a:avLst>
+          </a:prstGeom>
+          <a:solidFill>
+            <a:srgbClr val="FFFFFF"/>
+          </a:solidFill>
+          <a:ln w="12700">
+            <a:solidFill>
+              <a:srgbClr val="D9DFE7"/>
+            </a:solidFill>
+          </a:ln>
+          <a:effectLst/>
+        </p:spPr>
+        <p:style>
+          <a:lnRef idx="1">
+            <a:schemeClr val="accent1"/>
+          </a:lnRef>
+          <a:fillRef idx="3">
+            <a:schemeClr val="accent1"/>
+          </a:fillRef>
+          <a:effectRef idx="2">
+            <a:schemeClr val="accent1"/>
+          </a:effectRef>
+          <a:fontRef idx="minor">
+            <a:schemeClr val="lt1"/>
+          </a:fontRef>
+        </p:style>
+        <p:txBody>
+          <a:bodyPr rtlCol="0" anchor="ctr" lIns="0" rIns="0" tIns="0" bIns="0"/>
+          <a:lstStyle/>
+          <a:p>
+            <a:pPr algn="ctr"/>
+          </a:p>
+        </p:txBody>
+      </p:sp>
+      <p:pic>
+        <p:nvPicPr>
+          <p:cNvPr id="15" name="Picture 14" descr="red-real.png"/>
+          <p:cNvPicPr>
+            <a:picLocks noChangeAspect="1"/>
+          </p:cNvPicPr>
+          <p:nvPr/>
+        </p:nvPicPr>
+        <p:blipFill>
+          <a:blip r:embed="rId3"/>
+          <a:stretch>
+            <a:fillRect/>
+          </a:stretch>
+        </p:blipFill>
+        <p:spPr>
+          <a:xfrm>
+            <a:off x="4502810" y="2770632"/>
+            <a:ext cx="1635680" cy="3246120"/>
+          </a:xfrm>
+          <a:prstGeom prst="rect">
+            <a:avLst/>
+          </a:prstGeom>
+        </p:spPr>
+      </p:pic>
+      <p:sp>
+        <p:nvSpPr>
+          <p:cNvPr id="16" name="Rounded Rectangle 15"/>
+          <p:cNvSpPr/>
+          <p:nvPr/>
+        </p:nvSpPr>
+        <p:spPr>
+          <a:xfrm>
+            <a:off x="4560059" y="4406676"/>
+            <a:ext cx="686986" cy="142829"/>
+          </a:xfrm>
+          <a:prstGeom prst="roundRect">
+            <a:avLst>
+              <a:gd name="adj" fmla="val 32010"/>
+            </a:avLst>
+          </a:prstGeom>
+          <a:noFill/>
+          <a:ln w="22225">
+            <a:solidFill>
+              <a:srgbClr val="DC2626"/>
+            </a:solidFill>
+          </a:ln>
+          <a:effectLst/>
+        </p:spPr>
+        <p:style>
+          <a:lnRef idx="1">
+            <a:schemeClr val="accent1"/>
+          </a:lnRef>
+          <a:fillRef idx="3">
+            <a:schemeClr val="accent1"/>
+          </a:fillRef>
+          <a:effectRef idx="2">
+            <a:schemeClr val="accent1"/>
+          </a:effectRef>
+          <a:fontRef idx="minor">
+            <a:schemeClr val="lt1"/>
+          </a:fontRef>
+        </p:style>
+        <p:txBody>
+          <a:bodyPr rtlCol="0" anchor="ctr" lIns="0" rIns="0" tIns="0" bIns="0"/>
+          <a:lstStyle/>
+          <a:p>
+            <a:pPr algn="ctr"/>
+          </a:p>
+        </p:txBody>
+      </p:sp>
+      <p:sp>
+        <p:nvSpPr>
+          <p:cNvPr id="17" name="Rounded Rectangle 16"/>
+          <p:cNvSpPr/>
+          <p:nvPr/>
+        </p:nvSpPr>
+        <p:spPr>
+          <a:xfrm>
+            <a:off x="4541771" y="4123212"/>
+            <a:ext cx="857504" cy="256032"/>
+          </a:xfrm>
+          <a:prstGeom prst="roundRect">
+            <a:avLst>
+              <a:gd name="adj" fmla="val 14285"/>
+            </a:avLst>
+          </a:prstGeom>
+          <a:solidFill>
+            <a:srgbClr val="DC2626"/>
+          </a:solidFill>
+          <a:ln>
+            <a:noFill/>
+          </a:ln>
+          <a:effectLst/>
+        </p:spPr>
+        <p:style>
+          <a:lnRef idx="1">
+            <a:schemeClr val="accent1"/>
+          </a:lnRef>
+          <a:fillRef idx="3">
+            <a:schemeClr val="accent1"/>
+          </a:fillRef>
+          <a:effectRef idx="2">
+            <a:schemeClr val="accent1"/>
+          </a:effectRef>
+          <a:fontRef idx="minor">
+            <a:schemeClr val="lt1"/>
+          </a:fontRef>
+        </p:style>
+        <p:txBody>
+          <a:bodyPr rtlCol="0" anchor="ctr" lIns="0" rIns="0" tIns="0" bIns="0" wrap="none"/>
+          <a:lstStyle/>
+          <a:p>
+            <a:pPr algn="ctr"/>
+            <a:r>
+              <a:rPr sz="1400" b="1">
+                <a:solidFill>
+                  <a:srgbClr val="FFFFFF"/>
+                </a:solidFill>
+                <a:latin typeface="Noto Sans JP"/>
+                <a:ea typeface="Noto Sans JP"/>
+                <a:cs typeface="Noto Sans JP"/>
+              </a:rPr>
+              <a:t>店の商品</a:t>
+            </a:r>
+          </a:p>
+        </p:txBody>
+      </p:sp>
+      <p:sp>
+        <p:nvSpPr>
+          <p:cNvPr id="18" name="Rounded Rectangle 17"/>
+          <p:cNvSpPr/>
+          <p:nvPr/>
+        </p:nvSpPr>
+        <p:spPr>
+          <a:xfrm>
+            <a:off x="4560059" y="5354543"/>
+            <a:ext cx="1521183" cy="305135"/>
+          </a:xfrm>
+          <a:prstGeom prst="roundRect">
+            <a:avLst>
+              <a:gd name="adj" fmla="val 14983"/>
+            </a:avLst>
+          </a:prstGeom>
+          <a:noFill/>
+          <a:ln w="22225">
+            <a:solidFill>
+              <a:srgbClr val="DC2626"/>
+            </a:solidFill>
+          </a:ln>
+          <a:effectLst/>
+        </p:spPr>
+        <p:style>
+          <a:lnRef idx="1">
+            <a:schemeClr val="accent1"/>
+          </a:lnRef>
+          <a:fillRef idx="3">
+            <a:schemeClr val="accent1"/>
+          </a:fillRef>
+          <a:effectRef idx="2">
+            <a:schemeClr val="accent1"/>
+          </a:effectRef>
+          <a:fontRef idx="minor">
+            <a:schemeClr val="lt1"/>
+          </a:fontRef>
+        </p:style>
+        <p:txBody>
+          <a:bodyPr rtlCol="0" anchor="ctr" lIns="0" rIns="0" tIns="0" bIns="0"/>
+          <a:lstStyle/>
+          <a:p>
+            <a:pPr algn="ctr"/>
+          </a:p>
+        </p:txBody>
+      </p:sp>
+      <p:sp>
+        <p:nvSpPr>
+          <p:cNvPr id="19" name="Rounded Rectangle 18"/>
+          <p:cNvSpPr/>
+          <p:nvPr/>
+        </p:nvSpPr>
+        <p:spPr>
+          <a:xfrm>
+            <a:off x="4541771" y="5071079"/>
+            <a:ext cx="679704" cy="256032"/>
+          </a:xfrm>
+          <a:prstGeom prst="roundRect">
+            <a:avLst>
+              <a:gd name="adj" fmla="val 14285"/>
+            </a:avLst>
+          </a:prstGeom>
+          <a:solidFill>
+            <a:srgbClr val="DC2626"/>
+          </a:solidFill>
+          <a:ln>
+            <a:noFill/>
+          </a:ln>
+          <a:effectLst/>
+        </p:spPr>
+        <p:style>
+          <a:lnRef idx="1">
+            <a:schemeClr val="accent1"/>
+          </a:lnRef>
+          <a:fillRef idx="3">
+            <a:schemeClr val="accent1"/>
+          </a:fillRef>
+          <a:effectRef idx="2">
+            <a:schemeClr val="accent1"/>
+          </a:effectRef>
+          <a:fontRef idx="minor">
+            <a:schemeClr val="lt1"/>
+          </a:fontRef>
+        </p:style>
+        <p:txBody>
+          <a:bodyPr rtlCol="0" anchor="ctr" lIns="0" rIns="0" tIns="0" bIns="0" wrap="none"/>
+          <a:lstStyle/>
+          <a:p>
+            <a:pPr algn="ctr"/>
+            <a:r>
+              <a:rPr sz="1400" b="1">
+                <a:solidFill>
+                  <a:srgbClr val="FFFFFF"/>
+                </a:solidFill>
+                <a:latin typeface="Noto Sans JP"/>
+                <a:ea typeface="Noto Sans JP"/>
+                <a:cs typeface="Noto Sans JP"/>
+              </a:rPr>
+              <a:t>家の薬</a:t>
+            </a:r>
+          </a:p>
+        </p:txBody>
+      </p:sp>
+      <p:sp>
+        <p:nvSpPr>
+          <p:cNvPr id="20" name="TextBox 19"/>
+          <p:cNvSpPr txBox="1"/>
+          <p:nvPr/>
+        </p:nvSpPr>
+        <p:spPr>
+          <a:xfrm>
+            <a:off x="8173516" y="1188720"/>
+            <a:ext cx="3332378" cy="736600"/>
+          </a:xfrm>
+          <a:prstGeom prst="rect">
+            <a:avLst/>
+          </a:prstGeom>
+          <a:noFill/>
+        </p:spPr>
+        <p:txBody>
+          <a:bodyPr wrap="none" lIns="0" rIns="0" tIns="0" bIns="0" anchor="t">
+            <a:spAutoFit/>
+          </a:bodyPr>
+          <a:lstStyle/>
+          <a:p>
+            <a:pPr algn="l">
+              <a:lnSpc>
+                <a:spcPct val="100000"/>
+              </a:lnSpc>
+            </a:pPr>
+            <a:r>
+              <a:rPr sz="2000" b="1">
+                <a:solidFill>
+                  <a:srgbClr val="0F172A"/>
+                </a:solidFill>
+                <a:latin typeface="Noto Sans JP"/>
+                <a:ea typeface="Noto Sans JP"/>
+                <a:cs typeface="Noto Sans JP"/>
+              </a:rPr>
+              <a:t>薬や化粧品を使う順番や、</a:t>
+            </a:r>
+          </a:p>
+          <a:p>
+            <a:pPr algn="l">
+              <a:lnSpc>
+                <a:spcPct val="100000"/>
+              </a:lnSpc>
+            </a:pPr>
+            <a:r>
+              <a:rPr sz="2000" b="1">
+                <a:solidFill>
+                  <a:srgbClr val="0F172A"/>
+                </a:solidFill>
+                <a:latin typeface="Noto Sans JP"/>
+                <a:ea typeface="Noto Sans JP"/>
+                <a:cs typeface="Noto Sans JP"/>
+              </a:rPr>
+              <a:t>詳しい使い方がわかる</a:t>
+            </a:r>
+          </a:p>
+        </p:txBody>
+      </p:sp>
+      <p:sp>
+        <p:nvSpPr>
+          <p:cNvPr id="21" name="TextBox 20"/>
+          <p:cNvSpPr txBox="1"/>
+          <p:nvPr/>
+        </p:nvSpPr>
+        <p:spPr>
+          <a:xfrm>
+            <a:off x="8173516" y="1965960"/>
+            <a:ext cx="3332378" cy="552450"/>
+          </a:xfrm>
+          <a:prstGeom prst="rect">
+            <a:avLst/>
+          </a:prstGeom>
+          <a:noFill/>
+        </p:spPr>
+        <p:txBody>
+          <a:bodyPr wrap="none" lIns="0" rIns="0" tIns="0" bIns="0" anchor="t">
+            <a:spAutoFit/>
+          </a:bodyPr>
+          <a:lstStyle/>
+          <a:p>
+            <a:pPr algn="l">
+              <a:lnSpc>
+                <a:spcPct val="100000"/>
+              </a:lnSpc>
+            </a:pPr>
+            <a:r>
+              <a:rPr sz="1500" b="0">
+                <a:solidFill>
+                  <a:srgbClr val="475569"/>
+                </a:solidFill>
+                <a:latin typeface="Noto Sans JP"/>
+                <a:ea typeface="Noto Sans JP"/>
+                <a:cs typeface="Noto Sans JP"/>
+              </a:rPr>
+              <a:t>処方薬と化粧品を一緒に使う日も、</a:t>
+            </a:r>
+          </a:p>
+          <a:p>
+            <a:pPr algn="l">
+              <a:lnSpc>
+                <a:spcPct val="100000"/>
+              </a:lnSpc>
+            </a:pPr>
+            <a:r>
+              <a:rPr sz="1500" b="0">
+                <a:solidFill>
+                  <a:srgbClr val="475569"/>
+                </a:solidFill>
+                <a:latin typeface="Noto Sans JP"/>
+                <a:ea typeface="Noto Sans JP"/>
+                <a:cs typeface="Noto Sans JP"/>
+              </a:rPr>
+              <a:t>どれから、どう塗ればいいか迷わない</a:t>
+            </a:r>
+          </a:p>
+        </p:txBody>
+      </p:sp>
+      <p:sp>
+        <p:nvSpPr>
+          <p:cNvPr id="22" name="Rounded Rectangle 21"/>
+          <p:cNvSpPr/>
+          <p:nvPr/>
+        </p:nvSpPr>
+        <p:spPr>
+          <a:xfrm>
+            <a:off x="8173516" y="2697479"/>
+            <a:ext cx="1715709" cy="3392424"/>
+          </a:xfrm>
+          <a:prstGeom prst="roundRect">
+            <a:avLst>
+              <a:gd name="adj" fmla="val 7461"/>
+            </a:avLst>
+          </a:prstGeom>
+          <a:solidFill>
+            <a:srgbClr val="FFFFFF"/>
+          </a:solidFill>
+          <a:ln w="12700">
+            <a:solidFill>
+              <a:srgbClr val="D9DFE7"/>
+            </a:solidFill>
+          </a:ln>
+          <a:effectLst/>
+        </p:spPr>
+        <p:style>
+          <a:lnRef idx="1">
+            <a:schemeClr val="accent1"/>
+          </a:lnRef>
+          <a:fillRef idx="3">
+            <a:schemeClr val="accent1"/>
+          </a:fillRef>
+          <a:effectRef idx="2">
+            <a:schemeClr val="accent1"/>
+          </a:effectRef>
+          <a:fontRef idx="minor">
+            <a:schemeClr val="lt1"/>
+          </a:fontRef>
+        </p:style>
+        <p:txBody>
+          <a:bodyPr rtlCol="0" anchor="ctr" lIns="0" rIns="0" tIns="0" bIns="0"/>
+          <a:lstStyle/>
+          <a:p>
+            <a:pPr algn="ctr"/>
+          </a:p>
+        </p:txBody>
+      </p:sp>
+      <p:pic>
+        <p:nvPicPr>
+          <p:cNvPr id="23" name="Picture 22" descr="routine-crop.jpg"/>
+          <p:cNvPicPr>
+            <a:picLocks noChangeAspect="1"/>
+          </p:cNvPicPr>
+          <p:nvPr/>
+        </p:nvPicPr>
+        <p:blipFill>
+          <a:blip r:embed="rId4"/>
+          <a:stretch>
+            <a:fillRect/>
+          </a:stretch>
+        </p:blipFill>
+        <p:spPr>
+          <a:xfrm>
+            <a:off x="8246668" y="2770632"/>
+            <a:ext cx="1569405" cy="3246120"/>
+          </a:xfrm>
+          <a:prstGeom prst="rect">
+            <a:avLst/>
+          </a:prstGeom>
+        </p:spPr>
+      </p:pic>
+      <p:sp>
+        <p:nvSpPr>
+          <p:cNvPr id="24" name="Rounded Rectangle 23"/>
+          <p:cNvSpPr/>
+          <p:nvPr/>
+        </p:nvSpPr>
+        <p:spPr>
+          <a:xfrm>
+            <a:off x="8274918" y="3082259"/>
+            <a:ext cx="204022" cy="2382652"/>
+          </a:xfrm>
+          <a:prstGeom prst="roundRect">
+            <a:avLst>
+              <a:gd name="adj" fmla="val 22409"/>
+            </a:avLst>
+          </a:prstGeom>
+          <a:noFill/>
+          <a:ln w="22225">
+            <a:solidFill>
+              <a:srgbClr val="1B2A4A"/>
+            </a:solidFill>
+          </a:ln>
+          <a:effectLst/>
+        </p:spPr>
+        <p:style>
+          <a:lnRef idx="1">
+            <a:schemeClr val="accent1"/>
+          </a:lnRef>
+          <a:fillRef idx="3">
+            <a:schemeClr val="accent1"/>
+          </a:fillRef>
+          <a:effectRef idx="2">
+            <a:schemeClr val="accent1"/>
+          </a:effectRef>
+          <a:fontRef idx="minor">
+            <a:schemeClr val="lt1"/>
+          </a:fontRef>
+        </p:style>
+        <p:txBody>
+          <a:bodyPr rtlCol="0" anchor="ctr" lIns="0" rIns="0" tIns="0" bIns="0"/>
+          <a:lstStyle/>
+          <a:p>
+            <a:pPr algn="ctr"/>
+          </a:p>
+        </p:txBody>
+      </p:sp>
+      <p:sp>
+        <p:nvSpPr>
+          <p:cNvPr id="25" name="Rounded Rectangle 24"/>
+          <p:cNvSpPr/>
+          <p:nvPr/>
+        </p:nvSpPr>
+        <p:spPr>
+          <a:xfrm>
+            <a:off x="8256630" y="2798795"/>
+            <a:ext cx="857504" cy="256032"/>
+          </a:xfrm>
+          <a:prstGeom prst="roundRect">
+            <a:avLst>
+              <a:gd name="adj" fmla="val 14285"/>
             </a:avLst>
           </a:prstGeom>
           <a:solidFill>
@@ -5341,7 +6604,7 @@
           <a:p>
             <a:pPr algn="ctr"/>
             <a:r>
-              <a:rPr sz="1800" b="1">
+              <a:rPr sz="1400" b="1">
                 <a:solidFill>
                   <a:srgbClr val="FFFFFF"/>
                 </a:solidFill>
@@ -5349,21 +6612,21 @@
                 <a:ea typeface="Noto Sans JP"/>
                 <a:cs typeface="Noto Sans JP"/>
               </a:rPr>
-              <a:t>1</a:t>
-            </a:r>
-          </a:p>
-        </p:txBody>
-      </p:sp>
-      <p:sp>
-        <p:nvSpPr>
-          <p:cNvPr id="7" name="TextBox 6"/>
+              <a:t>塗る順番</a:t>
+            </a:r>
+          </a:p>
+        </p:txBody>
+      </p:sp>
+      <p:sp>
+        <p:nvSpPr>
+          <p:cNvPr id="26" name="TextBox 25"/>
           <p:cNvSpPr txBox="1"/>
           <p:nvPr/>
         </p:nvSpPr>
         <p:spPr>
           <a:xfrm>
-            <a:off x="1508760" y="3703320"/>
-            <a:ext cx="6035040" cy="457200"/>
+            <a:off x="685800" y="6309360"/>
+            <a:ext cx="1463040" cy="276225"/>
           </a:xfrm>
           <a:prstGeom prst="rect">
             <a:avLst/>
@@ -5371,7 +6634,7 @@
           <a:noFill/>
         </p:spPr>
         <p:txBody>
-          <a:bodyPr wrap="square" lIns="0" rIns="0" tIns="0" bIns="0" anchor="t">
+          <a:bodyPr wrap="none" lIns="0" rIns="0" tIns="0" bIns="0" anchor="t">
             <a:spAutoFit/>
           </a:bodyPr>
           <a:lstStyle/>
@@ -5382,466 +6645,29 @@
               </a:lnSpc>
             </a:pPr>
             <a:r>
-              <a:rPr sz="2200" b="1">
-                <a:solidFill>
-                  <a:srgbClr val="0F172A"/>
+              <a:rPr sz="1500" b="1">
+                <a:solidFill>
+                  <a:srgbClr val="475569"/>
                 </a:solidFill>
                 <a:latin typeface="Noto Sans JP"/>
                 <a:ea typeface="Noto Sans JP"/>
                 <a:cs typeface="Noto Sans JP"/>
               </a:rPr>
-              <a:t>家にあるものを登録する</a:t>
-            </a:r>
-          </a:p>
-        </p:txBody>
-      </p:sp>
-      <p:sp>
-        <p:nvSpPr>
-          <p:cNvPr id="8" name="TextBox 7"/>
-          <p:cNvSpPr txBox="1"/>
-          <p:nvPr/>
-        </p:nvSpPr>
-        <p:spPr>
-          <a:xfrm>
-            <a:off x="1508760" y="4160520"/>
-            <a:ext cx="6583680" cy="365760"/>
-          </a:xfrm>
-          <a:prstGeom prst="rect">
-            <a:avLst/>
-          </a:prstGeom>
-          <a:noFill/>
-        </p:spPr>
-        <p:txBody>
-          <a:bodyPr wrap="square" lIns="0" rIns="0" tIns="0" bIns="0" anchor="t">
-            <a:spAutoFit/>
-          </a:bodyPr>
-          <a:lstStyle/>
-          <a:p>
-            <a:pPr algn="l">
-              <a:lnSpc>
-                <a:spcPct val="100000"/>
-              </a:lnSpc>
-            </a:pPr>
-            <a:r>
-              <a:rPr sz="1500" b="0">
-                <a:solidFill>
-                  <a:srgbClr val="475569"/>
-                </a:solidFill>
-                <a:latin typeface="Noto Sans JP"/>
-                <a:ea typeface="Noto Sans JP"/>
-                <a:cs typeface="Noto Sans JP"/>
-              </a:rPr>
-              <a:t>薬も化粧品も、撮れば成分まで入る。これが判定の基準になる。</a:t>
-            </a:r>
-          </a:p>
-        </p:txBody>
-      </p:sp>
-      <p:sp>
-        <p:nvSpPr>
-          <p:cNvPr id="9" name="Rounded Rectangle 8"/>
+              <a:t>判定は3色</a:t>
+            </a:r>
+          </a:p>
+        </p:txBody>
+      </p:sp>
+      <p:sp>
+        <p:nvSpPr>
+          <p:cNvPr id="27" name="Rounded Rectangle 26"/>
           <p:cNvSpPr/>
           <p:nvPr/>
         </p:nvSpPr>
         <p:spPr>
           <a:xfrm>
-            <a:off x="822960" y="4562856"/>
-            <a:ext cx="475488" cy="475488"/>
-          </a:xfrm>
-          <a:prstGeom prst="roundRect">
-            <a:avLst>
-              <a:gd name="adj" fmla="val 50000"/>
-            </a:avLst>
-          </a:prstGeom>
-          <a:solidFill>
-            <a:srgbClr val="1B2A4A"/>
-          </a:solidFill>
-          <a:ln>
-            <a:noFill/>
-          </a:ln>
-          <a:effectLst/>
-        </p:spPr>
-        <p:style>
-          <a:lnRef idx="1">
-            <a:schemeClr val="accent1"/>
-          </a:lnRef>
-          <a:fillRef idx="3">
-            <a:schemeClr val="accent1"/>
-          </a:fillRef>
-          <a:effectRef idx="2">
-            <a:schemeClr val="accent1"/>
-          </a:effectRef>
-          <a:fontRef idx="minor">
-            <a:schemeClr val="lt1"/>
-          </a:fontRef>
-        </p:style>
-        <p:txBody>
-          <a:bodyPr rtlCol="0" anchor="ctr" lIns="0" rIns="0" tIns="0" bIns="0" wrap="none"/>
-          <a:lstStyle/>
-          <a:p>
-            <a:pPr algn="ctr"/>
-            <a:r>
-              <a:rPr sz="1800" b="1">
-                <a:solidFill>
-                  <a:srgbClr val="FFFFFF"/>
-                </a:solidFill>
-                <a:latin typeface="Noto Sans JP"/>
-                <a:ea typeface="Noto Sans JP"/>
-                <a:cs typeface="Noto Sans JP"/>
-              </a:rPr>
-              <a:t>2</a:t>
-            </a:r>
-          </a:p>
-        </p:txBody>
-      </p:sp>
-      <p:sp>
-        <p:nvSpPr>
-          <p:cNvPr id="10" name="TextBox 9"/>
-          <p:cNvSpPr txBox="1"/>
-          <p:nvPr/>
-        </p:nvSpPr>
-        <p:spPr>
-          <a:xfrm>
-            <a:off x="1508760" y="4526280"/>
-            <a:ext cx="6035040" cy="457200"/>
-          </a:xfrm>
-          <a:prstGeom prst="rect">
-            <a:avLst/>
-          </a:prstGeom>
-          <a:noFill/>
-        </p:spPr>
-        <p:txBody>
-          <a:bodyPr wrap="square" lIns="0" rIns="0" tIns="0" bIns="0" anchor="t">
-            <a:spAutoFit/>
-          </a:bodyPr>
-          <a:lstStyle/>
-          <a:p>
-            <a:pPr algn="l">
-              <a:lnSpc>
-                <a:spcPct val="100000"/>
-              </a:lnSpc>
-            </a:pPr>
-            <a:r>
-              <a:rPr sz="2200" b="1">
-                <a:solidFill>
-                  <a:srgbClr val="0F172A"/>
-                </a:solidFill>
-                <a:latin typeface="Noto Sans JP"/>
-                <a:ea typeface="Noto Sans JP"/>
-                <a:cs typeface="Noto Sans JP"/>
-              </a:rPr>
-              <a:t>店頭で、成分表示を撮る</a:t>
-            </a:r>
-          </a:p>
-        </p:txBody>
-      </p:sp>
-      <p:sp>
-        <p:nvSpPr>
-          <p:cNvPr id="11" name="TextBox 10"/>
-          <p:cNvSpPr txBox="1"/>
-          <p:nvPr/>
-        </p:nvSpPr>
-        <p:spPr>
-          <a:xfrm>
-            <a:off x="1508760" y="4983480"/>
-            <a:ext cx="6583680" cy="365760"/>
-          </a:xfrm>
-          <a:prstGeom prst="rect">
-            <a:avLst/>
-          </a:prstGeom>
-          <a:noFill/>
-        </p:spPr>
-        <p:txBody>
-          <a:bodyPr wrap="square" lIns="0" rIns="0" tIns="0" bIns="0" anchor="t">
-            <a:spAutoFit/>
-          </a:bodyPr>
-          <a:lstStyle/>
-          <a:p>
-            <a:pPr algn="l">
-              <a:lnSpc>
-                <a:spcPct val="100000"/>
-              </a:lnSpc>
-            </a:pPr>
-            <a:r>
-              <a:rPr sz="1500" b="0">
-                <a:solidFill>
-                  <a:srgbClr val="475569"/>
-                </a:solidFill>
-                <a:latin typeface="Noto Sans JP"/>
-                <a:ea typeface="Noto Sans JP"/>
-                <a:cs typeface="Noto Sans JP"/>
-              </a:rPr>
-              <a:t>気になった商品を撮るだけ。書式がばらばらでも読み取る。</a:t>
-            </a:r>
-          </a:p>
-        </p:txBody>
-      </p:sp>
-      <p:sp>
-        <p:nvSpPr>
-          <p:cNvPr id="12" name="Rounded Rectangle 11"/>
-          <p:cNvSpPr/>
-          <p:nvPr/>
-        </p:nvSpPr>
-        <p:spPr>
-          <a:xfrm>
-            <a:off x="4719320" y="4590288"/>
-            <a:ext cx="868680" cy="329184"/>
-          </a:xfrm>
-          <a:prstGeom prst="roundRect">
-            <a:avLst>
-              <a:gd name="adj" fmla="val 50000"/>
-            </a:avLst>
-          </a:prstGeom>
-          <a:solidFill>
-            <a:srgbClr val="EFF6FF"/>
-          </a:solidFill>
-          <a:ln w="12700">
-            <a:solidFill>
-              <a:srgbClr val="BFDBFE"/>
-            </a:solidFill>
-          </a:ln>
-          <a:effectLst/>
-        </p:spPr>
-        <p:style>
-          <a:lnRef idx="1">
-            <a:schemeClr val="accent1"/>
-          </a:lnRef>
-          <a:fillRef idx="3">
-            <a:schemeClr val="accent1"/>
-          </a:fillRef>
-          <a:effectRef idx="2">
-            <a:schemeClr val="accent1"/>
-          </a:effectRef>
-          <a:fontRef idx="minor">
-            <a:schemeClr val="lt1"/>
-          </a:fontRef>
-        </p:style>
-        <p:txBody>
-          <a:bodyPr rtlCol="0" anchor="ctr" lIns="0" rIns="0" tIns="0" bIns="0" wrap="none"/>
-          <a:lstStyle/>
-          <a:p>
-            <a:pPr algn="ctr"/>
-            <a:r>
-              <a:rPr sz="1200" b="1">
-                <a:solidFill>
-                  <a:srgbClr val="2563EB"/>
-                </a:solidFill>
-                <a:latin typeface="Noto Sans JP"/>
-                <a:ea typeface="Noto Sans JP"/>
-                <a:cs typeface="Noto Sans JP"/>
-              </a:rPr>
-              <a:t>生成AI</a:t>
-            </a:r>
-          </a:p>
-        </p:txBody>
-      </p:sp>
-      <p:sp>
-        <p:nvSpPr>
-          <p:cNvPr id="13" name="Rounded Rectangle 12"/>
-          <p:cNvSpPr/>
-          <p:nvPr/>
-        </p:nvSpPr>
-        <p:spPr>
-          <a:xfrm>
-            <a:off x="822960" y="5385816"/>
-            <a:ext cx="475488" cy="475488"/>
-          </a:xfrm>
-          <a:prstGeom prst="roundRect">
-            <a:avLst>
-              <a:gd name="adj" fmla="val 50000"/>
-            </a:avLst>
-          </a:prstGeom>
-          <a:solidFill>
-            <a:srgbClr val="1B2A4A"/>
-          </a:solidFill>
-          <a:ln>
-            <a:noFill/>
-          </a:ln>
-          <a:effectLst/>
-        </p:spPr>
-        <p:style>
-          <a:lnRef idx="1">
-            <a:schemeClr val="accent1"/>
-          </a:lnRef>
-          <a:fillRef idx="3">
-            <a:schemeClr val="accent1"/>
-          </a:fillRef>
-          <a:effectRef idx="2">
-            <a:schemeClr val="accent1"/>
-          </a:effectRef>
-          <a:fontRef idx="minor">
-            <a:schemeClr val="lt1"/>
-          </a:fontRef>
-        </p:style>
-        <p:txBody>
-          <a:bodyPr rtlCol="0" anchor="ctr" lIns="0" rIns="0" tIns="0" bIns="0" wrap="none"/>
-          <a:lstStyle/>
-          <a:p>
-            <a:pPr algn="ctr"/>
-            <a:r>
-              <a:rPr sz="1800" b="1">
-                <a:solidFill>
-                  <a:srgbClr val="FFFFFF"/>
-                </a:solidFill>
-                <a:latin typeface="Noto Sans JP"/>
-                <a:ea typeface="Noto Sans JP"/>
-                <a:cs typeface="Noto Sans JP"/>
-              </a:rPr>
-              <a:t>3</a:t>
-            </a:r>
-          </a:p>
-        </p:txBody>
-      </p:sp>
-      <p:sp>
-        <p:nvSpPr>
-          <p:cNvPr id="14" name="TextBox 13"/>
-          <p:cNvSpPr txBox="1"/>
-          <p:nvPr/>
-        </p:nvSpPr>
-        <p:spPr>
-          <a:xfrm>
-            <a:off x="1508760" y="5349240"/>
-            <a:ext cx="6035040" cy="457200"/>
-          </a:xfrm>
-          <a:prstGeom prst="rect">
-            <a:avLst/>
-          </a:prstGeom>
-          <a:noFill/>
-        </p:spPr>
-        <p:txBody>
-          <a:bodyPr wrap="square" lIns="0" rIns="0" tIns="0" bIns="0" anchor="t">
-            <a:spAutoFit/>
-          </a:bodyPr>
-          <a:lstStyle/>
-          <a:p>
-            <a:pPr algn="l">
-              <a:lnSpc>
-                <a:spcPct val="100000"/>
-              </a:lnSpc>
-            </a:pPr>
-            <a:r>
-              <a:rPr sz="2200" b="1">
-                <a:solidFill>
-                  <a:srgbClr val="0F172A"/>
-                </a:solidFill>
-                <a:latin typeface="Noto Sans JP"/>
-                <a:ea typeface="Noto Sans JP"/>
-                <a:cs typeface="Noto Sans JP"/>
-              </a:rPr>
-              <a:t>家の在庫と重ねて判定する</a:t>
-            </a:r>
-          </a:p>
-        </p:txBody>
-      </p:sp>
-      <p:sp>
-        <p:nvSpPr>
-          <p:cNvPr id="15" name="TextBox 14"/>
-          <p:cNvSpPr txBox="1"/>
-          <p:nvPr/>
-        </p:nvSpPr>
-        <p:spPr>
-          <a:xfrm>
-            <a:off x="1508760" y="5806440"/>
-            <a:ext cx="6583680" cy="365760"/>
-          </a:xfrm>
-          <a:prstGeom prst="rect">
-            <a:avLst/>
-          </a:prstGeom>
-          <a:noFill/>
-        </p:spPr>
-        <p:txBody>
-          <a:bodyPr wrap="square" lIns="0" rIns="0" tIns="0" bIns="0" anchor="t">
-            <a:spAutoFit/>
-          </a:bodyPr>
-          <a:lstStyle/>
-          <a:p>
-            <a:pPr algn="l">
-              <a:lnSpc>
-                <a:spcPct val="100000"/>
-              </a:lnSpc>
-            </a:pPr>
-            <a:r>
-              <a:rPr sz="1500" b="0">
-                <a:solidFill>
-                  <a:srgbClr val="475569"/>
-                </a:solidFill>
-                <a:latin typeface="Noto Sans JP"/>
-                <a:ea typeface="Noto Sans JP"/>
-                <a:cs typeface="Noto Sans JP"/>
-              </a:rPr>
-              <a:t>重複も組み合わせも考え、買うべきかを3色と出典つきの理由で伝える。</a:t>
-            </a:r>
-          </a:p>
-        </p:txBody>
-      </p:sp>
-      <p:sp>
-        <p:nvSpPr>
-          <p:cNvPr id="16" name="Rounded Rectangle 15"/>
-          <p:cNvSpPr/>
-          <p:nvPr/>
-        </p:nvSpPr>
-        <p:spPr>
-          <a:xfrm>
-            <a:off x="4998720" y="5413248"/>
-            <a:ext cx="868680" cy="329184"/>
-          </a:xfrm>
-          <a:prstGeom prst="roundRect">
-            <a:avLst>
-              <a:gd name="adj" fmla="val 50000"/>
-            </a:avLst>
-          </a:prstGeom>
-          <a:solidFill>
-            <a:srgbClr val="EFF6FF"/>
-          </a:solidFill>
-          <a:ln w="12700">
-            <a:solidFill>
-              <a:srgbClr val="BFDBFE"/>
-            </a:solidFill>
-          </a:ln>
-          <a:effectLst/>
-        </p:spPr>
-        <p:style>
-          <a:lnRef idx="1">
-            <a:schemeClr val="accent1"/>
-          </a:lnRef>
-          <a:fillRef idx="3">
-            <a:schemeClr val="accent1"/>
-          </a:fillRef>
-          <a:effectRef idx="2">
-            <a:schemeClr val="accent1"/>
-          </a:effectRef>
-          <a:fontRef idx="minor">
-            <a:schemeClr val="lt1"/>
-          </a:fontRef>
-        </p:style>
-        <p:txBody>
-          <a:bodyPr rtlCol="0" anchor="ctr" lIns="0" rIns="0" tIns="0" bIns="0" wrap="none"/>
-          <a:lstStyle/>
-          <a:p>
-            <a:pPr algn="ctr"/>
-            <a:r>
-              <a:rPr sz="1200" b="1">
-                <a:solidFill>
-                  <a:srgbClr val="2563EB"/>
-                </a:solidFill>
-                <a:latin typeface="Noto Sans JP"/>
-                <a:ea typeface="Noto Sans JP"/>
-                <a:cs typeface="Noto Sans JP"/>
-              </a:rPr>
-              <a:t>生成AI</a:t>
-            </a:r>
-          </a:p>
-        </p:txBody>
-      </p:sp>
-      <p:sp>
-        <p:nvSpPr>
-          <p:cNvPr id="17" name="Rounded Rectangle 16"/>
-          <p:cNvSpPr/>
-          <p:nvPr/>
-        </p:nvSpPr>
-        <p:spPr>
-          <a:xfrm>
-            <a:off x="1508760" y="6263640"/>
-            <a:ext cx="182880" cy="182880"/>
+            <a:off x="1882140" y="6419088"/>
+            <a:ext cx="173736" cy="173736"/>
           </a:xfrm>
           <a:prstGeom prst="roundRect">
             <a:avLst>
@@ -5880,14 +6706,14 @@
       </p:sp>
       <p:sp>
         <p:nvSpPr>
-          <p:cNvPr id="18" name="TextBox 17"/>
+          <p:cNvPr id="28" name="TextBox 27"/>
           <p:cNvSpPr txBox="1"/>
           <p:nvPr/>
         </p:nvSpPr>
         <p:spPr>
           <a:xfrm>
-            <a:off x="1764792" y="6172200"/>
-            <a:ext cx="2103120" cy="365760"/>
+            <a:off x="2138172" y="6309360"/>
+            <a:ext cx="1996440" cy="276225"/>
           </a:xfrm>
           <a:prstGeom prst="rect">
             <a:avLst/>
@@ -5895,7 +6721,7 @@
           <a:noFill/>
         </p:spPr>
         <p:txBody>
-          <a:bodyPr wrap="square" lIns="0" rIns="0" tIns="0" bIns="0" anchor="t">
+          <a:bodyPr wrap="none" lIns="0" rIns="0" tIns="0" bIns="0" anchor="t">
             <a:spAutoFit/>
           </a:bodyPr>
           <a:lstStyle/>
@@ -5906,9 +6732,9 @@
               </a:lnSpc>
             </a:pPr>
             <a:r>
-              <a:rPr sz="1400" b="1">
-                <a:solidFill>
-                  <a:srgbClr val="475569"/>
+              <a:rPr sz="1500" b="1">
+                <a:solidFill>
+                  <a:srgbClr val="0F172A"/>
                 </a:solidFill>
                 <a:latin typeface="Noto Sans JP"/>
                 <a:ea typeface="Noto Sans JP"/>
@@ -5921,14 +6747,14 @@
       </p:sp>
       <p:sp>
         <p:nvSpPr>
-          <p:cNvPr id="19" name="Rounded Rectangle 18"/>
+          <p:cNvPr id="29" name="Rounded Rectangle 28"/>
           <p:cNvSpPr/>
           <p:nvPr/>
         </p:nvSpPr>
         <p:spPr>
           <a:xfrm>
-            <a:off x="3862831" y="6263640"/>
-            <a:ext cx="182880" cy="182880"/>
+            <a:off x="4408932" y="6419088"/>
+            <a:ext cx="173736" cy="173736"/>
           </a:xfrm>
           <a:prstGeom prst="roundRect">
             <a:avLst>
@@ -5967,14 +6793,14 @@
       </p:sp>
       <p:sp>
         <p:nvSpPr>
-          <p:cNvPr id="20" name="TextBox 19"/>
+          <p:cNvPr id="30" name="TextBox 29"/>
           <p:cNvSpPr txBox="1"/>
           <p:nvPr/>
         </p:nvSpPr>
         <p:spPr>
           <a:xfrm>
-            <a:off x="4118864" y="6172200"/>
-            <a:ext cx="2103120" cy="365760"/>
+            <a:off x="4664964" y="6309360"/>
+            <a:ext cx="1615440" cy="276225"/>
           </a:xfrm>
           <a:prstGeom prst="rect">
             <a:avLst/>
@@ -5982,7 +6808,7 @@
           <a:noFill/>
         </p:spPr>
         <p:txBody>
-          <a:bodyPr wrap="square" lIns="0" rIns="0" tIns="0" bIns="0" anchor="t">
+          <a:bodyPr wrap="none" lIns="0" rIns="0" tIns="0" bIns="0" anchor="t">
             <a:spAutoFit/>
           </a:bodyPr>
           <a:lstStyle/>
@@ -5993,29 +6819,29 @@
               </a:lnSpc>
             </a:pPr>
             <a:r>
-              <a:rPr sz="1400" b="1">
-                <a:solidFill>
-                  <a:srgbClr val="475569"/>
+              <a:rPr sz="1500" b="1">
+                <a:solidFill>
+                  <a:srgbClr val="0F172A"/>
                 </a:solidFill>
                 <a:latin typeface="Noto Sans JP"/>
                 <a:ea typeface="Noto Sans JP"/>
                 <a:cs typeface="Noto Sans JP"/>
               </a:rPr>
-              <a:t>家にあるもので足りそう</a:t>
-            </a:r>
-          </a:p>
-        </p:txBody>
-      </p:sp>
-      <p:sp>
-        <p:nvSpPr>
-          <p:cNvPr id="21" name="Rounded Rectangle 20"/>
+              <a:t>買わなくて大丈夫</a:t>
+            </a:r>
+          </a:p>
+        </p:txBody>
+      </p:sp>
+      <p:sp>
+        <p:nvSpPr>
+          <p:cNvPr id="31" name="Rounded Rectangle 30"/>
           <p:cNvSpPr/>
           <p:nvPr/>
         </p:nvSpPr>
         <p:spPr>
           <a:xfrm>
-            <a:off x="6394703" y="6263640"/>
-            <a:ext cx="182880" cy="182880"/>
+            <a:off x="6554724" y="6419088"/>
+            <a:ext cx="173736" cy="173736"/>
           </a:xfrm>
           <a:prstGeom prst="roundRect">
             <a:avLst>
@@ -6054,14 +6880,14 @@
       </p:sp>
       <p:sp>
         <p:nvSpPr>
-          <p:cNvPr id="22" name="TextBox 21"/>
+          <p:cNvPr id="32" name="TextBox 31"/>
           <p:cNvSpPr txBox="1"/>
           <p:nvPr/>
         </p:nvSpPr>
         <p:spPr>
           <a:xfrm>
-            <a:off x="6650735" y="6172200"/>
-            <a:ext cx="2103120" cy="365760"/>
+            <a:off x="6810756" y="6309360"/>
+            <a:ext cx="1043940" cy="276225"/>
           </a:xfrm>
           <a:prstGeom prst="rect">
             <a:avLst/>
@@ -6069,7 +6895,7 @@
           <a:noFill/>
         </p:spPr>
         <p:txBody>
-          <a:bodyPr wrap="square" lIns="0" rIns="0" tIns="0" bIns="0" anchor="t">
+          <a:bodyPr wrap="none" lIns="0" rIns="0" tIns="0" bIns="0" anchor="t">
             <a:spAutoFit/>
           </a:bodyPr>
           <a:lstStyle/>
@@ -6080,128 +6906,15 @@
               </a:lnSpc>
             </a:pPr>
             <a:r>
-              <a:rPr sz="1400" b="1">
-                <a:solidFill>
-                  <a:srgbClr val="475569"/>
+              <a:rPr sz="1500" b="1">
+                <a:solidFill>
+                  <a:srgbClr val="0F172A"/>
                 </a:solidFill>
                 <a:latin typeface="Noto Sans JP"/>
                 <a:ea typeface="Noto Sans JP"/>
                 <a:cs typeface="Noto Sans JP"/>
               </a:rPr>
               <a:t>注意が必要</a:t>
-            </a:r>
-          </a:p>
-        </p:txBody>
-      </p:sp>
-      <p:sp>
-        <p:nvSpPr>
-          <p:cNvPr id="23" name="Rounded Rectangle 22"/>
-          <p:cNvSpPr/>
-          <p:nvPr/>
-        </p:nvSpPr>
-        <p:spPr>
-          <a:xfrm>
-            <a:off x="8650224" y="420624"/>
-            <a:ext cx="2963350" cy="5833872"/>
-          </a:xfrm>
-          <a:prstGeom prst="roundRect">
-            <a:avLst>
-              <a:gd name="adj" fmla="val 6788"/>
-            </a:avLst>
-          </a:prstGeom>
-          <a:solidFill>
-            <a:srgbClr val="FFFFFF"/>
-          </a:solidFill>
-          <a:ln w="12700">
-            <a:solidFill>
-              <a:srgbClr val="E2E8F0"/>
-            </a:solidFill>
-          </a:ln>
-          <a:effectLst/>
-        </p:spPr>
-        <p:style>
-          <a:lnRef idx="1">
-            <a:schemeClr val="accent1"/>
-          </a:lnRef>
-          <a:fillRef idx="3">
-            <a:schemeClr val="accent1"/>
-          </a:fillRef>
-          <a:effectRef idx="2">
-            <a:schemeClr val="accent1"/>
-          </a:effectRef>
-          <a:fontRef idx="minor">
-            <a:schemeClr val="lt1"/>
-          </a:fontRef>
-        </p:style>
-        <p:txBody>
-          <a:bodyPr rtlCol="0" anchor="ctr" lIns="0" rIns="0" tIns="0" bIns="0"/>
-          <a:lstStyle/>
-          <a:p>
-            <a:pPr algn="ctr"/>
-          </a:p>
-        </p:txBody>
-      </p:sp>
-      <p:pic>
-        <p:nvPicPr>
-          <p:cNvPr id="24" name="Picture 23" descr="stock-mid.jpg"/>
-          <p:cNvPicPr>
-            <a:picLocks noChangeAspect="1"/>
-          </p:cNvPicPr>
-          <p:nvPr/>
-        </p:nvPicPr>
-        <p:blipFill>
-          <a:blip r:embed="rId3"/>
-          <a:stretch>
-            <a:fillRect/>
-          </a:stretch>
-        </p:blipFill>
-        <p:spPr>
-          <a:xfrm>
-            <a:off x="8732520" y="502920"/>
-            <a:ext cx="2798758" cy="5669280"/>
-          </a:xfrm>
-          <a:prstGeom prst="rect">
-            <a:avLst/>
-          </a:prstGeom>
-        </p:spPr>
-      </p:pic>
-      <p:sp>
-        <p:nvSpPr>
-          <p:cNvPr id="25" name="TextBox 24"/>
-          <p:cNvSpPr txBox="1"/>
-          <p:nvPr/>
-        </p:nvSpPr>
-        <p:spPr>
-          <a:xfrm>
-            <a:off x="8503920" y="6336792"/>
-            <a:ext cx="3200400" cy="365760"/>
-          </a:xfrm>
-          <a:prstGeom prst="rect">
-            <a:avLst/>
-          </a:prstGeom>
-          <a:noFill/>
-        </p:spPr>
-        <p:txBody>
-          <a:bodyPr wrap="square" lIns="0" rIns="0" tIns="0" bIns="0" anchor="t">
-            <a:spAutoFit/>
-          </a:bodyPr>
-          <a:lstStyle/>
-          <a:p>
-            <a:pPr algn="ctr">
-              <a:lnSpc>
-                <a:spcPct val="100000"/>
-              </a:lnSpc>
-            </a:pPr>
-            <a:r>
-              <a:rPr sz="1200" b="0">
-                <a:solidFill>
-                  <a:srgbClr val="94A3B8"/>
-                </a:solidFill>
-                <a:latin typeface="Noto Sans JP"/>
-                <a:ea typeface="Noto Sans JP"/>
-                <a:cs typeface="Noto Sans JP"/>
-              </a:rPr>
-              <a:t>家の在庫（マイストック）</a:t>
             </a:r>
           </a:p>
         </p:txBody>
@@ -6240,8 +6953,8 @@
         </p:nvSpPr>
         <p:spPr>
           <a:xfrm>
-            <a:off x="822960" y="868680"/>
-            <a:ext cx="5486400" cy="457200"/>
+            <a:off x="685800" y="457200"/>
+            <a:ext cx="5486400" cy="478789"/>
           </a:xfrm>
           <a:prstGeom prst="rect">
             <a:avLst/>
@@ -6249,7 +6962,7 @@
           <a:noFill/>
         </p:spPr>
         <p:txBody>
-          <a:bodyPr wrap="square" lIns="0" rIns="0" tIns="0" bIns="0" anchor="t">
+          <a:bodyPr wrap="none" lIns="0" rIns="0" tIns="0" bIns="0" anchor="t">
             <a:spAutoFit/>
           </a:bodyPr>
           <a:lstStyle/>
@@ -6260,37 +6973,182 @@
               </a:lnSpc>
             </a:pPr>
             <a:r>
-              <a:rPr sz="2000" b="1">
-                <a:solidFill>
-                  <a:srgbClr val="2563EB"/>
+              <a:rPr sz="2600" b="1">
+                <a:solidFill>
+                  <a:srgbClr val="1B2A4A"/>
                 </a:solidFill>
                 <a:latin typeface="Noto Sans JP"/>
                 <a:ea typeface="Noto Sans JP"/>
                 <a:cs typeface="Noto Sans JP"/>
               </a:rPr>
-              <a:t>エピソード 1 への答え｜組み合わせ</a:t>
-            </a:r>
-          </a:p>
-        </p:txBody>
-      </p:sp>
-      <p:sp>
-        <p:nvSpPr>
-          <p:cNvPr id="3" name="TextBox 2"/>
-          <p:cNvSpPr txBox="1"/>
-          <p:nvPr/>
-        </p:nvSpPr>
-        <p:spPr>
-          <a:xfrm>
-            <a:off x="822960" y="1371600"/>
-            <a:ext cx="5303520" cy="1188720"/>
+              <a:t>しくみ</a:t>
+            </a:r>
+          </a:p>
+        </p:txBody>
+      </p:sp>
+      <p:sp>
+        <p:nvSpPr>
+          <p:cNvPr id="3" name="Rectangle 2"/>
+          <p:cNvSpPr/>
+          <p:nvPr/>
+        </p:nvSpPr>
+        <p:spPr>
+          <a:xfrm>
+            <a:off x="685800" y="987552"/>
+            <a:ext cx="10820095" cy="20116"/>
           </a:xfrm>
           <a:prstGeom prst="rect">
             <a:avLst/>
           </a:prstGeom>
+          <a:solidFill>
+            <a:srgbClr val="1B2A4A"/>
+          </a:solidFill>
+          <a:ln>
+            <a:noFill/>
+          </a:ln>
+          <a:effectLst/>
+        </p:spPr>
+        <p:style>
+          <a:lnRef idx="1">
+            <a:schemeClr val="accent1"/>
+          </a:lnRef>
+          <a:fillRef idx="3">
+            <a:schemeClr val="accent1"/>
+          </a:fillRef>
+          <a:effectRef idx="2">
+            <a:schemeClr val="accent1"/>
+          </a:effectRef>
+          <a:fontRef idx="minor">
+            <a:schemeClr val="lt1"/>
+          </a:fontRef>
+        </p:style>
+        <p:txBody>
+          <a:bodyPr rtlCol="0" anchor="ctr" lIns="0" rIns="0" tIns="0" bIns="0"/>
+          <a:lstStyle/>
+          <a:p>
+            <a:pPr algn="ctr"/>
+          </a:p>
+        </p:txBody>
+      </p:sp>
+      <p:sp>
+        <p:nvSpPr>
+          <p:cNvPr id="4" name="Rectangle 3"/>
+          <p:cNvSpPr/>
+          <p:nvPr/>
+        </p:nvSpPr>
+        <p:spPr>
+          <a:xfrm>
+            <a:off x="902970" y="1618488"/>
+            <a:ext cx="22860" cy="3383280"/>
+          </a:xfrm>
+          <a:prstGeom prst="rect">
+            <a:avLst/>
+          </a:prstGeom>
+          <a:solidFill>
+            <a:srgbClr val="C9D0DB"/>
+          </a:solidFill>
+          <a:ln>
+            <a:noFill/>
+          </a:ln>
+          <a:effectLst/>
+        </p:spPr>
+        <p:style>
+          <a:lnRef idx="1">
+            <a:schemeClr val="accent1"/>
+          </a:lnRef>
+          <a:fillRef idx="3">
+            <a:schemeClr val="accent1"/>
+          </a:fillRef>
+          <a:effectRef idx="2">
+            <a:schemeClr val="accent1"/>
+          </a:effectRef>
+          <a:fontRef idx="minor">
+            <a:schemeClr val="lt1"/>
+          </a:fontRef>
+        </p:style>
+        <p:txBody>
+          <a:bodyPr rtlCol="0" anchor="ctr" lIns="0" rIns="0" tIns="0" bIns="0"/>
+          <a:lstStyle/>
+          <a:p>
+            <a:pPr algn="ctr"/>
+          </a:p>
+        </p:txBody>
+      </p:sp>
+      <p:sp>
+        <p:nvSpPr>
+          <p:cNvPr id="5" name="Rounded Rectangle 4"/>
+          <p:cNvSpPr/>
+          <p:nvPr/>
+        </p:nvSpPr>
+        <p:spPr>
+          <a:xfrm>
+            <a:off x="685800" y="1389888"/>
+            <a:ext cx="457200" cy="457200"/>
+          </a:xfrm>
+          <a:prstGeom prst="roundRect">
+            <a:avLst>
+              <a:gd name="adj" fmla="val 50000"/>
+            </a:avLst>
+          </a:prstGeom>
+          <a:solidFill>
+            <a:srgbClr val="1B2A4A"/>
+          </a:solidFill>
+          <a:ln>
+            <a:noFill/>
+          </a:ln>
+          <a:effectLst/>
+        </p:spPr>
+        <p:style>
+          <a:lnRef idx="1">
+            <a:schemeClr val="accent1"/>
+          </a:lnRef>
+          <a:fillRef idx="3">
+            <a:schemeClr val="accent1"/>
+          </a:fillRef>
+          <a:effectRef idx="2">
+            <a:schemeClr val="accent1"/>
+          </a:effectRef>
+          <a:fontRef idx="minor">
+            <a:schemeClr val="lt1"/>
+          </a:fontRef>
+        </p:style>
+        <p:txBody>
+          <a:bodyPr rtlCol="0" anchor="ctr" lIns="0" rIns="0" tIns="0" bIns="0" wrap="none"/>
+          <a:lstStyle/>
+          <a:p>
+            <a:pPr algn="ctr"/>
+            <a:r>
+              <a:rPr sz="1800" b="1">
+                <a:solidFill>
+                  <a:srgbClr val="FFFFFF"/>
+                </a:solidFill>
+                <a:latin typeface="Noto Sans JP"/>
+                <a:ea typeface="Noto Sans JP"/>
+                <a:cs typeface="Noto Sans JP"/>
+              </a:rPr>
+              <a:t>1</a:t>
+            </a:r>
+          </a:p>
+        </p:txBody>
+      </p:sp>
+      <p:sp>
+        <p:nvSpPr>
+          <p:cNvPr id="6" name="TextBox 5"/>
+          <p:cNvSpPr txBox="1"/>
+          <p:nvPr/>
+        </p:nvSpPr>
+        <p:spPr>
+          <a:xfrm>
+            <a:off x="1417320" y="1408176"/>
+            <a:ext cx="2743200" cy="313055"/>
+          </a:xfrm>
+          <a:prstGeom prst="rect">
+            <a:avLst/>
+          </a:prstGeom>
           <a:noFill/>
         </p:spPr>
         <p:txBody>
-          <a:bodyPr wrap="square" lIns="0" rIns="0" tIns="0" bIns="0" anchor="t">
+          <a:bodyPr wrap="none" lIns="0" rIns="0" tIns="0" bIns="0" anchor="t">
             <a:spAutoFit/>
           </a:bodyPr>
           <a:lstStyle/>
@@ -6301,17 +7159,40 @@
               </a:lnSpc>
             </a:pPr>
             <a:r>
-              <a:rPr sz="3000" b="1">
-                <a:solidFill>
-                  <a:srgbClr val="0F172A"/>
+              <a:rPr sz="1700" b="1">
+                <a:solidFill>
+                  <a:srgbClr val="475569"/>
                 </a:solidFill>
                 <a:latin typeface="Noto Sans JP"/>
                 <a:ea typeface="Noto Sans JP"/>
                 <a:cs typeface="Noto Sans JP"/>
               </a:rPr>
-              <a:t>「使っていい？」の目安が、</a:t>
-            </a:r>
-          </a:p>
+              <a:t>家で</a:t>
+            </a:r>
+          </a:p>
+        </p:txBody>
+      </p:sp>
+      <p:sp>
+        <p:nvSpPr>
+          <p:cNvPr id="7" name="TextBox 6"/>
+          <p:cNvSpPr txBox="1"/>
+          <p:nvPr/>
+        </p:nvSpPr>
+        <p:spPr>
+          <a:xfrm>
+            <a:off x="1417320" y="1783080"/>
+            <a:ext cx="4892040" cy="515620"/>
+          </a:xfrm>
+          <a:prstGeom prst="rect">
+            <a:avLst/>
+          </a:prstGeom>
+          <a:noFill/>
+        </p:spPr>
+        <p:txBody>
+          <a:bodyPr wrap="none" lIns="0" rIns="0" tIns="0" bIns="0" anchor="t">
+            <a:spAutoFit/>
+          </a:bodyPr>
+          <a:lstStyle/>
           <a:p>
             <a:pPr algn="l">
               <a:lnSpc>
@@ -6319,29 +7200,29 @@
               </a:lnSpc>
             </a:pPr>
             <a:r>
-              <a:rPr sz="3000" b="1">
-                <a:solidFill>
-                  <a:srgbClr val="0F172A"/>
+              <a:rPr sz="2800" b="1">
+                <a:solidFill>
+                  <a:srgbClr val="1B2A4A"/>
                 </a:solidFill>
                 <a:latin typeface="Noto Sans JP"/>
                 <a:ea typeface="Noto Sans JP"/>
                 <a:cs typeface="Noto Sans JP"/>
               </a:rPr>
-              <a:t>その場でわかる。</a:t>
-            </a:r>
-          </a:p>
-        </p:txBody>
-      </p:sp>
-      <p:sp>
-        <p:nvSpPr>
-          <p:cNvPr id="4" name="TextBox 3"/>
+              <a:t>薬・化粧品を撮って登録</a:t>
+            </a:r>
+          </a:p>
+        </p:txBody>
+      </p:sp>
+      <p:sp>
+        <p:nvSpPr>
+          <p:cNvPr id="8" name="TextBox 7"/>
           <p:cNvSpPr txBox="1"/>
           <p:nvPr/>
         </p:nvSpPr>
         <p:spPr>
           <a:xfrm>
-            <a:off x="822960" y="2651760"/>
-            <a:ext cx="5303520" cy="1005840"/>
+            <a:off x="1417320" y="2304288"/>
+            <a:ext cx="4892040" cy="313055"/>
           </a:xfrm>
           <a:prstGeom prst="rect">
             <a:avLst/>
@@ -6349,7 +7230,7 @@
           <a:noFill/>
         </p:spPr>
         <p:txBody>
-          <a:bodyPr wrap="square" lIns="0" rIns="0" tIns="0" bIns="0" anchor="t">
+          <a:bodyPr wrap="none" lIns="0" rIns="0" tIns="0" bIns="0" anchor="t">
             <a:spAutoFit/>
           </a:bodyPr>
           <a:lstStyle/>
@@ -6360,7 +7241,7 @@
               </a:lnSpc>
             </a:pPr>
             <a:r>
-              <a:rPr sz="1500" b="0">
+              <a:rPr sz="1700" b="0">
                 <a:solidFill>
                   <a:srgbClr val="475569"/>
                 </a:solidFill>
@@ -6368,9 +7249,76 @@
                 <a:ea typeface="Noto Sans JP"/>
                 <a:cs typeface="Noto Sans JP"/>
               </a:rPr>
-              <a:t>薬を塗っている肌に刺激になりうる化粧品は、</a:t>
-            </a:r>
-          </a:p>
+              <a:t>AIが成分表示を読み取る</a:t>
+            </a:r>
+          </a:p>
+        </p:txBody>
+      </p:sp>
+      <p:sp>
+        <p:nvSpPr>
+          <p:cNvPr id="9" name="Rectangle 8"/>
+          <p:cNvSpPr/>
+          <p:nvPr/>
+        </p:nvSpPr>
+        <p:spPr>
+          <a:xfrm>
+            <a:off x="6492240" y="1463040"/>
+            <a:ext cx="45720" cy="1097280"/>
+          </a:xfrm>
+          <a:prstGeom prst="rect">
+            <a:avLst/>
+          </a:prstGeom>
+          <a:solidFill>
+            <a:srgbClr val="C9D0DB"/>
+          </a:solidFill>
+          <a:ln>
+            <a:noFill/>
+          </a:ln>
+          <a:effectLst/>
+        </p:spPr>
+        <p:style>
+          <a:lnRef idx="1">
+            <a:schemeClr val="accent1"/>
+          </a:lnRef>
+          <a:fillRef idx="3">
+            <a:schemeClr val="accent1"/>
+          </a:fillRef>
+          <a:effectRef idx="2">
+            <a:schemeClr val="accent1"/>
+          </a:effectRef>
+          <a:fontRef idx="minor">
+            <a:schemeClr val="lt1"/>
+          </a:fontRef>
+        </p:style>
+        <p:txBody>
+          <a:bodyPr rtlCol="0" anchor="ctr" lIns="0" rIns="0" tIns="0" bIns="0"/>
+          <a:lstStyle/>
+          <a:p>
+            <a:pPr algn="ctr"/>
+          </a:p>
+        </p:txBody>
+      </p:sp>
+      <p:sp>
+        <p:nvSpPr>
+          <p:cNvPr id="10" name="TextBox 9"/>
+          <p:cNvSpPr txBox="1"/>
+          <p:nvPr/>
+        </p:nvSpPr>
+        <p:spPr>
+          <a:xfrm>
+            <a:off x="6766559" y="1426464"/>
+            <a:ext cx="4739335" cy="405130"/>
+          </a:xfrm>
+          <a:prstGeom prst="rect">
+            <a:avLst/>
+          </a:prstGeom>
+          <a:noFill/>
+        </p:spPr>
+        <p:txBody>
+          <a:bodyPr wrap="none" lIns="0" rIns="0" tIns="0" bIns="0" anchor="t">
+            <a:spAutoFit/>
+          </a:bodyPr>
+          <a:lstStyle/>
           <a:p>
             <a:pPr algn="l">
               <a:lnSpc>
@@ -6378,17 +7326,40 @@
               </a:lnSpc>
             </a:pPr>
             <a:r>
-              <a:rPr sz="1500" b="0">
-                <a:solidFill>
-                  <a:srgbClr val="475569"/>
+              <a:rPr sz="2200" b="1">
+                <a:solidFill>
+                  <a:srgbClr val="0F172A"/>
                 </a:solidFill>
                 <a:latin typeface="Noto Sans JP"/>
                 <a:ea typeface="Noto Sans JP"/>
                 <a:cs typeface="Noto Sans JP"/>
               </a:rPr>
-              <a:t>理由つきで教えてくれる。</a:t>
-            </a:r>
-          </a:p>
+              <a:t>自分の体質も登録できる</a:t>
+            </a:r>
+          </a:p>
+        </p:txBody>
+      </p:sp>
+      <p:sp>
+        <p:nvSpPr>
+          <p:cNvPr id="11" name="TextBox 10"/>
+          <p:cNvSpPr txBox="1"/>
+          <p:nvPr/>
+        </p:nvSpPr>
+        <p:spPr>
+          <a:xfrm>
+            <a:off x="6766559" y="1901952"/>
+            <a:ext cx="4739335" cy="662940"/>
+          </a:xfrm>
+          <a:prstGeom prst="rect">
+            <a:avLst/>
+          </a:prstGeom>
+          <a:noFill/>
+        </p:spPr>
+        <p:txBody>
+          <a:bodyPr wrap="none" lIns="0" rIns="0" tIns="0" bIns="0" anchor="t">
+            <a:spAutoFit/>
+          </a:bodyPr>
+          <a:lstStyle/>
           <a:p>
             <a:pPr algn="l">
               <a:lnSpc>
@@ -6396,7 +7367,7 @@
               </a:lnSpc>
             </a:pPr>
             <a:r>
-              <a:rPr sz="1500" b="0">
+              <a:rPr sz="1800" b="0">
                 <a:solidFill>
                   <a:srgbClr val="475569"/>
                 </a:solidFill>
@@ -6404,27 +7375,47 @@
                 <a:ea typeface="Noto Sans JP"/>
                 <a:cs typeface="Noto Sans JP"/>
               </a:rPr>
-              <a:t>例）エタノール → 薬を塗った肌の刺激になる可能性</a:t>
-            </a:r>
-          </a:p>
-        </p:txBody>
-      </p:sp>
-      <p:sp>
-        <p:nvSpPr>
-          <p:cNvPr id="5" name="Rectangle 4"/>
+              <a:t>肌質や年代、悩みを登録すると、</a:t>
+            </a:r>
+          </a:p>
+          <a:p>
+            <a:pPr algn="l">
+              <a:lnSpc>
+                <a:spcPct val="100000"/>
+              </a:lnSpc>
+            </a:pPr>
+            <a:r>
+              <a:rPr sz="1800" b="0">
+                <a:solidFill>
+                  <a:srgbClr val="475569"/>
+                </a:solidFill>
+                <a:latin typeface="Noto Sans JP"/>
+                <a:ea typeface="Noto Sans JP"/>
+                <a:cs typeface="Noto Sans JP"/>
+              </a:rPr>
+              <a:t>使い方の助言がパーソナライズされる</a:t>
+            </a:r>
+          </a:p>
+        </p:txBody>
+      </p:sp>
+      <p:sp>
+        <p:nvSpPr>
+          <p:cNvPr id="12" name="Rounded Rectangle 11"/>
           <p:cNvSpPr/>
           <p:nvPr/>
         </p:nvSpPr>
         <p:spPr>
           <a:xfrm>
-            <a:off x="822960" y="3886200"/>
-            <a:ext cx="548640" cy="45720"/>
-          </a:xfrm>
-          <a:prstGeom prst="rect">
-            <a:avLst/>
+            <a:off x="685800" y="3081528"/>
+            <a:ext cx="457200" cy="457200"/>
+          </a:xfrm>
+          <a:prstGeom prst="roundRect">
+            <a:avLst>
+              <a:gd name="adj" fmla="val 50000"/>
+            </a:avLst>
           </a:prstGeom>
           <a:solidFill>
-            <a:srgbClr val="E2E8F0"/>
+            <a:srgbClr val="1B2A4A"/>
           </a:solidFill>
           <a:ln>
             <a:noFill/>
@@ -6446,23 +7437,34 @@
           </a:fontRef>
         </p:style>
         <p:txBody>
-          <a:bodyPr rtlCol="0" anchor="ctr" lIns="0" rIns="0" tIns="0" bIns="0"/>
+          <a:bodyPr rtlCol="0" anchor="ctr" lIns="0" rIns="0" tIns="0" bIns="0" wrap="none"/>
           <a:lstStyle/>
           <a:p>
             <a:pPr algn="ctr"/>
-          </a:p>
-        </p:txBody>
-      </p:sp>
-      <p:sp>
-        <p:nvSpPr>
-          <p:cNvPr id="6" name="TextBox 5"/>
+            <a:r>
+              <a:rPr sz="1800" b="1">
+                <a:solidFill>
+                  <a:srgbClr val="FFFFFF"/>
+                </a:solidFill>
+                <a:latin typeface="Noto Sans JP"/>
+                <a:ea typeface="Noto Sans JP"/>
+                <a:cs typeface="Noto Sans JP"/>
+              </a:rPr>
+              <a:t>2</a:t>
+            </a:r>
+          </a:p>
+        </p:txBody>
+      </p:sp>
+      <p:sp>
+        <p:nvSpPr>
+          <p:cNvPr id="13" name="TextBox 12"/>
           <p:cNvSpPr txBox="1"/>
           <p:nvPr/>
         </p:nvSpPr>
         <p:spPr>
           <a:xfrm>
-            <a:off x="822960" y="4114800"/>
-            <a:ext cx="5486400" cy="1188720"/>
+            <a:off x="1417320" y="3099816"/>
+            <a:ext cx="2743200" cy="313055"/>
           </a:xfrm>
           <a:prstGeom prst="rect">
             <a:avLst/>
@@ -6470,7 +7472,7 @@
           <a:noFill/>
         </p:spPr>
         <p:txBody>
-          <a:bodyPr wrap="square" lIns="0" rIns="0" tIns="0" bIns="0" anchor="t">
+          <a:bodyPr wrap="none" lIns="0" rIns="0" tIns="0" bIns="0" anchor="t">
             <a:spAutoFit/>
           </a:bodyPr>
           <a:lstStyle/>
@@ -6481,17 +7483,40 @@
               </a:lnSpc>
             </a:pPr>
             <a:r>
-              <a:rPr sz="3000" b="1">
-                <a:solidFill>
-                  <a:srgbClr val="0F172A"/>
+              <a:rPr sz="1700" b="1">
+                <a:solidFill>
+                  <a:srgbClr val="475569"/>
                 </a:solidFill>
                 <a:latin typeface="Noto Sans JP"/>
                 <a:ea typeface="Noto Sans JP"/>
                 <a:cs typeface="Noto Sans JP"/>
               </a:rPr>
-              <a:t>今ある薬と化粧品の</a:t>
-            </a:r>
-          </a:p>
+              <a:t>店で</a:t>
+            </a:r>
+          </a:p>
+        </p:txBody>
+      </p:sp>
+      <p:sp>
+        <p:nvSpPr>
+          <p:cNvPr id="14" name="TextBox 13"/>
+          <p:cNvSpPr txBox="1"/>
+          <p:nvPr/>
+        </p:nvSpPr>
+        <p:spPr>
+          <a:xfrm>
+            <a:off x="1417320" y="3474720"/>
+            <a:ext cx="4892040" cy="515620"/>
+          </a:xfrm>
+          <a:prstGeom prst="rect">
+            <a:avLst/>
+          </a:prstGeom>
+          <a:noFill/>
+        </p:spPr>
+        <p:txBody>
+          <a:bodyPr wrap="none" lIns="0" rIns="0" tIns="0" bIns="0" anchor="t">
+            <a:spAutoFit/>
+          </a:bodyPr>
+          <a:lstStyle/>
           <a:p>
             <a:pPr algn="l">
               <a:lnSpc>
@@ -6499,29 +7524,29 @@
               </a:lnSpc>
             </a:pPr>
             <a:r>
-              <a:rPr sz="3000" b="1">
-                <a:solidFill>
-                  <a:srgbClr val="0F172A"/>
+              <a:rPr sz="2800" b="1">
+                <a:solidFill>
+                  <a:srgbClr val="1B2A4A"/>
                 </a:solidFill>
                 <a:latin typeface="Noto Sans JP"/>
                 <a:ea typeface="Noto Sans JP"/>
                 <a:cs typeface="Noto Sans JP"/>
               </a:rPr>
-              <a:t>塗る順番が、ひと目でわかる。</a:t>
-            </a:r>
-          </a:p>
-        </p:txBody>
-      </p:sp>
-      <p:sp>
-        <p:nvSpPr>
-          <p:cNvPr id="7" name="TextBox 6"/>
+              <a:t>気になる商品を撮る</a:t>
+            </a:r>
+          </a:p>
+        </p:txBody>
+      </p:sp>
+      <p:sp>
+        <p:nvSpPr>
+          <p:cNvPr id="15" name="TextBox 14"/>
           <p:cNvSpPr txBox="1"/>
           <p:nvPr/>
         </p:nvSpPr>
         <p:spPr>
           <a:xfrm>
-            <a:off x="822960" y="5394960"/>
-            <a:ext cx="5303520" cy="731520"/>
+            <a:off x="1417320" y="3995928"/>
+            <a:ext cx="4892040" cy="313055"/>
           </a:xfrm>
           <a:prstGeom prst="rect">
             <a:avLst/>
@@ -6529,7 +7554,7 @@
           <a:noFill/>
         </p:spPr>
         <p:txBody>
-          <a:bodyPr wrap="square" lIns="0" rIns="0" tIns="0" bIns="0" anchor="t">
+          <a:bodyPr wrap="none" lIns="0" rIns="0" tIns="0" bIns="0" anchor="t">
             <a:spAutoFit/>
           </a:bodyPr>
           <a:lstStyle/>
@@ -6540,7 +7565,7 @@
               </a:lnSpc>
             </a:pPr>
             <a:r>
-              <a:rPr sz="1500" b="0">
+              <a:rPr sz="1700" b="0">
                 <a:solidFill>
                   <a:srgbClr val="475569"/>
                 </a:solidFill>
@@ -6548,9 +7573,76 @@
                 <a:ea typeface="Noto Sans JP"/>
                 <a:cs typeface="Noto Sans JP"/>
               </a:rPr>
-              <a:t>化粧水から処方の軟膏まで、家にあるものを</a:t>
-            </a:r>
-          </a:p>
+              <a:t>AIが家のものと照らし合わせる</a:t>
+            </a:r>
+          </a:p>
+        </p:txBody>
+      </p:sp>
+      <p:sp>
+        <p:nvSpPr>
+          <p:cNvPr id="16" name="Rectangle 15"/>
+          <p:cNvSpPr/>
+          <p:nvPr/>
+        </p:nvSpPr>
+        <p:spPr>
+          <a:xfrm>
+            <a:off x="6492240" y="3154680"/>
+            <a:ext cx="45720" cy="1097280"/>
+          </a:xfrm>
+          <a:prstGeom prst="rect">
+            <a:avLst/>
+          </a:prstGeom>
+          <a:solidFill>
+            <a:srgbClr val="C9D0DB"/>
+          </a:solidFill>
+          <a:ln>
+            <a:noFill/>
+          </a:ln>
+          <a:effectLst/>
+        </p:spPr>
+        <p:style>
+          <a:lnRef idx="1">
+            <a:schemeClr val="accent1"/>
+          </a:lnRef>
+          <a:fillRef idx="3">
+            <a:schemeClr val="accent1"/>
+          </a:fillRef>
+          <a:effectRef idx="2">
+            <a:schemeClr val="accent1"/>
+          </a:effectRef>
+          <a:fontRef idx="minor">
+            <a:schemeClr val="lt1"/>
+          </a:fontRef>
+        </p:style>
+        <p:txBody>
+          <a:bodyPr rtlCol="0" anchor="ctr" lIns="0" rIns="0" tIns="0" bIns="0"/>
+          <a:lstStyle/>
+          <a:p>
+            <a:pPr algn="ctr"/>
+          </a:p>
+        </p:txBody>
+      </p:sp>
+      <p:sp>
+        <p:nvSpPr>
+          <p:cNvPr id="17" name="TextBox 16"/>
+          <p:cNvSpPr txBox="1"/>
+          <p:nvPr/>
+        </p:nvSpPr>
+        <p:spPr>
+          <a:xfrm>
+            <a:off x="6766559" y="3118104"/>
+            <a:ext cx="4739335" cy="405130"/>
+          </a:xfrm>
+          <a:prstGeom prst="rect">
+            <a:avLst/>
+          </a:prstGeom>
+          <a:noFill/>
+        </p:spPr>
+        <p:txBody>
+          <a:bodyPr wrap="none" lIns="0" rIns="0" tIns="0" bIns="0" anchor="t">
+            <a:spAutoFit/>
+          </a:bodyPr>
+          <a:lstStyle/>
           <a:p>
             <a:pPr algn="l">
               <a:lnSpc>
@@ -6558,42 +7650,99 @@
               </a:lnSpc>
             </a:pPr>
             <a:r>
-              <a:rPr sz="1500" b="0">
-                <a:solidFill>
-                  <a:srgbClr val="475569"/>
+              <a:rPr sz="2200" b="1">
+                <a:solidFill>
+                  <a:srgbClr val="0F172A"/>
                 </a:solidFill>
                 <a:latin typeface="Noto Sans JP"/>
                 <a:ea typeface="Noto Sans JP"/>
                 <a:cs typeface="Noto Sans JP"/>
               </a:rPr>
-              <a:t>塗る順に並べて見せる。※医師・薬剤師の指示が優先</a:t>
-            </a:r>
-          </a:p>
-        </p:txBody>
-      </p:sp>
-      <p:sp>
-        <p:nvSpPr>
-          <p:cNvPr id="8" name="Rounded Rectangle 7"/>
+              <a:t>撮るだけで、すぐ確かめられる</a:t>
+            </a:r>
+          </a:p>
+        </p:txBody>
+      </p:sp>
+      <p:sp>
+        <p:nvSpPr>
+          <p:cNvPr id="18" name="TextBox 17"/>
+          <p:cNvSpPr txBox="1"/>
+          <p:nvPr/>
+        </p:nvSpPr>
+        <p:spPr>
+          <a:xfrm>
+            <a:off x="6766559" y="3593592"/>
+            <a:ext cx="4739335" cy="662940"/>
+          </a:xfrm>
+          <a:prstGeom prst="rect">
+            <a:avLst/>
+          </a:prstGeom>
+          <a:noFill/>
+        </p:spPr>
+        <p:txBody>
+          <a:bodyPr wrap="none" lIns="0" rIns="0" tIns="0" bIns="0" anchor="t">
+            <a:spAutoFit/>
+          </a:bodyPr>
+          <a:lstStyle/>
+          <a:p>
+            <a:pPr algn="l">
+              <a:lnSpc>
+                <a:spcPct val="100000"/>
+              </a:lnSpc>
+            </a:pPr>
+            <a:r>
+              <a:rPr sz="1800" b="0">
+                <a:solidFill>
+                  <a:srgbClr val="475569"/>
+                </a:solidFill>
+                <a:latin typeface="Noto Sans JP"/>
+                <a:ea typeface="Noto Sans JP"/>
+                <a:cs typeface="Noto Sans JP"/>
+              </a:rPr>
+              <a:t>商品名の入力も検索もいらない</a:t>
+            </a:r>
+          </a:p>
+          <a:p>
+            <a:pPr algn="l">
+              <a:lnSpc>
+                <a:spcPct val="100000"/>
+              </a:lnSpc>
+            </a:pPr>
+            <a:r>
+              <a:rPr sz="1800" b="0">
+                <a:solidFill>
+                  <a:srgbClr val="475569"/>
+                </a:solidFill>
+                <a:latin typeface="Noto Sans JP"/>
+                <a:ea typeface="Noto Sans JP"/>
+                <a:cs typeface="Noto Sans JP"/>
+              </a:rPr>
+              <a:t>店先で成分表示を1枚撮れば済む</a:t>
+            </a:r>
+          </a:p>
+        </p:txBody>
+      </p:sp>
+      <p:sp>
+        <p:nvSpPr>
+          <p:cNvPr id="19" name="Rounded Rectangle 18"/>
           <p:cNvSpPr/>
           <p:nvPr/>
         </p:nvSpPr>
         <p:spPr>
           <a:xfrm>
-            <a:off x="6272784" y="603504"/>
-            <a:ext cx="2698745" cy="5193792"/>
+            <a:off x="685800" y="4773168"/>
+            <a:ext cx="457200" cy="457200"/>
           </a:xfrm>
           <a:prstGeom prst="roundRect">
             <a:avLst>
-              <a:gd name="adj" fmla="val 7454"/>
+              <a:gd name="adj" fmla="val 50000"/>
             </a:avLst>
           </a:prstGeom>
           <a:solidFill>
-            <a:srgbClr val="FFFFFF"/>
+            <a:srgbClr val="1B2A4A"/>
           </a:solidFill>
-          <a:ln w="12700">
-            <a:solidFill>
-              <a:srgbClr val="E2E8F0"/>
-            </a:solidFill>
+          <a:ln>
+            <a:noFill/>
           </a:ln>
           <a:effectLst/>
         </p:spPr>
@@ -6612,60 +7761,166 @@
           </a:fontRef>
         </p:style>
         <p:txBody>
-          <a:bodyPr rtlCol="0" anchor="ctr" lIns="0" rIns="0" tIns="0" bIns="0"/>
+          <a:bodyPr rtlCol="0" anchor="ctr" lIns="0" rIns="0" tIns="0" bIns="0" wrap="none"/>
           <a:lstStyle/>
           <a:p>
             <a:pPr algn="ctr"/>
-          </a:p>
-        </p:txBody>
-      </p:sp>
-      <p:pic>
-        <p:nvPicPr>
-          <p:cNvPr id="9" name="Picture 8" descr="red-real.png"/>
-          <p:cNvPicPr>
-            <a:picLocks noChangeAspect="1"/>
-          </p:cNvPicPr>
-          <p:nvPr/>
-        </p:nvPicPr>
-        <p:blipFill>
-          <a:blip r:embed="rId2"/>
-          <a:stretch>
-            <a:fillRect/>
-          </a:stretch>
-        </p:blipFill>
-        <p:spPr>
-          <a:xfrm>
-            <a:off x="6355080" y="685800"/>
-            <a:ext cx="2534153" cy="5029200"/>
+            <a:r>
+              <a:rPr sz="1800" b="1">
+                <a:solidFill>
+                  <a:srgbClr val="FFFFFF"/>
+                </a:solidFill>
+                <a:latin typeface="Noto Sans JP"/>
+                <a:ea typeface="Noto Sans JP"/>
+                <a:cs typeface="Noto Sans JP"/>
+              </a:rPr>
+              <a:t>3</a:t>
+            </a:r>
+          </a:p>
+        </p:txBody>
+      </p:sp>
+      <p:sp>
+        <p:nvSpPr>
+          <p:cNvPr id="20" name="TextBox 19"/>
+          <p:cNvSpPr txBox="1"/>
+          <p:nvPr/>
+        </p:nvSpPr>
+        <p:spPr>
+          <a:xfrm>
+            <a:off x="1417320" y="4791456"/>
+            <a:ext cx="2743200" cy="313055"/>
           </a:xfrm>
           <a:prstGeom prst="rect">
             <a:avLst/>
           </a:prstGeom>
-        </p:spPr>
-      </p:pic>
-      <p:sp>
-        <p:nvSpPr>
-          <p:cNvPr id="10" name="Rounded Rectangle 9"/>
+          <a:noFill/>
+        </p:spPr>
+        <p:txBody>
+          <a:bodyPr wrap="none" lIns="0" rIns="0" tIns="0" bIns="0" anchor="t">
+            <a:spAutoFit/>
+          </a:bodyPr>
+          <a:lstStyle/>
+          <a:p>
+            <a:pPr algn="l">
+              <a:lnSpc>
+                <a:spcPct val="100000"/>
+              </a:lnSpc>
+            </a:pPr>
+            <a:r>
+              <a:rPr sz="1700" b="1">
+                <a:solidFill>
+                  <a:srgbClr val="475569"/>
+                </a:solidFill>
+                <a:latin typeface="Noto Sans JP"/>
+                <a:ea typeface="Noto Sans JP"/>
+                <a:cs typeface="Noto Sans JP"/>
+              </a:rPr>
+              <a:t>その場で</a:t>
+            </a:r>
+          </a:p>
+        </p:txBody>
+      </p:sp>
+      <p:sp>
+        <p:nvSpPr>
+          <p:cNvPr id="21" name="TextBox 20"/>
+          <p:cNvSpPr txBox="1"/>
+          <p:nvPr/>
+        </p:nvSpPr>
+        <p:spPr>
+          <a:xfrm>
+            <a:off x="1417320" y="5166360"/>
+            <a:ext cx="4892040" cy="515620"/>
+          </a:xfrm>
+          <a:prstGeom prst="rect">
+            <a:avLst/>
+          </a:prstGeom>
+          <a:noFill/>
+        </p:spPr>
+        <p:txBody>
+          <a:bodyPr wrap="none" lIns="0" rIns="0" tIns="0" bIns="0" anchor="t">
+            <a:spAutoFit/>
+          </a:bodyPr>
+          <a:lstStyle/>
+          <a:p>
+            <a:pPr algn="l">
+              <a:lnSpc>
+                <a:spcPct val="100000"/>
+              </a:lnSpc>
+            </a:pPr>
+            <a:r>
+              <a:rPr sz="2800" b="1">
+                <a:solidFill>
+                  <a:srgbClr val="1B2A4A"/>
+                </a:solidFill>
+                <a:latin typeface="Noto Sans JP"/>
+                <a:ea typeface="Noto Sans JP"/>
+                <a:cs typeface="Noto Sans JP"/>
+              </a:rPr>
+              <a:t>買うべきかの目安が出る</a:t>
+            </a:r>
+          </a:p>
+        </p:txBody>
+      </p:sp>
+      <p:sp>
+        <p:nvSpPr>
+          <p:cNvPr id="22" name="TextBox 21"/>
+          <p:cNvSpPr txBox="1"/>
+          <p:nvPr/>
+        </p:nvSpPr>
+        <p:spPr>
+          <a:xfrm>
+            <a:off x="1417320" y="5687568"/>
+            <a:ext cx="4892040" cy="313055"/>
+          </a:xfrm>
+          <a:prstGeom prst="rect">
+            <a:avLst/>
+          </a:prstGeom>
+          <a:noFill/>
+        </p:spPr>
+        <p:txBody>
+          <a:bodyPr wrap="none" lIns="0" rIns="0" tIns="0" bIns="0" anchor="t">
+            <a:spAutoFit/>
+          </a:bodyPr>
+          <a:lstStyle/>
+          <a:p>
+            <a:pPr algn="l">
+              <a:lnSpc>
+                <a:spcPct val="100000"/>
+              </a:lnSpc>
+            </a:pPr>
+            <a:r>
+              <a:rPr sz="1700" b="0">
+                <a:solidFill>
+                  <a:srgbClr val="475569"/>
+                </a:solidFill>
+                <a:latin typeface="Noto Sans JP"/>
+                <a:ea typeface="Noto Sans JP"/>
+                <a:cs typeface="Noto Sans JP"/>
+              </a:rPr>
+              <a:t>3色の判定と、成分名つきの理由</a:t>
+            </a:r>
+          </a:p>
+        </p:txBody>
+      </p:sp>
+      <p:sp>
+        <p:nvSpPr>
+          <p:cNvPr id="23" name="Rectangle 22"/>
           <p:cNvSpPr/>
           <p:nvPr/>
         </p:nvSpPr>
         <p:spPr>
           <a:xfrm>
-            <a:off x="9290304" y="603504"/>
-            <a:ext cx="2596064" cy="5193792"/>
-          </a:xfrm>
-          <a:prstGeom prst="roundRect">
-            <a:avLst>
-              <a:gd name="adj" fmla="val 7748"/>
-            </a:avLst>
+            <a:off x="6492240" y="4846320"/>
+            <a:ext cx="45720" cy="1097280"/>
+          </a:xfrm>
+          <a:prstGeom prst="rect">
+            <a:avLst/>
           </a:prstGeom>
           <a:solidFill>
-            <a:srgbClr val="FFFFFF"/>
+            <a:srgbClr val="C9D0DB"/>
           </a:solidFill>
-          <a:ln w="12700">
-            <a:solidFill>
-              <a:srgbClr val="E2E8F0"/>
-            </a:solidFill>
+          <a:ln>
+            <a:noFill/>
           </a:ln>
           <a:effectLst/>
         </p:spPr>
@@ -6691,67 +7946,102 @@
           </a:p>
         </p:txBody>
       </p:sp>
-      <p:pic>
-        <p:nvPicPr>
-          <p:cNvPr id="11" name="Picture 10" descr="routine-crop.jpg"/>
-          <p:cNvPicPr>
-            <a:picLocks noChangeAspect="1"/>
-          </p:cNvPicPr>
-          <p:nvPr/>
-        </p:nvPicPr>
-        <p:blipFill>
-          <a:blip r:embed="rId3"/>
-          <a:stretch>
-            <a:fillRect/>
-          </a:stretch>
-        </p:blipFill>
-        <p:spPr>
-          <a:xfrm>
-            <a:off x="9372600" y="685800"/>
-            <a:ext cx="2431472" cy="5029200"/>
+      <p:sp>
+        <p:nvSpPr>
+          <p:cNvPr id="24" name="TextBox 23"/>
+          <p:cNvSpPr txBox="1"/>
+          <p:nvPr/>
+        </p:nvSpPr>
+        <p:spPr>
+          <a:xfrm>
+            <a:off x="6766559" y="4809744"/>
+            <a:ext cx="4739335" cy="405130"/>
           </a:xfrm>
           <a:prstGeom prst="rect">
             <a:avLst/>
           </a:prstGeom>
-        </p:spPr>
-      </p:pic>
-      <p:sp>
-        <p:nvSpPr>
-          <p:cNvPr id="12" name="TextBox 11"/>
-          <p:cNvSpPr txBox="1"/>
-          <p:nvPr/>
-        </p:nvSpPr>
-        <p:spPr>
-          <a:xfrm>
-            <a:off x="6272784" y="5943600"/>
-            <a:ext cx="5614416" cy="365760"/>
-          </a:xfrm>
-          <a:prstGeom prst="rect">
-            <a:avLst/>
-          </a:prstGeom>
           <a:noFill/>
         </p:spPr>
         <p:txBody>
-          <a:bodyPr wrap="square" lIns="0" rIns="0" tIns="0" bIns="0" anchor="t">
+          <a:bodyPr wrap="none" lIns="0" rIns="0" tIns="0" bIns="0" anchor="t">
             <a:spAutoFit/>
           </a:bodyPr>
           <a:lstStyle/>
           <a:p>
-            <a:pPr algn="ctr">
+            <a:pPr algn="l">
               <a:lnSpc>
                 <a:spcPct val="100000"/>
               </a:lnSpc>
             </a:pPr>
             <a:r>
-              <a:rPr sz="1200" b="0">
-                <a:solidFill>
-                  <a:srgbClr val="94A3B8"/>
+              <a:rPr sz="2200" b="1">
+                <a:solidFill>
+                  <a:srgbClr val="0F172A"/>
                 </a:solidFill>
                 <a:latin typeface="Noto Sans JP"/>
                 <a:ea typeface="Noto Sans JP"/>
                 <a:cs typeface="Noto Sans JP"/>
               </a:rPr>
-              <a:t>実際の判定画面（市販の薬用化粧水）・塗る順番の画面</a:t>
+              <a:t>理由に根拠と出典を添える</a:t>
+            </a:r>
+          </a:p>
+        </p:txBody>
+      </p:sp>
+      <p:sp>
+        <p:nvSpPr>
+          <p:cNvPr id="25" name="TextBox 24"/>
+          <p:cNvSpPr txBox="1"/>
+          <p:nvPr/>
+        </p:nvSpPr>
+        <p:spPr>
+          <a:xfrm>
+            <a:off x="6766559" y="5285232"/>
+            <a:ext cx="4739335" cy="662940"/>
+          </a:xfrm>
+          <a:prstGeom prst="rect">
+            <a:avLst/>
+          </a:prstGeom>
+          <a:noFill/>
+        </p:spPr>
+        <p:txBody>
+          <a:bodyPr wrap="none" lIns="0" rIns="0" tIns="0" bIns="0" anchor="t">
+            <a:spAutoFit/>
+          </a:bodyPr>
+          <a:lstStyle/>
+          <a:p>
+            <a:pPr algn="l">
+              <a:lnSpc>
+                <a:spcPct val="100000"/>
+              </a:lnSpc>
+            </a:pPr>
+            <a:r>
+              <a:rPr sz="1800" b="0">
+                <a:solidFill>
+                  <a:srgbClr val="475569"/>
+                </a:solidFill>
+                <a:latin typeface="Noto Sans JP"/>
+                <a:ea typeface="Noto Sans JP"/>
+                <a:cs typeface="Noto Sans JP"/>
+              </a:rPr>
+              <a:t>根拠の薄い推測は、最初から出さない</a:t>
+            </a:r>
+          </a:p>
+          <a:p>
+            <a:pPr algn="l">
+              <a:lnSpc>
+                <a:spcPct val="100000"/>
+              </a:lnSpc>
+            </a:pPr>
+            <a:r>
+              <a:rPr sz="1800" b="0">
+                <a:solidFill>
+                  <a:srgbClr val="475569"/>
+                </a:solidFill>
+                <a:latin typeface="Noto Sans JP"/>
+                <a:ea typeface="Noto Sans JP"/>
+                <a:cs typeface="Noto Sans JP"/>
+              </a:rPr>
+              <a:t>表示された理由は、安心して読める</a:t>
             </a:r>
           </a:p>
         </p:txBody>
@@ -6782,396 +8072,9 @@
         <p:nvPr/>
       </p:nvGrpSpPr>
       <p:grpSpPr/>
-      <p:sp>
-        <p:nvSpPr>
-          <p:cNvPr id="2" name="TextBox 1"/>
-          <p:cNvSpPr txBox="1"/>
-          <p:nvPr/>
-        </p:nvSpPr>
-        <p:spPr>
-          <a:xfrm>
-            <a:off x="822960" y="868680"/>
-            <a:ext cx="5486400" cy="457200"/>
-          </a:xfrm>
-          <a:prstGeom prst="rect">
-            <a:avLst/>
-          </a:prstGeom>
-          <a:noFill/>
-        </p:spPr>
-        <p:txBody>
-          <a:bodyPr wrap="square" lIns="0" rIns="0" tIns="0" bIns="0" anchor="t">
-            <a:spAutoFit/>
-          </a:bodyPr>
-          <a:lstStyle/>
-          <a:p>
-            <a:pPr algn="l">
-              <a:lnSpc>
-                <a:spcPct val="100000"/>
-              </a:lnSpc>
-            </a:pPr>
-            <a:r>
-              <a:rPr sz="2000" b="1">
-                <a:solidFill>
-                  <a:srgbClr val="C2410C"/>
-                </a:solidFill>
-                <a:latin typeface="Noto Sans JP"/>
-                <a:ea typeface="Noto Sans JP"/>
-                <a:cs typeface="Noto Sans JP"/>
-              </a:rPr>
-              <a:t>エピソード 2 への答え｜重複</a:t>
-            </a:r>
-          </a:p>
-        </p:txBody>
-      </p:sp>
-      <p:sp>
-        <p:nvSpPr>
-          <p:cNvPr id="3" name="TextBox 2"/>
-          <p:cNvSpPr txBox="1"/>
-          <p:nvPr/>
-        </p:nvSpPr>
-        <p:spPr>
-          <a:xfrm>
-            <a:off x="822960" y="1371600"/>
-            <a:ext cx="7132320" cy="1188720"/>
-          </a:xfrm>
-          <a:prstGeom prst="rect">
-            <a:avLst/>
-          </a:prstGeom>
-          <a:noFill/>
-        </p:spPr>
-        <p:txBody>
-          <a:bodyPr wrap="square" lIns="0" rIns="0" tIns="0" bIns="0" anchor="t">
-            <a:spAutoFit/>
-          </a:bodyPr>
-          <a:lstStyle/>
-          <a:p>
-            <a:pPr algn="l">
-              <a:lnSpc>
-                <a:spcPct val="100000"/>
-              </a:lnSpc>
-            </a:pPr>
-            <a:r>
-              <a:rPr sz="3000" b="1">
-                <a:solidFill>
-                  <a:srgbClr val="0F172A"/>
-                </a:solidFill>
-                <a:latin typeface="Noto Sans JP"/>
-                <a:ea typeface="Noto Sans JP"/>
-                <a:cs typeface="Noto Sans JP"/>
-              </a:rPr>
-              <a:t>名前が違っても、同じ成分が</a:t>
-            </a:r>
-          </a:p>
-          <a:p>
-            <a:pPr algn="l">
-              <a:lnSpc>
-                <a:spcPct val="100000"/>
-              </a:lnSpc>
-            </a:pPr>
-            <a:r>
-              <a:rPr sz="3000" b="1">
-                <a:solidFill>
-                  <a:srgbClr val="0F172A"/>
-                </a:solidFill>
-                <a:latin typeface="Noto Sans JP"/>
-                <a:ea typeface="Noto Sans JP"/>
-                <a:cs typeface="Noto Sans JP"/>
-              </a:rPr>
-              <a:t>入っていれば気づける。</a:t>
-            </a:r>
-          </a:p>
-        </p:txBody>
-      </p:sp>
-      <p:sp>
-        <p:nvSpPr>
-          <p:cNvPr id="4" name="TextBox 3"/>
-          <p:cNvSpPr txBox="1"/>
-          <p:nvPr/>
-        </p:nvSpPr>
-        <p:spPr>
-          <a:xfrm>
-            <a:off x="822960" y="2651760"/>
-            <a:ext cx="7132320" cy="1005840"/>
-          </a:xfrm>
-          <a:prstGeom prst="rect">
-            <a:avLst/>
-          </a:prstGeom>
-          <a:noFill/>
-        </p:spPr>
-        <p:txBody>
-          <a:bodyPr wrap="square" lIns="0" rIns="0" tIns="0" bIns="0" anchor="t">
-            <a:spAutoFit/>
-          </a:bodyPr>
-          <a:lstStyle/>
-          <a:p>
-            <a:pPr algn="l">
-              <a:lnSpc>
-                <a:spcPct val="100000"/>
-              </a:lnSpc>
-            </a:pPr>
-            <a:r>
-              <a:rPr sz="1500" b="0">
-                <a:solidFill>
-                  <a:srgbClr val="475569"/>
-                </a:solidFill>
-                <a:latin typeface="Noto Sans JP"/>
-                <a:ea typeface="Noto Sans JP"/>
-                <a:cs typeface="Noto Sans JP"/>
-              </a:rPr>
-              <a:t>店の解熱鎮痛薬と、家の「イブA錠」。商品名は違っても、</a:t>
-            </a:r>
-          </a:p>
-          <a:p>
-            <a:pPr algn="l">
-              <a:lnSpc>
-                <a:spcPct val="100000"/>
-              </a:lnSpc>
-            </a:pPr>
-            <a:r>
-              <a:rPr sz="1500" b="0">
-                <a:solidFill>
-                  <a:srgbClr val="475569"/>
-                </a:solidFill>
-                <a:latin typeface="Noto Sans JP"/>
-                <a:ea typeface="Noto Sans JP"/>
-                <a:cs typeface="Noto Sans JP"/>
-              </a:rPr>
-              <a:t>どちらにもイブプロフェンが入っている。風邪薬にも同じ成分が</a:t>
-            </a:r>
-          </a:p>
-          <a:p>
-            <a:pPr algn="l">
-              <a:lnSpc>
-                <a:spcPct val="100000"/>
-              </a:lnSpc>
-            </a:pPr>
-            <a:r>
-              <a:rPr sz="1500" b="0">
-                <a:solidFill>
-                  <a:srgbClr val="475569"/>
-                </a:solidFill>
-                <a:latin typeface="Noto Sans JP"/>
-                <a:ea typeface="Noto Sans JP"/>
-                <a:cs typeface="Noto Sans JP"/>
-              </a:rPr>
-              <a:t>入っていることがあるので、成分で見比べる。</a:t>
-            </a:r>
-          </a:p>
-        </p:txBody>
-      </p:sp>
-      <p:sp>
-        <p:nvSpPr>
-          <p:cNvPr id="5" name="Rectangle 4"/>
-          <p:cNvSpPr/>
-          <p:nvPr/>
-        </p:nvSpPr>
-        <p:spPr>
-          <a:xfrm>
-            <a:off x="822960" y="3886200"/>
-            <a:ext cx="548640" cy="45720"/>
-          </a:xfrm>
-          <a:prstGeom prst="rect">
-            <a:avLst/>
-          </a:prstGeom>
-          <a:solidFill>
-            <a:srgbClr val="E2E8F0"/>
-          </a:solidFill>
-          <a:ln>
-            <a:noFill/>
-          </a:ln>
-          <a:effectLst/>
-        </p:spPr>
-        <p:style>
-          <a:lnRef idx="1">
-            <a:schemeClr val="accent1"/>
-          </a:lnRef>
-          <a:fillRef idx="3">
-            <a:schemeClr val="accent1"/>
-          </a:fillRef>
-          <a:effectRef idx="2">
-            <a:schemeClr val="accent1"/>
-          </a:effectRef>
-          <a:fontRef idx="minor">
-            <a:schemeClr val="lt1"/>
-          </a:fontRef>
-        </p:style>
-        <p:txBody>
-          <a:bodyPr rtlCol="0" anchor="ctr" lIns="0" rIns="0" tIns="0" bIns="0"/>
-          <a:lstStyle/>
-          <a:p>
-            <a:pPr algn="ctr"/>
-          </a:p>
-        </p:txBody>
-      </p:sp>
-      <p:sp>
-        <p:nvSpPr>
-          <p:cNvPr id="6" name="TextBox 5"/>
-          <p:cNvSpPr txBox="1"/>
-          <p:nvPr/>
-        </p:nvSpPr>
-        <p:spPr>
-          <a:xfrm>
-            <a:off x="822960" y="4114800"/>
-            <a:ext cx="7132320" cy="1188720"/>
-          </a:xfrm>
-          <a:prstGeom prst="rect">
-            <a:avLst/>
-          </a:prstGeom>
-          <a:noFill/>
-        </p:spPr>
-        <p:txBody>
-          <a:bodyPr wrap="square" lIns="0" rIns="0" tIns="0" bIns="0" anchor="t">
-            <a:spAutoFit/>
-          </a:bodyPr>
-          <a:lstStyle/>
-          <a:p>
-            <a:pPr algn="l">
-              <a:lnSpc>
-                <a:spcPct val="100000"/>
-              </a:lnSpc>
-            </a:pPr>
-            <a:r>
-              <a:rPr sz="3000" b="1">
-                <a:solidFill>
-                  <a:srgbClr val="0F172A"/>
-                </a:solidFill>
-                <a:latin typeface="Noto Sans JP"/>
-                <a:ea typeface="Noto Sans JP"/>
-                <a:cs typeface="Noto Sans JP"/>
-              </a:rPr>
-              <a:t>家にある薬で足りるなら、</a:t>
-            </a:r>
-          </a:p>
-          <a:p>
-            <a:pPr algn="l">
-              <a:lnSpc>
-                <a:spcPct val="100000"/>
-              </a:lnSpc>
-            </a:pPr>
-            <a:r>
-              <a:rPr sz="3000" b="1">
-                <a:solidFill>
-                  <a:srgbClr val="0F172A"/>
-                </a:solidFill>
-                <a:latin typeface="Noto Sans JP"/>
-                <a:ea typeface="Noto Sans JP"/>
-                <a:cs typeface="Noto Sans JP"/>
-              </a:rPr>
-              <a:t>買わずに済む。</a:t>
-            </a:r>
-          </a:p>
-        </p:txBody>
-      </p:sp>
-      <p:sp>
-        <p:nvSpPr>
-          <p:cNvPr id="7" name="TextBox 6"/>
-          <p:cNvSpPr txBox="1"/>
-          <p:nvPr/>
-        </p:nvSpPr>
-        <p:spPr>
-          <a:xfrm>
-            <a:off x="822960" y="5394960"/>
-            <a:ext cx="7132320" cy="731520"/>
-          </a:xfrm>
-          <a:prstGeom prst="rect">
-            <a:avLst/>
-          </a:prstGeom>
-          <a:noFill/>
-        </p:spPr>
-        <p:txBody>
-          <a:bodyPr wrap="square" lIns="0" rIns="0" tIns="0" bIns="0" anchor="t">
-            <a:spAutoFit/>
-          </a:bodyPr>
-          <a:lstStyle/>
-          <a:p>
-            <a:pPr algn="l">
-              <a:lnSpc>
-                <a:spcPct val="100000"/>
-              </a:lnSpc>
-            </a:pPr>
-            <a:r>
-              <a:rPr sz="1500" b="0">
-                <a:solidFill>
-                  <a:srgbClr val="475569"/>
-                </a:solidFill>
-                <a:latin typeface="Noto Sans JP"/>
-                <a:ea typeface="Noto Sans JP"/>
-                <a:cs typeface="Noto Sans JP"/>
-              </a:rPr>
-              <a:t>重なっている家の薬を、その場で並べて見せる。</a:t>
-            </a:r>
-          </a:p>
-          <a:p>
-            <a:pPr algn="l">
-              <a:lnSpc>
-                <a:spcPct val="100000"/>
-              </a:lnSpc>
-            </a:pPr>
-            <a:r>
-              <a:rPr sz="1500" b="0">
-                <a:solidFill>
-                  <a:srgbClr val="475569"/>
-                </a:solidFill>
-                <a:latin typeface="Noto Sans JP"/>
-                <a:ea typeface="Noto Sans JP"/>
-                <a:cs typeface="Noto Sans JP"/>
-              </a:rPr>
-              <a:t>無駄な買い物も、同じ成分の重ね飲みも防ぎやすくなる。</a:t>
-            </a:r>
-          </a:p>
-        </p:txBody>
-      </p:sp>
-      <p:sp>
-        <p:nvSpPr>
-          <p:cNvPr id="8" name="Rounded Rectangle 7"/>
-          <p:cNvSpPr/>
-          <p:nvPr/>
-        </p:nvSpPr>
-        <p:spPr>
-          <a:xfrm>
-            <a:off x="8467344" y="420624"/>
-            <a:ext cx="2975694" cy="5833872"/>
-          </a:xfrm>
-          <a:prstGeom prst="roundRect">
-            <a:avLst>
-              <a:gd name="adj" fmla="val 6760"/>
-            </a:avLst>
-          </a:prstGeom>
-          <a:solidFill>
-            <a:srgbClr val="FFFFFF"/>
-          </a:solidFill>
-          <a:ln w="12700">
-            <a:solidFill>
-              <a:srgbClr val="E2E8F0"/>
-            </a:solidFill>
-          </a:ln>
-          <a:effectLst/>
-        </p:spPr>
-        <p:style>
-          <a:lnRef idx="1">
-            <a:schemeClr val="accent1"/>
-          </a:lnRef>
-          <a:fillRef idx="3">
-            <a:schemeClr val="accent1"/>
-          </a:fillRef>
-          <a:effectRef idx="2">
-            <a:schemeClr val="accent1"/>
-          </a:effectRef>
-          <a:fontRef idx="minor">
-            <a:schemeClr val="lt1"/>
-          </a:fontRef>
-        </p:style>
-        <p:txBody>
-          <a:bodyPr rtlCol="0" anchor="ctr" lIns="0" rIns="0" tIns="0" bIns="0"/>
-          <a:lstStyle/>
-          <a:p>
-            <a:pPr algn="ctr"/>
-          </a:p>
-        </p:txBody>
-      </p:sp>
       <p:pic>
         <p:nvPicPr>
-          <p:cNvPr id="9" name="Picture 8" descr="yellow-real.png"/>
+          <p:cNvPr id="2" name="Picture 1" descr="logo.png"/>
           <p:cNvPicPr>
             <a:picLocks noChangeAspect="1"/>
           </p:cNvPicPr>
@@ -7185,8 +8088,8 @@
         </p:blipFill>
         <p:spPr>
           <a:xfrm>
-            <a:off x="8549640" y="502920"/>
-            <a:ext cx="2811102" cy="5669280"/>
+            <a:off x="4242917" y="914400"/>
+            <a:ext cx="1143000" cy="1143000"/>
           </a:xfrm>
           <a:prstGeom prst="rect">
             <a:avLst/>
@@ -7195,14 +8098,14 @@
       </p:pic>
       <p:sp>
         <p:nvSpPr>
-          <p:cNvPr id="10" name="TextBox 9"/>
+          <p:cNvPr id="3" name="TextBox 2"/>
           <p:cNvSpPr txBox="1"/>
           <p:nvPr/>
         </p:nvSpPr>
         <p:spPr>
           <a:xfrm>
-            <a:off x="8467344" y="6336792"/>
-            <a:ext cx="2971800" cy="365760"/>
+            <a:off x="5408777" y="933450"/>
+            <a:ext cx="2722880" cy="1104900"/>
           </a:xfrm>
           <a:prstGeom prst="rect">
             <a:avLst/>
@@ -7210,7 +8113,48 @@
           <a:noFill/>
         </p:spPr>
         <p:txBody>
-          <a:bodyPr wrap="square" lIns="0" rIns="0" tIns="0" bIns="0" anchor="t">
+          <a:bodyPr wrap="none" lIns="0" rIns="0" tIns="0" bIns="0" anchor="t">
+            <a:spAutoFit/>
+          </a:bodyPr>
+          <a:lstStyle/>
+          <a:p>
+            <a:pPr algn="l">
+              <a:lnSpc>
+                <a:spcPct val="100000"/>
+              </a:lnSpc>
+            </a:pPr>
+            <a:r>
+              <a:rPr sz="6000" b="0">
+                <a:solidFill>
+                  <a:srgbClr val="1B2A4A"/>
+                </a:solidFill>
+                <a:latin typeface="Noto Sans JP"/>
+                <a:ea typeface="Noto Sans JP"/>
+                <a:cs typeface="Noto Sans JP"/>
+              </a:rPr>
+              <a:t>Overlai</a:t>
+            </a:r>
+          </a:p>
+        </p:txBody>
+      </p:sp>
+      <p:sp>
+        <p:nvSpPr>
+          <p:cNvPr id="4" name="TextBox 3"/>
+          <p:cNvSpPr txBox="1"/>
+          <p:nvPr/>
+        </p:nvSpPr>
+        <p:spPr>
+          <a:xfrm>
+            <a:off x="0" y="2514600"/>
+            <a:ext cx="12191695" cy="662940"/>
+          </a:xfrm>
+          <a:prstGeom prst="rect">
+            <a:avLst/>
+          </a:prstGeom>
+          <a:noFill/>
+        </p:spPr>
+        <p:txBody>
+          <a:bodyPr wrap="none" lIns="0" rIns="0" tIns="0" bIns="0" anchor="t">
             <a:spAutoFit/>
           </a:bodyPr>
           <a:lstStyle/>
@@ -7221,115 +8165,7 @@
               </a:lnSpc>
             </a:pPr>
             <a:r>
-              <a:rPr sz="1200" b="0">
-                <a:solidFill>
-                  <a:srgbClr val="94A3B8"/>
-                </a:solidFill>
-                <a:latin typeface="Noto Sans JP"/>
-                <a:ea typeface="Noto Sans JP"/>
-                <a:cs typeface="Noto Sans JP"/>
-              </a:rPr>
-              <a:t>実際の判定画面（市販の解熱鎮痛薬）</a:t>
-            </a:r>
-          </a:p>
-        </p:txBody>
-      </p:sp>
-    </p:spTree>
-  </p:cSld>
-  <p:clrMapOvr>
-    <a:masterClrMapping/>
-  </p:clrMapOvr>
-</p:sld>
-</file>
-
-<file path=ppt/slides/slide8.xml><?xml version="1.0" encoding="utf-8"?>
-<p:sld xmlns:a="http://schemas.openxmlformats.org/drawingml/2006/main" xmlns:p="http://schemas.openxmlformats.org/presentationml/2006/main" xmlns:r="http://schemas.openxmlformats.org/officeDocument/2006/relationships">
-  <p:cSld>
-    <p:bg>
-      <p:bgPr>
-        <a:solidFill>
-          <a:srgbClr val="FFFFFF"/>
-        </a:solidFill>
-        <a:effectLst/>
-      </p:bgPr>
-    </p:bg>
-    <p:spTree>
-      <p:nvGrpSpPr>
-        <p:cNvPr id="1" name=""/>
-        <p:cNvGrpSpPr/>
-        <p:nvPr/>
-      </p:nvGrpSpPr>
-      <p:grpSpPr/>
-      <p:sp>
-        <p:nvSpPr>
-          <p:cNvPr id="2" name="TextBox 1"/>
-          <p:cNvSpPr txBox="1"/>
-          <p:nvPr/>
-        </p:nvSpPr>
-        <p:spPr>
-          <a:xfrm>
-            <a:off x="0" y="868680"/>
-            <a:ext cx="12191695" cy="457200"/>
-          </a:xfrm>
-          <a:prstGeom prst="rect">
-            <a:avLst/>
-          </a:prstGeom>
-          <a:noFill/>
-        </p:spPr>
-        <p:txBody>
-          <a:bodyPr wrap="square" lIns="0" rIns="0" tIns="0" bIns="0" anchor="t">
-            <a:spAutoFit/>
-          </a:bodyPr>
-          <a:lstStyle/>
-          <a:p>
-            <a:pPr algn="ctr">
-              <a:lnSpc>
-                <a:spcPct val="100000"/>
-              </a:lnSpc>
-            </a:pPr>
-            <a:r>
-              <a:rPr sz="2000" b="1">
-                <a:solidFill>
-                  <a:srgbClr val="2563EB"/>
-                </a:solidFill>
-                <a:latin typeface="Noto Sans JP"/>
-                <a:ea typeface="Noto Sans JP"/>
-                <a:cs typeface="Noto Sans JP"/>
-              </a:rPr>
-              <a:t>Overlai が目指すこと</a:t>
-            </a:r>
-          </a:p>
-        </p:txBody>
-      </p:sp>
-      <p:sp>
-        <p:nvSpPr>
-          <p:cNvPr id="3" name="TextBox 2"/>
-          <p:cNvSpPr txBox="1"/>
-          <p:nvPr/>
-        </p:nvSpPr>
-        <p:spPr>
-          <a:xfrm>
-            <a:off x="0" y="1371600"/>
-            <a:ext cx="12191695" cy="1005840"/>
-          </a:xfrm>
-          <a:prstGeom prst="rect">
-            <a:avLst/>
-          </a:prstGeom>
-          <a:noFill/>
-        </p:spPr>
-        <p:txBody>
-          <a:bodyPr wrap="square" lIns="0" rIns="0" tIns="0" bIns="0" anchor="t">
-            <a:spAutoFit/>
-          </a:bodyPr>
-          <a:lstStyle/>
-          <a:p>
-            <a:pPr algn="ctr">
-              <a:lnSpc>
-                <a:spcPct val="100000"/>
-              </a:lnSpc>
-            </a:pPr>
-            <a:r>
-              <a:rPr sz="5400" b="1">
+              <a:rPr sz="3600" b="1">
                 <a:solidFill>
                   <a:srgbClr val="1B2A4A"/>
                 </a:solidFill>
@@ -7344,22 +8180,22 @@
       </p:sp>
       <p:sp>
         <p:nvSpPr>
-          <p:cNvPr id="4" name="Rounded Rectangle 3"/>
+          <p:cNvPr id="5" name="Rounded Rectangle 4"/>
           <p:cNvSpPr/>
           <p:nvPr/>
         </p:nvSpPr>
         <p:spPr>
           <a:xfrm>
-            <a:off x="822960" y="2788920"/>
-            <a:ext cx="3401568" cy="2514600"/>
+            <a:off x="685800" y="3931920"/>
+            <a:ext cx="10820095" cy="2240280"/>
           </a:xfrm>
           <a:prstGeom prst="roundRect">
             <a:avLst>
-              <a:gd name="adj" fmla="val 9090"/>
+              <a:gd name="adj" fmla="val 8163"/>
             </a:avLst>
           </a:prstGeom>
           <a:solidFill>
-            <a:srgbClr val="F5F7FA"/>
+            <a:srgbClr val="1B2A4A"/>
           </a:solidFill>
           <a:ln>
             <a:noFill/>
@@ -7390,14 +8226,14 @@
       </p:sp>
       <p:sp>
         <p:nvSpPr>
-          <p:cNvPr id="5" name="TextBox 4"/>
+          <p:cNvPr id="6" name="TextBox 5"/>
           <p:cNvSpPr txBox="1"/>
           <p:nvPr/>
         </p:nvSpPr>
         <p:spPr>
           <a:xfrm>
-            <a:off x="1188720" y="3108960"/>
-            <a:ext cx="2834640" cy="548640"/>
+            <a:off x="1234440" y="4187952"/>
+            <a:ext cx="7315200" cy="589279"/>
           </a:xfrm>
           <a:prstGeom prst="rect">
             <a:avLst/>
@@ -7405,7 +8241,7 @@
           <a:noFill/>
         </p:spPr>
         <p:txBody>
-          <a:bodyPr wrap="square" lIns="0" rIns="0" tIns="0" bIns="0" anchor="t">
+          <a:bodyPr wrap="none" lIns="0" rIns="0" tIns="0" bIns="0" anchor="t">
             <a:spAutoFit/>
           </a:bodyPr>
           <a:lstStyle/>
@@ -7416,29 +8252,29 @@
               </a:lnSpc>
             </a:pPr>
             <a:r>
-              <a:rPr sz="2600" b="1">
-                <a:solidFill>
-                  <a:srgbClr val="1B2A4A"/>
+              <a:rPr sz="3200" b="1">
+                <a:solidFill>
+                  <a:srgbClr val="FFFFFF"/>
                 </a:solidFill>
                 <a:latin typeface="Noto Sans JP"/>
                 <a:ea typeface="Noto Sans JP"/>
                 <a:cs typeface="Noto Sans JP"/>
               </a:rPr>
-              <a:t>買い重ねる前に</a:t>
-            </a:r>
-          </a:p>
-        </p:txBody>
-      </p:sp>
-      <p:sp>
-        <p:nvSpPr>
-          <p:cNvPr id="6" name="TextBox 5"/>
+              <a:t>ぜひ、お試しください</a:t>
+            </a:r>
+          </a:p>
+        </p:txBody>
+      </p:sp>
+      <p:sp>
+        <p:nvSpPr>
+          <p:cNvPr id="7" name="TextBox 6"/>
           <p:cNvSpPr txBox="1"/>
           <p:nvPr/>
         </p:nvSpPr>
         <p:spPr>
           <a:xfrm>
-            <a:off x="1188720" y="3794760"/>
-            <a:ext cx="2834640" cy="914400"/>
+            <a:off x="1234440" y="4846320"/>
+            <a:ext cx="7863840" cy="313055"/>
           </a:xfrm>
           <a:prstGeom prst="rect">
             <a:avLst/>
@@ -7446,7 +8282,7 @@
           <a:noFill/>
         </p:spPr>
         <p:txBody>
-          <a:bodyPr wrap="square" lIns="0" rIns="0" tIns="0" bIns="0" anchor="t">
+          <a:bodyPr wrap="none" lIns="0" rIns="0" tIns="0" bIns="0" anchor="t">
             <a:spAutoFit/>
           </a:bodyPr>
           <a:lstStyle/>
@@ -7457,17 +8293,84 @@
               </a:lnSpc>
             </a:pPr>
             <a:r>
-              <a:rPr sz="1800" b="0">
-                <a:solidFill>
-                  <a:srgbClr val="475569"/>
+              <a:rPr sz="1700" b="0">
+                <a:solidFill>
+                  <a:srgbClr val="C9D0DB"/>
                 </a:solidFill>
                 <a:latin typeface="Noto Sans JP"/>
                 <a:ea typeface="Noto Sans JP"/>
                 <a:cs typeface="Noto Sans JP"/>
               </a:rPr>
-              <a:t>もう家にある？</a:t>
-            </a:r>
-          </a:p>
+              <a:t>インストール不要。見本の薬・化粧品が入った状態で開きます</a:t>
+            </a:r>
+          </a:p>
+        </p:txBody>
+      </p:sp>
+      <p:sp>
+        <p:nvSpPr>
+          <p:cNvPr id="8" name="Rectangle 7"/>
+          <p:cNvSpPr/>
+          <p:nvPr/>
+        </p:nvSpPr>
+        <p:spPr>
+          <a:xfrm>
+            <a:off x="1234440" y="5321808"/>
+            <a:ext cx="7756855" cy="10972"/>
+          </a:xfrm>
+          <a:prstGeom prst="rect">
+            <a:avLst/>
+          </a:prstGeom>
+          <a:solidFill>
+            <a:srgbClr val="4D5972"/>
+          </a:solidFill>
+          <a:ln>
+            <a:noFill/>
+          </a:ln>
+          <a:effectLst/>
+        </p:spPr>
+        <p:style>
+          <a:lnRef idx="1">
+            <a:schemeClr val="accent1"/>
+          </a:lnRef>
+          <a:fillRef idx="3">
+            <a:schemeClr val="accent1"/>
+          </a:fillRef>
+          <a:effectRef idx="2">
+            <a:schemeClr val="accent1"/>
+          </a:effectRef>
+          <a:fontRef idx="minor">
+            <a:schemeClr val="lt1"/>
+          </a:fontRef>
+        </p:style>
+        <p:txBody>
+          <a:bodyPr rtlCol="0" anchor="ctr" lIns="0" rIns="0" tIns="0" bIns="0"/>
+          <a:lstStyle/>
+          <a:p>
+            <a:pPr algn="ctr"/>
+          </a:p>
+        </p:txBody>
+      </p:sp>
+      <p:sp>
+        <p:nvSpPr>
+          <p:cNvPr id="9" name="TextBox 8"/>
+          <p:cNvSpPr txBox="1"/>
+          <p:nvPr/>
+        </p:nvSpPr>
+        <p:spPr>
+          <a:xfrm>
+            <a:off x="1234440" y="5431536"/>
+            <a:ext cx="7315200" cy="257810"/>
+          </a:xfrm>
+          <a:prstGeom prst="rect">
+            <a:avLst/>
+          </a:prstGeom>
+          <a:noFill/>
+        </p:spPr>
+        <p:txBody>
+          <a:bodyPr wrap="none" lIns="0" rIns="0" tIns="0" bIns="0" anchor="t">
+            <a:spAutoFit/>
+          </a:bodyPr>
+          <a:lstStyle/>
           <a:p>
             <a:pPr algn="l">
               <a:lnSpc>
@@ -7475,29 +8378,29 @@
               </a:lnSpc>
             </a:pPr>
             <a:r>
-              <a:rPr sz="1800" b="0">
-                <a:solidFill>
-                  <a:srgbClr val="475569"/>
+              <a:rPr sz="1400" b="0">
+                <a:solidFill>
+                  <a:srgbClr val="C9D0DB"/>
                 </a:solidFill>
                 <a:latin typeface="Noto Sans JP"/>
                 <a:ea typeface="Noto Sans JP"/>
                 <a:cs typeface="Noto Sans JP"/>
               </a:rPr>
-              <a:t>名前違いの同じ薬は？</a:t>
-            </a:r>
-          </a:p>
-        </p:txBody>
-      </p:sp>
-      <p:sp>
-        <p:nvSpPr>
-          <p:cNvPr id="7" name="TextBox 6"/>
+              <a:t>ユメカタリ 学生生成AIコンテスト 2026｜開発部門</a:t>
+            </a:r>
+          </a:p>
+        </p:txBody>
+      </p:sp>
+      <p:sp>
+        <p:nvSpPr>
+          <p:cNvPr id="10" name="TextBox 9"/>
           <p:cNvSpPr txBox="1"/>
           <p:nvPr/>
         </p:nvSpPr>
         <p:spPr>
           <a:xfrm>
-            <a:off x="1188720" y="4754880"/>
-            <a:ext cx="2834640" cy="365760"/>
+            <a:off x="1234440" y="5689345"/>
+            <a:ext cx="1869439" cy="257810"/>
           </a:xfrm>
           <a:prstGeom prst="rect">
             <a:avLst/>
@@ -7505,7 +8408,7 @@
           <a:noFill/>
         </p:spPr>
         <p:txBody>
-          <a:bodyPr wrap="square" lIns="0" rIns="0" tIns="0" bIns="0" anchor="t">
+          <a:bodyPr wrap="none" lIns="0" rIns="0" tIns="0" bIns="0" anchor="t">
             <a:spAutoFit/>
           </a:bodyPr>
           <a:lstStyle/>
@@ -7518,35 +8421,76 @@
             <a:r>
               <a:rPr sz="1400" b="1">
                 <a:solidFill>
-                  <a:srgbClr val="2563EB"/>
+                  <a:srgbClr val="FFFFFF"/>
                 </a:solidFill>
                 <a:latin typeface="Noto Sans JP"/>
                 <a:ea typeface="Noto Sans JP"/>
                 <a:cs typeface="Noto Sans JP"/>
               </a:rPr>
-              <a:t>重複</a:t>
-            </a:r>
-          </a:p>
-        </p:txBody>
-      </p:sp>
-      <p:sp>
-        <p:nvSpPr>
-          <p:cNvPr id="8" name="Rounded Rectangle 7"/>
+              <a:t>鈴鹿工業高等専門学校</a:t>
+            </a:r>
+          </a:p>
+        </p:txBody>
+      </p:sp>
+      <p:sp>
+        <p:nvSpPr>
+          <p:cNvPr id="11" name="TextBox 10"/>
+          <p:cNvSpPr txBox="1"/>
+          <p:nvPr/>
+        </p:nvSpPr>
+        <p:spPr>
+          <a:xfrm>
+            <a:off x="3241040" y="5689345"/>
+            <a:ext cx="4572000" cy="257810"/>
+          </a:xfrm>
+          <a:prstGeom prst="rect">
+            <a:avLst/>
+          </a:prstGeom>
+          <a:noFill/>
+        </p:spPr>
+        <p:txBody>
+          <a:bodyPr wrap="none" lIns="0" rIns="0" tIns="0" bIns="0" anchor="t">
+            <a:spAutoFit/>
+          </a:bodyPr>
+          <a:lstStyle/>
+          <a:p>
+            <a:pPr algn="l">
+              <a:lnSpc>
+                <a:spcPct val="100000"/>
+              </a:lnSpc>
+            </a:pPr>
+            <a:r>
+              <a:rPr sz="1400" b="0">
+                <a:solidFill>
+                  <a:srgbClr val="C9D0DB"/>
+                </a:solidFill>
+                <a:latin typeface="Noto Sans JP"/>
+                <a:ea typeface="Noto Sans JP"/>
+                <a:cs typeface="Noto Sans JP"/>
+              </a:rPr>
+              <a:t>井上 高志・濱田 圭太郎・杉本 隼都</a:t>
+            </a:r>
+          </a:p>
+        </p:txBody>
+      </p:sp>
+      <p:sp>
+        <p:nvSpPr>
+          <p:cNvPr id="12" name="Rounded Rectangle 11"/>
           <p:cNvSpPr/>
           <p:nvPr/>
         </p:nvSpPr>
         <p:spPr>
           <a:xfrm>
-            <a:off x="4398264" y="2788920"/>
-            <a:ext cx="3401568" cy="2514600"/>
+            <a:off x="9539935" y="4206240"/>
+            <a:ext cx="1691640" cy="1691640"/>
           </a:xfrm>
           <a:prstGeom prst="roundRect">
             <a:avLst>
-              <a:gd name="adj" fmla="val 9090"/>
+              <a:gd name="adj" fmla="val 4324"/>
             </a:avLst>
           </a:prstGeom>
           <a:solidFill>
-            <a:srgbClr val="F5F7FA"/>
+            <a:srgbClr val="FFFFFF"/>
           </a:solidFill>
           <a:ln>
             <a:noFill/>
@@ -7575,640 +8519,9 @@
           </a:p>
         </p:txBody>
       </p:sp>
-      <p:sp>
-        <p:nvSpPr>
-          <p:cNvPr id="9" name="TextBox 8"/>
-          <p:cNvSpPr txBox="1"/>
-          <p:nvPr/>
-        </p:nvSpPr>
-        <p:spPr>
-          <a:xfrm>
-            <a:off x="4764024" y="3108960"/>
-            <a:ext cx="2834640" cy="548640"/>
-          </a:xfrm>
-          <a:prstGeom prst="rect">
-            <a:avLst/>
-          </a:prstGeom>
-          <a:noFill/>
-        </p:spPr>
-        <p:txBody>
-          <a:bodyPr wrap="square" lIns="0" rIns="0" tIns="0" bIns="0" anchor="t">
-            <a:spAutoFit/>
-          </a:bodyPr>
-          <a:lstStyle/>
-          <a:p>
-            <a:pPr algn="l">
-              <a:lnSpc>
-                <a:spcPct val="100000"/>
-              </a:lnSpc>
-            </a:pPr>
-            <a:r>
-              <a:rPr sz="2600" b="1">
-                <a:solidFill>
-                  <a:srgbClr val="1B2A4A"/>
-                </a:solidFill>
-                <a:latin typeface="Noto Sans JP"/>
-                <a:ea typeface="Noto Sans JP"/>
-                <a:cs typeface="Noto Sans JP"/>
-              </a:rPr>
-              <a:t>塗り重ねる前に</a:t>
-            </a:r>
-          </a:p>
-        </p:txBody>
-      </p:sp>
-      <p:sp>
-        <p:nvSpPr>
-          <p:cNvPr id="10" name="TextBox 9"/>
-          <p:cNvSpPr txBox="1"/>
-          <p:nvPr/>
-        </p:nvSpPr>
-        <p:spPr>
-          <a:xfrm>
-            <a:off x="4764024" y="3794760"/>
-            <a:ext cx="2834640" cy="914400"/>
-          </a:xfrm>
-          <a:prstGeom prst="rect">
-            <a:avLst/>
-          </a:prstGeom>
-          <a:noFill/>
-        </p:spPr>
-        <p:txBody>
-          <a:bodyPr wrap="square" lIns="0" rIns="0" tIns="0" bIns="0" anchor="t">
-            <a:spAutoFit/>
-          </a:bodyPr>
-          <a:lstStyle/>
-          <a:p>
-            <a:pPr algn="l">
-              <a:lnSpc>
-                <a:spcPct val="100000"/>
-              </a:lnSpc>
-            </a:pPr>
-            <a:r>
-              <a:rPr sz="1800" b="0">
-                <a:solidFill>
-                  <a:srgbClr val="475569"/>
-                </a:solidFill>
-                <a:latin typeface="Noto Sans JP"/>
-                <a:ea typeface="Noto Sans JP"/>
-                <a:cs typeface="Noto Sans JP"/>
-              </a:rPr>
-              <a:t>一緒に使っていい？</a:t>
-            </a:r>
-          </a:p>
-          <a:p>
-            <a:pPr algn="l">
-              <a:lnSpc>
-                <a:spcPct val="100000"/>
-              </a:lnSpc>
-            </a:pPr>
-            <a:r>
-              <a:rPr sz="1800" b="0">
-                <a:solidFill>
-                  <a:srgbClr val="475569"/>
-                </a:solidFill>
-                <a:latin typeface="Noto Sans JP"/>
-                <a:ea typeface="Noto Sans JP"/>
-                <a:cs typeface="Noto Sans JP"/>
-              </a:rPr>
-              <a:t>どれを先に塗る？</a:t>
-            </a:r>
-          </a:p>
-        </p:txBody>
-      </p:sp>
-      <p:sp>
-        <p:nvSpPr>
-          <p:cNvPr id="11" name="TextBox 10"/>
-          <p:cNvSpPr txBox="1"/>
-          <p:nvPr/>
-        </p:nvSpPr>
-        <p:spPr>
-          <a:xfrm>
-            <a:off x="4764024" y="4754880"/>
-            <a:ext cx="2834640" cy="365760"/>
-          </a:xfrm>
-          <a:prstGeom prst="rect">
-            <a:avLst/>
-          </a:prstGeom>
-          <a:noFill/>
-        </p:spPr>
-        <p:txBody>
-          <a:bodyPr wrap="square" lIns="0" rIns="0" tIns="0" bIns="0" anchor="t">
-            <a:spAutoFit/>
-          </a:bodyPr>
-          <a:lstStyle/>
-          <a:p>
-            <a:pPr algn="l">
-              <a:lnSpc>
-                <a:spcPct val="100000"/>
-              </a:lnSpc>
-            </a:pPr>
-            <a:r>
-              <a:rPr sz="1400" b="1">
-                <a:solidFill>
-                  <a:srgbClr val="2563EB"/>
-                </a:solidFill>
-                <a:latin typeface="Noto Sans JP"/>
-                <a:ea typeface="Noto Sans JP"/>
-                <a:cs typeface="Noto Sans JP"/>
-              </a:rPr>
-              <a:t>組み合わせ・塗る順番</a:t>
-            </a:r>
-          </a:p>
-        </p:txBody>
-      </p:sp>
-      <p:sp>
-        <p:nvSpPr>
-          <p:cNvPr id="12" name="Rounded Rectangle 11"/>
-          <p:cNvSpPr/>
-          <p:nvPr/>
-        </p:nvSpPr>
-        <p:spPr>
-          <a:xfrm>
-            <a:off x="7973568" y="2788920"/>
-            <a:ext cx="3401568" cy="2514600"/>
-          </a:xfrm>
-          <a:prstGeom prst="roundRect">
-            <a:avLst>
-              <a:gd name="adj" fmla="val 9090"/>
-            </a:avLst>
-          </a:prstGeom>
-          <a:solidFill>
-            <a:srgbClr val="F5F7FA"/>
-          </a:solidFill>
-          <a:ln>
-            <a:noFill/>
-          </a:ln>
-          <a:effectLst/>
-        </p:spPr>
-        <p:style>
-          <a:lnRef idx="1">
-            <a:schemeClr val="accent1"/>
-          </a:lnRef>
-          <a:fillRef idx="3">
-            <a:schemeClr val="accent1"/>
-          </a:fillRef>
-          <a:effectRef idx="2">
-            <a:schemeClr val="accent1"/>
-          </a:effectRef>
-          <a:fontRef idx="minor">
-            <a:schemeClr val="lt1"/>
-          </a:fontRef>
-        </p:style>
-        <p:txBody>
-          <a:bodyPr rtlCol="0" anchor="ctr" lIns="0" rIns="0" tIns="0" bIns="0"/>
-          <a:lstStyle/>
-          <a:p>
-            <a:pPr algn="ctr"/>
-          </a:p>
-        </p:txBody>
-      </p:sp>
-      <p:sp>
-        <p:nvSpPr>
-          <p:cNvPr id="13" name="TextBox 12"/>
-          <p:cNvSpPr txBox="1"/>
-          <p:nvPr/>
-        </p:nvSpPr>
-        <p:spPr>
-          <a:xfrm>
-            <a:off x="8339328" y="3108960"/>
-            <a:ext cx="2834640" cy="548640"/>
-          </a:xfrm>
-          <a:prstGeom prst="rect">
-            <a:avLst/>
-          </a:prstGeom>
-          <a:noFill/>
-        </p:spPr>
-        <p:txBody>
-          <a:bodyPr wrap="square" lIns="0" rIns="0" tIns="0" bIns="0" anchor="t">
-            <a:spAutoFit/>
-          </a:bodyPr>
-          <a:lstStyle/>
-          <a:p>
-            <a:pPr algn="l">
-              <a:lnSpc>
-                <a:spcPct val="100000"/>
-              </a:lnSpc>
-            </a:pPr>
-            <a:r>
-              <a:rPr sz="2600" b="1">
-                <a:solidFill>
-                  <a:srgbClr val="1B2A4A"/>
-                </a:solidFill>
-                <a:latin typeface="Noto Sans JP"/>
-                <a:ea typeface="Noto Sans JP"/>
-                <a:cs typeface="Noto Sans JP"/>
-              </a:rPr>
-              <a:t>一緒に飲む前に</a:t>
-            </a:r>
-          </a:p>
-        </p:txBody>
-      </p:sp>
-      <p:sp>
-        <p:nvSpPr>
-          <p:cNvPr id="14" name="TextBox 13"/>
-          <p:cNvSpPr txBox="1"/>
-          <p:nvPr/>
-        </p:nvSpPr>
-        <p:spPr>
-          <a:xfrm>
-            <a:off x="8339328" y="3794760"/>
-            <a:ext cx="2834640" cy="914400"/>
-          </a:xfrm>
-          <a:prstGeom prst="rect">
-            <a:avLst/>
-          </a:prstGeom>
-          <a:noFill/>
-        </p:spPr>
-        <p:txBody>
-          <a:bodyPr wrap="square" lIns="0" rIns="0" tIns="0" bIns="0" anchor="t">
-            <a:spAutoFit/>
-          </a:bodyPr>
-          <a:lstStyle/>
-          <a:p>
-            <a:pPr algn="l">
-              <a:lnSpc>
-                <a:spcPct val="100000"/>
-              </a:lnSpc>
-            </a:pPr>
-            <a:r>
-              <a:rPr sz="1800" b="0">
-                <a:solidFill>
-                  <a:srgbClr val="475569"/>
-                </a:solidFill>
-                <a:latin typeface="Noto Sans JP"/>
-                <a:ea typeface="Noto Sans JP"/>
-                <a:cs typeface="Noto Sans JP"/>
-              </a:rPr>
-              <a:t>今飲んでいる薬と</a:t>
-            </a:r>
-          </a:p>
-          <a:p>
-            <a:pPr algn="l">
-              <a:lnSpc>
-                <a:spcPct val="100000"/>
-              </a:lnSpc>
-            </a:pPr>
-            <a:r>
-              <a:rPr sz="1800" b="0">
-                <a:solidFill>
-                  <a:srgbClr val="475569"/>
-                </a:solidFill>
-                <a:latin typeface="Noto Sans JP"/>
-                <a:ea typeface="Noto Sans JP"/>
-                <a:cs typeface="Noto Sans JP"/>
-              </a:rPr>
-              <a:t>一緒で大丈夫？</a:t>
-            </a:r>
-          </a:p>
-        </p:txBody>
-      </p:sp>
-      <p:sp>
-        <p:nvSpPr>
-          <p:cNvPr id="15" name="TextBox 14"/>
-          <p:cNvSpPr txBox="1"/>
-          <p:nvPr/>
-        </p:nvSpPr>
-        <p:spPr>
-          <a:xfrm>
-            <a:off x="8339328" y="4754880"/>
-            <a:ext cx="2834640" cy="365760"/>
-          </a:xfrm>
-          <a:prstGeom prst="rect">
-            <a:avLst/>
-          </a:prstGeom>
-          <a:noFill/>
-        </p:spPr>
-        <p:txBody>
-          <a:bodyPr wrap="square" lIns="0" rIns="0" tIns="0" bIns="0" anchor="t">
-            <a:spAutoFit/>
-          </a:bodyPr>
-          <a:lstStyle/>
-          <a:p>
-            <a:pPr algn="l">
-              <a:lnSpc>
-                <a:spcPct val="100000"/>
-              </a:lnSpc>
-            </a:pPr>
-            <a:r>
-              <a:rPr sz="1400" b="1">
-                <a:solidFill>
-                  <a:srgbClr val="2563EB"/>
-                </a:solidFill>
-                <a:latin typeface="Noto Sans JP"/>
-                <a:ea typeface="Noto Sans JP"/>
-                <a:cs typeface="Noto Sans JP"/>
-              </a:rPr>
-              <a:t>飲み合わせ</a:t>
-            </a:r>
-          </a:p>
-        </p:txBody>
-      </p:sp>
-      <p:sp>
-        <p:nvSpPr>
-          <p:cNvPr id="16" name="TextBox 15"/>
-          <p:cNvSpPr txBox="1"/>
-          <p:nvPr/>
-        </p:nvSpPr>
-        <p:spPr>
-          <a:xfrm>
-            <a:off x="0" y="5715000"/>
-            <a:ext cx="12191695" cy="457200"/>
-          </a:xfrm>
-          <a:prstGeom prst="rect">
-            <a:avLst/>
-          </a:prstGeom>
-          <a:noFill/>
-        </p:spPr>
-        <p:txBody>
-          <a:bodyPr wrap="square" lIns="0" rIns="0" tIns="0" bIns="0" anchor="t">
-            <a:spAutoFit/>
-          </a:bodyPr>
-          <a:lstStyle/>
-          <a:p>
-            <a:pPr algn="ctr">
-              <a:lnSpc>
-                <a:spcPct val="100000"/>
-              </a:lnSpc>
-            </a:pPr>
-            <a:r>
-              <a:rPr sz="2000" b="1">
-                <a:solidFill>
-                  <a:srgbClr val="475569"/>
-                </a:solidFill>
-                <a:latin typeface="Noto Sans JP"/>
-                <a:ea typeface="Noto Sans JP"/>
-                <a:cs typeface="Noto Sans JP"/>
-              </a:rPr>
-              <a:t>肌の治療を続ける人も、家族の薬を買う人も、店頭で迷わない毎日へ。</a:t>
-            </a:r>
-          </a:p>
-        </p:txBody>
-      </p:sp>
-    </p:spTree>
-  </p:cSld>
-  <p:clrMapOvr>
-    <a:masterClrMapping/>
-  </p:clrMapOvr>
-</p:sld>
-</file>
-
-<file path=ppt/slides/slide9.xml><?xml version="1.0" encoding="utf-8"?>
-<p:sld xmlns:a="http://schemas.openxmlformats.org/drawingml/2006/main" xmlns:p="http://schemas.openxmlformats.org/presentationml/2006/main" xmlns:r="http://schemas.openxmlformats.org/officeDocument/2006/relationships">
-  <p:cSld>
-    <p:bg>
-      <p:bgPr>
-        <a:solidFill>
-          <a:srgbClr val="FFFFFF"/>
-        </a:solidFill>
-        <a:effectLst/>
-      </p:bgPr>
-    </p:bg>
-    <p:spTree>
-      <p:nvGrpSpPr>
-        <p:cNvPr id="1" name=""/>
-        <p:cNvGrpSpPr/>
-        <p:nvPr/>
-      </p:nvGrpSpPr>
-      <p:grpSpPr/>
-      <p:sp>
-        <p:nvSpPr>
-          <p:cNvPr id="2" name="TextBox 1"/>
-          <p:cNvSpPr txBox="1"/>
-          <p:nvPr/>
-        </p:nvSpPr>
-        <p:spPr>
-          <a:xfrm>
-            <a:off x="0" y="1097280"/>
-            <a:ext cx="12191695" cy="640080"/>
-          </a:xfrm>
-          <a:prstGeom prst="rect">
-            <a:avLst/>
-          </a:prstGeom>
-          <a:noFill/>
-        </p:spPr>
-        <p:txBody>
-          <a:bodyPr wrap="square" lIns="0" rIns="0" tIns="0" bIns="0" anchor="t">
-            <a:spAutoFit/>
-          </a:bodyPr>
-          <a:lstStyle/>
-          <a:p>
-            <a:pPr algn="ctr">
-              <a:lnSpc>
-                <a:spcPct val="100000"/>
-              </a:lnSpc>
-            </a:pPr>
-            <a:r>
-              <a:rPr sz="2600" b="0">
-                <a:solidFill>
-                  <a:srgbClr val="475569"/>
-                </a:solidFill>
-                <a:latin typeface="Noto Sans JP"/>
-                <a:ea typeface="Noto Sans JP"/>
-                <a:cs typeface="Noto Sans JP"/>
-              </a:rPr>
-              <a:t>店頭で撮るだけで、家の薬や化粧品と重ねて判定する。</a:t>
-            </a:r>
-          </a:p>
-        </p:txBody>
-      </p:sp>
       <p:pic>
         <p:nvPicPr>
-          <p:cNvPr id="3" name="Picture 2" descr="logo.png"/>
-          <p:cNvPicPr>
-            <a:picLocks noChangeAspect="1"/>
-          </p:cNvPicPr>
-          <p:nvPr/>
-        </p:nvPicPr>
-        <p:blipFill>
-          <a:blip r:embed="rId2"/>
-          <a:stretch>
-            <a:fillRect/>
-          </a:stretch>
-        </p:blipFill>
-        <p:spPr>
-          <a:xfrm>
-            <a:off x="3703320" y="2103120"/>
-            <a:ext cx="1524000" cy="1524000"/>
-          </a:xfrm>
-          <a:prstGeom prst="rect">
-            <a:avLst/>
-          </a:prstGeom>
-        </p:spPr>
-      </p:pic>
-      <p:sp>
-        <p:nvSpPr>
-          <p:cNvPr id="4" name="TextBox 3"/>
-          <p:cNvSpPr txBox="1"/>
-          <p:nvPr/>
-        </p:nvSpPr>
-        <p:spPr>
-          <a:xfrm>
-            <a:off x="5257800" y="2128519"/>
-            <a:ext cx="4572000" cy="1518920"/>
-          </a:xfrm>
-          <a:prstGeom prst="rect">
-            <a:avLst/>
-          </a:prstGeom>
-          <a:noFill/>
-        </p:spPr>
-        <p:txBody>
-          <a:bodyPr wrap="square" lIns="0" rIns="0" tIns="0" bIns="0" anchor="t">
-            <a:spAutoFit/>
-          </a:bodyPr>
-          <a:lstStyle/>
-          <a:p>
-            <a:pPr algn="l">
-              <a:lnSpc>
-                <a:spcPct val="100000"/>
-              </a:lnSpc>
-            </a:pPr>
-            <a:r>
-              <a:rPr sz="8000" b="0">
-                <a:solidFill>
-                  <a:srgbClr val="1B2A4A"/>
-                </a:solidFill>
-                <a:latin typeface="Noto Sans JP"/>
-                <a:ea typeface="Noto Sans JP"/>
-                <a:cs typeface="Noto Sans JP"/>
-              </a:rPr>
-              <a:t>Overlai</a:t>
-            </a:r>
-          </a:p>
-        </p:txBody>
-      </p:sp>
-      <p:sp>
-        <p:nvSpPr>
-          <p:cNvPr id="5" name="TextBox 4"/>
-          <p:cNvSpPr txBox="1"/>
-          <p:nvPr/>
-        </p:nvSpPr>
-        <p:spPr>
-          <a:xfrm>
-            <a:off x="0" y="4069080"/>
-            <a:ext cx="12191695" cy="731520"/>
-          </a:xfrm>
-          <a:prstGeom prst="rect">
-            <a:avLst/>
-          </a:prstGeom>
-          <a:noFill/>
-        </p:spPr>
-        <p:txBody>
-          <a:bodyPr wrap="square" lIns="0" rIns="0" tIns="0" bIns="0" anchor="t">
-            <a:spAutoFit/>
-          </a:bodyPr>
-          <a:lstStyle/>
-          <a:p>
-            <a:pPr algn="ctr">
-              <a:lnSpc>
-                <a:spcPct val="100000"/>
-              </a:lnSpc>
-            </a:pPr>
-            <a:r>
-              <a:rPr sz="3400" b="1">
-                <a:solidFill>
-                  <a:srgbClr val="1B2A4A"/>
-                </a:solidFill>
-                <a:latin typeface="Noto Sans JP"/>
-                <a:ea typeface="Noto Sans JP"/>
-                <a:cs typeface="Noto Sans JP"/>
-              </a:rPr>
-              <a:t>重ねる前に、重ねて見る。</a:t>
-            </a:r>
-          </a:p>
-        </p:txBody>
-      </p:sp>
-      <p:sp>
-        <p:nvSpPr>
-          <p:cNvPr id="6" name="TextBox 5"/>
-          <p:cNvSpPr txBox="1"/>
-          <p:nvPr/>
-        </p:nvSpPr>
-        <p:spPr>
-          <a:xfrm>
-            <a:off x="822960" y="6053328"/>
-            <a:ext cx="8229600" cy="365760"/>
-          </a:xfrm>
-          <a:prstGeom prst="rect">
-            <a:avLst/>
-          </a:prstGeom>
-          <a:noFill/>
-        </p:spPr>
-        <p:txBody>
-          <a:bodyPr wrap="square" lIns="0" rIns="0" tIns="0" bIns="0" anchor="t">
-            <a:spAutoFit/>
-          </a:bodyPr>
-          <a:lstStyle/>
-          <a:p>
-            <a:pPr algn="l">
-              <a:lnSpc>
-                <a:spcPct val="100000"/>
-              </a:lnSpc>
-            </a:pPr>
-            <a:r>
-              <a:rPr sz="1500" b="0">
-                <a:solidFill>
-                  <a:srgbClr val="475569"/>
-                </a:solidFill>
-                <a:latin typeface="Noto Sans JP"/>
-                <a:ea typeface="Noto Sans JP"/>
-                <a:cs typeface="Noto Sans JP"/>
-              </a:rPr>
-              <a:t>鈴鹿工業高等専門学校　井上 高志・濱田 圭太郎・杉本 隼都</a:t>
-            </a:r>
-          </a:p>
-        </p:txBody>
-      </p:sp>
-      <p:sp>
-        <p:nvSpPr>
-          <p:cNvPr id="7" name="Rounded Rectangle 6"/>
-          <p:cNvSpPr/>
-          <p:nvPr/>
-        </p:nvSpPr>
-        <p:spPr>
-          <a:xfrm>
-            <a:off x="10314432" y="4572000"/>
-            <a:ext cx="1280160" cy="1280160"/>
-          </a:xfrm>
-          <a:prstGeom prst="roundRect">
-            <a:avLst>
-              <a:gd name="adj" fmla="val 8571"/>
-            </a:avLst>
-          </a:prstGeom>
-          <a:solidFill>
-            <a:srgbClr val="FFFFFF"/>
-          </a:solidFill>
-          <a:ln w="12700">
-            <a:solidFill>
-              <a:srgbClr val="E2E8F0"/>
-            </a:solidFill>
-          </a:ln>
-          <a:effectLst/>
-        </p:spPr>
-        <p:style>
-          <a:lnRef idx="1">
-            <a:schemeClr val="accent1"/>
-          </a:lnRef>
-          <a:fillRef idx="3">
-            <a:schemeClr val="accent1"/>
-          </a:fillRef>
-          <a:effectRef idx="2">
-            <a:schemeClr val="accent1"/>
-          </a:effectRef>
-          <a:fontRef idx="minor">
-            <a:schemeClr val="lt1"/>
-          </a:fontRef>
-        </p:style>
-        <p:txBody>
-          <a:bodyPr rtlCol="0" anchor="ctr" lIns="0" rIns="0" tIns="0" bIns="0"/>
-          <a:lstStyle/>
-          <a:p>
-            <a:pPr algn="ctr"/>
-          </a:p>
-        </p:txBody>
-      </p:sp>
-      <p:pic>
-        <p:nvPicPr>
-          <p:cNvPr id="8" name="Picture 7" descr="qr.png"/>
+          <p:cNvPr id="13" name="Picture 12" descr="qr.png"/>
           <p:cNvPicPr>
             <a:picLocks noChangeAspect="1"/>
           </p:cNvPicPr>
@@ -8222,55 +8535,14 @@
         </p:blipFill>
         <p:spPr>
           <a:xfrm>
-            <a:off x="10360152" y="4617720"/>
-            <a:ext cx="1188720" cy="1188720"/>
+            <a:off x="9594799" y="4261103"/>
+            <a:ext cx="1581912" cy="1581912"/>
           </a:xfrm>
           <a:prstGeom prst="rect">
             <a:avLst/>
           </a:prstGeom>
         </p:spPr>
       </p:pic>
-      <p:sp>
-        <p:nvSpPr>
-          <p:cNvPr id="9" name="TextBox 8"/>
-          <p:cNvSpPr txBox="1"/>
-          <p:nvPr/>
-        </p:nvSpPr>
-        <p:spPr>
-          <a:xfrm>
-            <a:off x="10131552" y="5943600"/>
-            <a:ext cx="1645920" cy="365760"/>
-          </a:xfrm>
-          <a:prstGeom prst="rect">
-            <a:avLst/>
-          </a:prstGeom>
-          <a:noFill/>
-        </p:spPr>
-        <p:txBody>
-          <a:bodyPr wrap="square" lIns="0" rIns="0" tIns="0" bIns="0" anchor="t">
-            <a:spAutoFit/>
-          </a:bodyPr>
-          <a:lstStyle/>
-          <a:p>
-            <a:pPr algn="ctr">
-              <a:lnSpc>
-                <a:spcPct val="100000"/>
-              </a:lnSpc>
-            </a:pPr>
-            <a:r>
-              <a:rPr sz="1300" b="0">
-                <a:solidFill>
-                  <a:srgbClr val="475569"/>
-                </a:solidFill>
-                <a:latin typeface="Noto Sans JP"/>
-                <a:ea typeface="Noto Sans JP"/>
-                <a:cs typeface="Noto Sans JP"/>
-              </a:rPr>
-              <a:t>実機を試す</a:t>
-            </a:r>
-          </a:p>
-        </p:txBody>
-      </p:sp>
     </p:spTree>
   </p:cSld>
   <p:clrMapOvr>

--- a/docs/ピッチ/Overlai_本選ピッチ.pptx
+++ b/docs/ピッチ/Overlai_本選ピッチ.pptx
@@ -4384,8 +4384,8 @@
         </p:blipFill>
         <p:spPr>
           <a:xfrm>
-            <a:off x="9532652" y="4343400"/>
-            <a:ext cx="2247562" cy="2514600"/>
+            <a:off x="9681251" y="4343400"/>
+            <a:ext cx="2098963" cy="2514600"/>
           </a:xfrm>
           <a:prstGeom prst="rect">
             <a:avLst/>
@@ -4663,8 +4663,8 @@
         </p:blipFill>
         <p:spPr>
           <a:xfrm>
-            <a:off x="7641139" y="4343400"/>
-            <a:ext cx="4139076" cy="2514600"/>
+            <a:off x="7914797" y="4343400"/>
+            <a:ext cx="3865418" cy="2514600"/>
           </a:xfrm>
           <a:prstGeom prst="rect">
             <a:avLst/>

--- a/docs/ピッチ/Overlai_本選ピッチ.pptx
+++ b/docs/ピッチ/Overlai_本選ピッチ.pptx
@@ -12,6 +12,9 @@
     <p:sldId id="260" r:id="rId12"/>
     <p:sldId id="261" r:id="rId13"/>
     <p:sldId id="262" r:id="rId14"/>
+    <p:sldId id="263" r:id="rId15"/>
+    <p:sldId id="264" r:id="rId16"/>
+    <p:sldId id="265" r:id="rId17"/>
   </p:sldIdLst>
   <p:sldSz cx="12191695" cy="6858000" type="screen4x3"/>
   <p:notesSz cx="6858000" cy="9144000"/>
@@ -533,6 +536,76 @@
 </p:notes>
 </file>
 
+<file path=ppt/notesSlides/notesSlide10.xml><?xml version="1.0" encoding="utf-8"?>
+<p:notes xmlns:a="http://schemas.openxmlformats.org/drawingml/2006/main" xmlns:p="http://schemas.openxmlformats.org/presentationml/2006/main" xmlns:r="http://schemas.openxmlformats.org/officeDocument/2006/relationships">
+  <p:cSld>
+    <p:spTree>
+      <p:nvGrpSpPr>
+        <p:cNvPr id="1" name=""/>
+        <p:cNvGrpSpPr/>
+        <p:nvPr/>
+      </p:nvGrpSpPr>
+      <p:grpSpPr>
+        <a:xfrm>
+          <a:off x="0" y="0"/>
+          <a:ext cx="0" cy="0"/>
+          <a:chOff x="0" y="0"/>
+          <a:chExt cx="0" cy="0"/>
+        </a:xfrm>
+      </p:grpSpPr>
+      <p:sp>
+        <p:nvSpPr>
+          <p:cNvPr id="2" name="Slide Image Placeholder 1"/>
+          <p:cNvSpPr>
+            <a:spLocks noGrp="1"/>
+          </p:cNvSpPr>
+          <p:nvPr>
+            <p:ph type="sldImg" idx="2"/>
+          </p:nvPr>
+        </p:nvSpPr>
+        <p:spPr/>
+      </p:sp>
+      <p:sp>
+        <p:nvSpPr>
+          <p:cNvPr id="3" name="Notes Placeholder 2"/>
+          <p:cNvSpPr>
+            <a:spLocks noGrp="1"/>
+          </p:cNvSpPr>
+          <p:nvPr>
+            <p:ph type="body" idx="3" sz="quarter"/>
+          </p:nvPr>
+        </p:nvSpPr>
+        <p:spPr/>
+        <p:txBody>
+          <a:bodyPr/>
+          <a:lstStyle/>
+          <a:p>
+            <a:r>
+              <a:t>Overlai。重ねる前に、重ねて見る。</a:t>
+            </a:r>
+          </a:p>
+        </p:txBody>
+      </p:sp>
+      <p:sp>
+        <p:nvSpPr>
+          <p:cNvPr id="4" name="Slide Number Placeholder 3"/>
+          <p:cNvSpPr>
+            <a:spLocks noGrp="1"/>
+          </p:cNvSpPr>
+          <p:nvPr>
+            <p:ph type="sldNum" idx="5" sz="quarter"/>
+          </p:nvPr>
+        </p:nvSpPr>
+        <p:spPr/>
+      </p:sp>
+    </p:spTree>
+  </p:cSld>
+  <p:clrMapOvr>
+    <a:masterClrMapping/>
+  </p:clrMapOvr>
+</p:notes>
+</file>
+
 <file path=ppt/notesSlides/notesSlide2.xml><?xml version="1.0" encoding="utf-8"?>
 <p:notes xmlns:a="http://schemas.openxmlformats.org/drawingml/2006/main" xmlns:p="http://schemas.openxmlformats.org/presentationml/2006/main" xmlns:r="http://schemas.openxmlformats.org/officeDocument/2006/relationships">
   <p:cSld>
@@ -718,7 +791,7 @@
           <a:lstStyle/>
           <a:p>
             <a:r>
-              <a:t>どちらも、家の薬と見比べられれば迷わずに済みます。そこで作ったのがOverlaiです。店で成分表示を撮るだけで、買うべきかの目安がわかります。</a:t>
+              <a:t>どちらも、店では家の薬と見比べられません。そこで作ったのがOverlaiです。店で成分表示を撮るだけで、買うべきかの目安がわかります。</a:t>
             </a:r>
           </a:p>
         </p:txBody>
@@ -788,7 +861,7 @@
           <a:lstStyle/>
           <a:p>
             <a:r>
-              <a:t>名前が違っても同じ働きの薬に気づけて、使っている薬との相性も買う前にわかります。塗る順番まで案内します。</a:t>
+              <a:t>名前が違っても、同じ働きの薬に気づけます。</a:t>
             </a:r>
           </a:p>
         </p:txBody>
@@ -858,7 +931,7 @@
           <a:lstStyle/>
           <a:p>
             <a:r>
-              <a:t>家で一度登録すれば、店では撮るだけです。根拠の薄い推測は出さず、理由には出典を添えます。</a:t>
+              <a:t>使っている薬との相性も、買う前にわかります。</a:t>
             </a:r>
           </a:p>
         </p:txBody>
@@ -928,7 +1001,147 @@
           <a:lstStyle/>
           <a:p>
             <a:r>
-              <a:t>重ねる前に、重ねて見る。ぜひ、お試しください。</a:t>
+              <a:t>塗る順番まで案内します。</a:t>
+            </a:r>
+          </a:p>
+        </p:txBody>
+      </p:sp>
+      <p:sp>
+        <p:nvSpPr>
+          <p:cNvPr id="4" name="Slide Number Placeholder 3"/>
+          <p:cNvSpPr>
+            <a:spLocks noGrp="1"/>
+          </p:cNvSpPr>
+          <p:nvPr>
+            <p:ph type="sldNum" idx="5" sz="quarter"/>
+          </p:nvPr>
+        </p:nvSpPr>
+        <p:spPr/>
+      </p:sp>
+    </p:spTree>
+  </p:cSld>
+  <p:clrMapOvr>
+    <a:masterClrMapping/>
+  </p:clrMapOvr>
+</p:notes>
+</file>
+
+<file path=ppt/notesSlides/notesSlide8.xml><?xml version="1.0" encoding="utf-8"?>
+<p:notes xmlns:a="http://schemas.openxmlformats.org/drawingml/2006/main" xmlns:p="http://schemas.openxmlformats.org/presentationml/2006/main" xmlns:r="http://schemas.openxmlformats.org/officeDocument/2006/relationships">
+  <p:cSld>
+    <p:spTree>
+      <p:nvGrpSpPr>
+        <p:cNvPr id="1" name=""/>
+        <p:cNvGrpSpPr/>
+        <p:nvPr/>
+      </p:nvGrpSpPr>
+      <p:grpSpPr>
+        <a:xfrm>
+          <a:off x="0" y="0"/>
+          <a:ext cx="0" cy="0"/>
+          <a:chOff x="0" y="0"/>
+          <a:chExt cx="0" cy="0"/>
+        </a:xfrm>
+      </p:grpSpPr>
+      <p:sp>
+        <p:nvSpPr>
+          <p:cNvPr id="2" name="Slide Image Placeholder 1"/>
+          <p:cNvSpPr>
+            <a:spLocks noGrp="1"/>
+          </p:cNvSpPr>
+          <p:nvPr>
+            <p:ph type="sldImg" idx="2"/>
+          </p:nvPr>
+        </p:nvSpPr>
+        <p:spPr/>
+      </p:sp>
+      <p:sp>
+        <p:nvSpPr>
+          <p:cNvPr id="3" name="Notes Placeholder 2"/>
+          <p:cNvSpPr>
+            <a:spLocks noGrp="1"/>
+          </p:cNvSpPr>
+          <p:nvPr>
+            <p:ph type="body" idx="3" sz="quarter"/>
+          </p:nvPr>
+        </p:nvSpPr>
+        <p:spPr/>
+        <p:txBody>
+          <a:bodyPr/>
+          <a:lstStyle/>
+          <a:p>
+            <a:r>
+              <a:t>家で一度登録すれば、店では撮るだけ。理由には出典を添えます。</a:t>
+            </a:r>
+          </a:p>
+        </p:txBody>
+      </p:sp>
+      <p:sp>
+        <p:nvSpPr>
+          <p:cNvPr id="4" name="Slide Number Placeholder 3"/>
+          <p:cNvSpPr>
+            <a:spLocks noGrp="1"/>
+          </p:cNvSpPr>
+          <p:nvPr>
+            <p:ph type="sldNum" idx="5" sz="quarter"/>
+          </p:nvPr>
+        </p:nvSpPr>
+        <p:spPr/>
+      </p:sp>
+    </p:spTree>
+  </p:cSld>
+  <p:clrMapOvr>
+    <a:masterClrMapping/>
+  </p:clrMapOvr>
+</p:notes>
+</file>
+
+<file path=ppt/notesSlides/notesSlide9.xml><?xml version="1.0" encoding="utf-8"?>
+<p:notes xmlns:a="http://schemas.openxmlformats.org/drawingml/2006/main" xmlns:p="http://schemas.openxmlformats.org/presentationml/2006/main" xmlns:r="http://schemas.openxmlformats.org/officeDocument/2006/relationships">
+  <p:cSld>
+    <p:spTree>
+      <p:nvGrpSpPr>
+        <p:cNvPr id="1" name=""/>
+        <p:cNvGrpSpPr/>
+        <p:nvPr/>
+      </p:nvGrpSpPr>
+      <p:grpSpPr>
+        <a:xfrm>
+          <a:off x="0" y="0"/>
+          <a:ext cx="0" cy="0"/>
+          <a:chOff x="0" y="0"/>
+          <a:chExt cx="0" cy="0"/>
+        </a:xfrm>
+      </p:grpSpPr>
+      <p:sp>
+        <p:nvSpPr>
+          <p:cNvPr id="2" name="Slide Image Placeholder 1"/>
+          <p:cNvSpPr>
+            <a:spLocks noGrp="1"/>
+          </p:cNvSpPr>
+          <p:nvPr>
+            <p:ph type="sldImg" idx="2"/>
+          </p:nvPr>
+        </p:nvSpPr>
+        <p:spPr/>
+      </p:sp>
+      <p:sp>
+        <p:nvSpPr>
+          <p:cNvPr id="3" name="Notes Placeholder 2"/>
+          <p:cNvSpPr>
+            <a:spLocks noGrp="1"/>
+          </p:cNvSpPr>
+          <p:nvPr>
+            <p:ph type="body" idx="3" sz="quarter"/>
+          </p:nvPr>
+        </p:nvSpPr>
+        <p:spPr/>
+        <p:txBody>
+          <a:bodyPr/>
+          <a:lstStyle/>
+          <a:p>
+            <a:r>
+              <a:t>買い重ねる前に。塗り重ねる前に。一緒に飲む前に。</a:t>
             </a:r>
           </a:p>
         </p:txBody>
@@ -4203,6 +4416,333 @@
 </p:sld>
 </file>
 
+<file path=ppt/slides/slide10.xml><?xml version="1.0" encoding="utf-8"?>
+<p:sld xmlns:a="http://schemas.openxmlformats.org/drawingml/2006/main" xmlns:p="http://schemas.openxmlformats.org/presentationml/2006/main" xmlns:r="http://schemas.openxmlformats.org/officeDocument/2006/relationships">
+  <p:cSld>
+    <p:bg>
+      <p:bgPr>
+        <a:solidFill>
+          <a:srgbClr val="FFFFFF"/>
+        </a:solidFill>
+        <a:effectLst/>
+      </p:bgPr>
+    </p:bg>
+    <p:spTree>
+      <p:nvGrpSpPr>
+        <p:cNvPr id="1" name=""/>
+        <p:cNvGrpSpPr/>
+        <p:nvPr/>
+      </p:nvGrpSpPr>
+      <p:grpSpPr/>
+      <p:sp>
+        <p:nvSpPr>
+          <p:cNvPr id="2" name="TextBox 1"/>
+          <p:cNvSpPr txBox="1"/>
+          <p:nvPr/>
+        </p:nvSpPr>
+        <p:spPr>
+          <a:xfrm>
+            <a:off x="0" y="1097280"/>
+            <a:ext cx="12191695" cy="478789"/>
+          </a:xfrm>
+          <a:prstGeom prst="rect">
+            <a:avLst/>
+          </a:prstGeom>
+          <a:noFill/>
+        </p:spPr>
+        <p:txBody>
+          <a:bodyPr wrap="none" lIns="0" rIns="0" tIns="0" bIns="0" anchor="t">
+            <a:spAutoFit/>
+          </a:bodyPr>
+          <a:lstStyle/>
+          <a:p>
+            <a:pPr algn="ctr">
+              <a:lnSpc>
+                <a:spcPct val="100000"/>
+              </a:lnSpc>
+            </a:pPr>
+            <a:r>
+              <a:rPr sz="2600" b="0">
+                <a:solidFill>
+                  <a:srgbClr val="475569"/>
+                </a:solidFill>
+                <a:latin typeface="Noto Sans JP"/>
+                <a:ea typeface="Noto Sans JP"/>
+                <a:cs typeface="Noto Sans JP"/>
+              </a:rPr>
+              <a:t>店頭で撮るだけで、家の薬や化粧品と重ねて判定する。</a:t>
+            </a:r>
+          </a:p>
+        </p:txBody>
+      </p:sp>
+      <p:pic>
+        <p:nvPicPr>
+          <p:cNvPr id="3" name="Picture 2" descr="logo.png"/>
+          <p:cNvPicPr>
+            <a:picLocks noChangeAspect="1"/>
+          </p:cNvPicPr>
+          <p:nvPr/>
+        </p:nvPicPr>
+        <p:blipFill>
+          <a:blip r:embed="rId2"/>
+          <a:stretch>
+            <a:fillRect/>
+          </a:stretch>
+        </p:blipFill>
+        <p:spPr>
+          <a:xfrm>
+            <a:off x="3629507" y="2103120"/>
+            <a:ext cx="1524000" cy="1524000"/>
+          </a:xfrm>
+          <a:prstGeom prst="rect">
+            <a:avLst/>
+          </a:prstGeom>
+        </p:spPr>
+      </p:pic>
+      <p:sp>
+        <p:nvSpPr>
+          <p:cNvPr id="4" name="TextBox 3"/>
+          <p:cNvSpPr txBox="1"/>
+          <p:nvPr/>
+        </p:nvSpPr>
+        <p:spPr>
+          <a:xfrm>
+            <a:off x="5183987" y="2128519"/>
+            <a:ext cx="3561080" cy="1473200"/>
+          </a:xfrm>
+          <a:prstGeom prst="rect">
+            <a:avLst/>
+          </a:prstGeom>
+          <a:noFill/>
+        </p:spPr>
+        <p:txBody>
+          <a:bodyPr wrap="none" lIns="0" rIns="0" tIns="0" bIns="0" anchor="t">
+            <a:spAutoFit/>
+          </a:bodyPr>
+          <a:lstStyle/>
+          <a:p>
+            <a:pPr algn="l">
+              <a:lnSpc>
+                <a:spcPct val="100000"/>
+              </a:lnSpc>
+            </a:pPr>
+            <a:r>
+              <a:rPr sz="8000" b="0">
+                <a:solidFill>
+                  <a:srgbClr val="1B2A4A"/>
+                </a:solidFill>
+                <a:latin typeface="Noto Sans JP"/>
+                <a:ea typeface="Noto Sans JP"/>
+                <a:cs typeface="Noto Sans JP"/>
+              </a:rPr>
+              <a:t>Overlai</a:t>
+            </a:r>
+          </a:p>
+        </p:txBody>
+      </p:sp>
+      <p:sp>
+        <p:nvSpPr>
+          <p:cNvPr id="5" name="TextBox 4"/>
+          <p:cNvSpPr txBox="1"/>
+          <p:nvPr/>
+        </p:nvSpPr>
+        <p:spPr>
+          <a:xfrm>
+            <a:off x="0" y="4069080"/>
+            <a:ext cx="12191695" cy="626110"/>
+          </a:xfrm>
+          <a:prstGeom prst="rect">
+            <a:avLst/>
+          </a:prstGeom>
+          <a:noFill/>
+        </p:spPr>
+        <p:txBody>
+          <a:bodyPr wrap="none" lIns="0" rIns="0" tIns="0" bIns="0" anchor="t">
+            <a:spAutoFit/>
+          </a:bodyPr>
+          <a:lstStyle/>
+          <a:p>
+            <a:pPr algn="ctr">
+              <a:lnSpc>
+                <a:spcPct val="100000"/>
+              </a:lnSpc>
+            </a:pPr>
+            <a:r>
+              <a:rPr sz="3400" b="1">
+                <a:solidFill>
+                  <a:srgbClr val="1B2A4A"/>
+                </a:solidFill>
+                <a:latin typeface="Noto Sans JP"/>
+                <a:ea typeface="Noto Sans JP"/>
+                <a:cs typeface="Noto Sans JP"/>
+              </a:rPr>
+              <a:t>重ねる前に、重ねて見る。</a:t>
+            </a:r>
+          </a:p>
+        </p:txBody>
+      </p:sp>
+      <p:sp>
+        <p:nvSpPr>
+          <p:cNvPr id="6" name="TextBox 5"/>
+          <p:cNvSpPr txBox="1"/>
+          <p:nvPr/>
+        </p:nvSpPr>
+        <p:spPr>
+          <a:xfrm>
+            <a:off x="822960" y="6053328"/>
+            <a:ext cx="8229600" cy="276225"/>
+          </a:xfrm>
+          <a:prstGeom prst="rect">
+            <a:avLst/>
+          </a:prstGeom>
+          <a:noFill/>
+        </p:spPr>
+        <p:txBody>
+          <a:bodyPr wrap="none" lIns="0" rIns="0" tIns="0" bIns="0" anchor="t">
+            <a:spAutoFit/>
+          </a:bodyPr>
+          <a:lstStyle/>
+          <a:p>
+            <a:pPr algn="l">
+              <a:lnSpc>
+                <a:spcPct val="100000"/>
+              </a:lnSpc>
+            </a:pPr>
+            <a:r>
+              <a:rPr sz="1500" b="0">
+                <a:solidFill>
+                  <a:srgbClr val="475569"/>
+                </a:solidFill>
+                <a:latin typeface="Noto Sans JP"/>
+                <a:ea typeface="Noto Sans JP"/>
+                <a:cs typeface="Noto Sans JP"/>
+              </a:rPr>
+              <a:t>鈴鹿工業高等専門学校　井上 高志・濱田 圭太郎・杉本 隼都</a:t>
+            </a:r>
+          </a:p>
+        </p:txBody>
+      </p:sp>
+      <p:sp>
+        <p:nvSpPr>
+          <p:cNvPr id="7" name="Rounded Rectangle 6"/>
+          <p:cNvSpPr/>
+          <p:nvPr/>
+        </p:nvSpPr>
+        <p:spPr>
+          <a:xfrm>
+            <a:off x="10314432" y="4480560"/>
+            <a:ext cx="1280160" cy="1280160"/>
+          </a:xfrm>
+          <a:prstGeom prst="roundRect">
+            <a:avLst>
+              <a:gd name="adj" fmla="val 8571"/>
+            </a:avLst>
+          </a:prstGeom>
+          <a:solidFill>
+            <a:srgbClr val="FFFFFF"/>
+          </a:solidFill>
+          <a:ln w="12700">
+            <a:solidFill>
+              <a:srgbClr val="D9DFE7"/>
+            </a:solidFill>
+          </a:ln>
+          <a:effectLst/>
+        </p:spPr>
+        <p:style>
+          <a:lnRef idx="1">
+            <a:schemeClr val="accent1"/>
+          </a:lnRef>
+          <a:fillRef idx="3">
+            <a:schemeClr val="accent1"/>
+          </a:fillRef>
+          <a:effectRef idx="2">
+            <a:schemeClr val="accent1"/>
+          </a:effectRef>
+          <a:fontRef idx="minor">
+            <a:schemeClr val="lt1"/>
+          </a:fontRef>
+        </p:style>
+        <p:txBody>
+          <a:bodyPr rtlCol="0" anchor="ctr" lIns="0" rIns="0" tIns="0" bIns="0"/>
+          <a:lstStyle/>
+          <a:p>
+            <a:pPr algn="ctr"/>
+          </a:p>
+        </p:txBody>
+      </p:sp>
+      <p:pic>
+        <p:nvPicPr>
+          <p:cNvPr id="8" name="Picture 7" descr="qr.png"/>
+          <p:cNvPicPr>
+            <a:picLocks noChangeAspect="1"/>
+          </p:cNvPicPr>
+          <p:nvPr/>
+        </p:nvPicPr>
+        <p:blipFill>
+          <a:blip r:embed="rId3"/>
+          <a:stretch>
+            <a:fillRect/>
+          </a:stretch>
+        </p:blipFill>
+        <p:spPr>
+          <a:xfrm>
+            <a:off x="10360152" y="4526280"/>
+            <a:ext cx="1188720" cy="1188720"/>
+          </a:xfrm>
+          <a:prstGeom prst="rect">
+            <a:avLst/>
+          </a:prstGeom>
+        </p:spPr>
+      </p:pic>
+      <p:sp>
+        <p:nvSpPr>
+          <p:cNvPr id="9" name="TextBox 8"/>
+          <p:cNvSpPr txBox="1"/>
+          <p:nvPr/>
+        </p:nvSpPr>
+        <p:spPr>
+          <a:xfrm>
+            <a:off x="10040112" y="5852160"/>
+            <a:ext cx="1828800" cy="257810"/>
+          </a:xfrm>
+          <a:prstGeom prst="rect">
+            <a:avLst/>
+          </a:prstGeom>
+          <a:noFill/>
+        </p:spPr>
+        <p:txBody>
+          <a:bodyPr wrap="none" lIns="0" rIns="0" tIns="0" bIns="0" anchor="t">
+            <a:spAutoFit/>
+          </a:bodyPr>
+          <a:lstStyle/>
+          <a:p>
+            <a:pPr algn="ctr">
+              <a:lnSpc>
+                <a:spcPct val="100000"/>
+              </a:lnSpc>
+            </a:pPr>
+            <a:r>
+              <a:rPr sz="1400" b="0">
+                <a:solidFill>
+                  <a:srgbClr val="475569"/>
+                </a:solidFill>
+                <a:latin typeface="Noto Sans JP"/>
+                <a:ea typeface="Noto Sans JP"/>
+                <a:cs typeface="Noto Sans JP"/>
+              </a:rPr>
+              <a:t>実機を試す</a:t>
+            </a:r>
+          </a:p>
+        </p:txBody>
+      </p:sp>
+    </p:spTree>
+  </p:cSld>
+  <p:clrMapOvr>
+    <a:masterClrMapping/>
+  </p:clrMapOvr>
+</p:sld>
+</file>
+
 <file path=ppt/slides/slide2.xml><?xml version="1.0" encoding="utf-8"?>
 <p:sld xmlns:a="http://schemas.openxmlformats.org/drawingml/2006/main" xmlns:p="http://schemas.openxmlformats.org/presentationml/2006/main" xmlns:r="http://schemas.openxmlformats.org/officeDocument/2006/relationships">
   <p:cSld>
@@ -4230,7 +4770,7 @@
         <p:spPr>
           <a:xfrm>
             <a:off x="685800" y="685800"/>
-            <a:ext cx="8229600" cy="368300"/>
+            <a:ext cx="7315200" cy="368300"/>
           </a:xfrm>
           <a:prstGeom prst="rect">
             <a:avLst/>
@@ -4251,7 +4791,7 @@
             <a:r>
               <a:rPr sz="2000" b="1">
                 <a:solidFill>
-                  <a:srgbClr val="1B2A4A"/>
+                  <a:srgbClr val="2563EB"/>
                 </a:solidFill>
                 <a:latin typeface="Noto Sans JP"/>
                 <a:ea typeface="Noto Sans JP"/>
@@ -4509,7 +5049,7 @@
         <p:spPr>
           <a:xfrm>
             <a:off x="685800" y="685800"/>
-            <a:ext cx="8229600" cy="368300"/>
+            <a:ext cx="7315200" cy="368300"/>
           </a:xfrm>
           <a:prstGeom prst="rect">
             <a:avLst/>
@@ -4530,7 +5070,7 @@
             <a:r>
               <a:rPr sz="2000" b="1">
                 <a:solidFill>
-                  <a:srgbClr val="1B2A4A"/>
+                  <a:srgbClr val="2563EB"/>
                 </a:solidFill>
                 <a:latin typeface="Noto Sans JP"/>
                 <a:ea typeface="Noto Sans JP"/>
@@ -4779,9 +5319,50 @@
         <p:nvPr/>
       </p:nvGrpSpPr>
       <p:grpSpPr/>
+      <p:sp>
+        <p:nvSpPr>
+          <p:cNvPr id="2" name="TextBox 1"/>
+          <p:cNvSpPr txBox="1"/>
+          <p:nvPr/>
+        </p:nvSpPr>
+        <p:spPr>
+          <a:xfrm>
+            <a:off x="685800" y="914400"/>
+            <a:ext cx="5486400" cy="405130"/>
+          </a:xfrm>
+          <a:prstGeom prst="rect">
+            <a:avLst/>
+          </a:prstGeom>
+          <a:noFill/>
+        </p:spPr>
+        <p:txBody>
+          <a:bodyPr wrap="none" lIns="0" rIns="0" tIns="0" bIns="0" anchor="t">
+            <a:spAutoFit/>
+          </a:bodyPr>
+          <a:lstStyle/>
+          <a:p>
+            <a:pPr algn="l">
+              <a:lnSpc>
+                <a:spcPct val="100000"/>
+              </a:lnSpc>
+            </a:pPr>
+            <a:r>
+              <a:rPr sz="2200" b="1">
+                <a:solidFill>
+                  <a:srgbClr val="475569"/>
+                </a:solidFill>
+                <a:latin typeface="Noto Sans JP"/>
+                <a:ea typeface="Noto Sans JP"/>
+                <a:cs typeface="Noto Sans JP"/>
+              </a:rPr>
+              <a:t>そこで作ったのが</a:t>
+            </a:r>
+          </a:p>
+        </p:txBody>
+      </p:sp>
       <p:pic>
         <p:nvPicPr>
-          <p:cNvPr id="2" name="Picture 1" descr="logo.png"/>
+          <p:cNvPr id="3" name="Picture 2" descr="logo.png"/>
           <p:cNvPicPr>
             <a:picLocks noChangeAspect="1"/>
           </p:cNvPicPr>
@@ -4795,8 +5376,8 @@
         </p:blipFill>
         <p:spPr>
           <a:xfrm>
-            <a:off x="685800" y="960120"/>
-            <a:ext cx="647699" cy="647699"/>
+            <a:off x="685800" y="1463040"/>
+            <a:ext cx="1371600" cy="1371600"/>
           </a:xfrm>
           <a:prstGeom prst="rect">
             <a:avLst/>
@@ -4805,14 +5386,14 @@
       </p:pic>
       <p:sp>
         <p:nvSpPr>
-          <p:cNvPr id="3" name="TextBox 2"/>
+          <p:cNvPr id="4" name="TextBox 3"/>
           <p:cNvSpPr txBox="1"/>
           <p:nvPr/>
         </p:nvSpPr>
         <p:spPr>
           <a:xfrm>
-            <a:off x="1346454" y="970915"/>
-            <a:ext cx="1611630" cy="626110"/>
+            <a:off x="2084832" y="1485900"/>
+            <a:ext cx="3230880" cy="1325880"/>
           </a:xfrm>
           <a:prstGeom prst="rect">
             <a:avLst/>
@@ -4831,7 +5412,7 @@
               </a:lnSpc>
             </a:pPr>
             <a:r>
-              <a:rPr sz="3400" b="0">
+              <a:rPr sz="7200" b="0">
                 <a:solidFill>
                   <a:srgbClr val="1B2A4A"/>
                 </a:solidFill>
@@ -4846,14 +5427,14 @@
       </p:sp>
       <p:sp>
         <p:nvSpPr>
-          <p:cNvPr id="4" name="TextBox 3"/>
+          <p:cNvPr id="5" name="TextBox 4"/>
           <p:cNvSpPr txBox="1"/>
           <p:nvPr/>
         </p:nvSpPr>
         <p:spPr>
           <a:xfrm>
-            <a:off x="3049524" y="1191514"/>
-            <a:ext cx="3657600" cy="294639"/>
+            <a:off x="685800" y="3017520"/>
+            <a:ext cx="5486400" cy="331470"/>
           </a:xfrm>
           <a:prstGeom prst="rect">
             <a:avLst/>
@@ -4872,7 +5453,7 @@
               </a:lnSpc>
             </a:pPr>
             <a:r>
-              <a:rPr sz="1600" b="0">
+              <a:rPr sz="1800" b="0">
                 <a:solidFill>
                   <a:srgbClr val="475569"/>
                 </a:solidFill>
@@ -4887,73 +5468,14 @@
       </p:sp>
       <p:sp>
         <p:nvSpPr>
-          <p:cNvPr id="5" name="TextBox 4"/>
-          <p:cNvSpPr txBox="1"/>
-          <p:nvPr/>
-        </p:nvSpPr>
-        <p:spPr>
-          <a:xfrm>
-            <a:off x="685800" y="1828800"/>
-            <a:ext cx="6949440" cy="2519172"/>
-          </a:xfrm>
-          <a:prstGeom prst="rect">
-            <a:avLst/>
-          </a:prstGeom>
-          <a:noFill/>
-        </p:spPr>
-        <p:txBody>
-          <a:bodyPr wrap="none" lIns="0" rIns="0" tIns="0" bIns="0" anchor="t">
-            <a:spAutoFit/>
-          </a:bodyPr>
-          <a:lstStyle/>
-          <a:p>
-            <a:pPr algn="l">
-              <a:lnSpc>
-                <a:spcPct val="95000"/>
-              </a:lnSpc>
-            </a:pPr>
-            <a:r>
-              <a:rPr sz="7200" b="1">
-                <a:solidFill>
-                  <a:srgbClr val="1B2A4A"/>
-                </a:solidFill>
-                <a:latin typeface="Noto Sans JP"/>
-                <a:ea typeface="Noto Sans JP"/>
-                <a:cs typeface="Noto Sans JP"/>
-              </a:rPr>
-              <a:t>重ねる前に、</a:t>
-            </a:r>
-          </a:p>
-          <a:p>
-            <a:pPr algn="l">
-              <a:lnSpc>
-                <a:spcPct val="95000"/>
-              </a:lnSpc>
-            </a:pPr>
-            <a:r>
-              <a:rPr sz="7200" b="1">
-                <a:solidFill>
-                  <a:srgbClr val="1B2A4A"/>
-                </a:solidFill>
-                <a:latin typeface="Noto Sans JP"/>
-                <a:ea typeface="Noto Sans JP"/>
-                <a:cs typeface="Noto Sans JP"/>
-              </a:rPr>
-              <a:t>重ねて見る。</a:t>
-            </a:r>
-          </a:p>
-        </p:txBody>
-      </p:sp>
-      <p:sp>
-        <p:nvSpPr>
           <p:cNvPr id="6" name="TextBox 5"/>
           <p:cNvSpPr txBox="1"/>
           <p:nvPr/>
         </p:nvSpPr>
         <p:spPr>
           <a:xfrm>
-            <a:off x="685800" y="4800600"/>
-            <a:ext cx="10515600" cy="957579"/>
+            <a:off x="685800" y="3886200"/>
+            <a:ext cx="6949440" cy="1657350"/>
           </a:xfrm>
           <a:prstGeom prst="rect">
             <a:avLst/>
@@ -4972,7 +5494,7 @@
               </a:lnSpc>
             </a:pPr>
             <a:r>
-              <a:rPr sz="2600" b="1">
+              <a:rPr sz="3000" b="1">
                 <a:solidFill>
                   <a:srgbClr val="0F172A"/>
                 </a:solidFill>
@@ -4980,7 +5502,7 @@
                 <a:ea typeface="Noto Sans JP"/>
                 <a:cs typeface="Noto Sans JP"/>
               </a:rPr>
-              <a:t>店で成分表示を撮るだけで、家の薬・化粧品と比べて</a:t>
+              <a:t>店で成分表示を撮るだけで、</a:t>
             </a:r>
           </a:p>
           <a:p>
@@ -4990,7 +5512,7 @@
               </a:lnSpc>
             </a:pPr>
             <a:r>
-              <a:rPr sz="2600" b="1">
+              <a:rPr sz="3000" b="1">
                 <a:solidFill>
                   <a:srgbClr val="0F172A"/>
                 </a:solidFill>
@@ -4998,7 +5520,25 @@
                 <a:ea typeface="Noto Sans JP"/>
                 <a:cs typeface="Noto Sans JP"/>
               </a:rPr>
-              <a:t>「買うべきか」の目安がわかるアプリ。</a:t>
+              <a:t>家の薬・化粧品と比べて</a:t>
+            </a:r>
+          </a:p>
+          <a:p>
+            <a:pPr algn="l">
+              <a:lnSpc>
+                <a:spcPct val="100000"/>
+              </a:lnSpc>
+            </a:pPr>
+            <a:r>
+              <a:rPr sz="3000" b="1">
+                <a:solidFill>
+                  <a:srgbClr val="0F172A"/>
+                </a:solidFill>
+                <a:latin typeface="Noto Sans JP"/>
+                <a:ea typeface="Noto Sans JP"/>
+                <a:cs typeface="Noto Sans JP"/>
+              </a:rPr>
+              <a:t>「買うべきか」の目安がわかる。</a:t>
             </a:r>
           </a:p>
         </p:txBody>
@@ -5011,7 +5551,7 @@
         </p:nvSpPr>
         <p:spPr>
           <a:xfrm>
-            <a:off x="7848295" y="960120"/>
+            <a:off x="7848295" y="1600200"/>
             <a:ext cx="2560320" cy="2560320"/>
           </a:xfrm>
           <a:prstGeom prst="roundRect">
@@ -5057,7 +5597,7 @@
         </p:nvSpPr>
         <p:spPr>
           <a:xfrm>
-            <a:off x="8945575" y="2057400"/>
+            <a:off x="8945575" y="2697480"/>
             <a:ext cx="2560320" cy="2560320"/>
           </a:xfrm>
           <a:prstGeom prst="roundRect">
@@ -5103,7 +5643,7 @@
         </p:nvSpPr>
         <p:spPr>
           <a:xfrm>
-            <a:off x="8945575" y="2057400"/>
+            <a:off x="8945575" y="2697480"/>
             <a:ext cx="1463040" cy="1463040"/>
           </a:xfrm>
           <a:prstGeom prst="round2DiagRect">
@@ -5150,7 +5690,7 @@
         </p:nvSpPr>
         <p:spPr>
           <a:xfrm>
-            <a:off x="8945575" y="2467051"/>
+            <a:off x="8945575" y="3107131"/>
             <a:ext cx="1463040" cy="331470"/>
           </a:xfrm>
           <a:prstGeom prst="rect">
@@ -5191,7 +5731,7 @@
         </p:nvSpPr>
         <p:spPr>
           <a:xfrm>
-            <a:off x="8093354" y="1205179"/>
+            <a:off x="8093354" y="1845259"/>
             <a:ext cx="2560320" cy="331470"/>
           </a:xfrm>
           <a:prstGeom prst="rect">
@@ -5232,7 +5772,7 @@
         </p:nvSpPr>
         <p:spPr>
           <a:xfrm>
-            <a:off x="9066276" y="3709720"/>
+            <a:off x="9066276" y="4349800"/>
             <a:ext cx="2194560" cy="662940"/>
           </a:xfrm>
           <a:prstGeom prst="rect">
@@ -5291,7 +5831,7 @@
         </p:nvSpPr>
         <p:spPr>
           <a:xfrm>
-            <a:off x="9375343" y="2964484"/>
+            <a:off x="9375343" y="3604564"/>
             <a:ext cx="146304" cy="146304"/>
           </a:xfrm>
           <a:prstGeom prst="roundRect">
@@ -5337,7 +5877,7 @@
         </p:nvSpPr>
         <p:spPr>
           <a:xfrm>
-            <a:off x="9603943" y="2964484"/>
+            <a:off x="9603943" y="3604564"/>
             <a:ext cx="146304" cy="146304"/>
           </a:xfrm>
           <a:prstGeom prst="roundRect">
@@ -5383,7 +5923,7 @@
         </p:nvSpPr>
         <p:spPr>
           <a:xfrm>
-            <a:off x="9832543" y="2964484"/>
+            <a:off x="9832543" y="3604564"/>
             <a:ext cx="146304" cy="146304"/>
           </a:xfrm>
           <a:prstGeom prst="roundRect">
@@ -5455,8 +5995,8 @@
         </p:nvSpPr>
         <p:spPr>
           <a:xfrm>
-            <a:off x="685800" y="457200"/>
-            <a:ext cx="5486400" cy="478789"/>
+            <a:off x="685800" y="685800"/>
+            <a:ext cx="7315200" cy="368300"/>
           </a:xfrm>
           <a:prstGeom prst="rect">
             <a:avLst/>
@@ -5475,29 +6015,70 @@
               </a:lnSpc>
             </a:pPr>
             <a:r>
-              <a:rPr sz="2600" b="1">
-                <a:solidFill>
-                  <a:srgbClr val="1B2A4A"/>
+              <a:rPr sz="2000" b="1">
+                <a:solidFill>
+                  <a:srgbClr val="2563EB"/>
                 </a:solidFill>
                 <a:latin typeface="Noto Sans JP"/>
                 <a:ea typeface="Noto Sans JP"/>
                 <a:cs typeface="Noto Sans JP"/>
               </a:rPr>
-              <a:t>できること</a:t>
-            </a:r>
-          </a:p>
-        </p:txBody>
-      </p:sp>
-      <p:sp>
-        <p:nvSpPr>
-          <p:cNvPr id="3" name="Rectangle 2"/>
+              <a:t>できること 1</a:t>
+            </a:r>
+          </a:p>
+        </p:txBody>
+      </p:sp>
+      <p:sp>
+        <p:nvSpPr>
+          <p:cNvPr id="3" name="TextBox 2"/>
+          <p:cNvSpPr txBox="1"/>
+          <p:nvPr/>
+        </p:nvSpPr>
+        <p:spPr>
+          <a:xfrm>
+            <a:off x="685800" y="1600200"/>
+            <a:ext cx="6858000" cy="405130"/>
+          </a:xfrm>
+          <a:prstGeom prst="rect">
+            <a:avLst/>
+          </a:prstGeom>
+          <a:noFill/>
+        </p:spPr>
+        <p:txBody>
+          <a:bodyPr wrap="none" lIns="0" rIns="0" tIns="0" bIns="0" anchor="t">
+            <a:spAutoFit/>
+          </a:bodyPr>
+          <a:lstStyle/>
+          <a:p>
+            <a:pPr algn="l">
+              <a:lnSpc>
+                <a:spcPct val="100000"/>
+              </a:lnSpc>
+            </a:pPr>
+            <a:r>
+              <a:rPr sz="2200" b="1">
+                <a:solidFill>
+                  <a:srgbClr val="94A3B8"/>
+                </a:solidFill>
+                <a:latin typeface="Noto Sans JP"/>
+                <a:ea typeface="Noto Sans JP"/>
+                <a:cs typeface="Noto Sans JP"/>
+              </a:rPr>
+              <a:t>「名前は違うけど、中身は同じ？」</a:t>
+            </a:r>
+          </a:p>
+        </p:txBody>
+      </p:sp>
+      <p:sp>
+        <p:nvSpPr>
+          <p:cNvPr id="4" name="Rectangle 3"/>
           <p:cNvSpPr/>
           <p:nvPr/>
         </p:nvSpPr>
         <p:spPr>
           <a:xfrm>
-            <a:off x="685800" y="987552"/>
-            <a:ext cx="10820095" cy="20116"/>
+            <a:off x="685800" y="2240280"/>
+            <a:ext cx="548640" cy="45720"/>
           </a:xfrm>
           <a:prstGeom prst="rect">
             <a:avLst/>
@@ -5534,14 +6115,14 @@
       </p:sp>
       <p:sp>
         <p:nvSpPr>
-          <p:cNvPr id="4" name="TextBox 3"/>
+          <p:cNvPr id="5" name="TextBox 4"/>
           <p:cNvSpPr txBox="1"/>
           <p:nvPr/>
         </p:nvSpPr>
         <p:spPr>
           <a:xfrm>
-            <a:off x="685800" y="1188720"/>
-            <a:ext cx="3332378" cy="736600"/>
+            <a:off x="685800" y="2514600"/>
+            <a:ext cx="6858000" cy="1325880"/>
           </a:xfrm>
           <a:prstGeom prst="rect">
             <a:avLst/>
@@ -5560,7 +6141,7 @@
               </a:lnSpc>
             </a:pPr>
             <a:r>
-              <a:rPr sz="2000" b="1">
+              <a:rPr sz="3600" b="1">
                 <a:solidFill>
                   <a:srgbClr val="0F172A"/>
                 </a:solidFill>
@@ -5578,7 +6159,7 @@
               </a:lnSpc>
             </a:pPr>
             <a:r>
-              <a:rPr sz="2000" b="1">
+              <a:rPr sz="3600" b="1">
                 <a:solidFill>
                   <a:srgbClr val="0F172A"/>
                 </a:solidFill>
@@ -5593,14 +6174,14 @@
       </p:sp>
       <p:sp>
         <p:nvSpPr>
-          <p:cNvPr id="5" name="TextBox 4"/>
+          <p:cNvPr id="6" name="TextBox 5"/>
           <p:cNvSpPr txBox="1"/>
           <p:nvPr/>
         </p:nvSpPr>
         <p:spPr>
           <a:xfrm>
-            <a:off x="685800" y="1965960"/>
-            <a:ext cx="3332378" cy="552450"/>
+            <a:off x="685800" y="4023360"/>
+            <a:ext cx="6858000" cy="736600"/>
           </a:xfrm>
           <a:prstGeom prst="rect">
             <a:avLst/>
@@ -5619,7 +6200,7 @@
               </a:lnSpc>
             </a:pPr>
             <a:r>
-              <a:rPr sz="1500" b="0">
+              <a:rPr sz="2000" b="0">
                 <a:solidFill>
                   <a:srgbClr val="475569"/>
                 </a:solidFill>
@@ -5637,7 +6218,7 @@
               </a:lnSpc>
             </a:pPr>
             <a:r>
-              <a:rPr sz="1500" b="0">
+              <a:rPr sz="2000" b="0">
                 <a:solidFill>
                   <a:srgbClr val="475569"/>
                 </a:solidFill>
@@ -5652,18 +6233,18 @@
       </p:sp>
       <p:sp>
         <p:nvSpPr>
-          <p:cNvPr id="6" name="Rounded Rectangle 5"/>
+          <p:cNvPr id="7" name="Rounded Rectangle 6"/>
           <p:cNvSpPr/>
           <p:nvPr/>
         </p:nvSpPr>
         <p:spPr>
           <a:xfrm>
-            <a:off x="685800" y="2697479"/>
-            <a:ext cx="1755886" cy="3392424"/>
+            <a:off x="8247116" y="466344"/>
+            <a:ext cx="3021034" cy="5925312"/>
           </a:xfrm>
           <a:prstGeom prst="roundRect">
             <a:avLst>
-              <a:gd name="adj" fmla="val 7290"/>
+              <a:gd name="adj" fmla="val 6658"/>
             </a:avLst>
           </a:prstGeom>
           <a:solidFill>
@@ -5700,7 +6281,7 @@
       </p:sp>
       <p:pic>
         <p:nvPicPr>
-          <p:cNvPr id="7" name="Picture 6" descr="yellow-real.png"/>
+          <p:cNvPr id="8" name="Picture 7" descr="yellow-real.png"/>
           <p:cNvPicPr>
             <a:picLocks noChangeAspect="1"/>
           </p:cNvPicPr>
@@ -5714,8 +6295,8 @@
         </p:blipFill>
         <p:spPr>
           <a:xfrm>
-            <a:off x="758952" y="2770632"/>
-            <a:ext cx="1609582" cy="3246120"/>
+            <a:off x="8329412" y="548640"/>
+            <a:ext cx="2856442" cy="5760720"/>
           </a:xfrm>
           <a:prstGeom prst="rect">
             <a:avLst/>
@@ -5724,22 +6305,22 @@
       </p:pic>
       <p:sp>
         <p:nvSpPr>
-          <p:cNvPr id="8" name="Rounded Rectangle 7"/>
+          <p:cNvPr id="9" name="Rounded Rectangle 8"/>
           <p:cNvSpPr/>
           <p:nvPr/>
         </p:nvSpPr>
         <p:spPr>
           <a:xfrm>
-            <a:off x="839431" y="4435891"/>
-            <a:ext cx="466778" cy="139583"/>
+            <a:off x="8472234" y="3503889"/>
+            <a:ext cx="828368" cy="247710"/>
           </a:xfrm>
           <a:prstGeom prst="roundRect">
             <a:avLst>
-              <a:gd name="adj" fmla="val 32754"/>
+              <a:gd name="adj" fmla="val 22148"/>
             </a:avLst>
           </a:prstGeom>
           <a:noFill/>
-          <a:ln w="22225">
+          <a:ln w="28575">
             <a:solidFill>
               <a:srgbClr val="B45309"/>
             </a:solidFill>
@@ -5770,18 +6351,18 @@
       </p:sp>
       <p:sp>
         <p:nvSpPr>
-          <p:cNvPr id="9" name="Rounded Rectangle 8"/>
+          <p:cNvPr id="10" name="Rounded Rectangle 9"/>
           <p:cNvSpPr/>
           <p:nvPr/>
         </p:nvSpPr>
         <p:spPr>
           <a:xfrm>
-            <a:off x="821143" y="4152427"/>
-            <a:ext cx="1213104" cy="256032"/>
+            <a:off x="8444802" y="3174705"/>
+            <a:ext cx="1402080" cy="301752"/>
           </a:xfrm>
           <a:prstGeom prst="roundRect">
             <a:avLst>
-              <a:gd name="adj" fmla="val 14285"/>
+              <a:gd name="adj" fmla="val 15151"/>
             </a:avLst>
           </a:prstGeom>
           <a:solidFill>
@@ -5812,7 +6393,7 @@
           <a:p>
             <a:pPr algn="ctr"/>
             <a:r>
-              <a:rPr sz="1400" b="1">
+              <a:rPr sz="1600" b="1">
                 <a:solidFill>
                   <a:srgbClr val="FFFFFF"/>
                 </a:solidFill>
@@ -5827,22 +6408,22 @@
       </p:sp>
       <p:sp>
         <p:nvSpPr>
-          <p:cNvPr id="10" name="Rounded Rectangle 9"/>
+          <p:cNvPr id="11" name="Rounded Rectangle 10"/>
           <p:cNvSpPr/>
           <p:nvPr/>
         </p:nvSpPr>
         <p:spPr>
           <a:xfrm>
-            <a:off x="815287" y="4945532"/>
-            <a:ext cx="1496911" cy="396026"/>
+            <a:off x="8429388" y="4408322"/>
+            <a:ext cx="2656491" cy="702807"/>
           </a:xfrm>
           <a:prstGeom prst="roundRect">
             <a:avLst>
-              <a:gd name="adj" fmla="val 11544"/>
+              <a:gd name="adj" fmla="val 7806"/>
             </a:avLst>
           </a:prstGeom>
           <a:noFill/>
-          <a:ln w="22225">
+          <a:ln w="28575">
             <a:solidFill>
               <a:srgbClr val="B45309"/>
             </a:solidFill>
@@ -5873,18 +6454,18 @@
       </p:sp>
       <p:sp>
         <p:nvSpPr>
-          <p:cNvPr id="11" name="Rounded Rectangle 10"/>
+          <p:cNvPr id="12" name="Rounded Rectangle 11"/>
           <p:cNvSpPr/>
           <p:nvPr/>
         </p:nvSpPr>
         <p:spPr>
           <a:xfrm>
-            <a:off x="796999" y="4662068"/>
-            <a:ext cx="679704" cy="256032"/>
+            <a:off x="8401956" y="4079138"/>
+            <a:ext cx="792480" cy="301752"/>
           </a:xfrm>
           <a:prstGeom prst="roundRect">
             <a:avLst>
-              <a:gd name="adj" fmla="val 14285"/>
+              <a:gd name="adj" fmla="val 15151"/>
             </a:avLst>
           </a:prstGeom>
           <a:solidFill>
@@ -5915,7 +6496,7 @@
           <a:p>
             <a:pPr algn="ctr"/>
             <a:r>
-              <a:rPr sz="1400" b="1">
+              <a:rPr sz="1600" b="1">
                 <a:solidFill>
                   <a:srgbClr val="FFFFFF"/>
                 </a:solidFill>
@@ -5930,14 +6511,14 @@
       </p:sp>
       <p:sp>
         <p:nvSpPr>
-          <p:cNvPr id="12" name="TextBox 11"/>
+          <p:cNvPr id="13" name="TextBox 12"/>
           <p:cNvSpPr txBox="1"/>
           <p:nvPr/>
         </p:nvSpPr>
         <p:spPr>
           <a:xfrm>
-            <a:off x="4429658" y="1188720"/>
-            <a:ext cx="3332378" cy="736600"/>
+            <a:off x="685800" y="5897880"/>
+            <a:ext cx="1463040" cy="276225"/>
           </a:xfrm>
           <a:prstGeom prst="rect">
             <a:avLst/>
@@ -5956,17 +6537,86 @@
               </a:lnSpc>
             </a:pPr>
             <a:r>
-              <a:rPr sz="2000" b="1">
-                <a:solidFill>
-                  <a:srgbClr val="0F172A"/>
+              <a:rPr sz="1500" b="1">
+                <a:solidFill>
+                  <a:srgbClr val="475569"/>
                 </a:solidFill>
                 <a:latin typeface="Noto Sans JP"/>
                 <a:ea typeface="Noto Sans JP"/>
                 <a:cs typeface="Noto Sans JP"/>
               </a:rPr>
-              <a:t>使っている薬との相性が、</a:t>
-            </a:r>
-          </a:p>
+              <a:t>判定は3色</a:t>
+            </a:r>
+          </a:p>
+        </p:txBody>
+      </p:sp>
+      <p:sp>
+        <p:nvSpPr>
+          <p:cNvPr id="14" name="Rounded Rectangle 13"/>
+          <p:cNvSpPr/>
+          <p:nvPr/>
+        </p:nvSpPr>
+        <p:spPr>
+          <a:xfrm>
+            <a:off x="1882140" y="6007608"/>
+            <a:ext cx="173736" cy="173736"/>
+          </a:xfrm>
+          <a:prstGeom prst="roundRect">
+            <a:avLst>
+              <a:gd name="adj" fmla="val 50000"/>
+            </a:avLst>
+          </a:prstGeom>
+          <a:solidFill>
+            <a:srgbClr val="2563EB"/>
+          </a:solidFill>
+          <a:ln>
+            <a:noFill/>
+          </a:ln>
+          <a:effectLst/>
+        </p:spPr>
+        <p:style>
+          <a:lnRef idx="1">
+            <a:schemeClr val="accent1"/>
+          </a:lnRef>
+          <a:fillRef idx="3">
+            <a:schemeClr val="accent1"/>
+          </a:fillRef>
+          <a:effectRef idx="2">
+            <a:schemeClr val="accent1"/>
+          </a:effectRef>
+          <a:fontRef idx="minor">
+            <a:schemeClr val="lt1"/>
+          </a:fontRef>
+        </p:style>
+        <p:txBody>
+          <a:bodyPr rtlCol="0" anchor="ctr" lIns="0" rIns="0" tIns="0" bIns="0"/>
+          <a:lstStyle/>
+          <a:p>
+            <a:pPr algn="ctr"/>
+          </a:p>
+        </p:txBody>
+      </p:sp>
+      <p:sp>
+        <p:nvSpPr>
+          <p:cNvPr id="15" name="TextBox 14"/>
+          <p:cNvSpPr txBox="1"/>
+          <p:nvPr/>
+        </p:nvSpPr>
+        <p:spPr>
+          <a:xfrm>
+            <a:off x="2138172" y="5897880"/>
+            <a:ext cx="1996440" cy="276225"/>
+          </a:xfrm>
+          <a:prstGeom prst="rect">
+            <a:avLst/>
+          </a:prstGeom>
+          <a:noFill/>
+        </p:spPr>
+        <p:txBody>
+          <a:bodyPr wrap="none" lIns="0" rIns="0" tIns="0" bIns="0" anchor="t">
+            <a:spAutoFit/>
+          </a:bodyPr>
+          <a:lstStyle/>
           <a:p>
             <a:pPr algn="l">
               <a:lnSpc>
@@ -5974,7 +6624,7 @@
               </a:lnSpc>
             </a:pPr>
             <a:r>
-              <a:rPr sz="2000" b="1">
+              <a:rPr sz="1500" b="1">
                 <a:solidFill>
                   <a:srgbClr val="0F172A"/>
                 </a:solidFill>
@@ -5982,21 +6632,67 @@
                 <a:ea typeface="Noto Sans JP"/>
                 <a:cs typeface="Noto Sans JP"/>
               </a:rPr>
-              <a:t>買う前にわかる</a:t>
-            </a:r>
-          </a:p>
-        </p:txBody>
-      </p:sp>
-      <p:sp>
-        <p:nvSpPr>
-          <p:cNvPr id="13" name="TextBox 12"/>
+              <a:t>買っても問題なさそう</a:t>
+            </a:r>
+          </a:p>
+        </p:txBody>
+      </p:sp>
+      <p:sp>
+        <p:nvSpPr>
+          <p:cNvPr id="16" name="Rounded Rectangle 15"/>
+          <p:cNvSpPr/>
+          <p:nvPr/>
+        </p:nvSpPr>
+        <p:spPr>
+          <a:xfrm>
+            <a:off x="4408932" y="6007608"/>
+            <a:ext cx="173736" cy="173736"/>
+          </a:xfrm>
+          <a:prstGeom prst="roundRect">
+            <a:avLst>
+              <a:gd name="adj" fmla="val 50000"/>
+            </a:avLst>
+          </a:prstGeom>
+          <a:solidFill>
+            <a:srgbClr val="D97706"/>
+          </a:solidFill>
+          <a:ln>
+            <a:noFill/>
+          </a:ln>
+          <a:effectLst/>
+        </p:spPr>
+        <p:style>
+          <a:lnRef idx="1">
+            <a:schemeClr val="accent1"/>
+          </a:lnRef>
+          <a:fillRef idx="3">
+            <a:schemeClr val="accent1"/>
+          </a:fillRef>
+          <a:effectRef idx="2">
+            <a:schemeClr val="accent1"/>
+          </a:effectRef>
+          <a:fontRef idx="minor">
+            <a:schemeClr val="lt1"/>
+          </a:fontRef>
+        </p:style>
+        <p:txBody>
+          <a:bodyPr rtlCol="0" anchor="ctr" lIns="0" rIns="0" tIns="0" bIns="0"/>
+          <a:lstStyle/>
+          <a:p>
+            <a:pPr algn="ctr"/>
+          </a:p>
+        </p:txBody>
+      </p:sp>
+      <p:sp>
+        <p:nvSpPr>
+          <p:cNvPr id="17" name="TextBox 16"/>
           <p:cNvSpPr txBox="1"/>
           <p:nvPr/>
         </p:nvSpPr>
         <p:spPr>
           <a:xfrm>
-            <a:off x="4429658" y="1965960"/>
-            <a:ext cx="3332378" cy="552450"/>
+            <a:off x="4664964" y="5897880"/>
+            <a:ext cx="1615440" cy="276225"/>
           </a:xfrm>
           <a:prstGeom prst="rect">
             <a:avLst/>
@@ -6015,169 +6711,33 @@
               </a:lnSpc>
             </a:pPr>
             <a:r>
-              <a:rPr sz="1500" b="0">
-                <a:solidFill>
-                  <a:srgbClr val="475569"/>
+              <a:rPr sz="1500" b="1">
+                <a:solidFill>
+                  <a:srgbClr val="0F172A"/>
                 </a:solidFill>
                 <a:latin typeface="Noto Sans JP"/>
                 <a:ea typeface="Noto Sans JP"/>
                 <a:cs typeface="Noto Sans JP"/>
               </a:rPr>
-              <a:t>飲み薬だけでなく、塗り薬や</a:t>
-            </a:r>
-          </a:p>
-          <a:p>
-            <a:pPr algn="l">
-              <a:lnSpc>
-                <a:spcPct val="100000"/>
-              </a:lnSpc>
-            </a:pPr>
-            <a:r>
-              <a:rPr sz="1500" b="0">
-                <a:solidFill>
-                  <a:srgbClr val="475569"/>
-                </a:solidFill>
-                <a:latin typeface="Noto Sans JP"/>
-                <a:ea typeface="Noto Sans JP"/>
-                <a:cs typeface="Noto Sans JP"/>
-              </a:rPr>
-              <a:t>化粧品との組み合わせも確かめられる</a:t>
-            </a:r>
-          </a:p>
-        </p:txBody>
-      </p:sp>
-      <p:sp>
-        <p:nvSpPr>
-          <p:cNvPr id="14" name="Rounded Rectangle 13"/>
+              <a:t>買わなくて大丈夫</a:t>
+            </a:r>
+          </a:p>
+        </p:txBody>
+      </p:sp>
+      <p:sp>
+        <p:nvSpPr>
+          <p:cNvPr id="18" name="Rounded Rectangle 17"/>
           <p:cNvSpPr/>
           <p:nvPr/>
         </p:nvSpPr>
         <p:spPr>
           <a:xfrm>
-            <a:off x="4429658" y="2697479"/>
-            <a:ext cx="1781984" cy="3392424"/>
+            <a:off x="6554724" y="6007608"/>
+            <a:ext cx="173736" cy="173736"/>
           </a:xfrm>
           <a:prstGeom prst="roundRect">
             <a:avLst>
-              <a:gd name="adj" fmla="val 7183"/>
-            </a:avLst>
-          </a:prstGeom>
-          <a:solidFill>
-            <a:srgbClr val="FFFFFF"/>
-          </a:solidFill>
-          <a:ln w="12700">
-            <a:solidFill>
-              <a:srgbClr val="D9DFE7"/>
-            </a:solidFill>
-          </a:ln>
-          <a:effectLst/>
-        </p:spPr>
-        <p:style>
-          <a:lnRef idx="1">
-            <a:schemeClr val="accent1"/>
-          </a:lnRef>
-          <a:fillRef idx="3">
-            <a:schemeClr val="accent1"/>
-          </a:fillRef>
-          <a:effectRef idx="2">
-            <a:schemeClr val="accent1"/>
-          </a:effectRef>
-          <a:fontRef idx="minor">
-            <a:schemeClr val="lt1"/>
-          </a:fontRef>
-        </p:style>
-        <p:txBody>
-          <a:bodyPr rtlCol="0" anchor="ctr" lIns="0" rIns="0" tIns="0" bIns="0"/>
-          <a:lstStyle/>
-          <a:p>
-            <a:pPr algn="ctr"/>
-          </a:p>
-        </p:txBody>
-      </p:sp>
-      <p:pic>
-        <p:nvPicPr>
-          <p:cNvPr id="15" name="Picture 14" descr="red-real.png"/>
-          <p:cNvPicPr>
-            <a:picLocks noChangeAspect="1"/>
-          </p:cNvPicPr>
-          <p:nvPr/>
-        </p:nvPicPr>
-        <p:blipFill>
-          <a:blip r:embed="rId3"/>
-          <a:stretch>
-            <a:fillRect/>
-          </a:stretch>
-        </p:blipFill>
-        <p:spPr>
-          <a:xfrm>
-            <a:off x="4502810" y="2770632"/>
-            <a:ext cx="1635680" cy="3246120"/>
-          </a:xfrm>
-          <a:prstGeom prst="rect">
-            <a:avLst/>
-          </a:prstGeom>
-        </p:spPr>
-      </p:pic>
-      <p:sp>
-        <p:nvSpPr>
-          <p:cNvPr id="16" name="Rounded Rectangle 15"/>
-          <p:cNvSpPr/>
-          <p:nvPr/>
-        </p:nvSpPr>
-        <p:spPr>
-          <a:xfrm>
-            <a:off x="4560059" y="4406676"/>
-            <a:ext cx="686986" cy="142829"/>
-          </a:xfrm>
-          <a:prstGeom prst="roundRect">
-            <a:avLst>
-              <a:gd name="adj" fmla="val 32010"/>
-            </a:avLst>
-          </a:prstGeom>
-          <a:noFill/>
-          <a:ln w="22225">
-            <a:solidFill>
-              <a:srgbClr val="DC2626"/>
-            </a:solidFill>
-          </a:ln>
-          <a:effectLst/>
-        </p:spPr>
-        <p:style>
-          <a:lnRef idx="1">
-            <a:schemeClr val="accent1"/>
-          </a:lnRef>
-          <a:fillRef idx="3">
-            <a:schemeClr val="accent1"/>
-          </a:fillRef>
-          <a:effectRef idx="2">
-            <a:schemeClr val="accent1"/>
-          </a:effectRef>
-          <a:fontRef idx="minor">
-            <a:schemeClr val="lt1"/>
-          </a:fontRef>
-        </p:style>
-        <p:txBody>
-          <a:bodyPr rtlCol="0" anchor="ctr" lIns="0" rIns="0" tIns="0" bIns="0"/>
-          <a:lstStyle/>
-          <a:p>
-            <a:pPr algn="ctr"/>
-          </a:p>
-        </p:txBody>
-      </p:sp>
-      <p:sp>
-        <p:nvSpPr>
-          <p:cNvPr id="17" name="Rounded Rectangle 16"/>
-          <p:cNvSpPr/>
-          <p:nvPr/>
-        </p:nvSpPr>
-        <p:spPr>
-          <a:xfrm>
-            <a:off x="4541771" y="4123212"/>
-            <a:ext cx="857504" cy="256032"/>
-          </a:xfrm>
-          <a:prstGeom prst="roundRect">
-            <a:avLst>
-              <a:gd name="adj" fmla="val 14285"/>
+              <a:gd name="adj" fmla="val 50000"/>
             </a:avLst>
           </a:prstGeom>
           <a:solidFill>
@@ -6203,690 +6763,22 @@
           </a:fontRef>
         </p:style>
         <p:txBody>
-          <a:bodyPr rtlCol="0" anchor="ctr" lIns="0" rIns="0" tIns="0" bIns="0" wrap="none"/>
+          <a:bodyPr rtlCol="0" anchor="ctr" lIns="0" rIns="0" tIns="0" bIns="0"/>
           <a:lstStyle/>
           <a:p>
             <a:pPr algn="ctr"/>
-            <a:r>
-              <a:rPr sz="1400" b="1">
-                <a:solidFill>
-                  <a:srgbClr val="FFFFFF"/>
-                </a:solidFill>
-                <a:latin typeface="Noto Sans JP"/>
-                <a:ea typeface="Noto Sans JP"/>
-                <a:cs typeface="Noto Sans JP"/>
-              </a:rPr>
-              <a:t>店の商品</a:t>
-            </a:r>
-          </a:p>
-        </p:txBody>
-      </p:sp>
-      <p:sp>
-        <p:nvSpPr>
-          <p:cNvPr id="18" name="Rounded Rectangle 17"/>
-          <p:cNvSpPr/>
-          <p:nvPr/>
-        </p:nvSpPr>
-        <p:spPr>
-          <a:xfrm>
-            <a:off x="4560059" y="5354543"/>
-            <a:ext cx="1521183" cy="305135"/>
-          </a:xfrm>
-          <a:prstGeom prst="roundRect">
-            <a:avLst>
-              <a:gd name="adj" fmla="val 14983"/>
-            </a:avLst>
-          </a:prstGeom>
-          <a:noFill/>
-          <a:ln w="22225">
-            <a:solidFill>
-              <a:srgbClr val="DC2626"/>
-            </a:solidFill>
-          </a:ln>
-          <a:effectLst/>
-        </p:spPr>
-        <p:style>
-          <a:lnRef idx="1">
-            <a:schemeClr val="accent1"/>
-          </a:lnRef>
-          <a:fillRef idx="3">
-            <a:schemeClr val="accent1"/>
-          </a:fillRef>
-          <a:effectRef idx="2">
-            <a:schemeClr val="accent1"/>
-          </a:effectRef>
-          <a:fontRef idx="minor">
-            <a:schemeClr val="lt1"/>
-          </a:fontRef>
-        </p:style>
-        <p:txBody>
-          <a:bodyPr rtlCol="0" anchor="ctr" lIns="0" rIns="0" tIns="0" bIns="0"/>
-          <a:lstStyle/>
-          <a:p>
-            <a:pPr algn="ctr"/>
-          </a:p>
-        </p:txBody>
-      </p:sp>
-      <p:sp>
-        <p:nvSpPr>
-          <p:cNvPr id="19" name="Rounded Rectangle 18"/>
-          <p:cNvSpPr/>
-          <p:nvPr/>
-        </p:nvSpPr>
-        <p:spPr>
-          <a:xfrm>
-            <a:off x="4541771" y="5071079"/>
-            <a:ext cx="679704" cy="256032"/>
-          </a:xfrm>
-          <a:prstGeom prst="roundRect">
-            <a:avLst>
-              <a:gd name="adj" fmla="val 14285"/>
-            </a:avLst>
-          </a:prstGeom>
-          <a:solidFill>
-            <a:srgbClr val="DC2626"/>
-          </a:solidFill>
-          <a:ln>
-            <a:noFill/>
-          </a:ln>
-          <a:effectLst/>
-        </p:spPr>
-        <p:style>
-          <a:lnRef idx="1">
-            <a:schemeClr val="accent1"/>
-          </a:lnRef>
-          <a:fillRef idx="3">
-            <a:schemeClr val="accent1"/>
-          </a:fillRef>
-          <a:effectRef idx="2">
-            <a:schemeClr val="accent1"/>
-          </a:effectRef>
-          <a:fontRef idx="minor">
-            <a:schemeClr val="lt1"/>
-          </a:fontRef>
-        </p:style>
-        <p:txBody>
-          <a:bodyPr rtlCol="0" anchor="ctr" lIns="0" rIns="0" tIns="0" bIns="0" wrap="none"/>
-          <a:lstStyle/>
-          <a:p>
-            <a:pPr algn="ctr"/>
-            <a:r>
-              <a:rPr sz="1400" b="1">
-                <a:solidFill>
-                  <a:srgbClr val="FFFFFF"/>
-                </a:solidFill>
-                <a:latin typeface="Noto Sans JP"/>
-                <a:ea typeface="Noto Sans JP"/>
-                <a:cs typeface="Noto Sans JP"/>
-              </a:rPr>
-              <a:t>家の薬</a:t>
-            </a:r>
-          </a:p>
-        </p:txBody>
-      </p:sp>
-      <p:sp>
-        <p:nvSpPr>
-          <p:cNvPr id="20" name="TextBox 19"/>
+          </a:p>
+        </p:txBody>
+      </p:sp>
+      <p:sp>
+        <p:nvSpPr>
+          <p:cNvPr id="19" name="TextBox 18"/>
           <p:cNvSpPr txBox="1"/>
           <p:nvPr/>
         </p:nvSpPr>
         <p:spPr>
           <a:xfrm>
-            <a:off x="8173516" y="1188720"/>
-            <a:ext cx="3332378" cy="736600"/>
-          </a:xfrm>
-          <a:prstGeom prst="rect">
-            <a:avLst/>
-          </a:prstGeom>
-          <a:noFill/>
-        </p:spPr>
-        <p:txBody>
-          <a:bodyPr wrap="none" lIns="0" rIns="0" tIns="0" bIns="0" anchor="t">
-            <a:spAutoFit/>
-          </a:bodyPr>
-          <a:lstStyle/>
-          <a:p>
-            <a:pPr algn="l">
-              <a:lnSpc>
-                <a:spcPct val="100000"/>
-              </a:lnSpc>
-            </a:pPr>
-            <a:r>
-              <a:rPr sz="2000" b="1">
-                <a:solidFill>
-                  <a:srgbClr val="0F172A"/>
-                </a:solidFill>
-                <a:latin typeface="Noto Sans JP"/>
-                <a:ea typeface="Noto Sans JP"/>
-                <a:cs typeface="Noto Sans JP"/>
-              </a:rPr>
-              <a:t>薬や化粧品を使う順番や、</a:t>
-            </a:r>
-          </a:p>
-          <a:p>
-            <a:pPr algn="l">
-              <a:lnSpc>
-                <a:spcPct val="100000"/>
-              </a:lnSpc>
-            </a:pPr>
-            <a:r>
-              <a:rPr sz="2000" b="1">
-                <a:solidFill>
-                  <a:srgbClr val="0F172A"/>
-                </a:solidFill>
-                <a:latin typeface="Noto Sans JP"/>
-                <a:ea typeface="Noto Sans JP"/>
-                <a:cs typeface="Noto Sans JP"/>
-              </a:rPr>
-              <a:t>詳しい使い方がわかる</a:t>
-            </a:r>
-          </a:p>
-        </p:txBody>
-      </p:sp>
-      <p:sp>
-        <p:nvSpPr>
-          <p:cNvPr id="21" name="TextBox 20"/>
-          <p:cNvSpPr txBox="1"/>
-          <p:nvPr/>
-        </p:nvSpPr>
-        <p:spPr>
-          <a:xfrm>
-            <a:off x="8173516" y="1965960"/>
-            <a:ext cx="3332378" cy="552450"/>
-          </a:xfrm>
-          <a:prstGeom prst="rect">
-            <a:avLst/>
-          </a:prstGeom>
-          <a:noFill/>
-        </p:spPr>
-        <p:txBody>
-          <a:bodyPr wrap="none" lIns="0" rIns="0" tIns="0" bIns="0" anchor="t">
-            <a:spAutoFit/>
-          </a:bodyPr>
-          <a:lstStyle/>
-          <a:p>
-            <a:pPr algn="l">
-              <a:lnSpc>
-                <a:spcPct val="100000"/>
-              </a:lnSpc>
-            </a:pPr>
-            <a:r>
-              <a:rPr sz="1500" b="0">
-                <a:solidFill>
-                  <a:srgbClr val="475569"/>
-                </a:solidFill>
-                <a:latin typeface="Noto Sans JP"/>
-                <a:ea typeface="Noto Sans JP"/>
-                <a:cs typeface="Noto Sans JP"/>
-              </a:rPr>
-              <a:t>処方薬と化粧品を一緒に使う日も、</a:t>
-            </a:r>
-          </a:p>
-          <a:p>
-            <a:pPr algn="l">
-              <a:lnSpc>
-                <a:spcPct val="100000"/>
-              </a:lnSpc>
-            </a:pPr>
-            <a:r>
-              <a:rPr sz="1500" b="0">
-                <a:solidFill>
-                  <a:srgbClr val="475569"/>
-                </a:solidFill>
-                <a:latin typeface="Noto Sans JP"/>
-                <a:ea typeface="Noto Sans JP"/>
-                <a:cs typeface="Noto Sans JP"/>
-              </a:rPr>
-              <a:t>どれから、どう塗ればいいか迷わない</a:t>
-            </a:r>
-          </a:p>
-        </p:txBody>
-      </p:sp>
-      <p:sp>
-        <p:nvSpPr>
-          <p:cNvPr id="22" name="Rounded Rectangle 21"/>
-          <p:cNvSpPr/>
-          <p:nvPr/>
-        </p:nvSpPr>
-        <p:spPr>
-          <a:xfrm>
-            <a:off x="8173516" y="2697479"/>
-            <a:ext cx="1715709" cy="3392424"/>
-          </a:xfrm>
-          <a:prstGeom prst="roundRect">
-            <a:avLst>
-              <a:gd name="adj" fmla="val 7461"/>
-            </a:avLst>
-          </a:prstGeom>
-          <a:solidFill>
-            <a:srgbClr val="FFFFFF"/>
-          </a:solidFill>
-          <a:ln w="12700">
-            <a:solidFill>
-              <a:srgbClr val="D9DFE7"/>
-            </a:solidFill>
-          </a:ln>
-          <a:effectLst/>
-        </p:spPr>
-        <p:style>
-          <a:lnRef idx="1">
-            <a:schemeClr val="accent1"/>
-          </a:lnRef>
-          <a:fillRef idx="3">
-            <a:schemeClr val="accent1"/>
-          </a:fillRef>
-          <a:effectRef idx="2">
-            <a:schemeClr val="accent1"/>
-          </a:effectRef>
-          <a:fontRef idx="minor">
-            <a:schemeClr val="lt1"/>
-          </a:fontRef>
-        </p:style>
-        <p:txBody>
-          <a:bodyPr rtlCol="0" anchor="ctr" lIns="0" rIns="0" tIns="0" bIns="0"/>
-          <a:lstStyle/>
-          <a:p>
-            <a:pPr algn="ctr"/>
-          </a:p>
-        </p:txBody>
-      </p:sp>
-      <p:pic>
-        <p:nvPicPr>
-          <p:cNvPr id="23" name="Picture 22" descr="routine-crop.jpg"/>
-          <p:cNvPicPr>
-            <a:picLocks noChangeAspect="1"/>
-          </p:cNvPicPr>
-          <p:nvPr/>
-        </p:nvPicPr>
-        <p:blipFill>
-          <a:blip r:embed="rId4"/>
-          <a:stretch>
-            <a:fillRect/>
-          </a:stretch>
-        </p:blipFill>
-        <p:spPr>
-          <a:xfrm>
-            <a:off x="8246668" y="2770632"/>
-            <a:ext cx="1569405" cy="3246120"/>
-          </a:xfrm>
-          <a:prstGeom prst="rect">
-            <a:avLst/>
-          </a:prstGeom>
-        </p:spPr>
-      </p:pic>
-      <p:sp>
-        <p:nvSpPr>
-          <p:cNvPr id="24" name="Rounded Rectangle 23"/>
-          <p:cNvSpPr/>
-          <p:nvPr/>
-        </p:nvSpPr>
-        <p:spPr>
-          <a:xfrm>
-            <a:off x="8274918" y="3082259"/>
-            <a:ext cx="204022" cy="2382652"/>
-          </a:xfrm>
-          <a:prstGeom prst="roundRect">
-            <a:avLst>
-              <a:gd name="adj" fmla="val 22409"/>
-            </a:avLst>
-          </a:prstGeom>
-          <a:noFill/>
-          <a:ln w="22225">
-            <a:solidFill>
-              <a:srgbClr val="1B2A4A"/>
-            </a:solidFill>
-          </a:ln>
-          <a:effectLst/>
-        </p:spPr>
-        <p:style>
-          <a:lnRef idx="1">
-            <a:schemeClr val="accent1"/>
-          </a:lnRef>
-          <a:fillRef idx="3">
-            <a:schemeClr val="accent1"/>
-          </a:fillRef>
-          <a:effectRef idx="2">
-            <a:schemeClr val="accent1"/>
-          </a:effectRef>
-          <a:fontRef idx="minor">
-            <a:schemeClr val="lt1"/>
-          </a:fontRef>
-        </p:style>
-        <p:txBody>
-          <a:bodyPr rtlCol="0" anchor="ctr" lIns="0" rIns="0" tIns="0" bIns="0"/>
-          <a:lstStyle/>
-          <a:p>
-            <a:pPr algn="ctr"/>
-          </a:p>
-        </p:txBody>
-      </p:sp>
-      <p:sp>
-        <p:nvSpPr>
-          <p:cNvPr id="25" name="Rounded Rectangle 24"/>
-          <p:cNvSpPr/>
-          <p:nvPr/>
-        </p:nvSpPr>
-        <p:spPr>
-          <a:xfrm>
-            <a:off x="8256630" y="2798795"/>
-            <a:ext cx="857504" cy="256032"/>
-          </a:xfrm>
-          <a:prstGeom prst="roundRect">
-            <a:avLst>
-              <a:gd name="adj" fmla="val 14285"/>
-            </a:avLst>
-          </a:prstGeom>
-          <a:solidFill>
-            <a:srgbClr val="1B2A4A"/>
-          </a:solidFill>
-          <a:ln>
-            <a:noFill/>
-          </a:ln>
-          <a:effectLst/>
-        </p:spPr>
-        <p:style>
-          <a:lnRef idx="1">
-            <a:schemeClr val="accent1"/>
-          </a:lnRef>
-          <a:fillRef idx="3">
-            <a:schemeClr val="accent1"/>
-          </a:fillRef>
-          <a:effectRef idx="2">
-            <a:schemeClr val="accent1"/>
-          </a:effectRef>
-          <a:fontRef idx="minor">
-            <a:schemeClr val="lt1"/>
-          </a:fontRef>
-        </p:style>
-        <p:txBody>
-          <a:bodyPr rtlCol="0" anchor="ctr" lIns="0" rIns="0" tIns="0" bIns="0" wrap="none"/>
-          <a:lstStyle/>
-          <a:p>
-            <a:pPr algn="ctr"/>
-            <a:r>
-              <a:rPr sz="1400" b="1">
-                <a:solidFill>
-                  <a:srgbClr val="FFFFFF"/>
-                </a:solidFill>
-                <a:latin typeface="Noto Sans JP"/>
-                <a:ea typeface="Noto Sans JP"/>
-                <a:cs typeface="Noto Sans JP"/>
-              </a:rPr>
-              <a:t>塗る順番</a:t>
-            </a:r>
-          </a:p>
-        </p:txBody>
-      </p:sp>
-      <p:sp>
-        <p:nvSpPr>
-          <p:cNvPr id="26" name="TextBox 25"/>
-          <p:cNvSpPr txBox="1"/>
-          <p:nvPr/>
-        </p:nvSpPr>
-        <p:spPr>
-          <a:xfrm>
-            <a:off x="685800" y="6309360"/>
-            <a:ext cx="1463040" cy="276225"/>
-          </a:xfrm>
-          <a:prstGeom prst="rect">
-            <a:avLst/>
-          </a:prstGeom>
-          <a:noFill/>
-        </p:spPr>
-        <p:txBody>
-          <a:bodyPr wrap="none" lIns="0" rIns="0" tIns="0" bIns="0" anchor="t">
-            <a:spAutoFit/>
-          </a:bodyPr>
-          <a:lstStyle/>
-          <a:p>
-            <a:pPr algn="l">
-              <a:lnSpc>
-                <a:spcPct val="100000"/>
-              </a:lnSpc>
-            </a:pPr>
-            <a:r>
-              <a:rPr sz="1500" b="1">
-                <a:solidFill>
-                  <a:srgbClr val="475569"/>
-                </a:solidFill>
-                <a:latin typeface="Noto Sans JP"/>
-                <a:ea typeface="Noto Sans JP"/>
-                <a:cs typeface="Noto Sans JP"/>
-              </a:rPr>
-              <a:t>判定は3色</a:t>
-            </a:r>
-          </a:p>
-        </p:txBody>
-      </p:sp>
-      <p:sp>
-        <p:nvSpPr>
-          <p:cNvPr id="27" name="Rounded Rectangle 26"/>
-          <p:cNvSpPr/>
-          <p:nvPr/>
-        </p:nvSpPr>
-        <p:spPr>
-          <a:xfrm>
-            <a:off x="1882140" y="6419088"/>
-            <a:ext cx="173736" cy="173736"/>
-          </a:xfrm>
-          <a:prstGeom prst="roundRect">
-            <a:avLst>
-              <a:gd name="adj" fmla="val 50000"/>
-            </a:avLst>
-          </a:prstGeom>
-          <a:solidFill>
-            <a:srgbClr val="2563EB"/>
-          </a:solidFill>
-          <a:ln>
-            <a:noFill/>
-          </a:ln>
-          <a:effectLst/>
-        </p:spPr>
-        <p:style>
-          <a:lnRef idx="1">
-            <a:schemeClr val="accent1"/>
-          </a:lnRef>
-          <a:fillRef idx="3">
-            <a:schemeClr val="accent1"/>
-          </a:fillRef>
-          <a:effectRef idx="2">
-            <a:schemeClr val="accent1"/>
-          </a:effectRef>
-          <a:fontRef idx="minor">
-            <a:schemeClr val="lt1"/>
-          </a:fontRef>
-        </p:style>
-        <p:txBody>
-          <a:bodyPr rtlCol="0" anchor="ctr" lIns="0" rIns="0" tIns="0" bIns="0"/>
-          <a:lstStyle/>
-          <a:p>
-            <a:pPr algn="ctr"/>
-          </a:p>
-        </p:txBody>
-      </p:sp>
-      <p:sp>
-        <p:nvSpPr>
-          <p:cNvPr id="28" name="TextBox 27"/>
-          <p:cNvSpPr txBox="1"/>
-          <p:nvPr/>
-        </p:nvSpPr>
-        <p:spPr>
-          <a:xfrm>
-            <a:off x="2138172" y="6309360"/>
-            <a:ext cx="1996440" cy="276225"/>
-          </a:xfrm>
-          <a:prstGeom prst="rect">
-            <a:avLst/>
-          </a:prstGeom>
-          <a:noFill/>
-        </p:spPr>
-        <p:txBody>
-          <a:bodyPr wrap="none" lIns="0" rIns="0" tIns="0" bIns="0" anchor="t">
-            <a:spAutoFit/>
-          </a:bodyPr>
-          <a:lstStyle/>
-          <a:p>
-            <a:pPr algn="l">
-              <a:lnSpc>
-                <a:spcPct val="100000"/>
-              </a:lnSpc>
-            </a:pPr>
-            <a:r>
-              <a:rPr sz="1500" b="1">
-                <a:solidFill>
-                  <a:srgbClr val="0F172A"/>
-                </a:solidFill>
-                <a:latin typeface="Noto Sans JP"/>
-                <a:ea typeface="Noto Sans JP"/>
-                <a:cs typeface="Noto Sans JP"/>
-              </a:rPr>
-              <a:t>買っても問題なさそう</a:t>
-            </a:r>
-          </a:p>
-        </p:txBody>
-      </p:sp>
-      <p:sp>
-        <p:nvSpPr>
-          <p:cNvPr id="29" name="Rounded Rectangle 28"/>
-          <p:cNvSpPr/>
-          <p:nvPr/>
-        </p:nvSpPr>
-        <p:spPr>
-          <a:xfrm>
-            <a:off x="4408932" y="6419088"/>
-            <a:ext cx="173736" cy="173736"/>
-          </a:xfrm>
-          <a:prstGeom prst="roundRect">
-            <a:avLst>
-              <a:gd name="adj" fmla="val 50000"/>
-            </a:avLst>
-          </a:prstGeom>
-          <a:solidFill>
-            <a:srgbClr val="D97706"/>
-          </a:solidFill>
-          <a:ln>
-            <a:noFill/>
-          </a:ln>
-          <a:effectLst/>
-        </p:spPr>
-        <p:style>
-          <a:lnRef idx="1">
-            <a:schemeClr val="accent1"/>
-          </a:lnRef>
-          <a:fillRef idx="3">
-            <a:schemeClr val="accent1"/>
-          </a:fillRef>
-          <a:effectRef idx="2">
-            <a:schemeClr val="accent1"/>
-          </a:effectRef>
-          <a:fontRef idx="minor">
-            <a:schemeClr val="lt1"/>
-          </a:fontRef>
-        </p:style>
-        <p:txBody>
-          <a:bodyPr rtlCol="0" anchor="ctr" lIns="0" rIns="0" tIns="0" bIns="0"/>
-          <a:lstStyle/>
-          <a:p>
-            <a:pPr algn="ctr"/>
-          </a:p>
-        </p:txBody>
-      </p:sp>
-      <p:sp>
-        <p:nvSpPr>
-          <p:cNvPr id="30" name="TextBox 29"/>
-          <p:cNvSpPr txBox="1"/>
-          <p:nvPr/>
-        </p:nvSpPr>
-        <p:spPr>
-          <a:xfrm>
-            <a:off x="4664964" y="6309360"/>
-            <a:ext cx="1615440" cy="276225"/>
-          </a:xfrm>
-          <a:prstGeom prst="rect">
-            <a:avLst/>
-          </a:prstGeom>
-          <a:noFill/>
-        </p:spPr>
-        <p:txBody>
-          <a:bodyPr wrap="none" lIns="0" rIns="0" tIns="0" bIns="0" anchor="t">
-            <a:spAutoFit/>
-          </a:bodyPr>
-          <a:lstStyle/>
-          <a:p>
-            <a:pPr algn="l">
-              <a:lnSpc>
-                <a:spcPct val="100000"/>
-              </a:lnSpc>
-            </a:pPr>
-            <a:r>
-              <a:rPr sz="1500" b="1">
-                <a:solidFill>
-                  <a:srgbClr val="0F172A"/>
-                </a:solidFill>
-                <a:latin typeface="Noto Sans JP"/>
-                <a:ea typeface="Noto Sans JP"/>
-                <a:cs typeface="Noto Sans JP"/>
-              </a:rPr>
-              <a:t>買わなくて大丈夫</a:t>
-            </a:r>
-          </a:p>
-        </p:txBody>
-      </p:sp>
-      <p:sp>
-        <p:nvSpPr>
-          <p:cNvPr id="31" name="Rounded Rectangle 30"/>
-          <p:cNvSpPr/>
-          <p:nvPr/>
-        </p:nvSpPr>
-        <p:spPr>
-          <a:xfrm>
-            <a:off x="6554724" y="6419088"/>
-            <a:ext cx="173736" cy="173736"/>
-          </a:xfrm>
-          <a:prstGeom prst="roundRect">
-            <a:avLst>
-              <a:gd name="adj" fmla="val 50000"/>
-            </a:avLst>
-          </a:prstGeom>
-          <a:solidFill>
-            <a:srgbClr val="DC2626"/>
-          </a:solidFill>
-          <a:ln>
-            <a:noFill/>
-          </a:ln>
-          <a:effectLst/>
-        </p:spPr>
-        <p:style>
-          <a:lnRef idx="1">
-            <a:schemeClr val="accent1"/>
-          </a:lnRef>
-          <a:fillRef idx="3">
-            <a:schemeClr val="accent1"/>
-          </a:fillRef>
-          <a:effectRef idx="2">
-            <a:schemeClr val="accent1"/>
-          </a:effectRef>
-          <a:fontRef idx="minor">
-            <a:schemeClr val="lt1"/>
-          </a:fontRef>
-        </p:style>
-        <p:txBody>
-          <a:bodyPr rtlCol="0" anchor="ctr" lIns="0" rIns="0" tIns="0" bIns="0"/>
-          <a:lstStyle/>
-          <a:p>
-            <a:pPr algn="ctr"/>
-          </a:p>
-        </p:txBody>
-      </p:sp>
-      <p:sp>
-        <p:nvSpPr>
-          <p:cNvPr id="32" name="TextBox 31"/>
-          <p:cNvSpPr txBox="1"/>
-          <p:nvPr/>
-        </p:nvSpPr>
-        <p:spPr>
-          <a:xfrm>
-            <a:off x="6810756" y="6309360"/>
+            <a:off x="6810756" y="5897880"/>
             <a:ext cx="1043940" cy="276225"/>
           </a:xfrm>
           <a:prstGeom prst="rect">
@@ -6953,8 +6845,8 @@
         </p:nvSpPr>
         <p:spPr>
           <a:xfrm>
-            <a:off x="685800" y="457200"/>
-            <a:ext cx="5486400" cy="478789"/>
+            <a:off x="685800" y="685800"/>
+            <a:ext cx="7315200" cy="368300"/>
           </a:xfrm>
           <a:prstGeom prst="rect">
             <a:avLst/>
@@ -6973,29 +6865,70 @@
               </a:lnSpc>
             </a:pPr>
             <a:r>
-              <a:rPr sz="2600" b="1">
-                <a:solidFill>
-                  <a:srgbClr val="1B2A4A"/>
+              <a:rPr sz="2000" b="1">
+                <a:solidFill>
+                  <a:srgbClr val="2563EB"/>
                 </a:solidFill>
                 <a:latin typeface="Noto Sans JP"/>
                 <a:ea typeface="Noto Sans JP"/>
                 <a:cs typeface="Noto Sans JP"/>
               </a:rPr>
-              <a:t>しくみ</a:t>
-            </a:r>
-          </a:p>
-        </p:txBody>
-      </p:sp>
-      <p:sp>
-        <p:nvSpPr>
-          <p:cNvPr id="3" name="Rectangle 2"/>
+              <a:t>できること 2</a:t>
+            </a:r>
+          </a:p>
+        </p:txBody>
+      </p:sp>
+      <p:sp>
+        <p:nvSpPr>
+          <p:cNvPr id="3" name="TextBox 2"/>
+          <p:cNvSpPr txBox="1"/>
+          <p:nvPr/>
+        </p:nvSpPr>
+        <p:spPr>
+          <a:xfrm>
+            <a:off x="685800" y="1600200"/>
+            <a:ext cx="6858000" cy="405130"/>
+          </a:xfrm>
+          <a:prstGeom prst="rect">
+            <a:avLst/>
+          </a:prstGeom>
+          <a:noFill/>
+        </p:spPr>
+        <p:txBody>
+          <a:bodyPr wrap="none" lIns="0" rIns="0" tIns="0" bIns="0" anchor="t">
+            <a:spAutoFit/>
+          </a:bodyPr>
+          <a:lstStyle/>
+          <a:p>
+            <a:pPr algn="l">
+              <a:lnSpc>
+                <a:spcPct val="100000"/>
+              </a:lnSpc>
+            </a:pPr>
+            <a:r>
+              <a:rPr sz="2200" b="1">
+                <a:solidFill>
+                  <a:srgbClr val="94A3B8"/>
+                </a:solidFill>
+                <a:latin typeface="Noto Sans JP"/>
+                <a:ea typeface="Noto Sans JP"/>
+                <a:cs typeface="Noto Sans JP"/>
+              </a:rPr>
+              <a:t>「薬を塗った肌に、使っていい？」</a:t>
+            </a:r>
+          </a:p>
+        </p:txBody>
+      </p:sp>
+      <p:sp>
+        <p:nvSpPr>
+          <p:cNvPr id="4" name="Rectangle 3"/>
           <p:cNvSpPr/>
           <p:nvPr/>
         </p:nvSpPr>
         <p:spPr>
           <a:xfrm>
-            <a:off x="685800" y="987552"/>
-            <a:ext cx="10820095" cy="20116"/>
+            <a:off x="685800" y="2240280"/>
+            <a:ext cx="548640" cy="45720"/>
           </a:xfrm>
           <a:prstGeom prst="rect">
             <a:avLst/>
@@ -7032,20 +6965,258 @@
       </p:sp>
       <p:sp>
         <p:nvSpPr>
-          <p:cNvPr id="4" name="Rectangle 3"/>
-          <p:cNvSpPr/>
-          <p:nvPr/>
-        </p:nvSpPr>
-        <p:spPr>
-          <a:xfrm>
-            <a:off x="902970" y="1618488"/>
-            <a:ext cx="22860" cy="3383280"/>
+          <p:cNvPr id="5" name="TextBox 4"/>
+          <p:cNvSpPr txBox="1"/>
+          <p:nvPr/>
+        </p:nvSpPr>
+        <p:spPr>
+          <a:xfrm>
+            <a:off x="685800" y="2514600"/>
+            <a:ext cx="6858000" cy="1325880"/>
           </a:xfrm>
           <a:prstGeom prst="rect">
             <a:avLst/>
           </a:prstGeom>
+          <a:noFill/>
+        </p:spPr>
+        <p:txBody>
+          <a:bodyPr wrap="none" lIns="0" rIns="0" tIns="0" bIns="0" anchor="t">
+            <a:spAutoFit/>
+          </a:bodyPr>
+          <a:lstStyle/>
+          <a:p>
+            <a:pPr algn="l">
+              <a:lnSpc>
+                <a:spcPct val="100000"/>
+              </a:lnSpc>
+            </a:pPr>
+            <a:r>
+              <a:rPr sz="3600" b="1">
+                <a:solidFill>
+                  <a:srgbClr val="0F172A"/>
+                </a:solidFill>
+                <a:latin typeface="Noto Sans JP"/>
+                <a:ea typeface="Noto Sans JP"/>
+                <a:cs typeface="Noto Sans JP"/>
+              </a:rPr>
+              <a:t>使っている薬との相性が、</a:t>
+            </a:r>
+          </a:p>
+          <a:p>
+            <a:pPr algn="l">
+              <a:lnSpc>
+                <a:spcPct val="100000"/>
+              </a:lnSpc>
+            </a:pPr>
+            <a:r>
+              <a:rPr sz="3600" b="1">
+                <a:solidFill>
+                  <a:srgbClr val="0F172A"/>
+                </a:solidFill>
+                <a:latin typeface="Noto Sans JP"/>
+                <a:ea typeface="Noto Sans JP"/>
+                <a:cs typeface="Noto Sans JP"/>
+              </a:rPr>
+              <a:t>買う前にわかる</a:t>
+            </a:r>
+          </a:p>
+        </p:txBody>
+      </p:sp>
+      <p:sp>
+        <p:nvSpPr>
+          <p:cNvPr id="6" name="TextBox 5"/>
+          <p:cNvSpPr txBox="1"/>
+          <p:nvPr/>
+        </p:nvSpPr>
+        <p:spPr>
+          <a:xfrm>
+            <a:off x="685800" y="4023360"/>
+            <a:ext cx="6858000" cy="736600"/>
+          </a:xfrm>
+          <a:prstGeom prst="rect">
+            <a:avLst/>
+          </a:prstGeom>
+          <a:noFill/>
+        </p:spPr>
+        <p:txBody>
+          <a:bodyPr wrap="none" lIns="0" rIns="0" tIns="0" bIns="0" anchor="t">
+            <a:spAutoFit/>
+          </a:bodyPr>
+          <a:lstStyle/>
+          <a:p>
+            <a:pPr algn="l">
+              <a:lnSpc>
+                <a:spcPct val="100000"/>
+              </a:lnSpc>
+            </a:pPr>
+            <a:r>
+              <a:rPr sz="2000" b="0">
+                <a:solidFill>
+                  <a:srgbClr val="475569"/>
+                </a:solidFill>
+                <a:latin typeface="Noto Sans JP"/>
+                <a:ea typeface="Noto Sans JP"/>
+                <a:cs typeface="Noto Sans JP"/>
+              </a:rPr>
+              <a:t>飲み薬だけでなく、塗り薬や</a:t>
+            </a:r>
+          </a:p>
+          <a:p>
+            <a:pPr algn="l">
+              <a:lnSpc>
+                <a:spcPct val="100000"/>
+              </a:lnSpc>
+            </a:pPr>
+            <a:r>
+              <a:rPr sz="2000" b="0">
+                <a:solidFill>
+                  <a:srgbClr val="475569"/>
+                </a:solidFill>
+                <a:latin typeface="Noto Sans JP"/>
+                <a:ea typeface="Noto Sans JP"/>
+                <a:cs typeface="Noto Sans JP"/>
+              </a:rPr>
+              <a:t>化粧品との組み合わせも確かめられる</a:t>
+            </a:r>
+          </a:p>
+        </p:txBody>
+      </p:sp>
+      <p:sp>
+        <p:nvSpPr>
+          <p:cNvPr id="7" name="Rounded Rectangle 6"/>
+          <p:cNvSpPr/>
+          <p:nvPr/>
+        </p:nvSpPr>
+        <p:spPr>
+          <a:xfrm>
+            <a:off x="8200801" y="466344"/>
+            <a:ext cx="3067349" cy="5925312"/>
+          </a:xfrm>
+          <a:prstGeom prst="roundRect">
+            <a:avLst>
+              <a:gd name="adj" fmla="val 6558"/>
+            </a:avLst>
+          </a:prstGeom>
           <a:solidFill>
-            <a:srgbClr val="C9D0DB"/>
+            <a:srgbClr val="FFFFFF"/>
+          </a:solidFill>
+          <a:ln w="12700">
+            <a:solidFill>
+              <a:srgbClr val="D9DFE7"/>
+            </a:solidFill>
+          </a:ln>
+          <a:effectLst/>
+        </p:spPr>
+        <p:style>
+          <a:lnRef idx="1">
+            <a:schemeClr val="accent1"/>
+          </a:lnRef>
+          <a:fillRef idx="3">
+            <a:schemeClr val="accent1"/>
+          </a:fillRef>
+          <a:effectRef idx="2">
+            <a:schemeClr val="accent1"/>
+          </a:effectRef>
+          <a:fontRef idx="minor">
+            <a:schemeClr val="lt1"/>
+          </a:fontRef>
+        </p:style>
+        <p:txBody>
+          <a:bodyPr rtlCol="0" anchor="ctr" lIns="0" rIns="0" tIns="0" bIns="0"/>
+          <a:lstStyle/>
+          <a:p>
+            <a:pPr algn="ctr"/>
+          </a:p>
+        </p:txBody>
+      </p:sp>
+      <p:pic>
+        <p:nvPicPr>
+          <p:cNvPr id="8" name="Picture 7" descr="red-real.png"/>
+          <p:cNvPicPr>
+            <a:picLocks noChangeAspect="1"/>
+          </p:cNvPicPr>
+          <p:nvPr/>
+        </p:nvPicPr>
+        <p:blipFill>
+          <a:blip r:embed="rId2"/>
+          <a:stretch>
+            <a:fillRect/>
+          </a:stretch>
+        </p:blipFill>
+        <p:spPr>
+          <a:xfrm>
+            <a:off x="8283097" y="548640"/>
+            <a:ext cx="2902757" cy="5760720"/>
+          </a:xfrm>
+          <a:prstGeom prst="rect">
+            <a:avLst/>
+          </a:prstGeom>
+        </p:spPr>
+      </p:pic>
+      <p:sp>
+        <p:nvSpPr>
+          <p:cNvPr id="9" name="Rounded Rectangle 8"/>
+          <p:cNvSpPr/>
+          <p:nvPr/>
+        </p:nvSpPr>
+        <p:spPr>
+          <a:xfrm>
+            <a:off x="8384693" y="3452042"/>
+            <a:ext cx="1219158" cy="253471"/>
+          </a:xfrm>
+          <a:prstGeom prst="roundRect">
+            <a:avLst>
+              <a:gd name="adj" fmla="val 21645"/>
+            </a:avLst>
+          </a:prstGeom>
+          <a:noFill/>
+          <a:ln w="28575">
+            <a:solidFill>
+              <a:srgbClr val="DC2626"/>
+            </a:solidFill>
+          </a:ln>
+          <a:effectLst/>
+        </p:spPr>
+        <p:style>
+          <a:lnRef idx="1">
+            <a:schemeClr val="accent1"/>
+          </a:lnRef>
+          <a:fillRef idx="3">
+            <a:schemeClr val="accent1"/>
+          </a:fillRef>
+          <a:effectRef idx="2">
+            <a:schemeClr val="accent1"/>
+          </a:effectRef>
+          <a:fontRef idx="minor">
+            <a:schemeClr val="lt1"/>
+          </a:fontRef>
+        </p:style>
+        <p:txBody>
+          <a:bodyPr rtlCol="0" anchor="ctr" lIns="0" rIns="0" tIns="0" bIns="0"/>
+          <a:lstStyle/>
+          <a:p>
+            <a:pPr algn="ctr"/>
+          </a:p>
+        </p:txBody>
+      </p:sp>
+      <p:sp>
+        <p:nvSpPr>
+          <p:cNvPr id="10" name="Rounded Rectangle 9"/>
+          <p:cNvSpPr/>
+          <p:nvPr/>
+        </p:nvSpPr>
+        <p:spPr>
+          <a:xfrm>
+            <a:off x="8357261" y="3122858"/>
+            <a:ext cx="995679" cy="301752"/>
+          </a:xfrm>
+          <a:prstGeom prst="roundRect">
+            <a:avLst>
+              <a:gd name="adj" fmla="val 15151"/>
+            </a:avLst>
+          </a:prstGeom>
+          <a:solidFill>
+            <a:srgbClr val="DC2626"/>
           </a:solidFill>
           <a:ln>
             <a:noFill/>
@@ -7067,31 +7238,88 @@
           </a:fontRef>
         </p:style>
         <p:txBody>
-          <a:bodyPr rtlCol="0" anchor="ctr" lIns="0" rIns="0" tIns="0" bIns="0"/>
+          <a:bodyPr rtlCol="0" anchor="ctr" lIns="0" rIns="0" tIns="0" bIns="0" wrap="none"/>
           <a:lstStyle/>
           <a:p>
             <a:pPr algn="ctr"/>
-          </a:p>
-        </p:txBody>
-      </p:sp>
-      <p:sp>
-        <p:nvSpPr>
-          <p:cNvPr id="5" name="Rounded Rectangle 4"/>
+            <a:r>
+              <a:rPr sz="1600" b="1">
+                <a:solidFill>
+                  <a:srgbClr val="FFFFFF"/>
+                </a:solidFill>
+                <a:latin typeface="Noto Sans JP"/>
+                <a:ea typeface="Noto Sans JP"/>
+                <a:cs typeface="Noto Sans JP"/>
+              </a:rPr>
+              <a:t>店の商品</a:t>
+            </a:r>
+          </a:p>
+        </p:txBody>
+      </p:sp>
+      <p:sp>
+        <p:nvSpPr>
+          <p:cNvPr id="11" name="Rounded Rectangle 10"/>
           <p:cNvSpPr/>
           <p:nvPr/>
         </p:nvSpPr>
         <p:spPr>
           <a:xfrm>
-            <a:off x="685800" y="1389888"/>
-            <a:ext cx="457200" cy="457200"/>
+            <a:off x="8384693" y="5134173"/>
+            <a:ext cx="2699564" cy="541507"/>
           </a:xfrm>
           <a:prstGeom prst="roundRect">
             <a:avLst>
-              <a:gd name="adj" fmla="val 50000"/>
+              <a:gd name="adj" fmla="val 10131"/>
             </a:avLst>
           </a:prstGeom>
+          <a:noFill/>
+          <a:ln w="28575">
+            <a:solidFill>
+              <a:srgbClr val="DC2626"/>
+            </a:solidFill>
+          </a:ln>
+          <a:effectLst/>
+        </p:spPr>
+        <p:style>
+          <a:lnRef idx="1">
+            <a:schemeClr val="accent1"/>
+          </a:lnRef>
+          <a:fillRef idx="3">
+            <a:schemeClr val="accent1"/>
+          </a:fillRef>
+          <a:effectRef idx="2">
+            <a:schemeClr val="accent1"/>
+          </a:effectRef>
+          <a:fontRef idx="minor">
+            <a:schemeClr val="lt1"/>
+          </a:fontRef>
+        </p:style>
+        <p:txBody>
+          <a:bodyPr rtlCol="0" anchor="ctr" lIns="0" rIns="0" tIns="0" bIns="0"/>
+          <a:lstStyle/>
+          <a:p>
+            <a:pPr algn="ctr"/>
+          </a:p>
+        </p:txBody>
+      </p:sp>
+      <p:sp>
+        <p:nvSpPr>
+          <p:cNvPr id="12" name="Rounded Rectangle 11"/>
+          <p:cNvSpPr/>
+          <p:nvPr/>
+        </p:nvSpPr>
+        <p:spPr>
+          <a:xfrm>
+            <a:off x="8357261" y="4804989"/>
+            <a:ext cx="792480" cy="301752"/>
+          </a:xfrm>
+          <a:prstGeom prst="roundRect">
+            <a:avLst>
+              <a:gd name="adj" fmla="val 15151"/>
+            </a:avLst>
+          </a:prstGeom>
           <a:solidFill>
-            <a:srgbClr val="1B2A4A"/>
+            <a:srgbClr val="DC2626"/>
           </a:solidFill>
           <a:ln>
             <a:noFill/>
@@ -7118,7 +7346,7 @@
           <a:p>
             <a:pPr algn="ctr"/>
             <a:r>
-              <a:rPr sz="1800" b="1">
+              <a:rPr sz="1600" b="1">
                 <a:solidFill>
                   <a:srgbClr val="FFFFFF"/>
                 </a:solidFill>
@@ -7126,21 +7354,21 @@
                 <a:ea typeface="Noto Sans JP"/>
                 <a:cs typeface="Noto Sans JP"/>
               </a:rPr>
-              <a:t>1</a:t>
-            </a:r>
-          </a:p>
-        </p:txBody>
-      </p:sp>
-      <p:sp>
-        <p:nvSpPr>
-          <p:cNvPr id="6" name="TextBox 5"/>
+              <a:t>家の薬</a:t>
+            </a:r>
+          </a:p>
+        </p:txBody>
+      </p:sp>
+      <p:sp>
+        <p:nvSpPr>
+          <p:cNvPr id="13" name="TextBox 12"/>
           <p:cNvSpPr txBox="1"/>
           <p:nvPr/>
         </p:nvSpPr>
         <p:spPr>
           <a:xfrm>
-            <a:off x="1417320" y="1408176"/>
-            <a:ext cx="2743200" cy="313055"/>
+            <a:off x="685800" y="5897880"/>
+            <a:ext cx="1463040" cy="276225"/>
           </a:xfrm>
           <a:prstGeom prst="rect">
             <a:avLst/>
@@ -7159,7 +7387,7 @@
               </a:lnSpc>
             </a:pPr>
             <a:r>
-              <a:rPr sz="1700" b="1">
+              <a:rPr sz="1500" b="1">
                 <a:solidFill>
                   <a:srgbClr val="475569"/>
                 </a:solidFill>
@@ -7167,21 +7395,67 @@
                 <a:ea typeface="Noto Sans JP"/>
                 <a:cs typeface="Noto Sans JP"/>
               </a:rPr>
-              <a:t>家で</a:t>
-            </a:r>
-          </a:p>
-        </p:txBody>
-      </p:sp>
-      <p:sp>
-        <p:nvSpPr>
-          <p:cNvPr id="7" name="TextBox 6"/>
+              <a:t>判定は3色</a:t>
+            </a:r>
+          </a:p>
+        </p:txBody>
+      </p:sp>
+      <p:sp>
+        <p:nvSpPr>
+          <p:cNvPr id="14" name="Rounded Rectangle 13"/>
+          <p:cNvSpPr/>
+          <p:nvPr/>
+        </p:nvSpPr>
+        <p:spPr>
+          <a:xfrm>
+            <a:off x="1882140" y="6007608"/>
+            <a:ext cx="173736" cy="173736"/>
+          </a:xfrm>
+          <a:prstGeom prst="roundRect">
+            <a:avLst>
+              <a:gd name="adj" fmla="val 50000"/>
+            </a:avLst>
+          </a:prstGeom>
+          <a:solidFill>
+            <a:srgbClr val="2563EB"/>
+          </a:solidFill>
+          <a:ln>
+            <a:noFill/>
+          </a:ln>
+          <a:effectLst/>
+        </p:spPr>
+        <p:style>
+          <a:lnRef idx="1">
+            <a:schemeClr val="accent1"/>
+          </a:lnRef>
+          <a:fillRef idx="3">
+            <a:schemeClr val="accent1"/>
+          </a:fillRef>
+          <a:effectRef idx="2">
+            <a:schemeClr val="accent1"/>
+          </a:effectRef>
+          <a:fontRef idx="minor">
+            <a:schemeClr val="lt1"/>
+          </a:fontRef>
+        </p:style>
+        <p:txBody>
+          <a:bodyPr rtlCol="0" anchor="ctr" lIns="0" rIns="0" tIns="0" bIns="0"/>
+          <a:lstStyle/>
+          <a:p>
+            <a:pPr algn="ctr"/>
+          </a:p>
+        </p:txBody>
+      </p:sp>
+      <p:sp>
+        <p:nvSpPr>
+          <p:cNvPr id="15" name="TextBox 14"/>
           <p:cNvSpPr txBox="1"/>
           <p:nvPr/>
         </p:nvSpPr>
         <p:spPr>
           <a:xfrm>
-            <a:off x="1417320" y="1783080"/>
-            <a:ext cx="4892040" cy="515620"/>
+            <a:off x="2138172" y="5897880"/>
+            <a:ext cx="1996440" cy="276225"/>
           </a:xfrm>
           <a:prstGeom prst="rect">
             <a:avLst/>
@@ -7200,29 +7474,75 @@
               </a:lnSpc>
             </a:pPr>
             <a:r>
-              <a:rPr sz="2800" b="1">
-                <a:solidFill>
-                  <a:srgbClr val="1B2A4A"/>
+              <a:rPr sz="1500" b="1">
+                <a:solidFill>
+                  <a:srgbClr val="0F172A"/>
                 </a:solidFill>
                 <a:latin typeface="Noto Sans JP"/>
                 <a:ea typeface="Noto Sans JP"/>
                 <a:cs typeface="Noto Sans JP"/>
               </a:rPr>
-              <a:t>薬・化粧品を撮って登録</a:t>
-            </a:r>
-          </a:p>
-        </p:txBody>
-      </p:sp>
-      <p:sp>
-        <p:nvSpPr>
-          <p:cNvPr id="8" name="TextBox 7"/>
+              <a:t>買っても問題なさそう</a:t>
+            </a:r>
+          </a:p>
+        </p:txBody>
+      </p:sp>
+      <p:sp>
+        <p:nvSpPr>
+          <p:cNvPr id="16" name="Rounded Rectangle 15"/>
+          <p:cNvSpPr/>
+          <p:nvPr/>
+        </p:nvSpPr>
+        <p:spPr>
+          <a:xfrm>
+            <a:off x="4408932" y="6007608"/>
+            <a:ext cx="173736" cy="173736"/>
+          </a:xfrm>
+          <a:prstGeom prst="roundRect">
+            <a:avLst>
+              <a:gd name="adj" fmla="val 50000"/>
+            </a:avLst>
+          </a:prstGeom>
+          <a:solidFill>
+            <a:srgbClr val="D97706"/>
+          </a:solidFill>
+          <a:ln>
+            <a:noFill/>
+          </a:ln>
+          <a:effectLst/>
+        </p:spPr>
+        <p:style>
+          <a:lnRef idx="1">
+            <a:schemeClr val="accent1"/>
+          </a:lnRef>
+          <a:fillRef idx="3">
+            <a:schemeClr val="accent1"/>
+          </a:fillRef>
+          <a:effectRef idx="2">
+            <a:schemeClr val="accent1"/>
+          </a:effectRef>
+          <a:fontRef idx="minor">
+            <a:schemeClr val="lt1"/>
+          </a:fontRef>
+        </p:style>
+        <p:txBody>
+          <a:bodyPr rtlCol="0" anchor="ctr" lIns="0" rIns="0" tIns="0" bIns="0"/>
+          <a:lstStyle/>
+          <a:p>
+            <a:pPr algn="ctr"/>
+          </a:p>
+        </p:txBody>
+      </p:sp>
+      <p:sp>
+        <p:nvSpPr>
+          <p:cNvPr id="17" name="TextBox 16"/>
           <p:cNvSpPr txBox="1"/>
           <p:nvPr/>
         </p:nvSpPr>
         <p:spPr>
           <a:xfrm>
-            <a:off x="1417320" y="2304288"/>
-            <a:ext cx="4892040" cy="313055"/>
+            <a:off x="4664964" y="5897880"/>
+            <a:ext cx="1615440" cy="276225"/>
           </a:xfrm>
           <a:prstGeom prst="rect">
             <a:avLst/>
@@ -7241,35 +7561,37 @@
               </a:lnSpc>
             </a:pPr>
             <a:r>
-              <a:rPr sz="1700" b="0">
-                <a:solidFill>
-                  <a:srgbClr val="475569"/>
+              <a:rPr sz="1500" b="1">
+                <a:solidFill>
+                  <a:srgbClr val="0F172A"/>
                 </a:solidFill>
                 <a:latin typeface="Noto Sans JP"/>
                 <a:ea typeface="Noto Sans JP"/>
                 <a:cs typeface="Noto Sans JP"/>
               </a:rPr>
-              <a:t>AIが成分表示を読み取る</a:t>
-            </a:r>
-          </a:p>
-        </p:txBody>
-      </p:sp>
-      <p:sp>
-        <p:nvSpPr>
-          <p:cNvPr id="9" name="Rectangle 8"/>
+              <a:t>買わなくて大丈夫</a:t>
+            </a:r>
+          </a:p>
+        </p:txBody>
+      </p:sp>
+      <p:sp>
+        <p:nvSpPr>
+          <p:cNvPr id="18" name="Rounded Rectangle 17"/>
           <p:cNvSpPr/>
           <p:nvPr/>
         </p:nvSpPr>
         <p:spPr>
           <a:xfrm>
-            <a:off x="6492240" y="1463040"/>
-            <a:ext cx="45720" cy="1097280"/>
-          </a:xfrm>
-          <a:prstGeom prst="rect">
-            <a:avLst/>
+            <a:off x="6554724" y="6007608"/>
+            <a:ext cx="173736" cy="173736"/>
+          </a:xfrm>
+          <a:prstGeom prst="roundRect">
+            <a:avLst>
+              <a:gd name="adj" fmla="val 50000"/>
+            </a:avLst>
           </a:prstGeom>
           <a:solidFill>
-            <a:srgbClr val="C9D0DB"/>
+            <a:srgbClr val="DC2626"/>
           </a:solidFill>
           <a:ln>
             <a:noFill/>
@@ -7300,14 +7622,14 @@
       </p:sp>
       <p:sp>
         <p:nvSpPr>
-          <p:cNvPr id="10" name="TextBox 9"/>
+          <p:cNvPr id="19" name="TextBox 18"/>
           <p:cNvSpPr txBox="1"/>
           <p:nvPr/>
         </p:nvSpPr>
         <p:spPr>
           <a:xfrm>
-            <a:off x="6766559" y="1426464"/>
-            <a:ext cx="4739335" cy="405130"/>
+            <a:off x="6810756" y="5897880"/>
+            <a:ext cx="1043940" cy="276225"/>
           </a:xfrm>
           <a:prstGeom prst="rect">
             <a:avLst/>
@@ -7326,7 +7648,7 @@
               </a:lnSpc>
             </a:pPr>
             <a:r>
-              <a:rPr sz="2200" b="1">
+              <a:rPr sz="1500" b="1">
                 <a:solidFill>
                   <a:srgbClr val="0F172A"/>
                 </a:solidFill>
@@ -7334,714 +7656,7 @@
                 <a:ea typeface="Noto Sans JP"/>
                 <a:cs typeface="Noto Sans JP"/>
               </a:rPr>
-              <a:t>自分の体質も登録できる</a:t>
-            </a:r>
-          </a:p>
-        </p:txBody>
-      </p:sp>
-      <p:sp>
-        <p:nvSpPr>
-          <p:cNvPr id="11" name="TextBox 10"/>
-          <p:cNvSpPr txBox="1"/>
-          <p:nvPr/>
-        </p:nvSpPr>
-        <p:spPr>
-          <a:xfrm>
-            <a:off x="6766559" y="1901952"/>
-            <a:ext cx="4739335" cy="662940"/>
-          </a:xfrm>
-          <a:prstGeom prst="rect">
-            <a:avLst/>
-          </a:prstGeom>
-          <a:noFill/>
-        </p:spPr>
-        <p:txBody>
-          <a:bodyPr wrap="none" lIns="0" rIns="0" tIns="0" bIns="0" anchor="t">
-            <a:spAutoFit/>
-          </a:bodyPr>
-          <a:lstStyle/>
-          <a:p>
-            <a:pPr algn="l">
-              <a:lnSpc>
-                <a:spcPct val="100000"/>
-              </a:lnSpc>
-            </a:pPr>
-            <a:r>
-              <a:rPr sz="1800" b="0">
-                <a:solidFill>
-                  <a:srgbClr val="475569"/>
-                </a:solidFill>
-                <a:latin typeface="Noto Sans JP"/>
-                <a:ea typeface="Noto Sans JP"/>
-                <a:cs typeface="Noto Sans JP"/>
-              </a:rPr>
-              <a:t>肌質や年代、悩みを登録すると、</a:t>
-            </a:r>
-          </a:p>
-          <a:p>
-            <a:pPr algn="l">
-              <a:lnSpc>
-                <a:spcPct val="100000"/>
-              </a:lnSpc>
-            </a:pPr>
-            <a:r>
-              <a:rPr sz="1800" b="0">
-                <a:solidFill>
-                  <a:srgbClr val="475569"/>
-                </a:solidFill>
-                <a:latin typeface="Noto Sans JP"/>
-                <a:ea typeface="Noto Sans JP"/>
-                <a:cs typeface="Noto Sans JP"/>
-              </a:rPr>
-              <a:t>使い方の助言がパーソナライズされる</a:t>
-            </a:r>
-          </a:p>
-        </p:txBody>
-      </p:sp>
-      <p:sp>
-        <p:nvSpPr>
-          <p:cNvPr id="12" name="Rounded Rectangle 11"/>
-          <p:cNvSpPr/>
-          <p:nvPr/>
-        </p:nvSpPr>
-        <p:spPr>
-          <a:xfrm>
-            <a:off x="685800" y="3081528"/>
-            <a:ext cx="457200" cy="457200"/>
-          </a:xfrm>
-          <a:prstGeom prst="roundRect">
-            <a:avLst>
-              <a:gd name="adj" fmla="val 50000"/>
-            </a:avLst>
-          </a:prstGeom>
-          <a:solidFill>
-            <a:srgbClr val="1B2A4A"/>
-          </a:solidFill>
-          <a:ln>
-            <a:noFill/>
-          </a:ln>
-          <a:effectLst/>
-        </p:spPr>
-        <p:style>
-          <a:lnRef idx="1">
-            <a:schemeClr val="accent1"/>
-          </a:lnRef>
-          <a:fillRef idx="3">
-            <a:schemeClr val="accent1"/>
-          </a:fillRef>
-          <a:effectRef idx="2">
-            <a:schemeClr val="accent1"/>
-          </a:effectRef>
-          <a:fontRef idx="minor">
-            <a:schemeClr val="lt1"/>
-          </a:fontRef>
-        </p:style>
-        <p:txBody>
-          <a:bodyPr rtlCol="0" anchor="ctr" lIns="0" rIns="0" tIns="0" bIns="0" wrap="none"/>
-          <a:lstStyle/>
-          <a:p>
-            <a:pPr algn="ctr"/>
-            <a:r>
-              <a:rPr sz="1800" b="1">
-                <a:solidFill>
-                  <a:srgbClr val="FFFFFF"/>
-                </a:solidFill>
-                <a:latin typeface="Noto Sans JP"/>
-                <a:ea typeface="Noto Sans JP"/>
-                <a:cs typeface="Noto Sans JP"/>
-              </a:rPr>
-              <a:t>2</a:t>
-            </a:r>
-          </a:p>
-        </p:txBody>
-      </p:sp>
-      <p:sp>
-        <p:nvSpPr>
-          <p:cNvPr id="13" name="TextBox 12"/>
-          <p:cNvSpPr txBox="1"/>
-          <p:nvPr/>
-        </p:nvSpPr>
-        <p:spPr>
-          <a:xfrm>
-            <a:off x="1417320" y="3099816"/>
-            <a:ext cx="2743200" cy="313055"/>
-          </a:xfrm>
-          <a:prstGeom prst="rect">
-            <a:avLst/>
-          </a:prstGeom>
-          <a:noFill/>
-        </p:spPr>
-        <p:txBody>
-          <a:bodyPr wrap="none" lIns="0" rIns="0" tIns="0" bIns="0" anchor="t">
-            <a:spAutoFit/>
-          </a:bodyPr>
-          <a:lstStyle/>
-          <a:p>
-            <a:pPr algn="l">
-              <a:lnSpc>
-                <a:spcPct val="100000"/>
-              </a:lnSpc>
-            </a:pPr>
-            <a:r>
-              <a:rPr sz="1700" b="1">
-                <a:solidFill>
-                  <a:srgbClr val="475569"/>
-                </a:solidFill>
-                <a:latin typeface="Noto Sans JP"/>
-                <a:ea typeface="Noto Sans JP"/>
-                <a:cs typeface="Noto Sans JP"/>
-              </a:rPr>
-              <a:t>店で</a:t>
-            </a:r>
-          </a:p>
-        </p:txBody>
-      </p:sp>
-      <p:sp>
-        <p:nvSpPr>
-          <p:cNvPr id="14" name="TextBox 13"/>
-          <p:cNvSpPr txBox="1"/>
-          <p:nvPr/>
-        </p:nvSpPr>
-        <p:spPr>
-          <a:xfrm>
-            <a:off x="1417320" y="3474720"/>
-            <a:ext cx="4892040" cy="515620"/>
-          </a:xfrm>
-          <a:prstGeom prst="rect">
-            <a:avLst/>
-          </a:prstGeom>
-          <a:noFill/>
-        </p:spPr>
-        <p:txBody>
-          <a:bodyPr wrap="none" lIns="0" rIns="0" tIns="0" bIns="0" anchor="t">
-            <a:spAutoFit/>
-          </a:bodyPr>
-          <a:lstStyle/>
-          <a:p>
-            <a:pPr algn="l">
-              <a:lnSpc>
-                <a:spcPct val="100000"/>
-              </a:lnSpc>
-            </a:pPr>
-            <a:r>
-              <a:rPr sz="2800" b="1">
-                <a:solidFill>
-                  <a:srgbClr val="1B2A4A"/>
-                </a:solidFill>
-                <a:latin typeface="Noto Sans JP"/>
-                <a:ea typeface="Noto Sans JP"/>
-                <a:cs typeface="Noto Sans JP"/>
-              </a:rPr>
-              <a:t>気になる商品を撮る</a:t>
-            </a:r>
-          </a:p>
-        </p:txBody>
-      </p:sp>
-      <p:sp>
-        <p:nvSpPr>
-          <p:cNvPr id="15" name="TextBox 14"/>
-          <p:cNvSpPr txBox="1"/>
-          <p:nvPr/>
-        </p:nvSpPr>
-        <p:spPr>
-          <a:xfrm>
-            <a:off x="1417320" y="3995928"/>
-            <a:ext cx="4892040" cy="313055"/>
-          </a:xfrm>
-          <a:prstGeom prst="rect">
-            <a:avLst/>
-          </a:prstGeom>
-          <a:noFill/>
-        </p:spPr>
-        <p:txBody>
-          <a:bodyPr wrap="none" lIns="0" rIns="0" tIns="0" bIns="0" anchor="t">
-            <a:spAutoFit/>
-          </a:bodyPr>
-          <a:lstStyle/>
-          <a:p>
-            <a:pPr algn="l">
-              <a:lnSpc>
-                <a:spcPct val="100000"/>
-              </a:lnSpc>
-            </a:pPr>
-            <a:r>
-              <a:rPr sz="1700" b="0">
-                <a:solidFill>
-                  <a:srgbClr val="475569"/>
-                </a:solidFill>
-                <a:latin typeface="Noto Sans JP"/>
-                <a:ea typeface="Noto Sans JP"/>
-                <a:cs typeface="Noto Sans JP"/>
-              </a:rPr>
-              <a:t>AIが家のものと照らし合わせる</a:t>
-            </a:r>
-          </a:p>
-        </p:txBody>
-      </p:sp>
-      <p:sp>
-        <p:nvSpPr>
-          <p:cNvPr id="16" name="Rectangle 15"/>
-          <p:cNvSpPr/>
-          <p:nvPr/>
-        </p:nvSpPr>
-        <p:spPr>
-          <a:xfrm>
-            <a:off x="6492240" y="3154680"/>
-            <a:ext cx="45720" cy="1097280"/>
-          </a:xfrm>
-          <a:prstGeom prst="rect">
-            <a:avLst/>
-          </a:prstGeom>
-          <a:solidFill>
-            <a:srgbClr val="C9D0DB"/>
-          </a:solidFill>
-          <a:ln>
-            <a:noFill/>
-          </a:ln>
-          <a:effectLst/>
-        </p:spPr>
-        <p:style>
-          <a:lnRef idx="1">
-            <a:schemeClr val="accent1"/>
-          </a:lnRef>
-          <a:fillRef idx="3">
-            <a:schemeClr val="accent1"/>
-          </a:fillRef>
-          <a:effectRef idx="2">
-            <a:schemeClr val="accent1"/>
-          </a:effectRef>
-          <a:fontRef idx="minor">
-            <a:schemeClr val="lt1"/>
-          </a:fontRef>
-        </p:style>
-        <p:txBody>
-          <a:bodyPr rtlCol="0" anchor="ctr" lIns="0" rIns="0" tIns="0" bIns="0"/>
-          <a:lstStyle/>
-          <a:p>
-            <a:pPr algn="ctr"/>
-          </a:p>
-        </p:txBody>
-      </p:sp>
-      <p:sp>
-        <p:nvSpPr>
-          <p:cNvPr id="17" name="TextBox 16"/>
-          <p:cNvSpPr txBox="1"/>
-          <p:nvPr/>
-        </p:nvSpPr>
-        <p:spPr>
-          <a:xfrm>
-            <a:off x="6766559" y="3118104"/>
-            <a:ext cx="4739335" cy="405130"/>
-          </a:xfrm>
-          <a:prstGeom prst="rect">
-            <a:avLst/>
-          </a:prstGeom>
-          <a:noFill/>
-        </p:spPr>
-        <p:txBody>
-          <a:bodyPr wrap="none" lIns="0" rIns="0" tIns="0" bIns="0" anchor="t">
-            <a:spAutoFit/>
-          </a:bodyPr>
-          <a:lstStyle/>
-          <a:p>
-            <a:pPr algn="l">
-              <a:lnSpc>
-                <a:spcPct val="100000"/>
-              </a:lnSpc>
-            </a:pPr>
-            <a:r>
-              <a:rPr sz="2200" b="1">
-                <a:solidFill>
-                  <a:srgbClr val="0F172A"/>
-                </a:solidFill>
-                <a:latin typeface="Noto Sans JP"/>
-                <a:ea typeface="Noto Sans JP"/>
-                <a:cs typeface="Noto Sans JP"/>
-              </a:rPr>
-              <a:t>撮るだけで、すぐ確かめられる</a:t>
-            </a:r>
-          </a:p>
-        </p:txBody>
-      </p:sp>
-      <p:sp>
-        <p:nvSpPr>
-          <p:cNvPr id="18" name="TextBox 17"/>
-          <p:cNvSpPr txBox="1"/>
-          <p:nvPr/>
-        </p:nvSpPr>
-        <p:spPr>
-          <a:xfrm>
-            <a:off x="6766559" y="3593592"/>
-            <a:ext cx="4739335" cy="662940"/>
-          </a:xfrm>
-          <a:prstGeom prst="rect">
-            <a:avLst/>
-          </a:prstGeom>
-          <a:noFill/>
-        </p:spPr>
-        <p:txBody>
-          <a:bodyPr wrap="none" lIns="0" rIns="0" tIns="0" bIns="0" anchor="t">
-            <a:spAutoFit/>
-          </a:bodyPr>
-          <a:lstStyle/>
-          <a:p>
-            <a:pPr algn="l">
-              <a:lnSpc>
-                <a:spcPct val="100000"/>
-              </a:lnSpc>
-            </a:pPr>
-            <a:r>
-              <a:rPr sz="1800" b="0">
-                <a:solidFill>
-                  <a:srgbClr val="475569"/>
-                </a:solidFill>
-                <a:latin typeface="Noto Sans JP"/>
-                <a:ea typeface="Noto Sans JP"/>
-                <a:cs typeface="Noto Sans JP"/>
-              </a:rPr>
-              <a:t>商品名の入力も検索もいらない</a:t>
-            </a:r>
-          </a:p>
-          <a:p>
-            <a:pPr algn="l">
-              <a:lnSpc>
-                <a:spcPct val="100000"/>
-              </a:lnSpc>
-            </a:pPr>
-            <a:r>
-              <a:rPr sz="1800" b="0">
-                <a:solidFill>
-                  <a:srgbClr val="475569"/>
-                </a:solidFill>
-                <a:latin typeface="Noto Sans JP"/>
-                <a:ea typeface="Noto Sans JP"/>
-                <a:cs typeface="Noto Sans JP"/>
-              </a:rPr>
-              <a:t>店先で成分表示を1枚撮れば済む</a:t>
-            </a:r>
-          </a:p>
-        </p:txBody>
-      </p:sp>
-      <p:sp>
-        <p:nvSpPr>
-          <p:cNvPr id="19" name="Rounded Rectangle 18"/>
-          <p:cNvSpPr/>
-          <p:nvPr/>
-        </p:nvSpPr>
-        <p:spPr>
-          <a:xfrm>
-            <a:off x="685800" y="4773168"/>
-            <a:ext cx="457200" cy="457200"/>
-          </a:xfrm>
-          <a:prstGeom prst="roundRect">
-            <a:avLst>
-              <a:gd name="adj" fmla="val 50000"/>
-            </a:avLst>
-          </a:prstGeom>
-          <a:solidFill>
-            <a:srgbClr val="1B2A4A"/>
-          </a:solidFill>
-          <a:ln>
-            <a:noFill/>
-          </a:ln>
-          <a:effectLst/>
-        </p:spPr>
-        <p:style>
-          <a:lnRef idx="1">
-            <a:schemeClr val="accent1"/>
-          </a:lnRef>
-          <a:fillRef idx="3">
-            <a:schemeClr val="accent1"/>
-          </a:fillRef>
-          <a:effectRef idx="2">
-            <a:schemeClr val="accent1"/>
-          </a:effectRef>
-          <a:fontRef idx="minor">
-            <a:schemeClr val="lt1"/>
-          </a:fontRef>
-        </p:style>
-        <p:txBody>
-          <a:bodyPr rtlCol="0" anchor="ctr" lIns="0" rIns="0" tIns="0" bIns="0" wrap="none"/>
-          <a:lstStyle/>
-          <a:p>
-            <a:pPr algn="ctr"/>
-            <a:r>
-              <a:rPr sz="1800" b="1">
-                <a:solidFill>
-                  <a:srgbClr val="FFFFFF"/>
-                </a:solidFill>
-                <a:latin typeface="Noto Sans JP"/>
-                <a:ea typeface="Noto Sans JP"/>
-                <a:cs typeface="Noto Sans JP"/>
-              </a:rPr>
-              <a:t>3</a:t>
-            </a:r>
-          </a:p>
-        </p:txBody>
-      </p:sp>
-      <p:sp>
-        <p:nvSpPr>
-          <p:cNvPr id="20" name="TextBox 19"/>
-          <p:cNvSpPr txBox="1"/>
-          <p:nvPr/>
-        </p:nvSpPr>
-        <p:spPr>
-          <a:xfrm>
-            <a:off x="1417320" y="4791456"/>
-            <a:ext cx="2743200" cy="313055"/>
-          </a:xfrm>
-          <a:prstGeom prst="rect">
-            <a:avLst/>
-          </a:prstGeom>
-          <a:noFill/>
-        </p:spPr>
-        <p:txBody>
-          <a:bodyPr wrap="none" lIns="0" rIns="0" tIns="0" bIns="0" anchor="t">
-            <a:spAutoFit/>
-          </a:bodyPr>
-          <a:lstStyle/>
-          <a:p>
-            <a:pPr algn="l">
-              <a:lnSpc>
-                <a:spcPct val="100000"/>
-              </a:lnSpc>
-            </a:pPr>
-            <a:r>
-              <a:rPr sz="1700" b="1">
-                <a:solidFill>
-                  <a:srgbClr val="475569"/>
-                </a:solidFill>
-                <a:latin typeface="Noto Sans JP"/>
-                <a:ea typeface="Noto Sans JP"/>
-                <a:cs typeface="Noto Sans JP"/>
-              </a:rPr>
-              <a:t>その場で</a:t>
-            </a:r>
-          </a:p>
-        </p:txBody>
-      </p:sp>
-      <p:sp>
-        <p:nvSpPr>
-          <p:cNvPr id="21" name="TextBox 20"/>
-          <p:cNvSpPr txBox="1"/>
-          <p:nvPr/>
-        </p:nvSpPr>
-        <p:spPr>
-          <a:xfrm>
-            <a:off x="1417320" y="5166360"/>
-            <a:ext cx="4892040" cy="515620"/>
-          </a:xfrm>
-          <a:prstGeom prst="rect">
-            <a:avLst/>
-          </a:prstGeom>
-          <a:noFill/>
-        </p:spPr>
-        <p:txBody>
-          <a:bodyPr wrap="none" lIns="0" rIns="0" tIns="0" bIns="0" anchor="t">
-            <a:spAutoFit/>
-          </a:bodyPr>
-          <a:lstStyle/>
-          <a:p>
-            <a:pPr algn="l">
-              <a:lnSpc>
-                <a:spcPct val="100000"/>
-              </a:lnSpc>
-            </a:pPr>
-            <a:r>
-              <a:rPr sz="2800" b="1">
-                <a:solidFill>
-                  <a:srgbClr val="1B2A4A"/>
-                </a:solidFill>
-                <a:latin typeface="Noto Sans JP"/>
-                <a:ea typeface="Noto Sans JP"/>
-                <a:cs typeface="Noto Sans JP"/>
-              </a:rPr>
-              <a:t>買うべきかの目安が出る</a:t>
-            </a:r>
-          </a:p>
-        </p:txBody>
-      </p:sp>
-      <p:sp>
-        <p:nvSpPr>
-          <p:cNvPr id="22" name="TextBox 21"/>
-          <p:cNvSpPr txBox="1"/>
-          <p:nvPr/>
-        </p:nvSpPr>
-        <p:spPr>
-          <a:xfrm>
-            <a:off x="1417320" y="5687568"/>
-            <a:ext cx="4892040" cy="313055"/>
-          </a:xfrm>
-          <a:prstGeom prst="rect">
-            <a:avLst/>
-          </a:prstGeom>
-          <a:noFill/>
-        </p:spPr>
-        <p:txBody>
-          <a:bodyPr wrap="none" lIns="0" rIns="0" tIns="0" bIns="0" anchor="t">
-            <a:spAutoFit/>
-          </a:bodyPr>
-          <a:lstStyle/>
-          <a:p>
-            <a:pPr algn="l">
-              <a:lnSpc>
-                <a:spcPct val="100000"/>
-              </a:lnSpc>
-            </a:pPr>
-            <a:r>
-              <a:rPr sz="1700" b="0">
-                <a:solidFill>
-                  <a:srgbClr val="475569"/>
-                </a:solidFill>
-                <a:latin typeface="Noto Sans JP"/>
-                <a:ea typeface="Noto Sans JP"/>
-                <a:cs typeface="Noto Sans JP"/>
-              </a:rPr>
-              <a:t>3色の判定と、成分名つきの理由</a:t>
-            </a:r>
-          </a:p>
-        </p:txBody>
-      </p:sp>
-      <p:sp>
-        <p:nvSpPr>
-          <p:cNvPr id="23" name="Rectangle 22"/>
-          <p:cNvSpPr/>
-          <p:nvPr/>
-        </p:nvSpPr>
-        <p:spPr>
-          <a:xfrm>
-            <a:off x="6492240" y="4846320"/>
-            <a:ext cx="45720" cy="1097280"/>
-          </a:xfrm>
-          <a:prstGeom prst="rect">
-            <a:avLst/>
-          </a:prstGeom>
-          <a:solidFill>
-            <a:srgbClr val="C9D0DB"/>
-          </a:solidFill>
-          <a:ln>
-            <a:noFill/>
-          </a:ln>
-          <a:effectLst/>
-        </p:spPr>
-        <p:style>
-          <a:lnRef idx="1">
-            <a:schemeClr val="accent1"/>
-          </a:lnRef>
-          <a:fillRef idx="3">
-            <a:schemeClr val="accent1"/>
-          </a:fillRef>
-          <a:effectRef idx="2">
-            <a:schemeClr val="accent1"/>
-          </a:effectRef>
-          <a:fontRef idx="minor">
-            <a:schemeClr val="lt1"/>
-          </a:fontRef>
-        </p:style>
-        <p:txBody>
-          <a:bodyPr rtlCol="0" anchor="ctr" lIns="0" rIns="0" tIns="0" bIns="0"/>
-          <a:lstStyle/>
-          <a:p>
-            <a:pPr algn="ctr"/>
-          </a:p>
-        </p:txBody>
-      </p:sp>
-      <p:sp>
-        <p:nvSpPr>
-          <p:cNvPr id="24" name="TextBox 23"/>
-          <p:cNvSpPr txBox="1"/>
-          <p:nvPr/>
-        </p:nvSpPr>
-        <p:spPr>
-          <a:xfrm>
-            <a:off x="6766559" y="4809744"/>
-            <a:ext cx="4739335" cy="405130"/>
-          </a:xfrm>
-          <a:prstGeom prst="rect">
-            <a:avLst/>
-          </a:prstGeom>
-          <a:noFill/>
-        </p:spPr>
-        <p:txBody>
-          <a:bodyPr wrap="none" lIns="0" rIns="0" tIns="0" bIns="0" anchor="t">
-            <a:spAutoFit/>
-          </a:bodyPr>
-          <a:lstStyle/>
-          <a:p>
-            <a:pPr algn="l">
-              <a:lnSpc>
-                <a:spcPct val="100000"/>
-              </a:lnSpc>
-            </a:pPr>
-            <a:r>
-              <a:rPr sz="2200" b="1">
-                <a:solidFill>
-                  <a:srgbClr val="0F172A"/>
-                </a:solidFill>
-                <a:latin typeface="Noto Sans JP"/>
-                <a:ea typeface="Noto Sans JP"/>
-                <a:cs typeface="Noto Sans JP"/>
-              </a:rPr>
-              <a:t>理由に根拠と出典を添える</a:t>
-            </a:r>
-          </a:p>
-        </p:txBody>
-      </p:sp>
-      <p:sp>
-        <p:nvSpPr>
-          <p:cNvPr id="25" name="TextBox 24"/>
-          <p:cNvSpPr txBox="1"/>
-          <p:nvPr/>
-        </p:nvSpPr>
-        <p:spPr>
-          <a:xfrm>
-            <a:off x="6766559" y="5285232"/>
-            <a:ext cx="4739335" cy="662940"/>
-          </a:xfrm>
-          <a:prstGeom prst="rect">
-            <a:avLst/>
-          </a:prstGeom>
-          <a:noFill/>
-        </p:spPr>
-        <p:txBody>
-          <a:bodyPr wrap="none" lIns="0" rIns="0" tIns="0" bIns="0" anchor="t">
-            <a:spAutoFit/>
-          </a:bodyPr>
-          <a:lstStyle/>
-          <a:p>
-            <a:pPr algn="l">
-              <a:lnSpc>
-                <a:spcPct val="100000"/>
-              </a:lnSpc>
-            </a:pPr>
-            <a:r>
-              <a:rPr sz="1800" b="0">
-                <a:solidFill>
-                  <a:srgbClr val="475569"/>
-                </a:solidFill>
-                <a:latin typeface="Noto Sans JP"/>
-                <a:ea typeface="Noto Sans JP"/>
-                <a:cs typeface="Noto Sans JP"/>
-              </a:rPr>
-              <a:t>根拠の薄い推測は、最初から出さない</a:t>
-            </a:r>
-          </a:p>
-          <a:p>
-            <a:pPr algn="l">
-              <a:lnSpc>
-                <a:spcPct val="100000"/>
-              </a:lnSpc>
-            </a:pPr>
-            <a:r>
-              <a:rPr sz="1800" b="0">
-                <a:solidFill>
-                  <a:srgbClr val="475569"/>
-                </a:solidFill>
-                <a:latin typeface="Noto Sans JP"/>
-                <a:ea typeface="Noto Sans JP"/>
-                <a:cs typeface="Noto Sans JP"/>
-              </a:rPr>
-              <a:t>表示された理由は、安心して読める</a:t>
+              <a:t>注意が必要</a:t>
             </a:r>
           </a:p>
         </p:txBody>
@@ -8072,9 +7687,301 @@
         <p:nvPr/>
       </p:nvGrpSpPr>
       <p:grpSpPr/>
+      <p:sp>
+        <p:nvSpPr>
+          <p:cNvPr id="2" name="TextBox 1"/>
+          <p:cNvSpPr txBox="1"/>
+          <p:nvPr/>
+        </p:nvSpPr>
+        <p:spPr>
+          <a:xfrm>
+            <a:off x="685800" y="685800"/>
+            <a:ext cx="7315200" cy="368300"/>
+          </a:xfrm>
+          <a:prstGeom prst="rect">
+            <a:avLst/>
+          </a:prstGeom>
+          <a:noFill/>
+        </p:spPr>
+        <p:txBody>
+          <a:bodyPr wrap="none" lIns="0" rIns="0" tIns="0" bIns="0" anchor="t">
+            <a:spAutoFit/>
+          </a:bodyPr>
+          <a:lstStyle/>
+          <a:p>
+            <a:pPr algn="l">
+              <a:lnSpc>
+                <a:spcPct val="100000"/>
+              </a:lnSpc>
+            </a:pPr>
+            <a:r>
+              <a:rPr sz="2000" b="1">
+                <a:solidFill>
+                  <a:srgbClr val="2563EB"/>
+                </a:solidFill>
+                <a:latin typeface="Noto Sans JP"/>
+                <a:ea typeface="Noto Sans JP"/>
+                <a:cs typeface="Noto Sans JP"/>
+              </a:rPr>
+              <a:t>できること 3</a:t>
+            </a:r>
+          </a:p>
+        </p:txBody>
+      </p:sp>
+      <p:sp>
+        <p:nvSpPr>
+          <p:cNvPr id="3" name="TextBox 2"/>
+          <p:cNvSpPr txBox="1"/>
+          <p:nvPr/>
+        </p:nvSpPr>
+        <p:spPr>
+          <a:xfrm>
+            <a:off x="685800" y="1600200"/>
+            <a:ext cx="6858000" cy="405130"/>
+          </a:xfrm>
+          <a:prstGeom prst="rect">
+            <a:avLst/>
+          </a:prstGeom>
+          <a:noFill/>
+        </p:spPr>
+        <p:txBody>
+          <a:bodyPr wrap="none" lIns="0" rIns="0" tIns="0" bIns="0" anchor="t">
+            <a:spAutoFit/>
+          </a:bodyPr>
+          <a:lstStyle/>
+          <a:p>
+            <a:pPr algn="l">
+              <a:lnSpc>
+                <a:spcPct val="100000"/>
+              </a:lnSpc>
+            </a:pPr>
+            <a:r>
+              <a:rPr sz="2200" b="1">
+                <a:solidFill>
+                  <a:srgbClr val="94A3B8"/>
+                </a:solidFill>
+                <a:latin typeface="Noto Sans JP"/>
+                <a:ea typeface="Noto Sans JP"/>
+                <a:cs typeface="Noto Sans JP"/>
+              </a:rPr>
+              <a:t>「薬と化粧品、どっちが先？」</a:t>
+            </a:r>
+          </a:p>
+        </p:txBody>
+      </p:sp>
+      <p:sp>
+        <p:nvSpPr>
+          <p:cNvPr id="4" name="Rectangle 3"/>
+          <p:cNvSpPr/>
+          <p:nvPr/>
+        </p:nvSpPr>
+        <p:spPr>
+          <a:xfrm>
+            <a:off x="685800" y="2240280"/>
+            <a:ext cx="548640" cy="45720"/>
+          </a:xfrm>
+          <a:prstGeom prst="rect">
+            <a:avLst/>
+          </a:prstGeom>
+          <a:solidFill>
+            <a:srgbClr val="1B2A4A"/>
+          </a:solidFill>
+          <a:ln>
+            <a:noFill/>
+          </a:ln>
+          <a:effectLst/>
+        </p:spPr>
+        <p:style>
+          <a:lnRef idx="1">
+            <a:schemeClr val="accent1"/>
+          </a:lnRef>
+          <a:fillRef idx="3">
+            <a:schemeClr val="accent1"/>
+          </a:fillRef>
+          <a:effectRef idx="2">
+            <a:schemeClr val="accent1"/>
+          </a:effectRef>
+          <a:fontRef idx="minor">
+            <a:schemeClr val="lt1"/>
+          </a:fontRef>
+        </p:style>
+        <p:txBody>
+          <a:bodyPr rtlCol="0" anchor="ctr" lIns="0" rIns="0" tIns="0" bIns="0"/>
+          <a:lstStyle/>
+          <a:p>
+            <a:pPr algn="ctr"/>
+          </a:p>
+        </p:txBody>
+      </p:sp>
+      <p:sp>
+        <p:nvSpPr>
+          <p:cNvPr id="5" name="TextBox 4"/>
+          <p:cNvSpPr txBox="1"/>
+          <p:nvPr/>
+        </p:nvSpPr>
+        <p:spPr>
+          <a:xfrm>
+            <a:off x="685800" y="2514600"/>
+            <a:ext cx="6858000" cy="1325880"/>
+          </a:xfrm>
+          <a:prstGeom prst="rect">
+            <a:avLst/>
+          </a:prstGeom>
+          <a:noFill/>
+        </p:spPr>
+        <p:txBody>
+          <a:bodyPr wrap="none" lIns="0" rIns="0" tIns="0" bIns="0" anchor="t">
+            <a:spAutoFit/>
+          </a:bodyPr>
+          <a:lstStyle/>
+          <a:p>
+            <a:pPr algn="l">
+              <a:lnSpc>
+                <a:spcPct val="100000"/>
+              </a:lnSpc>
+            </a:pPr>
+            <a:r>
+              <a:rPr sz="3600" b="1">
+                <a:solidFill>
+                  <a:srgbClr val="0F172A"/>
+                </a:solidFill>
+                <a:latin typeface="Noto Sans JP"/>
+                <a:ea typeface="Noto Sans JP"/>
+                <a:cs typeface="Noto Sans JP"/>
+              </a:rPr>
+              <a:t>薬や化粧品を使う順番や、</a:t>
+            </a:r>
+          </a:p>
+          <a:p>
+            <a:pPr algn="l">
+              <a:lnSpc>
+                <a:spcPct val="100000"/>
+              </a:lnSpc>
+            </a:pPr>
+            <a:r>
+              <a:rPr sz="3600" b="1">
+                <a:solidFill>
+                  <a:srgbClr val="0F172A"/>
+                </a:solidFill>
+                <a:latin typeface="Noto Sans JP"/>
+                <a:ea typeface="Noto Sans JP"/>
+                <a:cs typeface="Noto Sans JP"/>
+              </a:rPr>
+              <a:t>詳しい使い方がわかる</a:t>
+            </a:r>
+          </a:p>
+        </p:txBody>
+      </p:sp>
+      <p:sp>
+        <p:nvSpPr>
+          <p:cNvPr id="6" name="TextBox 5"/>
+          <p:cNvSpPr txBox="1"/>
+          <p:nvPr/>
+        </p:nvSpPr>
+        <p:spPr>
+          <a:xfrm>
+            <a:off x="685800" y="4023360"/>
+            <a:ext cx="6858000" cy="736600"/>
+          </a:xfrm>
+          <a:prstGeom prst="rect">
+            <a:avLst/>
+          </a:prstGeom>
+          <a:noFill/>
+        </p:spPr>
+        <p:txBody>
+          <a:bodyPr wrap="none" lIns="0" rIns="0" tIns="0" bIns="0" anchor="t">
+            <a:spAutoFit/>
+          </a:bodyPr>
+          <a:lstStyle/>
+          <a:p>
+            <a:pPr algn="l">
+              <a:lnSpc>
+                <a:spcPct val="100000"/>
+              </a:lnSpc>
+            </a:pPr>
+            <a:r>
+              <a:rPr sz="2000" b="0">
+                <a:solidFill>
+                  <a:srgbClr val="475569"/>
+                </a:solidFill>
+                <a:latin typeface="Noto Sans JP"/>
+                <a:ea typeface="Noto Sans JP"/>
+                <a:cs typeface="Noto Sans JP"/>
+              </a:rPr>
+              <a:t>処方薬と化粧品を一緒に使う日も、</a:t>
+            </a:r>
+          </a:p>
+          <a:p>
+            <a:pPr algn="l">
+              <a:lnSpc>
+                <a:spcPct val="100000"/>
+              </a:lnSpc>
+            </a:pPr>
+            <a:r>
+              <a:rPr sz="2000" b="0">
+                <a:solidFill>
+                  <a:srgbClr val="475569"/>
+                </a:solidFill>
+                <a:latin typeface="Noto Sans JP"/>
+                <a:ea typeface="Noto Sans JP"/>
+                <a:cs typeface="Noto Sans JP"/>
+              </a:rPr>
+              <a:t>どれから、どう塗ればいいか迷わない</a:t>
+            </a:r>
+          </a:p>
+        </p:txBody>
+      </p:sp>
+      <p:sp>
+        <p:nvSpPr>
+          <p:cNvPr id="7" name="Rounded Rectangle 6"/>
+          <p:cNvSpPr/>
+          <p:nvPr/>
+        </p:nvSpPr>
+        <p:spPr>
+          <a:xfrm>
+            <a:off x="8318417" y="466344"/>
+            <a:ext cx="2949733" cy="5925312"/>
+          </a:xfrm>
+          <a:prstGeom prst="roundRect">
+            <a:avLst>
+              <a:gd name="adj" fmla="val 6819"/>
+            </a:avLst>
+          </a:prstGeom>
+          <a:solidFill>
+            <a:srgbClr val="FFFFFF"/>
+          </a:solidFill>
+          <a:ln w="12700">
+            <a:solidFill>
+              <a:srgbClr val="D9DFE7"/>
+            </a:solidFill>
+          </a:ln>
+          <a:effectLst/>
+        </p:spPr>
+        <p:style>
+          <a:lnRef idx="1">
+            <a:schemeClr val="accent1"/>
+          </a:lnRef>
+          <a:fillRef idx="3">
+            <a:schemeClr val="accent1"/>
+          </a:fillRef>
+          <a:effectRef idx="2">
+            <a:schemeClr val="accent1"/>
+          </a:effectRef>
+          <a:fontRef idx="minor">
+            <a:schemeClr val="lt1"/>
+          </a:fontRef>
+        </p:style>
+        <p:txBody>
+          <a:bodyPr rtlCol="0" anchor="ctr" lIns="0" rIns="0" tIns="0" bIns="0"/>
+          <a:lstStyle/>
+          <a:p>
+            <a:pPr algn="ctr"/>
+          </a:p>
+        </p:txBody>
+      </p:sp>
       <p:pic>
         <p:nvPicPr>
-          <p:cNvPr id="2" name="Picture 1" descr="logo.png"/>
+          <p:cNvPr id="8" name="Picture 7" descr="routine-crop.jpg"/>
           <p:cNvPicPr>
             <a:picLocks noChangeAspect="1"/>
           </p:cNvPicPr>
@@ -8088,8 +7995,8 @@
         </p:blipFill>
         <p:spPr>
           <a:xfrm>
-            <a:off x="4242917" y="914400"/>
-            <a:ext cx="1143000" cy="1143000"/>
+            <a:off x="8400713" y="548640"/>
+            <a:ext cx="2785141" cy="5760720"/>
           </a:xfrm>
           <a:prstGeom prst="rect">
             <a:avLst/>
@@ -8098,100 +8005,64 @@
       </p:pic>
       <p:sp>
         <p:nvSpPr>
-          <p:cNvPr id="3" name="TextBox 2"/>
-          <p:cNvSpPr txBox="1"/>
-          <p:nvPr/>
-        </p:nvSpPr>
-        <p:spPr>
-          <a:xfrm>
-            <a:off x="5408777" y="933450"/>
-            <a:ext cx="2722880" cy="1104900"/>
-          </a:xfrm>
-          <a:prstGeom prst="rect">
-            <a:avLst/>
-          </a:prstGeom>
-          <a:noFill/>
-        </p:spPr>
-        <p:txBody>
-          <a:bodyPr wrap="none" lIns="0" rIns="0" tIns="0" bIns="0" anchor="t">
-            <a:spAutoFit/>
-          </a:bodyPr>
-          <a:lstStyle/>
-          <a:p>
-            <a:pPr algn="l">
-              <a:lnSpc>
-                <a:spcPct val="100000"/>
-              </a:lnSpc>
-            </a:pPr>
-            <a:r>
-              <a:rPr sz="6000" b="0">
-                <a:solidFill>
-                  <a:srgbClr val="1B2A4A"/>
-                </a:solidFill>
-                <a:latin typeface="Noto Sans JP"/>
-                <a:ea typeface="Noto Sans JP"/>
-                <a:cs typeface="Noto Sans JP"/>
-              </a:rPr>
-              <a:t>Overlai</a:t>
-            </a:r>
-          </a:p>
-        </p:txBody>
-      </p:sp>
-      <p:sp>
-        <p:nvSpPr>
-          <p:cNvPr id="4" name="TextBox 3"/>
-          <p:cNvSpPr txBox="1"/>
-          <p:nvPr/>
-        </p:nvSpPr>
-        <p:spPr>
-          <a:xfrm>
-            <a:off x="0" y="2514600"/>
-            <a:ext cx="12191695" cy="662940"/>
-          </a:xfrm>
-          <a:prstGeom prst="rect">
-            <a:avLst/>
-          </a:prstGeom>
-          <a:noFill/>
-        </p:spPr>
-        <p:txBody>
-          <a:bodyPr wrap="none" lIns="0" rIns="0" tIns="0" bIns="0" anchor="t">
-            <a:spAutoFit/>
-          </a:bodyPr>
-          <a:lstStyle/>
-          <a:p>
-            <a:pPr algn="ctr">
-              <a:lnSpc>
-                <a:spcPct val="100000"/>
-              </a:lnSpc>
-            </a:pPr>
-            <a:r>
-              <a:rPr sz="3600" b="1">
-                <a:solidFill>
-                  <a:srgbClr val="1B2A4A"/>
-                </a:solidFill>
-                <a:latin typeface="Noto Sans JP"/>
-                <a:ea typeface="Noto Sans JP"/>
-                <a:cs typeface="Noto Sans JP"/>
-              </a:rPr>
-              <a:t>重ねる前に、重ねて見る。</a:t>
-            </a:r>
-          </a:p>
-        </p:txBody>
-      </p:sp>
-      <p:sp>
-        <p:nvSpPr>
-          <p:cNvPr id="5" name="Rounded Rectangle 4"/>
+          <p:cNvPr id="9" name="Rounded Rectangle 8"/>
           <p:cNvSpPr/>
           <p:nvPr/>
         </p:nvSpPr>
         <p:spPr>
           <a:xfrm>
-            <a:off x="685800" y="3931920"/>
-            <a:ext cx="10820095" cy="2240280"/>
+            <a:off x="8450846" y="1101669"/>
+            <a:ext cx="362068" cy="4228368"/>
           </a:xfrm>
           <a:prstGeom prst="roundRect">
             <a:avLst>
-              <a:gd name="adj" fmla="val 8163"/>
+              <a:gd name="adj" fmla="val 15152"/>
+            </a:avLst>
+          </a:prstGeom>
+          <a:noFill/>
+          <a:ln w="28575">
+            <a:solidFill>
+              <a:srgbClr val="1B2A4A"/>
+            </a:solidFill>
+          </a:ln>
+          <a:effectLst/>
+        </p:spPr>
+        <p:style>
+          <a:lnRef idx="1">
+            <a:schemeClr val="accent1"/>
+          </a:lnRef>
+          <a:fillRef idx="3">
+            <a:schemeClr val="accent1"/>
+          </a:fillRef>
+          <a:effectRef idx="2">
+            <a:schemeClr val="accent1"/>
+          </a:effectRef>
+          <a:fontRef idx="minor">
+            <a:schemeClr val="lt1"/>
+          </a:fontRef>
+        </p:style>
+        <p:txBody>
+          <a:bodyPr rtlCol="0" anchor="ctr" lIns="0" rIns="0" tIns="0" bIns="0"/>
+          <a:lstStyle/>
+          <a:p>
+            <a:pPr algn="ctr"/>
+          </a:p>
+        </p:txBody>
+      </p:sp>
+      <p:sp>
+        <p:nvSpPr>
+          <p:cNvPr id="10" name="Rounded Rectangle 9"/>
+          <p:cNvSpPr/>
+          <p:nvPr/>
+        </p:nvSpPr>
+        <p:spPr>
+          <a:xfrm>
+            <a:off x="8423414" y="772485"/>
+            <a:ext cx="995679" cy="301752"/>
+          </a:xfrm>
+          <a:prstGeom prst="roundRect">
+            <a:avLst>
+              <a:gd name="adj" fmla="val 15151"/>
             </a:avLst>
           </a:prstGeom>
           <a:solidFill>
@@ -8217,23 +8088,60 @@
           </a:fontRef>
         </p:style>
         <p:txBody>
-          <a:bodyPr rtlCol="0" anchor="ctr" lIns="0" rIns="0" tIns="0" bIns="0"/>
+          <a:bodyPr rtlCol="0" anchor="ctr" lIns="0" rIns="0" tIns="0" bIns="0" wrap="none"/>
           <a:lstStyle/>
           <a:p>
             <a:pPr algn="ctr"/>
-          </a:p>
-        </p:txBody>
-      </p:sp>
-      <p:sp>
-        <p:nvSpPr>
-          <p:cNvPr id="6" name="TextBox 5"/>
+            <a:r>
+              <a:rPr sz="1600" b="1">
+                <a:solidFill>
+                  <a:srgbClr val="FFFFFF"/>
+                </a:solidFill>
+                <a:latin typeface="Noto Sans JP"/>
+                <a:ea typeface="Noto Sans JP"/>
+                <a:cs typeface="Noto Sans JP"/>
+              </a:rPr>
+              <a:t>塗る順番</a:t>
+            </a:r>
+          </a:p>
+        </p:txBody>
+      </p:sp>
+    </p:spTree>
+  </p:cSld>
+  <p:clrMapOvr>
+    <a:masterClrMapping/>
+  </p:clrMapOvr>
+</p:sld>
+</file>
+
+<file path=ppt/slides/slide8.xml><?xml version="1.0" encoding="utf-8"?>
+<p:sld xmlns:a="http://schemas.openxmlformats.org/drawingml/2006/main" xmlns:p="http://schemas.openxmlformats.org/presentationml/2006/main" xmlns:r="http://schemas.openxmlformats.org/officeDocument/2006/relationships">
+  <p:cSld>
+    <p:bg>
+      <p:bgPr>
+        <a:solidFill>
+          <a:srgbClr val="FFFFFF"/>
+        </a:solidFill>
+        <a:effectLst/>
+      </p:bgPr>
+    </p:bg>
+    <p:spTree>
+      <p:nvGrpSpPr>
+        <p:cNvPr id="1" name=""/>
+        <p:cNvGrpSpPr/>
+        <p:nvPr/>
+      </p:nvGrpSpPr>
+      <p:grpSpPr/>
+      <p:sp>
+        <p:nvSpPr>
+          <p:cNvPr id="2" name="TextBox 1"/>
           <p:cNvSpPr txBox="1"/>
           <p:nvPr/>
         </p:nvSpPr>
         <p:spPr>
           <a:xfrm>
-            <a:off x="1234440" y="4187952"/>
-            <a:ext cx="7315200" cy="589279"/>
+            <a:off x="685800" y="548640"/>
+            <a:ext cx="7315200" cy="368300"/>
           </a:xfrm>
           <a:prstGeom prst="rect">
             <a:avLst/>
@@ -8252,29 +8160,29 @@
               </a:lnSpc>
             </a:pPr>
             <a:r>
-              <a:rPr sz="3200" b="1">
-                <a:solidFill>
-                  <a:srgbClr val="FFFFFF"/>
+              <a:rPr sz="2000" b="1">
+                <a:solidFill>
+                  <a:srgbClr val="2563EB"/>
                 </a:solidFill>
                 <a:latin typeface="Noto Sans JP"/>
                 <a:ea typeface="Noto Sans JP"/>
                 <a:cs typeface="Noto Sans JP"/>
               </a:rPr>
-              <a:t>ぜひ、お試しください</a:t>
-            </a:r>
-          </a:p>
-        </p:txBody>
-      </p:sp>
-      <p:sp>
-        <p:nvSpPr>
-          <p:cNvPr id="7" name="TextBox 6"/>
+              <a:t>しくみ</a:t>
+            </a:r>
+          </a:p>
+        </p:txBody>
+      </p:sp>
+      <p:sp>
+        <p:nvSpPr>
+          <p:cNvPr id="3" name="TextBox 2"/>
           <p:cNvSpPr txBox="1"/>
           <p:nvPr/>
         </p:nvSpPr>
         <p:spPr>
           <a:xfrm>
-            <a:off x="1234440" y="4846320"/>
-            <a:ext cx="7863840" cy="313055"/>
+            <a:off x="685800" y="960120"/>
+            <a:ext cx="10058400" cy="552450"/>
           </a:xfrm>
           <a:prstGeom prst="rect">
             <a:avLst/>
@@ -8293,35 +8201,35 @@
               </a:lnSpc>
             </a:pPr>
             <a:r>
-              <a:rPr sz="1700" b="0">
-                <a:solidFill>
-                  <a:srgbClr val="C9D0DB"/>
+              <a:rPr sz="3000" b="1">
+                <a:solidFill>
+                  <a:srgbClr val="0F172A"/>
                 </a:solidFill>
                 <a:latin typeface="Noto Sans JP"/>
                 <a:ea typeface="Noto Sans JP"/>
                 <a:cs typeface="Noto Sans JP"/>
               </a:rPr>
-              <a:t>インストール不要。見本の薬・化粧品が入った状態で開きます</a:t>
-            </a:r>
-          </a:p>
-        </p:txBody>
-      </p:sp>
-      <p:sp>
-        <p:nvSpPr>
-          <p:cNvPr id="8" name="Rectangle 7"/>
+              <a:t>家で一度登録すれば、店では撮るだけ。</a:t>
+            </a:r>
+          </a:p>
+        </p:txBody>
+      </p:sp>
+      <p:sp>
+        <p:nvSpPr>
+          <p:cNvPr id="4" name="Rectangle 3"/>
           <p:cNvSpPr/>
           <p:nvPr/>
         </p:nvSpPr>
         <p:spPr>
           <a:xfrm>
-            <a:off x="1234440" y="5321808"/>
-            <a:ext cx="7756855" cy="10972"/>
+            <a:off x="902970" y="2212848"/>
+            <a:ext cx="22860" cy="3108960"/>
           </a:xfrm>
           <a:prstGeom prst="rect">
             <a:avLst/>
           </a:prstGeom>
           <a:solidFill>
-            <a:srgbClr val="4D5972"/>
+            <a:srgbClr val="C9D0DB"/>
           </a:solidFill>
           <a:ln>
             <a:noFill/>
@@ -8352,14 +8260,71 @@
       </p:sp>
       <p:sp>
         <p:nvSpPr>
-          <p:cNvPr id="9" name="TextBox 8"/>
+          <p:cNvPr id="5" name="Rounded Rectangle 4"/>
+          <p:cNvSpPr/>
+          <p:nvPr/>
+        </p:nvSpPr>
+        <p:spPr>
+          <a:xfrm>
+            <a:off x="685800" y="1984248"/>
+            <a:ext cx="457200" cy="457200"/>
+          </a:xfrm>
+          <a:prstGeom prst="roundRect">
+            <a:avLst>
+              <a:gd name="adj" fmla="val 50000"/>
+            </a:avLst>
+          </a:prstGeom>
+          <a:solidFill>
+            <a:srgbClr val="1B2A4A"/>
+          </a:solidFill>
+          <a:ln>
+            <a:noFill/>
+          </a:ln>
+          <a:effectLst/>
+        </p:spPr>
+        <p:style>
+          <a:lnRef idx="1">
+            <a:schemeClr val="accent1"/>
+          </a:lnRef>
+          <a:fillRef idx="3">
+            <a:schemeClr val="accent1"/>
+          </a:fillRef>
+          <a:effectRef idx="2">
+            <a:schemeClr val="accent1"/>
+          </a:effectRef>
+          <a:fontRef idx="minor">
+            <a:schemeClr val="lt1"/>
+          </a:fontRef>
+        </p:style>
+        <p:txBody>
+          <a:bodyPr rtlCol="0" anchor="ctr" lIns="0" rIns="0" tIns="0" bIns="0" wrap="none"/>
+          <a:lstStyle/>
+          <a:p>
+            <a:pPr algn="ctr"/>
+            <a:r>
+              <a:rPr sz="1800" b="1">
+                <a:solidFill>
+                  <a:srgbClr val="FFFFFF"/>
+                </a:solidFill>
+                <a:latin typeface="Noto Sans JP"/>
+                <a:ea typeface="Noto Sans JP"/>
+                <a:cs typeface="Noto Sans JP"/>
+              </a:rPr>
+              <a:t>1</a:t>
+            </a:r>
+          </a:p>
+        </p:txBody>
+      </p:sp>
+      <p:sp>
+        <p:nvSpPr>
+          <p:cNvPr id="6" name="TextBox 5"/>
           <p:cNvSpPr txBox="1"/>
           <p:nvPr/>
         </p:nvSpPr>
         <p:spPr>
           <a:xfrm>
-            <a:off x="1234440" y="5431536"/>
-            <a:ext cx="7315200" cy="257810"/>
+            <a:off x="1417320" y="2002536"/>
+            <a:ext cx="2743200" cy="313055"/>
           </a:xfrm>
           <a:prstGeom prst="rect">
             <a:avLst/>
@@ -8378,29 +8343,29 @@
               </a:lnSpc>
             </a:pPr>
             <a:r>
-              <a:rPr sz="1400" b="0">
-                <a:solidFill>
-                  <a:srgbClr val="C9D0DB"/>
+              <a:rPr sz="1700" b="1">
+                <a:solidFill>
+                  <a:srgbClr val="475569"/>
                 </a:solidFill>
                 <a:latin typeface="Noto Sans JP"/>
                 <a:ea typeface="Noto Sans JP"/>
                 <a:cs typeface="Noto Sans JP"/>
               </a:rPr>
-              <a:t>ユメカタリ 学生生成AIコンテスト 2026｜開発部門</a:t>
-            </a:r>
-          </a:p>
-        </p:txBody>
-      </p:sp>
-      <p:sp>
-        <p:nvSpPr>
-          <p:cNvPr id="10" name="TextBox 9"/>
+              <a:t>家で</a:t>
+            </a:r>
+          </a:p>
+        </p:txBody>
+      </p:sp>
+      <p:sp>
+        <p:nvSpPr>
+          <p:cNvPr id="7" name="TextBox 6"/>
           <p:cNvSpPr txBox="1"/>
           <p:nvPr/>
         </p:nvSpPr>
         <p:spPr>
           <a:xfrm>
-            <a:off x="1234440" y="5689345"/>
-            <a:ext cx="1869439" cy="257810"/>
+            <a:off x="1417320" y="2377440"/>
+            <a:ext cx="4892040" cy="515620"/>
           </a:xfrm>
           <a:prstGeom prst="rect">
             <a:avLst/>
@@ -8419,29 +8384,29 @@
               </a:lnSpc>
             </a:pPr>
             <a:r>
-              <a:rPr sz="1400" b="1">
-                <a:solidFill>
-                  <a:srgbClr val="FFFFFF"/>
+              <a:rPr sz="2800" b="1">
+                <a:solidFill>
+                  <a:srgbClr val="1B2A4A"/>
                 </a:solidFill>
                 <a:latin typeface="Noto Sans JP"/>
                 <a:ea typeface="Noto Sans JP"/>
                 <a:cs typeface="Noto Sans JP"/>
               </a:rPr>
-              <a:t>鈴鹿工業高等専門学校</a:t>
-            </a:r>
-          </a:p>
-        </p:txBody>
-      </p:sp>
-      <p:sp>
-        <p:nvSpPr>
-          <p:cNvPr id="11" name="TextBox 10"/>
+              <a:t>薬・化粧品を撮って登録</a:t>
+            </a:r>
+          </a:p>
+        </p:txBody>
+      </p:sp>
+      <p:sp>
+        <p:nvSpPr>
+          <p:cNvPr id="8" name="TextBox 7"/>
           <p:cNvSpPr txBox="1"/>
           <p:nvPr/>
         </p:nvSpPr>
         <p:spPr>
           <a:xfrm>
-            <a:off x="3241040" y="5689345"/>
-            <a:ext cx="4572000" cy="257810"/>
+            <a:off x="1417320" y="2898648"/>
+            <a:ext cx="4892040" cy="313055"/>
           </a:xfrm>
           <a:prstGeom prst="rect">
             <a:avLst/>
@@ -8460,37 +8425,35 @@
               </a:lnSpc>
             </a:pPr>
             <a:r>
-              <a:rPr sz="1400" b="0">
-                <a:solidFill>
-                  <a:srgbClr val="C9D0DB"/>
+              <a:rPr sz="1700" b="0">
+                <a:solidFill>
+                  <a:srgbClr val="475569"/>
                 </a:solidFill>
                 <a:latin typeface="Noto Sans JP"/>
                 <a:ea typeface="Noto Sans JP"/>
                 <a:cs typeface="Noto Sans JP"/>
               </a:rPr>
-              <a:t>井上 高志・濱田 圭太郎・杉本 隼都</a:t>
-            </a:r>
-          </a:p>
-        </p:txBody>
-      </p:sp>
-      <p:sp>
-        <p:nvSpPr>
-          <p:cNvPr id="12" name="Rounded Rectangle 11"/>
+              <a:t>AIが成分表示を読み取る</a:t>
+            </a:r>
+          </a:p>
+        </p:txBody>
+      </p:sp>
+      <p:sp>
+        <p:nvSpPr>
+          <p:cNvPr id="9" name="Rectangle 8"/>
           <p:cNvSpPr/>
           <p:nvPr/>
         </p:nvSpPr>
         <p:spPr>
           <a:xfrm>
-            <a:off x="9539935" y="4206240"/>
-            <a:ext cx="1691640" cy="1691640"/>
-          </a:xfrm>
-          <a:prstGeom prst="roundRect">
-            <a:avLst>
-              <a:gd name="adj" fmla="val 4324"/>
-            </a:avLst>
+            <a:off x="6492240" y="2057400"/>
+            <a:ext cx="45720" cy="1097280"/>
+          </a:xfrm>
+          <a:prstGeom prst="rect">
+            <a:avLst/>
           </a:prstGeom>
           <a:solidFill>
-            <a:srgbClr val="FFFFFF"/>
+            <a:srgbClr val="C9D0DB"/>
           </a:solidFill>
           <a:ln>
             <a:noFill/>
@@ -8519,30 +8482,1464 @@
           </a:p>
         </p:txBody>
       </p:sp>
-      <p:pic>
-        <p:nvPicPr>
-          <p:cNvPr id="13" name="Picture 12" descr="qr.png"/>
-          <p:cNvPicPr>
-            <a:picLocks noChangeAspect="1"/>
-          </p:cNvPicPr>
-          <p:nvPr/>
-        </p:nvPicPr>
-        <p:blipFill>
-          <a:blip r:embed="rId3"/>
-          <a:stretch>
-            <a:fillRect/>
-          </a:stretch>
-        </p:blipFill>
-        <p:spPr>
-          <a:xfrm>
-            <a:off x="9594799" y="4261103"/>
-            <a:ext cx="1581912" cy="1581912"/>
+      <p:sp>
+        <p:nvSpPr>
+          <p:cNvPr id="10" name="TextBox 9"/>
+          <p:cNvSpPr txBox="1"/>
+          <p:nvPr/>
+        </p:nvSpPr>
+        <p:spPr>
+          <a:xfrm>
+            <a:off x="6766559" y="2020824"/>
+            <a:ext cx="4739335" cy="405130"/>
           </a:xfrm>
           <a:prstGeom prst="rect">
             <a:avLst/>
           </a:prstGeom>
-        </p:spPr>
-      </p:pic>
+          <a:noFill/>
+        </p:spPr>
+        <p:txBody>
+          <a:bodyPr wrap="none" lIns="0" rIns="0" tIns="0" bIns="0" anchor="t">
+            <a:spAutoFit/>
+          </a:bodyPr>
+          <a:lstStyle/>
+          <a:p>
+            <a:pPr algn="l">
+              <a:lnSpc>
+                <a:spcPct val="100000"/>
+              </a:lnSpc>
+            </a:pPr>
+            <a:r>
+              <a:rPr sz="2200" b="1">
+                <a:solidFill>
+                  <a:srgbClr val="0F172A"/>
+                </a:solidFill>
+                <a:latin typeface="Noto Sans JP"/>
+                <a:ea typeface="Noto Sans JP"/>
+                <a:cs typeface="Noto Sans JP"/>
+              </a:rPr>
+              <a:t>自分の体質も登録できる</a:t>
+            </a:r>
+          </a:p>
+        </p:txBody>
+      </p:sp>
+      <p:sp>
+        <p:nvSpPr>
+          <p:cNvPr id="11" name="TextBox 10"/>
+          <p:cNvSpPr txBox="1"/>
+          <p:nvPr/>
+        </p:nvSpPr>
+        <p:spPr>
+          <a:xfrm>
+            <a:off x="6766559" y="2496312"/>
+            <a:ext cx="4739335" cy="662940"/>
+          </a:xfrm>
+          <a:prstGeom prst="rect">
+            <a:avLst/>
+          </a:prstGeom>
+          <a:noFill/>
+        </p:spPr>
+        <p:txBody>
+          <a:bodyPr wrap="none" lIns="0" rIns="0" tIns="0" bIns="0" anchor="t">
+            <a:spAutoFit/>
+          </a:bodyPr>
+          <a:lstStyle/>
+          <a:p>
+            <a:pPr algn="l">
+              <a:lnSpc>
+                <a:spcPct val="100000"/>
+              </a:lnSpc>
+            </a:pPr>
+            <a:r>
+              <a:rPr sz="1800" b="0">
+                <a:solidFill>
+                  <a:srgbClr val="475569"/>
+                </a:solidFill>
+                <a:latin typeface="Noto Sans JP"/>
+                <a:ea typeface="Noto Sans JP"/>
+                <a:cs typeface="Noto Sans JP"/>
+              </a:rPr>
+              <a:t>肌質や年代、悩みを登録すると、</a:t>
+            </a:r>
+          </a:p>
+          <a:p>
+            <a:pPr algn="l">
+              <a:lnSpc>
+                <a:spcPct val="100000"/>
+              </a:lnSpc>
+            </a:pPr>
+            <a:r>
+              <a:rPr sz="1800" b="0">
+                <a:solidFill>
+                  <a:srgbClr val="475569"/>
+                </a:solidFill>
+                <a:latin typeface="Noto Sans JP"/>
+                <a:ea typeface="Noto Sans JP"/>
+                <a:cs typeface="Noto Sans JP"/>
+              </a:rPr>
+              <a:t>使い方の助言がパーソナライズされる</a:t>
+            </a:r>
+          </a:p>
+        </p:txBody>
+      </p:sp>
+      <p:sp>
+        <p:nvSpPr>
+          <p:cNvPr id="12" name="Rounded Rectangle 11"/>
+          <p:cNvSpPr/>
+          <p:nvPr/>
+        </p:nvSpPr>
+        <p:spPr>
+          <a:xfrm>
+            <a:off x="685800" y="3538727"/>
+            <a:ext cx="457200" cy="457200"/>
+          </a:xfrm>
+          <a:prstGeom prst="roundRect">
+            <a:avLst>
+              <a:gd name="adj" fmla="val 50000"/>
+            </a:avLst>
+          </a:prstGeom>
+          <a:solidFill>
+            <a:srgbClr val="1B2A4A"/>
+          </a:solidFill>
+          <a:ln>
+            <a:noFill/>
+          </a:ln>
+          <a:effectLst/>
+        </p:spPr>
+        <p:style>
+          <a:lnRef idx="1">
+            <a:schemeClr val="accent1"/>
+          </a:lnRef>
+          <a:fillRef idx="3">
+            <a:schemeClr val="accent1"/>
+          </a:fillRef>
+          <a:effectRef idx="2">
+            <a:schemeClr val="accent1"/>
+          </a:effectRef>
+          <a:fontRef idx="minor">
+            <a:schemeClr val="lt1"/>
+          </a:fontRef>
+        </p:style>
+        <p:txBody>
+          <a:bodyPr rtlCol="0" anchor="ctr" lIns="0" rIns="0" tIns="0" bIns="0" wrap="none"/>
+          <a:lstStyle/>
+          <a:p>
+            <a:pPr algn="ctr"/>
+            <a:r>
+              <a:rPr sz="1800" b="1">
+                <a:solidFill>
+                  <a:srgbClr val="FFFFFF"/>
+                </a:solidFill>
+                <a:latin typeface="Noto Sans JP"/>
+                <a:ea typeface="Noto Sans JP"/>
+                <a:cs typeface="Noto Sans JP"/>
+              </a:rPr>
+              <a:t>2</a:t>
+            </a:r>
+          </a:p>
+        </p:txBody>
+      </p:sp>
+      <p:sp>
+        <p:nvSpPr>
+          <p:cNvPr id="13" name="TextBox 12"/>
+          <p:cNvSpPr txBox="1"/>
+          <p:nvPr/>
+        </p:nvSpPr>
+        <p:spPr>
+          <a:xfrm>
+            <a:off x="1417320" y="3557015"/>
+            <a:ext cx="2743200" cy="313055"/>
+          </a:xfrm>
+          <a:prstGeom prst="rect">
+            <a:avLst/>
+          </a:prstGeom>
+          <a:noFill/>
+        </p:spPr>
+        <p:txBody>
+          <a:bodyPr wrap="none" lIns="0" rIns="0" tIns="0" bIns="0" anchor="t">
+            <a:spAutoFit/>
+          </a:bodyPr>
+          <a:lstStyle/>
+          <a:p>
+            <a:pPr algn="l">
+              <a:lnSpc>
+                <a:spcPct val="100000"/>
+              </a:lnSpc>
+            </a:pPr>
+            <a:r>
+              <a:rPr sz="1700" b="1">
+                <a:solidFill>
+                  <a:srgbClr val="475569"/>
+                </a:solidFill>
+                <a:latin typeface="Noto Sans JP"/>
+                <a:ea typeface="Noto Sans JP"/>
+                <a:cs typeface="Noto Sans JP"/>
+              </a:rPr>
+              <a:t>店で</a:t>
+            </a:r>
+          </a:p>
+        </p:txBody>
+      </p:sp>
+      <p:sp>
+        <p:nvSpPr>
+          <p:cNvPr id="14" name="TextBox 13"/>
+          <p:cNvSpPr txBox="1"/>
+          <p:nvPr/>
+        </p:nvSpPr>
+        <p:spPr>
+          <a:xfrm>
+            <a:off x="1417320" y="3931920"/>
+            <a:ext cx="4892040" cy="515620"/>
+          </a:xfrm>
+          <a:prstGeom prst="rect">
+            <a:avLst/>
+          </a:prstGeom>
+          <a:noFill/>
+        </p:spPr>
+        <p:txBody>
+          <a:bodyPr wrap="none" lIns="0" rIns="0" tIns="0" bIns="0" anchor="t">
+            <a:spAutoFit/>
+          </a:bodyPr>
+          <a:lstStyle/>
+          <a:p>
+            <a:pPr algn="l">
+              <a:lnSpc>
+                <a:spcPct val="100000"/>
+              </a:lnSpc>
+            </a:pPr>
+            <a:r>
+              <a:rPr sz="2800" b="1">
+                <a:solidFill>
+                  <a:srgbClr val="1B2A4A"/>
+                </a:solidFill>
+                <a:latin typeface="Noto Sans JP"/>
+                <a:ea typeface="Noto Sans JP"/>
+                <a:cs typeface="Noto Sans JP"/>
+              </a:rPr>
+              <a:t>気になる商品を撮る</a:t>
+            </a:r>
+          </a:p>
+        </p:txBody>
+      </p:sp>
+      <p:sp>
+        <p:nvSpPr>
+          <p:cNvPr id="15" name="TextBox 14"/>
+          <p:cNvSpPr txBox="1"/>
+          <p:nvPr/>
+        </p:nvSpPr>
+        <p:spPr>
+          <a:xfrm>
+            <a:off x="1417320" y="4453127"/>
+            <a:ext cx="4892040" cy="313055"/>
+          </a:xfrm>
+          <a:prstGeom prst="rect">
+            <a:avLst/>
+          </a:prstGeom>
+          <a:noFill/>
+        </p:spPr>
+        <p:txBody>
+          <a:bodyPr wrap="none" lIns="0" rIns="0" tIns="0" bIns="0" anchor="t">
+            <a:spAutoFit/>
+          </a:bodyPr>
+          <a:lstStyle/>
+          <a:p>
+            <a:pPr algn="l">
+              <a:lnSpc>
+                <a:spcPct val="100000"/>
+              </a:lnSpc>
+            </a:pPr>
+            <a:r>
+              <a:rPr sz="1700" b="0">
+                <a:solidFill>
+                  <a:srgbClr val="475569"/>
+                </a:solidFill>
+                <a:latin typeface="Noto Sans JP"/>
+                <a:ea typeface="Noto Sans JP"/>
+                <a:cs typeface="Noto Sans JP"/>
+              </a:rPr>
+              <a:t>AIが家のものと照らし合わせる</a:t>
+            </a:r>
+          </a:p>
+        </p:txBody>
+      </p:sp>
+      <p:sp>
+        <p:nvSpPr>
+          <p:cNvPr id="16" name="Rectangle 15"/>
+          <p:cNvSpPr/>
+          <p:nvPr/>
+        </p:nvSpPr>
+        <p:spPr>
+          <a:xfrm>
+            <a:off x="6492240" y="3611879"/>
+            <a:ext cx="45720" cy="1097280"/>
+          </a:xfrm>
+          <a:prstGeom prst="rect">
+            <a:avLst/>
+          </a:prstGeom>
+          <a:solidFill>
+            <a:srgbClr val="C9D0DB"/>
+          </a:solidFill>
+          <a:ln>
+            <a:noFill/>
+          </a:ln>
+          <a:effectLst/>
+        </p:spPr>
+        <p:style>
+          <a:lnRef idx="1">
+            <a:schemeClr val="accent1"/>
+          </a:lnRef>
+          <a:fillRef idx="3">
+            <a:schemeClr val="accent1"/>
+          </a:fillRef>
+          <a:effectRef idx="2">
+            <a:schemeClr val="accent1"/>
+          </a:effectRef>
+          <a:fontRef idx="minor">
+            <a:schemeClr val="lt1"/>
+          </a:fontRef>
+        </p:style>
+        <p:txBody>
+          <a:bodyPr rtlCol="0" anchor="ctr" lIns="0" rIns="0" tIns="0" bIns="0"/>
+          <a:lstStyle/>
+          <a:p>
+            <a:pPr algn="ctr"/>
+          </a:p>
+        </p:txBody>
+      </p:sp>
+      <p:sp>
+        <p:nvSpPr>
+          <p:cNvPr id="17" name="TextBox 16"/>
+          <p:cNvSpPr txBox="1"/>
+          <p:nvPr/>
+        </p:nvSpPr>
+        <p:spPr>
+          <a:xfrm>
+            <a:off x="6766559" y="3575303"/>
+            <a:ext cx="4739335" cy="405130"/>
+          </a:xfrm>
+          <a:prstGeom prst="rect">
+            <a:avLst/>
+          </a:prstGeom>
+          <a:noFill/>
+        </p:spPr>
+        <p:txBody>
+          <a:bodyPr wrap="none" lIns="0" rIns="0" tIns="0" bIns="0" anchor="t">
+            <a:spAutoFit/>
+          </a:bodyPr>
+          <a:lstStyle/>
+          <a:p>
+            <a:pPr algn="l">
+              <a:lnSpc>
+                <a:spcPct val="100000"/>
+              </a:lnSpc>
+            </a:pPr>
+            <a:r>
+              <a:rPr sz="2200" b="1">
+                <a:solidFill>
+                  <a:srgbClr val="0F172A"/>
+                </a:solidFill>
+                <a:latin typeface="Noto Sans JP"/>
+                <a:ea typeface="Noto Sans JP"/>
+                <a:cs typeface="Noto Sans JP"/>
+              </a:rPr>
+              <a:t>撮るだけで、すぐ確かめられる</a:t>
+            </a:r>
+          </a:p>
+        </p:txBody>
+      </p:sp>
+      <p:sp>
+        <p:nvSpPr>
+          <p:cNvPr id="18" name="TextBox 17"/>
+          <p:cNvSpPr txBox="1"/>
+          <p:nvPr/>
+        </p:nvSpPr>
+        <p:spPr>
+          <a:xfrm>
+            <a:off x="6766559" y="4050791"/>
+            <a:ext cx="4739335" cy="662940"/>
+          </a:xfrm>
+          <a:prstGeom prst="rect">
+            <a:avLst/>
+          </a:prstGeom>
+          <a:noFill/>
+        </p:spPr>
+        <p:txBody>
+          <a:bodyPr wrap="none" lIns="0" rIns="0" tIns="0" bIns="0" anchor="t">
+            <a:spAutoFit/>
+          </a:bodyPr>
+          <a:lstStyle/>
+          <a:p>
+            <a:pPr algn="l">
+              <a:lnSpc>
+                <a:spcPct val="100000"/>
+              </a:lnSpc>
+            </a:pPr>
+            <a:r>
+              <a:rPr sz="1800" b="0">
+                <a:solidFill>
+                  <a:srgbClr val="475569"/>
+                </a:solidFill>
+                <a:latin typeface="Noto Sans JP"/>
+                <a:ea typeface="Noto Sans JP"/>
+                <a:cs typeface="Noto Sans JP"/>
+              </a:rPr>
+              <a:t>商品名の入力も検索もいらない</a:t>
+            </a:r>
+          </a:p>
+          <a:p>
+            <a:pPr algn="l">
+              <a:lnSpc>
+                <a:spcPct val="100000"/>
+              </a:lnSpc>
+            </a:pPr>
+            <a:r>
+              <a:rPr sz="1800" b="0">
+                <a:solidFill>
+                  <a:srgbClr val="475569"/>
+                </a:solidFill>
+                <a:latin typeface="Noto Sans JP"/>
+                <a:ea typeface="Noto Sans JP"/>
+                <a:cs typeface="Noto Sans JP"/>
+              </a:rPr>
+              <a:t>店先で成分表示を1枚撮れば済む</a:t>
+            </a:r>
+          </a:p>
+        </p:txBody>
+      </p:sp>
+      <p:sp>
+        <p:nvSpPr>
+          <p:cNvPr id="19" name="Rounded Rectangle 18"/>
+          <p:cNvSpPr/>
+          <p:nvPr/>
+        </p:nvSpPr>
+        <p:spPr>
+          <a:xfrm>
+            <a:off x="685800" y="5093207"/>
+            <a:ext cx="457200" cy="457200"/>
+          </a:xfrm>
+          <a:prstGeom prst="roundRect">
+            <a:avLst>
+              <a:gd name="adj" fmla="val 50000"/>
+            </a:avLst>
+          </a:prstGeom>
+          <a:solidFill>
+            <a:srgbClr val="1B2A4A"/>
+          </a:solidFill>
+          <a:ln>
+            <a:noFill/>
+          </a:ln>
+          <a:effectLst/>
+        </p:spPr>
+        <p:style>
+          <a:lnRef idx="1">
+            <a:schemeClr val="accent1"/>
+          </a:lnRef>
+          <a:fillRef idx="3">
+            <a:schemeClr val="accent1"/>
+          </a:fillRef>
+          <a:effectRef idx="2">
+            <a:schemeClr val="accent1"/>
+          </a:effectRef>
+          <a:fontRef idx="minor">
+            <a:schemeClr val="lt1"/>
+          </a:fontRef>
+        </p:style>
+        <p:txBody>
+          <a:bodyPr rtlCol="0" anchor="ctr" lIns="0" rIns="0" tIns="0" bIns="0" wrap="none"/>
+          <a:lstStyle/>
+          <a:p>
+            <a:pPr algn="ctr"/>
+            <a:r>
+              <a:rPr sz="1800" b="1">
+                <a:solidFill>
+                  <a:srgbClr val="FFFFFF"/>
+                </a:solidFill>
+                <a:latin typeface="Noto Sans JP"/>
+                <a:ea typeface="Noto Sans JP"/>
+                <a:cs typeface="Noto Sans JP"/>
+              </a:rPr>
+              <a:t>3</a:t>
+            </a:r>
+          </a:p>
+        </p:txBody>
+      </p:sp>
+      <p:sp>
+        <p:nvSpPr>
+          <p:cNvPr id="20" name="TextBox 19"/>
+          <p:cNvSpPr txBox="1"/>
+          <p:nvPr/>
+        </p:nvSpPr>
+        <p:spPr>
+          <a:xfrm>
+            <a:off x="1417320" y="5111496"/>
+            <a:ext cx="2743200" cy="313055"/>
+          </a:xfrm>
+          <a:prstGeom prst="rect">
+            <a:avLst/>
+          </a:prstGeom>
+          <a:noFill/>
+        </p:spPr>
+        <p:txBody>
+          <a:bodyPr wrap="none" lIns="0" rIns="0" tIns="0" bIns="0" anchor="t">
+            <a:spAutoFit/>
+          </a:bodyPr>
+          <a:lstStyle/>
+          <a:p>
+            <a:pPr algn="l">
+              <a:lnSpc>
+                <a:spcPct val="100000"/>
+              </a:lnSpc>
+            </a:pPr>
+            <a:r>
+              <a:rPr sz="1700" b="1">
+                <a:solidFill>
+                  <a:srgbClr val="475569"/>
+                </a:solidFill>
+                <a:latin typeface="Noto Sans JP"/>
+                <a:ea typeface="Noto Sans JP"/>
+                <a:cs typeface="Noto Sans JP"/>
+              </a:rPr>
+              <a:t>その場で</a:t>
+            </a:r>
+          </a:p>
+        </p:txBody>
+      </p:sp>
+      <p:sp>
+        <p:nvSpPr>
+          <p:cNvPr id="21" name="TextBox 20"/>
+          <p:cNvSpPr txBox="1"/>
+          <p:nvPr/>
+        </p:nvSpPr>
+        <p:spPr>
+          <a:xfrm>
+            <a:off x="1417320" y="5486400"/>
+            <a:ext cx="4892040" cy="515620"/>
+          </a:xfrm>
+          <a:prstGeom prst="rect">
+            <a:avLst/>
+          </a:prstGeom>
+          <a:noFill/>
+        </p:spPr>
+        <p:txBody>
+          <a:bodyPr wrap="none" lIns="0" rIns="0" tIns="0" bIns="0" anchor="t">
+            <a:spAutoFit/>
+          </a:bodyPr>
+          <a:lstStyle/>
+          <a:p>
+            <a:pPr algn="l">
+              <a:lnSpc>
+                <a:spcPct val="100000"/>
+              </a:lnSpc>
+            </a:pPr>
+            <a:r>
+              <a:rPr sz="2800" b="1">
+                <a:solidFill>
+                  <a:srgbClr val="1B2A4A"/>
+                </a:solidFill>
+                <a:latin typeface="Noto Sans JP"/>
+                <a:ea typeface="Noto Sans JP"/>
+                <a:cs typeface="Noto Sans JP"/>
+              </a:rPr>
+              <a:t>買うべきかの目安が出る</a:t>
+            </a:r>
+          </a:p>
+        </p:txBody>
+      </p:sp>
+      <p:sp>
+        <p:nvSpPr>
+          <p:cNvPr id="22" name="TextBox 21"/>
+          <p:cNvSpPr txBox="1"/>
+          <p:nvPr/>
+        </p:nvSpPr>
+        <p:spPr>
+          <a:xfrm>
+            <a:off x="1417320" y="6007608"/>
+            <a:ext cx="4892040" cy="313055"/>
+          </a:xfrm>
+          <a:prstGeom prst="rect">
+            <a:avLst/>
+          </a:prstGeom>
+          <a:noFill/>
+        </p:spPr>
+        <p:txBody>
+          <a:bodyPr wrap="none" lIns="0" rIns="0" tIns="0" bIns="0" anchor="t">
+            <a:spAutoFit/>
+          </a:bodyPr>
+          <a:lstStyle/>
+          <a:p>
+            <a:pPr algn="l">
+              <a:lnSpc>
+                <a:spcPct val="100000"/>
+              </a:lnSpc>
+            </a:pPr>
+            <a:r>
+              <a:rPr sz="1700" b="0">
+                <a:solidFill>
+                  <a:srgbClr val="475569"/>
+                </a:solidFill>
+                <a:latin typeface="Noto Sans JP"/>
+                <a:ea typeface="Noto Sans JP"/>
+                <a:cs typeface="Noto Sans JP"/>
+              </a:rPr>
+              <a:t>3色の判定と、成分名つきの理由</a:t>
+            </a:r>
+          </a:p>
+        </p:txBody>
+      </p:sp>
+      <p:sp>
+        <p:nvSpPr>
+          <p:cNvPr id="23" name="Rectangle 22"/>
+          <p:cNvSpPr/>
+          <p:nvPr/>
+        </p:nvSpPr>
+        <p:spPr>
+          <a:xfrm>
+            <a:off x="6492240" y="5166359"/>
+            <a:ext cx="45720" cy="1097280"/>
+          </a:xfrm>
+          <a:prstGeom prst="rect">
+            <a:avLst/>
+          </a:prstGeom>
+          <a:solidFill>
+            <a:srgbClr val="C9D0DB"/>
+          </a:solidFill>
+          <a:ln>
+            <a:noFill/>
+          </a:ln>
+          <a:effectLst/>
+        </p:spPr>
+        <p:style>
+          <a:lnRef idx="1">
+            <a:schemeClr val="accent1"/>
+          </a:lnRef>
+          <a:fillRef idx="3">
+            <a:schemeClr val="accent1"/>
+          </a:fillRef>
+          <a:effectRef idx="2">
+            <a:schemeClr val="accent1"/>
+          </a:effectRef>
+          <a:fontRef idx="minor">
+            <a:schemeClr val="lt1"/>
+          </a:fontRef>
+        </p:style>
+        <p:txBody>
+          <a:bodyPr rtlCol="0" anchor="ctr" lIns="0" rIns="0" tIns="0" bIns="0"/>
+          <a:lstStyle/>
+          <a:p>
+            <a:pPr algn="ctr"/>
+          </a:p>
+        </p:txBody>
+      </p:sp>
+      <p:sp>
+        <p:nvSpPr>
+          <p:cNvPr id="24" name="TextBox 23"/>
+          <p:cNvSpPr txBox="1"/>
+          <p:nvPr/>
+        </p:nvSpPr>
+        <p:spPr>
+          <a:xfrm>
+            <a:off x="6766559" y="5129783"/>
+            <a:ext cx="4739335" cy="405130"/>
+          </a:xfrm>
+          <a:prstGeom prst="rect">
+            <a:avLst/>
+          </a:prstGeom>
+          <a:noFill/>
+        </p:spPr>
+        <p:txBody>
+          <a:bodyPr wrap="none" lIns="0" rIns="0" tIns="0" bIns="0" anchor="t">
+            <a:spAutoFit/>
+          </a:bodyPr>
+          <a:lstStyle/>
+          <a:p>
+            <a:pPr algn="l">
+              <a:lnSpc>
+                <a:spcPct val="100000"/>
+              </a:lnSpc>
+            </a:pPr>
+            <a:r>
+              <a:rPr sz="2200" b="1">
+                <a:solidFill>
+                  <a:srgbClr val="0F172A"/>
+                </a:solidFill>
+                <a:latin typeface="Noto Sans JP"/>
+                <a:ea typeface="Noto Sans JP"/>
+                <a:cs typeface="Noto Sans JP"/>
+              </a:rPr>
+              <a:t>理由に根拠と出典を添える</a:t>
+            </a:r>
+          </a:p>
+        </p:txBody>
+      </p:sp>
+      <p:sp>
+        <p:nvSpPr>
+          <p:cNvPr id="25" name="TextBox 24"/>
+          <p:cNvSpPr txBox="1"/>
+          <p:nvPr/>
+        </p:nvSpPr>
+        <p:spPr>
+          <a:xfrm>
+            <a:off x="6766559" y="5605272"/>
+            <a:ext cx="4739335" cy="662940"/>
+          </a:xfrm>
+          <a:prstGeom prst="rect">
+            <a:avLst/>
+          </a:prstGeom>
+          <a:noFill/>
+        </p:spPr>
+        <p:txBody>
+          <a:bodyPr wrap="none" lIns="0" rIns="0" tIns="0" bIns="0" anchor="t">
+            <a:spAutoFit/>
+          </a:bodyPr>
+          <a:lstStyle/>
+          <a:p>
+            <a:pPr algn="l">
+              <a:lnSpc>
+                <a:spcPct val="100000"/>
+              </a:lnSpc>
+            </a:pPr>
+            <a:r>
+              <a:rPr sz="1800" b="0">
+                <a:solidFill>
+                  <a:srgbClr val="475569"/>
+                </a:solidFill>
+                <a:latin typeface="Noto Sans JP"/>
+                <a:ea typeface="Noto Sans JP"/>
+                <a:cs typeface="Noto Sans JP"/>
+              </a:rPr>
+              <a:t>根拠の薄い推測は、最初から出さない</a:t>
+            </a:r>
+          </a:p>
+          <a:p>
+            <a:pPr algn="l">
+              <a:lnSpc>
+                <a:spcPct val="100000"/>
+              </a:lnSpc>
+            </a:pPr>
+            <a:r>
+              <a:rPr sz="1800" b="0">
+                <a:solidFill>
+                  <a:srgbClr val="475569"/>
+                </a:solidFill>
+                <a:latin typeface="Noto Sans JP"/>
+                <a:ea typeface="Noto Sans JP"/>
+                <a:cs typeface="Noto Sans JP"/>
+              </a:rPr>
+              <a:t>表示された理由は、安心して読める</a:t>
+            </a:r>
+          </a:p>
+        </p:txBody>
+      </p:sp>
+    </p:spTree>
+  </p:cSld>
+  <p:clrMapOvr>
+    <a:masterClrMapping/>
+  </p:clrMapOvr>
+</p:sld>
+</file>
+
+<file path=ppt/slides/slide9.xml><?xml version="1.0" encoding="utf-8"?>
+<p:sld xmlns:a="http://schemas.openxmlformats.org/drawingml/2006/main" xmlns:p="http://schemas.openxmlformats.org/presentationml/2006/main" xmlns:r="http://schemas.openxmlformats.org/officeDocument/2006/relationships">
+  <p:cSld>
+    <p:bg>
+      <p:bgPr>
+        <a:solidFill>
+          <a:srgbClr val="FFFFFF"/>
+        </a:solidFill>
+        <a:effectLst/>
+      </p:bgPr>
+    </p:bg>
+    <p:spTree>
+      <p:nvGrpSpPr>
+        <p:cNvPr id="1" name=""/>
+        <p:cNvGrpSpPr/>
+        <p:nvPr/>
+      </p:nvGrpSpPr>
+      <p:grpSpPr/>
+      <p:sp>
+        <p:nvSpPr>
+          <p:cNvPr id="2" name="TextBox 1"/>
+          <p:cNvSpPr txBox="1"/>
+          <p:nvPr/>
+        </p:nvSpPr>
+        <p:spPr>
+          <a:xfrm>
+            <a:off x="0" y="868680"/>
+            <a:ext cx="12191695" cy="368300"/>
+          </a:xfrm>
+          <a:prstGeom prst="rect">
+            <a:avLst/>
+          </a:prstGeom>
+          <a:noFill/>
+        </p:spPr>
+        <p:txBody>
+          <a:bodyPr wrap="none" lIns="0" rIns="0" tIns="0" bIns="0" anchor="t">
+            <a:spAutoFit/>
+          </a:bodyPr>
+          <a:lstStyle/>
+          <a:p>
+            <a:pPr algn="ctr">
+              <a:lnSpc>
+                <a:spcPct val="100000"/>
+              </a:lnSpc>
+            </a:pPr>
+            <a:r>
+              <a:rPr sz="2000" b="1">
+                <a:solidFill>
+                  <a:srgbClr val="2563EB"/>
+                </a:solidFill>
+                <a:latin typeface="Noto Sans JP"/>
+                <a:ea typeface="Noto Sans JP"/>
+                <a:cs typeface="Noto Sans JP"/>
+              </a:rPr>
+              <a:t>Overlai が目指すこと</a:t>
+            </a:r>
+          </a:p>
+        </p:txBody>
+      </p:sp>
+      <p:sp>
+        <p:nvSpPr>
+          <p:cNvPr id="3" name="TextBox 2"/>
+          <p:cNvSpPr txBox="1"/>
+          <p:nvPr/>
+        </p:nvSpPr>
+        <p:spPr>
+          <a:xfrm>
+            <a:off x="0" y="1371600"/>
+            <a:ext cx="12191695" cy="994409"/>
+          </a:xfrm>
+          <a:prstGeom prst="rect">
+            <a:avLst/>
+          </a:prstGeom>
+          <a:noFill/>
+        </p:spPr>
+        <p:txBody>
+          <a:bodyPr wrap="none" lIns="0" rIns="0" tIns="0" bIns="0" anchor="t">
+            <a:spAutoFit/>
+          </a:bodyPr>
+          <a:lstStyle/>
+          <a:p>
+            <a:pPr algn="ctr">
+              <a:lnSpc>
+                <a:spcPct val="100000"/>
+              </a:lnSpc>
+            </a:pPr>
+            <a:r>
+              <a:rPr sz="5400" b="1">
+                <a:solidFill>
+                  <a:srgbClr val="1B2A4A"/>
+                </a:solidFill>
+                <a:latin typeface="Noto Sans JP"/>
+                <a:ea typeface="Noto Sans JP"/>
+                <a:cs typeface="Noto Sans JP"/>
+              </a:rPr>
+              <a:t>重ねる前に、重ねて見る。</a:t>
+            </a:r>
+          </a:p>
+        </p:txBody>
+      </p:sp>
+      <p:sp>
+        <p:nvSpPr>
+          <p:cNvPr id="4" name="Rounded Rectangle 3"/>
+          <p:cNvSpPr/>
+          <p:nvPr/>
+        </p:nvSpPr>
+        <p:spPr>
+          <a:xfrm>
+            <a:off x="822960" y="2788920"/>
+            <a:ext cx="3401568" cy="2514600"/>
+          </a:xfrm>
+          <a:prstGeom prst="roundRect">
+            <a:avLst>
+              <a:gd name="adj" fmla="val 9090"/>
+            </a:avLst>
+          </a:prstGeom>
+          <a:solidFill>
+            <a:srgbClr val="F5F7FA"/>
+          </a:solidFill>
+          <a:ln>
+            <a:noFill/>
+          </a:ln>
+          <a:effectLst/>
+        </p:spPr>
+        <p:style>
+          <a:lnRef idx="1">
+            <a:schemeClr val="accent1"/>
+          </a:lnRef>
+          <a:fillRef idx="3">
+            <a:schemeClr val="accent1"/>
+          </a:fillRef>
+          <a:effectRef idx="2">
+            <a:schemeClr val="accent1"/>
+          </a:effectRef>
+          <a:fontRef idx="minor">
+            <a:schemeClr val="lt1"/>
+          </a:fontRef>
+        </p:style>
+        <p:txBody>
+          <a:bodyPr rtlCol="0" anchor="ctr" lIns="0" rIns="0" tIns="0" bIns="0"/>
+          <a:lstStyle/>
+          <a:p>
+            <a:pPr algn="ctr"/>
+          </a:p>
+        </p:txBody>
+      </p:sp>
+      <p:sp>
+        <p:nvSpPr>
+          <p:cNvPr id="5" name="TextBox 4"/>
+          <p:cNvSpPr txBox="1"/>
+          <p:nvPr/>
+        </p:nvSpPr>
+        <p:spPr>
+          <a:xfrm>
+            <a:off x="1188720" y="3108960"/>
+            <a:ext cx="2834640" cy="478789"/>
+          </a:xfrm>
+          <a:prstGeom prst="rect">
+            <a:avLst/>
+          </a:prstGeom>
+          <a:noFill/>
+        </p:spPr>
+        <p:txBody>
+          <a:bodyPr wrap="none" lIns="0" rIns="0" tIns="0" bIns="0" anchor="t">
+            <a:spAutoFit/>
+          </a:bodyPr>
+          <a:lstStyle/>
+          <a:p>
+            <a:pPr algn="l">
+              <a:lnSpc>
+                <a:spcPct val="100000"/>
+              </a:lnSpc>
+            </a:pPr>
+            <a:r>
+              <a:rPr sz="2600" b="1">
+                <a:solidFill>
+                  <a:srgbClr val="1B2A4A"/>
+                </a:solidFill>
+                <a:latin typeface="Noto Sans JP"/>
+                <a:ea typeface="Noto Sans JP"/>
+                <a:cs typeface="Noto Sans JP"/>
+              </a:rPr>
+              <a:t>買い重ねる前に</a:t>
+            </a:r>
+          </a:p>
+        </p:txBody>
+      </p:sp>
+      <p:sp>
+        <p:nvSpPr>
+          <p:cNvPr id="6" name="TextBox 5"/>
+          <p:cNvSpPr txBox="1"/>
+          <p:nvPr/>
+        </p:nvSpPr>
+        <p:spPr>
+          <a:xfrm>
+            <a:off x="1188720" y="3794760"/>
+            <a:ext cx="2834640" cy="662940"/>
+          </a:xfrm>
+          <a:prstGeom prst="rect">
+            <a:avLst/>
+          </a:prstGeom>
+          <a:noFill/>
+        </p:spPr>
+        <p:txBody>
+          <a:bodyPr wrap="none" lIns="0" rIns="0" tIns="0" bIns="0" anchor="t">
+            <a:spAutoFit/>
+          </a:bodyPr>
+          <a:lstStyle/>
+          <a:p>
+            <a:pPr algn="l">
+              <a:lnSpc>
+                <a:spcPct val="100000"/>
+              </a:lnSpc>
+            </a:pPr>
+            <a:r>
+              <a:rPr sz="1800" b="0">
+                <a:solidFill>
+                  <a:srgbClr val="475569"/>
+                </a:solidFill>
+                <a:latin typeface="Noto Sans JP"/>
+                <a:ea typeface="Noto Sans JP"/>
+                <a:cs typeface="Noto Sans JP"/>
+              </a:rPr>
+              <a:t>もう家にある？</a:t>
+            </a:r>
+          </a:p>
+          <a:p>
+            <a:pPr algn="l">
+              <a:lnSpc>
+                <a:spcPct val="100000"/>
+              </a:lnSpc>
+            </a:pPr>
+            <a:r>
+              <a:rPr sz="1800" b="0">
+                <a:solidFill>
+                  <a:srgbClr val="475569"/>
+                </a:solidFill>
+                <a:latin typeface="Noto Sans JP"/>
+                <a:ea typeface="Noto Sans JP"/>
+                <a:cs typeface="Noto Sans JP"/>
+              </a:rPr>
+              <a:t>名前違いの同じ薬は？</a:t>
+            </a:r>
+          </a:p>
+        </p:txBody>
+      </p:sp>
+      <p:sp>
+        <p:nvSpPr>
+          <p:cNvPr id="7" name="TextBox 6"/>
+          <p:cNvSpPr txBox="1"/>
+          <p:nvPr/>
+        </p:nvSpPr>
+        <p:spPr>
+          <a:xfrm>
+            <a:off x="1188720" y="4754880"/>
+            <a:ext cx="2834640" cy="257810"/>
+          </a:xfrm>
+          <a:prstGeom prst="rect">
+            <a:avLst/>
+          </a:prstGeom>
+          <a:noFill/>
+        </p:spPr>
+        <p:txBody>
+          <a:bodyPr wrap="none" lIns="0" rIns="0" tIns="0" bIns="0" anchor="t">
+            <a:spAutoFit/>
+          </a:bodyPr>
+          <a:lstStyle/>
+          <a:p>
+            <a:pPr algn="l">
+              <a:lnSpc>
+                <a:spcPct val="100000"/>
+              </a:lnSpc>
+            </a:pPr>
+            <a:r>
+              <a:rPr sz="1400" b="1">
+                <a:solidFill>
+                  <a:srgbClr val="2563EB"/>
+                </a:solidFill>
+                <a:latin typeface="Noto Sans JP"/>
+                <a:ea typeface="Noto Sans JP"/>
+                <a:cs typeface="Noto Sans JP"/>
+              </a:rPr>
+              <a:t>重複</a:t>
+            </a:r>
+          </a:p>
+        </p:txBody>
+      </p:sp>
+      <p:sp>
+        <p:nvSpPr>
+          <p:cNvPr id="8" name="Rounded Rectangle 7"/>
+          <p:cNvSpPr/>
+          <p:nvPr/>
+        </p:nvSpPr>
+        <p:spPr>
+          <a:xfrm>
+            <a:off x="4398264" y="2788920"/>
+            <a:ext cx="3401568" cy="2514600"/>
+          </a:xfrm>
+          <a:prstGeom prst="roundRect">
+            <a:avLst>
+              <a:gd name="adj" fmla="val 9090"/>
+            </a:avLst>
+          </a:prstGeom>
+          <a:solidFill>
+            <a:srgbClr val="F5F7FA"/>
+          </a:solidFill>
+          <a:ln>
+            <a:noFill/>
+          </a:ln>
+          <a:effectLst/>
+        </p:spPr>
+        <p:style>
+          <a:lnRef idx="1">
+            <a:schemeClr val="accent1"/>
+          </a:lnRef>
+          <a:fillRef idx="3">
+            <a:schemeClr val="accent1"/>
+          </a:fillRef>
+          <a:effectRef idx="2">
+            <a:schemeClr val="accent1"/>
+          </a:effectRef>
+          <a:fontRef idx="minor">
+            <a:schemeClr val="lt1"/>
+          </a:fontRef>
+        </p:style>
+        <p:txBody>
+          <a:bodyPr rtlCol="0" anchor="ctr" lIns="0" rIns="0" tIns="0" bIns="0"/>
+          <a:lstStyle/>
+          <a:p>
+            <a:pPr algn="ctr"/>
+          </a:p>
+        </p:txBody>
+      </p:sp>
+      <p:sp>
+        <p:nvSpPr>
+          <p:cNvPr id="9" name="TextBox 8"/>
+          <p:cNvSpPr txBox="1"/>
+          <p:nvPr/>
+        </p:nvSpPr>
+        <p:spPr>
+          <a:xfrm>
+            <a:off x="4764024" y="3108960"/>
+            <a:ext cx="2834640" cy="478789"/>
+          </a:xfrm>
+          <a:prstGeom prst="rect">
+            <a:avLst/>
+          </a:prstGeom>
+          <a:noFill/>
+        </p:spPr>
+        <p:txBody>
+          <a:bodyPr wrap="none" lIns="0" rIns="0" tIns="0" bIns="0" anchor="t">
+            <a:spAutoFit/>
+          </a:bodyPr>
+          <a:lstStyle/>
+          <a:p>
+            <a:pPr algn="l">
+              <a:lnSpc>
+                <a:spcPct val="100000"/>
+              </a:lnSpc>
+            </a:pPr>
+            <a:r>
+              <a:rPr sz="2600" b="1">
+                <a:solidFill>
+                  <a:srgbClr val="1B2A4A"/>
+                </a:solidFill>
+                <a:latin typeface="Noto Sans JP"/>
+                <a:ea typeface="Noto Sans JP"/>
+                <a:cs typeface="Noto Sans JP"/>
+              </a:rPr>
+              <a:t>塗り重ねる前に</a:t>
+            </a:r>
+          </a:p>
+        </p:txBody>
+      </p:sp>
+      <p:sp>
+        <p:nvSpPr>
+          <p:cNvPr id="10" name="TextBox 9"/>
+          <p:cNvSpPr txBox="1"/>
+          <p:nvPr/>
+        </p:nvSpPr>
+        <p:spPr>
+          <a:xfrm>
+            <a:off x="4764024" y="3794760"/>
+            <a:ext cx="2834640" cy="662940"/>
+          </a:xfrm>
+          <a:prstGeom prst="rect">
+            <a:avLst/>
+          </a:prstGeom>
+          <a:noFill/>
+        </p:spPr>
+        <p:txBody>
+          <a:bodyPr wrap="none" lIns="0" rIns="0" tIns="0" bIns="0" anchor="t">
+            <a:spAutoFit/>
+          </a:bodyPr>
+          <a:lstStyle/>
+          <a:p>
+            <a:pPr algn="l">
+              <a:lnSpc>
+                <a:spcPct val="100000"/>
+              </a:lnSpc>
+            </a:pPr>
+            <a:r>
+              <a:rPr sz="1800" b="0">
+                <a:solidFill>
+                  <a:srgbClr val="475569"/>
+                </a:solidFill>
+                <a:latin typeface="Noto Sans JP"/>
+                <a:ea typeface="Noto Sans JP"/>
+                <a:cs typeface="Noto Sans JP"/>
+              </a:rPr>
+              <a:t>一緒に使っていい？</a:t>
+            </a:r>
+          </a:p>
+          <a:p>
+            <a:pPr algn="l">
+              <a:lnSpc>
+                <a:spcPct val="100000"/>
+              </a:lnSpc>
+            </a:pPr>
+            <a:r>
+              <a:rPr sz="1800" b="0">
+                <a:solidFill>
+                  <a:srgbClr val="475569"/>
+                </a:solidFill>
+                <a:latin typeface="Noto Sans JP"/>
+                <a:ea typeface="Noto Sans JP"/>
+                <a:cs typeface="Noto Sans JP"/>
+              </a:rPr>
+              <a:t>どれを先に塗る？</a:t>
+            </a:r>
+          </a:p>
+        </p:txBody>
+      </p:sp>
+      <p:sp>
+        <p:nvSpPr>
+          <p:cNvPr id="11" name="TextBox 10"/>
+          <p:cNvSpPr txBox="1"/>
+          <p:nvPr/>
+        </p:nvSpPr>
+        <p:spPr>
+          <a:xfrm>
+            <a:off x="4764024" y="4754880"/>
+            <a:ext cx="2834640" cy="257810"/>
+          </a:xfrm>
+          <a:prstGeom prst="rect">
+            <a:avLst/>
+          </a:prstGeom>
+          <a:noFill/>
+        </p:spPr>
+        <p:txBody>
+          <a:bodyPr wrap="none" lIns="0" rIns="0" tIns="0" bIns="0" anchor="t">
+            <a:spAutoFit/>
+          </a:bodyPr>
+          <a:lstStyle/>
+          <a:p>
+            <a:pPr algn="l">
+              <a:lnSpc>
+                <a:spcPct val="100000"/>
+              </a:lnSpc>
+            </a:pPr>
+            <a:r>
+              <a:rPr sz="1400" b="1">
+                <a:solidFill>
+                  <a:srgbClr val="2563EB"/>
+                </a:solidFill>
+                <a:latin typeface="Noto Sans JP"/>
+                <a:ea typeface="Noto Sans JP"/>
+                <a:cs typeface="Noto Sans JP"/>
+              </a:rPr>
+              <a:t>組み合わせ・塗る順番</a:t>
+            </a:r>
+          </a:p>
+        </p:txBody>
+      </p:sp>
+      <p:sp>
+        <p:nvSpPr>
+          <p:cNvPr id="12" name="Rounded Rectangle 11"/>
+          <p:cNvSpPr/>
+          <p:nvPr/>
+        </p:nvSpPr>
+        <p:spPr>
+          <a:xfrm>
+            <a:off x="7973568" y="2788920"/>
+            <a:ext cx="3401568" cy="2514600"/>
+          </a:xfrm>
+          <a:prstGeom prst="roundRect">
+            <a:avLst>
+              <a:gd name="adj" fmla="val 9090"/>
+            </a:avLst>
+          </a:prstGeom>
+          <a:solidFill>
+            <a:srgbClr val="F5F7FA"/>
+          </a:solidFill>
+          <a:ln>
+            <a:noFill/>
+          </a:ln>
+          <a:effectLst/>
+        </p:spPr>
+        <p:style>
+          <a:lnRef idx="1">
+            <a:schemeClr val="accent1"/>
+          </a:lnRef>
+          <a:fillRef idx="3">
+            <a:schemeClr val="accent1"/>
+          </a:fillRef>
+          <a:effectRef idx="2">
+            <a:schemeClr val="accent1"/>
+          </a:effectRef>
+          <a:fontRef idx="minor">
+            <a:schemeClr val="lt1"/>
+          </a:fontRef>
+        </p:style>
+        <p:txBody>
+          <a:bodyPr rtlCol="0" anchor="ctr" lIns="0" rIns="0" tIns="0" bIns="0"/>
+          <a:lstStyle/>
+          <a:p>
+            <a:pPr algn="ctr"/>
+          </a:p>
+        </p:txBody>
+      </p:sp>
+      <p:sp>
+        <p:nvSpPr>
+          <p:cNvPr id="13" name="TextBox 12"/>
+          <p:cNvSpPr txBox="1"/>
+          <p:nvPr/>
+        </p:nvSpPr>
+        <p:spPr>
+          <a:xfrm>
+            <a:off x="8339328" y="3108960"/>
+            <a:ext cx="2834640" cy="478789"/>
+          </a:xfrm>
+          <a:prstGeom prst="rect">
+            <a:avLst/>
+          </a:prstGeom>
+          <a:noFill/>
+        </p:spPr>
+        <p:txBody>
+          <a:bodyPr wrap="none" lIns="0" rIns="0" tIns="0" bIns="0" anchor="t">
+            <a:spAutoFit/>
+          </a:bodyPr>
+          <a:lstStyle/>
+          <a:p>
+            <a:pPr algn="l">
+              <a:lnSpc>
+                <a:spcPct val="100000"/>
+              </a:lnSpc>
+            </a:pPr>
+            <a:r>
+              <a:rPr sz="2600" b="1">
+                <a:solidFill>
+                  <a:srgbClr val="1B2A4A"/>
+                </a:solidFill>
+                <a:latin typeface="Noto Sans JP"/>
+                <a:ea typeface="Noto Sans JP"/>
+                <a:cs typeface="Noto Sans JP"/>
+              </a:rPr>
+              <a:t>一緒に飲む前に</a:t>
+            </a:r>
+          </a:p>
+        </p:txBody>
+      </p:sp>
+      <p:sp>
+        <p:nvSpPr>
+          <p:cNvPr id="14" name="TextBox 13"/>
+          <p:cNvSpPr txBox="1"/>
+          <p:nvPr/>
+        </p:nvSpPr>
+        <p:spPr>
+          <a:xfrm>
+            <a:off x="8339328" y="3794760"/>
+            <a:ext cx="2834640" cy="662940"/>
+          </a:xfrm>
+          <a:prstGeom prst="rect">
+            <a:avLst/>
+          </a:prstGeom>
+          <a:noFill/>
+        </p:spPr>
+        <p:txBody>
+          <a:bodyPr wrap="none" lIns="0" rIns="0" tIns="0" bIns="0" anchor="t">
+            <a:spAutoFit/>
+          </a:bodyPr>
+          <a:lstStyle/>
+          <a:p>
+            <a:pPr algn="l">
+              <a:lnSpc>
+                <a:spcPct val="100000"/>
+              </a:lnSpc>
+            </a:pPr>
+            <a:r>
+              <a:rPr sz="1800" b="0">
+                <a:solidFill>
+                  <a:srgbClr val="475569"/>
+                </a:solidFill>
+                <a:latin typeface="Noto Sans JP"/>
+                <a:ea typeface="Noto Sans JP"/>
+                <a:cs typeface="Noto Sans JP"/>
+              </a:rPr>
+              <a:t>今飲んでいる薬と</a:t>
+            </a:r>
+          </a:p>
+          <a:p>
+            <a:pPr algn="l">
+              <a:lnSpc>
+                <a:spcPct val="100000"/>
+              </a:lnSpc>
+            </a:pPr>
+            <a:r>
+              <a:rPr sz="1800" b="0">
+                <a:solidFill>
+                  <a:srgbClr val="475569"/>
+                </a:solidFill>
+                <a:latin typeface="Noto Sans JP"/>
+                <a:ea typeface="Noto Sans JP"/>
+                <a:cs typeface="Noto Sans JP"/>
+              </a:rPr>
+              <a:t>一緒で大丈夫？</a:t>
+            </a:r>
+          </a:p>
+        </p:txBody>
+      </p:sp>
+      <p:sp>
+        <p:nvSpPr>
+          <p:cNvPr id="15" name="TextBox 14"/>
+          <p:cNvSpPr txBox="1"/>
+          <p:nvPr/>
+        </p:nvSpPr>
+        <p:spPr>
+          <a:xfrm>
+            <a:off x="8339328" y="4754880"/>
+            <a:ext cx="2834640" cy="257810"/>
+          </a:xfrm>
+          <a:prstGeom prst="rect">
+            <a:avLst/>
+          </a:prstGeom>
+          <a:noFill/>
+        </p:spPr>
+        <p:txBody>
+          <a:bodyPr wrap="none" lIns="0" rIns="0" tIns="0" bIns="0" anchor="t">
+            <a:spAutoFit/>
+          </a:bodyPr>
+          <a:lstStyle/>
+          <a:p>
+            <a:pPr algn="l">
+              <a:lnSpc>
+                <a:spcPct val="100000"/>
+              </a:lnSpc>
+            </a:pPr>
+            <a:r>
+              <a:rPr sz="1400" b="1">
+                <a:solidFill>
+                  <a:srgbClr val="2563EB"/>
+                </a:solidFill>
+                <a:latin typeface="Noto Sans JP"/>
+                <a:ea typeface="Noto Sans JP"/>
+                <a:cs typeface="Noto Sans JP"/>
+              </a:rPr>
+              <a:t>飲み合わせ</a:t>
+            </a:r>
+          </a:p>
+        </p:txBody>
+      </p:sp>
+      <p:sp>
+        <p:nvSpPr>
+          <p:cNvPr id="16" name="TextBox 15"/>
+          <p:cNvSpPr txBox="1"/>
+          <p:nvPr/>
+        </p:nvSpPr>
+        <p:spPr>
+          <a:xfrm>
+            <a:off x="0" y="5715000"/>
+            <a:ext cx="12191695" cy="368300"/>
+          </a:xfrm>
+          <a:prstGeom prst="rect">
+            <a:avLst/>
+          </a:prstGeom>
+          <a:noFill/>
+        </p:spPr>
+        <p:txBody>
+          <a:bodyPr wrap="none" lIns="0" rIns="0" tIns="0" bIns="0" anchor="t">
+            <a:spAutoFit/>
+          </a:bodyPr>
+          <a:lstStyle/>
+          <a:p>
+            <a:pPr algn="ctr">
+              <a:lnSpc>
+                <a:spcPct val="100000"/>
+              </a:lnSpc>
+            </a:pPr>
+            <a:r>
+              <a:rPr sz="2000" b="1">
+                <a:solidFill>
+                  <a:srgbClr val="475569"/>
+                </a:solidFill>
+                <a:latin typeface="Noto Sans JP"/>
+                <a:ea typeface="Noto Sans JP"/>
+                <a:cs typeface="Noto Sans JP"/>
+              </a:rPr>
+              <a:t>肌の治療を続ける人も、家族の薬を買う人も、店頭で迷わない毎日へ。</a:t>
+            </a:r>
+          </a:p>
+        </p:txBody>
+      </p:sp>
     </p:spTree>
   </p:cSld>
   <p:clrMapOvr>

--- a/docs/ピッチ/Overlai_本選ピッチ.pptx
+++ b/docs/ピッチ/Overlai_本選ピッチ.pptx
@@ -4797,7 +4797,7 @@
                 <a:ea typeface="Noto Sans JP"/>
                 <a:cs typeface="Noto Sans JP"/>
               </a:rPr>
-              <a:t>エピソード 1｜重複の迷い</a:t>
+              <a:t>CASE 1｜重複の迷い</a:t>
             </a:r>
           </a:p>
         </p:txBody>
@@ -5076,7 +5076,7 @@
                 <a:ea typeface="Noto Sans JP"/>
                 <a:cs typeface="Noto Sans JP"/>
               </a:rPr>
-              <a:t>エピソード 2｜組み合わせの迷い</a:t>
+              <a:t>CASE 2｜組み合わせの迷い</a:t>
             </a:r>
           </a:p>
         </p:txBody>
@@ -8168,7 +8168,7 @@
                 <a:ea typeface="Noto Sans JP"/>
                 <a:cs typeface="Noto Sans JP"/>
               </a:rPr>
-              <a:t>しくみ</a:t>
+              <a:t>使い方</a:t>
             </a:r>
           </a:p>
         </p:txBody>

--- a/docs/ピッチ/Overlai_本選ピッチ.pptx
+++ b/docs/ピッチ/Overlai_本選ピッチ.pptx
@@ -721,7 +721,7 @@
           <a:lstStyle/>
           <a:p>
             <a:r>
-              <a:t>濱田と杉本は、ステロイドの塗り薬を使っています。化粧水を手に取ったとき、使っていいのか、どっちが先か、迷いました。</a:t>
+              <a:t>濱田と杉本は、病院で処方された薬を使っています。化粧水を手に取ったとき、使っていいのか、どっちが先か、迷いました。</a:t>
             </a:r>
           </a:p>
         </p:txBody>
@@ -5117,7 +5117,7 @@
                 <a:ea typeface="Noto Sans JP"/>
                 <a:cs typeface="Noto Sans JP"/>
               </a:rPr>
-              <a:t>濱田・杉本｜肌が弱く、ステロイドの塗り薬を使っている</a:t>
+              <a:t>濱田・杉本｜肌が弱く、病院で処方された薬を使っている</a:t>
             </a:r>
           </a:p>
         </p:txBody>
@@ -5319,50 +5319,9 @@
         <p:nvPr/>
       </p:nvGrpSpPr>
       <p:grpSpPr/>
-      <p:sp>
-        <p:nvSpPr>
-          <p:cNvPr id="2" name="TextBox 1"/>
-          <p:cNvSpPr txBox="1"/>
-          <p:nvPr/>
-        </p:nvSpPr>
-        <p:spPr>
-          <a:xfrm>
-            <a:off x="685800" y="914400"/>
-            <a:ext cx="5486400" cy="405130"/>
-          </a:xfrm>
-          <a:prstGeom prst="rect">
-            <a:avLst/>
-          </a:prstGeom>
-          <a:noFill/>
-        </p:spPr>
-        <p:txBody>
-          <a:bodyPr wrap="none" lIns="0" rIns="0" tIns="0" bIns="0" anchor="t">
-            <a:spAutoFit/>
-          </a:bodyPr>
-          <a:lstStyle/>
-          <a:p>
-            <a:pPr algn="l">
-              <a:lnSpc>
-                <a:spcPct val="100000"/>
-              </a:lnSpc>
-            </a:pPr>
-            <a:r>
-              <a:rPr sz="2200" b="1">
-                <a:solidFill>
-                  <a:srgbClr val="475569"/>
-                </a:solidFill>
-                <a:latin typeface="Noto Sans JP"/>
-                <a:ea typeface="Noto Sans JP"/>
-                <a:cs typeface="Noto Sans JP"/>
-              </a:rPr>
-              <a:t>そこで作ったのが</a:t>
-            </a:r>
-          </a:p>
-        </p:txBody>
-      </p:sp>
       <p:pic>
         <p:nvPicPr>
-          <p:cNvPr id="3" name="Picture 2" descr="logo.png"/>
+          <p:cNvPr id="2" name="Picture 1" descr="logo.png"/>
           <p:cNvPicPr>
             <a:picLocks noChangeAspect="1"/>
           </p:cNvPicPr>
@@ -5376,7 +5335,7 @@
         </p:blipFill>
         <p:spPr>
           <a:xfrm>
-            <a:off x="685800" y="1463040"/>
+            <a:off x="685800" y="1417320"/>
             <a:ext cx="1371600" cy="1371600"/>
           </a:xfrm>
           <a:prstGeom prst="rect">
@@ -5386,13 +5345,13 @@
       </p:pic>
       <p:sp>
         <p:nvSpPr>
-          <p:cNvPr id="4" name="TextBox 3"/>
+          <p:cNvPr id="3" name="TextBox 2"/>
           <p:cNvSpPr txBox="1"/>
           <p:nvPr/>
         </p:nvSpPr>
         <p:spPr>
           <a:xfrm>
-            <a:off x="2084832" y="1485900"/>
+            <a:off x="2084832" y="1440179"/>
             <a:ext cx="3230880" cy="1325880"/>
           </a:xfrm>
           <a:prstGeom prst="rect">
@@ -5427,13 +5386,13 @@
       </p:sp>
       <p:sp>
         <p:nvSpPr>
-          <p:cNvPr id="5" name="TextBox 4"/>
+          <p:cNvPr id="4" name="TextBox 3"/>
           <p:cNvSpPr txBox="1"/>
           <p:nvPr/>
         </p:nvSpPr>
         <p:spPr>
           <a:xfrm>
-            <a:off x="685800" y="3017520"/>
+            <a:off x="685800" y="2971800"/>
             <a:ext cx="5486400" cy="331470"/>
           </a:xfrm>
           <a:prstGeom prst="rect">
@@ -5468,13 +5427,13 @@
       </p:sp>
       <p:sp>
         <p:nvSpPr>
-          <p:cNvPr id="6" name="TextBox 5"/>
+          <p:cNvPr id="5" name="TextBox 4"/>
           <p:cNvSpPr txBox="1"/>
           <p:nvPr/>
         </p:nvSpPr>
         <p:spPr>
           <a:xfrm>
-            <a:off x="685800" y="3886200"/>
+            <a:off x="685800" y="3749039"/>
             <a:ext cx="6949440" cy="1657350"/>
           </a:xfrm>
           <a:prstGeom prst="rect">
@@ -5545,7 +5504,7 @@
       </p:sp>
       <p:sp>
         <p:nvSpPr>
-          <p:cNvPr id="7" name="Rounded Rectangle 6"/>
+          <p:cNvPr id="6" name="Rounded Rectangle 5"/>
           <p:cNvSpPr/>
           <p:nvPr/>
         </p:nvSpPr>
@@ -5591,7 +5550,7 @@
       </p:sp>
       <p:sp>
         <p:nvSpPr>
-          <p:cNvPr id="8" name="Rounded Rectangle 7"/>
+          <p:cNvPr id="7" name="Rounded Rectangle 6"/>
           <p:cNvSpPr/>
           <p:nvPr/>
         </p:nvSpPr>
@@ -5637,7 +5596,7 @@
       </p:sp>
       <p:sp>
         <p:nvSpPr>
-          <p:cNvPr id="9" name="Round Diagonal Corner Rectangle 8"/>
+          <p:cNvPr id="8" name="Round Diagonal Corner Rectangle 7"/>
           <p:cNvSpPr/>
           <p:nvPr/>
         </p:nvSpPr>
@@ -5684,7 +5643,7 @@
       </p:sp>
       <p:sp>
         <p:nvSpPr>
-          <p:cNvPr id="10" name="TextBox 9"/>
+          <p:cNvPr id="9" name="TextBox 8"/>
           <p:cNvSpPr txBox="1"/>
           <p:nvPr/>
         </p:nvSpPr>
@@ -5725,7 +5684,7 @@
       </p:sp>
       <p:sp>
         <p:nvSpPr>
-          <p:cNvPr id="11" name="TextBox 10"/>
+          <p:cNvPr id="10" name="TextBox 9"/>
           <p:cNvSpPr txBox="1"/>
           <p:nvPr/>
         </p:nvSpPr>
@@ -5766,7 +5725,7 @@
       </p:sp>
       <p:sp>
         <p:nvSpPr>
-          <p:cNvPr id="12" name="TextBox 11"/>
+          <p:cNvPr id="11" name="TextBox 10"/>
           <p:cNvSpPr txBox="1"/>
           <p:nvPr/>
         </p:nvSpPr>
@@ -5825,7 +5784,7 @@
       </p:sp>
       <p:sp>
         <p:nvSpPr>
-          <p:cNvPr id="13" name="Rounded Rectangle 12"/>
+          <p:cNvPr id="12" name="Rounded Rectangle 11"/>
           <p:cNvSpPr/>
           <p:nvPr/>
         </p:nvSpPr>
@@ -5871,7 +5830,7 @@
       </p:sp>
       <p:sp>
         <p:nvSpPr>
-          <p:cNvPr id="14" name="Rounded Rectangle 13"/>
+          <p:cNvPr id="13" name="Rounded Rectangle 12"/>
           <p:cNvSpPr/>
           <p:nvPr/>
         </p:nvSpPr>
@@ -5917,7 +5876,7 @@
       </p:sp>
       <p:sp>
         <p:nvSpPr>
-          <p:cNvPr id="15" name="Rounded Rectangle 14"/>
+          <p:cNvPr id="14" name="Rounded Rectangle 13"/>
           <p:cNvSpPr/>
           <p:nvPr/>
         </p:nvSpPr>

--- a/docs/ピッチ/Overlai_本選ピッチ.pptx
+++ b/docs/ピッチ/Overlai_本選ピッチ.pptx
@@ -15,6 +15,7 @@
     <p:sldId id="263" r:id="rId15"/>
     <p:sldId id="264" r:id="rId16"/>
     <p:sldId id="265" r:id="rId17"/>
+    <p:sldId id="266" r:id="rId18"/>
   </p:sldIdLst>
   <p:sldSz cx="12191695" cy="6858000" type="screen4x3"/>
   <p:notesSz cx="6858000" cy="9144000"/>
@@ -581,6 +582,76 @@
           <a:lstStyle/>
           <a:p>
             <a:r>
+              <a:t>買い重ねる前に。塗り重ねる前に。一緒に飲む前に。</a:t>
+            </a:r>
+          </a:p>
+        </p:txBody>
+      </p:sp>
+      <p:sp>
+        <p:nvSpPr>
+          <p:cNvPr id="4" name="Slide Number Placeholder 3"/>
+          <p:cNvSpPr>
+            <a:spLocks noGrp="1"/>
+          </p:cNvSpPr>
+          <p:nvPr>
+            <p:ph type="sldNum" idx="5" sz="quarter"/>
+          </p:nvPr>
+        </p:nvSpPr>
+        <p:spPr/>
+      </p:sp>
+    </p:spTree>
+  </p:cSld>
+  <p:clrMapOvr>
+    <a:masterClrMapping/>
+  </p:clrMapOvr>
+</p:notes>
+</file>
+
+<file path=ppt/notesSlides/notesSlide11.xml><?xml version="1.0" encoding="utf-8"?>
+<p:notes xmlns:a="http://schemas.openxmlformats.org/drawingml/2006/main" xmlns:p="http://schemas.openxmlformats.org/presentationml/2006/main" xmlns:r="http://schemas.openxmlformats.org/officeDocument/2006/relationships">
+  <p:cSld>
+    <p:spTree>
+      <p:nvGrpSpPr>
+        <p:cNvPr id="1" name=""/>
+        <p:cNvGrpSpPr/>
+        <p:nvPr/>
+      </p:nvGrpSpPr>
+      <p:grpSpPr>
+        <a:xfrm>
+          <a:off x="0" y="0"/>
+          <a:ext cx="0" cy="0"/>
+          <a:chOff x="0" y="0"/>
+          <a:chExt cx="0" cy="0"/>
+        </a:xfrm>
+      </p:grpSpPr>
+      <p:sp>
+        <p:nvSpPr>
+          <p:cNvPr id="2" name="Slide Image Placeholder 1"/>
+          <p:cNvSpPr>
+            <a:spLocks noGrp="1"/>
+          </p:cNvSpPr>
+          <p:nvPr>
+            <p:ph type="sldImg" idx="2"/>
+          </p:nvPr>
+        </p:nvSpPr>
+        <p:spPr/>
+      </p:sp>
+      <p:sp>
+        <p:nvSpPr>
+          <p:cNvPr id="3" name="Notes Placeholder 2"/>
+          <p:cNvSpPr>
+            <a:spLocks noGrp="1"/>
+          </p:cNvSpPr>
+          <p:nvPr>
+            <p:ph type="body" idx="3" sz="quarter"/>
+          </p:nvPr>
+        </p:nvSpPr>
+        <p:spPr/>
+        <p:txBody>
+          <a:bodyPr/>
+          <a:lstStyle/>
+          <a:p>
+            <a:r>
               <a:t>Overlai。重ねる前に、重ねて見る。</a:t>
             </a:r>
           </a:p>
@@ -721,7 +792,7 @@
           <a:lstStyle/>
           <a:p>
             <a:r>
-              <a:t>濱田と杉本は、病院で処方された薬を使っています。化粧水を手に取ったとき、使っていいのか、どっちが先か、迷いました。</a:t>
+              <a:t>病院で処方された薬を使う濱田と杉本は、化粧水を前に、使っていいのか、どっちが先か迷いました。</a:t>
             </a:r>
           </a:p>
         </p:txBody>
@@ -791,7 +862,7 @@
           <a:lstStyle/>
           <a:p>
             <a:r>
-              <a:t>どちらも、店では家の薬と見比べられません。そこで作ったのがOverlaiです。店で成分表示を撮るだけで、買うべきかの目安がわかります。</a:t>
+              <a:t>そこで作ったのがOverlaiです。店で成分表示を撮るだけで、買うべきかの目安がわかります。</a:t>
             </a:r>
           </a:p>
         </p:txBody>
@@ -1141,7 +1212,7 @@
           <a:lstStyle/>
           <a:p>
             <a:r>
-              <a:t>買い重ねる前に。塗り重ねる前に。一緒に飲む前に。</a:t>
+              <a:t>登録した薬と体質から、毎日の使う順番と使い方も案内します。</a:t>
             </a:r>
           </a:p>
         </p:txBody>
@@ -4442,6 +4513,716 @@
         </p:nvSpPr>
         <p:spPr>
           <a:xfrm>
+            <a:off x="0" y="868680"/>
+            <a:ext cx="12191695" cy="368300"/>
+          </a:xfrm>
+          <a:prstGeom prst="rect">
+            <a:avLst/>
+          </a:prstGeom>
+          <a:noFill/>
+        </p:spPr>
+        <p:txBody>
+          <a:bodyPr wrap="none" lIns="0" rIns="0" tIns="0" bIns="0" anchor="t">
+            <a:spAutoFit/>
+          </a:bodyPr>
+          <a:lstStyle/>
+          <a:p>
+            <a:pPr algn="ctr">
+              <a:lnSpc>
+                <a:spcPct val="100000"/>
+              </a:lnSpc>
+            </a:pPr>
+            <a:r>
+              <a:rPr sz="2000" b="1">
+                <a:solidFill>
+                  <a:srgbClr val="2563EB"/>
+                </a:solidFill>
+                <a:latin typeface="Noto Sans JP"/>
+                <a:ea typeface="Noto Sans JP"/>
+                <a:cs typeface="Noto Sans JP"/>
+              </a:rPr>
+              <a:t>Overlai が目指すこと</a:t>
+            </a:r>
+          </a:p>
+        </p:txBody>
+      </p:sp>
+      <p:sp>
+        <p:nvSpPr>
+          <p:cNvPr id="3" name="TextBox 2"/>
+          <p:cNvSpPr txBox="1"/>
+          <p:nvPr/>
+        </p:nvSpPr>
+        <p:spPr>
+          <a:xfrm>
+            <a:off x="0" y="1371600"/>
+            <a:ext cx="12191695" cy="994409"/>
+          </a:xfrm>
+          <a:prstGeom prst="rect">
+            <a:avLst/>
+          </a:prstGeom>
+          <a:noFill/>
+        </p:spPr>
+        <p:txBody>
+          <a:bodyPr wrap="none" lIns="0" rIns="0" tIns="0" bIns="0" anchor="t">
+            <a:spAutoFit/>
+          </a:bodyPr>
+          <a:lstStyle/>
+          <a:p>
+            <a:pPr algn="ctr">
+              <a:lnSpc>
+                <a:spcPct val="100000"/>
+              </a:lnSpc>
+            </a:pPr>
+            <a:r>
+              <a:rPr sz="5400" b="1">
+                <a:solidFill>
+                  <a:srgbClr val="1B2A4A"/>
+                </a:solidFill>
+                <a:latin typeface="Noto Sans JP"/>
+                <a:ea typeface="Noto Sans JP"/>
+                <a:cs typeface="Noto Sans JP"/>
+              </a:rPr>
+              <a:t>重ねる前に、重ねて見る。</a:t>
+            </a:r>
+          </a:p>
+        </p:txBody>
+      </p:sp>
+      <p:sp>
+        <p:nvSpPr>
+          <p:cNvPr id="4" name="Rounded Rectangle 3"/>
+          <p:cNvSpPr/>
+          <p:nvPr/>
+        </p:nvSpPr>
+        <p:spPr>
+          <a:xfrm>
+            <a:off x="822960" y="2788920"/>
+            <a:ext cx="3401568" cy="2514600"/>
+          </a:xfrm>
+          <a:prstGeom prst="roundRect">
+            <a:avLst>
+              <a:gd name="adj" fmla="val 9090"/>
+            </a:avLst>
+          </a:prstGeom>
+          <a:solidFill>
+            <a:srgbClr val="F5F7FA"/>
+          </a:solidFill>
+          <a:ln>
+            <a:noFill/>
+          </a:ln>
+          <a:effectLst/>
+        </p:spPr>
+        <p:style>
+          <a:lnRef idx="1">
+            <a:schemeClr val="accent1"/>
+          </a:lnRef>
+          <a:fillRef idx="3">
+            <a:schemeClr val="accent1"/>
+          </a:fillRef>
+          <a:effectRef idx="2">
+            <a:schemeClr val="accent1"/>
+          </a:effectRef>
+          <a:fontRef idx="minor">
+            <a:schemeClr val="lt1"/>
+          </a:fontRef>
+        </p:style>
+        <p:txBody>
+          <a:bodyPr rtlCol="0" anchor="ctr" lIns="0" rIns="0" tIns="0" bIns="0"/>
+          <a:lstStyle/>
+          <a:p>
+            <a:pPr algn="ctr"/>
+          </a:p>
+        </p:txBody>
+      </p:sp>
+      <p:sp>
+        <p:nvSpPr>
+          <p:cNvPr id="5" name="TextBox 4"/>
+          <p:cNvSpPr txBox="1"/>
+          <p:nvPr/>
+        </p:nvSpPr>
+        <p:spPr>
+          <a:xfrm>
+            <a:off x="1188720" y="3108960"/>
+            <a:ext cx="2834640" cy="478789"/>
+          </a:xfrm>
+          <a:prstGeom prst="rect">
+            <a:avLst/>
+          </a:prstGeom>
+          <a:noFill/>
+        </p:spPr>
+        <p:txBody>
+          <a:bodyPr wrap="none" lIns="0" rIns="0" tIns="0" bIns="0" anchor="t">
+            <a:spAutoFit/>
+          </a:bodyPr>
+          <a:lstStyle/>
+          <a:p>
+            <a:pPr algn="l">
+              <a:lnSpc>
+                <a:spcPct val="100000"/>
+              </a:lnSpc>
+            </a:pPr>
+            <a:r>
+              <a:rPr sz="2600" b="1">
+                <a:solidFill>
+                  <a:srgbClr val="1B2A4A"/>
+                </a:solidFill>
+                <a:latin typeface="Noto Sans JP"/>
+                <a:ea typeface="Noto Sans JP"/>
+                <a:cs typeface="Noto Sans JP"/>
+              </a:rPr>
+              <a:t>買い重ねる前に</a:t>
+            </a:r>
+          </a:p>
+        </p:txBody>
+      </p:sp>
+      <p:sp>
+        <p:nvSpPr>
+          <p:cNvPr id="6" name="TextBox 5"/>
+          <p:cNvSpPr txBox="1"/>
+          <p:nvPr/>
+        </p:nvSpPr>
+        <p:spPr>
+          <a:xfrm>
+            <a:off x="1188720" y="3794760"/>
+            <a:ext cx="2834640" cy="662940"/>
+          </a:xfrm>
+          <a:prstGeom prst="rect">
+            <a:avLst/>
+          </a:prstGeom>
+          <a:noFill/>
+        </p:spPr>
+        <p:txBody>
+          <a:bodyPr wrap="none" lIns="0" rIns="0" tIns="0" bIns="0" anchor="t">
+            <a:spAutoFit/>
+          </a:bodyPr>
+          <a:lstStyle/>
+          <a:p>
+            <a:pPr algn="l">
+              <a:lnSpc>
+                <a:spcPct val="100000"/>
+              </a:lnSpc>
+            </a:pPr>
+            <a:r>
+              <a:rPr sz="1800" b="0">
+                <a:solidFill>
+                  <a:srgbClr val="475569"/>
+                </a:solidFill>
+                <a:latin typeface="Noto Sans JP"/>
+                <a:ea typeface="Noto Sans JP"/>
+                <a:cs typeface="Noto Sans JP"/>
+              </a:rPr>
+              <a:t>もう家にある？</a:t>
+            </a:r>
+          </a:p>
+          <a:p>
+            <a:pPr algn="l">
+              <a:lnSpc>
+                <a:spcPct val="100000"/>
+              </a:lnSpc>
+            </a:pPr>
+            <a:r>
+              <a:rPr sz="1800" b="0">
+                <a:solidFill>
+                  <a:srgbClr val="475569"/>
+                </a:solidFill>
+                <a:latin typeface="Noto Sans JP"/>
+                <a:ea typeface="Noto Sans JP"/>
+                <a:cs typeface="Noto Sans JP"/>
+              </a:rPr>
+              <a:t>名前違いの同じ薬は？</a:t>
+            </a:r>
+          </a:p>
+        </p:txBody>
+      </p:sp>
+      <p:sp>
+        <p:nvSpPr>
+          <p:cNvPr id="7" name="TextBox 6"/>
+          <p:cNvSpPr txBox="1"/>
+          <p:nvPr/>
+        </p:nvSpPr>
+        <p:spPr>
+          <a:xfrm>
+            <a:off x="1188720" y="4754880"/>
+            <a:ext cx="2834640" cy="257810"/>
+          </a:xfrm>
+          <a:prstGeom prst="rect">
+            <a:avLst/>
+          </a:prstGeom>
+          <a:noFill/>
+        </p:spPr>
+        <p:txBody>
+          <a:bodyPr wrap="none" lIns="0" rIns="0" tIns="0" bIns="0" anchor="t">
+            <a:spAutoFit/>
+          </a:bodyPr>
+          <a:lstStyle/>
+          <a:p>
+            <a:pPr algn="l">
+              <a:lnSpc>
+                <a:spcPct val="100000"/>
+              </a:lnSpc>
+            </a:pPr>
+            <a:r>
+              <a:rPr sz="1400" b="1">
+                <a:solidFill>
+                  <a:srgbClr val="2563EB"/>
+                </a:solidFill>
+                <a:latin typeface="Noto Sans JP"/>
+                <a:ea typeface="Noto Sans JP"/>
+                <a:cs typeface="Noto Sans JP"/>
+              </a:rPr>
+              <a:t>重複</a:t>
+            </a:r>
+          </a:p>
+        </p:txBody>
+      </p:sp>
+      <p:sp>
+        <p:nvSpPr>
+          <p:cNvPr id="8" name="Rounded Rectangle 7"/>
+          <p:cNvSpPr/>
+          <p:nvPr/>
+        </p:nvSpPr>
+        <p:spPr>
+          <a:xfrm>
+            <a:off x="4398264" y="2788920"/>
+            <a:ext cx="3401568" cy="2514600"/>
+          </a:xfrm>
+          <a:prstGeom prst="roundRect">
+            <a:avLst>
+              <a:gd name="adj" fmla="val 9090"/>
+            </a:avLst>
+          </a:prstGeom>
+          <a:solidFill>
+            <a:srgbClr val="F5F7FA"/>
+          </a:solidFill>
+          <a:ln>
+            <a:noFill/>
+          </a:ln>
+          <a:effectLst/>
+        </p:spPr>
+        <p:style>
+          <a:lnRef idx="1">
+            <a:schemeClr val="accent1"/>
+          </a:lnRef>
+          <a:fillRef idx="3">
+            <a:schemeClr val="accent1"/>
+          </a:fillRef>
+          <a:effectRef idx="2">
+            <a:schemeClr val="accent1"/>
+          </a:effectRef>
+          <a:fontRef idx="minor">
+            <a:schemeClr val="lt1"/>
+          </a:fontRef>
+        </p:style>
+        <p:txBody>
+          <a:bodyPr rtlCol="0" anchor="ctr" lIns="0" rIns="0" tIns="0" bIns="0"/>
+          <a:lstStyle/>
+          <a:p>
+            <a:pPr algn="ctr"/>
+          </a:p>
+        </p:txBody>
+      </p:sp>
+      <p:sp>
+        <p:nvSpPr>
+          <p:cNvPr id="9" name="TextBox 8"/>
+          <p:cNvSpPr txBox="1"/>
+          <p:nvPr/>
+        </p:nvSpPr>
+        <p:spPr>
+          <a:xfrm>
+            <a:off x="4764024" y="3108960"/>
+            <a:ext cx="2834640" cy="478789"/>
+          </a:xfrm>
+          <a:prstGeom prst="rect">
+            <a:avLst/>
+          </a:prstGeom>
+          <a:noFill/>
+        </p:spPr>
+        <p:txBody>
+          <a:bodyPr wrap="none" lIns="0" rIns="0" tIns="0" bIns="0" anchor="t">
+            <a:spAutoFit/>
+          </a:bodyPr>
+          <a:lstStyle/>
+          <a:p>
+            <a:pPr algn="l">
+              <a:lnSpc>
+                <a:spcPct val="100000"/>
+              </a:lnSpc>
+            </a:pPr>
+            <a:r>
+              <a:rPr sz="2600" b="1">
+                <a:solidFill>
+                  <a:srgbClr val="1B2A4A"/>
+                </a:solidFill>
+                <a:latin typeface="Noto Sans JP"/>
+                <a:ea typeface="Noto Sans JP"/>
+                <a:cs typeface="Noto Sans JP"/>
+              </a:rPr>
+              <a:t>塗り重ねる前に</a:t>
+            </a:r>
+          </a:p>
+        </p:txBody>
+      </p:sp>
+      <p:sp>
+        <p:nvSpPr>
+          <p:cNvPr id="10" name="TextBox 9"/>
+          <p:cNvSpPr txBox="1"/>
+          <p:nvPr/>
+        </p:nvSpPr>
+        <p:spPr>
+          <a:xfrm>
+            <a:off x="4764024" y="3794760"/>
+            <a:ext cx="2834640" cy="662940"/>
+          </a:xfrm>
+          <a:prstGeom prst="rect">
+            <a:avLst/>
+          </a:prstGeom>
+          <a:noFill/>
+        </p:spPr>
+        <p:txBody>
+          <a:bodyPr wrap="none" lIns="0" rIns="0" tIns="0" bIns="0" anchor="t">
+            <a:spAutoFit/>
+          </a:bodyPr>
+          <a:lstStyle/>
+          <a:p>
+            <a:pPr algn="l">
+              <a:lnSpc>
+                <a:spcPct val="100000"/>
+              </a:lnSpc>
+            </a:pPr>
+            <a:r>
+              <a:rPr sz="1800" b="0">
+                <a:solidFill>
+                  <a:srgbClr val="475569"/>
+                </a:solidFill>
+                <a:latin typeface="Noto Sans JP"/>
+                <a:ea typeface="Noto Sans JP"/>
+                <a:cs typeface="Noto Sans JP"/>
+              </a:rPr>
+              <a:t>一緒に使っていい？</a:t>
+            </a:r>
+          </a:p>
+          <a:p>
+            <a:pPr algn="l">
+              <a:lnSpc>
+                <a:spcPct val="100000"/>
+              </a:lnSpc>
+            </a:pPr>
+            <a:r>
+              <a:rPr sz="1800" b="0">
+                <a:solidFill>
+                  <a:srgbClr val="475569"/>
+                </a:solidFill>
+                <a:latin typeface="Noto Sans JP"/>
+                <a:ea typeface="Noto Sans JP"/>
+                <a:cs typeface="Noto Sans JP"/>
+              </a:rPr>
+              <a:t>どれを先に塗る？</a:t>
+            </a:r>
+          </a:p>
+        </p:txBody>
+      </p:sp>
+      <p:sp>
+        <p:nvSpPr>
+          <p:cNvPr id="11" name="TextBox 10"/>
+          <p:cNvSpPr txBox="1"/>
+          <p:nvPr/>
+        </p:nvSpPr>
+        <p:spPr>
+          <a:xfrm>
+            <a:off x="4764024" y="4754880"/>
+            <a:ext cx="2834640" cy="257810"/>
+          </a:xfrm>
+          <a:prstGeom prst="rect">
+            <a:avLst/>
+          </a:prstGeom>
+          <a:noFill/>
+        </p:spPr>
+        <p:txBody>
+          <a:bodyPr wrap="none" lIns="0" rIns="0" tIns="0" bIns="0" anchor="t">
+            <a:spAutoFit/>
+          </a:bodyPr>
+          <a:lstStyle/>
+          <a:p>
+            <a:pPr algn="l">
+              <a:lnSpc>
+                <a:spcPct val="100000"/>
+              </a:lnSpc>
+            </a:pPr>
+            <a:r>
+              <a:rPr sz="1400" b="1">
+                <a:solidFill>
+                  <a:srgbClr val="2563EB"/>
+                </a:solidFill>
+                <a:latin typeface="Noto Sans JP"/>
+                <a:ea typeface="Noto Sans JP"/>
+                <a:cs typeface="Noto Sans JP"/>
+              </a:rPr>
+              <a:t>組み合わせ・塗る順番</a:t>
+            </a:r>
+          </a:p>
+        </p:txBody>
+      </p:sp>
+      <p:sp>
+        <p:nvSpPr>
+          <p:cNvPr id="12" name="Rounded Rectangle 11"/>
+          <p:cNvSpPr/>
+          <p:nvPr/>
+        </p:nvSpPr>
+        <p:spPr>
+          <a:xfrm>
+            <a:off x="7973568" y="2788920"/>
+            <a:ext cx="3401568" cy="2514600"/>
+          </a:xfrm>
+          <a:prstGeom prst="roundRect">
+            <a:avLst>
+              <a:gd name="adj" fmla="val 9090"/>
+            </a:avLst>
+          </a:prstGeom>
+          <a:solidFill>
+            <a:srgbClr val="F5F7FA"/>
+          </a:solidFill>
+          <a:ln>
+            <a:noFill/>
+          </a:ln>
+          <a:effectLst/>
+        </p:spPr>
+        <p:style>
+          <a:lnRef idx="1">
+            <a:schemeClr val="accent1"/>
+          </a:lnRef>
+          <a:fillRef idx="3">
+            <a:schemeClr val="accent1"/>
+          </a:fillRef>
+          <a:effectRef idx="2">
+            <a:schemeClr val="accent1"/>
+          </a:effectRef>
+          <a:fontRef idx="minor">
+            <a:schemeClr val="lt1"/>
+          </a:fontRef>
+        </p:style>
+        <p:txBody>
+          <a:bodyPr rtlCol="0" anchor="ctr" lIns="0" rIns="0" tIns="0" bIns="0"/>
+          <a:lstStyle/>
+          <a:p>
+            <a:pPr algn="ctr"/>
+          </a:p>
+        </p:txBody>
+      </p:sp>
+      <p:sp>
+        <p:nvSpPr>
+          <p:cNvPr id="13" name="TextBox 12"/>
+          <p:cNvSpPr txBox="1"/>
+          <p:nvPr/>
+        </p:nvSpPr>
+        <p:spPr>
+          <a:xfrm>
+            <a:off x="8339328" y="3108960"/>
+            <a:ext cx="2834640" cy="478789"/>
+          </a:xfrm>
+          <a:prstGeom prst="rect">
+            <a:avLst/>
+          </a:prstGeom>
+          <a:noFill/>
+        </p:spPr>
+        <p:txBody>
+          <a:bodyPr wrap="none" lIns="0" rIns="0" tIns="0" bIns="0" anchor="t">
+            <a:spAutoFit/>
+          </a:bodyPr>
+          <a:lstStyle/>
+          <a:p>
+            <a:pPr algn="l">
+              <a:lnSpc>
+                <a:spcPct val="100000"/>
+              </a:lnSpc>
+            </a:pPr>
+            <a:r>
+              <a:rPr sz="2600" b="1">
+                <a:solidFill>
+                  <a:srgbClr val="1B2A4A"/>
+                </a:solidFill>
+                <a:latin typeface="Noto Sans JP"/>
+                <a:ea typeface="Noto Sans JP"/>
+                <a:cs typeface="Noto Sans JP"/>
+              </a:rPr>
+              <a:t>一緒に飲む前に</a:t>
+            </a:r>
+          </a:p>
+        </p:txBody>
+      </p:sp>
+      <p:sp>
+        <p:nvSpPr>
+          <p:cNvPr id="14" name="TextBox 13"/>
+          <p:cNvSpPr txBox="1"/>
+          <p:nvPr/>
+        </p:nvSpPr>
+        <p:spPr>
+          <a:xfrm>
+            <a:off x="8339328" y="3794760"/>
+            <a:ext cx="2834640" cy="662940"/>
+          </a:xfrm>
+          <a:prstGeom prst="rect">
+            <a:avLst/>
+          </a:prstGeom>
+          <a:noFill/>
+        </p:spPr>
+        <p:txBody>
+          <a:bodyPr wrap="none" lIns="0" rIns="0" tIns="0" bIns="0" anchor="t">
+            <a:spAutoFit/>
+          </a:bodyPr>
+          <a:lstStyle/>
+          <a:p>
+            <a:pPr algn="l">
+              <a:lnSpc>
+                <a:spcPct val="100000"/>
+              </a:lnSpc>
+            </a:pPr>
+            <a:r>
+              <a:rPr sz="1800" b="0">
+                <a:solidFill>
+                  <a:srgbClr val="475569"/>
+                </a:solidFill>
+                <a:latin typeface="Noto Sans JP"/>
+                <a:ea typeface="Noto Sans JP"/>
+                <a:cs typeface="Noto Sans JP"/>
+              </a:rPr>
+              <a:t>今飲んでいる薬と</a:t>
+            </a:r>
+          </a:p>
+          <a:p>
+            <a:pPr algn="l">
+              <a:lnSpc>
+                <a:spcPct val="100000"/>
+              </a:lnSpc>
+            </a:pPr>
+            <a:r>
+              <a:rPr sz="1800" b="0">
+                <a:solidFill>
+                  <a:srgbClr val="475569"/>
+                </a:solidFill>
+                <a:latin typeface="Noto Sans JP"/>
+                <a:ea typeface="Noto Sans JP"/>
+                <a:cs typeface="Noto Sans JP"/>
+              </a:rPr>
+              <a:t>一緒で大丈夫？</a:t>
+            </a:r>
+          </a:p>
+        </p:txBody>
+      </p:sp>
+      <p:sp>
+        <p:nvSpPr>
+          <p:cNvPr id="15" name="TextBox 14"/>
+          <p:cNvSpPr txBox="1"/>
+          <p:nvPr/>
+        </p:nvSpPr>
+        <p:spPr>
+          <a:xfrm>
+            <a:off x="8339328" y="4754880"/>
+            <a:ext cx="2834640" cy="257810"/>
+          </a:xfrm>
+          <a:prstGeom prst="rect">
+            <a:avLst/>
+          </a:prstGeom>
+          <a:noFill/>
+        </p:spPr>
+        <p:txBody>
+          <a:bodyPr wrap="none" lIns="0" rIns="0" tIns="0" bIns="0" anchor="t">
+            <a:spAutoFit/>
+          </a:bodyPr>
+          <a:lstStyle/>
+          <a:p>
+            <a:pPr algn="l">
+              <a:lnSpc>
+                <a:spcPct val="100000"/>
+              </a:lnSpc>
+            </a:pPr>
+            <a:r>
+              <a:rPr sz="1400" b="1">
+                <a:solidFill>
+                  <a:srgbClr val="2563EB"/>
+                </a:solidFill>
+                <a:latin typeface="Noto Sans JP"/>
+                <a:ea typeface="Noto Sans JP"/>
+                <a:cs typeface="Noto Sans JP"/>
+              </a:rPr>
+              <a:t>飲み合わせ</a:t>
+            </a:r>
+          </a:p>
+        </p:txBody>
+      </p:sp>
+      <p:sp>
+        <p:nvSpPr>
+          <p:cNvPr id="16" name="TextBox 15"/>
+          <p:cNvSpPr txBox="1"/>
+          <p:nvPr/>
+        </p:nvSpPr>
+        <p:spPr>
+          <a:xfrm>
+            <a:off x="0" y="5715000"/>
+            <a:ext cx="12191695" cy="368300"/>
+          </a:xfrm>
+          <a:prstGeom prst="rect">
+            <a:avLst/>
+          </a:prstGeom>
+          <a:noFill/>
+        </p:spPr>
+        <p:txBody>
+          <a:bodyPr wrap="none" lIns="0" rIns="0" tIns="0" bIns="0" anchor="t">
+            <a:spAutoFit/>
+          </a:bodyPr>
+          <a:lstStyle/>
+          <a:p>
+            <a:pPr algn="ctr">
+              <a:lnSpc>
+                <a:spcPct val="100000"/>
+              </a:lnSpc>
+            </a:pPr>
+            <a:r>
+              <a:rPr sz="2000" b="1">
+                <a:solidFill>
+                  <a:srgbClr val="475569"/>
+                </a:solidFill>
+                <a:latin typeface="Noto Sans JP"/>
+                <a:ea typeface="Noto Sans JP"/>
+                <a:cs typeface="Noto Sans JP"/>
+              </a:rPr>
+              <a:t>肌の治療を続ける人も、家族の薬を買う人も、店頭で迷わない毎日へ。</a:t>
+            </a:r>
+          </a:p>
+        </p:txBody>
+      </p:sp>
+    </p:spTree>
+  </p:cSld>
+  <p:clrMapOvr>
+    <a:masterClrMapping/>
+  </p:clrMapOvr>
+</p:sld>
+</file>
+
+<file path=ppt/slides/slide11.xml><?xml version="1.0" encoding="utf-8"?>
+<p:sld xmlns:a="http://schemas.openxmlformats.org/drawingml/2006/main" xmlns:p="http://schemas.openxmlformats.org/presentationml/2006/main" xmlns:r="http://schemas.openxmlformats.org/officeDocument/2006/relationships">
+  <p:cSld>
+    <p:bg>
+      <p:bgPr>
+        <a:solidFill>
+          <a:srgbClr val="FFFFFF"/>
+        </a:solidFill>
+        <a:effectLst/>
+      </p:bgPr>
+    </p:bg>
+    <p:spTree>
+      <p:nvGrpSpPr>
+        <p:cNvPr id="1" name=""/>
+        <p:cNvGrpSpPr/>
+        <p:nvPr/>
+      </p:nvGrpSpPr>
+      <p:grpSpPr/>
+      <p:sp>
+        <p:nvSpPr>
+          <p:cNvPr id="2" name="TextBox 1"/>
+          <p:cNvSpPr txBox="1"/>
+          <p:nvPr/>
+        </p:nvSpPr>
+        <p:spPr>
+          <a:xfrm>
             <a:off x="0" y="1097280"/>
             <a:ext cx="12191695" cy="478789"/>
           </a:xfrm>
@@ -8127,7 +8908,7 @@
                 <a:ea typeface="Noto Sans JP"/>
                 <a:cs typeface="Noto Sans JP"/>
               </a:rPr>
-              <a:t>使い方</a:t>
+              <a:t>使い方 1｜店で選ぶ</a:t>
             </a:r>
           </a:p>
         </p:txBody>
@@ -9223,8 +10004,8 @@
         </p:nvSpPr>
         <p:spPr>
           <a:xfrm>
-            <a:off x="0" y="868680"/>
-            <a:ext cx="12191695" cy="368300"/>
+            <a:off x="685800" y="548640"/>
+            <a:ext cx="7315200" cy="368300"/>
           </a:xfrm>
           <a:prstGeom prst="rect">
             <a:avLst/>
@@ -9237,7 +10018,7 @@
           </a:bodyPr>
           <a:lstStyle/>
           <a:p>
-            <a:pPr algn="ctr">
+            <a:pPr algn="l">
               <a:lnSpc>
                 <a:spcPct val="100000"/>
               </a:lnSpc>
@@ -9251,7 +10032,7 @@
                 <a:ea typeface="Noto Sans JP"/>
                 <a:cs typeface="Noto Sans JP"/>
               </a:rPr>
-              <a:t>Overlai が目指すこと</a:t>
+              <a:t>使い方 2｜家で使う</a:t>
             </a:r>
           </a:p>
         </p:txBody>
@@ -9264,8 +10045,8 @@
         </p:nvSpPr>
         <p:spPr>
           <a:xfrm>
-            <a:off x="0" y="1371600"/>
-            <a:ext cx="12191695" cy="994409"/>
+            <a:off x="685800" y="960120"/>
+            <a:ext cx="10058400" cy="552450"/>
           </a:xfrm>
           <a:prstGeom prst="rect">
             <a:avLst/>
@@ -9278,43 +10059,41 @@
           </a:bodyPr>
           <a:lstStyle/>
           <a:p>
-            <a:pPr algn="ctr">
+            <a:pPr algn="l">
               <a:lnSpc>
                 <a:spcPct val="100000"/>
               </a:lnSpc>
             </a:pPr>
             <a:r>
-              <a:rPr sz="5400" b="1">
-                <a:solidFill>
-                  <a:srgbClr val="1B2A4A"/>
-                </a:solidFill>
-                <a:latin typeface="Noto Sans JP"/>
-                <a:ea typeface="Noto Sans JP"/>
-                <a:cs typeface="Noto Sans JP"/>
-              </a:rPr>
-              <a:t>重ねる前に、重ねて見る。</a:t>
-            </a:r>
-          </a:p>
-        </p:txBody>
-      </p:sp>
-      <p:sp>
-        <p:nvSpPr>
-          <p:cNvPr id="4" name="Rounded Rectangle 3"/>
+              <a:rPr sz="3000" b="1">
+                <a:solidFill>
+                  <a:srgbClr val="0F172A"/>
+                </a:solidFill>
+                <a:latin typeface="Noto Sans JP"/>
+                <a:ea typeface="Noto Sans JP"/>
+                <a:cs typeface="Noto Sans JP"/>
+              </a:rPr>
+              <a:t>登録した薬と体質から、毎日の使い方がわかる。</a:t>
+            </a:r>
+          </a:p>
+        </p:txBody>
+      </p:sp>
+      <p:sp>
+        <p:nvSpPr>
+          <p:cNvPr id="4" name="Rectangle 3"/>
           <p:cNvSpPr/>
           <p:nvPr/>
         </p:nvSpPr>
         <p:spPr>
           <a:xfrm>
-            <a:off x="822960" y="2788920"/>
-            <a:ext cx="3401568" cy="2514600"/>
-          </a:xfrm>
-          <a:prstGeom prst="roundRect">
-            <a:avLst>
-              <a:gd name="adj" fmla="val 9090"/>
-            </a:avLst>
+            <a:off x="902970" y="2212848"/>
+            <a:ext cx="22860" cy="3108960"/>
+          </a:xfrm>
+          <a:prstGeom prst="rect">
+            <a:avLst/>
           </a:prstGeom>
           <a:solidFill>
-            <a:srgbClr val="F5F7FA"/>
+            <a:srgbClr val="C9D0DB"/>
           </a:solidFill>
           <a:ln>
             <a:noFill/>
@@ -9345,14 +10124,71 @@
       </p:sp>
       <p:sp>
         <p:nvSpPr>
-          <p:cNvPr id="5" name="TextBox 4"/>
+          <p:cNvPr id="5" name="Rounded Rectangle 4"/>
+          <p:cNvSpPr/>
+          <p:nvPr/>
+        </p:nvSpPr>
+        <p:spPr>
+          <a:xfrm>
+            <a:off x="685800" y="1984248"/>
+            <a:ext cx="457200" cy="457200"/>
+          </a:xfrm>
+          <a:prstGeom prst="roundRect">
+            <a:avLst>
+              <a:gd name="adj" fmla="val 50000"/>
+            </a:avLst>
+          </a:prstGeom>
+          <a:solidFill>
+            <a:srgbClr val="1B2A4A"/>
+          </a:solidFill>
+          <a:ln>
+            <a:noFill/>
+          </a:ln>
+          <a:effectLst/>
+        </p:spPr>
+        <p:style>
+          <a:lnRef idx="1">
+            <a:schemeClr val="accent1"/>
+          </a:lnRef>
+          <a:fillRef idx="3">
+            <a:schemeClr val="accent1"/>
+          </a:fillRef>
+          <a:effectRef idx="2">
+            <a:schemeClr val="accent1"/>
+          </a:effectRef>
+          <a:fontRef idx="minor">
+            <a:schemeClr val="lt1"/>
+          </a:fontRef>
+        </p:style>
+        <p:txBody>
+          <a:bodyPr rtlCol="0" anchor="ctr" lIns="0" rIns="0" tIns="0" bIns="0" wrap="none"/>
+          <a:lstStyle/>
+          <a:p>
+            <a:pPr algn="ctr"/>
+            <a:r>
+              <a:rPr sz="1800" b="1">
+                <a:solidFill>
+                  <a:srgbClr val="FFFFFF"/>
+                </a:solidFill>
+                <a:latin typeface="Noto Sans JP"/>
+                <a:ea typeface="Noto Sans JP"/>
+                <a:cs typeface="Noto Sans JP"/>
+              </a:rPr>
+              <a:t>1</a:t>
+            </a:r>
+          </a:p>
+        </p:txBody>
+      </p:sp>
+      <p:sp>
+        <p:nvSpPr>
+          <p:cNvPr id="6" name="TextBox 5"/>
           <p:cNvSpPr txBox="1"/>
           <p:nvPr/>
         </p:nvSpPr>
         <p:spPr>
           <a:xfrm>
-            <a:off x="1188720" y="3108960"/>
-            <a:ext cx="2834640" cy="478789"/>
+            <a:off x="1417320" y="2002536"/>
+            <a:ext cx="2743200" cy="313055"/>
           </a:xfrm>
           <a:prstGeom prst="rect">
             <a:avLst/>
@@ -9371,29 +10207,29 @@
               </a:lnSpc>
             </a:pPr>
             <a:r>
-              <a:rPr sz="2600" b="1">
-                <a:solidFill>
-                  <a:srgbClr val="1B2A4A"/>
-                </a:solidFill>
-                <a:latin typeface="Noto Sans JP"/>
-                <a:ea typeface="Noto Sans JP"/>
-                <a:cs typeface="Noto Sans JP"/>
-              </a:rPr>
-              <a:t>買い重ねる前に</a:t>
-            </a:r>
-          </a:p>
-        </p:txBody>
-      </p:sp>
-      <p:sp>
-        <p:nvSpPr>
-          <p:cNvPr id="6" name="TextBox 5"/>
+              <a:rPr sz="1700" b="1">
+                <a:solidFill>
+                  <a:srgbClr val="475569"/>
+                </a:solidFill>
+                <a:latin typeface="Noto Sans JP"/>
+                <a:ea typeface="Noto Sans JP"/>
+                <a:cs typeface="Noto Sans JP"/>
+              </a:rPr>
+              <a:t>家で</a:t>
+            </a:r>
+          </a:p>
+        </p:txBody>
+      </p:sp>
+      <p:sp>
+        <p:nvSpPr>
+          <p:cNvPr id="7" name="TextBox 6"/>
           <p:cNvSpPr txBox="1"/>
           <p:nvPr/>
         </p:nvSpPr>
         <p:spPr>
           <a:xfrm>
-            <a:off x="1188720" y="3794760"/>
-            <a:ext cx="2834640" cy="662940"/>
+            <a:off x="1417320" y="2377440"/>
+            <a:ext cx="4892040" cy="515620"/>
           </a:xfrm>
           <a:prstGeom prst="rect">
             <a:avLst/>
@@ -9412,17 +10248,40 @@
               </a:lnSpc>
             </a:pPr>
             <a:r>
-              <a:rPr sz="1800" b="0">
-                <a:solidFill>
-                  <a:srgbClr val="475569"/>
-                </a:solidFill>
-                <a:latin typeface="Noto Sans JP"/>
-                <a:ea typeface="Noto Sans JP"/>
-                <a:cs typeface="Noto Sans JP"/>
-              </a:rPr>
-              <a:t>もう家にある？</a:t>
-            </a:r>
-          </a:p>
+              <a:rPr sz="2800" b="1">
+                <a:solidFill>
+                  <a:srgbClr val="1B2A4A"/>
+                </a:solidFill>
+                <a:latin typeface="Noto Sans JP"/>
+                <a:ea typeface="Noto Sans JP"/>
+                <a:cs typeface="Noto Sans JP"/>
+              </a:rPr>
+              <a:t>薬・化粧品と体質を登録</a:t>
+            </a:r>
+          </a:p>
+        </p:txBody>
+      </p:sp>
+      <p:sp>
+        <p:nvSpPr>
+          <p:cNvPr id="8" name="TextBox 7"/>
+          <p:cNvSpPr txBox="1"/>
+          <p:nvPr/>
+        </p:nvSpPr>
+        <p:spPr>
+          <a:xfrm>
+            <a:off x="1417320" y="2898648"/>
+            <a:ext cx="4892040" cy="313055"/>
+          </a:xfrm>
+          <a:prstGeom prst="rect">
+            <a:avLst/>
+          </a:prstGeom>
+          <a:noFill/>
+        </p:spPr>
+        <p:txBody>
+          <a:bodyPr wrap="none" lIns="0" rIns="0" tIns="0" bIns="0" anchor="t">
+            <a:spAutoFit/>
+          </a:bodyPr>
+          <a:lstStyle/>
           <a:p>
             <a:pPr algn="l">
               <a:lnSpc>
@@ -9430,7 +10289,7 @@
               </a:lnSpc>
             </a:pPr>
             <a:r>
-              <a:rPr sz="1800" b="0">
+              <a:rPr sz="1700" b="0">
                 <a:solidFill>
                   <a:srgbClr val="475569"/>
                 </a:solidFill>
@@ -9438,21 +10297,578 @@
                 <a:ea typeface="Noto Sans JP"/>
                 <a:cs typeface="Noto Sans JP"/>
               </a:rPr>
-              <a:t>名前違いの同じ薬は？</a:t>
-            </a:r>
-          </a:p>
-        </p:txBody>
-      </p:sp>
-      <p:sp>
-        <p:nvSpPr>
-          <p:cNvPr id="7" name="TextBox 6"/>
+              <a:t>薬・化粧品は撮るだけ、体質は設定から</a:t>
+            </a:r>
+          </a:p>
+        </p:txBody>
+      </p:sp>
+      <p:sp>
+        <p:nvSpPr>
+          <p:cNvPr id="9" name="Rectangle 8"/>
+          <p:cNvSpPr/>
+          <p:nvPr/>
+        </p:nvSpPr>
+        <p:spPr>
+          <a:xfrm>
+            <a:off x="6492240" y="2057400"/>
+            <a:ext cx="45720" cy="1097280"/>
+          </a:xfrm>
+          <a:prstGeom prst="rect">
+            <a:avLst/>
+          </a:prstGeom>
+          <a:solidFill>
+            <a:srgbClr val="C9D0DB"/>
+          </a:solidFill>
+          <a:ln>
+            <a:noFill/>
+          </a:ln>
+          <a:effectLst/>
+        </p:spPr>
+        <p:style>
+          <a:lnRef idx="1">
+            <a:schemeClr val="accent1"/>
+          </a:lnRef>
+          <a:fillRef idx="3">
+            <a:schemeClr val="accent1"/>
+          </a:fillRef>
+          <a:effectRef idx="2">
+            <a:schemeClr val="accent1"/>
+          </a:effectRef>
+          <a:fontRef idx="minor">
+            <a:schemeClr val="lt1"/>
+          </a:fontRef>
+        </p:style>
+        <p:txBody>
+          <a:bodyPr rtlCol="0" anchor="ctr" lIns="0" rIns="0" tIns="0" bIns="0"/>
+          <a:lstStyle/>
+          <a:p>
+            <a:pPr algn="ctr"/>
+          </a:p>
+        </p:txBody>
+      </p:sp>
+      <p:sp>
+        <p:nvSpPr>
+          <p:cNvPr id="10" name="Rounded Rectangle 9"/>
+          <p:cNvSpPr/>
+          <p:nvPr/>
+        </p:nvSpPr>
+        <p:spPr>
+          <a:xfrm>
+            <a:off x="6766559" y="2057400"/>
+            <a:ext cx="1013460" cy="384048"/>
+          </a:xfrm>
+          <a:prstGeom prst="roundRect">
+            <a:avLst>
+              <a:gd name="adj" fmla="val 50000"/>
+            </a:avLst>
+          </a:prstGeom>
+          <a:solidFill>
+            <a:srgbClr val="F2F4F7"/>
+          </a:solidFill>
+          <a:ln>
+            <a:noFill/>
+          </a:ln>
+          <a:effectLst/>
+        </p:spPr>
+        <p:style>
+          <a:lnRef idx="1">
+            <a:schemeClr val="accent1"/>
+          </a:lnRef>
+          <a:fillRef idx="3">
+            <a:schemeClr val="accent1"/>
+          </a:fillRef>
+          <a:effectRef idx="2">
+            <a:schemeClr val="accent1"/>
+          </a:effectRef>
+          <a:fontRef idx="minor">
+            <a:schemeClr val="lt1"/>
+          </a:fontRef>
+        </p:style>
+        <p:txBody>
+          <a:bodyPr rtlCol="0" anchor="ctr" lIns="0" rIns="0" tIns="0" bIns="0" wrap="none"/>
+          <a:lstStyle/>
+          <a:p>
+            <a:pPr algn="ctr"/>
+            <a:r>
+              <a:rPr sz="1700" b="1">
+                <a:solidFill>
+                  <a:srgbClr val="1B2A4A"/>
+                </a:solidFill>
+                <a:latin typeface="Noto Sans JP"/>
+                <a:ea typeface="Noto Sans JP"/>
+                <a:cs typeface="Noto Sans JP"/>
+              </a:rPr>
+              <a:t>飲み薬</a:t>
+            </a:r>
+          </a:p>
+        </p:txBody>
+      </p:sp>
+      <p:sp>
+        <p:nvSpPr>
+          <p:cNvPr id="11" name="Rounded Rectangle 10"/>
+          <p:cNvSpPr/>
+          <p:nvPr/>
+        </p:nvSpPr>
+        <p:spPr>
+          <a:xfrm>
+            <a:off x="7908036" y="2057400"/>
+            <a:ext cx="1013460" cy="384048"/>
+          </a:xfrm>
+          <a:prstGeom prst="roundRect">
+            <a:avLst>
+              <a:gd name="adj" fmla="val 50000"/>
+            </a:avLst>
+          </a:prstGeom>
+          <a:solidFill>
+            <a:srgbClr val="F2F4F7"/>
+          </a:solidFill>
+          <a:ln>
+            <a:noFill/>
+          </a:ln>
+          <a:effectLst/>
+        </p:spPr>
+        <p:style>
+          <a:lnRef idx="1">
+            <a:schemeClr val="accent1"/>
+          </a:lnRef>
+          <a:fillRef idx="3">
+            <a:schemeClr val="accent1"/>
+          </a:fillRef>
+          <a:effectRef idx="2">
+            <a:schemeClr val="accent1"/>
+          </a:effectRef>
+          <a:fontRef idx="minor">
+            <a:schemeClr val="lt1"/>
+          </a:fontRef>
+        </p:style>
+        <p:txBody>
+          <a:bodyPr rtlCol="0" anchor="ctr" lIns="0" rIns="0" tIns="0" bIns="0" wrap="none"/>
+          <a:lstStyle/>
+          <a:p>
+            <a:pPr algn="ctr"/>
+            <a:r>
+              <a:rPr sz="1700" b="1">
+                <a:solidFill>
+                  <a:srgbClr val="1B2A4A"/>
+                </a:solidFill>
+                <a:latin typeface="Noto Sans JP"/>
+                <a:ea typeface="Noto Sans JP"/>
+                <a:cs typeface="Noto Sans JP"/>
+              </a:rPr>
+              <a:t>塗り薬</a:t>
+            </a:r>
+          </a:p>
+        </p:txBody>
+      </p:sp>
+      <p:sp>
+        <p:nvSpPr>
+          <p:cNvPr id="12" name="Rounded Rectangle 11"/>
+          <p:cNvSpPr/>
+          <p:nvPr/>
+        </p:nvSpPr>
+        <p:spPr>
+          <a:xfrm>
+            <a:off x="9049512" y="2057400"/>
+            <a:ext cx="1013460" cy="384048"/>
+          </a:xfrm>
+          <a:prstGeom prst="roundRect">
+            <a:avLst>
+              <a:gd name="adj" fmla="val 50000"/>
+            </a:avLst>
+          </a:prstGeom>
+          <a:solidFill>
+            <a:srgbClr val="F2F4F7"/>
+          </a:solidFill>
+          <a:ln>
+            <a:noFill/>
+          </a:ln>
+          <a:effectLst/>
+        </p:spPr>
+        <p:style>
+          <a:lnRef idx="1">
+            <a:schemeClr val="accent1"/>
+          </a:lnRef>
+          <a:fillRef idx="3">
+            <a:schemeClr val="accent1"/>
+          </a:fillRef>
+          <a:effectRef idx="2">
+            <a:schemeClr val="accent1"/>
+          </a:effectRef>
+          <a:fontRef idx="minor">
+            <a:schemeClr val="lt1"/>
+          </a:fontRef>
+        </p:style>
+        <p:txBody>
+          <a:bodyPr rtlCol="0" anchor="ctr" lIns="0" rIns="0" tIns="0" bIns="0" wrap="none"/>
+          <a:lstStyle/>
+          <a:p>
+            <a:pPr algn="ctr"/>
+            <a:r>
+              <a:rPr sz="1700" b="1">
+                <a:solidFill>
+                  <a:srgbClr val="1B2A4A"/>
+                </a:solidFill>
+                <a:latin typeface="Noto Sans JP"/>
+                <a:ea typeface="Noto Sans JP"/>
+                <a:cs typeface="Noto Sans JP"/>
+              </a:rPr>
+              <a:t>化粧品</a:t>
+            </a:r>
+          </a:p>
+        </p:txBody>
+      </p:sp>
+      <p:sp>
+        <p:nvSpPr>
+          <p:cNvPr id="13" name="Rounded Rectangle 12"/>
+          <p:cNvSpPr/>
+          <p:nvPr/>
+        </p:nvSpPr>
+        <p:spPr>
+          <a:xfrm>
+            <a:off x="6766559" y="2532888"/>
+            <a:ext cx="797560" cy="384048"/>
+          </a:xfrm>
+          <a:prstGeom prst="roundRect">
+            <a:avLst>
+              <a:gd name="adj" fmla="val 50000"/>
+            </a:avLst>
+          </a:prstGeom>
+          <a:solidFill>
+            <a:srgbClr val="F2F4F7"/>
+          </a:solidFill>
+          <a:ln>
+            <a:noFill/>
+          </a:ln>
+          <a:effectLst/>
+        </p:spPr>
+        <p:style>
+          <a:lnRef idx="1">
+            <a:schemeClr val="accent1"/>
+          </a:lnRef>
+          <a:fillRef idx="3">
+            <a:schemeClr val="accent1"/>
+          </a:fillRef>
+          <a:effectRef idx="2">
+            <a:schemeClr val="accent1"/>
+          </a:effectRef>
+          <a:fontRef idx="minor">
+            <a:schemeClr val="lt1"/>
+          </a:fontRef>
+        </p:style>
+        <p:txBody>
+          <a:bodyPr rtlCol="0" anchor="ctr" lIns="0" rIns="0" tIns="0" bIns="0" wrap="none"/>
+          <a:lstStyle/>
+          <a:p>
+            <a:pPr algn="ctr"/>
+            <a:r>
+              <a:rPr sz="1700" b="1">
+                <a:solidFill>
+                  <a:srgbClr val="1B2A4A"/>
+                </a:solidFill>
+                <a:latin typeface="Noto Sans JP"/>
+                <a:ea typeface="Noto Sans JP"/>
+                <a:cs typeface="Noto Sans JP"/>
+              </a:rPr>
+              <a:t>肌質</a:t>
+            </a:r>
+          </a:p>
+        </p:txBody>
+      </p:sp>
+      <p:sp>
+        <p:nvSpPr>
+          <p:cNvPr id="14" name="Rounded Rectangle 13"/>
+          <p:cNvSpPr/>
+          <p:nvPr/>
+        </p:nvSpPr>
+        <p:spPr>
+          <a:xfrm>
+            <a:off x="7692136" y="2532888"/>
+            <a:ext cx="797560" cy="384048"/>
+          </a:xfrm>
+          <a:prstGeom prst="roundRect">
+            <a:avLst>
+              <a:gd name="adj" fmla="val 50000"/>
+            </a:avLst>
+          </a:prstGeom>
+          <a:solidFill>
+            <a:srgbClr val="F2F4F7"/>
+          </a:solidFill>
+          <a:ln>
+            <a:noFill/>
+          </a:ln>
+          <a:effectLst/>
+        </p:spPr>
+        <p:style>
+          <a:lnRef idx="1">
+            <a:schemeClr val="accent1"/>
+          </a:lnRef>
+          <a:fillRef idx="3">
+            <a:schemeClr val="accent1"/>
+          </a:fillRef>
+          <a:effectRef idx="2">
+            <a:schemeClr val="accent1"/>
+          </a:effectRef>
+          <a:fontRef idx="minor">
+            <a:schemeClr val="lt1"/>
+          </a:fontRef>
+        </p:style>
+        <p:txBody>
+          <a:bodyPr rtlCol="0" anchor="ctr" lIns="0" rIns="0" tIns="0" bIns="0" wrap="none"/>
+          <a:lstStyle/>
+          <a:p>
+            <a:pPr algn="ctr"/>
+            <a:r>
+              <a:rPr sz="1700" b="1">
+                <a:solidFill>
+                  <a:srgbClr val="1B2A4A"/>
+                </a:solidFill>
+                <a:latin typeface="Noto Sans JP"/>
+                <a:ea typeface="Noto Sans JP"/>
+                <a:cs typeface="Noto Sans JP"/>
+              </a:rPr>
+              <a:t>頭皮</a:t>
+            </a:r>
+          </a:p>
+        </p:txBody>
+      </p:sp>
+      <p:sp>
+        <p:nvSpPr>
+          <p:cNvPr id="15" name="Rounded Rectangle 14"/>
+          <p:cNvSpPr/>
+          <p:nvPr/>
+        </p:nvSpPr>
+        <p:spPr>
+          <a:xfrm>
+            <a:off x="8617712" y="2532888"/>
+            <a:ext cx="797560" cy="384048"/>
+          </a:xfrm>
+          <a:prstGeom prst="roundRect">
+            <a:avLst>
+              <a:gd name="adj" fmla="val 50000"/>
+            </a:avLst>
+          </a:prstGeom>
+          <a:solidFill>
+            <a:srgbClr val="F2F4F7"/>
+          </a:solidFill>
+          <a:ln>
+            <a:noFill/>
+          </a:ln>
+          <a:effectLst/>
+        </p:spPr>
+        <p:style>
+          <a:lnRef idx="1">
+            <a:schemeClr val="accent1"/>
+          </a:lnRef>
+          <a:fillRef idx="3">
+            <a:schemeClr val="accent1"/>
+          </a:fillRef>
+          <a:effectRef idx="2">
+            <a:schemeClr val="accent1"/>
+          </a:effectRef>
+          <a:fontRef idx="minor">
+            <a:schemeClr val="lt1"/>
+          </a:fontRef>
+        </p:style>
+        <p:txBody>
+          <a:bodyPr rtlCol="0" anchor="ctr" lIns="0" rIns="0" tIns="0" bIns="0" wrap="none"/>
+          <a:lstStyle/>
+          <a:p>
+            <a:pPr algn="ctr"/>
+            <a:r>
+              <a:rPr sz="1700" b="1">
+                <a:solidFill>
+                  <a:srgbClr val="1B2A4A"/>
+                </a:solidFill>
+                <a:latin typeface="Noto Sans JP"/>
+                <a:ea typeface="Noto Sans JP"/>
+                <a:cs typeface="Noto Sans JP"/>
+              </a:rPr>
+              <a:t>年代</a:t>
+            </a:r>
+          </a:p>
+        </p:txBody>
+      </p:sp>
+      <p:sp>
+        <p:nvSpPr>
+          <p:cNvPr id="16" name="Rounded Rectangle 15"/>
+          <p:cNvSpPr/>
+          <p:nvPr/>
+        </p:nvSpPr>
+        <p:spPr>
+          <a:xfrm>
+            <a:off x="9543288" y="2532888"/>
+            <a:ext cx="797560" cy="384048"/>
+          </a:xfrm>
+          <a:prstGeom prst="roundRect">
+            <a:avLst>
+              <a:gd name="adj" fmla="val 50000"/>
+            </a:avLst>
+          </a:prstGeom>
+          <a:solidFill>
+            <a:srgbClr val="F2F4F7"/>
+          </a:solidFill>
+          <a:ln>
+            <a:noFill/>
+          </a:ln>
+          <a:effectLst/>
+        </p:spPr>
+        <p:style>
+          <a:lnRef idx="1">
+            <a:schemeClr val="accent1"/>
+          </a:lnRef>
+          <a:fillRef idx="3">
+            <a:schemeClr val="accent1"/>
+          </a:fillRef>
+          <a:effectRef idx="2">
+            <a:schemeClr val="accent1"/>
+          </a:effectRef>
+          <a:fontRef idx="minor">
+            <a:schemeClr val="lt1"/>
+          </a:fontRef>
+        </p:style>
+        <p:txBody>
+          <a:bodyPr rtlCol="0" anchor="ctr" lIns="0" rIns="0" tIns="0" bIns="0" wrap="none"/>
+          <a:lstStyle/>
+          <a:p>
+            <a:pPr algn="ctr"/>
+            <a:r>
+              <a:rPr sz="1700" b="1">
+                <a:solidFill>
+                  <a:srgbClr val="1B2A4A"/>
+                </a:solidFill>
+                <a:latin typeface="Noto Sans JP"/>
+                <a:ea typeface="Noto Sans JP"/>
+                <a:cs typeface="Noto Sans JP"/>
+              </a:rPr>
+              <a:t>性別</a:t>
+            </a:r>
+          </a:p>
+        </p:txBody>
+      </p:sp>
+      <p:sp>
+        <p:nvSpPr>
+          <p:cNvPr id="17" name="Rounded Rectangle 16"/>
+          <p:cNvSpPr/>
+          <p:nvPr/>
+        </p:nvSpPr>
+        <p:spPr>
+          <a:xfrm>
+            <a:off x="10468864" y="2532888"/>
+            <a:ext cx="797560" cy="384048"/>
+          </a:xfrm>
+          <a:prstGeom prst="roundRect">
+            <a:avLst>
+              <a:gd name="adj" fmla="val 50000"/>
+            </a:avLst>
+          </a:prstGeom>
+          <a:solidFill>
+            <a:srgbClr val="F2F4F7"/>
+          </a:solidFill>
+          <a:ln>
+            <a:noFill/>
+          </a:ln>
+          <a:effectLst/>
+        </p:spPr>
+        <p:style>
+          <a:lnRef idx="1">
+            <a:schemeClr val="accent1"/>
+          </a:lnRef>
+          <a:fillRef idx="3">
+            <a:schemeClr val="accent1"/>
+          </a:fillRef>
+          <a:effectRef idx="2">
+            <a:schemeClr val="accent1"/>
+          </a:effectRef>
+          <a:fontRef idx="minor">
+            <a:schemeClr val="lt1"/>
+          </a:fontRef>
+        </p:style>
+        <p:txBody>
+          <a:bodyPr rtlCol="0" anchor="ctr" lIns="0" rIns="0" tIns="0" bIns="0" wrap="none"/>
+          <a:lstStyle/>
+          <a:p>
+            <a:pPr algn="ctr"/>
+            <a:r>
+              <a:rPr sz="1700" b="1">
+                <a:solidFill>
+                  <a:srgbClr val="1B2A4A"/>
+                </a:solidFill>
+                <a:latin typeface="Noto Sans JP"/>
+                <a:ea typeface="Noto Sans JP"/>
+                <a:cs typeface="Noto Sans JP"/>
+              </a:rPr>
+              <a:t>悩み</a:t>
+            </a:r>
+          </a:p>
+        </p:txBody>
+      </p:sp>
+      <p:sp>
+        <p:nvSpPr>
+          <p:cNvPr id="18" name="Rounded Rectangle 17"/>
+          <p:cNvSpPr/>
+          <p:nvPr/>
+        </p:nvSpPr>
+        <p:spPr>
+          <a:xfrm>
+            <a:off x="685800" y="3538727"/>
+            <a:ext cx="457200" cy="457200"/>
+          </a:xfrm>
+          <a:prstGeom prst="roundRect">
+            <a:avLst>
+              <a:gd name="adj" fmla="val 50000"/>
+            </a:avLst>
+          </a:prstGeom>
+          <a:solidFill>
+            <a:srgbClr val="1B2A4A"/>
+          </a:solidFill>
+          <a:ln>
+            <a:noFill/>
+          </a:ln>
+          <a:effectLst/>
+        </p:spPr>
+        <p:style>
+          <a:lnRef idx="1">
+            <a:schemeClr val="accent1"/>
+          </a:lnRef>
+          <a:fillRef idx="3">
+            <a:schemeClr val="accent1"/>
+          </a:fillRef>
+          <a:effectRef idx="2">
+            <a:schemeClr val="accent1"/>
+          </a:effectRef>
+          <a:fontRef idx="minor">
+            <a:schemeClr val="lt1"/>
+          </a:fontRef>
+        </p:style>
+        <p:txBody>
+          <a:bodyPr rtlCol="0" anchor="ctr" lIns="0" rIns="0" tIns="0" bIns="0" wrap="none"/>
+          <a:lstStyle/>
+          <a:p>
+            <a:pPr algn="ctr"/>
+            <a:r>
+              <a:rPr sz="1800" b="1">
+                <a:solidFill>
+                  <a:srgbClr val="FFFFFF"/>
+                </a:solidFill>
+                <a:latin typeface="Noto Sans JP"/>
+                <a:ea typeface="Noto Sans JP"/>
+                <a:cs typeface="Noto Sans JP"/>
+              </a:rPr>
+              <a:t>2</a:t>
+            </a:r>
+          </a:p>
+        </p:txBody>
+      </p:sp>
+      <p:sp>
+        <p:nvSpPr>
+          <p:cNvPr id="19" name="TextBox 18"/>
           <p:cNvSpPr txBox="1"/>
           <p:nvPr/>
         </p:nvSpPr>
         <p:spPr>
           <a:xfrm>
-            <a:off x="1188720" y="4754880"/>
-            <a:ext cx="2834640" cy="257810"/>
+            <a:off x="1417320" y="3557015"/>
+            <a:ext cx="2743200" cy="313055"/>
           </a:xfrm>
           <a:prstGeom prst="rect">
             <a:avLst/>
@@ -9471,37 +10887,117 @@
               </a:lnSpc>
             </a:pPr>
             <a:r>
-              <a:rPr sz="1400" b="1">
-                <a:solidFill>
-                  <a:srgbClr val="2563EB"/>
-                </a:solidFill>
-                <a:latin typeface="Noto Sans JP"/>
-                <a:ea typeface="Noto Sans JP"/>
-                <a:cs typeface="Noto Sans JP"/>
-              </a:rPr>
-              <a:t>重複</a:t>
-            </a:r>
-          </a:p>
-        </p:txBody>
-      </p:sp>
-      <p:sp>
-        <p:nvSpPr>
-          <p:cNvPr id="8" name="Rounded Rectangle 7"/>
+              <a:rPr sz="1700" b="1">
+                <a:solidFill>
+                  <a:srgbClr val="475569"/>
+                </a:solidFill>
+                <a:latin typeface="Noto Sans JP"/>
+                <a:ea typeface="Noto Sans JP"/>
+                <a:cs typeface="Noto Sans JP"/>
+              </a:rPr>
+              <a:t>アプリが</a:t>
+            </a:r>
+          </a:p>
+        </p:txBody>
+      </p:sp>
+      <p:sp>
+        <p:nvSpPr>
+          <p:cNvPr id="20" name="TextBox 19"/>
+          <p:cNvSpPr txBox="1"/>
+          <p:nvPr/>
+        </p:nvSpPr>
+        <p:spPr>
+          <a:xfrm>
+            <a:off x="1417320" y="3931920"/>
+            <a:ext cx="4892040" cy="515620"/>
+          </a:xfrm>
+          <a:prstGeom prst="rect">
+            <a:avLst/>
+          </a:prstGeom>
+          <a:noFill/>
+        </p:spPr>
+        <p:txBody>
+          <a:bodyPr wrap="none" lIns="0" rIns="0" tIns="0" bIns="0" anchor="t">
+            <a:spAutoFit/>
+          </a:bodyPr>
+          <a:lstStyle/>
+          <a:p>
+            <a:pPr algn="l">
+              <a:lnSpc>
+                <a:spcPct val="100000"/>
+              </a:lnSpc>
+            </a:pPr>
+            <a:r>
+              <a:rPr sz="2800" b="1">
+                <a:solidFill>
+                  <a:srgbClr val="1B2A4A"/>
+                </a:solidFill>
+                <a:latin typeface="Noto Sans JP"/>
+                <a:ea typeface="Noto Sans JP"/>
+                <a:cs typeface="Noto Sans JP"/>
+              </a:rPr>
+              <a:t>自分に合った使い方を考える</a:t>
+            </a:r>
+          </a:p>
+        </p:txBody>
+      </p:sp>
+      <p:sp>
+        <p:nvSpPr>
+          <p:cNvPr id="21" name="TextBox 20"/>
+          <p:cNvSpPr txBox="1"/>
+          <p:nvPr/>
+        </p:nvSpPr>
+        <p:spPr>
+          <a:xfrm>
+            <a:off x="1417320" y="4453127"/>
+            <a:ext cx="4892040" cy="313055"/>
+          </a:xfrm>
+          <a:prstGeom prst="rect">
+            <a:avLst/>
+          </a:prstGeom>
+          <a:noFill/>
+        </p:spPr>
+        <p:txBody>
+          <a:bodyPr wrap="none" lIns="0" rIns="0" tIns="0" bIns="0" anchor="t">
+            <a:spAutoFit/>
+          </a:bodyPr>
+          <a:lstStyle/>
+          <a:p>
+            <a:pPr algn="l">
+              <a:lnSpc>
+                <a:spcPct val="100000"/>
+              </a:lnSpc>
+            </a:pPr>
+            <a:r>
+              <a:rPr sz="1700" b="0">
+                <a:solidFill>
+                  <a:srgbClr val="475569"/>
+                </a:solidFill>
+                <a:latin typeface="Noto Sans JP"/>
+                <a:ea typeface="Noto Sans JP"/>
+                <a:cs typeface="Noto Sans JP"/>
+              </a:rPr>
+              <a:t>順番は剤形で決め、助言はAIが書く</a:t>
+            </a:r>
+          </a:p>
+        </p:txBody>
+      </p:sp>
+      <p:sp>
+        <p:nvSpPr>
+          <p:cNvPr id="22" name="Rectangle 21"/>
           <p:cNvSpPr/>
           <p:nvPr/>
         </p:nvSpPr>
         <p:spPr>
           <a:xfrm>
-            <a:off x="4398264" y="2788920"/>
-            <a:ext cx="3401568" cy="2514600"/>
-          </a:xfrm>
-          <a:prstGeom prst="roundRect">
-            <a:avLst>
-              <a:gd name="adj" fmla="val 9090"/>
-            </a:avLst>
+            <a:off x="6492240" y="3611879"/>
+            <a:ext cx="45720" cy="1097280"/>
+          </a:xfrm>
+          <a:prstGeom prst="rect">
+            <a:avLst/>
           </a:prstGeom>
           <a:solidFill>
-            <a:srgbClr val="F5F7FA"/>
+            <a:srgbClr val="C9D0DB"/>
           </a:solidFill>
           <a:ln>
             <a:noFill/>
@@ -9532,14 +11028,14 @@
       </p:sp>
       <p:sp>
         <p:nvSpPr>
-          <p:cNvPr id="9" name="TextBox 8"/>
+          <p:cNvPr id="23" name="TextBox 22"/>
           <p:cNvSpPr txBox="1"/>
           <p:nvPr/>
         </p:nvSpPr>
         <p:spPr>
           <a:xfrm>
-            <a:off x="4764024" y="3108960"/>
-            <a:ext cx="2834640" cy="478789"/>
+            <a:off x="6638544" y="3611879"/>
+            <a:ext cx="4739335" cy="386715"/>
           </a:xfrm>
           <a:prstGeom prst="rect">
             <a:avLst/>
@@ -9558,29 +11054,86 @@
               </a:lnSpc>
             </a:pPr>
             <a:r>
-              <a:rPr sz="2600" b="1">
-                <a:solidFill>
-                  <a:srgbClr val="1B2A4A"/>
-                </a:solidFill>
-                <a:latin typeface="Noto Sans JP"/>
-                <a:ea typeface="Noto Sans JP"/>
-                <a:cs typeface="Noto Sans JP"/>
-              </a:rPr>
-              <a:t>塗り重ねる前に</a:t>
-            </a:r>
-          </a:p>
-        </p:txBody>
-      </p:sp>
-      <p:sp>
-        <p:nvSpPr>
-          <p:cNvPr id="10" name="TextBox 9"/>
+              <a:rPr sz="2100" b="1">
+                <a:solidFill>
+                  <a:srgbClr val="0F172A"/>
+                </a:solidFill>
+                <a:latin typeface="Noto Sans JP"/>
+                <a:ea typeface="Noto Sans JP"/>
+                <a:cs typeface="Noto Sans JP"/>
+              </a:rPr>
+              <a:t>「朝は手早く」などの悩みも反映</a:t>
+            </a:r>
+          </a:p>
+        </p:txBody>
+      </p:sp>
+      <p:sp>
+        <p:nvSpPr>
+          <p:cNvPr id="24" name="Rounded Rectangle 23"/>
+          <p:cNvSpPr/>
+          <p:nvPr/>
+        </p:nvSpPr>
+        <p:spPr>
+          <a:xfrm>
+            <a:off x="685800" y="5093207"/>
+            <a:ext cx="457200" cy="457200"/>
+          </a:xfrm>
+          <a:prstGeom prst="roundRect">
+            <a:avLst>
+              <a:gd name="adj" fmla="val 50000"/>
+            </a:avLst>
+          </a:prstGeom>
+          <a:solidFill>
+            <a:srgbClr val="1B2A4A"/>
+          </a:solidFill>
+          <a:ln>
+            <a:noFill/>
+          </a:ln>
+          <a:effectLst/>
+        </p:spPr>
+        <p:style>
+          <a:lnRef idx="1">
+            <a:schemeClr val="accent1"/>
+          </a:lnRef>
+          <a:fillRef idx="3">
+            <a:schemeClr val="accent1"/>
+          </a:fillRef>
+          <a:effectRef idx="2">
+            <a:schemeClr val="accent1"/>
+          </a:effectRef>
+          <a:fontRef idx="minor">
+            <a:schemeClr val="lt1"/>
+          </a:fontRef>
+        </p:style>
+        <p:txBody>
+          <a:bodyPr rtlCol="0" anchor="ctr" lIns="0" rIns="0" tIns="0" bIns="0" wrap="none"/>
+          <a:lstStyle/>
+          <a:p>
+            <a:pPr algn="ctr"/>
+            <a:r>
+              <a:rPr sz="1800" b="1">
+                <a:solidFill>
+                  <a:srgbClr val="FFFFFF"/>
+                </a:solidFill>
+                <a:latin typeface="Noto Sans JP"/>
+                <a:ea typeface="Noto Sans JP"/>
+                <a:cs typeface="Noto Sans JP"/>
+              </a:rPr>
+              <a:t>3</a:t>
+            </a:r>
+          </a:p>
+        </p:txBody>
+      </p:sp>
+      <p:sp>
+        <p:nvSpPr>
+          <p:cNvPr id="25" name="TextBox 24"/>
           <p:cNvSpPr txBox="1"/>
           <p:nvPr/>
         </p:nvSpPr>
         <p:spPr>
           <a:xfrm>
-            <a:off x="4764024" y="3794760"/>
-            <a:ext cx="2834640" cy="662940"/>
+            <a:off x="1417320" y="5111496"/>
+            <a:ext cx="2743200" cy="313055"/>
           </a:xfrm>
           <a:prstGeom prst="rect">
             <a:avLst/>
@@ -9599,7 +11152,7 @@
               </a:lnSpc>
             </a:pPr>
             <a:r>
-              <a:rPr sz="1800" b="0">
+              <a:rPr sz="1700" b="1">
                 <a:solidFill>
                   <a:srgbClr val="475569"/>
                 </a:solidFill>
@@ -9607,9 +11160,32 @@
                 <a:ea typeface="Noto Sans JP"/>
                 <a:cs typeface="Noto Sans JP"/>
               </a:rPr>
-              <a:t>一緒に使っていい？</a:t>
-            </a:r>
-          </a:p>
+              <a:t>毎日</a:t>
+            </a:r>
+          </a:p>
+        </p:txBody>
+      </p:sp>
+      <p:sp>
+        <p:nvSpPr>
+          <p:cNvPr id="26" name="TextBox 25"/>
+          <p:cNvSpPr txBox="1"/>
+          <p:nvPr/>
+        </p:nvSpPr>
+        <p:spPr>
+          <a:xfrm>
+            <a:off x="1417320" y="5486400"/>
+            <a:ext cx="4892040" cy="515620"/>
+          </a:xfrm>
+          <a:prstGeom prst="rect">
+            <a:avLst/>
+          </a:prstGeom>
+          <a:noFill/>
+        </p:spPr>
+        <p:txBody>
+          <a:bodyPr wrap="none" lIns="0" rIns="0" tIns="0" bIns="0" anchor="t">
+            <a:spAutoFit/>
+          </a:bodyPr>
+          <a:lstStyle/>
           <a:p>
             <a:pPr algn="l">
               <a:lnSpc>
@@ -9617,29 +11193,29 @@
               </a:lnSpc>
             </a:pPr>
             <a:r>
-              <a:rPr sz="1800" b="0">
-                <a:solidFill>
-                  <a:srgbClr val="475569"/>
-                </a:solidFill>
-                <a:latin typeface="Noto Sans JP"/>
-                <a:ea typeface="Noto Sans JP"/>
-                <a:cs typeface="Noto Sans JP"/>
-              </a:rPr>
-              <a:t>どれを先に塗る？</a:t>
-            </a:r>
-          </a:p>
-        </p:txBody>
-      </p:sp>
-      <p:sp>
-        <p:nvSpPr>
-          <p:cNvPr id="11" name="TextBox 10"/>
+              <a:rPr sz="2800" b="1">
+                <a:solidFill>
+                  <a:srgbClr val="1B2A4A"/>
+                </a:solidFill>
+                <a:latin typeface="Noto Sans JP"/>
+                <a:ea typeface="Noto Sans JP"/>
+                <a:cs typeface="Noto Sans JP"/>
+              </a:rPr>
+              <a:t>順番と使い方が表示される</a:t>
+            </a:r>
+          </a:p>
+        </p:txBody>
+      </p:sp>
+      <p:sp>
+        <p:nvSpPr>
+          <p:cNvPr id="27" name="TextBox 26"/>
           <p:cNvSpPr txBox="1"/>
           <p:nvPr/>
         </p:nvSpPr>
         <p:spPr>
           <a:xfrm>
-            <a:off x="4764024" y="4754880"/>
-            <a:ext cx="2834640" cy="257810"/>
+            <a:off x="1417320" y="6007608"/>
+            <a:ext cx="4892040" cy="313055"/>
           </a:xfrm>
           <a:prstGeom prst="rect">
             <a:avLst/>
@@ -9658,37 +11234,35 @@
               </a:lnSpc>
             </a:pPr>
             <a:r>
-              <a:rPr sz="1400" b="1">
-                <a:solidFill>
-                  <a:srgbClr val="2563EB"/>
-                </a:solidFill>
-                <a:latin typeface="Noto Sans JP"/>
-                <a:ea typeface="Noto Sans JP"/>
-                <a:cs typeface="Noto Sans JP"/>
-              </a:rPr>
-              <a:t>組み合わせ・塗る順番</a:t>
-            </a:r>
-          </a:p>
-        </p:txBody>
-      </p:sp>
-      <p:sp>
-        <p:nvSpPr>
-          <p:cNvPr id="12" name="Rounded Rectangle 11"/>
+              <a:rPr sz="1700" b="0">
+                <a:solidFill>
+                  <a:srgbClr val="475569"/>
+                </a:solidFill>
+                <a:latin typeface="Noto Sans JP"/>
+                <a:ea typeface="Noto Sans JP"/>
+                <a:cs typeface="Noto Sans JP"/>
+              </a:rPr>
+              <a:t>その日に使うものが、使う順に並ぶ</a:t>
+            </a:r>
+          </a:p>
+        </p:txBody>
+      </p:sp>
+      <p:sp>
+        <p:nvSpPr>
+          <p:cNvPr id="28" name="Rectangle 27"/>
           <p:cNvSpPr/>
           <p:nvPr/>
         </p:nvSpPr>
         <p:spPr>
           <a:xfrm>
-            <a:off x="7973568" y="2788920"/>
-            <a:ext cx="3401568" cy="2514600"/>
-          </a:xfrm>
-          <a:prstGeom prst="roundRect">
-            <a:avLst>
-              <a:gd name="adj" fmla="val 9090"/>
-            </a:avLst>
+            <a:off x="6492240" y="5166359"/>
+            <a:ext cx="45720" cy="1097280"/>
+          </a:xfrm>
+          <a:prstGeom prst="rect">
+            <a:avLst/>
           </a:prstGeom>
           <a:solidFill>
-            <a:srgbClr val="F5F7FA"/>
+            <a:srgbClr val="C9D0DB"/>
           </a:solidFill>
           <a:ln>
             <a:noFill/>
@@ -9719,14 +11293,14 @@
       </p:sp>
       <p:sp>
         <p:nvSpPr>
-          <p:cNvPr id="13" name="TextBox 12"/>
+          <p:cNvPr id="29" name="TextBox 28"/>
           <p:cNvSpPr txBox="1"/>
           <p:nvPr/>
         </p:nvSpPr>
         <p:spPr>
           <a:xfrm>
-            <a:off x="8339328" y="3108960"/>
-            <a:ext cx="2834640" cy="478789"/>
+            <a:off x="6766559" y="5166359"/>
+            <a:ext cx="4739335" cy="386715"/>
           </a:xfrm>
           <a:prstGeom prst="rect">
             <a:avLst/>
@@ -9745,29 +11319,29 @@
               </a:lnSpc>
             </a:pPr>
             <a:r>
-              <a:rPr sz="2600" b="1">
-                <a:solidFill>
-                  <a:srgbClr val="1B2A4A"/>
-                </a:solidFill>
-                <a:latin typeface="Noto Sans JP"/>
-                <a:ea typeface="Noto Sans JP"/>
-                <a:cs typeface="Noto Sans JP"/>
-              </a:rPr>
-              <a:t>一緒に飲む前に</a:t>
-            </a:r>
-          </a:p>
-        </p:txBody>
-      </p:sp>
-      <p:sp>
-        <p:nvSpPr>
-          <p:cNvPr id="14" name="TextBox 13"/>
+              <a:rPr sz="2100" b="1">
+                <a:solidFill>
+                  <a:srgbClr val="0F172A"/>
+                </a:solidFill>
+                <a:latin typeface="Noto Sans JP"/>
+                <a:ea typeface="Noto Sans JP"/>
+                <a:cs typeface="Noto Sans JP"/>
+              </a:rPr>
+              <a:t>薬を使ったかをチェックリストで記録</a:t>
+            </a:r>
+          </a:p>
+        </p:txBody>
+      </p:sp>
+      <p:sp>
+        <p:nvSpPr>
+          <p:cNvPr id="30" name="TextBox 29"/>
           <p:cNvSpPr txBox="1"/>
           <p:nvPr/>
         </p:nvSpPr>
         <p:spPr>
           <a:xfrm>
-            <a:off x="8339328" y="3794760"/>
-            <a:ext cx="2834640" cy="662940"/>
+            <a:off x="6766559" y="5641848"/>
+            <a:ext cx="4739335" cy="386715"/>
           </a:xfrm>
           <a:prstGeom prst="rect">
             <a:avLst/>
@@ -9786,115 +11360,15 @@
               </a:lnSpc>
             </a:pPr>
             <a:r>
-              <a:rPr sz="1800" b="0">
-                <a:solidFill>
-                  <a:srgbClr val="475569"/>
-                </a:solidFill>
-                <a:latin typeface="Noto Sans JP"/>
-                <a:ea typeface="Noto Sans JP"/>
-                <a:cs typeface="Noto Sans JP"/>
-              </a:rPr>
-              <a:t>今飲んでいる薬と</a:t>
-            </a:r>
-          </a:p>
-          <a:p>
-            <a:pPr algn="l">
-              <a:lnSpc>
-                <a:spcPct val="100000"/>
-              </a:lnSpc>
-            </a:pPr>
-            <a:r>
-              <a:rPr sz="1800" b="0">
-                <a:solidFill>
-                  <a:srgbClr val="475569"/>
-                </a:solidFill>
-                <a:latin typeface="Noto Sans JP"/>
-                <a:ea typeface="Noto Sans JP"/>
-                <a:cs typeface="Noto Sans JP"/>
-              </a:rPr>
-              <a:t>一緒で大丈夫？</a:t>
-            </a:r>
-          </a:p>
-        </p:txBody>
-      </p:sp>
-      <p:sp>
-        <p:nvSpPr>
-          <p:cNvPr id="15" name="TextBox 14"/>
-          <p:cNvSpPr txBox="1"/>
-          <p:nvPr/>
-        </p:nvSpPr>
-        <p:spPr>
-          <a:xfrm>
-            <a:off x="8339328" y="4754880"/>
-            <a:ext cx="2834640" cy="257810"/>
-          </a:xfrm>
-          <a:prstGeom prst="rect">
-            <a:avLst/>
-          </a:prstGeom>
-          <a:noFill/>
-        </p:spPr>
-        <p:txBody>
-          <a:bodyPr wrap="none" lIns="0" rIns="0" tIns="0" bIns="0" anchor="t">
-            <a:spAutoFit/>
-          </a:bodyPr>
-          <a:lstStyle/>
-          <a:p>
-            <a:pPr algn="l">
-              <a:lnSpc>
-                <a:spcPct val="100000"/>
-              </a:lnSpc>
-            </a:pPr>
-            <a:r>
-              <a:rPr sz="1400" b="1">
-                <a:solidFill>
-                  <a:srgbClr val="2563EB"/>
-                </a:solidFill>
-                <a:latin typeface="Noto Sans JP"/>
-                <a:ea typeface="Noto Sans JP"/>
-                <a:cs typeface="Noto Sans JP"/>
-              </a:rPr>
-              <a:t>飲み合わせ</a:t>
-            </a:r>
-          </a:p>
-        </p:txBody>
-      </p:sp>
-      <p:sp>
-        <p:nvSpPr>
-          <p:cNvPr id="16" name="TextBox 15"/>
-          <p:cNvSpPr txBox="1"/>
-          <p:nvPr/>
-        </p:nvSpPr>
-        <p:spPr>
-          <a:xfrm>
-            <a:off x="0" y="5715000"/>
-            <a:ext cx="12191695" cy="368300"/>
-          </a:xfrm>
-          <a:prstGeom prst="rect">
-            <a:avLst/>
-          </a:prstGeom>
-          <a:noFill/>
-        </p:spPr>
-        <p:txBody>
-          <a:bodyPr wrap="none" lIns="0" rIns="0" tIns="0" bIns="0" anchor="t">
-            <a:spAutoFit/>
-          </a:bodyPr>
-          <a:lstStyle/>
-          <a:p>
-            <a:pPr algn="ctr">
-              <a:lnSpc>
-                <a:spcPct val="100000"/>
-              </a:lnSpc>
-            </a:pPr>
-            <a:r>
-              <a:rPr sz="2000" b="1">
-                <a:solidFill>
-                  <a:srgbClr val="475569"/>
-                </a:solidFill>
-                <a:latin typeface="Noto Sans JP"/>
-                <a:ea typeface="Noto Sans JP"/>
-                <a:cs typeface="Noto Sans JP"/>
-              </a:rPr>
-              <a:t>肌の治療を続ける人も、家族の薬を買う人も、店頭で迷わない毎日へ。</a:t>
+              <a:rPr sz="2100" b="1">
+                <a:solidFill>
+                  <a:srgbClr val="0F172A"/>
+                </a:solidFill>
+                <a:latin typeface="Noto Sans JP"/>
+                <a:ea typeface="Noto Sans JP"/>
+                <a:cs typeface="Noto Sans JP"/>
+              </a:rPr>
+              <a:t>手順ごとに、細かい使い方の説明</a:t>
             </a:r>
           </a:p>
         </p:txBody>

--- a/docs/ピッチ/Overlai_本選ピッチ.pptx
+++ b/docs/ピッチ/Overlai_本選ピッチ.pptx
@@ -8880,7 +8880,7 @@
         </p:nvSpPr>
         <p:spPr>
           <a:xfrm>
-            <a:off x="685800" y="548640"/>
+            <a:off x="685800" y="502920"/>
             <a:ext cx="7315200" cy="368300"/>
           </a:xfrm>
           <a:prstGeom prst="rect">
@@ -8921,7 +8921,7 @@
         </p:nvSpPr>
         <p:spPr>
           <a:xfrm>
-            <a:off x="685800" y="960120"/>
+            <a:off x="685800" y="886968"/>
             <a:ext cx="10058400" cy="552450"/>
           </a:xfrm>
           <a:prstGeom prst="rect">
@@ -8962,8 +8962,8 @@
         </p:nvSpPr>
         <p:spPr>
           <a:xfrm>
-            <a:off x="902970" y="2212848"/>
-            <a:ext cx="22860" cy="3108960"/>
+            <a:off x="902970" y="2029967"/>
+            <a:ext cx="22860" cy="3108959"/>
           </a:xfrm>
           <a:prstGeom prst="rect">
             <a:avLst/>
@@ -9006,7 +9006,7 @@
         </p:nvSpPr>
         <p:spPr>
           <a:xfrm>
-            <a:off x="685800" y="1984248"/>
+            <a:off x="685800" y="1801368"/>
             <a:ext cx="457200" cy="457200"/>
           </a:xfrm>
           <a:prstGeom prst="roundRect">
@@ -9063,7 +9063,7 @@
         </p:nvSpPr>
         <p:spPr>
           <a:xfrm>
-            <a:off x="1417320" y="2002536"/>
+            <a:off x="1417320" y="1819656"/>
             <a:ext cx="2743200" cy="313055"/>
           </a:xfrm>
           <a:prstGeom prst="rect">
@@ -9104,8 +9104,8 @@
         </p:nvSpPr>
         <p:spPr>
           <a:xfrm>
-            <a:off x="1417320" y="2377440"/>
-            <a:ext cx="4892040" cy="515620"/>
+            <a:off x="1417320" y="2194560"/>
+            <a:ext cx="5074920" cy="515620"/>
           </a:xfrm>
           <a:prstGeom prst="rect">
             <a:avLst/>
@@ -9145,8 +9145,8 @@
         </p:nvSpPr>
         <p:spPr>
           <a:xfrm>
-            <a:off x="1417320" y="2898648"/>
-            <a:ext cx="4892040" cy="313055"/>
+            <a:off x="1417320" y="2715768"/>
+            <a:ext cx="5074920" cy="313055"/>
           </a:xfrm>
           <a:prstGeom prst="rect">
             <a:avLst/>
@@ -9186,8 +9186,8 @@
         </p:nvSpPr>
         <p:spPr>
           <a:xfrm>
-            <a:off x="6492240" y="2057400"/>
-            <a:ext cx="45720" cy="1097280"/>
+            <a:off x="6675120" y="1874519"/>
+            <a:ext cx="45720" cy="1147571"/>
           </a:xfrm>
           <a:prstGeom prst="rect">
             <a:avLst/>
@@ -9230,8 +9230,8 @@
         </p:nvSpPr>
         <p:spPr>
           <a:xfrm>
-            <a:off x="6766559" y="2020824"/>
-            <a:ext cx="4739335" cy="405130"/>
+            <a:off x="6949440" y="1837943"/>
+            <a:ext cx="4556455" cy="405130"/>
           </a:xfrm>
           <a:prstGeom prst="rect">
             <a:avLst/>
@@ -9271,8 +9271,8 @@
         </p:nvSpPr>
         <p:spPr>
           <a:xfrm>
-            <a:off x="6766559" y="2496312"/>
-            <a:ext cx="4739335" cy="662940"/>
+            <a:off x="6949440" y="2267712"/>
+            <a:ext cx="4556455" cy="662940"/>
           </a:xfrm>
           <a:prstGeom prst="rect">
             <a:avLst/>
@@ -9330,7 +9330,7 @@
         </p:nvSpPr>
         <p:spPr>
           <a:xfrm>
-            <a:off x="685800" y="3538727"/>
+            <a:off x="685800" y="3355848"/>
             <a:ext cx="457200" cy="457200"/>
           </a:xfrm>
           <a:prstGeom prst="roundRect">
@@ -9387,7 +9387,7 @@
         </p:nvSpPr>
         <p:spPr>
           <a:xfrm>
-            <a:off x="1417320" y="3557015"/>
+            <a:off x="1417320" y="3374136"/>
             <a:ext cx="2743200" cy="313055"/>
           </a:xfrm>
           <a:prstGeom prst="rect">
@@ -9428,8 +9428,8 @@
         </p:nvSpPr>
         <p:spPr>
           <a:xfrm>
-            <a:off x="1417320" y="3931920"/>
-            <a:ext cx="4892040" cy="515620"/>
+            <a:off x="1417320" y="3749039"/>
+            <a:ext cx="5074920" cy="515620"/>
           </a:xfrm>
           <a:prstGeom prst="rect">
             <a:avLst/>
@@ -9469,8 +9469,8 @@
         </p:nvSpPr>
         <p:spPr>
           <a:xfrm>
-            <a:off x="1417320" y="4453127"/>
-            <a:ext cx="4892040" cy="313055"/>
+            <a:off x="1417320" y="4270248"/>
+            <a:ext cx="5074920" cy="313055"/>
           </a:xfrm>
           <a:prstGeom prst="rect">
             <a:avLst/>
@@ -9510,8 +9510,8 @@
         </p:nvSpPr>
         <p:spPr>
           <a:xfrm>
-            <a:off x="6492240" y="3611879"/>
-            <a:ext cx="45720" cy="1097280"/>
+            <a:off x="6675120" y="3429000"/>
+            <a:ext cx="45720" cy="1147571"/>
           </a:xfrm>
           <a:prstGeom prst="rect">
             <a:avLst/>
@@ -9554,8 +9554,8 @@
         </p:nvSpPr>
         <p:spPr>
           <a:xfrm>
-            <a:off x="6766559" y="3575303"/>
-            <a:ext cx="4739335" cy="405130"/>
+            <a:off x="6949440" y="3392424"/>
+            <a:ext cx="4556455" cy="405130"/>
           </a:xfrm>
           <a:prstGeom prst="rect">
             <a:avLst/>
@@ -9595,8 +9595,8 @@
         </p:nvSpPr>
         <p:spPr>
           <a:xfrm>
-            <a:off x="6766559" y="4050791"/>
-            <a:ext cx="4739335" cy="662940"/>
+            <a:off x="6949440" y="3822191"/>
+            <a:ext cx="4556455" cy="662940"/>
           </a:xfrm>
           <a:prstGeom prst="rect">
             <a:avLst/>
@@ -9654,7 +9654,7 @@
         </p:nvSpPr>
         <p:spPr>
           <a:xfrm>
-            <a:off x="685800" y="5093207"/>
+            <a:off x="685800" y="4910327"/>
             <a:ext cx="457200" cy="457200"/>
           </a:xfrm>
           <a:prstGeom prst="roundRect">
@@ -9711,7 +9711,7 @@
         </p:nvSpPr>
         <p:spPr>
           <a:xfrm>
-            <a:off x="1417320" y="5111496"/>
+            <a:off x="1417320" y="4928616"/>
             <a:ext cx="2743200" cy="313055"/>
           </a:xfrm>
           <a:prstGeom prst="rect">
@@ -9752,8 +9752,8 @@
         </p:nvSpPr>
         <p:spPr>
           <a:xfrm>
-            <a:off x="1417320" y="5486400"/>
-            <a:ext cx="4892040" cy="515620"/>
+            <a:off x="1417320" y="5303520"/>
+            <a:ext cx="5074920" cy="515620"/>
           </a:xfrm>
           <a:prstGeom prst="rect">
             <a:avLst/>
@@ -9793,8 +9793,8 @@
         </p:nvSpPr>
         <p:spPr>
           <a:xfrm>
-            <a:off x="1417320" y="6007608"/>
-            <a:ext cx="4892040" cy="313055"/>
+            <a:off x="1417320" y="5824727"/>
+            <a:ext cx="5074920" cy="313055"/>
           </a:xfrm>
           <a:prstGeom prst="rect">
             <a:avLst/>
@@ -9834,8 +9834,8 @@
         </p:nvSpPr>
         <p:spPr>
           <a:xfrm>
-            <a:off x="6492240" y="5166359"/>
-            <a:ext cx="45720" cy="1097280"/>
+            <a:off x="6675120" y="4983479"/>
+            <a:ext cx="45720" cy="1147572"/>
           </a:xfrm>
           <a:prstGeom prst="rect">
             <a:avLst/>
@@ -9878,8 +9878,8 @@
         </p:nvSpPr>
         <p:spPr>
           <a:xfrm>
-            <a:off x="6766559" y="5129783"/>
-            <a:ext cx="4739335" cy="405130"/>
+            <a:off x="6949440" y="4946903"/>
+            <a:ext cx="4556455" cy="405130"/>
           </a:xfrm>
           <a:prstGeom prst="rect">
             <a:avLst/>
@@ -9919,8 +9919,8 @@
         </p:nvSpPr>
         <p:spPr>
           <a:xfrm>
-            <a:off x="6766559" y="5605272"/>
-            <a:ext cx="4739335" cy="662940"/>
+            <a:off x="6949440" y="5376672"/>
+            <a:ext cx="4556455" cy="662940"/>
           </a:xfrm>
           <a:prstGeom prst="rect">
             <a:avLst/>
@@ -10004,7 +10004,7 @@
         </p:nvSpPr>
         <p:spPr>
           <a:xfrm>
-            <a:off x="685800" y="548640"/>
+            <a:off x="685800" y="502920"/>
             <a:ext cx="7315200" cy="368300"/>
           </a:xfrm>
           <a:prstGeom prst="rect">
@@ -10045,7 +10045,7 @@
         </p:nvSpPr>
         <p:spPr>
           <a:xfrm>
-            <a:off x="685800" y="960120"/>
+            <a:off x="685800" y="886968"/>
             <a:ext cx="10058400" cy="552450"/>
           </a:xfrm>
           <a:prstGeom prst="rect">
@@ -10086,8 +10086,8 @@
         </p:nvSpPr>
         <p:spPr>
           <a:xfrm>
-            <a:off x="902970" y="2212848"/>
-            <a:ext cx="22860" cy="3108960"/>
+            <a:off x="902970" y="2029967"/>
+            <a:ext cx="22860" cy="2852928"/>
           </a:xfrm>
           <a:prstGeom prst="rect">
             <a:avLst/>
@@ -10130,7 +10130,7 @@
         </p:nvSpPr>
         <p:spPr>
           <a:xfrm>
-            <a:off x="685800" y="1984248"/>
+            <a:off x="685800" y="1801368"/>
             <a:ext cx="457200" cy="457200"/>
           </a:xfrm>
           <a:prstGeom prst="roundRect">
@@ -10187,7 +10187,7 @@
         </p:nvSpPr>
         <p:spPr>
           <a:xfrm>
-            <a:off x="1417320" y="2002536"/>
+            <a:off x="1417320" y="1819656"/>
             <a:ext cx="2743200" cy="313055"/>
           </a:xfrm>
           <a:prstGeom prst="rect">
@@ -10228,8 +10228,8 @@
         </p:nvSpPr>
         <p:spPr>
           <a:xfrm>
-            <a:off x="1417320" y="2377440"/>
-            <a:ext cx="4892040" cy="515620"/>
+            <a:off x="1417320" y="2194560"/>
+            <a:ext cx="5074920" cy="515620"/>
           </a:xfrm>
           <a:prstGeom prst="rect">
             <a:avLst/>
@@ -10269,8 +10269,8 @@
         </p:nvSpPr>
         <p:spPr>
           <a:xfrm>
-            <a:off x="1417320" y="2898648"/>
-            <a:ext cx="4892040" cy="313055"/>
+            <a:off x="1417320" y="2715768"/>
+            <a:ext cx="5074920" cy="313055"/>
           </a:xfrm>
           <a:prstGeom prst="rect">
             <a:avLst/>
@@ -10310,7 +10310,7 @@
         </p:nvSpPr>
         <p:spPr>
           <a:xfrm>
-            <a:off x="6492240" y="2057400"/>
+            <a:off x="6675120" y="1874519"/>
             <a:ext cx="45720" cy="1097280"/>
           </a:xfrm>
           <a:prstGeom prst="rect">
@@ -10354,7 +10354,7 @@
         </p:nvSpPr>
         <p:spPr>
           <a:xfrm>
-            <a:off x="6766559" y="2057400"/>
+            <a:off x="6949440" y="1874519"/>
             <a:ext cx="1013460" cy="384048"/>
           </a:xfrm>
           <a:prstGeom prst="roundRect">
@@ -10411,7 +10411,7 @@
         </p:nvSpPr>
         <p:spPr>
           <a:xfrm>
-            <a:off x="7908036" y="2057400"/>
+            <a:off x="8090915" y="1874519"/>
             <a:ext cx="1013460" cy="384048"/>
           </a:xfrm>
           <a:prstGeom prst="roundRect">
@@ -10468,7 +10468,7 @@
         </p:nvSpPr>
         <p:spPr>
           <a:xfrm>
-            <a:off x="9049512" y="2057400"/>
+            <a:off x="9232392" y="1874519"/>
             <a:ext cx="1013460" cy="384048"/>
           </a:xfrm>
           <a:prstGeom prst="roundRect">
@@ -10525,7 +10525,7 @@
         </p:nvSpPr>
         <p:spPr>
           <a:xfrm>
-            <a:off x="6766559" y="2532888"/>
+            <a:off x="6949440" y="2350008"/>
             <a:ext cx="797560" cy="384048"/>
           </a:xfrm>
           <a:prstGeom prst="roundRect">
@@ -10582,7 +10582,7 @@
         </p:nvSpPr>
         <p:spPr>
           <a:xfrm>
-            <a:off x="7692136" y="2532888"/>
+            <a:off x="7875016" y="2350008"/>
             <a:ext cx="797560" cy="384048"/>
           </a:xfrm>
           <a:prstGeom prst="roundRect">
@@ -10639,7 +10639,7 @@
         </p:nvSpPr>
         <p:spPr>
           <a:xfrm>
-            <a:off x="8617712" y="2532888"/>
+            <a:off x="8800592" y="2350008"/>
             <a:ext cx="797560" cy="384048"/>
           </a:xfrm>
           <a:prstGeom prst="roundRect">
@@ -10696,7 +10696,7 @@
         </p:nvSpPr>
         <p:spPr>
           <a:xfrm>
-            <a:off x="9543288" y="2532888"/>
+            <a:off x="9726168" y="2350008"/>
             <a:ext cx="797560" cy="384048"/>
           </a:xfrm>
           <a:prstGeom prst="roundRect">
@@ -10753,7 +10753,7 @@
         </p:nvSpPr>
         <p:spPr>
           <a:xfrm>
-            <a:off x="10468864" y="2532888"/>
+            <a:off x="10651744" y="2350008"/>
             <a:ext cx="797560" cy="384048"/>
           </a:xfrm>
           <a:prstGeom prst="roundRect">
@@ -10810,7 +10810,7 @@
         </p:nvSpPr>
         <p:spPr>
           <a:xfrm>
-            <a:off x="685800" y="3538727"/>
+            <a:off x="685800" y="3227832"/>
             <a:ext cx="457200" cy="457200"/>
           </a:xfrm>
           <a:prstGeom prst="roundRect">
@@ -10867,7 +10867,7 @@
         </p:nvSpPr>
         <p:spPr>
           <a:xfrm>
-            <a:off x="1417320" y="3557015"/>
+            <a:off x="1417320" y="3246120"/>
             <a:ext cx="2743200" cy="313055"/>
           </a:xfrm>
           <a:prstGeom prst="rect">
@@ -10908,8 +10908,8 @@
         </p:nvSpPr>
         <p:spPr>
           <a:xfrm>
-            <a:off x="1417320" y="3931920"/>
-            <a:ext cx="4892040" cy="515620"/>
+            <a:off x="1417320" y="3621024"/>
+            <a:ext cx="5074920" cy="515620"/>
           </a:xfrm>
           <a:prstGeom prst="rect">
             <a:avLst/>
@@ -10936,7 +10936,7 @@
                 <a:ea typeface="Noto Sans JP"/>
                 <a:cs typeface="Noto Sans JP"/>
               </a:rPr>
-              <a:t>自分に合った使い方を考える</a:t>
+              <a:t>その人に合った使い方を考える</a:t>
             </a:r>
           </a:p>
         </p:txBody>
@@ -10949,8 +10949,8 @@
         </p:nvSpPr>
         <p:spPr>
           <a:xfrm>
-            <a:off x="1417320" y="4453127"/>
-            <a:ext cx="4892040" cy="313055"/>
+            <a:off x="1417320" y="4142231"/>
+            <a:ext cx="5074920" cy="313055"/>
           </a:xfrm>
           <a:prstGeom prst="rect">
             <a:avLst/>
@@ -10990,8 +10990,8 @@
         </p:nvSpPr>
         <p:spPr>
           <a:xfrm>
-            <a:off x="6492240" y="3611879"/>
-            <a:ext cx="45720" cy="1097280"/>
+            <a:off x="6675120" y="3300984"/>
+            <a:ext cx="45720" cy="1147572"/>
           </a:xfrm>
           <a:prstGeom prst="rect">
             <a:avLst/>
@@ -11034,8 +11034,8 @@
         </p:nvSpPr>
         <p:spPr>
           <a:xfrm>
-            <a:off x="6638544" y="3611879"/>
-            <a:ext cx="4739335" cy="386715"/>
+            <a:off x="6949440" y="3264408"/>
+            <a:ext cx="4556455" cy="405130"/>
           </a:xfrm>
           <a:prstGeom prst="rect">
             <a:avLst/>
@@ -11054,7 +11054,7 @@
               </a:lnSpc>
             </a:pPr>
             <a:r>
-              <a:rPr sz="2100" b="1">
+              <a:rPr sz="2200" b="1">
                 <a:solidFill>
                   <a:srgbClr val="0F172A"/>
                 </a:solidFill>
@@ -11062,20 +11062,79 @@
                 <a:ea typeface="Noto Sans JP"/>
                 <a:cs typeface="Noto Sans JP"/>
               </a:rPr>
-              <a:t>「朝は手早く」などの悩みも反映</a:t>
-            </a:r>
-          </a:p>
-        </p:txBody>
-      </p:sp>
-      <p:sp>
-        <p:nvSpPr>
-          <p:cNvPr id="24" name="Rounded Rectangle 23"/>
+              <a:t>悩みまで入れて、パーソナライズ</a:t>
+            </a:r>
+          </a:p>
+        </p:txBody>
+      </p:sp>
+      <p:sp>
+        <p:nvSpPr>
+          <p:cNvPr id="24" name="TextBox 23"/>
+          <p:cNvSpPr txBox="1"/>
+          <p:nvPr/>
+        </p:nvSpPr>
+        <p:spPr>
+          <a:xfrm>
+            <a:off x="6949440" y="3694176"/>
+            <a:ext cx="4556455" cy="662940"/>
+          </a:xfrm>
+          <a:prstGeom prst="rect">
+            <a:avLst/>
+          </a:prstGeom>
+          <a:noFill/>
+        </p:spPr>
+        <p:txBody>
+          <a:bodyPr wrap="none" lIns="0" rIns="0" tIns="0" bIns="0" anchor="t">
+            <a:spAutoFit/>
+          </a:bodyPr>
+          <a:lstStyle/>
+          <a:p>
+            <a:pPr algn="l">
+              <a:lnSpc>
+                <a:spcPct val="100000"/>
+              </a:lnSpc>
+            </a:pPr>
+            <a:r>
+              <a:rPr sz="1800" b="0">
+                <a:solidFill>
+                  <a:srgbClr val="475569"/>
+                </a:solidFill>
+                <a:latin typeface="Noto Sans JP"/>
+                <a:ea typeface="Noto Sans JP"/>
+                <a:cs typeface="Noto Sans JP"/>
+              </a:rPr>
+              <a:t>体質・年代・性別のほかに、</a:t>
+            </a:r>
+          </a:p>
+          <a:p>
+            <a:pPr algn="l">
+              <a:lnSpc>
+                <a:spcPct val="100000"/>
+              </a:lnSpc>
+            </a:pPr>
+            <a:r>
+              <a:rPr sz="1800" b="0">
+                <a:solidFill>
+                  <a:srgbClr val="475569"/>
+                </a:solidFill>
+                <a:latin typeface="Noto Sans JP"/>
+                <a:ea typeface="Noto Sans JP"/>
+                <a:cs typeface="Noto Sans JP"/>
+              </a:rPr>
+              <a:t>朝は手早く済ませたい、といった悩みも</a:t>
+            </a:r>
+          </a:p>
+        </p:txBody>
+      </p:sp>
+      <p:sp>
+        <p:nvSpPr>
+          <p:cNvPr id="25" name="Rounded Rectangle 24"/>
           <p:cNvSpPr/>
           <p:nvPr/>
         </p:nvSpPr>
         <p:spPr>
           <a:xfrm>
-            <a:off x="685800" y="5093207"/>
+            <a:off x="685800" y="4654296"/>
             <a:ext cx="457200" cy="457200"/>
           </a:xfrm>
           <a:prstGeom prst="roundRect">
@@ -11126,13 +11185,13 @@
       </p:sp>
       <p:sp>
         <p:nvSpPr>
-          <p:cNvPr id="25" name="TextBox 24"/>
+          <p:cNvPr id="26" name="TextBox 25"/>
           <p:cNvSpPr txBox="1"/>
           <p:nvPr/>
         </p:nvSpPr>
         <p:spPr>
           <a:xfrm>
-            <a:off x="1417320" y="5111496"/>
+            <a:off x="1417320" y="4672584"/>
             <a:ext cx="2743200" cy="313055"/>
           </a:xfrm>
           <a:prstGeom prst="rect">
@@ -11167,14 +11226,14 @@
       </p:sp>
       <p:sp>
         <p:nvSpPr>
-          <p:cNvPr id="26" name="TextBox 25"/>
+          <p:cNvPr id="27" name="TextBox 26"/>
           <p:cNvSpPr txBox="1"/>
           <p:nvPr/>
         </p:nvSpPr>
         <p:spPr>
           <a:xfrm>
-            <a:off x="1417320" y="5486400"/>
-            <a:ext cx="4892040" cy="515620"/>
+            <a:off x="1417320" y="5047488"/>
+            <a:ext cx="5074920" cy="515620"/>
           </a:xfrm>
           <a:prstGeom prst="rect">
             <a:avLst/>
@@ -11208,14 +11267,14 @@
       </p:sp>
       <p:sp>
         <p:nvSpPr>
-          <p:cNvPr id="27" name="TextBox 26"/>
+          <p:cNvPr id="28" name="TextBox 27"/>
           <p:cNvSpPr txBox="1"/>
           <p:nvPr/>
         </p:nvSpPr>
         <p:spPr>
           <a:xfrm>
-            <a:off x="1417320" y="6007608"/>
-            <a:ext cx="4892040" cy="313055"/>
+            <a:off x="1417320" y="5568696"/>
+            <a:ext cx="5074920" cy="313055"/>
           </a:xfrm>
           <a:prstGeom prst="rect">
             <a:avLst/>
@@ -11249,14 +11308,14 @@
       </p:sp>
       <p:sp>
         <p:nvSpPr>
-          <p:cNvPr id="28" name="Rectangle 27"/>
+          <p:cNvPr id="29" name="Rectangle 28"/>
           <p:cNvSpPr/>
           <p:nvPr/>
         </p:nvSpPr>
         <p:spPr>
           <a:xfrm>
-            <a:off x="6492240" y="5166359"/>
-            <a:ext cx="45720" cy="1097280"/>
+            <a:off x="6675120" y="4727448"/>
+            <a:ext cx="45720" cy="1778508"/>
           </a:xfrm>
           <a:prstGeom prst="rect">
             <a:avLst/>
@@ -11293,14 +11352,14 @@
       </p:sp>
       <p:sp>
         <p:nvSpPr>
-          <p:cNvPr id="29" name="TextBox 28"/>
+          <p:cNvPr id="30" name="TextBox 29"/>
           <p:cNvSpPr txBox="1"/>
           <p:nvPr/>
         </p:nvSpPr>
         <p:spPr>
           <a:xfrm>
-            <a:off x="6766559" y="5166359"/>
-            <a:ext cx="4739335" cy="386715"/>
+            <a:off x="6949440" y="4690872"/>
+            <a:ext cx="4556455" cy="405130"/>
           </a:xfrm>
           <a:prstGeom prst="rect">
             <a:avLst/>
@@ -11319,7 +11378,7 @@
               </a:lnSpc>
             </a:pPr>
             <a:r>
-              <a:rPr sz="2100" b="1">
+              <a:rPr sz="2200" b="1">
                 <a:solidFill>
                   <a:srgbClr val="0F172A"/>
                 </a:solidFill>
@@ -11327,21 +11386,21 @@
                 <a:ea typeface="Noto Sans JP"/>
                 <a:cs typeface="Noto Sans JP"/>
               </a:rPr>
-              <a:t>薬を使ったかをチェックリストで記録</a:t>
-            </a:r>
-          </a:p>
-        </p:txBody>
-      </p:sp>
-      <p:sp>
-        <p:nvSpPr>
-          <p:cNvPr id="30" name="TextBox 29"/>
+              <a:t>薬を使ったかをチェックで記録</a:t>
+            </a:r>
+          </a:p>
+        </p:txBody>
+      </p:sp>
+      <p:sp>
+        <p:nvSpPr>
+          <p:cNvPr id="31" name="TextBox 30"/>
           <p:cNvSpPr txBox="1"/>
           <p:nvPr/>
         </p:nvSpPr>
         <p:spPr>
           <a:xfrm>
-            <a:off x="6766559" y="5641848"/>
-            <a:ext cx="4739335" cy="386715"/>
+            <a:off x="6949440" y="5120640"/>
+            <a:ext cx="4556455" cy="331470"/>
           </a:xfrm>
           <a:prstGeom prst="rect">
             <a:avLst/>
@@ -11360,7 +11419,48 @@
               </a:lnSpc>
             </a:pPr>
             <a:r>
-              <a:rPr sz="2100" b="1">
+              <a:rPr sz="1800" b="0">
+                <a:solidFill>
+                  <a:srgbClr val="475569"/>
+                </a:solidFill>
+                <a:latin typeface="Noto Sans JP"/>
+                <a:ea typeface="Noto Sans JP"/>
+                <a:cs typeface="Noto Sans JP"/>
+              </a:rPr>
+              <a:t>朝・昼・夜ごとに付けて、7日分を見返せる</a:t>
+            </a:r>
+          </a:p>
+        </p:txBody>
+      </p:sp>
+      <p:sp>
+        <p:nvSpPr>
+          <p:cNvPr id="32" name="TextBox 31"/>
+          <p:cNvSpPr txBox="1"/>
+          <p:nvPr/>
+        </p:nvSpPr>
+        <p:spPr>
+          <a:xfrm>
+            <a:off x="6949440" y="5653278"/>
+            <a:ext cx="4556455" cy="405130"/>
+          </a:xfrm>
+          <a:prstGeom prst="rect">
+            <a:avLst/>
+          </a:prstGeom>
+          <a:noFill/>
+        </p:spPr>
+        <p:txBody>
+          <a:bodyPr wrap="none" lIns="0" rIns="0" tIns="0" bIns="0" anchor="t">
+            <a:spAutoFit/>
+          </a:bodyPr>
+          <a:lstStyle/>
+          <a:p>
+            <a:pPr algn="l">
+              <a:lnSpc>
+                <a:spcPct val="100000"/>
+              </a:lnSpc>
+            </a:pPr>
+            <a:r>
+              <a:rPr sz="2200" b="1">
                 <a:solidFill>
                   <a:srgbClr val="0F172A"/>
                 </a:solidFill>
@@ -11368,7 +11468,48 @@
                 <a:ea typeface="Noto Sans JP"/>
                 <a:cs typeface="Noto Sans JP"/>
               </a:rPr>
-              <a:t>手順ごとに、細かい使い方の説明</a:t>
+              <a:t>手順ごとに、使い方の説明が付く</a:t>
+            </a:r>
+          </a:p>
+        </p:txBody>
+      </p:sp>
+      <p:sp>
+        <p:nvSpPr>
+          <p:cNvPr id="33" name="TextBox 32"/>
+          <p:cNvSpPr txBox="1"/>
+          <p:nvPr/>
+        </p:nvSpPr>
+        <p:spPr>
+          <a:xfrm>
+            <a:off x="6949440" y="6083046"/>
+            <a:ext cx="4556455" cy="331470"/>
+          </a:xfrm>
+          <a:prstGeom prst="rect">
+            <a:avLst/>
+          </a:prstGeom>
+          <a:noFill/>
+        </p:spPr>
+        <p:txBody>
+          <a:bodyPr wrap="none" lIns="0" rIns="0" tIns="0" bIns="0" anchor="t">
+            <a:spAutoFit/>
+          </a:bodyPr>
+          <a:lstStyle/>
+          <a:p>
+            <a:pPr algn="l">
+              <a:lnSpc>
+                <a:spcPct val="100000"/>
+              </a:lnSpc>
+            </a:pPr>
+            <a:r>
+              <a:rPr sz="1800" b="0">
+                <a:solidFill>
+                  <a:srgbClr val="475569"/>
+                </a:solidFill>
+                <a:latin typeface="Noto Sans JP"/>
+                <a:ea typeface="Noto Sans JP"/>
+                <a:cs typeface="Noto Sans JP"/>
+              </a:rPr>
+              <a:t>その順番の理由と、使うときのコツがわかる</a:t>
             </a:r>
           </a:p>
         </p:txBody>

--- a/docs/ピッチ/Overlai_本選ピッチ.pptx
+++ b/docs/ピッチ/Overlai_本選ピッチ.pptx
@@ -9000,7 +9000,51 @@
       </p:sp>
       <p:sp>
         <p:nvSpPr>
-          <p:cNvPr id="5" name="Rounded Rectangle 4"/>
+          <p:cNvPr id="5" name="Rectangle 4"/>
+          <p:cNvSpPr/>
+          <p:nvPr/>
+        </p:nvSpPr>
+        <p:spPr>
+          <a:xfrm>
+            <a:off x="6675120" y="1874519"/>
+            <a:ext cx="45720" cy="1147571"/>
+          </a:xfrm>
+          <a:prstGeom prst="rect">
+            <a:avLst/>
+          </a:prstGeom>
+          <a:solidFill>
+            <a:srgbClr val="C9D0DB"/>
+          </a:solidFill>
+          <a:ln>
+            <a:noFill/>
+          </a:ln>
+          <a:effectLst/>
+        </p:spPr>
+        <p:style>
+          <a:lnRef idx="1">
+            <a:schemeClr val="accent1"/>
+          </a:lnRef>
+          <a:fillRef idx="3">
+            <a:schemeClr val="accent1"/>
+          </a:fillRef>
+          <a:effectRef idx="2">
+            <a:schemeClr val="accent1"/>
+          </a:effectRef>
+          <a:fontRef idx="minor">
+            <a:schemeClr val="lt1"/>
+          </a:fontRef>
+        </p:style>
+        <p:txBody>
+          <a:bodyPr rtlCol="0" anchor="ctr" lIns="0" rIns="0" tIns="0" bIns="0"/>
+          <a:lstStyle/>
+          <a:p>
+            <a:pPr algn="ctr"/>
+          </a:p>
+        </p:txBody>
+      </p:sp>
+      <p:sp>
+        <p:nvSpPr>
+          <p:cNvPr id="6" name="Rounded Rectangle 5"/>
           <p:cNvSpPr/>
           <p:nvPr/>
         </p:nvSpPr>
@@ -9057,7 +9101,7 @@
       </p:sp>
       <p:sp>
         <p:nvSpPr>
-          <p:cNvPr id="6" name="TextBox 5"/>
+          <p:cNvPr id="7" name="TextBox 6"/>
           <p:cNvSpPr txBox="1"/>
           <p:nvPr/>
         </p:nvSpPr>
@@ -9098,7 +9142,7 @@
       </p:sp>
       <p:sp>
         <p:nvSpPr>
-          <p:cNvPr id="7" name="TextBox 6"/>
+          <p:cNvPr id="8" name="TextBox 7"/>
           <p:cNvSpPr txBox="1"/>
           <p:nvPr/>
         </p:nvSpPr>
@@ -9139,7 +9183,7 @@
       </p:sp>
       <p:sp>
         <p:nvSpPr>
-          <p:cNvPr id="8" name="TextBox 7"/>
+          <p:cNvPr id="9" name="TextBox 8"/>
           <p:cNvSpPr txBox="1"/>
           <p:nvPr/>
         </p:nvSpPr>
@@ -9180,13 +9224,113 @@
       </p:sp>
       <p:sp>
         <p:nvSpPr>
-          <p:cNvPr id="9" name="Rectangle 8"/>
+          <p:cNvPr id="10" name="TextBox 9"/>
+          <p:cNvSpPr txBox="1"/>
+          <p:nvPr/>
+        </p:nvSpPr>
+        <p:spPr>
+          <a:xfrm>
+            <a:off x="6949440" y="1837943"/>
+            <a:ext cx="4556455" cy="405130"/>
+          </a:xfrm>
+          <a:prstGeom prst="rect">
+            <a:avLst/>
+          </a:prstGeom>
+          <a:noFill/>
+        </p:spPr>
+        <p:txBody>
+          <a:bodyPr wrap="none" lIns="0" rIns="0" tIns="0" bIns="0" anchor="t">
+            <a:spAutoFit/>
+          </a:bodyPr>
+          <a:lstStyle/>
+          <a:p>
+            <a:pPr algn="l">
+              <a:lnSpc>
+                <a:spcPct val="100000"/>
+              </a:lnSpc>
+            </a:pPr>
+            <a:r>
+              <a:rPr sz="2200" b="1">
+                <a:solidFill>
+                  <a:srgbClr val="0F172A"/>
+                </a:solidFill>
+                <a:latin typeface="Noto Sans JP"/>
+                <a:ea typeface="Noto Sans JP"/>
+                <a:cs typeface="Noto Sans JP"/>
+              </a:rPr>
+              <a:t>自分の体質も登録できる</a:t>
+            </a:r>
+          </a:p>
+        </p:txBody>
+      </p:sp>
+      <p:sp>
+        <p:nvSpPr>
+          <p:cNvPr id="11" name="TextBox 10"/>
+          <p:cNvSpPr txBox="1"/>
+          <p:nvPr/>
+        </p:nvSpPr>
+        <p:spPr>
+          <a:xfrm>
+            <a:off x="6949440" y="2267712"/>
+            <a:ext cx="4556455" cy="662940"/>
+          </a:xfrm>
+          <a:prstGeom prst="rect">
+            <a:avLst/>
+          </a:prstGeom>
+          <a:noFill/>
+        </p:spPr>
+        <p:txBody>
+          <a:bodyPr wrap="none" lIns="0" rIns="0" tIns="0" bIns="0" anchor="t">
+            <a:spAutoFit/>
+          </a:bodyPr>
+          <a:lstStyle/>
+          <a:p>
+            <a:pPr algn="l">
+              <a:lnSpc>
+                <a:spcPct val="100000"/>
+              </a:lnSpc>
+            </a:pPr>
+            <a:r>
+              <a:rPr sz="1800" b="0">
+                <a:solidFill>
+                  <a:srgbClr val="475569"/>
+                </a:solidFill>
+                <a:latin typeface="Noto Sans JP"/>
+                <a:ea typeface="Noto Sans JP"/>
+                <a:cs typeface="Noto Sans JP"/>
+              </a:rPr>
+              <a:t>肌質や年代、悩みを登録すると、</a:t>
+            </a:r>
+          </a:p>
+          <a:p>
+            <a:pPr algn="l">
+              <a:lnSpc>
+                <a:spcPct val="100000"/>
+              </a:lnSpc>
+            </a:pPr>
+            <a:r>
+              <a:rPr sz="1800" b="0">
+                <a:solidFill>
+                  <a:srgbClr val="475569"/>
+                </a:solidFill>
+                <a:latin typeface="Noto Sans JP"/>
+                <a:ea typeface="Noto Sans JP"/>
+                <a:cs typeface="Noto Sans JP"/>
+              </a:rPr>
+              <a:t>使い方の助言がパーソナライズされる</a:t>
+            </a:r>
+          </a:p>
+        </p:txBody>
+      </p:sp>
+      <p:sp>
+        <p:nvSpPr>
+          <p:cNvPr id="12" name="Rectangle 11"/>
           <p:cNvSpPr/>
           <p:nvPr/>
         </p:nvSpPr>
         <p:spPr>
           <a:xfrm>
-            <a:off x="6675120" y="1874519"/>
+            <a:off x="6675120" y="3429000"/>
             <a:ext cx="45720" cy="1147571"/>
           </a:xfrm>
           <a:prstGeom prst="rect">
@@ -9224,107 +9368,7 @@
       </p:sp>
       <p:sp>
         <p:nvSpPr>
-          <p:cNvPr id="10" name="TextBox 9"/>
-          <p:cNvSpPr txBox="1"/>
-          <p:nvPr/>
-        </p:nvSpPr>
-        <p:spPr>
-          <a:xfrm>
-            <a:off x="6949440" y="1837943"/>
-            <a:ext cx="4556455" cy="405130"/>
-          </a:xfrm>
-          <a:prstGeom prst="rect">
-            <a:avLst/>
-          </a:prstGeom>
-          <a:noFill/>
-        </p:spPr>
-        <p:txBody>
-          <a:bodyPr wrap="none" lIns="0" rIns="0" tIns="0" bIns="0" anchor="t">
-            <a:spAutoFit/>
-          </a:bodyPr>
-          <a:lstStyle/>
-          <a:p>
-            <a:pPr algn="l">
-              <a:lnSpc>
-                <a:spcPct val="100000"/>
-              </a:lnSpc>
-            </a:pPr>
-            <a:r>
-              <a:rPr sz="2200" b="1">
-                <a:solidFill>
-                  <a:srgbClr val="0F172A"/>
-                </a:solidFill>
-                <a:latin typeface="Noto Sans JP"/>
-                <a:ea typeface="Noto Sans JP"/>
-                <a:cs typeface="Noto Sans JP"/>
-              </a:rPr>
-              <a:t>自分の体質も登録できる</a:t>
-            </a:r>
-          </a:p>
-        </p:txBody>
-      </p:sp>
-      <p:sp>
-        <p:nvSpPr>
-          <p:cNvPr id="11" name="TextBox 10"/>
-          <p:cNvSpPr txBox="1"/>
-          <p:nvPr/>
-        </p:nvSpPr>
-        <p:spPr>
-          <a:xfrm>
-            <a:off x="6949440" y="2267712"/>
-            <a:ext cx="4556455" cy="662940"/>
-          </a:xfrm>
-          <a:prstGeom prst="rect">
-            <a:avLst/>
-          </a:prstGeom>
-          <a:noFill/>
-        </p:spPr>
-        <p:txBody>
-          <a:bodyPr wrap="none" lIns="0" rIns="0" tIns="0" bIns="0" anchor="t">
-            <a:spAutoFit/>
-          </a:bodyPr>
-          <a:lstStyle/>
-          <a:p>
-            <a:pPr algn="l">
-              <a:lnSpc>
-                <a:spcPct val="100000"/>
-              </a:lnSpc>
-            </a:pPr>
-            <a:r>
-              <a:rPr sz="1800" b="0">
-                <a:solidFill>
-                  <a:srgbClr val="475569"/>
-                </a:solidFill>
-                <a:latin typeface="Noto Sans JP"/>
-                <a:ea typeface="Noto Sans JP"/>
-                <a:cs typeface="Noto Sans JP"/>
-              </a:rPr>
-              <a:t>肌質や年代、悩みを登録すると、</a:t>
-            </a:r>
-          </a:p>
-          <a:p>
-            <a:pPr algn="l">
-              <a:lnSpc>
-                <a:spcPct val="100000"/>
-              </a:lnSpc>
-            </a:pPr>
-            <a:r>
-              <a:rPr sz="1800" b="0">
-                <a:solidFill>
-                  <a:srgbClr val="475569"/>
-                </a:solidFill>
-                <a:latin typeface="Noto Sans JP"/>
-                <a:ea typeface="Noto Sans JP"/>
-                <a:cs typeface="Noto Sans JP"/>
-              </a:rPr>
-              <a:t>使い方の助言がパーソナライズされる</a:t>
-            </a:r>
-          </a:p>
-        </p:txBody>
-      </p:sp>
-      <p:sp>
-        <p:nvSpPr>
-          <p:cNvPr id="12" name="Rounded Rectangle 11"/>
+          <p:cNvPr id="13" name="Rounded Rectangle 12"/>
           <p:cNvSpPr/>
           <p:nvPr/>
         </p:nvSpPr>
@@ -9381,7 +9425,7 @@
       </p:sp>
       <p:sp>
         <p:nvSpPr>
-          <p:cNvPr id="13" name="TextBox 12"/>
+          <p:cNvPr id="14" name="TextBox 13"/>
           <p:cNvSpPr txBox="1"/>
           <p:nvPr/>
         </p:nvSpPr>
@@ -9422,7 +9466,7 @@
       </p:sp>
       <p:sp>
         <p:nvSpPr>
-          <p:cNvPr id="14" name="TextBox 13"/>
+          <p:cNvPr id="15" name="TextBox 14"/>
           <p:cNvSpPr txBox="1"/>
           <p:nvPr/>
         </p:nvSpPr>
@@ -9463,7 +9507,7 @@
       </p:sp>
       <p:sp>
         <p:nvSpPr>
-          <p:cNvPr id="15" name="TextBox 14"/>
+          <p:cNvPr id="16" name="TextBox 15"/>
           <p:cNvSpPr txBox="1"/>
           <p:nvPr/>
         </p:nvSpPr>
@@ -9504,14 +9548,114 @@
       </p:sp>
       <p:sp>
         <p:nvSpPr>
-          <p:cNvPr id="16" name="Rectangle 15"/>
+          <p:cNvPr id="17" name="TextBox 16"/>
+          <p:cNvSpPr txBox="1"/>
+          <p:nvPr/>
+        </p:nvSpPr>
+        <p:spPr>
+          <a:xfrm>
+            <a:off x="6949440" y="3392424"/>
+            <a:ext cx="4556455" cy="405130"/>
+          </a:xfrm>
+          <a:prstGeom prst="rect">
+            <a:avLst/>
+          </a:prstGeom>
+          <a:noFill/>
+        </p:spPr>
+        <p:txBody>
+          <a:bodyPr wrap="none" lIns="0" rIns="0" tIns="0" bIns="0" anchor="t">
+            <a:spAutoFit/>
+          </a:bodyPr>
+          <a:lstStyle/>
+          <a:p>
+            <a:pPr algn="l">
+              <a:lnSpc>
+                <a:spcPct val="100000"/>
+              </a:lnSpc>
+            </a:pPr>
+            <a:r>
+              <a:rPr sz="2200" b="1">
+                <a:solidFill>
+                  <a:srgbClr val="0F172A"/>
+                </a:solidFill>
+                <a:latin typeface="Noto Sans JP"/>
+                <a:ea typeface="Noto Sans JP"/>
+                <a:cs typeface="Noto Sans JP"/>
+              </a:rPr>
+              <a:t>撮るだけで、すぐ確かめられる</a:t>
+            </a:r>
+          </a:p>
+        </p:txBody>
+      </p:sp>
+      <p:sp>
+        <p:nvSpPr>
+          <p:cNvPr id="18" name="TextBox 17"/>
+          <p:cNvSpPr txBox="1"/>
+          <p:nvPr/>
+        </p:nvSpPr>
+        <p:spPr>
+          <a:xfrm>
+            <a:off x="6949440" y="3822191"/>
+            <a:ext cx="4556455" cy="662940"/>
+          </a:xfrm>
+          <a:prstGeom prst="rect">
+            <a:avLst/>
+          </a:prstGeom>
+          <a:noFill/>
+        </p:spPr>
+        <p:txBody>
+          <a:bodyPr wrap="none" lIns="0" rIns="0" tIns="0" bIns="0" anchor="t">
+            <a:spAutoFit/>
+          </a:bodyPr>
+          <a:lstStyle/>
+          <a:p>
+            <a:pPr algn="l">
+              <a:lnSpc>
+                <a:spcPct val="100000"/>
+              </a:lnSpc>
+            </a:pPr>
+            <a:r>
+              <a:rPr sz="1800" b="0">
+                <a:solidFill>
+                  <a:srgbClr val="475569"/>
+                </a:solidFill>
+                <a:latin typeface="Noto Sans JP"/>
+                <a:ea typeface="Noto Sans JP"/>
+                <a:cs typeface="Noto Sans JP"/>
+              </a:rPr>
+              <a:t>商品名の入力も検索もいらない</a:t>
+            </a:r>
+          </a:p>
+          <a:p>
+            <a:pPr algn="l">
+              <a:lnSpc>
+                <a:spcPct val="100000"/>
+              </a:lnSpc>
+            </a:pPr>
+            <a:r>
+              <a:rPr sz="1800" b="0">
+                <a:solidFill>
+                  <a:srgbClr val="475569"/>
+                </a:solidFill>
+                <a:latin typeface="Noto Sans JP"/>
+                <a:ea typeface="Noto Sans JP"/>
+                <a:cs typeface="Noto Sans JP"/>
+              </a:rPr>
+              <a:t>店先で成分表示を1枚撮れば済む</a:t>
+            </a:r>
+          </a:p>
+        </p:txBody>
+      </p:sp>
+      <p:sp>
+        <p:nvSpPr>
+          <p:cNvPr id="19" name="Rectangle 18"/>
           <p:cNvSpPr/>
           <p:nvPr/>
         </p:nvSpPr>
         <p:spPr>
           <a:xfrm>
-            <a:off x="6675120" y="3429000"/>
-            <a:ext cx="45720" cy="1147571"/>
+            <a:off x="6675120" y="4983479"/>
+            <a:ext cx="45720" cy="1147572"/>
           </a:xfrm>
           <a:prstGeom prst="rect">
             <a:avLst/>
@@ -9548,107 +9692,7 @@
       </p:sp>
       <p:sp>
         <p:nvSpPr>
-          <p:cNvPr id="17" name="TextBox 16"/>
-          <p:cNvSpPr txBox="1"/>
-          <p:nvPr/>
-        </p:nvSpPr>
-        <p:spPr>
-          <a:xfrm>
-            <a:off x="6949440" y="3392424"/>
-            <a:ext cx="4556455" cy="405130"/>
-          </a:xfrm>
-          <a:prstGeom prst="rect">
-            <a:avLst/>
-          </a:prstGeom>
-          <a:noFill/>
-        </p:spPr>
-        <p:txBody>
-          <a:bodyPr wrap="none" lIns="0" rIns="0" tIns="0" bIns="0" anchor="t">
-            <a:spAutoFit/>
-          </a:bodyPr>
-          <a:lstStyle/>
-          <a:p>
-            <a:pPr algn="l">
-              <a:lnSpc>
-                <a:spcPct val="100000"/>
-              </a:lnSpc>
-            </a:pPr>
-            <a:r>
-              <a:rPr sz="2200" b="1">
-                <a:solidFill>
-                  <a:srgbClr val="0F172A"/>
-                </a:solidFill>
-                <a:latin typeface="Noto Sans JP"/>
-                <a:ea typeface="Noto Sans JP"/>
-                <a:cs typeface="Noto Sans JP"/>
-              </a:rPr>
-              <a:t>撮るだけで、すぐ確かめられる</a:t>
-            </a:r>
-          </a:p>
-        </p:txBody>
-      </p:sp>
-      <p:sp>
-        <p:nvSpPr>
-          <p:cNvPr id="18" name="TextBox 17"/>
-          <p:cNvSpPr txBox="1"/>
-          <p:nvPr/>
-        </p:nvSpPr>
-        <p:spPr>
-          <a:xfrm>
-            <a:off x="6949440" y="3822191"/>
-            <a:ext cx="4556455" cy="662940"/>
-          </a:xfrm>
-          <a:prstGeom prst="rect">
-            <a:avLst/>
-          </a:prstGeom>
-          <a:noFill/>
-        </p:spPr>
-        <p:txBody>
-          <a:bodyPr wrap="none" lIns="0" rIns="0" tIns="0" bIns="0" anchor="t">
-            <a:spAutoFit/>
-          </a:bodyPr>
-          <a:lstStyle/>
-          <a:p>
-            <a:pPr algn="l">
-              <a:lnSpc>
-                <a:spcPct val="100000"/>
-              </a:lnSpc>
-            </a:pPr>
-            <a:r>
-              <a:rPr sz="1800" b="0">
-                <a:solidFill>
-                  <a:srgbClr val="475569"/>
-                </a:solidFill>
-                <a:latin typeface="Noto Sans JP"/>
-                <a:ea typeface="Noto Sans JP"/>
-                <a:cs typeface="Noto Sans JP"/>
-              </a:rPr>
-              <a:t>商品名の入力も検索もいらない</a:t>
-            </a:r>
-          </a:p>
-          <a:p>
-            <a:pPr algn="l">
-              <a:lnSpc>
-                <a:spcPct val="100000"/>
-              </a:lnSpc>
-            </a:pPr>
-            <a:r>
-              <a:rPr sz="1800" b="0">
-                <a:solidFill>
-                  <a:srgbClr val="475569"/>
-                </a:solidFill>
-                <a:latin typeface="Noto Sans JP"/>
-                <a:ea typeface="Noto Sans JP"/>
-                <a:cs typeface="Noto Sans JP"/>
-              </a:rPr>
-              <a:t>店先で成分表示を1枚撮れば済む</a:t>
-            </a:r>
-          </a:p>
-        </p:txBody>
-      </p:sp>
-      <p:sp>
-        <p:nvSpPr>
-          <p:cNvPr id="19" name="Rounded Rectangle 18"/>
+          <p:cNvPr id="20" name="Rounded Rectangle 19"/>
           <p:cNvSpPr/>
           <p:nvPr/>
         </p:nvSpPr>
@@ -9705,7 +9749,7 @@
       </p:sp>
       <p:sp>
         <p:nvSpPr>
-          <p:cNvPr id="20" name="TextBox 19"/>
+          <p:cNvPr id="21" name="TextBox 20"/>
           <p:cNvSpPr txBox="1"/>
           <p:nvPr/>
         </p:nvSpPr>
@@ -9746,7 +9790,7 @@
       </p:sp>
       <p:sp>
         <p:nvSpPr>
-          <p:cNvPr id="21" name="TextBox 20"/>
+          <p:cNvPr id="22" name="TextBox 21"/>
           <p:cNvSpPr txBox="1"/>
           <p:nvPr/>
         </p:nvSpPr>
@@ -9787,7 +9831,7 @@
       </p:sp>
       <p:sp>
         <p:nvSpPr>
-          <p:cNvPr id="22" name="TextBox 21"/>
+          <p:cNvPr id="23" name="TextBox 22"/>
           <p:cNvSpPr txBox="1"/>
           <p:nvPr/>
         </p:nvSpPr>
@@ -9823,50 +9867,6 @@
               </a:rPr>
               <a:t>3色の判定と、成分名つきの理由</a:t>
             </a:r>
-          </a:p>
-        </p:txBody>
-      </p:sp>
-      <p:sp>
-        <p:nvSpPr>
-          <p:cNvPr id="23" name="Rectangle 22"/>
-          <p:cNvSpPr/>
-          <p:nvPr/>
-        </p:nvSpPr>
-        <p:spPr>
-          <a:xfrm>
-            <a:off x="6675120" y="4983479"/>
-            <a:ext cx="45720" cy="1147572"/>
-          </a:xfrm>
-          <a:prstGeom prst="rect">
-            <a:avLst/>
-          </a:prstGeom>
-          <a:solidFill>
-            <a:srgbClr val="C9D0DB"/>
-          </a:solidFill>
-          <a:ln>
-            <a:noFill/>
-          </a:ln>
-          <a:effectLst/>
-        </p:spPr>
-        <p:style>
-          <a:lnRef idx="1">
-            <a:schemeClr val="accent1"/>
-          </a:lnRef>
-          <a:fillRef idx="3">
-            <a:schemeClr val="accent1"/>
-          </a:fillRef>
-          <a:effectRef idx="2">
-            <a:schemeClr val="accent1"/>
-          </a:effectRef>
-          <a:fontRef idx="minor">
-            <a:schemeClr val="lt1"/>
-          </a:fontRef>
-        </p:style>
-        <p:txBody>
-          <a:bodyPr rtlCol="0" anchor="ctr" lIns="0" rIns="0" tIns="0" bIns="0"/>
-          <a:lstStyle/>
-          <a:p>
-            <a:pPr algn="ctr"/>
           </a:p>
         </p:txBody>
       </p:sp>
@@ -10310,8 +10310,8 @@
         </p:nvSpPr>
         <p:spPr>
           <a:xfrm>
-            <a:off x="6675120" y="1874519"/>
-            <a:ext cx="45720" cy="1097280"/>
+            <a:off x="6675120" y="3300984"/>
+            <a:ext cx="45720" cy="1147572"/>
           </a:xfrm>
           <a:prstGeom prst="rect">
             <a:avLst/>
@@ -10354,462 +10354,6 @@
         </p:nvSpPr>
         <p:spPr>
           <a:xfrm>
-            <a:off x="6949440" y="1874519"/>
-            <a:ext cx="1013460" cy="384048"/>
-          </a:xfrm>
-          <a:prstGeom prst="roundRect">
-            <a:avLst>
-              <a:gd name="adj" fmla="val 50000"/>
-            </a:avLst>
-          </a:prstGeom>
-          <a:solidFill>
-            <a:srgbClr val="F2F4F7"/>
-          </a:solidFill>
-          <a:ln>
-            <a:noFill/>
-          </a:ln>
-          <a:effectLst/>
-        </p:spPr>
-        <p:style>
-          <a:lnRef idx="1">
-            <a:schemeClr val="accent1"/>
-          </a:lnRef>
-          <a:fillRef idx="3">
-            <a:schemeClr val="accent1"/>
-          </a:fillRef>
-          <a:effectRef idx="2">
-            <a:schemeClr val="accent1"/>
-          </a:effectRef>
-          <a:fontRef idx="minor">
-            <a:schemeClr val="lt1"/>
-          </a:fontRef>
-        </p:style>
-        <p:txBody>
-          <a:bodyPr rtlCol="0" anchor="ctr" lIns="0" rIns="0" tIns="0" bIns="0" wrap="none"/>
-          <a:lstStyle/>
-          <a:p>
-            <a:pPr algn="ctr"/>
-            <a:r>
-              <a:rPr sz="1700" b="1">
-                <a:solidFill>
-                  <a:srgbClr val="1B2A4A"/>
-                </a:solidFill>
-                <a:latin typeface="Noto Sans JP"/>
-                <a:ea typeface="Noto Sans JP"/>
-                <a:cs typeface="Noto Sans JP"/>
-              </a:rPr>
-              <a:t>飲み薬</a:t>
-            </a:r>
-          </a:p>
-        </p:txBody>
-      </p:sp>
-      <p:sp>
-        <p:nvSpPr>
-          <p:cNvPr id="11" name="Rounded Rectangle 10"/>
-          <p:cNvSpPr/>
-          <p:nvPr/>
-        </p:nvSpPr>
-        <p:spPr>
-          <a:xfrm>
-            <a:off x="8090915" y="1874519"/>
-            <a:ext cx="1013460" cy="384048"/>
-          </a:xfrm>
-          <a:prstGeom prst="roundRect">
-            <a:avLst>
-              <a:gd name="adj" fmla="val 50000"/>
-            </a:avLst>
-          </a:prstGeom>
-          <a:solidFill>
-            <a:srgbClr val="F2F4F7"/>
-          </a:solidFill>
-          <a:ln>
-            <a:noFill/>
-          </a:ln>
-          <a:effectLst/>
-        </p:spPr>
-        <p:style>
-          <a:lnRef idx="1">
-            <a:schemeClr val="accent1"/>
-          </a:lnRef>
-          <a:fillRef idx="3">
-            <a:schemeClr val="accent1"/>
-          </a:fillRef>
-          <a:effectRef idx="2">
-            <a:schemeClr val="accent1"/>
-          </a:effectRef>
-          <a:fontRef idx="minor">
-            <a:schemeClr val="lt1"/>
-          </a:fontRef>
-        </p:style>
-        <p:txBody>
-          <a:bodyPr rtlCol="0" anchor="ctr" lIns="0" rIns="0" tIns="0" bIns="0" wrap="none"/>
-          <a:lstStyle/>
-          <a:p>
-            <a:pPr algn="ctr"/>
-            <a:r>
-              <a:rPr sz="1700" b="1">
-                <a:solidFill>
-                  <a:srgbClr val="1B2A4A"/>
-                </a:solidFill>
-                <a:latin typeface="Noto Sans JP"/>
-                <a:ea typeface="Noto Sans JP"/>
-                <a:cs typeface="Noto Sans JP"/>
-              </a:rPr>
-              <a:t>塗り薬</a:t>
-            </a:r>
-          </a:p>
-        </p:txBody>
-      </p:sp>
-      <p:sp>
-        <p:nvSpPr>
-          <p:cNvPr id="12" name="Rounded Rectangle 11"/>
-          <p:cNvSpPr/>
-          <p:nvPr/>
-        </p:nvSpPr>
-        <p:spPr>
-          <a:xfrm>
-            <a:off x="9232392" y="1874519"/>
-            <a:ext cx="1013460" cy="384048"/>
-          </a:xfrm>
-          <a:prstGeom prst="roundRect">
-            <a:avLst>
-              <a:gd name="adj" fmla="val 50000"/>
-            </a:avLst>
-          </a:prstGeom>
-          <a:solidFill>
-            <a:srgbClr val="F2F4F7"/>
-          </a:solidFill>
-          <a:ln>
-            <a:noFill/>
-          </a:ln>
-          <a:effectLst/>
-        </p:spPr>
-        <p:style>
-          <a:lnRef idx="1">
-            <a:schemeClr val="accent1"/>
-          </a:lnRef>
-          <a:fillRef idx="3">
-            <a:schemeClr val="accent1"/>
-          </a:fillRef>
-          <a:effectRef idx="2">
-            <a:schemeClr val="accent1"/>
-          </a:effectRef>
-          <a:fontRef idx="minor">
-            <a:schemeClr val="lt1"/>
-          </a:fontRef>
-        </p:style>
-        <p:txBody>
-          <a:bodyPr rtlCol="0" anchor="ctr" lIns="0" rIns="0" tIns="0" bIns="0" wrap="none"/>
-          <a:lstStyle/>
-          <a:p>
-            <a:pPr algn="ctr"/>
-            <a:r>
-              <a:rPr sz="1700" b="1">
-                <a:solidFill>
-                  <a:srgbClr val="1B2A4A"/>
-                </a:solidFill>
-                <a:latin typeface="Noto Sans JP"/>
-                <a:ea typeface="Noto Sans JP"/>
-                <a:cs typeface="Noto Sans JP"/>
-              </a:rPr>
-              <a:t>化粧品</a:t>
-            </a:r>
-          </a:p>
-        </p:txBody>
-      </p:sp>
-      <p:sp>
-        <p:nvSpPr>
-          <p:cNvPr id="13" name="Rounded Rectangle 12"/>
-          <p:cNvSpPr/>
-          <p:nvPr/>
-        </p:nvSpPr>
-        <p:spPr>
-          <a:xfrm>
-            <a:off x="6949440" y="2350008"/>
-            <a:ext cx="797560" cy="384048"/>
-          </a:xfrm>
-          <a:prstGeom prst="roundRect">
-            <a:avLst>
-              <a:gd name="adj" fmla="val 50000"/>
-            </a:avLst>
-          </a:prstGeom>
-          <a:solidFill>
-            <a:srgbClr val="F2F4F7"/>
-          </a:solidFill>
-          <a:ln>
-            <a:noFill/>
-          </a:ln>
-          <a:effectLst/>
-        </p:spPr>
-        <p:style>
-          <a:lnRef idx="1">
-            <a:schemeClr val="accent1"/>
-          </a:lnRef>
-          <a:fillRef idx="3">
-            <a:schemeClr val="accent1"/>
-          </a:fillRef>
-          <a:effectRef idx="2">
-            <a:schemeClr val="accent1"/>
-          </a:effectRef>
-          <a:fontRef idx="minor">
-            <a:schemeClr val="lt1"/>
-          </a:fontRef>
-        </p:style>
-        <p:txBody>
-          <a:bodyPr rtlCol="0" anchor="ctr" lIns="0" rIns="0" tIns="0" bIns="0" wrap="none"/>
-          <a:lstStyle/>
-          <a:p>
-            <a:pPr algn="ctr"/>
-            <a:r>
-              <a:rPr sz="1700" b="1">
-                <a:solidFill>
-                  <a:srgbClr val="1B2A4A"/>
-                </a:solidFill>
-                <a:latin typeface="Noto Sans JP"/>
-                <a:ea typeface="Noto Sans JP"/>
-                <a:cs typeface="Noto Sans JP"/>
-              </a:rPr>
-              <a:t>肌質</a:t>
-            </a:r>
-          </a:p>
-        </p:txBody>
-      </p:sp>
-      <p:sp>
-        <p:nvSpPr>
-          <p:cNvPr id="14" name="Rounded Rectangle 13"/>
-          <p:cNvSpPr/>
-          <p:nvPr/>
-        </p:nvSpPr>
-        <p:spPr>
-          <a:xfrm>
-            <a:off x="7875016" y="2350008"/>
-            <a:ext cx="797560" cy="384048"/>
-          </a:xfrm>
-          <a:prstGeom prst="roundRect">
-            <a:avLst>
-              <a:gd name="adj" fmla="val 50000"/>
-            </a:avLst>
-          </a:prstGeom>
-          <a:solidFill>
-            <a:srgbClr val="F2F4F7"/>
-          </a:solidFill>
-          <a:ln>
-            <a:noFill/>
-          </a:ln>
-          <a:effectLst/>
-        </p:spPr>
-        <p:style>
-          <a:lnRef idx="1">
-            <a:schemeClr val="accent1"/>
-          </a:lnRef>
-          <a:fillRef idx="3">
-            <a:schemeClr val="accent1"/>
-          </a:fillRef>
-          <a:effectRef idx="2">
-            <a:schemeClr val="accent1"/>
-          </a:effectRef>
-          <a:fontRef idx="minor">
-            <a:schemeClr val="lt1"/>
-          </a:fontRef>
-        </p:style>
-        <p:txBody>
-          <a:bodyPr rtlCol="0" anchor="ctr" lIns="0" rIns="0" tIns="0" bIns="0" wrap="none"/>
-          <a:lstStyle/>
-          <a:p>
-            <a:pPr algn="ctr"/>
-            <a:r>
-              <a:rPr sz="1700" b="1">
-                <a:solidFill>
-                  <a:srgbClr val="1B2A4A"/>
-                </a:solidFill>
-                <a:latin typeface="Noto Sans JP"/>
-                <a:ea typeface="Noto Sans JP"/>
-                <a:cs typeface="Noto Sans JP"/>
-              </a:rPr>
-              <a:t>頭皮</a:t>
-            </a:r>
-          </a:p>
-        </p:txBody>
-      </p:sp>
-      <p:sp>
-        <p:nvSpPr>
-          <p:cNvPr id="15" name="Rounded Rectangle 14"/>
-          <p:cNvSpPr/>
-          <p:nvPr/>
-        </p:nvSpPr>
-        <p:spPr>
-          <a:xfrm>
-            <a:off x="8800592" y="2350008"/>
-            <a:ext cx="797560" cy="384048"/>
-          </a:xfrm>
-          <a:prstGeom prst="roundRect">
-            <a:avLst>
-              <a:gd name="adj" fmla="val 50000"/>
-            </a:avLst>
-          </a:prstGeom>
-          <a:solidFill>
-            <a:srgbClr val="F2F4F7"/>
-          </a:solidFill>
-          <a:ln>
-            <a:noFill/>
-          </a:ln>
-          <a:effectLst/>
-        </p:spPr>
-        <p:style>
-          <a:lnRef idx="1">
-            <a:schemeClr val="accent1"/>
-          </a:lnRef>
-          <a:fillRef idx="3">
-            <a:schemeClr val="accent1"/>
-          </a:fillRef>
-          <a:effectRef idx="2">
-            <a:schemeClr val="accent1"/>
-          </a:effectRef>
-          <a:fontRef idx="minor">
-            <a:schemeClr val="lt1"/>
-          </a:fontRef>
-        </p:style>
-        <p:txBody>
-          <a:bodyPr rtlCol="0" anchor="ctr" lIns="0" rIns="0" tIns="0" bIns="0" wrap="none"/>
-          <a:lstStyle/>
-          <a:p>
-            <a:pPr algn="ctr"/>
-            <a:r>
-              <a:rPr sz="1700" b="1">
-                <a:solidFill>
-                  <a:srgbClr val="1B2A4A"/>
-                </a:solidFill>
-                <a:latin typeface="Noto Sans JP"/>
-                <a:ea typeface="Noto Sans JP"/>
-                <a:cs typeface="Noto Sans JP"/>
-              </a:rPr>
-              <a:t>年代</a:t>
-            </a:r>
-          </a:p>
-        </p:txBody>
-      </p:sp>
-      <p:sp>
-        <p:nvSpPr>
-          <p:cNvPr id="16" name="Rounded Rectangle 15"/>
-          <p:cNvSpPr/>
-          <p:nvPr/>
-        </p:nvSpPr>
-        <p:spPr>
-          <a:xfrm>
-            <a:off x="9726168" y="2350008"/>
-            <a:ext cx="797560" cy="384048"/>
-          </a:xfrm>
-          <a:prstGeom prst="roundRect">
-            <a:avLst>
-              <a:gd name="adj" fmla="val 50000"/>
-            </a:avLst>
-          </a:prstGeom>
-          <a:solidFill>
-            <a:srgbClr val="F2F4F7"/>
-          </a:solidFill>
-          <a:ln>
-            <a:noFill/>
-          </a:ln>
-          <a:effectLst/>
-        </p:spPr>
-        <p:style>
-          <a:lnRef idx="1">
-            <a:schemeClr val="accent1"/>
-          </a:lnRef>
-          <a:fillRef idx="3">
-            <a:schemeClr val="accent1"/>
-          </a:fillRef>
-          <a:effectRef idx="2">
-            <a:schemeClr val="accent1"/>
-          </a:effectRef>
-          <a:fontRef idx="minor">
-            <a:schemeClr val="lt1"/>
-          </a:fontRef>
-        </p:style>
-        <p:txBody>
-          <a:bodyPr rtlCol="0" anchor="ctr" lIns="0" rIns="0" tIns="0" bIns="0" wrap="none"/>
-          <a:lstStyle/>
-          <a:p>
-            <a:pPr algn="ctr"/>
-            <a:r>
-              <a:rPr sz="1700" b="1">
-                <a:solidFill>
-                  <a:srgbClr val="1B2A4A"/>
-                </a:solidFill>
-                <a:latin typeface="Noto Sans JP"/>
-                <a:ea typeface="Noto Sans JP"/>
-                <a:cs typeface="Noto Sans JP"/>
-              </a:rPr>
-              <a:t>性別</a:t>
-            </a:r>
-          </a:p>
-        </p:txBody>
-      </p:sp>
-      <p:sp>
-        <p:nvSpPr>
-          <p:cNvPr id="17" name="Rounded Rectangle 16"/>
-          <p:cNvSpPr/>
-          <p:nvPr/>
-        </p:nvSpPr>
-        <p:spPr>
-          <a:xfrm>
-            <a:off x="10651744" y="2350008"/>
-            <a:ext cx="797560" cy="384048"/>
-          </a:xfrm>
-          <a:prstGeom prst="roundRect">
-            <a:avLst>
-              <a:gd name="adj" fmla="val 50000"/>
-            </a:avLst>
-          </a:prstGeom>
-          <a:solidFill>
-            <a:srgbClr val="F2F4F7"/>
-          </a:solidFill>
-          <a:ln>
-            <a:noFill/>
-          </a:ln>
-          <a:effectLst/>
-        </p:spPr>
-        <p:style>
-          <a:lnRef idx="1">
-            <a:schemeClr val="accent1"/>
-          </a:lnRef>
-          <a:fillRef idx="3">
-            <a:schemeClr val="accent1"/>
-          </a:fillRef>
-          <a:effectRef idx="2">
-            <a:schemeClr val="accent1"/>
-          </a:effectRef>
-          <a:fontRef idx="minor">
-            <a:schemeClr val="lt1"/>
-          </a:fontRef>
-        </p:style>
-        <p:txBody>
-          <a:bodyPr rtlCol="0" anchor="ctr" lIns="0" rIns="0" tIns="0" bIns="0" wrap="none"/>
-          <a:lstStyle/>
-          <a:p>
-            <a:pPr algn="ctr"/>
-            <a:r>
-              <a:rPr sz="1700" b="1">
-                <a:solidFill>
-                  <a:srgbClr val="1B2A4A"/>
-                </a:solidFill>
-                <a:latin typeface="Noto Sans JP"/>
-                <a:ea typeface="Noto Sans JP"/>
-                <a:cs typeface="Noto Sans JP"/>
-              </a:rPr>
-              <a:t>悩み</a:t>
-            </a:r>
-          </a:p>
-        </p:txBody>
-      </p:sp>
-      <p:sp>
-        <p:nvSpPr>
-          <p:cNvPr id="18" name="Rounded Rectangle 17"/>
-          <p:cNvSpPr/>
-          <p:nvPr/>
-        </p:nvSpPr>
-        <p:spPr>
-          <a:xfrm>
             <a:off x="685800" y="3227832"/>
             <a:ext cx="457200" cy="457200"/>
           </a:xfrm>
@@ -10861,7 +10405,7 @@
       </p:sp>
       <p:sp>
         <p:nvSpPr>
-          <p:cNvPr id="19" name="TextBox 18"/>
+          <p:cNvPr id="11" name="TextBox 10"/>
           <p:cNvSpPr txBox="1"/>
           <p:nvPr/>
         </p:nvSpPr>
@@ -10902,7 +10446,7 @@
       </p:sp>
       <p:sp>
         <p:nvSpPr>
-          <p:cNvPr id="20" name="TextBox 19"/>
+          <p:cNvPr id="12" name="TextBox 11"/>
           <p:cNvSpPr txBox="1"/>
           <p:nvPr/>
         </p:nvSpPr>
@@ -10943,7 +10487,7 @@
       </p:sp>
       <p:sp>
         <p:nvSpPr>
-          <p:cNvPr id="21" name="TextBox 20"/>
+          <p:cNvPr id="13" name="TextBox 12"/>
           <p:cNvSpPr txBox="1"/>
           <p:nvPr/>
         </p:nvSpPr>
@@ -10984,14 +10528,114 @@
       </p:sp>
       <p:sp>
         <p:nvSpPr>
-          <p:cNvPr id="22" name="Rectangle 21"/>
+          <p:cNvPr id="14" name="TextBox 13"/>
+          <p:cNvSpPr txBox="1"/>
+          <p:nvPr/>
+        </p:nvSpPr>
+        <p:spPr>
+          <a:xfrm>
+            <a:off x="6949440" y="3264408"/>
+            <a:ext cx="4556455" cy="405130"/>
+          </a:xfrm>
+          <a:prstGeom prst="rect">
+            <a:avLst/>
+          </a:prstGeom>
+          <a:noFill/>
+        </p:spPr>
+        <p:txBody>
+          <a:bodyPr wrap="none" lIns="0" rIns="0" tIns="0" bIns="0" anchor="t">
+            <a:spAutoFit/>
+          </a:bodyPr>
+          <a:lstStyle/>
+          <a:p>
+            <a:pPr algn="l">
+              <a:lnSpc>
+                <a:spcPct val="100000"/>
+              </a:lnSpc>
+            </a:pPr>
+            <a:r>
+              <a:rPr sz="2200" b="1">
+                <a:solidFill>
+                  <a:srgbClr val="0F172A"/>
+                </a:solidFill>
+                <a:latin typeface="Noto Sans JP"/>
+                <a:ea typeface="Noto Sans JP"/>
+                <a:cs typeface="Noto Sans JP"/>
+              </a:rPr>
+              <a:t>悩みまで入れて、パーソナライズ</a:t>
+            </a:r>
+          </a:p>
+        </p:txBody>
+      </p:sp>
+      <p:sp>
+        <p:nvSpPr>
+          <p:cNvPr id="15" name="TextBox 14"/>
+          <p:cNvSpPr txBox="1"/>
+          <p:nvPr/>
+        </p:nvSpPr>
+        <p:spPr>
+          <a:xfrm>
+            <a:off x="6949440" y="3694176"/>
+            <a:ext cx="4556455" cy="662940"/>
+          </a:xfrm>
+          <a:prstGeom prst="rect">
+            <a:avLst/>
+          </a:prstGeom>
+          <a:noFill/>
+        </p:spPr>
+        <p:txBody>
+          <a:bodyPr wrap="none" lIns="0" rIns="0" tIns="0" bIns="0" anchor="t">
+            <a:spAutoFit/>
+          </a:bodyPr>
+          <a:lstStyle/>
+          <a:p>
+            <a:pPr algn="l">
+              <a:lnSpc>
+                <a:spcPct val="100000"/>
+              </a:lnSpc>
+            </a:pPr>
+            <a:r>
+              <a:rPr sz="1800" b="0">
+                <a:solidFill>
+                  <a:srgbClr val="475569"/>
+                </a:solidFill>
+                <a:latin typeface="Noto Sans JP"/>
+                <a:ea typeface="Noto Sans JP"/>
+                <a:cs typeface="Noto Sans JP"/>
+              </a:rPr>
+              <a:t>体質・年代・性別のほかに、</a:t>
+            </a:r>
+          </a:p>
+          <a:p>
+            <a:pPr algn="l">
+              <a:lnSpc>
+                <a:spcPct val="100000"/>
+              </a:lnSpc>
+            </a:pPr>
+            <a:r>
+              <a:rPr sz="1800" b="0">
+                <a:solidFill>
+                  <a:srgbClr val="475569"/>
+                </a:solidFill>
+                <a:latin typeface="Noto Sans JP"/>
+                <a:ea typeface="Noto Sans JP"/>
+                <a:cs typeface="Noto Sans JP"/>
+              </a:rPr>
+              <a:t>朝は手早く済ませたい、といった悩みも</a:t>
+            </a:r>
+          </a:p>
+        </p:txBody>
+      </p:sp>
+      <p:sp>
+        <p:nvSpPr>
+          <p:cNvPr id="16" name="Rectangle 15"/>
           <p:cNvSpPr/>
           <p:nvPr/>
         </p:nvSpPr>
         <p:spPr>
           <a:xfrm>
-            <a:off x="6675120" y="3300984"/>
-            <a:ext cx="45720" cy="1147572"/>
+            <a:off x="6675120" y="4727448"/>
+            <a:ext cx="45720" cy="1778508"/>
           </a:xfrm>
           <a:prstGeom prst="rect">
             <a:avLst/>
@@ -11028,107 +10672,7 @@
       </p:sp>
       <p:sp>
         <p:nvSpPr>
-          <p:cNvPr id="23" name="TextBox 22"/>
-          <p:cNvSpPr txBox="1"/>
-          <p:nvPr/>
-        </p:nvSpPr>
-        <p:spPr>
-          <a:xfrm>
-            <a:off x="6949440" y="3264408"/>
-            <a:ext cx="4556455" cy="405130"/>
-          </a:xfrm>
-          <a:prstGeom prst="rect">
-            <a:avLst/>
-          </a:prstGeom>
-          <a:noFill/>
-        </p:spPr>
-        <p:txBody>
-          <a:bodyPr wrap="none" lIns="0" rIns="0" tIns="0" bIns="0" anchor="t">
-            <a:spAutoFit/>
-          </a:bodyPr>
-          <a:lstStyle/>
-          <a:p>
-            <a:pPr algn="l">
-              <a:lnSpc>
-                <a:spcPct val="100000"/>
-              </a:lnSpc>
-            </a:pPr>
-            <a:r>
-              <a:rPr sz="2200" b="1">
-                <a:solidFill>
-                  <a:srgbClr val="0F172A"/>
-                </a:solidFill>
-                <a:latin typeface="Noto Sans JP"/>
-                <a:ea typeface="Noto Sans JP"/>
-                <a:cs typeface="Noto Sans JP"/>
-              </a:rPr>
-              <a:t>悩みまで入れて、パーソナライズ</a:t>
-            </a:r>
-          </a:p>
-        </p:txBody>
-      </p:sp>
-      <p:sp>
-        <p:nvSpPr>
-          <p:cNvPr id="24" name="TextBox 23"/>
-          <p:cNvSpPr txBox="1"/>
-          <p:nvPr/>
-        </p:nvSpPr>
-        <p:spPr>
-          <a:xfrm>
-            <a:off x="6949440" y="3694176"/>
-            <a:ext cx="4556455" cy="662940"/>
-          </a:xfrm>
-          <a:prstGeom prst="rect">
-            <a:avLst/>
-          </a:prstGeom>
-          <a:noFill/>
-        </p:spPr>
-        <p:txBody>
-          <a:bodyPr wrap="none" lIns="0" rIns="0" tIns="0" bIns="0" anchor="t">
-            <a:spAutoFit/>
-          </a:bodyPr>
-          <a:lstStyle/>
-          <a:p>
-            <a:pPr algn="l">
-              <a:lnSpc>
-                <a:spcPct val="100000"/>
-              </a:lnSpc>
-            </a:pPr>
-            <a:r>
-              <a:rPr sz="1800" b="0">
-                <a:solidFill>
-                  <a:srgbClr val="475569"/>
-                </a:solidFill>
-                <a:latin typeface="Noto Sans JP"/>
-                <a:ea typeface="Noto Sans JP"/>
-                <a:cs typeface="Noto Sans JP"/>
-              </a:rPr>
-              <a:t>体質・年代・性別のほかに、</a:t>
-            </a:r>
-          </a:p>
-          <a:p>
-            <a:pPr algn="l">
-              <a:lnSpc>
-                <a:spcPct val="100000"/>
-              </a:lnSpc>
-            </a:pPr>
-            <a:r>
-              <a:rPr sz="1800" b="0">
-                <a:solidFill>
-                  <a:srgbClr val="475569"/>
-                </a:solidFill>
-                <a:latin typeface="Noto Sans JP"/>
-                <a:ea typeface="Noto Sans JP"/>
-                <a:cs typeface="Noto Sans JP"/>
-              </a:rPr>
-              <a:t>朝は手早く済ませたい、といった悩みも</a:t>
-            </a:r>
-          </a:p>
-        </p:txBody>
-      </p:sp>
-      <p:sp>
-        <p:nvSpPr>
-          <p:cNvPr id="25" name="Rounded Rectangle 24"/>
+          <p:cNvPr id="17" name="Rounded Rectangle 16"/>
           <p:cNvSpPr/>
           <p:nvPr/>
         </p:nvSpPr>
@@ -11185,7 +10729,7 @@
       </p:sp>
       <p:sp>
         <p:nvSpPr>
-          <p:cNvPr id="26" name="TextBox 25"/>
+          <p:cNvPr id="18" name="TextBox 17"/>
           <p:cNvSpPr txBox="1"/>
           <p:nvPr/>
         </p:nvSpPr>
@@ -11226,7 +10770,7 @@
       </p:sp>
       <p:sp>
         <p:nvSpPr>
-          <p:cNvPr id="27" name="TextBox 26"/>
+          <p:cNvPr id="19" name="TextBox 18"/>
           <p:cNvSpPr txBox="1"/>
           <p:nvPr/>
         </p:nvSpPr>
@@ -11267,7 +10811,7 @@
       </p:sp>
       <p:sp>
         <p:nvSpPr>
-          <p:cNvPr id="28" name="TextBox 27"/>
+          <p:cNvPr id="20" name="TextBox 19"/>
           <p:cNvSpPr txBox="1"/>
           <p:nvPr/>
         </p:nvSpPr>
@@ -11308,51 +10852,7 @@
       </p:sp>
       <p:sp>
         <p:nvSpPr>
-          <p:cNvPr id="29" name="Rectangle 28"/>
-          <p:cNvSpPr/>
-          <p:nvPr/>
-        </p:nvSpPr>
-        <p:spPr>
-          <a:xfrm>
-            <a:off x="6675120" y="4727448"/>
-            <a:ext cx="45720" cy="1778508"/>
-          </a:xfrm>
-          <a:prstGeom prst="rect">
-            <a:avLst/>
-          </a:prstGeom>
-          <a:solidFill>
-            <a:srgbClr val="C9D0DB"/>
-          </a:solidFill>
-          <a:ln>
-            <a:noFill/>
-          </a:ln>
-          <a:effectLst/>
-        </p:spPr>
-        <p:style>
-          <a:lnRef idx="1">
-            <a:schemeClr val="accent1"/>
-          </a:lnRef>
-          <a:fillRef idx="3">
-            <a:schemeClr val="accent1"/>
-          </a:fillRef>
-          <a:effectRef idx="2">
-            <a:schemeClr val="accent1"/>
-          </a:effectRef>
-          <a:fontRef idx="minor">
-            <a:schemeClr val="lt1"/>
-          </a:fontRef>
-        </p:style>
-        <p:txBody>
-          <a:bodyPr rtlCol="0" anchor="ctr" lIns="0" rIns="0" tIns="0" bIns="0"/>
-          <a:lstStyle/>
-          <a:p>
-            <a:pPr algn="ctr"/>
-          </a:p>
-        </p:txBody>
-      </p:sp>
-      <p:sp>
-        <p:nvSpPr>
-          <p:cNvPr id="30" name="TextBox 29"/>
+          <p:cNvPr id="21" name="TextBox 20"/>
           <p:cNvSpPr txBox="1"/>
           <p:nvPr/>
         </p:nvSpPr>
@@ -11393,7 +10893,7 @@
       </p:sp>
       <p:sp>
         <p:nvSpPr>
-          <p:cNvPr id="31" name="TextBox 30"/>
+          <p:cNvPr id="22" name="TextBox 21"/>
           <p:cNvSpPr txBox="1"/>
           <p:nvPr/>
         </p:nvSpPr>
@@ -11434,7 +10934,7 @@
       </p:sp>
       <p:sp>
         <p:nvSpPr>
-          <p:cNvPr id="32" name="TextBox 31"/>
+          <p:cNvPr id="23" name="TextBox 22"/>
           <p:cNvSpPr txBox="1"/>
           <p:nvPr/>
         </p:nvSpPr>
@@ -11475,7 +10975,7 @@
       </p:sp>
       <p:sp>
         <p:nvSpPr>
-          <p:cNvPr id="33" name="TextBox 32"/>
+          <p:cNvPr id="24" name="TextBox 23"/>
           <p:cNvSpPr txBox="1"/>
           <p:nvPr/>
         </p:nvSpPr>

--- a/docs/ピッチ/Overlai_本選ピッチ.pptx
+++ b/docs/ピッチ/Overlai_本選ピッチ.pptx
@@ -9258,7 +9258,7 @@
                 <a:ea typeface="Noto Sans JP"/>
                 <a:cs typeface="Noto Sans JP"/>
               </a:rPr>
-              <a:t>自分の体質も登録できる</a:t>
+              <a:t>自分だけの薬データベースができる</a:t>
             </a:r>
           </a:p>
         </p:txBody>
@@ -9299,7 +9299,7 @@
                 <a:ea typeface="Noto Sans JP"/>
                 <a:cs typeface="Noto Sans JP"/>
               </a:rPr>
-              <a:t>肌質や年代、悩みを登録すると、</a:t>
+              <a:t>薬の成分がわかるだけでなく、</a:t>
             </a:r>
           </a:p>
           <a:p>
@@ -9317,7 +9317,7 @@
                 <a:ea typeface="Noto Sans JP"/>
                 <a:cs typeface="Noto Sans JP"/>
               </a:rPr>
-              <a:t>使い方の助言がパーソナライズされる</a:t>
+              <a:t>残りの量も管理できる</a:t>
             </a:r>
           </a:p>
         </p:txBody>
@@ -10124,7 +10124,51 @@
       </p:sp>
       <p:sp>
         <p:nvSpPr>
-          <p:cNvPr id="5" name="Rounded Rectangle 4"/>
+          <p:cNvPr id="5" name="Rectangle 4"/>
+          <p:cNvSpPr/>
+          <p:nvPr/>
+        </p:nvSpPr>
+        <p:spPr>
+          <a:xfrm>
+            <a:off x="6675120" y="1874519"/>
+            <a:ext cx="45720" cy="1147571"/>
+          </a:xfrm>
+          <a:prstGeom prst="rect">
+            <a:avLst/>
+          </a:prstGeom>
+          <a:solidFill>
+            <a:srgbClr val="C9D0DB"/>
+          </a:solidFill>
+          <a:ln>
+            <a:noFill/>
+          </a:ln>
+          <a:effectLst/>
+        </p:spPr>
+        <p:style>
+          <a:lnRef idx="1">
+            <a:schemeClr val="accent1"/>
+          </a:lnRef>
+          <a:fillRef idx="3">
+            <a:schemeClr val="accent1"/>
+          </a:fillRef>
+          <a:effectRef idx="2">
+            <a:schemeClr val="accent1"/>
+          </a:effectRef>
+          <a:fontRef idx="minor">
+            <a:schemeClr val="lt1"/>
+          </a:fontRef>
+        </p:style>
+        <p:txBody>
+          <a:bodyPr rtlCol="0" anchor="ctr" lIns="0" rIns="0" tIns="0" bIns="0"/>
+          <a:lstStyle/>
+          <a:p>
+            <a:pPr algn="ctr"/>
+          </a:p>
+        </p:txBody>
+      </p:sp>
+      <p:sp>
+        <p:nvSpPr>
+          <p:cNvPr id="6" name="Rounded Rectangle 5"/>
           <p:cNvSpPr/>
           <p:nvPr/>
         </p:nvSpPr>
@@ -10181,7 +10225,7 @@
       </p:sp>
       <p:sp>
         <p:nvSpPr>
-          <p:cNvPr id="6" name="TextBox 5"/>
+          <p:cNvPr id="7" name="TextBox 6"/>
           <p:cNvSpPr txBox="1"/>
           <p:nvPr/>
         </p:nvSpPr>
@@ -10222,7 +10266,7 @@
       </p:sp>
       <p:sp>
         <p:nvSpPr>
-          <p:cNvPr id="7" name="TextBox 6"/>
+          <p:cNvPr id="8" name="TextBox 7"/>
           <p:cNvSpPr txBox="1"/>
           <p:nvPr/>
         </p:nvSpPr>
@@ -10263,7 +10307,7 @@
       </p:sp>
       <p:sp>
         <p:nvSpPr>
-          <p:cNvPr id="8" name="TextBox 7"/>
+          <p:cNvPr id="9" name="TextBox 8"/>
           <p:cNvSpPr txBox="1"/>
           <p:nvPr/>
         </p:nvSpPr>
@@ -10304,51 +10348,107 @@
       </p:sp>
       <p:sp>
         <p:nvSpPr>
-          <p:cNvPr id="9" name="Rectangle 8"/>
-          <p:cNvSpPr/>
-          <p:nvPr/>
-        </p:nvSpPr>
-        <p:spPr>
-          <a:xfrm>
-            <a:off x="6675120" y="3300984"/>
-            <a:ext cx="45720" cy="1147572"/>
-          </a:xfrm>
-          <a:prstGeom prst="rect">
-            <a:avLst/>
-          </a:prstGeom>
-          <a:solidFill>
-            <a:srgbClr val="C9D0DB"/>
-          </a:solidFill>
-          <a:ln>
-            <a:noFill/>
-          </a:ln>
-          <a:effectLst/>
-        </p:spPr>
-        <p:style>
-          <a:lnRef idx="1">
-            <a:schemeClr val="accent1"/>
-          </a:lnRef>
-          <a:fillRef idx="3">
-            <a:schemeClr val="accent1"/>
-          </a:fillRef>
-          <a:effectRef idx="2">
-            <a:schemeClr val="accent1"/>
-          </a:effectRef>
-          <a:fontRef idx="minor">
-            <a:schemeClr val="lt1"/>
-          </a:fontRef>
-        </p:style>
-        <p:txBody>
-          <a:bodyPr rtlCol="0" anchor="ctr" lIns="0" rIns="0" tIns="0" bIns="0"/>
-          <a:lstStyle/>
-          <a:p>
-            <a:pPr algn="ctr"/>
-          </a:p>
-        </p:txBody>
-      </p:sp>
-      <p:sp>
-        <p:nvSpPr>
-          <p:cNvPr id="10" name="Rounded Rectangle 9"/>
+          <p:cNvPr id="10" name="TextBox 9"/>
+          <p:cNvSpPr txBox="1"/>
+          <p:nvPr/>
+        </p:nvSpPr>
+        <p:spPr>
+          <a:xfrm>
+            <a:off x="6949440" y="1837943"/>
+            <a:ext cx="4556455" cy="405130"/>
+          </a:xfrm>
+          <a:prstGeom prst="rect">
+            <a:avLst/>
+          </a:prstGeom>
+          <a:noFill/>
+        </p:spPr>
+        <p:txBody>
+          <a:bodyPr wrap="none" lIns="0" rIns="0" tIns="0" bIns="0" anchor="t">
+            <a:spAutoFit/>
+          </a:bodyPr>
+          <a:lstStyle/>
+          <a:p>
+            <a:pPr algn="l">
+              <a:lnSpc>
+                <a:spcPct val="100000"/>
+              </a:lnSpc>
+            </a:pPr>
+            <a:r>
+              <a:rPr sz="2200" b="1">
+                <a:solidFill>
+                  <a:srgbClr val="0F172A"/>
+                </a:solidFill>
+                <a:latin typeface="Noto Sans JP"/>
+                <a:ea typeface="Noto Sans JP"/>
+                <a:cs typeface="Noto Sans JP"/>
+              </a:rPr>
+              <a:t>悩みまで入れて、パーソナライズ</a:t>
+            </a:r>
+          </a:p>
+        </p:txBody>
+      </p:sp>
+      <p:sp>
+        <p:nvSpPr>
+          <p:cNvPr id="11" name="TextBox 10"/>
+          <p:cNvSpPr txBox="1"/>
+          <p:nvPr/>
+        </p:nvSpPr>
+        <p:spPr>
+          <a:xfrm>
+            <a:off x="6949440" y="2267712"/>
+            <a:ext cx="4556455" cy="662940"/>
+          </a:xfrm>
+          <a:prstGeom prst="rect">
+            <a:avLst/>
+          </a:prstGeom>
+          <a:noFill/>
+        </p:spPr>
+        <p:txBody>
+          <a:bodyPr wrap="none" lIns="0" rIns="0" tIns="0" bIns="0" anchor="t">
+            <a:spAutoFit/>
+          </a:bodyPr>
+          <a:lstStyle/>
+          <a:p>
+            <a:pPr algn="l">
+              <a:lnSpc>
+                <a:spcPct val="100000"/>
+              </a:lnSpc>
+            </a:pPr>
+            <a:r>
+              <a:rPr sz="1800" b="0">
+                <a:solidFill>
+                  <a:srgbClr val="475569"/>
+                </a:solidFill>
+                <a:latin typeface="Noto Sans JP"/>
+                <a:ea typeface="Noto Sans JP"/>
+                <a:cs typeface="Noto Sans JP"/>
+              </a:rPr>
+              <a:t>体質・年代・性別のほかに、</a:t>
+            </a:r>
+          </a:p>
+          <a:p>
+            <a:pPr algn="l">
+              <a:lnSpc>
+                <a:spcPct val="100000"/>
+              </a:lnSpc>
+            </a:pPr>
+            <a:r>
+              <a:rPr sz="1800" b="0">
+                <a:solidFill>
+                  <a:srgbClr val="475569"/>
+                </a:solidFill>
+                <a:latin typeface="Noto Sans JP"/>
+                <a:ea typeface="Noto Sans JP"/>
+                <a:cs typeface="Noto Sans JP"/>
+              </a:rPr>
+              <a:t>朝は手早く済ませたい、といった悩みも</a:t>
+            </a:r>
+          </a:p>
+        </p:txBody>
+      </p:sp>
+      <p:sp>
+        <p:nvSpPr>
+          <p:cNvPr id="12" name="Rounded Rectangle 11"/>
           <p:cNvSpPr/>
           <p:nvPr/>
         </p:nvSpPr>
@@ -10405,7 +10505,7 @@
       </p:sp>
       <p:sp>
         <p:nvSpPr>
-          <p:cNvPr id="11" name="TextBox 10"/>
+          <p:cNvPr id="13" name="TextBox 12"/>
           <p:cNvSpPr txBox="1"/>
           <p:nvPr/>
         </p:nvSpPr>
@@ -10446,7 +10546,7 @@
       </p:sp>
       <p:sp>
         <p:nvSpPr>
-          <p:cNvPr id="12" name="TextBox 11"/>
+          <p:cNvPr id="14" name="TextBox 13"/>
           <p:cNvSpPr txBox="1"/>
           <p:nvPr/>
         </p:nvSpPr>
@@ -10487,7 +10587,7 @@
       </p:sp>
       <p:sp>
         <p:nvSpPr>
-          <p:cNvPr id="13" name="TextBox 12"/>
+          <p:cNvPr id="15" name="TextBox 14"/>
           <p:cNvSpPr txBox="1"/>
           <p:nvPr/>
         </p:nvSpPr>
@@ -10522,106 +10622,6 @@
                 <a:cs typeface="Noto Sans JP"/>
               </a:rPr>
               <a:t>順番は剤形で決め、助言はAIが書く</a:t>
-            </a:r>
-          </a:p>
-        </p:txBody>
-      </p:sp>
-      <p:sp>
-        <p:nvSpPr>
-          <p:cNvPr id="14" name="TextBox 13"/>
-          <p:cNvSpPr txBox="1"/>
-          <p:nvPr/>
-        </p:nvSpPr>
-        <p:spPr>
-          <a:xfrm>
-            <a:off x="6949440" y="3264408"/>
-            <a:ext cx="4556455" cy="405130"/>
-          </a:xfrm>
-          <a:prstGeom prst="rect">
-            <a:avLst/>
-          </a:prstGeom>
-          <a:noFill/>
-        </p:spPr>
-        <p:txBody>
-          <a:bodyPr wrap="none" lIns="0" rIns="0" tIns="0" bIns="0" anchor="t">
-            <a:spAutoFit/>
-          </a:bodyPr>
-          <a:lstStyle/>
-          <a:p>
-            <a:pPr algn="l">
-              <a:lnSpc>
-                <a:spcPct val="100000"/>
-              </a:lnSpc>
-            </a:pPr>
-            <a:r>
-              <a:rPr sz="2200" b="1">
-                <a:solidFill>
-                  <a:srgbClr val="0F172A"/>
-                </a:solidFill>
-                <a:latin typeface="Noto Sans JP"/>
-                <a:ea typeface="Noto Sans JP"/>
-                <a:cs typeface="Noto Sans JP"/>
-              </a:rPr>
-              <a:t>悩みまで入れて、パーソナライズ</a:t>
-            </a:r>
-          </a:p>
-        </p:txBody>
-      </p:sp>
-      <p:sp>
-        <p:nvSpPr>
-          <p:cNvPr id="15" name="TextBox 14"/>
-          <p:cNvSpPr txBox="1"/>
-          <p:nvPr/>
-        </p:nvSpPr>
-        <p:spPr>
-          <a:xfrm>
-            <a:off x="6949440" y="3694176"/>
-            <a:ext cx="4556455" cy="662940"/>
-          </a:xfrm>
-          <a:prstGeom prst="rect">
-            <a:avLst/>
-          </a:prstGeom>
-          <a:noFill/>
-        </p:spPr>
-        <p:txBody>
-          <a:bodyPr wrap="none" lIns="0" rIns="0" tIns="0" bIns="0" anchor="t">
-            <a:spAutoFit/>
-          </a:bodyPr>
-          <a:lstStyle/>
-          <a:p>
-            <a:pPr algn="l">
-              <a:lnSpc>
-                <a:spcPct val="100000"/>
-              </a:lnSpc>
-            </a:pPr>
-            <a:r>
-              <a:rPr sz="1800" b="0">
-                <a:solidFill>
-                  <a:srgbClr val="475569"/>
-                </a:solidFill>
-                <a:latin typeface="Noto Sans JP"/>
-                <a:ea typeface="Noto Sans JP"/>
-                <a:cs typeface="Noto Sans JP"/>
-              </a:rPr>
-              <a:t>体質・年代・性別のほかに、</a:t>
-            </a:r>
-          </a:p>
-          <a:p>
-            <a:pPr algn="l">
-              <a:lnSpc>
-                <a:spcPct val="100000"/>
-              </a:lnSpc>
-            </a:pPr>
-            <a:r>
-              <a:rPr sz="1800" b="0">
-                <a:solidFill>
-                  <a:srgbClr val="475569"/>
-                </a:solidFill>
-                <a:latin typeface="Noto Sans JP"/>
-                <a:ea typeface="Noto Sans JP"/>
-                <a:cs typeface="Noto Sans JP"/>
-              </a:rPr>
-              <a:t>朝は手早く済ませたい、といった悩みも</a:t>
             </a:r>
           </a:p>
         </p:txBody>

--- a/docs/ピッチ/Overlai_本選ピッチ.pptx
+++ b/docs/ピッチ/Overlai_本選ピッチ.pptx
@@ -9044,7 +9044,48 @@
       </p:sp>
       <p:sp>
         <p:nvSpPr>
-          <p:cNvPr id="6" name="Rounded Rectangle 5"/>
+          <p:cNvPr id="6" name="TextBox 5"/>
+          <p:cNvSpPr txBox="1"/>
+          <p:nvPr/>
+        </p:nvSpPr>
+        <p:spPr>
+          <a:xfrm>
+            <a:off x="1417320" y="2715768"/>
+            <a:ext cx="5074920" cy="313055"/>
+          </a:xfrm>
+          <a:prstGeom prst="rect">
+            <a:avLst/>
+          </a:prstGeom>
+          <a:noFill/>
+        </p:spPr>
+        <p:txBody>
+          <a:bodyPr wrap="none" lIns="0" rIns="0" tIns="0" bIns="0" anchor="t">
+            <a:spAutoFit/>
+          </a:bodyPr>
+          <a:lstStyle/>
+          <a:p>
+            <a:pPr algn="l">
+              <a:lnSpc>
+                <a:spcPct val="100000"/>
+              </a:lnSpc>
+            </a:pPr>
+            <a:r>
+              <a:rPr sz="1700" b="0">
+                <a:solidFill>
+                  <a:srgbClr val="475569"/>
+                </a:solidFill>
+                <a:latin typeface="Noto Sans JP"/>
+                <a:ea typeface="Noto Sans JP"/>
+                <a:cs typeface="Noto Sans JP"/>
+              </a:rPr>
+              <a:t>AIが成分表示を読み取る</a:t>
+            </a:r>
+          </a:p>
+        </p:txBody>
+      </p:sp>
+      <p:sp>
+        <p:nvSpPr>
+          <p:cNvPr id="7" name="Rounded Rectangle 6"/>
           <p:cNvSpPr/>
           <p:nvPr/>
         </p:nvSpPr>
@@ -9101,7 +9142,7 @@
       </p:sp>
       <p:sp>
         <p:nvSpPr>
-          <p:cNvPr id="7" name="TextBox 6"/>
+          <p:cNvPr id="8" name="TextBox 7"/>
           <p:cNvSpPr txBox="1"/>
           <p:nvPr/>
         </p:nvSpPr>
@@ -9142,7 +9183,7 @@
       </p:sp>
       <p:sp>
         <p:nvSpPr>
-          <p:cNvPr id="8" name="TextBox 7"/>
+          <p:cNvPr id="9" name="TextBox 8"/>
           <p:cNvSpPr txBox="1"/>
           <p:nvPr/>
         </p:nvSpPr>
@@ -9177,47 +9218,6 @@
                 <a:cs typeface="Noto Sans JP"/>
               </a:rPr>
               <a:t>薬・化粧品を撮って登録</a:t>
-            </a:r>
-          </a:p>
-        </p:txBody>
-      </p:sp>
-      <p:sp>
-        <p:nvSpPr>
-          <p:cNvPr id="9" name="TextBox 8"/>
-          <p:cNvSpPr txBox="1"/>
-          <p:nvPr/>
-        </p:nvSpPr>
-        <p:spPr>
-          <a:xfrm>
-            <a:off x="1417320" y="2715768"/>
-            <a:ext cx="5074920" cy="313055"/>
-          </a:xfrm>
-          <a:prstGeom prst="rect">
-            <a:avLst/>
-          </a:prstGeom>
-          <a:noFill/>
-        </p:spPr>
-        <p:txBody>
-          <a:bodyPr wrap="none" lIns="0" rIns="0" tIns="0" bIns="0" anchor="t">
-            <a:spAutoFit/>
-          </a:bodyPr>
-          <a:lstStyle/>
-          <a:p>
-            <a:pPr algn="l">
-              <a:lnSpc>
-                <a:spcPct val="100000"/>
-              </a:lnSpc>
-            </a:pPr>
-            <a:r>
-              <a:rPr sz="1700" b="0">
-                <a:solidFill>
-                  <a:srgbClr val="475569"/>
-                </a:solidFill>
-                <a:latin typeface="Noto Sans JP"/>
-                <a:ea typeface="Noto Sans JP"/>
-                <a:cs typeface="Noto Sans JP"/>
-              </a:rPr>
-              <a:t>AIが成分表示を読み取る</a:t>
             </a:r>
           </a:p>
         </p:txBody>
@@ -9368,7 +9368,48 @@
       </p:sp>
       <p:sp>
         <p:nvSpPr>
-          <p:cNvPr id="13" name="Rounded Rectangle 12"/>
+          <p:cNvPr id="13" name="TextBox 12"/>
+          <p:cNvSpPr txBox="1"/>
+          <p:nvPr/>
+        </p:nvSpPr>
+        <p:spPr>
+          <a:xfrm>
+            <a:off x="1417320" y="4270248"/>
+            <a:ext cx="5074920" cy="313055"/>
+          </a:xfrm>
+          <a:prstGeom prst="rect">
+            <a:avLst/>
+          </a:prstGeom>
+          <a:noFill/>
+        </p:spPr>
+        <p:txBody>
+          <a:bodyPr wrap="none" lIns="0" rIns="0" tIns="0" bIns="0" anchor="t">
+            <a:spAutoFit/>
+          </a:bodyPr>
+          <a:lstStyle/>
+          <a:p>
+            <a:pPr algn="l">
+              <a:lnSpc>
+                <a:spcPct val="100000"/>
+              </a:lnSpc>
+            </a:pPr>
+            <a:r>
+              <a:rPr sz="1700" b="0">
+                <a:solidFill>
+                  <a:srgbClr val="475569"/>
+                </a:solidFill>
+                <a:latin typeface="Noto Sans JP"/>
+                <a:ea typeface="Noto Sans JP"/>
+                <a:cs typeface="Noto Sans JP"/>
+              </a:rPr>
+              <a:t>AIが家のものと照らし合わせる</a:t>
+            </a:r>
+          </a:p>
+        </p:txBody>
+      </p:sp>
+      <p:sp>
+        <p:nvSpPr>
+          <p:cNvPr id="14" name="Rounded Rectangle 13"/>
           <p:cNvSpPr/>
           <p:nvPr/>
         </p:nvSpPr>
@@ -9425,7 +9466,7 @@
       </p:sp>
       <p:sp>
         <p:nvSpPr>
-          <p:cNvPr id="14" name="TextBox 13"/>
+          <p:cNvPr id="15" name="TextBox 14"/>
           <p:cNvSpPr txBox="1"/>
           <p:nvPr/>
         </p:nvSpPr>
@@ -9466,7 +9507,7 @@
       </p:sp>
       <p:sp>
         <p:nvSpPr>
-          <p:cNvPr id="15" name="TextBox 14"/>
+          <p:cNvPr id="16" name="TextBox 15"/>
           <p:cNvSpPr txBox="1"/>
           <p:nvPr/>
         </p:nvSpPr>
@@ -9501,47 +9542,6 @@
                 <a:cs typeface="Noto Sans JP"/>
               </a:rPr>
               <a:t>気になる商品を撮る</a:t>
-            </a:r>
-          </a:p>
-        </p:txBody>
-      </p:sp>
-      <p:sp>
-        <p:nvSpPr>
-          <p:cNvPr id="16" name="TextBox 15"/>
-          <p:cNvSpPr txBox="1"/>
-          <p:nvPr/>
-        </p:nvSpPr>
-        <p:spPr>
-          <a:xfrm>
-            <a:off x="1417320" y="4270248"/>
-            <a:ext cx="5074920" cy="313055"/>
-          </a:xfrm>
-          <a:prstGeom prst="rect">
-            <a:avLst/>
-          </a:prstGeom>
-          <a:noFill/>
-        </p:spPr>
-        <p:txBody>
-          <a:bodyPr wrap="none" lIns="0" rIns="0" tIns="0" bIns="0" anchor="t">
-            <a:spAutoFit/>
-          </a:bodyPr>
-          <a:lstStyle/>
-          <a:p>
-            <a:pPr algn="l">
-              <a:lnSpc>
-                <a:spcPct val="100000"/>
-              </a:lnSpc>
-            </a:pPr>
-            <a:r>
-              <a:rPr sz="1700" b="0">
-                <a:solidFill>
-                  <a:srgbClr val="475569"/>
-                </a:solidFill>
-                <a:latin typeface="Noto Sans JP"/>
-                <a:ea typeface="Noto Sans JP"/>
-                <a:cs typeface="Noto Sans JP"/>
-              </a:rPr>
-              <a:t>AIが家のものと照らし合わせる</a:t>
             </a:r>
           </a:p>
         </p:txBody>
@@ -9692,7 +9692,48 @@
       </p:sp>
       <p:sp>
         <p:nvSpPr>
-          <p:cNvPr id="20" name="Rounded Rectangle 19"/>
+          <p:cNvPr id="20" name="TextBox 19"/>
+          <p:cNvSpPr txBox="1"/>
+          <p:nvPr/>
+        </p:nvSpPr>
+        <p:spPr>
+          <a:xfrm>
+            <a:off x="1417320" y="5824727"/>
+            <a:ext cx="5074920" cy="313055"/>
+          </a:xfrm>
+          <a:prstGeom prst="rect">
+            <a:avLst/>
+          </a:prstGeom>
+          <a:noFill/>
+        </p:spPr>
+        <p:txBody>
+          <a:bodyPr wrap="none" lIns="0" rIns="0" tIns="0" bIns="0" anchor="t">
+            <a:spAutoFit/>
+          </a:bodyPr>
+          <a:lstStyle/>
+          <a:p>
+            <a:pPr algn="l">
+              <a:lnSpc>
+                <a:spcPct val="100000"/>
+              </a:lnSpc>
+            </a:pPr>
+            <a:r>
+              <a:rPr sz="1700" b="0">
+                <a:solidFill>
+                  <a:srgbClr val="475569"/>
+                </a:solidFill>
+                <a:latin typeface="Noto Sans JP"/>
+                <a:ea typeface="Noto Sans JP"/>
+                <a:cs typeface="Noto Sans JP"/>
+              </a:rPr>
+              <a:t>3色の判定と、成分名つきの理由</a:t>
+            </a:r>
+          </a:p>
+        </p:txBody>
+      </p:sp>
+      <p:sp>
+        <p:nvSpPr>
+          <p:cNvPr id="21" name="Rounded Rectangle 20"/>
           <p:cNvSpPr/>
           <p:nvPr/>
         </p:nvSpPr>
@@ -9749,7 +9790,7 @@
       </p:sp>
       <p:sp>
         <p:nvSpPr>
-          <p:cNvPr id="21" name="TextBox 20"/>
+          <p:cNvPr id="22" name="TextBox 21"/>
           <p:cNvSpPr txBox="1"/>
           <p:nvPr/>
         </p:nvSpPr>
@@ -9790,7 +9831,7 @@
       </p:sp>
       <p:sp>
         <p:nvSpPr>
-          <p:cNvPr id="22" name="TextBox 21"/>
+          <p:cNvPr id="23" name="TextBox 22"/>
           <p:cNvSpPr txBox="1"/>
           <p:nvPr/>
         </p:nvSpPr>
@@ -9825,47 +9866,6 @@
                 <a:cs typeface="Noto Sans JP"/>
               </a:rPr>
               <a:t>買うべきかの目安が出る</a:t>
-            </a:r>
-          </a:p>
-        </p:txBody>
-      </p:sp>
-      <p:sp>
-        <p:nvSpPr>
-          <p:cNvPr id="23" name="TextBox 22"/>
-          <p:cNvSpPr txBox="1"/>
-          <p:nvPr/>
-        </p:nvSpPr>
-        <p:spPr>
-          <a:xfrm>
-            <a:off x="1417320" y="5824727"/>
-            <a:ext cx="5074920" cy="313055"/>
-          </a:xfrm>
-          <a:prstGeom prst="rect">
-            <a:avLst/>
-          </a:prstGeom>
-          <a:noFill/>
-        </p:spPr>
-        <p:txBody>
-          <a:bodyPr wrap="none" lIns="0" rIns="0" tIns="0" bIns="0" anchor="t">
-            <a:spAutoFit/>
-          </a:bodyPr>
-          <a:lstStyle/>
-          <a:p>
-            <a:pPr algn="l">
-              <a:lnSpc>
-                <a:spcPct val="100000"/>
-              </a:lnSpc>
-            </a:pPr>
-            <a:r>
-              <a:rPr sz="1700" b="0">
-                <a:solidFill>
-                  <a:srgbClr val="475569"/>
-                </a:solidFill>
-                <a:latin typeface="Noto Sans JP"/>
-                <a:ea typeface="Noto Sans JP"/>
-                <a:cs typeface="Noto Sans JP"/>
-              </a:rPr>
-              <a:t>3色の判定と、成分名つきの理由</a:t>
             </a:r>
           </a:p>
         </p:txBody>
@@ -10087,7 +10087,7 @@
         <p:spPr>
           <a:xfrm>
             <a:off x="902970" y="2029967"/>
-            <a:ext cx="22860" cy="2852928"/>
+            <a:ext cx="22860" cy="3108959"/>
           </a:xfrm>
           <a:prstGeom prst="rect">
             <a:avLst/>
@@ -10168,7 +10168,48 @@
       </p:sp>
       <p:sp>
         <p:nvSpPr>
-          <p:cNvPr id="6" name="Rounded Rectangle 5"/>
+          <p:cNvPr id="6" name="TextBox 5"/>
+          <p:cNvSpPr txBox="1"/>
+          <p:nvPr/>
+        </p:nvSpPr>
+        <p:spPr>
+          <a:xfrm>
+            <a:off x="1417320" y="2715768"/>
+            <a:ext cx="5074920" cy="313055"/>
+          </a:xfrm>
+          <a:prstGeom prst="rect">
+            <a:avLst/>
+          </a:prstGeom>
+          <a:noFill/>
+        </p:spPr>
+        <p:txBody>
+          <a:bodyPr wrap="none" lIns="0" rIns="0" tIns="0" bIns="0" anchor="t">
+            <a:spAutoFit/>
+          </a:bodyPr>
+          <a:lstStyle/>
+          <a:p>
+            <a:pPr algn="l">
+              <a:lnSpc>
+                <a:spcPct val="100000"/>
+              </a:lnSpc>
+            </a:pPr>
+            <a:r>
+              <a:rPr sz="1700" b="0">
+                <a:solidFill>
+                  <a:srgbClr val="475569"/>
+                </a:solidFill>
+                <a:latin typeface="Noto Sans JP"/>
+                <a:ea typeface="Noto Sans JP"/>
+                <a:cs typeface="Noto Sans JP"/>
+              </a:rPr>
+              <a:t>薬・化粧品は撮るだけ、体質は設定から</a:t>
+            </a:r>
+          </a:p>
+        </p:txBody>
+      </p:sp>
+      <p:sp>
+        <p:nvSpPr>
+          <p:cNvPr id="7" name="Rounded Rectangle 6"/>
           <p:cNvSpPr/>
           <p:nvPr/>
         </p:nvSpPr>
@@ -10225,7 +10266,7 @@
       </p:sp>
       <p:sp>
         <p:nvSpPr>
-          <p:cNvPr id="7" name="TextBox 6"/>
+          <p:cNvPr id="8" name="TextBox 7"/>
           <p:cNvSpPr txBox="1"/>
           <p:nvPr/>
         </p:nvSpPr>
@@ -10266,7 +10307,7 @@
       </p:sp>
       <p:sp>
         <p:nvSpPr>
-          <p:cNvPr id="8" name="TextBox 7"/>
+          <p:cNvPr id="9" name="TextBox 8"/>
           <p:cNvSpPr txBox="1"/>
           <p:nvPr/>
         </p:nvSpPr>
@@ -10307,14 +10348,14 @@
       </p:sp>
       <p:sp>
         <p:nvSpPr>
-          <p:cNvPr id="9" name="TextBox 8"/>
+          <p:cNvPr id="10" name="TextBox 9"/>
           <p:cNvSpPr txBox="1"/>
           <p:nvPr/>
         </p:nvSpPr>
         <p:spPr>
           <a:xfrm>
-            <a:off x="1417320" y="2715768"/>
-            <a:ext cx="5074920" cy="313055"/>
+            <a:off x="6949440" y="1837943"/>
+            <a:ext cx="4556455" cy="405130"/>
           </a:xfrm>
           <a:prstGeom prst="rect">
             <a:avLst/>
@@ -10333,29 +10374,29 @@
               </a:lnSpc>
             </a:pPr>
             <a:r>
-              <a:rPr sz="1700" b="0">
-                <a:solidFill>
-                  <a:srgbClr val="475569"/>
-                </a:solidFill>
-                <a:latin typeface="Noto Sans JP"/>
-                <a:ea typeface="Noto Sans JP"/>
-                <a:cs typeface="Noto Sans JP"/>
-              </a:rPr>
-              <a:t>薬・化粧品は撮るだけ、体質は設定から</a:t>
-            </a:r>
-          </a:p>
-        </p:txBody>
-      </p:sp>
-      <p:sp>
-        <p:nvSpPr>
-          <p:cNvPr id="10" name="TextBox 9"/>
+              <a:rPr sz="2200" b="1">
+                <a:solidFill>
+                  <a:srgbClr val="0F172A"/>
+                </a:solidFill>
+                <a:latin typeface="Noto Sans JP"/>
+                <a:ea typeface="Noto Sans JP"/>
+                <a:cs typeface="Noto Sans JP"/>
+              </a:rPr>
+              <a:t>悩みまで入れて、パーソナライズ</a:t>
+            </a:r>
+          </a:p>
+        </p:txBody>
+      </p:sp>
+      <p:sp>
+        <p:nvSpPr>
+          <p:cNvPr id="11" name="TextBox 10"/>
           <p:cNvSpPr txBox="1"/>
           <p:nvPr/>
         </p:nvSpPr>
         <p:spPr>
           <a:xfrm>
-            <a:off x="6949440" y="1837943"/>
-            <a:ext cx="4556455" cy="405130"/>
+            <a:off x="6949440" y="2267712"/>
+            <a:ext cx="4556455" cy="662940"/>
           </a:xfrm>
           <a:prstGeom prst="rect">
             <a:avLst/>
@@ -10374,40 +10415,17 @@
               </a:lnSpc>
             </a:pPr>
             <a:r>
-              <a:rPr sz="2200" b="1">
-                <a:solidFill>
-                  <a:srgbClr val="0F172A"/>
-                </a:solidFill>
-                <a:latin typeface="Noto Sans JP"/>
-                <a:ea typeface="Noto Sans JP"/>
-                <a:cs typeface="Noto Sans JP"/>
-              </a:rPr>
-              <a:t>悩みまで入れて、パーソナライズ</a:t>
-            </a:r>
-          </a:p>
-        </p:txBody>
-      </p:sp>
-      <p:sp>
-        <p:nvSpPr>
-          <p:cNvPr id="11" name="TextBox 10"/>
-          <p:cNvSpPr txBox="1"/>
-          <p:nvPr/>
-        </p:nvSpPr>
-        <p:spPr>
-          <a:xfrm>
-            <a:off x="6949440" y="2267712"/>
-            <a:ext cx="4556455" cy="662940"/>
-          </a:xfrm>
-          <a:prstGeom prst="rect">
-            <a:avLst/>
-          </a:prstGeom>
-          <a:noFill/>
-        </p:spPr>
-        <p:txBody>
-          <a:bodyPr wrap="none" lIns="0" rIns="0" tIns="0" bIns="0" anchor="t">
-            <a:spAutoFit/>
-          </a:bodyPr>
-          <a:lstStyle/>
+              <a:rPr sz="1800" b="0">
+                <a:solidFill>
+                  <a:srgbClr val="475569"/>
+                </a:solidFill>
+                <a:latin typeface="Noto Sans JP"/>
+                <a:ea typeface="Noto Sans JP"/>
+                <a:cs typeface="Noto Sans JP"/>
+              </a:rPr>
+              <a:t>体質・年代・性別のほかに、</a:t>
+            </a:r>
+          </a:p>
           <a:p>
             <a:pPr algn="l">
               <a:lnSpc>
@@ -10423,24 +10441,6 @@
                 <a:ea typeface="Noto Sans JP"/>
                 <a:cs typeface="Noto Sans JP"/>
               </a:rPr>
-              <a:t>体質・年代・性別のほかに、</a:t>
-            </a:r>
-          </a:p>
-          <a:p>
-            <a:pPr algn="l">
-              <a:lnSpc>
-                <a:spcPct val="100000"/>
-              </a:lnSpc>
-            </a:pPr>
-            <a:r>
-              <a:rPr sz="1800" b="0">
-                <a:solidFill>
-                  <a:srgbClr val="475569"/>
-                </a:solidFill>
-                <a:latin typeface="Noto Sans JP"/>
-                <a:ea typeface="Noto Sans JP"/>
-                <a:cs typeface="Noto Sans JP"/>
-              </a:rPr>
               <a:t>朝は手早く済ませたい、といった悩みも</a:t>
             </a:r>
           </a:p>
@@ -10448,13 +10448,57 @@
       </p:sp>
       <p:sp>
         <p:nvSpPr>
-          <p:cNvPr id="12" name="Rounded Rectangle 11"/>
+          <p:cNvPr id="12" name="Rectangle 11"/>
           <p:cNvSpPr/>
           <p:nvPr/>
         </p:nvSpPr>
         <p:spPr>
           <a:xfrm>
-            <a:off x="685800" y="3227832"/>
+            <a:off x="6675120" y="3429000"/>
+            <a:ext cx="45720" cy="1147571"/>
+          </a:xfrm>
+          <a:prstGeom prst="rect">
+            <a:avLst/>
+          </a:prstGeom>
+          <a:solidFill>
+            <a:srgbClr val="C9D0DB"/>
+          </a:solidFill>
+          <a:ln>
+            <a:noFill/>
+          </a:ln>
+          <a:effectLst/>
+        </p:spPr>
+        <p:style>
+          <a:lnRef idx="1">
+            <a:schemeClr val="accent1"/>
+          </a:lnRef>
+          <a:fillRef idx="3">
+            <a:schemeClr val="accent1"/>
+          </a:fillRef>
+          <a:effectRef idx="2">
+            <a:schemeClr val="accent1"/>
+          </a:effectRef>
+          <a:fontRef idx="minor">
+            <a:schemeClr val="lt1"/>
+          </a:fontRef>
+        </p:style>
+        <p:txBody>
+          <a:bodyPr rtlCol="0" anchor="ctr" lIns="0" rIns="0" tIns="0" bIns="0"/>
+          <a:lstStyle/>
+          <a:p>
+            <a:pPr algn="ctr"/>
+          </a:p>
+        </p:txBody>
+      </p:sp>
+      <p:sp>
+        <p:nvSpPr>
+          <p:cNvPr id="13" name="Rounded Rectangle 12"/>
+          <p:cNvSpPr/>
+          <p:nvPr/>
+        </p:nvSpPr>
+        <p:spPr>
+          <a:xfrm>
+            <a:off x="685800" y="3355848"/>
             <a:ext cx="457200" cy="457200"/>
           </a:xfrm>
           <a:prstGeom prst="roundRect">
@@ -10505,13 +10549,13 @@
       </p:sp>
       <p:sp>
         <p:nvSpPr>
-          <p:cNvPr id="13" name="TextBox 12"/>
+          <p:cNvPr id="14" name="TextBox 13"/>
           <p:cNvSpPr txBox="1"/>
           <p:nvPr/>
         </p:nvSpPr>
         <p:spPr>
           <a:xfrm>
-            <a:off x="1417320" y="3246120"/>
+            <a:off x="1417320" y="3374136"/>
             <a:ext cx="2743200" cy="313055"/>
           </a:xfrm>
           <a:prstGeom prst="rect">
@@ -10546,13 +10590,13 @@
       </p:sp>
       <p:sp>
         <p:nvSpPr>
-          <p:cNvPr id="14" name="TextBox 13"/>
+          <p:cNvPr id="15" name="TextBox 14"/>
           <p:cNvSpPr txBox="1"/>
           <p:nvPr/>
         </p:nvSpPr>
         <p:spPr>
           <a:xfrm>
-            <a:off x="1417320" y="3621024"/>
+            <a:off x="1417320" y="3749039"/>
             <a:ext cx="5074920" cy="515620"/>
           </a:xfrm>
           <a:prstGeom prst="rect">
@@ -10587,14 +10631,14 @@
       </p:sp>
       <p:sp>
         <p:nvSpPr>
-          <p:cNvPr id="15" name="TextBox 14"/>
+          <p:cNvPr id="16" name="TextBox 15"/>
           <p:cNvSpPr txBox="1"/>
           <p:nvPr/>
         </p:nvSpPr>
         <p:spPr>
           <a:xfrm>
-            <a:off x="1417320" y="4142231"/>
-            <a:ext cx="5074920" cy="313055"/>
+            <a:off x="6949440" y="3392424"/>
+            <a:ext cx="4556455" cy="405130"/>
           </a:xfrm>
           <a:prstGeom prst="rect">
             <a:avLst/>
@@ -10613,7 +10657,48 @@
               </a:lnSpc>
             </a:pPr>
             <a:r>
-              <a:rPr sz="1700" b="0">
+              <a:rPr sz="2200" b="1">
+                <a:solidFill>
+                  <a:srgbClr val="0F172A"/>
+                </a:solidFill>
+                <a:latin typeface="Noto Sans JP"/>
+                <a:ea typeface="Noto Sans JP"/>
+                <a:cs typeface="Noto Sans JP"/>
+              </a:rPr>
+              <a:t>手順ごとに、使い方の説明が付く</a:t>
+            </a:r>
+          </a:p>
+        </p:txBody>
+      </p:sp>
+      <p:sp>
+        <p:nvSpPr>
+          <p:cNvPr id="17" name="TextBox 16"/>
+          <p:cNvSpPr txBox="1"/>
+          <p:nvPr/>
+        </p:nvSpPr>
+        <p:spPr>
+          <a:xfrm>
+            <a:off x="6949440" y="3822191"/>
+            <a:ext cx="4556455" cy="662940"/>
+          </a:xfrm>
+          <a:prstGeom prst="rect">
+            <a:avLst/>
+          </a:prstGeom>
+          <a:noFill/>
+        </p:spPr>
+        <p:txBody>
+          <a:bodyPr wrap="none" lIns="0" rIns="0" tIns="0" bIns="0" anchor="t">
+            <a:spAutoFit/>
+          </a:bodyPr>
+          <a:lstStyle/>
+          <a:p>
+            <a:pPr algn="l">
+              <a:lnSpc>
+                <a:spcPct val="100000"/>
+              </a:lnSpc>
+            </a:pPr>
+            <a:r>
+              <a:rPr sz="1800" b="0">
                 <a:solidFill>
                   <a:srgbClr val="475569"/>
                 </a:solidFill>
@@ -10621,21 +10706,39 @@
                 <a:ea typeface="Noto Sans JP"/>
                 <a:cs typeface="Noto Sans JP"/>
               </a:rPr>
-              <a:t>順番は剤形で決め、助言はAIが書く</a:t>
-            </a:r>
-          </a:p>
-        </p:txBody>
-      </p:sp>
-      <p:sp>
-        <p:nvSpPr>
-          <p:cNvPr id="16" name="Rectangle 15"/>
+              <a:t>その順番にする理由と、</a:t>
+            </a:r>
+          </a:p>
+          <a:p>
+            <a:pPr algn="l">
+              <a:lnSpc>
+                <a:spcPct val="100000"/>
+              </a:lnSpc>
+            </a:pPr>
+            <a:r>
+              <a:rPr sz="1800" b="0">
+                <a:solidFill>
+                  <a:srgbClr val="475569"/>
+                </a:solidFill>
+                <a:latin typeface="Noto Sans JP"/>
+                <a:ea typeface="Noto Sans JP"/>
+                <a:cs typeface="Noto Sans JP"/>
+              </a:rPr>
+              <a:t>使うときのコツがわかる</a:t>
+            </a:r>
+          </a:p>
+        </p:txBody>
+      </p:sp>
+      <p:sp>
+        <p:nvSpPr>
+          <p:cNvPr id="18" name="Rectangle 17"/>
           <p:cNvSpPr/>
           <p:nvPr/>
         </p:nvSpPr>
         <p:spPr>
           <a:xfrm>
-            <a:off x="6675120" y="4727448"/>
-            <a:ext cx="45720" cy="1778508"/>
+            <a:off x="6675120" y="4983479"/>
+            <a:ext cx="45720" cy="1147572"/>
           </a:xfrm>
           <a:prstGeom prst="rect">
             <a:avLst/>
@@ -10672,13 +10775,54 @@
       </p:sp>
       <p:sp>
         <p:nvSpPr>
-          <p:cNvPr id="17" name="Rounded Rectangle 16"/>
+          <p:cNvPr id="19" name="TextBox 18"/>
+          <p:cNvSpPr txBox="1"/>
+          <p:nvPr/>
+        </p:nvSpPr>
+        <p:spPr>
+          <a:xfrm>
+            <a:off x="1417320" y="5824727"/>
+            <a:ext cx="5074920" cy="313055"/>
+          </a:xfrm>
+          <a:prstGeom prst="rect">
+            <a:avLst/>
+          </a:prstGeom>
+          <a:noFill/>
+        </p:spPr>
+        <p:txBody>
+          <a:bodyPr wrap="none" lIns="0" rIns="0" tIns="0" bIns="0" anchor="t">
+            <a:spAutoFit/>
+          </a:bodyPr>
+          <a:lstStyle/>
+          <a:p>
+            <a:pPr algn="l">
+              <a:lnSpc>
+                <a:spcPct val="100000"/>
+              </a:lnSpc>
+            </a:pPr>
+            <a:r>
+              <a:rPr sz="1700" b="0">
+                <a:solidFill>
+                  <a:srgbClr val="475569"/>
+                </a:solidFill>
+                <a:latin typeface="Noto Sans JP"/>
+                <a:ea typeface="Noto Sans JP"/>
+                <a:cs typeface="Noto Sans JP"/>
+              </a:rPr>
+              <a:t>その日に使うものが、使う順に並ぶ</a:t>
+            </a:r>
+          </a:p>
+        </p:txBody>
+      </p:sp>
+      <p:sp>
+        <p:nvSpPr>
+          <p:cNvPr id="20" name="Rounded Rectangle 19"/>
           <p:cNvSpPr/>
           <p:nvPr/>
         </p:nvSpPr>
         <p:spPr>
           <a:xfrm>
-            <a:off x="685800" y="4654296"/>
+            <a:off x="685800" y="4910327"/>
             <a:ext cx="457200" cy="457200"/>
           </a:xfrm>
           <a:prstGeom prst="roundRect">
@@ -10729,13 +10873,13 @@
       </p:sp>
       <p:sp>
         <p:nvSpPr>
-          <p:cNvPr id="18" name="TextBox 17"/>
+          <p:cNvPr id="21" name="TextBox 20"/>
           <p:cNvSpPr txBox="1"/>
           <p:nvPr/>
         </p:nvSpPr>
         <p:spPr>
           <a:xfrm>
-            <a:off x="1417320" y="4672584"/>
+            <a:off x="1417320" y="4928616"/>
             <a:ext cx="2743200" cy="313055"/>
           </a:xfrm>
           <a:prstGeom prst="rect">
@@ -10770,13 +10914,13 @@
       </p:sp>
       <p:sp>
         <p:nvSpPr>
-          <p:cNvPr id="19" name="TextBox 18"/>
+          <p:cNvPr id="22" name="TextBox 21"/>
           <p:cNvSpPr txBox="1"/>
           <p:nvPr/>
         </p:nvSpPr>
         <p:spPr>
           <a:xfrm>
-            <a:off x="1417320" y="5047488"/>
+            <a:off x="1417320" y="5303520"/>
             <a:ext cx="5074920" cy="515620"/>
           </a:xfrm>
           <a:prstGeom prst="rect">
@@ -10811,14 +10955,14 @@
       </p:sp>
       <p:sp>
         <p:nvSpPr>
-          <p:cNvPr id="20" name="TextBox 19"/>
+          <p:cNvPr id="23" name="TextBox 22"/>
           <p:cNvSpPr txBox="1"/>
           <p:nvPr/>
         </p:nvSpPr>
         <p:spPr>
           <a:xfrm>
-            <a:off x="1417320" y="5568696"/>
-            <a:ext cx="5074920" cy="313055"/>
+            <a:off x="6949440" y="4946903"/>
+            <a:ext cx="4556455" cy="405130"/>
           </a:xfrm>
           <a:prstGeom prst="rect">
             <a:avLst/>
@@ -10837,29 +10981,29 @@
               </a:lnSpc>
             </a:pPr>
             <a:r>
-              <a:rPr sz="1700" b="0">
-                <a:solidFill>
-                  <a:srgbClr val="475569"/>
-                </a:solidFill>
-                <a:latin typeface="Noto Sans JP"/>
-                <a:ea typeface="Noto Sans JP"/>
-                <a:cs typeface="Noto Sans JP"/>
-              </a:rPr>
-              <a:t>その日に使うものが、使う順に並ぶ</a:t>
-            </a:r>
-          </a:p>
-        </p:txBody>
-      </p:sp>
-      <p:sp>
-        <p:nvSpPr>
-          <p:cNvPr id="21" name="TextBox 20"/>
+              <a:rPr sz="2200" b="1">
+                <a:solidFill>
+                  <a:srgbClr val="0F172A"/>
+                </a:solidFill>
+                <a:latin typeface="Noto Sans JP"/>
+                <a:ea typeface="Noto Sans JP"/>
+                <a:cs typeface="Noto Sans JP"/>
+              </a:rPr>
+              <a:t>薬を使ったかをチェックで記録</a:t>
+            </a:r>
+          </a:p>
+        </p:txBody>
+      </p:sp>
+      <p:sp>
+        <p:nvSpPr>
+          <p:cNvPr id="24" name="TextBox 23"/>
           <p:cNvSpPr txBox="1"/>
           <p:nvPr/>
         </p:nvSpPr>
         <p:spPr>
           <a:xfrm>
-            <a:off x="6949440" y="4690872"/>
-            <a:ext cx="4556455" cy="405130"/>
+            <a:off x="6949440" y="5376672"/>
+            <a:ext cx="4556455" cy="662940"/>
           </a:xfrm>
           <a:prstGeom prst="rect">
             <a:avLst/>
@@ -10878,40 +11022,17 @@
               </a:lnSpc>
             </a:pPr>
             <a:r>
-              <a:rPr sz="2200" b="1">
-                <a:solidFill>
-                  <a:srgbClr val="0F172A"/>
-                </a:solidFill>
-                <a:latin typeface="Noto Sans JP"/>
-                <a:ea typeface="Noto Sans JP"/>
-                <a:cs typeface="Noto Sans JP"/>
-              </a:rPr>
-              <a:t>薬を使ったかをチェックで記録</a:t>
-            </a:r>
-          </a:p>
-        </p:txBody>
-      </p:sp>
-      <p:sp>
-        <p:nvSpPr>
-          <p:cNvPr id="22" name="TextBox 21"/>
-          <p:cNvSpPr txBox="1"/>
-          <p:nvPr/>
-        </p:nvSpPr>
-        <p:spPr>
-          <a:xfrm>
-            <a:off x="6949440" y="5120640"/>
-            <a:ext cx="4556455" cy="331470"/>
-          </a:xfrm>
-          <a:prstGeom prst="rect">
-            <a:avLst/>
-          </a:prstGeom>
-          <a:noFill/>
-        </p:spPr>
-        <p:txBody>
-          <a:bodyPr wrap="none" lIns="0" rIns="0" tIns="0" bIns="0" anchor="t">
-            <a:spAutoFit/>
-          </a:bodyPr>
-          <a:lstStyle/>
+              <a:rPr sz="1800" b="0">
+                <a:solidFill>
+                  <a:srgbClr val="475569"/>
+                </a:solidFill>
+                <a:latin typeface="Noto Sans JP"/>
+                <a:ea typeface="Noto Sans JP"/>
+                <a:cs typeface="Noto Sans JP"/>
+              </a:rPr>
+              <a:t>朝・昼・夜ごとにチェックを付けて、</a:t>
+            </a:r>
+          </a:p>
           <a:p>
             <a:pPr algn="l">
               <a:lnSpc>
@@ -10927,89 +11048,7 @@
                 <a:ea typeface="Noto Sans JP"/>
                 <a:cs typeface="Noto Sans JP"/>
               </a:rPr>
-              <a:t>朝・昼・夜ごとに付けて、7日分を見返せる</a:t>
-            </a:r>
-          </a:p>
-        </p:txBody>
-      </p:sp>
-      <p:sp>
-        <p:nvSpPr>
-          <p:cNvPr id="23" name="TextBox 22"/>
-          <p:cNvSpPr txBox="1"/>
-          <p:nvPr/>
-        </p:nvSpPr>
-        <p:spPr>
-          <a:xfrm>
-            <a:off x="6949440" y="5653278"/>
-            <a:ext cx="4556455" cy="405130"/>
-          </a:xfrm>
-          <a:prstGeom prst="rect">
-            <a:avLst/>
-          </a:prstGeom>
-          <a:noFill/>
-        </p:spPr>
-        <p:txBody>
-          <a:bodyPr wrap="none" lIns="0" rIns="0" tIns="0" bIns="0" anchor="t">
-            <a:spAutoFit/>
-          </a:bodyPr>
-          <a:lstStyle/>
-          <a:p>
-            <a:pPr algn="l">
-              <a:lnSpc>
-                <a:spcPct val="100000"/>
-              </a:lnSpc>
-            </a:pPr>
-            <a:r>
-              <a:rPr sz="2200" b="1">
-                <a:solidFill>
-                  <a:srgbClr val="0F172A"/>
-                </a:solidFill>
-                <a:latin typeface="Noto Sans JP"/>
-                <a:ea typeface="Noto Sans JP"/>
-                <a:cs typeface="Noto Sans JP"/>
-              </a:rPr>
-              <a:t>手順ごとに、使い方の説明が付く</a:t>
-            </a:r>
-          </a:p>
-        </p:txBody>
-      </p:sp>
-      <p:sp>
-        <p:nvSpPr>
-          <p:cNvPr id="24" name="TextBox 23"/>
-          <p:cNvSpPr txBox="1"/>
-          <p:nvPr/>
-        </p:nvSpPr>
-        <p:spPr>
-          <a:xfrm>
-            <a:off x="6949440" y="6083046"/>
-            <a:ext cx="4556455" cy="331470"/>
-          </a:xfrm>
-          <a:prstGeom prst="rect">
-            <a:avLst/>
-          </a:prstGeom>
-          <a:noFill/>
-        </p:spPr>
-        <p:txBody>
-          <a:bodyPr wrap="none" lIns="0" rIns="0" tIns="0" bIns="0" anchor="t">
-            <a:spAutoFit/>
-          </a:bodyPr>
-          <a:lstStyle/>
-          <a:p>
-            <a:pPr algn="l">
-              <a:lnSpc>
-                <a:spcPct val="100000"/>
-              </a:lnSpc>
-            </a:pPr>
-            <a:r>
-              <a:rPr sz="1800" b="0">
-                <a:solidFill>
-                  <a:srgbClr val="475569"/>
-                </a:solidFill>
-                <a:latin typeface="Noto Sans JP"/>
-                <a:ea typeface="Noto Sans JP"/>
-                <a:cs typeface="Noto Sans JP"/>
-              </a:rPr>
-              <a:t>その順番の理由と、使うときのコツがわかる</a:t>
+              <a:t>7日分を見返せる</a:t>
             </a:r>
           </a:p>
         </p:txBody>

--- a/docs/ピッチ/Overlai_本選ピッチ.pptx
+++ b/docs/ピッチ/Overlai_本選ピッチ.pptx
@@ -792,7 +792,7 @@
           <a:lstStyle/>
           <a:p>
             <a:r>
-              <a:t>病院で処方された薬を使う濱田と杉本は、化粧水を前に、使っていいのか、どっちが先か迷いました。</a:t>
+              <a:t>病院で処方された薬を使う濱田と杉本は、化粧水を買うとき、使っていいのか、どっちが先か迷いました。</a:t>
             </a:r>
           </a:p>
         </p:txBody>
@@ -5939,7 +5939,7 @@
                 <a:ea typeface="Noto Sans JP"/>
                 <a:cs typeface="Noto Sans JP"/>
               </a:rPr>
-              <a:t>ある日、ドラッグストアで化粧水を手に取って、手が止まった。</a:t>
+              <a:t>化粧水を買うとき、処方された薬との相性がわからなかった。</a:t>
             </a:r>
           </a:p>
         </p:txBody>

--- a/docs/ピッチ/Overlai_本選ピッチ.pptx
+++ b/docs/ピッチ/Overlai_本選ピッチ.pptx
@@ -5939,7 +5939,7 @@
                 <a:ea typeface="Noto Sans JP"/>
                 <a:cs typeface="Noto Sans JP"/>
               </a:rPr>
-              <a:t>化粧水を買うとき、処方された薬との相性がわからなかった。</a:t>
+              <a:t>化粧水を買うとき、処方された薬との相性と使い方がわからなかった。</a:t>
             </a:r>
           </a:p>
         </p:txBody>

--- a/docs/ピッチ/Overlai_本選ピッチ.pptx
+++ b/docs/ピッチ/Overlai_本選ピッチ.pptx
@@ -792,7 +792,7 @@
           <a:lstStyle/>
           <a:p>
             <a:r>
-              <a:t>病院で処方された薬を使う濱田と杉本は、化粧水を買うとき、使っていいのか、どっちが先か迷いました。</a:t>
+              <a:t>処方薬を使う濱田と杉本は、化粧水を買うとき、使っていいのか、どっちが先か迷いました。</a:t>
             </a:r>
           </a:p>
         </p:txBody>
@@ -862,7 +862,7 @@
           <a:lstStyle/>
           <a:p>
             <a:r>
-              <a:t>そこで作ったのがOverlaiです。店で成分表示を撮るだけで、買うべきかの目安がわかります。</a:t>
+              <a:t>そこで作ったのがOverlaiです。成分表示を撮るだけで、AIが家の薬と照らし合わせ、買うべきかの目安を出します。</a:t>
             </a:r>
           </a:p>
         </p:txBody>
@@ -1212,7 +1212,7 @@
           <a:lstStyle/>
           <a:p>
             <a:r>
-              <a:t>登録した薬と体質から、毎日の使う順番と使い方も案内します。</a:t>
+              <a:t>家では、悩みに合わせた使い方のコツもAIが添えます。</a:t>
             </a:r>
           </a:p>
         </p:txBody>
@@ -5251,7 +5251,7 @@
                 <a:ea typeface="Noto Sans JP"/>
                 <a:cs typeface="Noto Sans JP"/>
               </a:rPr>
-              <a:t>店頭で撮るだけで、家の薬や化粧品と重ねて判定する。</a:t>
+              <a:t>店で撮るだけで、家の薬・化粧品と重ねて判定する。</a:t>
             </a:r>
           </a:p>
         </p:txBody>
@@ -7091,7 +7091,51 @@
       </p:sp>
       <p:sp>
         <p:nvSpPr>
-          <p:cNvPr id="10" name="Rounded Rectangle 9"/>
+          <p:cNvPr id="10" name="Rectangle 9"/>
+          <p:cNvSpPr/>
+          <p:nvPr/>
+        </p:nvSpPr>
+        <p:spPr>
+          <a:xfrm>
+            <a:off x="8444802" y="3174705"/>
+            <a:ext cx="1429512" cy="301752"/>
+          </a:xfrm>
+          <a:prstGeom prst="rect">
+            <a:avLst/>
+          </a:prstGeom>
+          <a:solidFill>
+            <a:srgbClr val="FFFFFF"/>
+          </a:solidFill>
+          <a:ln>
+            <a:noFill/>
+          </a:ln>
+          <a:effectLst/>
+        </p:spPr>
+        <p:style>
+          <a:lnRef idx="1">
+            <a:schemeClr val="accent1"/>
+          </a:lnRef>
+          <a:fillRef idx="3">
+            <a:schemeClr val="accent1"/>
+          </a:fillRef>
+          <a:effectRef idx="2">
+            <a:schemeClr val="accent1"/>
+          </a:effectRef>
+          <a:fontRef idx="minor">
+            <a:schemeClr val="lt1"/>
+          </a:fontRef>
+        </p:style>
+        <p:txBody>
+          <a:bodyPr rtlCol="0" anchor="ctr" lIns="0" rIns="0" tIns="0" bIns="0"/>
+          <a:lstStyle/>
+          <a:p>
+            <a:pPr algn="ctr"/>
+          </a:p>
+        </p:txBody>
+      </p:sp>
+      <p:sp>
+        <p:nvSpPr>
+          <p:cNvPr id="11" name="Rounded Rectangle 10"/>
           <p:cNvSpPr/>
           <p:nvPr/>
         </p:nvSpPr>
@@ -7148,7 +7192,7 @@
       </p:sp>
       <p:sp>
         <p:nvSpPr>
-          <p:cNvPr id="11" name="Rounded Rectangle 10"/>
+          <p:cNvPr id="12" name="Rounded Rectangle 11"/>
           <p:cNvSpPr/>
           <p:nvPr/>
         </p:nvSpPr>
@@ -7194,7 +7238,51 @@
       </p:sp>
       <p:sp>
         <p:nvSpPr>
-          <p:cNvPr id="12" name="Rounded Rectangle 11"/>
+          <p:cNvPr id="13" name="Rectangle 12"/>
+          <p:cNvSpPr/>
+          <p:nvPr/>
+        </p:nvSpPr>
+        <p:spPr>
+          <a:xfrm>
+            <a:off x="8401956" y="4079138"/>
+            <a:ext cx="2683923" cy="301752"/>
+          </a:xfrm>
+          <a:prstGeom prst="rect">
+            <a:avLst/>
+          </a:prstGeom>
+          <a:solidFill>
+            <a:srgbClr val="FFFFFF"/>
+          </a:solidFill>
+          <a:ln>
+            <a:noFill/>
+          </a:ln>
+          <a:effectLst/>
+        </p:spPr>
+        <p:style>
+          <a:lnRef idx="1">
+            <a:schemeClr val="accent1"/>
+          </a:lnRef>
+          <a:fillRef idx="3">
+            <a:schemeClr val="accent1"/>
+          </a:fillRef>
+          <a:effectRef idx="2">
+            <a:schemeClr val="accent1"/>
+          </a:effectRef>
+          <a:fontRef idx="minor">
+            <a:schemeClr val="lt1"/>
+          </a:fontRef>
+        </p:style>
+        <p:txBody>
+          <a:bodyPr rtlCol="0" anchor="ctr" lIns="0" rIns="0" tIns="0" bIns="0"/>
+          <a:lstStyle/>
+          <a:p>
+            <a:pPr algn="ctr"/>
+          </a:p>
+        </p:txBody>
+      </p:sp>
+      <p:sp>
+        <p:nvSpPr>
+          <p:cNvPr id="14" name="Rounded Rectangle 13"/>
           <p:cNvSpPr/>
           <p:nvPr/>
         </p:nvSpPr>
@@ -7251,7 +7339,7 @@
       </p:sp>
       <p:sp>
         <p:nvSpPr>
-          <p:cNvPr id="13" name="TextBox 12"/>
+          <p:cNvPr id="15" name="TextBox 14"/>
           <p:cNvSpPr txBox="1"/>
           <p:nvPr/>
         </p:nvSpPr>
@@ -7292,7 +7380,7 @@
       </p:sp>
       <p:sp>
         <p:nvSpPr>
-          <p:cNvPr id="14" name="Rounded Rectangle 13"/>
+          <p:cNvPr id="16" name="Rounded Rectangle 15"/>
           <p:cNvSpPr/>
           <p:nvPr/>
         </p:nvSpPr>
@@ -7338,7 +7426,7 @@
       </p:sp>
       <p:sp>
         <p:nvSpPr>
-          <p:cNvPr id="15" name="TextBox 14"/>
+          <p:cNvPr id="17" name="TextBox 16"/>
           <p:cNvSpPr txBox="1"/>
           <p:nvPr/>
         </p:nvSpPr>
@@ -7379,7 +7467,7 @@
       </p:sp>
       <p:sp>
         <p:nvSpPr>
-          <p:cNvPr id="16" name="Rounded Rectangle 15"/>
+          <p:cNvPr id="18" name="Rounded Rectangle 17"/>
           <p:cNvSpPr/>
           <p:nvPr/>
         </p:nvSpPr>
@@ -7425,7 +7513,7 @@
       </p:sp>
       <p:sp>
         <p:nvSpPr>
-          <p:cNvPr id="17" name="TextBox 16"/>
+          <p:cNvPr id="19" name="TextBox 18"/>
           <p:cNvSpPr txBox="1"/>
           <p:nvPr/>
         </p:nvSpPr>
@@ -7466,7 +7554,7 @@
       </p:sp>
       <p:sp>
         <p:nvSpPr>
-          <p:cNvPr id="18" name="Rounded Rectangle 17"/>
+          <p:cNvPr id="20" name="Rounded Rectangle 19"/>
           <p:cNvSpPr/>
           <p:nvPr/>
         </p:nvSpPr>
@@ -7512,7 +7600,7 @@
       </p:sp>
       <p:sp>
         <p:nvSpPr>
-          <p:cNvPr id="19" name="TextBox 18"/>
+          <p:cNvPr id="21" name="TextBox 20"/>
           <p:cNvSpPr txBox="1"/>
           <p:nvPr/>
         </p:nvSpPr>
@@ -7941,7 +8029,51 @@
       </p:sp>
       <p:sp>
         <p:nvSpPr>
-          <p:cNvPr id="10" name="Rounded Rectangle 9"/>
+          <p:cNvPr id="10" name="Rectangle 9"/>
+          <p:cNvSpPr/>
+          <p:nvPr/>
+        </p:nvSpPr>
+        <p:spPr>
+          <a:xfrm>
+            <a:off x="8357261" y="3122858"/>
+            <a:ext cx="1246590" cy="301752"/>
+          </a:xfrm>
+          <a:prstGeom prst="rect">
+            <a:avLst/>
+          </a:prstGeom>
+          <a:solidFill>
+            <a:srgbClr val="FFFFFF"/>
+          </a:solidFill>
+          <a:ln>
+            <a:noFill/>
+          </a:ln>
+          <a:effectLst/>
+        </p:spPr>
+        <p:style>
+          <a:lnRef idx="1">
+            <a:schemeClr val="accent1"/>
+          </a:lnRef>
+          <a:fillRef idx="3">
+            <a:schemeClr val="accent1"/>
+          </a:fillRef>
+          <a:effectRef idx="2">
+            <a:schemeClr val="accent1"/>
+          </a:effectRef>
+          <a:fontRef idx="minor">
+            <a:schemeClr val="lt1"/>
+          </a:fontRef>
+        </p:style>
+        <p:txBody>
+          <a:bodyPr rtlCol="0" anchor="ctr" lIns="0" rIns="0" tIns="0" bIns="0"/>
+          <a:lstStyle/>
+          <a:p>
+            <a:pPr algn="ctr"/>
+          </a:p>
+        </p:txBody>
+      </p:sp>
+      <p:sp>
+        <p:nvSpPr>
+          <p:cNvPr id="11" name="Rounded Rectangle 10"/>
           <p:cNvSpPr/>
           <p:nvPr/>
         </p:nvSpPr>
@@ -7998,7 +8130,7 @@
       </p:sp>
       <p:sp>
         <p:nvSpPr>
-          <p:cNvPr id="11" name="Rounded Rectangle 10"/>
+          <p:cNvPr id="12" name="Rounded Rectangle 11"/>
           <p:cNvSpPr/>
           <p:nvPr/>
         </p:nvSpPr>
@@ -8044,7 +8176,51 @@
       </p:sp>
       <p:sp>
         <p:nvSpPr>
-          <p:cNvPr id="12" name="Rounded Rectangle 11"/>
+          <p:cNvPr id="13" name="Rectangle 12"/>
+          <p:cNvSpPr/>
+          <p:nvPr/>
+        </p:nvSpPr>
+        <p:spPr>
+          <a:xfrm>
+            <a:off x="8357261" y="4804989"/>
+            <a:ext cx="2726996" cy="301752"/>
+          </a:xfrm>
+          <a:prstGeom prst="rect">
+            <a:avLst/>
+          </a:prstGeom>
+          <a:solidFill>
+            <a:srgbClr val="FFFFFF"/>
+          </a:solidFill>
+          <a:ln>
+            <a:noFill/>
+          </a:ln>
+          <a:effectLst/>
+        </p:spPr>
+        <p:style>
+          <a:lnRef idx="1">
+            <a:schemeClr val="accent1"/>
+          </a:lnRef>
+          <a:fillRef idx="3">
+            <a:schemeClr val="accent1"/>
+          </a:fillRef>
+          <a:effectRef idx="2">
+            <a:schemeClr val="accent1"/>
+          </a:effectRef>
+          <a:fontRef idx="minor">
+            <a:schemeClr val="lt1"/>
+          </a:fontRef>
+        </p:style>
+        <p:txBody>
+          <a:bodyPr rtlCol="0" anchor="ctr" lIns="0" rIns="0" tIns="0" bIns="0"/>
+          <a:lstStyle/>
+          <a:p>
+            <a:pPr algn="ctr"/>
+          </a:p>
+        </p:txBody>
+      </p:sp>
+      <p:sp>
+        <p:nvSpPr>
+          <p:cNvPr id="14" name="Rounded Rectangle 13"/>
           <p:cNvSpPr/>
           <p:nvPr/>
         </p:nvSpPr>
@@ -8101,7 +8277,7 @@
       </p:sp>
       <p:sp>
         <p:nvSpPr>
-          <p:cNvPr id="13" name="TextBox 12"/>
+          <p:cNvPr id="15" name="TextBox 14"/>
           <p:cNvSpPr txBox="1"/>
           <p:nvPr/>
         </p:nvSpPr>
@@ -8142,7 +8318,7 @@
       </p:sp>
       <p:sp>
         <p:nvSpPr>
-          <p:cNvPr id="14" name="Rounded Rectangle 13"/>
+          <p:cNvPr id="16" name="Rounded Rectangle 15"/>
           <p:cNvSpPr/>
           <p:nvPr/>
         </p:nvSpPr>
@@ -8188,7 +8364,7 @@
       </p:sp>
       <p:sp>
         <p:nvSpPr>
-          <p:cNvPr id="15" name="TextBox 14"/>
+          <p:cNvPr id="17" name="TextBox 16"/>
           <p:cNvSpPr txBox="1"/>
           <p:nvPr/>
         </p:nvSpPr>
@@ -8229,7 +8405,7 @@
       </p:sp>
       <p:sp>
         <p:nvSpPr>
-          <p:cNvPr id="16" name="Rounded Rectangle 15"/>
+          <p:cNvPr id="18" name="Rounded Rectangle 17"/>
           <p:cNvSpPr/>
           <p:nvPr/>
         </p:nvSpPr>
@@ -8275,7 +8451,7 @@
       </p:sp>
       <p:sp>
         <p:nvSpPr>
-          <p:cNvPr id="17" name="TextBox 16"/>
+          <p:cNvPr id="19" name="TextBox 18"/>
           <p:cNvSpPr txBox="1"/>
           <p:nvPr/>
         </p:nvSpPr>
@@ -8316,7 +8492,7 @@
       </p:sp>
       <p:sp>
         <p:nvSpPr>
-          <p:cNvPr id="18" name="Rounded Rectangle 17"/>
+          <p:cNvPr id="20" name="Rounded Rectangle 19"/>
           <p:cNvSpPr/>
           <p:nvPr/>
         </p:nvSpPr>
@@ -8362,7 +8538,7 @@
       </p:sp>
       <p:sp>
         <p:nvSpPr>
-          <p:cNvPr id="19" name="TextBox 18"/>
+          <p:cNvPr id="21" name="TextBox 20"/>
           <p:cNvSpPr txBox="1"/>
           <p:nvPr/>
         </p:nvSpPr>
@@ -8745,7 +8921,51 @@
       </p:pic>
       <p:sp>
         <p:nvSpPr>
-          <p:cNvPr id="9" name="Rounded Rectangle 8"/>
+          <p:cNvPr id="9" name="Rectangle 8"/>
+          <p:cNvSpPr/>
+          <p:nvPr/>
+        </p:nvSpPr>
+        <p:spPr>
+          <a:xfrm>
+            <a:off x="8437289" y="594725"/>
+            <a:ext cx="2711989" cy="472379"/>
+          </a:xfrm>
+          <a:prstGeom prst="rect">
+            <a:avLst/>
+          </a:prstGeom>
+          <a:solidFill>
+            <a:srgbClr val="F7F8FA"/>
+          </a:solidFill>
+          <a:ln>
+            <a:noFill/>
+          </a:ln>
+          <a:effectLst/>
+        </p:spPr>
+        <p:style>
+          <a:lnRef idx="1">
+            <a:schemeClr val="accent1"/>
+          </a:lnRef>
+          <a:fillRef idx="3">
+            <a:schemeClr val="accent1"/>
+          </a:fillRef>
+          <a:effectRef idx="2">
+            <a:schemeClr val="accent1"/>
+          </a:effectRef>
+          <a:fontRef idx="minor">
+            <a:schemeClr val="lt1"/>
+          </a:fontRef>
+        </p:style>
+        <p:txBody>
+          <a:bodyPr rtlCol="0" anchor="ctr" lIns="0" rIns="0" tIns="0" bIns="0"/>
+          <a:lstStyle/>
+          <a:p>
+            <a:pPr algn="ctr"/>
+          </a:p>
+        </p:txBody>
+      </p:sp>
+      <p:sp>
+        <p:nvSpPr>
+          <p:cNvPr id="10" name="Rounded Rectangle 9"/>
           <p:cNvSpPr/>
           <p:nvPr/>
         </p:nvSpPr>
@@ -8791,7 +9011,7 @@
       </p:sp>
       <p:sp>
         <p:nvSpPr>
-          <p:cNvPr id="10" name="Rounded Rectangle 9"/>
+          <p:cNvPr id="11" name="Rounded Rectangle 10"/>
           <p:cNvSpPr/>
           <p:nvPr/>
         </p:nvSpPr>
@@ -8880,7 +9100,7 @@
         </p:nvSpPr>
         <p:spPr>
           <a:xfrm>
-            <a:off x="685800" y="502920"/>
+            <a:off x="685800" y="685800"/>
             <a:ext cx="7315200" cy="368300"/>
           </a:xfrm>
           <a:prstGeom prst="rect">
@@ -8921,7 +9141,7 @@
         </p:nvSpPr>
         <p:spPr>
           <a:xfrm>
-            <a:off x="685800" y="886968"/>
+            <a:off x="685800" y="1069848"/>
             <a:ext cx="10058400" cy="552450"/>
           </a:xfrm>
           <a:prstGeom prst="rect">
@@ -8962,7 +9182,7 @@
         </p:nvSpPr>
         <p:spPr>
           <a:xfrm>
-            <a:off x="902970" y="2029967"/>
+            <a:off x="902970" y="2212848"/>
             <a:ext cx="22860" cy="3108959"/>
           </a:xfrm>
           <a:prstGeom prst="rect">
@@ -9006,7 +9226,7 @@
         </p:nvSpPr>
         <p:spPr>
           <a:xfrm>
-            <a:off x="6675120" y="1874519"/>
+            <a:off x="6675120" y="2057400"/>
             <a:ext cx="45720" cy="1147571"/>
           </a:xfrm>
           <a:prstGeom prst="rect">
@@ -9050,7 +9270,7 @@
         </p:nvSpPr>
         <p:spPr>
           <a:xfrm>
-            <a:off x="1417320" y="2715768"/>
+            <a:off x="1417320" y="2898648"/>
             <a:ext cx="5074920" cy="313055"/>
           </a:xfrm>
           <a:prstGeom prst="rect">
@@ -9091,7 +9311,7 @@
         </p:nvSpPr>
         <p:spPr>
           <a:xfrm>
-            <a:off x="685800" y="1801368"/>
+            <a:off x="685800" y="1984248"/>
             <a:ext cx="457200" cy="457200"/>
           </a:xfrm>
           <a:prstGeom prst="roundRect">
@@ -9148,7 +9368,7 @@
         </p:nvSpPr>
         <p:spPr>
           <a:xfrm>
-            <a:off x="1417320" y="1819656"/>
+            <a:off x="1417320" y="2002536"/>
             <a:ext cx="2743200" cy="313055"/>
           </a:xfrm>
           <a:prstGeom prst="rect">
@@ -9189,7 +9409,7 @@
         </p:nvSpPr>
         <p:spPr>
           <a:xfrm>
-            <a:off x="1417320" y="2194560"/>
+            <a:off x="1417320" y="2377440"/>
             <a:ext cx="5074920" cy="515620"/>
           </a:xfrm>
           <a:prstGeom prst="rect">
@@ -9230,7 +9450,7 @@
         </p:nvSpPr>
         <p:spPr>
           <a:xfrm>
-            <a:off x="6949440" y="1837943"/>
+            <a:off x="6949440" y="2020824"/>
             <a:ext cx="4556455" cy="405130"/>
           </a:xfrm>
           <a:prstGeom prst="rect">
@@ -9271,7 +9491,7 @@
         </p:nvSpPr>
         <p:spPr>
           <a:xfrm>
-            <a:off x="6949440" y="2267712"/>
+            <a:off x="6949440" y="2450591"/>
             <a:ext cx="4556455" cy="662940"/>
           </a:xfrm>
           <a:prstGeom prst="rect">
@@ -9330,8 +9550,8 @@
         </p:nvSpPr>
         <p:spPr>
           <a:xfrm>
-            <a:off x="6675120" y="3429000"/>
-            <a:ext cx="45720" cy="1147571"/>
+            <a:off x="6675120" y="3611879"/>
+            <a:ext cx="45720" cy="1147572"/>
           </a:xfrm>
           <a:prstGeom prst="rect">
             <a:avLst/>
@@ -9374,7 +9594,7 @@
         </p:nvSpPr>
         <p:spPr>
           <a:xfrm>
-            <a:off x="1417320" y="4270248"/>
+            <a:off x="1417320" y="4453127"/>
             <a:ext cx="5074920" cy="313055"/>
           </a:xfrm>
           <a:prstGeom prst="rect">
@@ -9415,7 +9635,7 @@
         </p:nvSpPr>
         <p:spPr>
           <a:xfrm>
-            <a:off x="685800" y="3355848"/>
+            <a:off x="685800" y="3538727"/>
             <a:ext cx="457200" cy="457200"/>
           </a:xfrm>
           <a:prstGeom prst="roundRect">
@@ -9472,7 +9692,7 @@
         </p:nvSpPr>
         <p:spPr>
           <a:xfrm>
-            <a:off x="1417320" y="3374136"/>
+            <a:off x="1417320" y="3557015"/>
             <a:ext cx="2743200" cy="313055"/>
           </a:xfrm>
           <a:prstGeom prst="rect">
@@ -9513,7 +9733,7 @@
         </p:nvSpPr>
         <p:spPr>
           <a:xfrm>
-            <a:off x="1417320" y="3749039"/>
+            <a:off x="1417320" y="3931920"/>
             <a:ext cx="5074920" cy="515620"/>
           </a:xfrm>
           <a:prstGeom prst="rect">
@@ -9554,7 +9774,7 @@
         </p:nvSpPr>
         <p:spPr>
           <a:xfrm>
-            <a:off x="6949440" y="3392424"/>
+            <a:off x="6949440" y="3575303"/>
             <a:ext cx="4556455" cy="405130"/>
           </a:xfrm>
           <a:prstGeom prst="rect">
@@ -9595,7 +9815,7 @@
         </p:nvSpPr>
         <p:spPr>
           <a:xfrm>
-            <a:off x="6949440" y="3822191"/>
+            <a:off x="6949440" y="4005072"/>
             <a:ext cx="4556455" cy="662940"/>
           </a:xfrm>
           <a:prstGeom prst="rect">
@@ -9654,7 +9874,7 @@
         </p:nvSpPr>
         <p:spPr>
           <a:xfrm>
-            <a:off x="6675120" y="4983479"/>
+            <a:off x="6675120" y="5166359"/>
             <a:ext cx="45720" cy="1147572"/>
           </a:xfrm>
           <a:prstGeom prst="rect">
@@ -9698,7 +9918,7 @@
         </p:nvSpPr>
         <p:spPr>
           <a:xfrm>
-            <a:off x="1417320" y="5824727"/>
+            <a:off x="1417320" y="6007608"/>
             <a:ext cx="5074920" cy="313055"/>
           </a:xfrm>
           <a:prstGeom prst="rect">
@@ -9739,7 +9959,7 @@
         </p:nvSpPr>
         <p:spPr>
           <a:xfrm>
-            <a:off x="685800" y="4910327"/>
+            <a:off x="685800" y="5093207"/>
             <a:ext cx="457200" cy="457200"/>
           </a:xfrm>
           <a:prstGeom prst="roundRect">
@@ -9796,7 +10016,7 @@
         </p:nvSpPr>
         <p:spPr>
           <a:xfrm>
-            <a:off x="1417320" y="4928616"/>
+            <a:off x="1417320" y="5111496"/>
             <a:ext cx="2743200" cy="313055"/>
           </a:xfrm>
           <a:prstGeom prst="rect">
@@ -9837,7 +10057,7 @@
         </p:nvSpPr>
         <p:spPr>
           <a:xfrm>
-            <a:off x="1417320" y="5303520"/>
+            <a:off x="1417320" y="5486400"/>
             <a:ext cx="5074920" cy="515620"/>
           </a:xfrm>
           <a:prstGeom prst="rect">
@@ -9878,7 +10098,7 @@
         </p:nvSpPr>
         <p:spPr>
           <a:xfrm>
-            <a:off x="6949440" y="4946903"/>
+            <a:off x="6949440" y="5129783"/>
             <a:ext cx="4556455" cy="405130"/>
           </a:xfrm>
           <a:prstGeom prst="rect">
@@ -9919,7 +10139,7 @@
         </p:nvSpPr>
         <p:spPr>
           <a:xfrm>
-            <a:off x="6949440" y="5376672"/>
+            <a:off x="6949440" y="5559552"/>
             <a:ext cx="4556455" cy="662940"/>
           </a:xfrm>
           <a:prstGeom prst="rect">
@@ -10004,7 +10224,7 @@
         </p:nvSpPr>
         <p:spPr>
           <a:xfrm>
-            <a:off x="685800" y="502920"/>
+            <a:off x="685800" y="685800"/>
             <a:ext cx="7315200" cy="368300"/>
           </a:xfrm>
           <a:prstGeom prst="rect">
@@ -10045,7 +10265,7 @@
         </p:nvSpPr>
         <p:spPr>
           <a:xfrm>
-            <a:off x="685800" y="886968"/>
+            <a:off x="685800" y="1069848"/>
             <a:ext cx="10058400" cy="552450"/>
           </a:xfrm>
           <a:prstGeom prst="rect">
@@ -10086,7 +10306,7 @@
         </p:nvSpPr>
         <p:spPr>
           <a:xfrm>
-            <a:off x="902970" y="2029967"/>
+            <a:off x="902970" y="2212848"/>
             <a:ext cx="22860" cy="3108959"/>
           </a:xfrm>
           <a:prstGeom prst="rect">
@@ -10130,7 +10350,7 @@
         </p:nvSpPr>
         <p:spPr>
           <a:xfrm>
-            <a:off x="6675120" y="1874519"/>
+            <a:off x="6675120" y="2057400"/>
             <a:ext cx="45720" cy="1147571"/>
           </a:xfrm>
           <a:prstGeom prst="rect">
@@ -10174,7 +10394,7 @@
         </p:nvSpPr>
         <p:spPr>
           <a:xfrm>
-            <a:off x="1417320" y="2715768"/>
+            <a:off x="1417320" y="2898648"/>
             <a:ext cx="5074920" cy="313055"/>
           </a:xfrm>
           <a:prstGeom prst="rect">
@@ -10215,7 +10435,7 @@
         </p:nvSpPr>
         <p:spPr>
           <a:xfrm>
-            <a:off x="685800" y="1801368"/>
+            <a:off x="685800" y="1984248"/>
             <a:ext cx="457200" cy="457200"/>
           </a:xfrm>
           <a:prstGeom prst="roundRect">
@@ -10272,7 +10492,7 @@
         </p:nvSpPr>
         <p:spPr>
           <a:xfrm>
-            <a:off x="1417320" y="1819656"/>
+            <a:off x="1417320" y="2002536"/>
             <a:ext cx="2743200" cy="313055"/>
           </a:xfrm>
           <a:prstGeom prst="rect">
@@ -10313,7 +10533,7 @@
         </p:nvSpPr>
         <p:spPr>
           <a:xfrm>
-            <a:off x="1417320" y="2194560"/>
+            <a:off x="1417320" y="2377440"/>
             <a:ext cx="5074920" cy="515620"/>
           </a:xfrm>
           <a:prstGeom prst="rect">
@@ -10354,7 +10574,7 @@
         </p:nvSpPr>
         <p:spPr>
           <a:xfrm>
-            <a:off x="6949440" y="1837943"/>
+            <a:off x="6949440" y="2020824"/>
             <a:ext cx="4556455" cy="405130"/>
           </a:xfrm>
           <a:prstGeom prst="rect">
@@ -10395,7 +10615,7 @@
         </p:nvSpPr>
         <p:spPr>
           <a:xfrm>
-            <a:off x="6949440" y="2267712"/>
+            <a:off x="6949440" y="2450591"/>
             <a:ext cx="4556455" cy="662940"/>
           </a:xfrm>
           <a:prstGeom prst="rect">
@@ -10454,8 +10674,8 @@
         </p:nvSpPr>
         <p:spPr>
           <a:xfrm>
-            <a:off x="6675120" y="3429000"/>
-            <a:ext cx="45720" cy="1147571"/>
+            <a:off x="6675120" y="3611879"/>
+            <a:ext cx="45720" cy="1147572"/>
           </a:xfrm>
           <a:prstGeom prst="rect">
             <a:avLst/>
@@ -10498,7 +10718,7 @@
         </p:nvSpPr>
         <p:spPr>
           <a:xfrm>
-            <a:off x="685800" y="3355848"/>
+            <a:off x="685800" y="3538727"/>
             <a:ext cx="457200" cy="457200"/>
           </a:xfrm>
           <a:prstGeom prst="roundRect">
@@ -10555,7 +10775,7 @@
         </p:nvSpPr>
         <p:spPr>
           <a:xfrm>
-            <a:off x="1417320" y="3374136"/>
+            <a:off x="1417320" y="3557015"/>
             <a:ext cx="2743200" cy="313055"/>
           </a:xfrm>
           <a:prstGeom prst="rect">
@@ -10596,7 +10816,7 @@
         </p:nvSpPr>
         <p:spPr>
           <a:xfrm>
-            <a:off x="1417320" y="3749039"/>
+            <a:off x="1417320" y="3931920"/>
             <a:ext cx="5074920" cy="515620"/>
           </a:xfrm>
           <a:prstGeom prst="rect">
@@ -10637,7 +10857,7 @@
         </p:nvSpPr>
         <p:spPr>
           <a:xfrm>
-            <a:off x="6949440" y="3392424"/>
+            <a:off x="6949440" y="3575303"/>
             <a:ext cx="4556455" cy="405130"/>
           </a:xfrm>
           <a:prstGeom prst="rect">
@@ -10678,7 +10898,7 @@
         </p:nvSpPr>
         <p:spPr>
           <a:xfrm>
-            <a:off x="6949440" y="3822191"/>
+            <a:off x="6949440" y="4005072"/>
             <a:ext cx="4556455" cy="662940"/>
           </a:xfrm>
           <a:prstGeom prst="rect">
@@ -10737,7 +10957,7 @@
         </p:nvSpPr>
         <p:spPr>
           <a:xfrm>
-            <a:off x="6675120" y="4983479"/>
+            <a:off x="6675120" y="5166359"/>
             <a:ext cx="45720" cy="1147572"/>
           </a:xfrm>
           <a:prstGeom prst="rect">
@@ -10781,7 +11001,7 @@
         </p:nvSpPr>
         <p:spPr>
           <a:xfrm>
-            <a:off x="1417320" y="5824727"/>
+            <a:off x="1417320" y="6007608"/>
             <a:ext cx="5074920" cy="313055"/>
           </a:xfrm>
           <a:prstGeom prst="rect">
@@ -10822,7 +11042,7 @@
         </p:nvSpPr>
         <p:spPr>
           <a:xfrm>
-            <a:off x="685800" y="4910327"/>
+            <a:off x="685800" y="5093207"/>
             <a:ext cx="457200" cy="457200"/>
           </a:xfrm>
           <a:prstGeom prst="roundRect">
@@ -10879,7 +11099,7 @@
         </p:nvSpPr>
         <p:spPr>
           <a:xfrm>
-            <a:off x="1417320" y="4928616"/>
+            <a:off x="1417320" y="5111496"/>
             <a:ext cx="2743200" cy="313055"/>
           </a:xfrm>
           <a:prstGeom prst="rect">
@@ -10920,7 +11140,7 @@
         </p:nvSpPr>
         <p:spPr>
           <a:xfrm>
-            <a:off x="1417320" y="5303520"/>
+            <a:off x="1417320" y="5486400"/>
             <a:ext cx="5074920" cy="515620"/>
           </a:xfrm>
           <a:prstGeom prst="rect">
@@ -10961,7 +11181,7 @@
         </p:nvSpPr>
         <p:spPr>
           <a:xfrm>
-            <a:off x="6949440" y="4946903"/>
+            <a:off x="6949440" y="5129783"/>
             <a:ext cx="4556455" cy="405130"/>
           </a:xfrm>
           <a:prstGeom prst="rect">
@@ -11002,7 +11222,7 @@
         </p:nvSpPr>
         <p:spPr>
           <a:xfrm>
-            <a:off x="6949440" y="5376672"/>
+            <a:off x="6949440" y="5559552"/>
             <a:ext cx="4556455" cy="662940"/>
           </a:xfrm>
           <a:prstGeom prst="rect">

--- a/docs/ピッチ/Overlai_本選ピッチ.pptx
+++ b/docs/ピッチ/Overlai_本選ピッチ.pptx
@@ -8842,7 +8842,7 @@
                 <a:ea typeface="Noto Sans JP"/>
                 <a:cs typeface="Noto Sans JP"/>
               </a:rPr>
-              <a:t>どれから、どう塗ればいいか迷わない</a:t>
+              <a:t>どれから、どう塗ればいいかの目安がわかる</a:t>
             </a:r>
           </a:p>
         </p:txBody>

--- a/docs/ピッチ/Overlai_本選ピッチ.pptx
+++ b/docs/ピッチ/Overlai_本選ピッチ.pptx
@@ -5511,7 +5511,7 @@
                 <a:ea typeface="Noto Sans JP"/>
                 <a:cs typeface="Noto Sans JP"/>
               </a:rPr>
-              <a:t>実機を試す</a:t>
+              <a:t>スマホで試せる</a:t>
             </a:r>
           </a:p>
         </p:txBody>

--- a/docs/ピッチ/Overlai_本選ピッチ.pptx
+++ b/docs/ピッチ/Overlai_本選ピッチ.pptx
@@ -5511,7 +5511,7 @@
                 <a:ea typeface="Noto Sans JP"/>
                 <a:cs typeface="Noto Sans JP"/>
               </a:rPr>
-              <a:t>スマホで試せる</a:t>
+              <a:t>スマホで試す</a:t>
             </a:r>
           </a:p>
         </p:txBody>

--- a/docs/ピッチ/Overlai_本選ピッチ.pptx
+++ b/docs/ピッチ/Overlai_本選ピッチ.pptx
@@ -5511,7 +5511,7 @@
                 <a:ea typeface="Noto Sans JP"/>
                 <a:cs typeface="Noto Sans JP"/>
               </a:rPr>
-              <a:t>スマホで試す</a:t>
+              <a:t>ぜひお試しください</a:t>
             </a:r>
           </a:p>
         </p:txBody>

--- a/docs/ピッチ/Overlai_本選ピッチ.pptx
+++ b/docs/ピッチ/Overlai_本選ピッチ.pptx
@@ -5705,7 +5705,7 @@
         </p:blipFill>
         <p:spPr>
           <a:xfrm>
-            <a:off x="9681251" y="4343400"/>
+            <a:off x="8138160" y="4343400"/>
             <a:ext cx="2098963" cy="2514600"/>
           </a:xfrm>
           <a:prstGeom prst="rect">

--- a/docs/ピッチ/Overlai_本選ピッチ.pptx
+++ b/docs/ピッチ/Overlai_本選ピッチ.pptx
@@ -5681,7 +5681,7 @@
         </p:blipFill>
         <p:spPr>
           <a:xfrm>
-            <a:off x="411480" y="2331720"/>
+            <a:off x="1183025" y="2331720"/>
             <a:ext cx="7772400" cy="3886200"/>
           </a:xfrm>
           <a:prstGeom prst="rect">
@@ -5705,7 +5705,7 @@
         </p:blipFill>
         <p:spPr>
           <a:xfrm>
-            <a:off x="8138160" y="4343400"/>
+            <a:off x="8909705" y="4343400"/>
             <a:ext cx="2098963" cy="2514600"/>
           </a:xfrm>
           <a:prstGeom prst="rect">
@@ -5721,7 +5721,7 @@
         </p:nvSpPr>
         <p:spPr>
           <a:xfrm>
-            <a:off x="875537" y="3522726"/>
+            <a:off x="1647083" y="3522726"/>
             <a:ext cx="6766560" cy="589279"/>
           </a:xfrm>
           <a:prstGeom prst="rect">
@@ -5762,7 +5762,7 @@
         </p:nvSpPr>
         <p:spPr>
           <a:xfrm>
-            <a:off x="875537" y="4309110"/>
+            <a:off x="1647083" y="4309110"/>
             <a:ext cx="6766560" cy="589279"/>
           </a:xfrm>
           <a:prstGeom prst="rect">

--- a/docs/ピッチ/Overlai_本選ピッチ.pptx
+++ b/docs/ピッチ/Overlai_本選ピッチ.pptx
@@ -6966,7 +6966,7 @@
                 <a:ea typeface="Noto Sans JP"/>
                 <a:cs typeface="Noto Sans JP"/>
               </a:rPr>
-              <a:t>成分がかぶっていれば知らせる</a:t>
+              <a:t>働きがかぶっていれば知らせる</a:t>
             </a:r>
           </a:p>
         </p:txBody>
@@ -6979,12 +6979,12 @@
         </p:nvSpPr>
         <p:spPr>
           <a:xfrm>
-            <a:off x="8247116" y="466344"/>
-            <a:ext cx="3021034" cy="5925312"/>
+            <a:off x="8252053" y="466344"/>
+            <a:ext cx="3016097" cy="5925312"/>
           </a:xfrm>
           <a:prstGeom prst="roundRect">
             <a:avLst>
-              <a:gd name="adj" fmla="val 6658"/>
+              <a:gd name="adj" fmla="val 6669"/>
             </a:avLst>
           </a:prstGeom>
           <a:solidFill>
@@ -7021,7 +7021,7 @@
       </p:sp>
       <p:pic>
         <p:nvPicPr>
-          <p:cNvPr id="8" name="Picture 7" descr="yellow-real.png"/>
+          <p:cNvPr id="8" name="Picture 7" descr="yellow-home.png"/>
           <p:cNvPicPr>
             <a:picLocks noChangeAspect="1"/>
           </p:cNvPicPr>
@@ -7035,8 +7035,8 @@
         </p:blipFill>
         <p:spPr>
           <a:xfrm>
-            <a:off x="8329412" y="548640"/>
-            <a:ext cx="2856442" cy="5760720"/>
+            <a:off x="8334349" y="548640"/>
+            <a:ext cx="2851505" cy="5760720"/>
           </a:xfrm>
           <a:prstGeom prst="rect">
             <a:avLst/>
@@ -7051,12 +7051,12 @@
         </p:nvSpPr>
         <p:spPr>
           <a:xfrm>
-            <a:off x="8472234" y="3503889"/>
-            <a:ext cx="828368" cy="247710"/>
+            <a:off x="8448409" y="3279221"/>
+            <a:ext cx="1767933" cy="518464"/>
           </a:xfrm>
           <a:prstGeom prst="roundRect">
             <a:avLst>
-              <a:gd name="adj" fmla="val 22148"/>
+              <a:gd name="adj" fmla="val 10582"/>
             </a:avLst>
           </a:prstGeom>
           <a:noFill/>
@@ -7097,8 +7097,8 @@
         </p:nvSpPr>
         <p:spPr>
           <a:xfrm>
-            <a:off x="8444802" y="3174705"/>
-            <a:ext cx="1429512" cy="301752"/>
+            <a:off x="8420977" y="2950037"/>
+            <a:ext cx="1795365" cy="301752"/>
           </a:xfrm>
           <a:prstGeom prst="rect">
             <a:avLst/>
@@ -7141,8 +7141,8 @@
         </p:nvSpPr>
         <p:spPr>
           <a:xfrm>
-            <a:off x="8444802" y="3174705"/>
-            <a:ext cx="1402080" cy="301752"/>
+            <a:off x="8420977" y="2950037"/>
+            <a:ext cx="995679" cy="301752"/>
           </a:xfrm>
           <a:prstGeom prst="roundRect">
             <a:avLst>
@@ -7185,7 +7185,7 @@
                 <a:ea typeface="Noto Sans JP"/>
                 <a:cs typeface="Noto Sans JP"/>
               </a:rPr>
-              <a:t>重複する成分</a:t>
+              <a:t>店の商品</a:t>
             </a:r>
           </a:p>
         </p:txBody>
@@ -7198,12 +7198,12 @@
         </p:nvSpPr>
         <p:spPr>
           <a:xfrm>
-            <a:off x="8429388" y="4408322"/>
-            <a:ext cx="2656491" cy="702807"/>
+            <a:off x="8448409" y="4350715"/>
+            <a:ext cx="2623385" cy="892911"/>
           </a:xfrm>
           <a:prstGeom prst="roundRect">
             <a:avLst>
-              <a:gd name="adj" fmla="val 7806"/>
+              <a:gd name="adj" fmla="val 6144"/>
             </a:avLst>
           </a:prstGeom>
           <a:noFill/>
@@ -7244,8 +7244,8 @@
         </p:nvSpPr>
         <p:spPr>
           <a:xfrm>
-            <a:off x="8401956" y="4079138"/>
-            <a:ext cx="2683923" cy="301752"/>
+            <a:off x="8420977" y="4021531"/>
+            <a:ext cx="2650817" cy="301752"/>
           </a:xfrm>
           <a:prstGeom prst="rect">
             <a:avLst/>
@@ -7288,7 +7288,7 @@
         </p:nvSpPr>
         <p:spPr>
           <a:xfrm>
-            <a:off x="8401956" y="4079138"/>
+            <a:off x="8420977" y="4021531"/>
             <a:ext cx="792480" cy="301752"/>
           </a:xfrm>
           <a:prstGeom prst="roundRect">
@@ -7917,12 +7917,12 @@
         </p:nvSpPr>
         <p:spPr>
           <a:xfrm>
-            <a:off x="8200801" y="466344"/>
-            <a:ext cx="3067349" cy="5925312"/>
+            <a:off x="8176151" y="466344"/>
+            <a:ext cx="3091999" cy="5925312"/>
           </a:xfrm>
           <a:prstGeom prst="roundRect">
             <a:avLst>
-              <a:gd name="adj" fmla="val 6558"/>
+              <a:gd name="adj" fmla="val 6506"/>
             </a:avLst>
           </a:prstGeom>
           <a:solidFill>
@@ -7959,7 +7959,7 @@
       </p:sp>
       <p:pic>
         <p:nvPicPr>
-          <p:cNvPr id="8" name="Picture 7" descr="red-real.png"/>
+          <p:cNvPr id="8" name="Picture 7" descr="red-home.png"/>
           <p:cNvPicPr>
             <a:picLocks noChangeAspect="1"/>
           </p:cNvPicPr>
@@ -7973,8 +7973,8 @@
         </p:blipFill>
         <p:spPr>
           <a:xfrm>
-            <a:off x="8283097" y="548640"/>
-            <a:ext cx="2902757" cy="5760720"/>
+            <a:off x="8258447" y="548640"/>
+            <a:ext cx="2927407" cy="5760720"/>
           </a:xfrm>
           <a:prstGeom prst="rect">
             <a:avLst/>
@@ -7989,12 +7989,12 @@
         </p:nvSpPr>
         <p:spPr>
           <a:xfrm>
-            <a:off x="8384693" y="3452042"/>
-            <a:ext cx="1219158" cy="253471"/>
+            <a:off x="8375543" y="2996946"/>
+            <a:ext cx="2693215" cy="823782"/>
           </a:xfrm>
           <a:prstGeom prst="roundRect">
             <a:avLst>
-              <a:gd name="adj" fmla="val 21645"/>
+              <a:gd name="adj" fmla="val 6660"/>
             </a:avLst>
           </a:prstGeom>
           <a:noFill/>
@@ -8035,8 +8035,8 @@
         </p:nvSpPr>
         <p:spPr>
           <a:xfrm>
-            <a:off x="8357261" y="3122858"/>
-            <a:ext cx="1246590" cy="301752"/>
+            <a:off x="8348111" y="2667762"/>
+            <a:ext cx="2720647" cy="301752"/>
           </a:xfrm>
           <a:prstGeom prst="rect">
             <a:avLst/>
@@ -8079,7 +8079,7 @@
         </p:nvSpPr>
         <p:spPr>
           <a:xfrm>
-            <a:off x="8357261" y="3122858"/>
+            <a:off x="8348111" y="2667762"/>
             <a:ext cx="995679" cy="301752"/>
           </a:xfrm>
           <a:prstGeom prst="roundRect">
@@ -8136,12 +8136,12 @@
         </p:nvSpPr>
         <p:spPr>
           <a:xfrm>
-            <a:off x="8384693" y="5134173"/>
-            <a:ext cx="2699564" cy="541507"/>
+            <a:off x="8375543" y="4367997"/>
+            <a:ext cx="2693215" cy="979322"/>
           </a:xfrm>
           <a:prstGeom prst="roundRect">
             <a:avLst>
-              <a:gd name="adj" fmla="val 10131"/>
+              <a:gd name="adj" fmla="val 5602"/>
             </a:avLst>
           </a:prstGeom>
           <a:noFill/>
@@ -8182,8 +8182,8 @@
         </p:nvSpPr>
         <p:spPr>
           <a:xfrm>
-            <a:off x="8357261" y="4804989"/>
-            <a:ext cx="2726996" cy="301752"/>
+            <a:off x="8348111" y="4038813"/>
+            <a:ext cx="2720647" cy="301752"/>
           </a:xfrm>
           <a:prstGeom prst="rect">
             <a:avLst/>
@@ -8226,7 +8226,7 @@
         </p:nvSpPr>
         <p:spPr>
           <a:xfrm>
-            <a:off x="8357261" y="4804989"/>
+            <a:off x="8348111" y="4038813"/>
             <a:ext cx="792480" cy="301752"/>
           </a:xfrm>
           <a:prstGeom prst="roundRect">
